--- a/docs/test/stress/e2e-outputs/development_case13_mullae_dev_basic.pptx
+++ b/docs/test/stress/e2e-outputs/development_case13_mullae_dev_basic.pptx
@@ -5230,7 +5230,7 @@
                 <a:ea typeface="Pretendard" pitchFamily="34" charset="-122"/>
                 <a:cs typeface="Pretendard" pitchFamily="34" charset="-120"/>
               </a:rPr>
-              <a:t>건축물 개요 및 물리 스펙</a:t>
+              <a:t>대지 및 신축 개발 여력 분석</a:t>
             </a:r>
             <a:endParaRPr lang="en-US" sz="1100" dirty="0"/>
           </a:p>
@@ -5272,7 +5272,7 @@
                 <a:ea typeface="Pretendard" pitchFamily="34" charset="-122"/>
                 <a:cs typeface="Pretendard" pitchFamily="34" charset="-120"/>
               </a:rPr>
-              <a:t>{"ok"</a:t>
+              <a:t>대지면적</a:t>
             </a:r>
             <a:endParaRPr lang="en-US" sz="1400" dirty="0"/>
           </a:p>
@@ -5314,7 +5314,7 @@
                 <a:ea typeface="Pretendard" pitchFamily="34" charset="-122"/>
                 <a:cs typeface="Pretendard" pitchFamily="34" charset="-120"/>
               </a:rPr>
-              <a:t>true,"mocked":true,"extractedFields":{"area_signal":"역삼","asset_type":"오피스빌딩","price_band":"300억","size_signal":"3000평(약 9917.4㎡)"},"extractedFacts":{"region":"역삼","exactAddressCandidate":"역삼동 742-1","assetType":"오피스빌딩","priceText":"300억","sizeText":"3000평(약 9917.4㎡)","currentUse":"오피스","currentUseSignal":"근린생활시설","leaseSignal":"임대중","vacancySignal":"공실없음","tenantNames":"쿠팡","네이버","unitRentTexts":"301호: 1500만","sellerMotivationText":"자산 효율화","brokerNotes":"초역세권 매물"},"detectedSensitiveFields":"exact_address","tenant_name","ambiguousFields":,"warnings":,"areaSignal":"역삼","assetType":"오피스빌딩","priceBand":"300억","sizeSignal":"3000평(약 9917.4㎡)","dealType":"매각","buildingName":"역삼 센트럴타워","exactAddress":"역삼동 742-1","totalFloorArea":9917.3,"buildYear":2015,"currentUseSignal":"근린생활시설","vacancySignal":"공실 없음","fitSummary":"초역세권 근생 빌딩으로 시행/사옥 매입에 최적화","cautionSummary":"주요 임차 업종 만기 조율 필요","hiddenFields":"exact_address","seller_motivation","confidence":{"areaSignal":"confirmed","assetType":"confirmed","priceBand":"ai_hypothesis","fitSummary":"ai_hypothesis"},"missingData":"sizeSignal","boundaryNote":"본 자료는 실거래 통계 기반 참고치입니다.","buyerType":"법인 사옥형","budgetRange":{"min":50,"max":80,"display":"50억~80억"},"preferredRegions":"강남","성수","assetTypes":"꼬마빌딩","사옥용","purchasePurpose":"사옥용 매입","mustHave":"초역세권","주차","niceToHave":"테라스","루프탑","riskTolerance":"medium","financingNote":"자본금 50% 준비","missingQuestions":"구체적인 입주 시기가 언제인가요?","선호하는 수익률이 있나요?","privacyNotes":"연락처 비공개","fitReasons":"매수자 예산(50-80억)에 부합하는 매물입니다.","요청하신 성수/강남 권역에 해당합니다.","cautionReasons":"요청한 용도와 달리 명도 협의가 다소 필요합니다.","recommendedNextAction":"현장 답사 제안","kakaoMessage":"안녕하세요! 요청하신 조건에 부합하는 추천 매물이 있어 안내해 드립니다. 확인해보시고 피드백 부탁드립니다.","title":"강남 역삼역 초역세권 오피스 사옥용 빌딩 매각","shortSummary":"역삼역 도보 5분 거리의 준신축급 대형 오피스빌딩입니다.","dealPoints":"초역세권","사옥 최적","cautionPoints":"명도 조율 필요","hiddenInfoNotice":"보증금 및 지번은 인가 후 확인 가능","gateMessage":"G1 등급 등록이 필요합니다.","kakaoText":"강남 역삼역 오피스 빌딩 매각 안내입니다.","exactUnitCandidate":"101호","floor":"1층","areaSqmText":"150㎡","spaceType":"office","depositText":"5000만","monthlyRentText":"400만","maintenanceFeeText":"50만","availableFromText":"즉시입주","leaseTermMonthsText":"24","incentivesText":"렌트프리 2개월","restrictions":,"landlordIdentity":"김성수","currentTenant":"스타트업","vacancyReason":"이전 확장","rentNegotiation":"협의 가능","region":"성수동","areaSqm":150,"deposit":5000,"monthlyRent":400,"maintenanceFee":50,"availableFrom":"즉시입주","leaseTermMonths":24,"incentives":{"rentFreeMonths":2,"interiorSupport":"일부 인테리어 지원","freeRentDetail":"렌트프리 2개월 지원"},"shortSummaryLease":"성수역 도보 5분 거리 1층 리테일 상가 매물입니다."}</a:t>
+              <a:t>1000㎡</a:t>
             </a:r>
             <a:endParaRPr lang="en-US" sz="1400" dirty="0"/>
           </a:p>
@@ -5323,6 +5323,327 @@
       <p:sp>
         <p:nvSpPr>
           <p:cNvPr id="8" name="Shape 6"/>
+          <p:cNvSpPr/>
+          <p:nvPr/>
+        </p:nvSpPr>
+        <p:spPr>
+          <a:xfrm>
+            <a:off x="566928" y="2048256"/>
+            <a:ext cx="6858000" cy="0"/>
+          </a:xfrm>
+          <a:prstGeom prst="line">
+            <a:avLst/>
+          </a:prstGeom>
+          <a:noFill/>
+          <a:ln w="3810">
+            <a:solidFill>
+              <a:srgbClr val="CBD5E1"/>
+            </a:solidFill>
+            <a:prstDash val="solid"/>
+          </a:ln>
+        </p:spPr>
+      </p:sp>
+      <p:sp>
+        <p:nvSpPr>
+          <p:cNvPr id="9" name="Text 7"/>
+          <p:cNvSpPr/>
+          <p:nvPr/>
+        </p:nvSpPr>
+        <p:spPr>
+          <a:xfrm>
+            <a:off x="566928" y="2048256"/>
+            <a:ext cx="2606040" cy="402336"/>
+          </a:xfrm>
+          <a:prstGeom prst="rect">
+            <a:avLst/>
+          </a:prstGeom>
+          <a:noFill/>
+          <a:ln/>
+        </p:spPr>
+        <p:txBody>
+          <a:bodyPr wrap="square" lIns="0" tIns="0" rIns="0" bIns="0" rtlCol="0" anchor="ctr"/>
+          <a:lstStyle/>
+          <a:p>
+            <a:pPr indent="0" marL="0">
+              <a:lnSpc>
+                <a:spcPct val="120000"/>
+              </a:lnSpc>
+              <a:buNone/>
+            </a:pPr>
+            <a:r>
+              <a:rPr lang="en-US" sz="1400" dirty="0">
+                <a:solidFill>
+                  <a:srgbClr val="64748B"/>
+                </a:solidFill>
+                <a:latin typeface="Pretendard" pitchFamily="34" charset="0"/>
+                <a:ea typeface="Pretendard" pitchFamily="34" charset="-122"/>
+                <a:cs typeface="Pretendard" pitchFamily="34" charset="-120"/>
+              </a:rPr>
+              <a:t>용도지역</a:t>
+            </a:r>
+            <a:endParaRPr lang="en-US" sz="1400" dirty="0"/>
+          </a:p>
+        </p:txBody>
+      </p:sp>
+      <p:sp>
+        <p:nvSpPr>
+          <p:cNvPr id="10" name="Text 8"/>
+          <p:cNvSpPr/>
+          <p:nvPr/>
+        </p:nvSpPr>
+        <p:spPr>
+          <a:xfrm>
+            <a:off x="3172968" y="2048256"/>
+            <a:ext cx="4251960" cy="402336"/>
+          </a:xfrm>
+          <a:prstGeom prst="rect">
+            <a:avLst/>
+          </a:prstGeom>
+          <a:noFill/>
+          <a:ln/>
+        </p:spPr>
+        <p:txBody>
+          <a:bodyPr wrap="square" lIns="0" tIns="0" rIns="0" bIns="0" rtlCol="0" anchor="ctr"/>
+          <a:lstStyle/>
+          <a:p>
+            <a:pPr indent="0" marL="0">
+              <a:lnSpc>
+                <a:spcPct val="120000"/>
+              </a:lnSpc>
+              <a:buNone/>
+            </a:pPr>
+            <a:r>
+              <a:rPr lang="en-US" sz="1400" b="1" dirty="0">
+                <a:solidFill>
+                  <a:srgbClr val="0F172A"/>
+                </a:solidFill>
+                <a:latin typeface="Pretendard" pitchFamily="34" charset="0"/>
+                <a:ea typeface="Pretendard" pitchFamily="34" charset="-122"/>
+                <a:cs typeface="Pretendard" pitchFamily="34" charset="-120"/>
+              </a:rPr>
+              <a:t>일반상업지역</a:t>
+            </a:r>
+            <a:endParaRPr lang="en-US" sz="1400" dirty="0"/>
+          </a:p>
+        </p:txBody>
+      </p:sp>
+      <p:sp>
+        <p:nvSpPr>
+          <p:cNvPr id="11" name="Shape 9"/>
+          <p:cNvSpPr/>
+          <p:nvPr/>
+        </p:nvSpPr>
+        <p:spPr>
+          <a:xfrm>
+            <a:off x="566928" y="2450592"/>
+            <a:ext cx="6858000" cy="0"/>
+          </a:xfrm>
+          <a:prstGeom prst="line">
+            <a:avLst/>
+          </a:prstGeom>
+          <a:noFill/>
+          <a:ln w="3810">
+            <a:solidFill>
+              <a:srgbClr val="CBD5E1"/>
+            </a:solidFill>
+            <a:prstDash val="solid"/>
+          </a:ln>
+        </p:spPr>
+      </p:sp>
+      <p:sp>
+        <p:nvSpPr>
+          <p:cNvPr id="12" name="Text 10"/>
+          <p:cNvSpPr/>
+          <p:nvPr/>
+        </p:nvSpPr>
+        <p:spPr>
+          <a:xfrm>
+            <a:off x="566928" y="2450592"/>
+            <a:ext cx="2606040" cy="402336"/>
+          </a:xfrm>
+          <a:prstGeom prst="rect">
+            <a:avLst/>
+          </a:prstGeom>
+          <a:noFill/>
+          <a:ln/>
+        </p:spPr>
+        <p:txBody>
+          <a:bodyPr wrap="square" lIns="0" tIns="0" rIns="0" bIns="0" rtlCol="0" anchor="ctr"/>
+          <a:lstStyle/>
+          <a:p>
+            <a:pPr indent="0" marL="0">
+              <a:lnSpc>
+                <a:spcPct val="120000"/>
+              </a:lnSpc>
+              <a:buNone/>
+            </a:pPr>
+            <a:r>
+              <a:rPr lang="en-US" sz="1400" dirty="0">
+                <a:solidFill>
+                  <a:srgbClr val="64748B"/>
+                </a:solidFill>
+                <a:latin typeface="Pretendard" pitchFamily="34" charset="0"/>
+                <a:ea typeface="Pretendard" pitchFamily="34" charset="-122"/>
+                <a:cs typeface="Pretendard" pitchFamily="34" charset="-120"/>
+              </a:rPr>
+              <a:t>명도 상태</a:t>
+            </a:r>
+            <a:endParaRPr lang="en-US" sz="1400" dirty="0"/>
+          </a:p>
+        </p:txBody>
+      </p:sp>
+      <p:sp>
+        <p:nvSpPr>
+          <p:cNvPr id="13" name="Text 11"/>
+          <p:cNvSpPr/>
+          <p:nvPr/>
+        </p:nvSpPr>
+        <p:spPr>
+          <a:xfrm>
+            <a:off x="3172968" y="2450592"/>
+            <a:ext cx="4251960" cy="402336"/>
+          </a:xfrm>
+          <a:prstGeom prst="rect">
+            <a:avLst/>
+          </a:prstGeom>
+          <a:noFill/>
+          <a:ln/>
+        </p:spPr>
+        <p:txBody>
+          <a:bodyPr wrap="square" lIns="0" tIns="0" rIns="0" bIns="0" rtlCol="0" anchor="ctr"/>
+          <a:lstStyle/>
+          <a:p>
+            <a:pPr indent="0" marL="0">
+              <a:lnSpc>
+                <a:spcPct val="120000"/>
+              </a:lnSpc>
+              <a:buNone/>
+            </a:pPr>
+            <a:r>
+              <a:rPr lang="en-US" sz="1400" b="1" dirty="0">
+                <a:solidFill>
+                  <a:srgbClr val="0F172A"/>
+                </a:solidFill>
+                <a:latin typeface="Pretendard" pitchFamily="34" charset="0"/>
+                <a:ea typeface="Pretendard" pitchFamily="34" charset="-122"/>
+                <a:cs typeface="Pretendard" pitchFamily="34" charset="-120"/>
+              </a:rPr>
+              <a:t>기존 주요 임차 업종 현황</a:t>
+            </a:r>
+            <a:endParaRPr lang="en-US" sz="1400" dirty="0"/>
+          </a:p>
+        </p:txBody>
+      </p:sp>
+      <p:sp>
+        <p:nvSpPr>
+          <p:cNvPr id="14" name="Shape 12"/>
+          <p:cNvSpPr/>
+          <p:nvPr/>
+        </p:nvSpPr>
+        <p:spPr>
+          <a:xfrm>
+            <a:off x="566928" y="2852928"/>
+            <a:ext cx="6858000" cy="0"/>
+          </a:xfrm>
+          <a:prstGeom prst="line">
+            <a:avLst/>
+          </a:prstGeom>
+          <a:noFill/>
+          <a:ln w="3810">
+            <a:solidFill>
+              <a:srgbClr val="CBD5E1"/>
+            </a:solidFill>
+            <a:prstDash val="solid"/>
+          </a:ln>
+        </p:spPr>
+      </p:sp>
+      <p:sp>
+        <p:nvSpPr>
+          <p:cNvPr id="15" name="Text 13"/>
+          <p:cNvSpPr/>
+          <p:nvPr/>
+        </p:nvSpPr>
+        <p:spPr>
+          <a:xfrm>
+            <a:off x="566928" y="2852928"/>
+            <a:ext cx="2606040" cy="402336"/>
+          </a:xfrm>
+          <a:prstGeom prst="rect">
+            <a:avLst/>
+          </a:prstGeom>
+          <a:noFill/>
+          <a:ln/>
+        </p:spPr>
+        <p:txBody>
+          <a:bodyPr wrap="square" lIns="0" tIns="0" rIns="0" bIns="0" rtlCol="0" anchor="ctr"/>
+          <a:lstStyle/>
+          <a:p>
+            <a:pPr indent="0" marL="0">
+              <a:lnSpc>
+                <a:spcPct val="120000"/>
+              </a:lnSpc>
+              <a:buNone/>
+            </a:pPr>
+            <a:r>
+              <a:rPr lang="en-US" sz="1400" dirty="0">
+                <a:solidFill>
+                  <a:srgbClr val="64748B"/>
+                </a:solidFill>
+                <a:latin typeface="Pretendard" pitchFamily="34" charset="0"/>
+                <a:ea typeface="Pretendard" pitchFamily="34" charset="-122"/>
+                <a:cs typeface="Pretendard" pitchFamily="34" charset="-120"/>
+              </a:rPr>
+              <a:t>개발 잠재력</a:t>
+            </a:r>
+            <a:endParaRPr lang="en-US" sz="1400" dirty="0"/>
+          </a:p>
+        </p:txBody>
+      </p:sp>
+      <p:sp>
+        <p:nvSpPr>
+          <p:cNvPr id="16" name="Text 14"/>
+          <p:cNvSpPr/>
+          <p:nvPr/>
+        </p:nvSpPr>
+        <p:spPr>
+          <a:xfrm>
+            <a:off x="3172968" y="2852928"/>
+            <a:ext cx="4251960" cy="402336"/>
+          </a:xfrm>
+          <a:prstGeom prst="rect">
+            <a:avLst/>
+          </a:prstGeom>
+          <a:noFill/>
+          <a:ln/>
+        </p:spPr>
+        <p:txBody>
+          <a:bodyPr wrap="square" lIns="0" tIns="0" rIns="0" bIns="0" rtlCol="0" anchor="ctr"/>
+          <a:lstStyle/>
+          <a:p>
+            <a:pPr indent="0" marL="0">
+              <a:lnSpc>
+                <a:spcPct val="120000"/>
+              </a:lnSpc>
+              <a:buNone/>
+            </a:pPr>
+            <a:r>
+              <a:rPr lang="en-US" sz="1400" b="1" dirty="0">
+                <a:solidFill>
+                  <a:srgbClr val="0F172A"/>
+                </a:solidFill>
+                <a:latin typeface="Pretendard" pitchFamily="34" charset="0"/>
+                <a:ea typeface="Pretendard" pitchFamily="34" charset="-122"/>
+                <a:cs typeface="Pretendard" pitchFamily="34" charset="-120"/>
+              </a:rPr>
+              <a:t>신축 시 연면적 증대 가능</a:t>
+            </a:r>
+            <a:endParaRPr lang="en-US" sz="1400" dirty="0"/>
+          </a:p>
+        </p:txBody>
+      </p:sp>
+      <p:sp>
+        <p:nvSpPr>
+          <p:cNvPr id="17" name="Shape 15"/>
           <p:cNvSpPr/>
           <p:nvPr/>
         </p:nvSpPr>
@@ -5345,18 +5666,18 @@
       </p:sp>
       <p:sp>
         <p:nvSpPr>
-          <p:cNvPr id="9" name="Shape 7"/>
+          <p:cNvPr id="18" name="Shape 16"/>
           <p:cNvSpPr/>
           <p:nvPr/>
         </p:nvSpPr>
         <p:spPr>
           <a:xfrm>
             <a:off x="7784287" y="1645920"/>
-            <a:ext cx="3840480" cy="2103120"/>
+            <a:ext cx="3840480" cy="1645920"/>
           </a:xfrm>
           <a:prstGeom prst="roundRect">
             <a:avLst>
-              <a:gd name="adj" fmla="val 2609"/>
+              <a:gd name="adj" fmla="val 3333"/>
             </a:avLst>
           </a:prstGeom>
           <a:solidFill>
@@ -5367,14 +5688,14 @@
       </p:sp>
       <p:sp>
         <p:nvSpPr>
-          <p:cNvPr id="10" name="Shape 8"/>
+          <p:cNvPr id="19" name="Shape 17"/>
           <p:cNvSpPr/>
           <p:nvPr/>
         </p:nvSpPr>
         <p:spPr>
           <a:xfrm>
             <a:off x="7784287" y="1700784"/>
-            <a:ext cx="36576" cy="1993392"/>
+            <a:ext cx="36576" cy="1536192"/>
           </a:xfrm>
           <a:prstGeom prst="rect">
             <a:avLst/>
@@ -5387,7 +5708,7 @@
       </p:sp>
       <p:sp>
         <p:nvSpPr>
-          <p:cNvPr id="11" name="Text 9"/>
+          <p:cNvPr id="20" name="Text 18"/>
           <p:cNvSpPr/>
           <p:nvPr/>
         </p:nvSpPr>
@@ -5409,31 +5730,20 @@
             <a:pPr indent="0" marL="0">
               <a:buNone/>
             </a:pPr>
-            <a:r>
-              <a:rPr lang="en-US" sz="1050" b="1" dirty="0">
-                <a:solidFill>
-                  <a:srgbClr val="1D4ED8"/>
-                </a:solidFill>
-                <a:latin typeface="Pretendard" pitchFamily="34" charset="0"/>
-                <a:ea typeface="Pretendard" pitchFamily="34" charset="-122"/>
-                <a:cs typeface="Pretendard" pitchFamily="34" charset="-120"/>
-              </a:rPr>
-              <a:t>토지 및 건물 분석 포인트</a:t>
-            </a:r>
             <a:endParaRPr lang="en-US" sz="1050" dirty="0"/>
           </a:p>
         </p:txBody>
       </p:sp>
       <p:sp>
         <p:nvSpPr>
-          <p:cNvPr id="12" name="Text 10"/>
+          <p:cNvPr id="21" name="Text 19"/>
           <p:cNvSpPr/>
           <p:nvPr/>
         </p:nvSpPr>
         <p:spPr>
           <a:xfrm>
             <a:off x="7967167" y="1975104"/>
-            <a:ext cx="3511296" cy="1700784"/>
+            <a:ext cx="3511296" cy="1243584"/>
           </a:xfrm>
           <a:prstGeom prst="rect">
             <a:avLst/>
@@ -5445,12 +5755,11 @@
           <a:bodyPr wrap="square" lIns="0" tIns="0" rIns="0" bIns="0" rtlCol="0" anchor="t"/>
           <a:lstStyle/>
           <a:p>
-            <a:pPr marL="342900" indent="-342900">
+            <a:pPr indent="0" marL="0">
               <a:lnSpc>
                 <a:spcPct val="120000"/>
               </a:lnSpc>
-              <a:buSzPct val="100000"/>
-              <a:buChar char="•"/>
+              <a:buNone/>
             </a:pPr>
             <a:r>
               <a:rPr lang="en-US" sz="930" dirty="0">
@@ -5461,223 +5770,15 @@
                 <a:ea typeface="Pretendard" pitchFamily="34" charset="-122"/>
                 <a:cs typeface="Pretendard" pitchFamily="34" charset="-120"/>
               </a:rPr>
-              <a:t>서초대로 25m 메인 도로변 우수한 가시성 확보</a:t>
+              <a:t>건축물대장 및 토지이용계획확인서 기준 | 신축 설계 검토 필요</a:t>
             </a:r>
             <a:endParaRPr lang="en-US" sz="930" dirty="0"/>
           </a:p>
-          <a:p>
-            <a:pPr marL="342900" indent="-342900">
-              <a:lnSpc>
-                <a:spcPct val="120000"/>
-              </a:lnSpc>
-              <a:buSzPct val="100000"/>
-              <a:buChar char="•"/>
-            </a:pPr>
-            <a:r>
-              <a:rPr lang="en-US" sz="930" dirty="0">
-                <a:solidFill>
-                  <a:srgbClr val="0F172A"/>
-                </a:solidFill>
-                <a:latin typeface="Pretendard" pitchFamily="34" charset="0"/>
-                <a:ea typeface="Pretendard" pitchFamily="34" charset="-122"/>
-                <a:cs typeface="Pretendard" pitchFamily="34" charset="-120"/>
-              </a:rPr>
-              <a:t>제3종일반주거지역 법정 용적률 완비 자산</a:t>
-            </a:r>
-            <a:endParaRPr lang="en-US" sz="930" dirty="0"/>
-          </a:p>
-          <a:p>
-            <a:pPr marL="342900" indent="-342900">
-              <a:lnSpc>
-                <a:spcPct val="120000"/>
-              </a:lnSpc>
-              <a:buSzPct val="100000"/>
-              <a:buChar char="•"/>
-            </a:pPr>
-            <a:r>
-              <a:rPr lang="en-US" sz="930" dirty="0">
-                <a:solidFill>
-                  <a:srgbClr val="0F172A"/>
-                </a:solidFill>
-                <a:latin typeface="Pretendard" pitchFamily="34" charset="0"/>
-                <a:ea typeface="Pretendard" pitchFamily="34" charset="-122"/>
-                <a:cs typeface="Pretendard" pitchFamily="34" charset="-120"/>
-              </a:rPr>
-              <a:t>침대용 승강기 완비로 병의원 입점 최적화 구조</a:t>
-            </a:r>
-            <a:endParaRPr lang="en-US" sz="930" dirty="0"/>
-          </a:p>
-        </p:txBody>
-      </p:sp>
-      <p:sp>
-        <p:nvSpPr>
-          <p:cNvPr id="13" name="Shape 11"/>
-          <p:cNvSpPr/>
-          <p:nvPr/>
-        </p:nvSpPr>
-        <p:spPr>
-          <a:xfrm>
-            <a:off x="7784287" y="3977640"/>
-            <a:ext cx="3840480" cy="2148840"/>
-          </a:xfrm>
-          <a:prstGeom prst="roundRect">
-            <a:avLst>
-              <a:gd name="adj" fmla="val 2553"/>
-            </a:avLst>
-          </a:prstGeom>
-          <a:solidFill>
-            <a:srgbClr val="DBEAFE"/>
-          </a:solidFill>
-          <a:ln/>
-        </p:spPr>
-      </p:sp>
-      <p:sp>
-        <p:nvSpPr>
-          <p:cNvPr id="14" name="Shape 12"/>
-          <p:cNvSpPr/>
-          <p:nvPr/>
-        </p:nvSpPr>
-        <p:spPr>
-          <a:xfrm>
-            <a:off x="7784287" y="4032504"/>
-            <a:ext cx="36576" cy="2039112"/>
-          </a:xfrm>
-          <a:prstGeom prst="rect">
-            <a:avLst/>
-          </a:prstGeom>
-          <a:solidFill>
-            <a:srgbClr val="1D4ED8"/>
-          </a:solidFill>
-          <a:ln/>
-        </p:spPr>
-      </p:sp>
-      <p:sp>
-        <p:nvSpPr>
-          <p:cNvPr id="15" name="Text 13"/>
-          <p:cNvSpPr/>
-          <p:nvPr/>
-        </p:nvSpPr>
-        <p:spPr>
-          <a:xfrm>
-            <a:off x="7967167" y="4087368"/>
-            <a:ext cx="3511296" cy="201168"/>
-          </a:xfrm>
-          <a:prstGeom prst="rect">
-            <a:avLst/>
-          </a:prstGeom>
-          <a:noFill/>
-          <a:ln/>
-        </p:spPr>
-        <p:txBody>
-          <a:bodyPr wrap="square" lIns="0" tIns="0" rIns="0" bIns="0" rtlCol="0" anchor="ctr"/>
-          <a:lstStyle/>
-          <a:p>
-            <a:pPr indent="0" marL="0">
-              <a:buNone/>
-            </a:pPr>
-            <a:r>
-              <a:rPr lang="en-US" sz="1050" b="1" dirty="0">
-                <a:solidFill>
-                  <a:srgbClr val="1D4ED8"/>
-                </a:solidFill>
-                <a:latin typeface="Pretendard" pitchFamily="34" charset="0"/>
-                <a:ea typeface="Pretendard" pitchFamily="34" charset="-122"/>
-                <a:cs typeface="Pretendard" pitchFamily="34" charset="-120"/>
-              </a:rPr>
-              <a:t>물건 실사 및 관리 상태</a:t>
-            </a:r>
-            <a:endParaRPr lang="en-US" sz="1050" dirty="0"/>
-          </a:p>
-        </p:txBody>
-      </p:sp>
-      <p:sp>
-        <p:nvSpPr>
-          <p:cNvPr id="16" name="Text 14"/>
-          <p:cNvSpPr/>
-          <p:nvPr/>
-        </p:nvSpPr>
-        <p:spPr>
-          <a:xfrm>
-            <a:off x="7967167" y="4306824"/>
-            <a:ext cx="3511296" cy="1746504"/>
-          </a:xfrm>
-          <a:prstGeom prst="rect">
-            <a:avLst/>
-          </a:prstGeom>
-          <a:noFill/>
-          <a:ln/>
-        </p:spPr>
-        <p:txBody>
-          <a:bodyPr wrap="square" lIns="0" tIns="0" rIns="0" bIns="0" rtlCol="0" anchor="t"/>
-          <a:lstStyle/>
-          <a:p>
-            <a:pPr marL="342900" indent="-342900">
-              <a:lnSpc>
-                <a:spcPct val="120000"/>
-              </a:lnSpc>
-              <a:buSzPct val="100000"/>
-              <a:buChar char="•"/>
-            </a:pPr>
-            <a:r>
-              <a:rPr lang="en-US" sz="930" dirty="0">
-                <a:solidFill>
-                  <a:srgbClr val="0F172A"/>
-                </a:solidFill>
-                <a:latin typeface="Pretendard" pitchFamily="34" charset="0"/>
-                <a:ea typeface="Pretendard" pitchFamily="34" charset="-122"/>
-                <a:cs typeface="Pretendard" pitchFamily="34" charset="-120"/>
-              </a:rPr>
-              <a:t>2017년 준공 신축급 상태로 누수·균열 0건</a:t>
-            </a:r>
-            <a:endParaRPr lang="en-US" sz="930" dirty="0"/>
-          </a:p>
-          <a:p>
-            <a:pPr marL="342900" indent="-342900">
-              <a:lnSpc>
-                <a:spcPct val="120000"/>
-              </a:lnSpc>
-              <a:buSzPct val="100000"/>
-              <a:buChar char="•"/>
-            </a:pPr>
-            <a:r>
-              <a:rPr lang="en-US" sz="930" dirty="0">
-                <a:solidFill>
-                  <a:srgbClr val="0F172A"/>
-                </a:solidFill>
-                <a:latin typeface="Pretendard" pitchFamily="34" charset="0"/>
-                <a:ea typeface="Pretendard" pitchFamily="34" charset="-122"/>
-                <a:cs typeface="Pretendard" pitchFamily="34" charset="-120"/>
-              </a:rPr>
-              <a:t>단독 법인 소유로 권리관계 투명</a:t>
-            </a:r>
-            <a:endParaRPr lang="en-US" sz="930" dirty="0"/>
-          </a:p>
-          <a:p>
-            <a:pPr marL="342900" indent="-342900">
-              <a:lnSpc>
-                <a:spcPct val="120000"/>
-              </a:lnSpc>
-              <a:buSzPct val="100000"/>
-              <a:buChar char="•"/>
-            </a:pPr>
-            <a:r>
-              <a:rPr lang="en-US" sz="930" dirty="0">
-                <a:solidFill>
-                  <a:srgbClr val="0F172A"/>
-                </a:solidFill>
-                <a:latin typeface="Pretendard" pitchFamily="34" charset="0"/>
-                <a:ea typeface="Pretendard" pitchFamily="34" charset="-122"/>
-                <a:cs typeface="Pretendard" pitchFamily="34" charset="-120"/>
-              </a:rPr>
-              <a:t>1금융권 담보대출 85억 원 승계 적격</a:t>
-            </a:r>
-            <a:endParaRPr lang="en-US" sz="930" dirty="0"/>
-          </a:p>
-        </p:txBody>
-      </p:sp>
-      <p:sp>
-        <p:nvSpPr>
-          <p:cNvPr id="17" name="Text 15"/>
+        </p:txBody>
+      </p:sp>
+      <p:sp>
+        <p:nvSpPr>
+          <p:cNvPr id="22" name="Text 20"/>
           <p:cNvSpPr/>
           <p:nvPr/>
         </p:nvSpPr>
@@ -5716,7 +5817,7 @@
       </p:sp>
       <p:sp>
         <p:nvSpPr>
-          <p:cNvPr id="18" name="Shape 16"/>
+          <p:cNvPr id="23" name="Shape 21"/>
           <p:cNvSpPr/>
           <p:nvPr/>
         </p:nvSpPr>
@@ -5875,137 +5976,17 @@
         </p:nvSpPr>
         <p:spPr>
           <a:xfrm>
-            <a:off x="566928" y="1325880"/>
-            <a:ext cx="6858000" cy="237744"/>
-          </a:xfrm>
-          <a:prstGeom prst="rect">
-            <a:avLst/>
-          </a:prstGeom>
-          <a:noFill/>
-          <a:ln/>
-        </p:spPr>
-        <p:txBody>
-          <a:bodyPr wrap="square" lIns="0" tIns="0" rIns="0" bIns="0" rtlCol="0" anchor="ctr"/>
-          <a:lstStyle/>
-          <a:p>
-            <a:pPr indent="0" marL="0">
-              <a:buNone/>
-            </a:pPr>
-            <a:r>
-              <a:rPr lang="en-US" sz="1100" b="1" dirty="0">
-                <a:solidFill>
-                  <a:srgbClr val="0F172A"/>
-                </a:solidFill>
-                <a:latin typeface="Pretendard" pitchFamily="34" charset="0"/>
-                <a:ea typeface="Pretendard" pitchFamily="34" charset="-122"/>
-                <a:cs typeface="Pretendard" pitchFamily="34" charset="-120"/>
-              </a:rPr>
-              <a:t>신축 사업수지 및 개발 타당성 분석</a:t>
-            </a:r>
-            <a:endParaRPr lang="en-US" sz="1100" dirty="0"/>
-          </a:p>
-        </p:txBody>
-      </p:sp>
-      <p:sp>
-        <p:nvSpPr>
-          <p:cNvPr id="6" name="Shape 4"/>
-          <p:cNvSpPr/>
-          <p:nvPr/>
-        </p:nvSpPr>
-        <p:spPr>
-          <a:xfrm>
-            <a:off x="566928" y="1828800"/>
-            <a:ext cx="6858000" cy="2743200"/>
-          </a:xfrm>
-          <a:prstGeom prst="roundRect">
-            <a:avLst>
-              <a:gd name="adj" fmla="val 2000"/>
-            </a:avLst>
-          </a:prstGeom>
-          <a:solidFill>
-            <a:srgbClr val="DBEAFE"/>
-          </a:solidFill>
-          <a:ln/>
-        </p:spPr>
-      </p:sp>
-      <p:sp>
-        <p:nvSpPr>
-          <p:cNvPr id="7" name="Shape 5"/>
-          <p:cNvSpPr/>
-          <p:nvPr/>
-        </p:nvSpPr>
-        <p:spPr>
-          <a:xfrm>
-            <a:off x="566928" y="1883664"/>
-            <a:ext cx="36576" cy="2633472"/>
-          </a:xfrm>
-          <a:prstGeom prst="rect">
-            <a:avLst/>
-          </a:prstGeom>
-          <a:solidFill>
-            <a:srgbClr val="1D4ED8"/>
-          </a:solidFill>
-          <a:ln/>
-        </p:spPr>
-      </p:sp>
-      <p:sp>
-        <p:nvSpPr>
-          <p:cNvPr id="8" name="Text 6"/>
-          <p:cNvSpPr/>
-          <p:nvPr/>
-        </p:nvSpPr>
-        <p:spPr>
-          <a:xfrm>
-            <a:off x="749808" y="1938528"/>
-            <a:ext cx="6528816" cy="201168"/>
-          </a:xfrm>
-          <a:prstGeom prst="rect">
-            <a:avLst/>
-          </a:prstGeom>
-          <a:noFill/>
-          <a:ln/>
-        </p:spPr>
-        <p:txBody>
-          <a:bodyPr wrap="square" lIns="0" tIns="0" rIns="0" bIns="0" rtlCol="0" anchor="ctr"/>
-          <a:lstStyle/>
-          <a:p>
-            <a:pPr indent="0" marL="0">
-              <a:buNone/>
-            </a:pPr>
-            <a:r>
-              <a:rPr lang="en-US" sz="1050" b="1" dirty="0">
-                <a:solidFill>
-                  <a:srgbClr val="1D4ED8"/>
-                </a:solidFill>
-                <a:latin typeface="Pretendard" pitchFamily="34" charset="0"/>
-                <a:ea typeface="Pretendard" pitchFamily="34" charset="-122"/>
-                <a:cs typeface="Pretendard" pitchFamily="34" charset="-120"/>
-              </a:rPr>
-              <a:t>핵심 투자 가치 제안 (Value Proposition)</a:t>
-            </a:r>
-            <a:endParaRPr lang="en-US" sz="1050" dirty="0"/>
-          </a:p>
-        </p:txBody>
-      </p:sp>
-      <p:sp>
-        <p:nvSpPr>
-          <p:cNvPr id="9" name="Text 7"/>
-          <p:cNvSpPr/>
-          <p:nvPr/>
-        </p:nvSpPr>
-        <p:spPr>
-          <a:xfrm>
-            <a:off x="749808" y="2157984"/>
-            <a:ext cx="6528816" cy="2340864"/>
-          </a:xfrm>
-          <a:prstGeom prst="rect">
-            <a:avLst/>
-          </a:prstGeom>
-          <a:noFill/>
-          <a:ln/>
-        </p:spPr>
-        <p:txBody>
-          <a:bodyPr wrap="square" lIns="0" tIns="0" rIns="0" bIns="0" rtlCol="0" anchor="t"/>
+            <a:off x="566928" y="1417320"/>
+            <a:ext cx="2606040" cy="402336"/>
+          </a:xfrm>
+          <a:prstGeom prst="rect">
+            <a:avLst/>
+          </a:prstGeom>
+          <a:noFill/>
+          <a:ln/>
+        </p:spPr>
+        <p:txBody>
+          <a:bodyPr wrap="square" lIns="0" tIns="0" rIns="0" bIns="0" rtlCol="0" anchor="ctr"/>
           <a:lstStyle/>
           <a:p>
             <a:pPr indent="0" marL="0">
@@ -6015,7 +5996,49 @@
               <a:buNone/>
             </a:pPr>
             <a:r>
-              <a:rPr lang="en-US" sz="930" dirty="0">
+              <a:rPr lang="en-US" sz="1300" dirty="0">
+                <a:solidFill>
+                  <a:srgbClr val="64748B"/>
+                </a:solidFill>
+                <a:latin typeface="Pretendard" pitchFamily="34" charset="0"/>
+                <a:ea typeface="Pretendard" pitchFamily="34" charset="-122"/>
+                <a:cs typeface="Pretendard" pitchFamily="34" charset="-120"/>
+              </a:rPr>
+              <a:t>{"ok"</a:t>
+            </a:r>
+            <a:endParaRPr lang="en-US" sz="1300" dirty="0"/>
+          </a:p>
+        </p:txBody>
+      </p:sp>
+      <p:sp>
+        <p:nvSpPr>
+          <p:cNvPr id="6" name="Text 4"/>
+          <p:cNvSpPr/>
+          <p:nvPr/>
+        </p:nvSpPr>
+        <p:spPr>
+          <a:xfrm>
+            <a:off x="3172968" y="1417320"/>
+            <a:ext cx="4251960" cy="402336"/>
+          </a:xfrm>
+          <a:prstGeom prst="rect">
+            <a:avLst/>
+          </a:prstGeom>
+          <a:noFill/>
+          <a:ln/>
+        </p:spPr>
+        <p:txBody>
+          <a:bodyPr wrap="square" lIns="0" tIns="0" rIns="0" bIns="0" rtlCol="0" anchor="ctr"/>
+          <a:lstStyle/>
+          <a:p>
+            <a:pPr indent="0" marL="0">
+              <a:lnSpc>
+                <a:spcPct val="120000"/>
+              </a:lnSpc>
+              <a:buNone/>
+            </a:pPr>
+            <a:r>
+              <a:rPr lang="en-US" sz="1300" b="1" dirty="0">
                 <a:solidFill>
                   <a:srgbClr val="0F172A"/>
                 </a:solidFill>
@@ -6023,15 +6046,15 @@
                 <a:ea typeface="Pretendard" pitchFamily="34" charset="-122"/>
                 <a:cs typeface="Pretendard" pitchFamily="34" charset="-120"/>
               </a:rPr>
-              <a:t>본 자산의 대지 매입 후 신축 개발 시 총 사업비, 예상 분양 수입 및 개발 이익률을 종합 추정합니다. 신축 공사비 및 분양가 변동에 따라 최종 수익률이 달라질 수 있습니다.</a:t>
-            </a:r>
-            <a:endParaRPr lang="en-US" sz="930" dirty="0"/>
-          </a:p>
-        </p:txBody>
-      </p:sp>
-      <p:sp>
-        <p:nvSpPr>
-          <p:cNvPr id="10" name="Shape 8"/>
+              <a:t>true,"mocked":true,"extractedFields":{"area_signal":"역삼","asset_type":"오피스빌딩","price_band":"300억","size_signal":"3000평(약 9917.4㎡)"},"extractedFacts":{"region":"역삼","exactAddressCandidate":"역삼동 742-1","assetType":"오피스빌딩","priceText":"300억","sizeText":"3000평(약 9917.4㎡)","currentUse":"오피스","currentUseSignal":"근린생활시설","leaseSignal":"임대중","vacancySignal":"공실없음","tenantNames":"쿠팡","네이버","unitRentTexts":"301호: 1500만","sellerMotivationText":"자산 효율화","brokerNotes":"초역세권 매물"},"detectedSensitiveFields":"exact_address","tenant_name","ambiguousFields":,"warnings":,"areaSignal":"역삼","assetType":"오피스빌딩","priceBand":"300억","sizeSignal":"3000평(약 9917.4㎡)","dealType":"매각","buildingName":"역삼 센트럴타워","exactAddress":"역삼동 742-1","totalFloorArea":9917.3,"buildYear":2015,"currentUseSignal":"근린생활시설","vacancySignal":"공실 없음","fitSummary":"초역세권 근생 빌딩으로 시행/사옥 매입에 최적화","cautionSummary":"주요 임차 업종 만기 조율 필요","hiddenFields":"exact_address","seller_motivation","confidence":{"areaSignal":"confirmed","assetType":"confirmed","priceBand":"ai_hypothesis","fitSummary":"ai_hypothesis"},"missingData":"sizeSignal","boundaryNote":"본 자료는 실거래 통계 기반 참고치입니다.","buyerType":"법인 사옥형","budgetRange":{"min":50,"max":80,"display":"50억~80억"},"preferredRegions":"강남","성수","assetTypes":"꼬마빌딩","사옥용","purchasePurpose":"사옥용 매입","mustHave":"초역세권","주차","niceToHave":"테라스","루프탑","riskTolerance":"medium","financingNote":"자본금 50% 준비","missingQuestions":"구체적인 입주 시기가 언제인가요?","선호하는 수익률이 있나요?","privacyNotes":"연락처 비공개","fitReasons":"매수자 예산(50-80억)에 부합하는 매물입니다.","요청하신 성수/강남 권역에 해당합니다.","cautionReasons":"요청한 용도와 달리 명도 협의가 다소 필요합니다.","recommendedNextAction":"현장 답사 제안","kakaoMessage":"안녕하세요! 요청하신 조건에 부합하는 추천 매물이 있어 안내해 드립니다. 확인해보시고 피드백 부탁드립니다.","title":"강남 역삼역 초역세권 오피스 사옥용 빌딩 매각","shortSummary":"역삼역 도보 5분 거리의 준신축급 대형 오피스빌딩입니다.","dealPoints":"초역세권","사옥 최적","cautionPoints":"명도 조율 필요","hiddenInfoNotice":"보증금 및 지번은 인가 후 확인 가능","gateMessage":"G1 등급 등록이 필요합니다.","kakaoText":"강남 역삼역 오피스 빌딩 매각 안내입니다.","exactUnitCandidate":"101호","floor":"1층","areaSqmText":"150㎡","spaceType":"office","depositText":"5000만","monthlyRentText":"400만","maintenanceFeeText":"50만","availableFromText":"즉시입주","leaseTermMonthsText":"24","incentivesText":"렌트프리 2개월","restrictions":,"landlordIdentity":"김성수","currentTenant":"스타트업","vacancyReason":"이전 확장","rentNegotiation":"협의 가능","region":"성수동","areaSqm":150,"deposit":5000,"monthlyRent":400,"maintenanceFee":50,"availableFrom":"즉시입주","leaseTermMonths":24,"incentives":{"rentFreeMonths":2,"interiorSupport":"일부 인테리어 지원","freeRentDetail":"렌트프리 2개월 지원"},"shortSummaryLease":"성수역 도보 5분 거리 1층 리테일 상가 매물입니다."}</a:t>
+            </a:r>
+            <a:endParaRPr lang="en-US" sz="1300" dirty="0"/>
+          </a:p>
+        </p:txBody>
+      </p:sp>
+      <p:sp>
+        <p:nvSpPr>
+          <p:cNvPr id="7" name="Shape 5"/>
           <p:cNvSpPr/>
           <p:nvPr/>
         </p:nvSpPr>
@@ -6054,703 +6077,7 @@
       </p:sp>
       <p:sp>
         <p:nvSpPr>
-          <p:cNvPr id="11" name="Shape 9"/>
-          <p:cNvSpPr/>
-          <p:nvPr/>
-        </p:nvSpPr>
-        <p:spPr>
-          <a:xfrm>
-            <a:off x="7784287" y="1536192"/>
-            <a:ext cx="3840480" cy="1005840"/>
-          </a:xfrm>
-          <a:prstGeom prst="roundRect">
-            <a:avLst>
-              <a:gd name="adj" fmla="val 5455"/>
-            </a:avLst>
-          </a:prstGeom>
-          <a:solidFill>
-            <a:srgbClr val="F8FAFC"/>
-          </a:solidFill>
-          <a:ln w="6350">
-            <a:solidFill>
-              <a:srgbClr val="CBD5E1"/>
-            </a:solidFill>
-            <a:prstDash val="solid"/>
-          </a:ln>
-        </p:spPr>
-      </p:sp>
-      <p:sp>
-        <p:nvSpPr>
-          <p:cNvPr id="12" name="Text 10"/>
-          <p:cNvSpPr/>
-          <p:nvPr/>
-        </p:nvSpPr>
-        <p:spPr>
-          <a:xfrm>
-            <a:off x="7948879" y="1664208"/>
-            <a:ext cx="3511296" cy="201168"/>
-          </a:xfrm>
-          <a:prstGeom prst="rect">
-            <a:avLst/>
-          </a:prstGeom>
-          <a:noFill/>
-          <a:ln/>
-        </p:spPr>
-        <p:txBody>
-          <a:bodyPr wrap="square" lIns="0" tIns="0" rIns="0" bIns="0" rtlCol="0" anchor="ctr"/>
-          <a:lstStyle/>
-          <a:p>
-            <a:pPr indent="0" marL="0">
-              <a:buNone/>
-            </a:pPr>
-            <a:r>
-              <a:rPr lang="en-US" sz="950" dirty="0">
-                <a:solidFill>
-                  <a:srgbClr val="64748B"/>
-                </a:solidFill>
-                <a:latin typeface="Pretendard" pitchFamily="34" charset="0"/>
-                <a:ea typeface="Pretendard" pitchFamily="34" charset="-122"/>
-                <a:cs typeface="Pretendard" pitchFamily="34" charset="-120"/>
-              </a:rPr>
-              <a:t>토지 매입비</a:t>
-            </a:r>
-            <a:endParaRPr lang="en-US" sz="950" dirty="0"/>
-          </a:p>
-        </p:txBody>
-      </p:sp>
-      <p:sp>
-        <p:nvSpPr>
-          <p:cNvPr id="13" name="Text 11"/>
-          <p:cNvSpPr/>
-          <p:nvPr/>
-        </p:nvSpPr>
-        <p:spPr>
-          <a:xfrm>
-            <a:off x="7948879" y="1847088"/>
-            <a:ext cx="3511296" cy="402336"/>
-          </a:xfrm>
-          <a:prstGeom prst="rect">
-            <a:avLst/>
-          </a:prstGeom>
-          <a:noFill/>
-          <a:ln/>
-        </p:spPr>
-        <p:txBody>
-          <a:bodyPr wrap="square" lIns="0" tIns="0" rIns="0" bIns="0" rtlCol="0" anchor="ctr">
-            <a:normAutofit/>
-          </a:bodyPr>
-          <a:lstStyle/>
-          <a:p>
-            <a:pPr indent="0" marL="0">
-              <a:buNone/>
-            </a:pPr>
-            <a:r>
-              <a:rPr lang="en-US" sz="2500" b="1" dirty="0">
-                <a:solidFill>
-                  <a:srgbClr val="0F172A"/>
-                </a:solidFill>
-                <a:latin typeface="Pretendard" pitchFamily="34" charset="0"/>
-                <a:ea typeface="Pretendard" pitchFamily="34" charset="-122"/>
-                <a:cs typeface="Pretendard" pitchFamily="34" charset="-120"/>
-              </a:rPr>
-              <a:t>희망가 기준</a:t>
-            </a:r>
-            <a:endParaRPr lang="en-US" sz="2500" dirty="0"/>
-          </a:p>
-        </p:txBody>
-      </p:sp>
-      <p:sp>
-        <p:nvSpPr>
-          <p:cNvPr id="14" name="Text 12"/>
-          <p:cNvSpPr/>
-          <p:nvPr/>
-        </p:nvSpPr>
-        <p:spPr>
-          <a:xfrm>
-            <a:off x="7948879" y="2212848"/>
-            <a:ext cx="3511296" cy="164592"/>
-          </a:xfrm>
-          <a:prstGeom prst="rect">
-            <a:avLst/>
-          </a:prstGeom>
-          <a:noFill/>
-          <a:ln/>
-        </p:spPr>
-        <p:txBody>
-          <a:bodyPr wrap="square" lIns="0" tIns="0" rIns="0" bIns="0" rtlCol="0" anchor="ctr"/>
-          <a:lstStyle/>
-          <a:p>
-            <a:pPr indent="0" marL="0">
-              <a:buNone/>
-            </a:pPr>
-            <a:r>
-              <a:rPr lang="en-US" sz="880" dirty="0">
-                <a:solidFill>
-                  <a:srgbClr val="64748B"/>
-                </a:solidFill>
-                <a:latin typeface="Pretendard" pitchFamily="34" charset="0"/>
-                <a:ea typeface="Pretendard" pitchFamily="34" charset="-122"/>
-                <a:cs typeface="Pretendard" pitchFamily="34" charset="-120"/>
-              </a:rPr>
-              <a:t>사업비 내 비중 산출</a:t>
-            </a:r>
-            <a:endParaRPr lang="en-US" sz="880" dirty="0"/>
-          </a:p>
-        </p:txBody>
-      </p:sp>
-      <p:sp>
-        <p:nvSpPr>
-          <p:cNvPr id="15" name="Shape 13"/>
-          <p:cNvSpPr/>
-          <p:nvPr/>
-        </p:nvSpPr>
-        <p:spPr>
-          <a:xfrm>
-            <a:off x="7784287" y="2670048"/>
-            <a:ext cx="3840480" cy="1005840"/>
-          </a:xfrm>
-          <a:prstGeom prst="roundRect">
-            <a:avLst>
-              <a:gd name="adj" fmla="val 5455"/>
-            </a:avLst>
-          </a:prstGeom>
-          <a:solidFill>
-            <a:srgbClr val="F8FAFC"/>
-          </a:solidFill>
-          <a:ln w="6350">
-            <a:solidFill>
-              <a:srgbClr val="CBD5E1"/>
-            </a:solidFill>
-            <a:prstDash val="solid"/>
-          </a:ln>
-        </p:spPr>
-      </p:sp>
-      <p:sp>
-        <p:nvSpPr>
-          <p:cNvPr id="16" name="Text 14"/>
-          <p:cNvSpPr/>
-          <p:nvPr/>
-        </p:nvSpPr>
-        <p:spPr>
-          <a:xfrm>
-            <a:off x="7948879" y="2798064"/>
-            <a:ext cx="3511296" cy="201168"/>
-          </a:xfrm>
-          <a:prstGeom prst="rect">
-            <a:avLst/>
-          </a:prstGeom>
-          <a:noFill/>
-          <a:ln/>
-        </p:spPr>
-        <p:txBody>
-          <a:bodyPr wrap="square" lIns="0" tIns="0" rIns="0" bIns="0" rtlCol="0" anchor="ctr"/>
-          <a:lstStyle/>
-          <a:p>
-            <a:pPr indent="0" marL="0">
-              <a:buNone/>
-            </a:pPr>
-            <a:r>
-              <a:rPr lang="en-US" sz="950" dirty="0">
-                <a:solidFill>
-                  <a:srgbClr val="64748B"/>
-                </a:solidFill>
-                <a:latin typeface="Pretendard" pitchFamily="34" charset="0"/>
-                <a:ea typeface="Pretendard" pitchFamily="34" charset="-122"/>
-                <a:cs typeface="Pretendard" pitchFamily="34" charset="-120"/>
-              </a:rPr>
-              <a:t>추정 신축 공사비</a:t>
-            </a:r>
-            <a:endParaRPr lang="en-US" sz="950" dirty="0"/>
-          </a:p>
-        </p:txBody>
-      </p:sp>
-      <p:sp>
-        <p:nvSpPr>
-          <p:cNvPr id="17" name="Text 15"/>
-          <p:cNvSpPr/>
-          <p:nvPr/>
-        </p:nvSpPr>
-        <p:spPr>
-          <a:xfrm>
-            <a:off x="7948879" y="2980944"/>
-            <a:ext cx="3511296" cy="402336"/>
-          </a:xfrm>
-          <a:prstGeom prst="rect">
-            <a:avLst/>
-          </a:prstGeom>
-          <a:noFill/>
-          <a:ln/>
-        </p:spPr>
-        <p:txBody>
-          <a:bodyPr wrap="square" lIns="0" tIns="0" rIns="0" bIns="0" rtlCol="0" anchor="ctr">
-            <a:normAutofit/>
-          </a:bodyPr>
-          <a:lstStyle/>
-          <a:p>
-            <a:pPr indent="0" marL="0">
-              <a:buNone/>
-            </a:pPr>
-            <a:r>
-              <a:rPr lang="en-US" sz="1800" b="1" dirty="0">
-                <a:solidFill>
-                  <a:srgbClr val="0F172A"/>
-                </a:solidFill>
-                <a:latin typeface="Pretendard" pitchFamily="34" charset="0"/>
-                <a:ea typeface="Pretendard" pitchFamily="34" charset="-122"/>
-                <a:cs typeface="Pretendard" pitchFamily="34" charset="-120"/>
-              </a:rPr>
-              <a:t>평당 공사비 산정</a:t>
-            </a:r>
-            <a:endParaRPr lang="en-US" sz="1800" dirty="0"/>
-          </a:p>
-        </p:txBody>
-      </p:sp>
-      <p:sp>
-        <p:nvSpPr>
-          <p:cNvPr id="18" name="Text 16"/>
-          <p:cNvSpPr/>
-          <p:nvPr/>
-        </p:nvSpPr>
-        <p:spPr>
-          <a:xfrm>
-            <a:off x="7948879" y="3346704"/>
-            <a:ext cx="3511296" cy="164592"/>
-          </a:xfrm>
-          <a:prstGeom prst="rect">
-            <a:avLst/>
-          </a:prstGeom>
-          <a:noFill/>
-          <a:ln/>
-        </p:spPr>
-        <p:txBody>
-          <a:bodyPr wrap="square" lIns="0" tIns="0" rIns="0" bIns="0" rtlCol="0" anchor="ctr"/>
-          <a:lstStyle/>
-          <a:p>
-            <a:pPr indent="0" marL="0">
-              <a:buNone/>
-            </a:pPr>
-            <a:r>
-              <a:rPr lang="en-US" sz="880" dirty="0">
-                <a:solidFill>
-                  <a:srgbClr val="64748B"/>
-                </a:solidFill>
-                <a:latin typeface="Pretendard" pitchFamily="34" charset="0"/>
-                <a:ea typeface="Pretendard" pitchFamily="34" charset="-122"/>
-                <a:cs typeface="Pretendard" pitchFamily="34" charset="-120"/>
-              </a:rPr>
-              <a:t>신축 연면적 기준</a:t>
-            </a:r>
-            <a:endParaRPr lang="en-US" sz="880" dirty="0"/>
-          </a:p>
-        </p:txBody>
-      </p:sp>
-      <p:sp>
-        <p:nvSpPr>
-          <p:cNvPr id="19" name="Shape 17"/>
-          <p:cNvSpPr/>
-          <p:nvPr/>
-        </p:nvSpPr>
-        <p:spPr>
-          <a:xfrm>
-            <a:off x="7784287" y="3803904"/>
-            <a:ext cx="3840480" cy="1005840"/>
-          </a:xfrm>
-          <a:prstGeom prst="roundRect">
-            <a:avLst>
-              <a:gd name="adj" fmla="val 5455"/>
-            </a:avLst>
-          </a:prstGeom>
-          <a:solidFill>
-            <a:srgbClr val="F8FAFC"/>
-          </a:solidFill>
-          <a:ln w="6350">
-            <a:solidFill>
-              <a:srgbClr val="CBD5E1"/>
-            </a:solidFill>
-            <a:prstDash val="solid"/>
-          </a:ln>
-        </p:spPr>
-      </p:sp>
-      <p:sp>
-        <p:nvSpPr>
-          <p:cNvPr id="20" name="Text 18"/>
-          <p:cNvSpPr/>
-          <p:nvPr/>
-        </p:nvSpPr>
-        <p:spPr>
-          <a:xfrm>
-            <a:off x="7948879" y="3931920"/>
-            <a:ext cx="3511296" cy="201168"/>
-          </a:xfrm>
-          <a:prstGeom prst="rect">
-            <a:avLst/>
-          </a:prstGeom>
-          <a:noFill/>
-          <a:ln/>
-        </p:spPr>
-        <p:txBody>
-          <a:bodyPr wrap="square" lIns="0" tIns="0" rIns="0" bIns="0" rtlCol="0" anchor="ctr"/>
-          <a:lstStyle/>
-          <a:p>
-            <a:pPr indent="0" marL="0">
-              <a:buNone/>
-            </a:pPr>
-            <a:r>
-              <a:rPr lang="en-US" sz="950" dirty="0">
-                <a:solidFill>
-                  <a:srgbClr val="64748B"/>
-                </a:solidFill>
-                <a:latin typeface="Pretendard" pitchFamily="34" charset="0"/>
-                <a:ea typeface="Pretendard" pitchFamily="34" charset="-122"/>
-                <a:cs typeface="Pretendard" pitchFamily="34" charset="-120"/>
-              </a:rPr>
-              <a:t>예상 총 사업비</a:t>
-            </a:r>
-            <a:endParaRPr lang="en-US" sz="950" dirty="0"/>
-          </a:p>
-        </p:txBody>
-      </p:sp>
-      <p:sp>
-        <p:nvSpPr>
-          <p:cNvPr id="21" name="Text 19"/>
-          <p:cNvSpPr/>
-          <p:nvPr/>
-        </p:nvSpPr>
-        <p:spPr>
-          <a:xfrm>
-            <a:off x="7948879" y="4114800"/>
-            <a:ext cx="3511296" cy="402336"/>
-          </a:xfrm>
-          <a:prstGeom prst="rect">
-            <a:avLst/>
-          </a:prstGeom>
-          <a:noFill/>
-          <a:ln/>
-        </p:spPr>
-        <p:txBody>
-          <a:bodyPr wrap="square" lIns="0" tIns="0" rIns="0" bIns="0" rtlCol="0" anchor="ctr">
-            <a:normAutofit/>
-          </a:bodyPr>
-          <a:lstStyle/>
-          <a:p>
-            <a:pPr indent="0" marL="0">
-              <a:buNone/>
-            </a:pPr>
-            <a:r>
-              <a:rPr lang="en-US" sz="1400" b="1" dirty="0">
-                <a:solidFill>
-                  <a:srgbClr val="0F172A"/>
-                </a:solidFill>
-                <a:latin typeface="Pretendard" pitchFamily="34" charset="0"/>
-                <a:ea typeface="Pretendard" pitchFamily="34" charset="-122"/>
-                <a:cs typeface="Pretendard" pitchFamily="34" charset="-120"/>
-              </a:rPr>
-              <a:t>토지비 + 공사비 + 금융/기타</a:t>
-            </a:r>
-            <a:endParaRPr lang="en-US" sz="1400" dirty="0"/>
-          </a:p>
-        </p:txBody>
-      </p:sp>
-      <p:sp>
-        <p:nvSpPr>
-          <p:cNvPr id="22" name="Text 20"/>
-          <p:cNvSpPr/>
-          <p:nvPr/>
-        </p:nvSpPr>
-        <p:spPr>
-          <a:xfrm>
-            <a:off x="7948879" y="4480560"/>
-            <a:ext cx="3511296" cy="164592"/>
-          </a:xfrm>
-          <a:prstGeom prst="rect">
-            <a:avLst/>
-          </a:prstGeom>
-          <a:noFill/>
-          <a:ln/>
-        </p:spPr>
-        <p:txBody>
-          <a:bodyPr wrap="square" lIns="0" tIns="0" rIns="0" bIns="0" rtlCol="0" anchor="ctr"/>
-          <a:lstStyle/>
-          <a:p>
-            <a:pPr indent="0" marL="0">
-              <a:buNone/>
-            </a:pPr>
-            <a:r>
-              <a:rPr lang="en-US" sz="880" dirty="0">
-                <a:solidFill>
-                  <a:srgbClr val="64748B"/>
-                </a:solidFill>
-                <a:latin typeface="Pretendard" pitchFamily="34" charset="0"/>
-                <a:ea typeface="Pretendard" pitchFamily="34" charset="-122"/>
-                <a:cs typeface="Pretendard" pitchFamily="34" charset="-120"/>
-              </a:rPr>
-              <a:t>총 투자금</a:t>
-            </a:r>
-            <a:endParaRPr lang="en-US" sz="880" dirty="0"/>
-          </a:p>
-        </p:txBody>
-      </p:sp>
-      <p:sp>
-        <p:nvSpPr>
-          <p:cNvPr id="23" name="Shape 21"/>
-          <p:cNvSpPr/>
-          <p:nvPr/>
-        </p:nvSpPr>
-        <p:spPr>
-          <a:xfrm>
-            <a:off x="7784287" y="4937760"/>
-            <a:ext cx="3840480" cy="1005840"/>
-          </a:xfrm>
-          <a:prstGeom prst="roundRect">
-            <a:avLst>
-              <a:gd name="adj" fmla="val 5455"/>
-            </a:avLst>
-          </a:prstGeom>
-          <a:solidFill>
-            <a:srgbClr val="F8FAFC"/>
-          </a:solidFill>
-          <a:ln w="6350">
-            <a:solidFill>
-              <a:srgbClr val="CBD5E1"/>
-            </a:solidFill>
-            <a:prstDash val="solid"/>
-          </a:ln>
-        </p:spPr>
-      </p:sp>
-      <p:sp>
-        <p:nvSpPr>
-          <p:cNvPr id="24" name="Text 22"/>
-          <p:cNvSpPr/>
-          <p:nvPr/>
-        </p:nvSpPr>
-        <p:spPr>
-          <a:xfrm>
-            <a:off x="7948879" y="5065776"/>
-            <a:ext cx="3511296" cy="201168"/>
-          </a:xfrm>
-          <a:prstGeom prst="rect">
-            <a:avLst/>
-          </a:prstGeom>
-          <a:noFill/>
-          <a:ln/>
-        </p:spPr>
-        <p:txBody>
-          <a:bodyPr wrap="square" lIns="0" tIns="0" rIns="0" bIns="0" rtlCol="0" anchor="ctr"/>
-          <a:lstStyle/>
-          <a:p>
-            <a:pPr indent="0" marL="0">
-              <a:buNone/>
-            </a:pPr>
-            <a:r>
-              <a:rPr lang="en-US" sz="950" dirty="0">
-                <a:solidFill>
-                  <a:srgbClr val="64748B"/>
-                </a:solidFill>
-                <a:latin typeface="Pretendard" pitchFamily="34" charset="0"/>
-                <a:ea typeface="Pretendard" pitchFamily="34" charset="-122"/>
-                <a:cs typeface="Pretendard" pitchFamily="34" charset="-120"/>
-              </a:rPr>
-              <a:t>예상 개발 이익률</a:t>
-            </a:r>
-            <a:endParaRPr lang="en-US" sz="950" dirty="0"/>
-          </a:p>
-        </p:txBody>
-      </p:sp>
-      <p:sp>
-        <p:nvSpPr>
-          <p:cNvPr id="25" name="Text 23"/>
-          <p:cNvSpPr/>
-          <p:nvPr/>
-        </p:nvSpPr>
-        <p:spPr>
-          <a:xfrm>
-            <a:off x="7948879" y="5248656"/>
-            <a:ext cx="3511296" cy="402336"/>
-          </a:xfrm>
-          <a:prstGeom prst="rect">
-            <a:avLst/>
-          </a:prstGeom>
-          <a:noFill/>
-          <a:ln/>
-        </p:spPr>
-        <p:txBody>
-          <a:bodyPr wrap="square" lIns="0" tIns="0" rIns="0" bIns="0" rtlCol="0" anchor="ctr">
-            <a:normAutofit/>
-          </a:bodyPr>
-          <a:lstStyle/>
-          <a:p>
-            <a:pPr indent="0" marL="0">
-              <a:buNone/>
-            </a:pPr>
-            <a:r>
-              <a:rPr lang="en-US" sz="1800" b="1" dirty="0">
-                <a:solidFill>
-                  <a:srgbClr val="0F172A"/>
-                </a:solidFill>
-                <a:latin typeface="Pretendard" pitchFamily="34" charset="0"/>
-                <a:ea typeface="Pretendard" pitchFamily="34" charset="-122"/>
-                <a:cs typeface="Pretendard" pitchFamily="34" charset="-120"/>
-              </a:rPr>
-              <a:t>15% ~ 25% 수준</a:t>
-            </a:r>
-            <a:endParaRPr lang="en-US" sz="1800" dirty="0"/>
-          </a:p>
-        </p:txBody>
-      </p:sp>
-      <p:sp>
-        <p:nvSpPr>
-          <p:cNvPr id="26" name="Text 24"/>
-          <p:cNvSpPr/>
-          <p:nvPr/>
-        </p:nvSpPr>
-        <p:spPr>
-          <a:xfrm>
-            <a:off x="7948879" y="5614416"/>
-            <a:ext cx="3511296" cy="164592"/>
-          </a:xfrm>
-          <a:prstGeom prst="rect">
-            <a:avLst/>
-          </a:prstGeom>
-          <a:noFill/>
-          <a:ln/>
-        </p:spPr>
-        <p:txBody>
-          <a:bodyPr wrap="square" lIns="0" tIns="0" rIns="0" bIns="0" rtlCol="0" anchor="ctr"/>
-          <a:lstStyle/>
-          <a:p>
-            <a:pPr indent="0" marL="0">
-              <a:buNone/>
-            </a:pPr>
-            <a:r>
-              <a:rPr lang="en-US" sz="880" dirty="0">
-                <a:solidFill>
-                  <a:srgbClr val="64748B"/>
-                </a:solidFill>
-                <a:latin typeface="Pretendard" pitchFamily="34" charset="0"/>
-                <a:ea typeface="Pretendard" pitchFamily="34" charset="-122"/>
-                <a:cs typeface="Pretendard" pitchFamily="34" charset="-120"/>
-              </a:rPr>
-              <a:t>시장 상황 연동</a:t>
-            </a:r>
-            <a:endParaRPr lang="en-US" sz="880" dirty="0"/>
-          </a:p>
-        </p:txBody>
-      </p:sp>
-      <p:sp>
-        <p:nvSpPr>
-          <p:cNvPr id="27" name="Shape 25"/>
-          <p:cNvSpPr/>
-          <p:nvPr/>
-        </p:nvSpPr>
-        <p:spPr>
-          <a:xfrm>
-            <a:off x="7784287" y="6071616"/>
-            <a:ext cx="3840480" cy="1097280"/>
-          </a:xfrm>
-          <a:prstGeom prst="roundRect">
-            <a:avLst>
-              <a:gd name="adj" fmla="val 5000"/>
-            </a:avLst>
-          </a:prstGeom>
-          <a:solidFill>
-            <a:srgbClr val="DBEAFE"/>
-          </a:solidFill>
-          <a:ln/>
-        </p:spPr>
-      </p:sp>
-      <p:sp>
-        <p:nvSpPr>
-          <p:cNvPr id="28" name="Shape 26"/>
-          <p:cNvSpPr/>
-          <p:nvPr/>
-        </p:nvSpPr>
-        <p:spPr>
-          <a:xfrm>
-            <a:off x="7784287" y="6126480"/>
-            <a:ext cx="36576" cy="987552"/>
-          </a:xfrm>
-          <a:prstGeom prst="rect">
-            <a:avLst/>
-          </a:prstGeom>
-          <a:solidFill>
-            <a:srgbClr val="1D4ED8"/>
-          </a:solidFill>
-          <a:ln/>
-        </p:spPr>
-      </p:sp>
-      <p:sp>
-        <p:nvSpPr>
-          <p:cNvPr id="29" name="Text 27"/>
-          <p:cNvSpPr/>
-          <p:nvPr/>
-        </p:nvSpPr>
-        <p:spPr>
-          <a:xfrm>
-            <a:off x="7967167" y="6181344"/>
-            <a:ext cx="3511296" cy="201168"/>
-          </a:xfrm>
-          <a:prstGeom prst="rect">
-            <a:avLst/>
-          </a:prstGeom>
-          <a:noFill/>
-          <a:ln/>
-        </p:spPr>
-        <p:txBody>
-          <a:bodyPr wrap="square" lIns="0" tIns="0" rIns="0" bIns="0" rtlCol="0" anchor="ctr"/>
-          <a:lstStyle/>
-          <a:p>
-            <a:pPr indent="0" marL="0">
-              <a:buNone/>
-            </a:pPr>
-            <a:endParaRPr lang="en-US" sz="1050" dirty="0"/>
-          </a:p>
-        </p:txBody>
-      </p:sp>
-      <p:sp>
-        <p:nvSpPr>
-          <p:cNvPr id="30" name="Text 28"/>
-          <p:cNvSpPr/>
-          <p:nvPr/>
-        </p:nvSpPr>
-        <p:spPr>
-          <a:xfrm>
-            <a:off x="7967167" y="6400800"/>
-            <a:ext cx="3511296" cy="694944"/>
-          </a:xfrm>
-          <a:prstGeom prst="rect">
-            <a:avLst/>
-          </a:prstGeom>
-          <a:noFill/>
-          <a:ln/>
-        </p:spPr>
-        <p:txBody>
-          <a:bodyPr wrap="square" lIns="0" tIns="0" rIns="0" bIns="0" rtlCol="0" anchor="t"/>
-          <a:lstStyle/>
-          <a:p>
-            <a:pPr indent="0" marL="0">
-              <a:lnSpc>
-                <a:spcPct val="120000"/>
-              </a:lnSpc>
-              <a:buNone/>
-            </a:pPr>
-            <a:r>
-              <a:rPr lang="en-US" sz="930" dirty="0">
-                <a:solidFill>
-                  <a:srgbClr val="0F172A"/>
-                </a:solidFill>
-                <a:latin typeface="Pretendard" pitchFamily="34" charset="0"/>
-                <a:ea typeface="Pretendard" pitchFamily="34" charset="-122"/>
-                <a:cs typeface="Pretendard" pitchFamily="34" charset="-120"/>
-              </a:rPr>
-              <a:t>신축 공사비 및 분양가 변동에 따라 최종 수익률이 달라질 수 있습니다.</a:t>
-            </a:r>
-            <a:endParaRPr lang="en-US" sz="930" dirty="0"/>
-          </a:p>
-        </p:txBody>
-      </p:sp>
-      <p:sp>
-        <p:nvSpPr>
-          <p:cNvPr id="31" name="Text 29"/>
+          <p:cNvPr id="8" name="Text 6"/>
           <p:cNvSpPr/>
           <p:nvPr/>
         </p:nvSpPr>
@@ -6789,7 +6116,7 @@
       </p:sp>
       <p:sp>
         <p:nvSpPr>
-          <p:cNvPr id="32" name="Shape 30"/>
+          <p:cNvPr id="9" name="Shape 7"/>
           <p:cNvSpPr/>
           <p:nvPr/>
         </p:nvSpPr>
@@ -6809,6 +6136,45 @@
             <a:prstDash val="solid"/>
           </a:ln>
         </p:spPr>
+      </p:sp>
+      <p:sp>
+        <p:nvSpPr>
+          <p:cNvPr id="10" name="Text 8"/>
+          <p:cNvSpPr/>
+          <p:nvPr/>
+        </p:nvSpPr>
+        <p:spPr>
+          <a:xfrm>
+            <a:off x="566928" y="1481328"/>
+            <a:ext cx="11057839" cy="9692640"/>
+          </a:xfrm>
+          <a:prstGeom prst="rect">
+            <a:avLst/>
+          </a:prstGeom>
+          <a:noFill/>
+          <a:ln/>
+        </p:spPr>
+        <p:txBody>
+          <a:bodyPr wrap="square" lIns="0" tIns="0" rIns="0" bIns="0" rtlCol="0" anchor="t"/>
+          <a:lstStyle/>
+          <a:p>
+            <a:pPr indent="0" marL="0">
+              <a:buNone/>
+            </a:pPr>
+            <a:r>
+              <a:rPr lang="en-US" sz="1000" dirty="0">
+                <a:solidFill>
+                  <a:srgbClr val="0F172A"/>
+                </a:solidFill>
+                <a:latin typeface="Pretendard" pitchFamily="34" charset="0"/>
+                <a:ea typeface="Pretendard" pitchFamily="34" charset="-122"/>
+                <a:cs typeface="Pretendard" pitchFamily="34" charset="-120"/>
+              </a:rPr>
+              <a:t>{"ok":true,"mocked":true,"extractedFields":{"area_signal":"역삼","asset_type":"오피스빌딩","price_band":"300억","size_signal":"3000평(약 9917.4㎡)"},"extractedFacts":{"region":"역삼","exactAddressCandidate":"역삼동 742-1","assetType":"오피스빌딩","priceText":"300억","sizeText":"3000평(약 9917.4㎡)","currentUse":"오피스","currentUseSignal":"근린생활시설","leaseSignal":"임대중","vacancySignal":"공실없음","tenantNames":["쿠팡","네이버"],"unitRentTexts":["301호: 1500만"],"sellerMotivationText":"자산 효율화","brokerNotes":["초역세권 매물"]},"detectedSensitiveFields":["exact_address","tenant_name"],"ambiguousFields":[],"warnings":[],"areaSignal":"역삼","assetType":"오피스빌딩","priceBand":"300억","sizeSignal":"3000평(약 9917.4㎡)","dealType":"매각","buildingName":"역삼 센트럴타워","exactAddress":"역삼동 742-1","totalFloorArea":9917.3,"buildYear":2015,"currentUseSignal":"근린생활시설","vacancySignal":"공실 없음","fitSummary":"초역세권 근생 빌딩으로 시행/사옥 매입에 최적화","cautionSummary":"주요 임차 업종 만기 조율 필요","hiddenFields":["exact_address","seller_motivation"],"confidence":{"areaSignal":"confirmed","assetType":"confirmed","priceBand":"ai_hypothesis","fitSummary":"ai_hypothesis"},"missingData":["sizeSignal"],"boundaryNote":"본 자료는 실거래 통계 기반 참고치입니다.","buyerType":"법인 사옥형","budgetRange":{"min":50,"max":80,"display":"50억~80억"},"preferredRegions":["강남","성수"],"assetTypes":["꼬마빌딩","사옥용"],"purchasePurpose":"사옥용 매입","mustHave":["초역세권","주차"],"niceToHave":["테라스","루프탑"],"riskTolerance":"medium","financingNote":"자본금 50% 준비","missingQuestions":["구체적인 입주 시기가 언제인가요?","선호하는 수익률이 있나요?"],"privacyNotes":["연락처 비공개"],"fitReasons":["매수자 예산(50-80억)에 부합하는 매물입니다.","요청하신 성수/강남 권역에 해당합니다."],"cautionReasons":["요청한 용도와 달리 명도 협의가 다소 필요합니다."],"recommendedNextAction":"현장 답사 제안","kakaoMessage":"안녕하세요! 요청하신 조건에 부합하는 추천 매물이 있어 안내해 드립니다. 확인해보시고 피드백 부탁드립니다.","title":"강남 역삼역 초역세권 오피스 사옥용 빌딩 매각","shortSummary":"역삼역 도보 5분 거리의 준신축급 대형 오피스빌딩입니다.","dealPoints":["초역세권","사옥 최적"],"cautionPoints":["명도 조율 필요"],"hiddenInfoNotice":["보증금 및 지번은 인가 후 확인 가능"],"gateMessage":"G1 등급 등록이 필요합니다.","kakaoText":"강남 역삼역 오피스 빌딩 매각 안내입니다.","exactUnitCandidate":"101호","floor":"1층","areaSqmText":"150㎡","spaceType":"office","depositText":"5000만","monthlyRentText":"400만","maintenanceFeeText":"50만","availableFromText":"즉시입주","leaseTermMonthsText":"24","incentivesText":"렌트프리 2개월","restrictions":[],"landlordIdentity":"김성수","currentTenant":"스타트업","vacancyReason":"이전 확장","rentNegotiation":"협의 가능","region":"성수동","areaSqm":150,"deposit":5000,"monthlyRent":400,"maintenanceFee":50,"availableFrom":"즉시입주","leaseTermMonths":24,"incentives":{"rentFreeMonths":2,"interiorSupport":"일부 인테리어 지원","freeRentDetail":"렌트프리 2개월 지원"},"shortSummaryLease":"성수역 도보 5분 거리 1층 리테일 상가 매물입니다."}</a:t>
+            </a:r>
+            <a:endParaRPr lang="en-US" sz="1000" dirty="0"/>
+          </a:p>
+        </p:txBody>
       </p:sp>
     </p:spTree>
   </p:cSld>
@@ -7226,7 +6592,7 @@
         <p:spPr>
           <a:xfrm>
             <a:off x="566928" y="384048"/>
-            <a:ext cx="45720" cy="786384"/>
+            <a:ext cx="45720" cy="566928"/>
           </a:xfrm>
           <a:prstGeom prst="rect">
             <a:avLst/>
@@ -7317,688 +6683,13 @@
       </p:sp>
       <p:sp>
         <p:nvSpPr>
-          <p:cNvPr id="5" name="Text 3"/>
-          <p:cNvSpPr/>
-          <p:nvPr/>
-        </p:nvSpPr>
-        <p:spPr>
-          <a:xfrm>
-            <a:off x="749808" y="950976"/>
-            <a:ext cx="10874959" cy="219456"/>
-          </a:xfrm>
-          <a:prstGeom prst="rect">
-            <a:avLst/>
-          </a:prstGeom>
-          <a:noFill/>
-          <a:ln/>
-        </p:spPr>
-        <p:txBody>
-          <a:bodyPr wrap="square" lIns="0" tIns="0" rIns="0" bIns="0" rtlCol="0" anchor="ctr"/>
-          <a:lstStyle/>
-          <a:p>
-            <a:pPr indent="0" marL="0">
-              <a:buNone/>
-            </a:pPr>
-            <a:r>
-              <a:rPr lang="en-US" sz="1050" dirty="0">
-                <a:solidFill>
-                  <a:srgbClr val="64748B"/>
-                </a:solidFill>
-                <a:latin typeface="Pretendard" pitchFamily="34" charset="0"/>
-                <a:ea typeface="Pretendard" pitchFamily="34" charset="-122"/>
-                <a:cs typeface="Pretendard" pitchFamily="34" charset="-120"/>
-              </a:rPr>
-              <a:t>3대 핵심 투자 포인트 (Investment Highlights)</a:t>
-            </a:r>
-            <a:endParaRPr lang="en-US" sz="1050" dirty="0"/>
-          </a:p>
-        </p:txBody>
-      </p:sp>
-      <p:sp>
-        <p:nvSpPr>
-          <p:cNvPr id="6" name="Shape 4"/>
-          <p:cNvSpPr/>
-          <p:nvPr/>
-        </p:nvSpPr>
-        <p:spPr>
-          <a:xfrm>
-            <a:off x="566928" y="1481328"/>
-            <a:ext cx="3472586" cy="3474720"/>
-          </a:xfrm>
-          <a:prstGeom prst="roundRect">
-            <a:avLst>
-              <a:gd name="adj" fmla="val 2107"/>
-            </a:avLst>
-          </a:prstGeom>
-          <a:solidFill>
-            <a:srgbClr val="F8FAFC"/>
-          </a:solidFill>
-          <a:ln w="10160">
-            <a:solidFill>
-              <a:srgbClr val="CBD5E1"/>
-            </a:solidFill>
-            <a:prstDash val="solid"/>
-          </a:ln>
-        </p:spPr>
-      </p:sp>
-      <p:sp>
-        <p:nvSpPr>
-          <p:cNvPr id="7" name="Shape 5"/>
-          <p:cNvSpPr/>
-          <p:nvPr/>
-        </p:nvSpPr>
-        <p:spPr>
-          <a:xfrm>
-            <a:off x="566928" y="1481328"/>
-            <a:ext cx="3472586" cy="54864"/>
-          </a:xfrm>
-          <a:prstGeom prst="rect">
-            <a:avLst/>
-          </a:prstGeom>
-          <a:solidFill>
-            <a:srgbClr val="6B8E00"/>
-          </a:solidFill>
-          <a:ln/>
-        </p:spPr>
-      </p:sp>
-      <p:sp>
-        <p:nvSpPr>
-          <p:cNvPr id="8" name="Shape 6"/>
-          <p:cNvSpPr/>
-          <p:nvPr/>
-        </p:nvSpPr>
-        <p:spPr>
-          <a:xfrm>
-            <a:off x="795528" y="1755648"/>
-            <a:ext cx="475488" cy="292608"/>
-          </a:xfrm>
-          <a:prstGeom prst="roundRect">
-            <a:avLst>
-              <a:gd name="adj" fmla="val 12500"/>
-            </a:avLst>
-          </a:prstGeom>
-          <a:solidFill>
-            <a:srgbClr val="A3D900"/>
-          </a:solidFill>
-          <a:ln/>
-        </p:spPr>
-      </p:sp>
-      <p:sp>
-        <p:nvSpPr>
-          <p:cNvPr id="9" name="Text 7"/>
-          <p:cNvSpPr/>
-          <p:nvPr/>
-        </p:nvSpPr>
-        <p:spPr>
-          <a:xfrm>
-            <a:off x="795528" y="1755648"/>
-            <a:ext cx="475488" cy="292608"/>
-          </a:xfrm>
-          <a:prstGeom prst="rect">
-            <a:avLst/>
-          </a:prstGeom>
-          <a:noFill/>
-          <a:ln/>
-        </p:spPr>
-        <p:txBody>
-          <a:bodyPr wrap="square" lIns="0" tIns="0" rIns="0" bIns="0" rtlCol="0" anchor="ctr"/>
-          <a:lstStyle/>
-          <a:p>
-            <a:pPr algn="ctr" indent="0" marL="0">
-              <a:buNone/>
-            </a:pPr>
-            <a:r>
-              <a:rPr lang="en-US" sz="1100" b="1" dirty="0">
-                <a:solidFill>
-                  <a:srgbClr val="4F6A00"/>
-                </a:solidFill>
-                <a:latin typeface="Arial" pitchFamily="34" charset="0"/>
-                <a:ea typeface="Arial" pitchFamily="34" charset="-122"/>
-                <a:cs typeface="Arial" pitchFamily="34" charset="-120"/>
-              </a:rPr>
-              <a:t>01</a:t>
-            </a:r>
-            <a:endParaRPr lang="en-US" sz="1100" dirty="0"/>
-          </a:p>
-        </p:txBody>
-      </p:sp>
-      <p:sp>
-        <p:nvSpPr>
-          <p:cNvPr id="10" name="Text 8"/>
-          <p:cNvSpPr/>
-          <p:nvPr/>
-        </p:nvSpPr>
-        <p:spPr>
-          <a:xfrm>
-            <a:off x="795528" y="2194560"/>
-            <a:ext cx="3015386" cy="365760"/>
-          </a:xfrm>
-          <a:prstGeom prst="rect">
-            <a:avLst/>
-          </a:prstGeom>
-          <a:noFill/>
-          <a:ln/>
-        </p:spPr>
-        <p:txBody>
-          <a:bodyPr wrap="square" lIns="0" tIns="0" rIns="0" bIns="0" rtlCol="0" anchor="t"/>
-          <a:lstStyle/>
-          <a:p>
-            <a:pPr indent="0" marL="0">
-              <a:buNone/>
-            </a:pPr>
-            <a:r>
-              <a:rPr lang="en-US" sz="1500" b="1" dirty="0">
-                <a:solidFill>
-                  <a:srgbClr val="0F172A"/>
-                </a:solidFill>
-                <a:latin typeface="Pretendard" pitchFamily="34" charset="0"/>
-                <a:ea typeface="Pretendard" pitchFamily="34" charset="-122"/>
-                <a:cs typeface="Pretendard" pitchFamily="34" charset="-120"/>
-              </a:rPr>
-              <a:t>원금 안전판 확보</a:t>
-            </a:r>
-            <a:endParaRPr lang="en-US" sz="1500" dirty="0"/>
-          </a:p>
-        </p:txBody>
-      </p:sp>
-      <p:sp>
-        <p:nvSpPr>
-          <p:cNvPr id="11" name="Shape 9"/>
-          <p:cNvSpPr/>
-          <p:nvPr/>
-        </p:nvSpPr>
-        <p:spPr>
-          <a:xfrm>
-            <a:off x="795528" y="2624328"/>
-            <a:ext cx="3015386" cy="0"/>
-          </a:xfrm>
-          <a:prstGeom prst="line">
-            <a:avLst/>
-          </a:prstGeom>
-          <a:noFill/>
-          <a:ln w="6350">
-            <a:solidFill>
-              <a:srgbClr val="CBD5E1"/>
-            </a:solidFill>
-            <a:prstDash val="solid"/>
-          </a:ln>
-        </p:spPr>
-      </p:sp>
-      <p:sp>
-        <p:nvSpPr>
-          <p:cNvPr id="12" name="Text 10"/>
-          <p:cNvSpPr/>
-          <p:nvPr/>
-        </p:nvSpPr>
-        <p:spPr>
-          <a:xfrm>
-            <a:off x="795528" y="2779776"/>
-            <a:ext cx="3015386" cy="1965960"/>
-          </a:xfrm>
-          <a:prstGeom prst="rect">
-            <a:avLst/>
-          </a:prstGeom>
-          <a:noFill/>
-          <a:ln/>
-        </p:spPr>
-        <p:txBody>
-          <a:bodyPr wrap="square" lIns="0" tIns="0" rIns="0" bIns="0" rtlCol="0" anchor="t"/>
-          <a:lstStyle/>
-          <a:p>
-            <a:pPr indent="0" marL="0">
-              <a:lnSpc>
-                <a:spcPct val="130000"/>
-              </a:lnSpc>
-              <a:buNone/>
-            </a:pPr>
-            <a:r>
-              <a:rPr lang="en-US" sz="1200" dirty="0">
-                <a:solidFill>
-                  <a:srgbClr val="0F172A"/>
-                </a:solidFill>
-                <a:latin typeface="Pretendard" pitchFamily="34" charset="0"/>
-                <a:ea typeface="Pretendard" pitchFamily="34" charset="-122"/>
-                <a:cs typeface="Pretendard" pitchFamily="34" charset="-120"/>
-              </a:rPr>
-              <a:t>영등포권역의 핵심 입지로, 우량한 대지 지분 가치가 하방 경직성을 강력히 지지합니다.</a:t>
-            </a:r>
-            <a:endParaRPr lang="en-US" sz="1200" dirty="0"/>
-          </a:p>
-        </p:txBody>
-      </p:sp>
-      <p:sp>
-        <p:nvSpPr>
-          <p:cNvPr id="13" name="Shape 11"/>
-          <p:cNvSpPr/>
-          <p:nvPr/>
-        </p:nvSpPr>
-        <p:spPr>
-          <a:xfrm>
-            <a:off x="4359554" y="1481328"/>
-            <a:ext cx="3472586" cy="3474720"/>
-          </a:xfrm>
-          <a:prstGeom prst="roundRect">
-            <a:avLst>
-              <a:gd name="adj" fmla="val 2107"/>
-            </a:avLst>
-          </a:prstGeom>
-          <a:solidFill>
-            <a:srgbClr val="F8FAFC"/>
-          </a:solidFill>
-          <a:ln w="10160">
-            <a:solidFill>
-              <a:srgbClr val="CBD5E1"/>
-            </a:solidFill>
-            <a:prstDash val="solid"/>
-          </a:ln>
-        </p:spPr>
-      </p:sp>
-      <p:sp>
-        <p:nvSpPr>
-          <p:cNvPr id="14" name="Shape 12"/>
-          <p:cNvSpPr/>
-          <p:nvPr/>
-        </p:nvSpPr>
-        <p:spPr>
-          <a:xfrm>
-            <a:off x="4359554" y="1481328"/>
-            <a:ext cx="3472586" cy="54864"/>
-          </a:xfrm>
-          <a:prstGeom prst="rect">
-            <a:avLst/>
-          </a:prstGeom>
-          <a:solidFill>
-            <a:srgbClr val="6B8E00"/>
-          </a:solidFill>
-          <a:ln/>
-        </p:spPr>
-      </p:sp>
-      <p:sp>
-        <p:nvSpPr>
-          <p:cNvPr id="15" name="Shape 13"/>
-          <p:cNvSpPr/>
-          <p:nvPr/>
-        </p:nvSpPr>
-        <p:spPr>
-          <a:xfrm>
-            <a:off x="4588154" y="1755648"/>
-            <a:ext cx="475488" cy="292608"/>
-          </a:xfrm>
-          <a:prstGeom prst="roundRect">
-            <a:avLst>
-              <a:gd name="adj" fmla="val 12500"/>
-            </a:avLst>
-          </a:prstGeom>
-          <a:solidFill>
-            <a:srgbClr val="A3D900"/>
-          </a:solidFill>
-          <a:ln/>
-        </p:spPr>
-      </p:sp>
-      <p:sp>
-        <p:nvSpPr>
-          <p:cNvPr id="16" name="Text 14"/>
-          <p:cNvSpPr/>
-          <p:nvPr/>
-        </p:nvSpPr>
-        <p:spPr>
-          <a:xfrm>
-            <a:off x="4588154" y="1755648"/>
-            <a:ext cx="475488" cy="292608"/>
-          </a:xfrm>
-          <a:prstGeom prst="rect">
-            <a:avLst/>
-          </a:prstGeom>
-          <a:noFill/>
-          <a:ln/>
-        </p:spPr>
-        <p:txBody>
-          <a:bodyPr wrap="square" lIns="0" tIns="0" rIns="0" bIns="0" rtlCol="0" anchor="ctr"/>
-          <a:lstStyle/>
-          <a:p>
-            <a:pPr algn="ctr" indent="0" marL="0">
-              <a:buNone/>
-            </a:pPr>
-            <a:r>
-              <a:rPr lang="en-US" sz="1100" b="1" dirty="0">
-                <a:solidFill>
-                  <a:srgbClr val="4F6A00"/>
-                </a:solidFill>
-                <a:latin typeface="Arial" pitchFamily="34" charset="0"/>
-                <a:ea typeface="Arial" pitchFamily="34" charset="-122"/>
-                <a:cs typeface="Arial" pitchFamily="34" charset="-120"/>
-              </a:rPr>
-              <a:t>02</a:t>
-            </a:r>
-            <a:endParaRPr lang="en-US" sz="1100" dirty="0"/>
-          </a:p>
-        </p:txBody>
-      </p:sp>
-      <p:sp>
-        <p:nvSpPr>
-          <p:cNvPr id="17" name="Text 15"/>
-          <p:cNvSpPr/>
-          <p:nvPr/>
-        </p:nvSpPr>
-        <p:spPr>
-          <a:xfrm>
-            <a:off x="4588154" y="2194560"/>
-            <a:ext cx="3015386" cy="365760"/>
-          </a:xfrm>
-          <a:prstGeom prst="rect">
-            <a:avLst/>
-          </a:prstGeom>
-          <a:noFill/>
-          <a:ln/>
-        </p:spPr>
-        <p:txBody>
-          <a:bodyPr wrap="square" lIns="0" tIns="0" rIns="0" bIns="0" rtlCol="0" anchor="t"/>
-          <a:lstStyle/>
-          <a:p>
-            <a:pPr indent="0" marL="0">
-              <a:buNone/>
-            </a:pPr>
-            <a:r>
-              <a:rPr lang="en-US" sz="1500" b="1" dirty="0">
-                <a:solidFill>
-                  <a:srgbClr val="0F172A"/>
-                </a:solidFill>
-                <a:latin typeface="Pretendard" pitchFamily="34" charset="0"/>
-                <a:ea typeface="Pretendard" pitchFamily="34" charset="-122"/>
-                <a:cs typeface="Pretendard" pitchFamily="34" charset="-120"/>
-              </a:rPr>
-              <a:t>확실한 월 현금흐름</a:t>
-            </a:r>
-            <a:endParaRPr lang="en-US" sz="1500" dirty="0"/>
-          </a:p>
-        </p:txBody>
-      </p:sp>
-      <p:sp>
-        <p:nvSpPr>
-          <p:cNvPr id="18" name="Shape 16"/>
-          <p:cNvSpPr/>
-          <p:nvPr/>
-        </p:nvSpPr>
-        <p:spPr>
-          <a:xfrm>
-            <a:off x="4588154" y="2624328"/>
-            <a:ext cx="3015386" cy="0"/>
-          </a:xfrm>
-          <a:prstGeom prst="line">
-            <a:avLst/>
-          </a:prstGeom>
-          <a:noFill/>
-          <a:ln w="6350">
-            <a:solidFill>
-              <a:srgbClr val="CBD5E1"/>
-            </a:solidFill>
-            <a:prstDash val="solid"/>
-          </a:ln>
-        </p:spPr>
-      </p:sp>
-      <p:sp>
-        <p:nvSpPr>
-          <p:cNvPr id="19" name="Text 17"/>
-          <p:cNvSpPr/>
-          <p:nvPr/>
-        </p:nvSpPr>
-        <p:spPr>
-          <a:xfrm>
-            <a:off x="4588154" y="2779776"/>
-            <a:ext cx="3015386" cy="1965960"/>
-          </a:xfrm>
-          <a:prstGeom prst="rect">
-            <a:avLst/>
-          </a:prstGeom>
-          <a:noFill/>
-          <a:ln/>
-        </p:spPr>
-        <p:txBody>
-          <a:bodyPr wrap="square" lIns="0" tIns="0" rIns="0" bIns="0" rtlCol="0" anchor="t"/>
-          <a:lstStyle/>
-          <a:p>
-            <a:pPr indent="0" marL="0">
-              <a:lnSpc>
-                <a:spcPct val="130000"/>
-              </a:lnSpc>
-              <a:buNone/>
-            </a:pPr>
-            <a:r>
-              <a:rPr lang="en-US" sz="1200" dirty="0">
-                <a:solidFill>
-                  <a:srgbClr val="0F172A"/>
-                </a:solidFill>
-                <a:latin typeface="Pretendard" pitchFamily="34" charset="0"/>
-                <a:ea typeface="Pretendard" pitchFamily="34" charset="-122"/>
-                <a:cs typeface="Pretendard" pitchFamily="34" charset="-120"/>
-              </a:rPr>
-              <a:t>우량 테넌트 만실 운영 및 장기 계약 구조를 통해 매월 안정적인 순수익 창출이 검토 여지가 있으나, 관련 법규·인허가·시설 요건의 현장 확인이 필요합니다..</a:t>
-            </a:r>
-            <a:endParaRPr lang="en-US" sz="1200" dirty="0"/>
-          </a:p>
-        </p:txBody>
-      </p:sp>
-      <p:sp>
-        <p:nvSpPr>
-          <p:cNvPr id="20" name="Shape 18"/>
-          <p:cNvSpPr/>
-          <p:nvPr/>
-        </p:nvSpPr>
-        <p:spPr>
-          <a:xfrm>
-            <a:off x="8152181" y="1481328"/>
-            <a:ext cx="3472586" cy="3474720"/>
-          </a:xfrm>
-          <a:prstGeom prst="roundRect">
-            <a:avLst>
-              <a:gd name="adj" fmla="val 2107"/>
-            </a:avLst>
-          </a:prstGeom>
-          <a:solidFill>
-            <a:srgbClr val="F8FAFC"/>
-          </a:solidFill>
-          <a:ln w="10160">
-            <a:solidFill>
-              <a:srgbClr val="CBD5E1"/>
-            </a:solidFill>
-            <a:prstDash val="solid"/>
-          </a:ln>
-        </p:spPr>
-      </p:sp>
-      <p:sp>
-        <p:nvSpPr>
-          <p:cNvPr id="21" name="Shape 19"/>
-          <p:cNvSpPr/>
-          <p:nvPr/>
-        </p:nvSpPr>
-        <p:spPr>
-          <a:xfrm>
-            <a:off x="8152181" y="1481328"/>
-            <a:ext cx="3472586" cy="54864"/>
-          </a:xfrm>
-          <a:prstGeom prst="rect">
-            <a:avLst/>
-          </a:prstGeom>
-          <a:solidFill>
-            <a:srgbClr val="6B8E00"/>
-          </a:solidFill>
-          <a:ln/>
-        </p:spPr>
-      </p:sp>
-      <p:sp>
-        <p:nvSpPr>
-          <p:cNvPr id="22" name="Shape 20"/>
-          <p:cNvSpPr/>
-          <p:nvPr/>
-        </p:nvSpPr>
-        <p:spPr>
-          <a:xfrm>
-            <a:off x="8380781" y="1755648"/>
-            <a:ext cx="475488" cy="292608"/>
-          </a:xfrm>
-          <a:prstGeom prst="roundRect">
-            <a:avLst>
-              <a:gd name="adj" fmla="val 12500"/>
-            </a:avLst>
-          </a:prstGeom>
-          <a:solidFill>
-            <a:srgbClr val="A3D900"/>
-          </a:solidFill>
-          <a:ln/>
-        </p:spPr>
-      </p:sp>
-      <p:sp>
-        <p:nvSpPr>
-          <p:cNvPr id="23" name="Text 21"/>
-          <p:cNvSpPr/>
-          <p:nvPr/>
-        </p:nvSpPr>
-        <p:spPr>
-          <a:xfrm>
-            <a:off x="8380781" y="1755648"/>
-            <a:ext cx="475488" cy="292608"/>
-          </a:xfrm>
-          <a:prstGeom prst="rect">
-            <a:avLst/>
-          </a:prstGeom>
-          <a:noFill/>
-          <a:ln/>
-        </p:spPr>
-        <p:txBody>
-          <a:bodyPr wrap="square" lIns="0" tIns="0" rIns="0" bIns="0" rtlCol="0" anchor="ctr"/>
-          <a:lstStyle/>
-          <a:p>
-            <a:pPr algn="ctr" indent="0" marL="0">
-              <a:buNone/>
-            </a:pPr>
-            <a:r>
-              <a:rPr lang="en-US" sz="1100" b="1" dirty="0">
-                <a:solidFill>
-                  <a:srgbClr val="4F6A00"/>
-                </a:solidFill>
-                <a:latin typeface="Arial" pitchFamily="34" charset="0"/>
-                <a:ea typeface="Arial" pitchFamily="34" charset="-122"/>
-                <a:cs typeface="Arial" pitchFamily="34" charset="-120"/>
-              </a:rPr>
-              <a:t>03</a:t>
-            </a:r>
-            <a:endParaRPr lang="en-US" sz="1100" dirty="0"/>
-          </a:p>
-        </p:txBody>
-      </p:sp>
-      <p:sp>
-        <p:nvSpPr>
-          <p:cNvPr id="24" name="Text 22"/>
-          <p:cNvSpPr/>
-          <p:nvPr/>
-        </p:nvSpPr>
-        <p:spPr>
-          <a:xfrm>
-            <a:off x="8380781" y="2194560"/>
-            <a:ext cx="3015386" cy="365760"/>
-          </a:xfrm>
-          <a:prstGeom prst="rect">
-            <a:avLst/>
-          </a:prstGeom>
-          <a:noFill/>
-          <a:ln/>
-        </p:spPr>
-        <p:txBody>
-          <a:bodyPr wrap="square" lIns="0" tIns="0" rIns="0" bIns="0" rtlCol="0" anchor="t"/>
-          <a:lstStyle/>
-          <a:p>
-            <a:pPr indent="0" marL="0">
-              <a:buNone/>
-            </a:pPr>
-            <a:r>
-              <a:rPr lang="en-US" sz="1500" b="1" dirty="0">
-                <a:solidFill>
-                  <a:srgbClr val="0F172A"/>
-                </a:solidFill>
-                <a:latin typeface="Pretendard" pitchFamily="34" charset="0"/>
-                <a:ea typeface="Pretendard" pitchFamily="34" charset="-122"/>
-                <a:cs typeface="Pretendard" pitchFamily="34" charset="-120"/>
-              </a:rPr>
-              <a:t>가치 상승 및 출구 전략</a:t>
-            </a:r>
-            <a:endParaRPr lang="en-US" sz="1500" dirty="0"/>
-          </a:p>
-        </p:txBody>
-      </p:sp>
-      <p:sp>
-        <p:nvSpPr>
-          <p:cNvPr id="25" name="Shape 23"/>
-          <p:cNvSpPr/>
-          <p:nvPr/>
-        </p:nvSpPr>
-        <p:spPr>
-          <a:xfrm>
-            <a:off x="8380781" y="2624328"/>
-            <a:ext cx="3015386" cy="0"/>
-          </a:xfrm>
-          <a:prstGeom prst="line">
-            <a:avLst/>
-          </a:prstGeom>
-          <a:noFill/>
-          <a:ln w="6350">
-            <a:solidFill>
-              <a:srgbClr val="CBD5E1"/>
-            </a:solidFill>
-            <a:prstDash val="solid"/>
-          </a:ln>
-        </p:spPr>
-      </p:sp>
-      <p:sp>
-        <p:nvSpPr>
-          <p:cNvPr id="26" name="Text 24"/>
-          <p:cNvSpPr/>
-          <p:nvPr/>
-        </p:nvSpPr>
-        <p:spPr>
-          <a:xfrm>
-            <a:off x="8380781" y="2779776"/>
-            <a:ext cx="3015386" cy="1965960"/>
-          </a:xfrm>
-          <a:prstGeom prst="rect">
-            <a:avLst/>
-          </a:prstGeom>
-          <a:noFill/>
-          <a:ln/>
-        </p:spPr>
-        <p:txBody>
-          <a:bodyPr wrap="square" lIns="0" tIns="0" rIns="0" bIns="0" rtlCol="0" anchor="t"/>
-          <a:lstStyle/>
-          <a:p>
-            <a:pPr indent="0" marL="0">
-              <a:lnSpc>
-                <a:spcPct val="130000"/>
-              </a:lnSpc>
-              <a:buNone/>
-            </a:pPr>
-            <a:r>
-              <a:rPr lang="en-US" sz="1200" dirty="0">
-                <a:solidFill>
-                  <a:srgbClr val="0F172A"/>
-                </a:solidFill>
-                <a:latin typeface="Pretendard" pitchFamily="34" charset="0"/>
-                <a:ea typeface="Pretendard" pitchFamily="34" charset="-122"/>
-                <a:cs typeface="Pretendard" pitchFamily="34" charset="-120"/>
-              </a:rPr>
-              <a:t>현행 공법 여력을 활용한 밸류업 기회와 더불어 향후 권역 지가 상승에 따른 시세차익 실현이 유력합니다.</a:t>
-            </a:r>
-            <a:endParaRPr lang="en-US" sz="1200" dirty="0"/>
-          </a:p>
-        </p:txBody>
-      </p:sp>
-      <p:sp>
-        <p:nvSpPr>
-          <p:cNvPr id="27" name="Shape 25"/>
-          <p:cNvSpPr/>
-          <p:nvPr/>
-        </p:nvSpPr>
-        <p:spPr>
-          <a:xfrm>
-            <a:off x="566928" y="5138928"/>
+          <p:cNvPr id="5" name="Shape 3"/>
+          <p:cNvSpPr/>
+          <p:nvPr/>
+        </p:nvSpPr>
+        <p:spPr>
+          <a:xfrm>
+            <a:off x="566928" y="4983480"/>
             <a:ext cx="11057839" cy="804672"/>
           </a:xfrm>
           <a:prstGeom prst="roundRect">
@@ -8019,13 +6710,13 @@
       </p:sp>
       <p:sp>
         <p:nvSpPr>
-          <p:cNvPr id="28" name="Text 26"/>
-          <p:cNvSpPr/>
-          <p:nvPr/>
-        </p:nvSpPr>
-        <p:spPr>
-          <a:xfrm>
-            <a:off x="749808" y="5248656"/>
+          <p:cNvPr id="6" name="Text 4"/>
+          <p:cNvSpPr/>
+          <p:nvPr/>
+        </p:nvSpPr>
+        <p:spPr>
+          <a:xfrm>
+            <a:off x="749808" y="5093208"/>
             <a:ext cx="1645920" cy="219456"/>
           </a:xfrm>
           <a:prstGeom prst="rect">
@@ -8058,13 +6749,13 @@
       </p:sp>
       <p:sp>
         <p:nvSpPr>
-          <p:cNvPr id="29" name="Text 27"/>
-          <p:cNvSpPr/>
-          <p:nvPr/>
-        </p:nvSpPr>
-        <p:spPr>
-          <a:xfrm>
-            <a:off x="2441448" y="5230368"/>
+          <p:cNvPr id="7" name="Text 5"/>
+          <p:cNvSpPr/>
+          <p:nvPr/>
+        </p:nvSpPr>
+        <p:spPr>
+          <a:xfrm>
+            <a:off x="2441448" y="5074920"/>
             <a:ext cx="9000439" cy="621792"/>
           </a:xfrm>
           <a:prstGeom prst="rect">
@@ -8092,7 +6783,7 @@
                 <a:ea typeface="Pretendard" pitchFamily="34" charset="-122"/>
                 <a:cs typeface="Pretendard" pitchFamily="34" charset="-120"/>
               </a:rPr>
-              <a:t>본 자산의 3대 핵심 투자 포인트와 예상 매수자 유형 분석입니다.</a:t>
+              <a:t>{"ok":true,"mocked":true,"extractedFields":{"area_signal":"역삼","asset_type":"오피스빌딩","price_band":"300억","size_signal":"3000평(약 9917.4㎡)"},"extractedFacts":{"region":"역삼","exactAddressCandidate":"역삼동 742-1","assetType":"오피스빌딩","priceText":"300억","sizeText":"3000평(약 9917.4㎡)","currentUse":"오피스","currentUseSignal":"근린생활시설","leaseSignal":"임대중","vacancySignal":"공실없음","tenantNames":["쿠팡","네이버"],"unitRentTexts":["301호: 1500만"],"sellerMotivationText":"자산 효율화","brokerNotes":["초역세권 매물"]},"detectedSensitiveFields":["exact_address","tenant_name"],"ambiguousFields":[],"warnings":[],"areaSignal":"역삼","assetType":"오피스빌딩","priceBand":"300억","sizeSignal":"3000평(약 9917.4㎡)","dealType":"매각","buildingName":"역삼 센트럴타워","exactAddress":"역삼동 742-1","totalFloorArea":9917.3,"buildYear":2015,"currentUseSignal":"근린생활시설","vacancySignal":"공실 없음","fitSummary":"초역세권 근생 빌딩으로 시행/사옥 매입에 최적화","cautionSummary":"주요 임차 업종 만기 조율 필요","hiddenFields":["exact_address","seller_motivation"],"confidence":{"areaSignal":"confirmed","assetType":"confirmed","priceBand":"ai_hypothesis","fitSummary":"ai_hypothesis"},"missingData":["sizeSignal"],"boundaryNote":"본 자료는 실거래 통계 기반 참고치입니다.","buyerType":"법인 사옥형","budgetRange":{"min":50,"max":80,"display":"50억~80억"},"preferredRegions":["강남","성수"],"assetTypes":["꼬마빌딩","사옥용"],"purchasePurpose":"사옥용 매입","mustHave":["초역세권","주차"],"niceToHave":["테라스","루프탑"],"riskTolerance":"medium","financingNote":"자본금 50% 준비","missingQuestions":["구체적인 입주 시기가 언제인가요?","선호하는 수익률이 있나요?"],"privacyNotes":["연락처 비공개"],"fitReasons":["매수자 예산(50-80억)에 부합하는 매물입니다.","요청하신 성수/강남 권역에 해당합니다."],"cautionReasons":["요청한 용도와 달리 명도 협의가 다소 필요합니다."],"recommendedNextAction":"현장 답사 제안","kakaoMessage":"안녕하세요! 요청하신 조건에 부합하는 추천 매물이 있어 안내해 드립니다. 확인해보시고 피드백 부탁드립니다.","title":"강남 역삼역 초역세권 오피스 사옥용 빌딩 매각","shortSummary":"역삼역 도보 5분 거리의 준신축급 대형 오피스빌딩입니다.","dealPoints":["초역세권","사옥 최적"],"cautionPoints":["명도 조율 필요"],"hiddenInfoNotice":["보증금 및 지번은 인가 후 확인 가능"],"gateMessage":"G1 등급 등록이 필요합니다.","kakaoText":"강남 역삼역 오피스 빌딩 매각 안내입니다.","exactUnitCandidate":"101호","floor":"1층","areaSqmText":"150㎡","spaceType":"office","depositText":"5000만","monthlyRentText":"400만","maintenanceFeeText":"50만","availableFromText":"즉시입주","leaseTermMonthsText":"24","incentivesText":"렌트프리 2개월","restrictions":[],"landlordIdentity":"김성수","currentTenant":"스타트업","vacancyReason":"이전 확장","rentNegotiation":"협의 가능","region":"성수동","areaSqm":150,"deposit":5000,"monthlyRent":400,"maintenanceFee":50,"availableFrom":"즉시입주","leaseTermMonths":24,"incentives":{"rentFreeMonths":2,"interiorSupport":"일부 인테리어 지원","freeRentDetail":"렌트프리 2개월 지원"},"shortSummaryLease":"성수역 도보 5분 거리 1층 리테일 상가 매물입니다."}</a:t>
             </a:r>
             <a:endParaRPr lang="en-US" sz="1000" dirty="0"/>
           </a:p>
@@ -8100,7 +6791,7 @@
       </p:sp>
       <p:sp>
         <p:nvSpPr>
-          <p:cNvPr id="30" name="Text 28"/>
+          <p:cNvPr id="8" name="Text 6"/>
           <p:cNvSpPr/>
           <p:nvPr/>
         </p:nvSpPr>
@@ -8139,7 +6830,7 @@
       </p:sp>
       <p:sp>
         <p:nvSpPr>
-          <p:cNvPr id="31" name="Shape 29"/>
+          <p:cNvPr id="9" name="Shape 7"/>
           <p:cNvSpPr/>
           <p:nvPr/>
         </p:nvSpPr>

--- a/docs/test/stress/e2e-outputs/development_case13_mullae_dev_basic.pptx
+++ b/docs/test/stress/e2e-outputs/development_case13_mullae_dev_basic.pptx
@@ -1658,7 +1658,7 @@
     <p:bg>
       <p:bgPr>
         <a:solidFill>
-          <a:srgbClr val="0F172A"/>
+          <a:srgbClr val="10161F"/>
         </a:solidFill>
       </p:bgPr>
     </p:bg>
@@ -1753,7 +1753,7 @@
           <a:noFill/>
           <a:ln w="10160">
             <a:solidFill>
-              <a:srgbClr val="6B8E00"/>
+              <a:srgbClr val="B98A2E"/>
             </a:solidFill>
             <a:prstDash val="solid"/>
           </a:ln>
@@ -1767,14 +1767,14 @@
         </p:nvSpPr>
         <p:spPr>
           <a:xfrm>
-            <a:off x="7772400" y="0"/>
-            <a:ext cx="4419295" cy="6858000"/>
+            <a:off x="8275320" y="0"/>
+            <a:ext cx="1417320" cy="4041648"/>
           </a:xfrm>
           <a:prstGeom prst="rect">
             <a:avLst/>
           </a:prstGeom>
           <a:solidFill>
-            <a:srgbClr val="6B8E00"/>
+            <a:srgbClr val="1A2030"/>
           </a:solidFill>
           <a:ln/>
         </p:spPr>
@@ -1786,24 +1786,42 @@
           <p:nvPr/>
         </p:nvSpPr>
         <p:spPr>
-          <a:xfrm rot="120000">
-            <a:off x="8412480" y="548640"/>
-            <a:ext cx="3291840" cy="5760720"/>
+          <a:xfrm>
+            <a:off x="9784080" y="868680"/>
+            <a:ext cx="1143000" cy="3172968"/>
           </a:xfrm>
           <a:prstGeom prst="rect">
             <a:avLst/>
           </a:prstGeom>
           <a:solidFill>
-            <a:srgbClr val="0F172A">
-              <a:alpha val="12000"/>
-            </a:srgbClr>
+            <a:srgbClr val="161D2B"/>
           </a:solidFill>
           <a:ln/>
         </p:spPr>
       </p:sp>
       <p:sp>
         <p:nvSpPr>
-          <p:cNvPr id="8" name="Text 6"/>
+          <p:cNvPr id="8" name="Shape 6"/>
+          <p:cNvSpPr/>
+          <p:nvPr/>
+        </p:nvSpPr>
+        <p:spPr>
+          <a:xfrm>
+            <a:off x="11018520" y="1691640"/>
+            <a:ext cx="1170432" cy="2350008"/>
+          </a:xfrm>
+          <a:prstGeom prst="rect">
+            <a:avLst/>
+          </a:prstGeom>
+          <a:solidFill>
+            <a:srgbClr val="2E2718"/>
+          </a:solidFill>
+          <a:ln/>
+        </p:spPr>
+      </p:sp>
+      <p:sp>
+        <p:nvSpPr>
+          <p:cNvPr id="9" name="Text 7"/>
           <p:cNvSpPr/>
           <p:nvPr/>
         </p:nvSpPr>
@@ -1842,7 +1860,7 @@
             <a:r>
               <a:rPr lang="en-US" sz="1500" b="1" dirty="0">
                 <a:solidFill>
-                  <a:srgbClr val="6B8E00"/>
+                  <a:srgbClr val="B98A2E"/>
                 </a:solidFill>
                 <a:latin typeface="Arial" pitchFamily="34" charset="0"/>
                 <a:ea typeface="Arial" pitchFamily="34" charset="-122"/>
@@ -1856,115 +1874,76 @@
       </p:sp>
       <p:sp>
         <p:nvSpPr>
-          <p:cNvPr id="9" name="Text 7"/>
-          <p:cNvSpPr/>
-          <p:nvPr/>
-        </p:nvSpPr>
-        <p:spPr>
-          <a:xfrm>
-            <a:off x="8229600" y="5303520"/>
-            <a:ext cx="3474720" cy="365760"/>
-          </a:xfrm>
-          <a:prstGeom prst="rect">
-            <a:avLst/>
-          </a:prstGeom>
-          <a:noFill/>
-          <a:ln/>
-        </p:spPr>
-        <p:txBody>
-          <a:bodyPr wrap="square" lIns="0" tIns="0" rIns="0" bIns="0" rtlCol="0" anchor="ctr"/>
-          <a:lstStyle/>
-          <a:p>
-            <a:pPr algn="ctr" indent="0" marL="0">
-              <a:buNone/>
-            </a:pPr>
-            <a:r>
-              <a:rPr lang="en-US" sz="1000" dirty="0">
-                <a:solidFill>
-                  <a:srgbClr val="0F172A"/>
+          <p:cNvPr id="10" name="Text 8"/>
+          <p:cNvSpPr/>
+          <p:nvPr/>
+        </p:nvSpPr>
+        <p:spPr>
+          <a:xfrm>
+            <a:off x="566928" y="2029968"/>
+            <a:ext cx="7315200" cy="274320"/>
+          </a:xfrm>
+          <a:prstGeom prst="rect">
+            <a:avLst/>
+          </a:prstGeom>
+          <a:noFill/>
+          <a:ln/>
+        </p:spPr>
+        <p:txBody>
+          <a:bodyPr wrap="square" lIns="0" tIns="0" rIns="0" bIns="0" rtlCol="0" anchor="ctr"/>
+          <a:lstStyle/>
+          <a:p>
+            <a:pPr algn="l" indent="0" marL="0">
+              <a:buNone/>
+            </a:pPr>
+            <a:r>
+              <a:rPr lang="en-US" sz="1000" b="1" spc="250" kern="0" dirty="0">
+                <a:solidFill>
+                  <a:srgbClr val="B98A2E"/>
+                </a:solidFill>
+                <a:latin typeface="Arial" pitchFamily="34" charset="0"/>
+                <a:ea typeface="Arial" pitchFamily="34" charset="-122"/>
+                <a:cs typeface="Arial" pitchFamily="34" charset="-120"/>
+              </a:rPr>
+              <a:t>BASIC IM</a:t>
+            </a:r>
+            <a:endParaRPr lang="en-US" sz="1000" dirty="0"/>
+          </a:p>
+        </p:txBody>
+      </p:sp>
+      <p:sp>
+        <p:nvSpPr>
+          <p:cNvPr id="11" name="Text 9"/>
+          <p:cNvSpPr/>
+          <p:nvPr/>
+        </p:nvSpPr>
+        <p:spPr>
+          <a:xfrm>
+            <a:off x="566928" y="2304288"/>
+            <a:ext cx="7315200" cy="731520"/>
+          </a:xfrm>
+          <a:prstGeom prst="rect">
+            <a:avLst/>
+          </a:prstGeom>
+          <a:noFill/>
+          <a:ln/>
+        </p:spPr>
+        <p:txBody>
+          <a:bodyPr wrap="square" lIns="0" tIns="0" rIns="0" bIns="0" rtlCol="0" anchor="ctr"/>
+          <a:lstStyle/>
+          <a:p>
+            <a:pPr algn="l" indent="0" marL="0">
+              <a:buNone/>
+            </a:pPr>
+            <a:r>
+              <a:rPr lang="en-US" sz="4000" b="1" dirty="0">
+                <a:solidFill>
+                  <a:srgbClr val="FFFFFF"/>
                 </a:solidFill>
                 <a:latin typeface="Pretendard" pitchFamily="34" charset="0"/>
                 <a:ea typeface="Pretendard" pitchFamily="34" charset="-122"/>
                 <a:cs typeface="Pretendard" pitchFamily="34" charset="-120"/>
               </a:rPr>
-              <a:t>상업용 부동산 투자 플랫폼</a:t>
-            </a:r>
-            <a:endParaRPr lang="en-US" sz="1000" dirty="0"/>
-          </a:p>
-        </p:txBody>
-      </p:sp>
-      <p:sp>
-        <p:nvSpPr>
-          <p:cNvPr id="10" name="Text 8"/>
-          <p:cNvSpPr/>
-          <p:nvPr/>
-        </p:nvSpPr>
-        <p:spPr>
-          <a:xfrm>
-            <a:off x="566928" y="2029968"/>
-            <a:ext cx="7315200" cy="274320"/>
-          </a:xfrm>
-          <a:prstGeom prst="rect">
-            <a:avLst/>
-          </a:prstGeom>
-          <a:noFill/>
-          <a:ln/>
-        </p:spPr>
-        <p:txBody>
-          <a:bodyPr wrap="square" lIns="0" tIns="0" rIns="0" bIns="0" rtlCol="0" anchor="ctr"/>
-          <a:lstStyle/>
-          <a:p>
-            <a:pPr algn="l" indent="0" marL="0">
-              <a:buNone/>
-            </a:pPr>
-            <a:r>
-              <a:rPr lang="en-US" sz="1000" b="1" spc="250" kern="0" dirty="0">
-                <a:solidFill>
-                  <a:srgbClr val="6B8E00"/>
-                </a:solidFill>
-                <a:latin typeface="Arial" pitchFamily="34" charset="0"/>
-                <a:ea typeface="Arial" pitchFamily="34" charset="-122"/>
-                <a:cs typeface="Arial" pitchFamily="34" charset="-120"/>
-              </a:rPr>
-              <a:t>BASIC IM</a:t>
-            </a:r>
-            <a:endParaRPr lang="en-US" sz="1000" dirty="0"/>
-          </a:p>
-        </p:txBody>
-      </p:sp>
-      <p:sp>
-        <p:nvSpPr>
-          <p:cNvPr id="11" name="Text 9"/>
-          <p:cNvSpPr/>
-          <p:nvPr/>
-        </p:nvSpPr>
-        <p:spPr>
-          <a:xfrm>
-            <a:off x="566928" y="2304288"/>
-            <a:ext cx="7315200" cy="731520"/>
-          </a:xfrm>
-          <a:prstGeom prst="rect">
-            <a:avLst/>
-          </a:prstGeom>
-          <a:noFill/>
-          <a:ln/>
-        </p:spPr>
-        <p:txBody>
-          <a:bodyPr wrap="square" lIns="0" tIns="0" rIns="0" bIns="0" rtlCol="0" anchor="ctr"/>
-          <a:lstStyle/>
-          <a:p>
-            <a:pPr algn="l" indent="0" marL="0">
-              <a:buNone/>
-            </a:pPr>
-            <a:r>
-              <a:rPr lang="en-US" sz="4000" b="1" dirty="0">
-                <a:solidFill>
-                  <a:srgbClr val="FFFFFF"/>
-                </a:solidFill>
-                <a:latin typeface="Pretendard" pitchFamily="34" charset="0"/>
-                <a:ea typeface="Pretendard" pitchFamily="34" charset="-122"/>
-                <a:cs typeface="Pretendard" pitchFamily="34" charset="-120"/>
-              </a:rPr>
               <a:t>development IM</a:t>
             </a:r>
             <a:endParaRPr lang="en-US" sz="4000" dirty="0"/>
@@ -1998,7 +1977,7 @@
             <a:r>
               <a:rPr lang="en-US" sz="1400" dirty="0">
                 <a:solidFill>
-                  <a:srgbClr val="F1F5F9"/>
+                  <a:srgbClr val="E2E8F0"/>
                 </a:solidFill>
                 <a:latin typeface="Pretendard" pitchFamily="34" charset="0"/>
                 <a:ea typeface="Pretendard" pitchFamily="34" charset="-122"/>
@@ -2027,7 +2006,7 @@
             </a:avLst>
           </a:prstGeom>
           <a:solidFill>
-            <a:srgbClr val="334155"/>
+            <a:srgbClr val="2D3748"/>
           </a:solidFill>
           <a:ln/>
         </p:spPr>
@@ -2088,7 +2067,7 @@
             </a:avLst>
           </a:prstGeom>
           <a:solidFill>
-            <a:srgbClr val="334155"/>
+            <a:srgbClr val="2D3748"/>
           </a:solidFill>
           <a:ln/>
         </p:spPr>
@@ -2149,11 +2128,11 @@
             </a:avLst>
           </a:prstGeom>
           <a:solidFill>
-            <a:srgbClr val="4F6A00"/>
+            <a:srgbClr val="977024"/>
           </a:solidFill>
           <a:ln w="12700">
             <a:solidFill>
-              <a:srgbClr val="6B8E00"/>
+              <a:srgbClr val="B98A2E"/>
             </a:solidFill>
             <a:prstDash val="solid"/>
           </a:ln>
@@ -2186,7 +2165,7 @@
             <a:r>
               <a:rPr lang="en-US" sz="2200" b="1" dirty="0">
                 <a:solidFill>
-                  <a:srgbClr val="E8F5CC"/>
+                  <a:srgbClr val="F3EBDA"/>
                 </a:solidFill>
                 <a:latin typeface="Pretendard" pitchFamily="34" charset="0"/>
                 <a:ea typeface="Pretendard" pitchFamily="34" charset="-122"/>
@@ -2234,59 +2213,75 @@
         </p:nvSpPr>
         <p:spPr>
           <a:xfrm>
-            <a:off x="566928" y="6419088"/>
-            <a:ext cx="11057839" cy="201168"/>
-          </a:xfrm>
-          <a:prstGeom prst="rect">
-            <a:avLst/>
-          </a:prstGeom>
-          <a:noFill/>
-          <a:ln/>
-        </p:spPr>
-        <p:txBody>
-          <a:bodyPr wrap="square" lIns="0" tIns="0" rIns="0" bIns="0" rtlCol="0" anchor="ctr"/>
-          <a:lstStyle/>
-          <a:p>
-            <a:pPr algn="ctr" indent="0" marL="0">
-              <a:buNone/>
-            </a:pPr>
-            <a:r>
-              <a:rPr lang="en-US" sz="750" dirty="0">
-                <a:solidFill>
-                  <a:srgbClr val="64748B"/>
+            <a:off x="566928" y="6382512"/>
+            <a:ext cx="7315200" cy="219456"/>
+          </a:xfrm>
+          <a:prstGeom prst="rect">
+            <a:avLst/>
+          </a:prstGeom>
+          <a:noFill/>
+          <a:ln/>
+        </p:spPr>
+        <p:txBody>
+          <a:bodyPr wrap="square" lIns="0" tIns="0" rIns="0" bIns="0" rtlCol="0" anchor="ctr"/>
+          <a:lstStyle/>
+          <a:p>
+            <a:pPr indent="0" marL="0">
+              <a:buNone/>
+            </a:pPr>
+            <a:r>
+              <a:rPr lang="en-US" sz="800" dirty="0">
+                <a:solidFill>
+                  <a:srgbClr val="718096"/>
                 </a:solidFill>
                 <a:latin typeface="Pretendard" pitchFamily="34" charset="0"/>
                 <a:ea typeface="Pretendard" pitchFamily="34" charset="-122"/>
                 <a:cs typeface="Pretendard" pitchFamily="34" charset="-120"/>
               </a:rPr>
-              <a:t>크리딜  ·    ·  1</a:t>
-            </a:r>
-            <a:endParaRPr lang="en-US" sz="750" dirty="0"/>
-          </a:p>
-        </p:txBody>
-      </p:sp>
-      <p:sp>
-        <p:nvSpPr>
-          <p:cNvPr id="21" name="Shape 19"/>
-          <p:cNvSpPr/>
-          <p:nvPr/>
-        </p:nvSpPr>
-        <p:spPr>
-          <a:xfrm>
-            <a:off x="4437172" y="6382512"/>
-            <a:ext cx="3317352" cy="0"/>
-          </a:xfrm>
-          <a:prstGeom prst="line">
-            <a:avLst/>
-          </a:prstGeom>
-          <a:noFill/>
-          <a:ln w="6350">
-            <a:solidFill>
-              <a:srgbClr val="6B8E00"/>
-            </a:solidFill>
-            <a:prstDash val="solid"/>
-          </a:ln>
-        </p:spPr>
+              <a:t>크리딜   |   </a:t>
+            </a:r>
+            <a:endParaRPr lang="en-US" sz="800" dirty="0"/>
+          </a:p>
+        </p:txBody>
+      </p:sp>
+      <p:sp>
+        <p:nvSpPr>
+          <p:cNvPr id="21" name="Text 19"/>
+          <p:cNvSpPr/>
+          <p:nvPr/>
+        </p:nvSpPr>
+        <p:spPr>
+          <a:xfrm>
+            <a:off x="10710367" y="6382512"/>
+            <a:ext cx="914400" cy="219456"/>
+          </a:xfrm>
+          <a:prstGeom prst="rect">
+            <a:avLst/>
+          </a:prstGeom>
+          <a:noFill/>
+          <a:ln/>
+        </p:spPr>
+        <p:txBody>
+          <a:bodyPr wrap="square" lIns="0" tIns="0" rIns="0" bIns="0" rtlCol="0" anchor="ctr"/>
+          <a:lstStyle/>
+          <a:p>
+            <a:pPr algn="r" indent="0" marL="0">
+              <a:buNone/>
+            </a:pPr>
+            <a:r>
+              <a:rPr lang="en-US" sz="900" b="1" dirty="0">
+                <a:solidFill>
+                  <a:srgbClr val="B98A2E"/>
+                </a:solidFill>
+                <a:latin typeface="Arial" pitchFamily="34" charset="0"/>
+                <a:ea typeface="Arial" pitchFamily="34" charset="-122"/>
+                <a:cs typeface="Arial" pitchFamily="34" charset="-120"/>
+              </a:rPr>
+              <a:t>1</a:t>
+            </a:r>
+            <a:endParaRPr lang="en-US" sz="900" dirty="0"/>
+          </a:p>
+        </p:txBody>
       </p:sp>
     </p:spTree>
   </p:cSld>
@@ -2302,7 +2297,7 @@
     <p:bg>
       <p:bgPr>
         <a:solidFill>
-          <a:srgbClr val="0F172A"/>
+          <a:srgbClr val="10161F"/>
         </a:solidFill>
       </p:bgPr>
     </p:bg>
@@ -2328,14 +2323,14 @@
         </p:nvSpPr>
         <p:spPr>
           <a:xfrm>
-            <a:off x="566928" y="384048"/>
-            <a:ext cx="45720" cy="566928"/>
-          </a:xfrm>
-          <a:prstGeom prst="rect">
+            <a:off x="566928" y="457200"/>
+            <a:ext cx="384048" cy="384048"/>
+          </a:xfrm>
+          <a:prstGeom prst="ellipse">
             <a:avLst/>
           </a:prstGeom>
           <a:solidFill>
-            <a:srgbClr val="6B8E00"/>
+            <a:srgbClr val="B98A2E"/>
           </a:solidFill>
           <a:ln/>
         </p:spPr>
@@ -2348,32 +2343,71 @@
         </p:nvSpPr>
         <p:spPr>
           <a:xfrm>
-            <a:off x="749808" y="384048"/>
-            <a:ext cx="10874959" cy="182880"/>
-          </a:xfrm>
-          <a:prstGeom prst="rect">
-            <a:avLst/>
-          </a:prstGeom>
-          <a:noFill/>
-          <a:ln/>
-        </p:spPr>
-        <p:txBody>
-          <a:bodyPr wrap="square" lIns="0" tIns="0" rIns="0" bIns="0" rtlCol="0" anchor="ctr"/>
-          <a:lstStyle/>
-          <a:p>
-            <a:pPr indent="0" marL="0">
-              <a:buNone/>
-            </a:pPr>
-            <a:r>
-              <a:rPr lang="en-US" sz="950" b="1" spc="200" kern="0" dirty="0">
-                <a:solidFill>
-                  <a:srgbClr val="6B8E00"/>
+            <a:off x="566928" y="457200"/>
+            <a:ext cx="384048" cy="384048"/>
+          </a:xfrm>
+          <a:prstGeom prst="rect">
+            <a:avLst/>
+          </a:prstGeom>
+          <a:noFill/>
+          <a:ln/>
+        </p:spPr>
+        <p:txBody>
+          <a:bodyPr wrap="square" lIns="0" tIns="0" rIns="0" bIns="0" rtlCol="0" anchor="ctr"/>
+          <a:lstStyle/>
+          <a:p>
+            <a:pPr algn="ctr" indent="0" marL="0">
+              <a:buNone/>
+            </a:pPr>
+            <a:r>
+              <a:rPr lang="en-US" sz="1300" b="1" dirty="0">
+                <a:solidFill>
+                  <a:srgbClr val="FFFFFF"/>
                 </a:solidFill>
                 <a:latin typeface="Arial" pitchFamily="34" charset="0"/>
                 <a:ea typeface="Arial" pitchFamily="34" charset="-122"/>
                 <a:cs typeface="Arial" pitchFamily="34" charset="-120"/>
               </a:rPr>
-              <a:t>10  Disclaimer</a:t>
+              <a:t>10</a:t>
+            </a:r>
+            <a:endParaRPr lang="en-US" sz="1300" dirty="0"/>
+          </a:p>
+        </p:txBody>
+      </p:sp>
+      <p:sp>
+        <p:nvSpPr>
+          <p:cNvPr id="4" name="Text 2"/>
+          <p:cNvSpPr/>
+          <p:nvPr/>
+        </p:nvSpPr>
+        <p:spPr>
+          <a:xfrm>
+            <a:off x="1133856" y="457200"/>
+            <a:ext cx="10490911" cy="182880"/>
+          </a:xfrm>
+          <a:prstGeom prst="rect">
+            <a:avLst/>
+          </a:prstGeom>
+          <a:noFill/>
+          <a:ln/>
+        </p:spPr>
+        <p:txBody>
+          <a:bodyPr wrap="square" lIns="0" tIns="0" rIns="0" bIns="0" rtlCol="0" anchor="ctr"/>
+          <a:lstStyle/>
+          <a:p>
+            <a:pPr indent="0" marL="0">
+              <a:buNone/>
+            </a:pPr>
+            <a:r>
+              <a:rPr lang="en-US" sz="950" b="1" spc="200" kern="0" dirty="0">
+                <a:solidFill>
+                  <a:srgbClr val="B98A2E"/>
+                </a:solidFill>
+                <a:latin typeface="Arial" pitchFamily="34" charset="0"/>
+                <a:ea typeface="Arial" pitchFamily="34" charset="-122"/>
+                <a:cs typeface="Arial" pitchFamily="34" charset="-120"/>
+              </a:rPr>
+              <a:t>Disclaimer</a:t>
             </a:r>
             <a:endParaRPr lang="en-US" sz="950" dirty="0"/>
           </a:p>
@@ -2381,14 +2415,14 @@
       </p:sp>
       <p:sp>
         <p:nvSpPr>
-          <p:cNvPr id="4" name="Text 2"/>
-          <p:cNvSpPr/>
-          <p:nvPr/>
-        </p:nvSpPr>
-        <p:spPr>
-          <a:xfrm>
-            <a:off x="749808" y="566928"/>
-            <a:ext cx="10874959" cy="384048"/>
+          <p:cNvPr id="5" name="Text 3"/>
+          <p:cNvSpPr/>
+          <p:nvPr/>
+        </p:nvSpPr>
+        <p:spPr>
+          <a:xfrm>
+            <a:off x="1133856" y="658368"/>
+            <a:ext cx="10490911" cy="420624"/>
           </a:xfrm>
           <a:prstGeom prst="rect">
             <a:avLst/>
@@ -2404,7 +2438,7 @@
               <a:buNone/>
             </a:pPr>
             <a:r>
-              <a:rPr lang="en-US" sz="2200" b="1" dirty="0">
+              <a:rPr lang="en-US" sz="2400" b="1" dirty="0">
                 <a:solidFill>
                   <a:srgbClr val="FFFFFF"/>
                 </a:solidFill>
@@ -2414,20 +2448,101 @@
               </a:rPr>
               <a:t>표기 기준 및 면책</a:t>
             </a:r>
-            <a:endParaRPr lang="en-US" sz="2200" dirty="0"/>
-          </a:p>
-        </p:txBody>
-      </p:sp>
-      <p:sp>
-        <p:nvSpPr>
-          <p:cNvPr id="5" name="Text 3"/>
-          <p:cNvSpPr/>
-          <p:nvPr/>
-        </p:nvSpPr>
-        <p:spPr>
-          <a:xfrm>
-            <a:off x="566928" y="1517904"/>
-            <a:ext cx="5486400" cy="237744"/>
+            <a:endParaRPr lang="en-US" sz="2400" dirty="0"/>
+          </a:p>
+        </p:txBody>
+      </p:sp>
+      <p:sp>
+        <p:nvSpPr>
+          <p:cNvPr id="6" name="Shape 4"/>
+          <p:cNvSpPr/>
+          <p:nvPr/>
+        </p:nvSpPr>
+        <p:spPr>
+          <a:xfrm>
+            <a:off x="566928" y="1463040"/>
+            <a:ext cx="3588410" cy="658368"/>
+          </a:xfrm>
+          <a:prstGeom prst="roundRect">
+            <a:avLst>
+              <a:gd name="adj" fmla="val 5556"/>
+            </a:avLst>
+          </a:prstGeom>
+          <a:solidFill>
+            <a:srgbClr val="2D3748"/>
+          </a:solidFill>
+          <a:ln/>
+        </p:spPr>
+      </p:sp>
+      <p:sp>
+        <p:nvSpPr>
+          <p:cNvPr id="7" name="Shape 5"/>
+          <p:cNvSpPr/>
+          <p:nvPr/>
+        </p:nvSpPr>
+        <p:spPr>
+          <a:xfrm>
+            <a:off x="676656" y="1572768"/>
+            <a:ext cx="438912" cy="438912"/>
+          </a:xfrm>
+          <a:prstGeom prst="ellipse">
+            <a:avLst/>
+          </a:prstGeom>
+          <a:solidFill>
+            <a:srgbClr val="B98A2E"/>
+          </a:solidFill>
+          <a:ln/>
+        </p:spPr>
+      </p:sp>
+      <p:sp>
+        <p:nvSpPr>
+          <p:cNvPr id="8" name="Text 6"/>
+          <p:cNvSpPr/>
+          <p:nvPr/>
+        </p:nvSpPr>
+        <p:spPr>
+          <a:xfrm>
+            <a:off x="676656" y="1572768"/>
+            <a:ext cx="438912" cy="438912"/>
+          </a:xfrm>
+          <a:prstGeom prst="rect">
+            <a:avLst/>
+          </a:prstGeom>
+          <a:noFill/>
+          <a:ln/>
+        </p:spPr>
+        <p:txBody>
+          <a:bodyPr wrap="square" lIns="0" tIns="0" rIns="0" bIns="0" rtlCol="0" anchor="ctr"/>
+          <a:lstStyle/>
+          <a:p>
+            <a:pPr algn="ctr" indent="0" marL="0">
+              <a:buNone/>
+            </a:pPr>
+            <a:r>
+              <a:rPr lang="en-US" sz="1400" b="1" dirty="0">
+                <a:solidFill>
+                  <a:srgbClr val="FFFFFF"/>
+                </a:solidFill>
+                <a:latin typeface="Arial" pitchFamily="34" charset="0"/>
+                <a:ea typeface="Arial" pitchFamily="34" charset="-122"/>
+                <a:cs typeface="Arial" pitchFamily="34" charset="-120"/>
+              </a:rPr>
+              <a:t>01</a:t>
+            </a:r>
+            <a:endParaRPr lang="en-US" sz="1400" dirty="0"/>
+          </a:p>
+        </p:txBody>
+      </p:sp>
+      <p:sp>
+        <p:nvSpPr>
+          <p:cNvPr id="9" name="Text 7"/>
+          <p:cNvSpPr/>
+          <p:nvPr/>
+        </p:nvSpPr>
+        <p:spPr>
+          <a:xfrm>
+            <a:off x="1225296" y="1554480"/>
+            <a:ext cx="2820314" cy="237744"/>
           </a:xfrm>
           <a:prstGeom prst="rect">
             <a:avLst/>
@@ -2451,7 +2566,7 @@
                 <a:ea typeface="Pretendard" pitchFamily="34" charset="-122"/>
                 <a:cs typeface="Pretendard" pitchFamily="34" charset="-120"/>
               </a:rPr>
-              <a:t>데이터 출처 표기</a:t>
+              <a:t>관심 표명</a:t>
             </a:r>
             <a:endParaRPr lang="en-US" sz="1100" dirty="0"/>
           </a:p>
@@ -2459,130 +2574,150 @@
       </p:sp>
       <p:sp>
         <p:nvSpPr>
-          <p:cNvPr id="6" name="Shape 4"/>
-          <p:cNvSpPr/>
-          <p:nvPr/>
-        </p:nvSpPr>
-        <p:spPr>
-          <a:xfrm>
-            <a:off x="566928" y="1847088"/>
-            <a:ext cx="1417320" cy="347472"/>
-          </a:xfrm>
-          <a:prstGeom prst="roundRect">
-            <a:avLst>
-              <a:gd name="adj" fmla="val 10526"/>
-            </a:avLst>
-          </a:prstGeom>
-          <a:solidFill>
-            <a:srgbClr val="334155"/>
-          </a:solidFill>
-          <a:ln/>
-        </p:spPr>
-      </p:sp>
-      <p:sp>
-        <p:nvSpPr>
-          <p:cNvPr id="7" name="Text 5"/>
-          <p:cNvSpPr/>
-          <p:nvPr/>
-        </p:nvSpPr>
-        <p:spPr>
-          <a:xfrm>
-            <a:off x="566928" y="1847088"/>
-            <a:ext cx="1417320" cy="347472"/>
-          </a:xfrm>
-          <a:prstGeom prst="rect">
-            <a:avLst/>
-          </a:prstGeom>
-          <a:noFill/>
-          <a:ln/>
-        </p:spPr>
-        <p:txBody>
-          <a:bodyPr wrap="square" lIns="0" tIns="0" rIns="0" bIns="0" rtlCol="0" anchor="ctr"/>
-          <a:lstStyle/>
-          <a:p>
-            <a:pPr algn="ctr" indent="0" marL="0">
-              <a:buNone/>
-            </a:pPr>
-            <a:r>
-              <a:rPr lang="en-US" sz="950" b="1" dirty="0">
-                <a:solidFill>
-                  <a:srgbClr val="FFFFFF"/>
+          <p:cNvPr id="10" name="Text 8"/>
+          <p:cNvSpPr/>
+          <p:nvPr/>
+        </p:nvSpPr>
+        <p:spPr>
+          <a:xfrm>
+            <a:off x="1225296" y="1792224"/>
+            <a:ext cx="2820314" cy="256032"/>
+          </a:xfrm>
+          <a:prstGeom prst="rect">
+            <a:avLst/>
+          </a:prstGeom>
+          <a:noFill/>
+          <a:ln/>
+        </p:spPr>
+        <p:txBody>
+          <a:bodyPr wrap="square" lIns="0" tIns="0" rIns="0" bIns="0" rtlCol="0" anchor="t"/>
+          <a:lstStyle/>
+          <a:p>
+            <a:pPr indent="0" marL="0">
+              <a:buNone/>
+            </a:pPr>
+            <a:r>
+              <a:rPr lang="en-US" sz="850" dirty="0">
+                <a:solidFill>
+                  <a:srgbClr val="A0AEC0"/>
                 </a:solidFill>
                 <a:latin typeface="Pretendard" pitchFamily="34" charset="0"/>
                 <a:ea typeface="Pretendard" pitchFamily="34" charset="-122"/>
                 <a:cs typeface="Pretendard" pitchFamily="34" charset="-120"/>
               </a:rPr>
-              <a:t>✓ 공부확인</a:t>
-            </a:r>
-            <a:endParaRPr lang="en-US" sz="950" dirty="0"/>
-          </a:p>
-        </p:txBody>
-      </p:sp>
-      <p:sp>
-        <p:nvSpPr>
-          <p:cNvPr id="8" name="Text 6"/>
-          <p:cNvSpPr/>
-          <p:nvPr/>
-        </p:nvSpPr>
-        <p:spPr>
-          <a:xfrm>
-            <a:off x="2139696" y="1828800"/>
-            <a:ext cx="3566160" cy="420624"/>
-          </a:xfrm>
-          <a:prstGeom prst="rect">
-            <a:avLst/>
-          </a:prstGeom>
-          <a:noFill/>
-          <a:ln/>
-        </p:spPr>
-        <p:txBody>
-          <a:bodyPr wrap="square" lIns="0" tIns="0" rIns="0" bIns="0" rtlCol="0" anchor="ctr"/>
-          <a:lstStyle/>
-          <a:p>
-            <a:pPr indent="0" marL="0">
-              <a:buNone/>
-            </a:pPr>
-            <a:r>
-              <a:rPr lang="en-US" sz="1000" dirty="0">
-                <a:solidFill>
-                  <a:srgbClr val="F1F5F9"/>
+              <a:t>담당 중개사에게 초기 관심 표명 및 상담 요청</a:t>
+            </a:r>
+            <a:endParaRPr lang="en-US" sz="850" dirty="0"/>
+          </a:p>
+        </p:txBody>
+      </p:sp>
+      <p:sp>
+        <p:nvSpPr>
+          <p:cNvPr id="11" name="Text 9"/>
+          <p:cNvSpPr/>
+          <p:nvPr/>
+        </p:nvSpPr>
+        <p:spPr>
+          <a:xfrm>
+            <a:off x="4155338" y="1600200"/>
+            <a:ext cx="146304" cy="384048"/>
+          </a:xfrm>
+          <a:prstGeom prst="rect">
+            <a:avLst/>
+          </a:prstGeom>
+          <a:noFill/>
+          <a:ln/>
+        </p:spPr>
+        <p:txBody>
+          <a:bodyPr wrap="square" lIns="0" tIns="0" rIns="0" bIns="0" rtlCol="0" anchor="ctr"/>
+          <a:lstStyle/>
+          <a:p>
+            <a:pPr algn="ctr" indent="0" marL="0">
+              <a:buNone/>
+            </a:pPr>
+            <a:r>
+              <a:rPr lang="en-US" sz="1600" dirty="0">
+                <a:solidFill>
+                  <a:srgbClr val="B98A2E"/>
                 </a:solidFill>
                 <a:latin typeface="Pretendard" pitchFamily="34" charset="0"/>
                 <a:ea typeface="Pretendard" pitchFamily="34" charset="-122"/>
                 <a:cs typeface="Pretendard" pitchFamily="34" charset="-120"/>
               </a:rPr>
-              <a:t>등기부·대장 등 공적 장부 직접 확인</a:t>
-            </a:r>
-            <a:endParaRPr lang="en-US" sz="1000" dirty="0"/>
-          </a:p>
-        </p:txBody>
-      </p:sp>
-      <p:sp>
-        <p:nvSpPr>
-          <p:cNvPr id="9" name="Text 7"/>
-          <p:cNvSpPr/>
-          <p:nvPr/>
-        </p:nvSpPr>
-        <p:spPr>
-          <a:xfrm>
-            <a:off x="5504688" y="1847088"/>
-            <a:ext cx="731520" cy="292608"/>
-          </a:xfrm>
-          <a:prstGeom prst="rect">
-            <a:avLst/>
-          </a:prstGeom>
-          <a:noFill/>
-          <a:ln/>
-        </p:spPr>
-        <p:txBody>
-          <a:bodyPr wrap="square" lIns="0" tIns="0" rIns="0" bIns="0" rtlCol="0" anchor="ctr"/>
-          <a:lstStyle/>
-          <a:p>
-            <a:pPr algn="r" indent="0" marL="0">
-              <a:buNone/>
-            </a:pPr>
-            <a:r>
-              <a:rPr lang="en-US" sz="1200" b="1" dirty="0">
+              <a:t>→</a:t>
+            </a:r>
+            <a:endParaRPr lang="en-US" sz="1600" dirty="0"/>
+          </a:p>
+        </p:txBody>
+      </p:sp>
+      <p:sp>
+        <p:nvSpPr>
+          <p:cNvPr id="12" name="Shape 10"/>
+          <p:cNvSpPr/>
+          <p:nvPr/>
+        </p:nvSpPr>
+        <p:spPr>
+          <a:xfrm>
+            <a:off x="4301642" y="1463040"/>
+            <a:ext cx="3588410" cy="658368"/>
+          </a:xfrm>
+          <a:prstGeom prst="roundRect">
+            <a:avLst>
+              <a:gd name="adj" fmla="val 5556"/>
+            </a:avLst>
+          </a:prstGeom>
+          <a:solidFill>
+            <a:srgbClr val="2D3748"/>
+          </a:solidFill>
+          <a:ln/>
+        </p:spPr>
+      </p:sp>
+      <p:sp>
+        <p:nvSpPr>
+          <p:cNvPr id="13" name="Shape 11"/>
+          <p:cNvSpPr/>
+          <p:nvPr/>
+        </p:nvSpPr>
+        <p:spPr>
+          <a:xfrm>
+            <a:off x="4411370" y="1572768"/>
+            <a:ext cx="438912" cy="438912"/>
+          </a:xfrm>
+          <a:prstGeom prst="ellipse">
+            <a:avLst/>
+          </a:prstGeom>
+          <a:solidFill>
+            <a:srgbClr val="B98A2E"/>
+          </a:solidFill>
+          <a:ln/>
+        </p:spPr>
+      </p:sp>
+      <p:sp>
+        <p:nvSpPr>
+          <p:cNvPr id="14" name="Text 12"/>
+          <p:cNvSpPr/>
+          <p:nvPr/>
+        </p:nvSpPr>
+        <p:spPr>
+          <a:xfrm>
+            <a:off x="4411370" y="1572768"/>
+            <a:ext cx="438912" cy="438912"/>
+          </a:xfrm>
+          <a:prstGeom prst="rect">
+            <a:avLst/>
+          </a:prstGeom>
+          <a:noFill/>
+          <a:ln/>
+        </p:spPr>
+        <p:txBody>
+          <a:bodyPr wrap="square" lIns="0" tIns="0" rIns="0" bIns="0" rtlCol="0" anchor="ctr"/>
+          <a:lstStyle/>
+          <a:p>
+            <a:pPr algn="ctr" indent="0" marL="0">
+              <a:buNone/>
+            </a:pPr>
+            <a:r>
+              <a:rPr lang="en-US" sz="1400" b="1" dirty="0">
                 <a:solidFill>
                   <a:srgbClr val="FFFFFF"/>
                 </a:solidFill>
@@ -2590,60 +2725,38 @@
                 <a:ea typeface="Arial" pitchFamily="34" charset="-122"/>
                 <a:cs typeface="Arial" pitchFamily="34" charset="-120"/>
               </a:rPr>
-              <a:t>1.00</a:t>
-            </a:r>
-            <a:endParaRPr lang="en-US" sz="1200" dirty="0"/>
-          </a:p>
-        </p:txBody>
-      </p:sp>
-      <p:sp>
-        <p:nvSpPr>
-          <p:cNvPr id="10" name="Shape 8"/>
-          <p:cNvSpPr/>
-          <p:nvPr/>
-        </p:nvSpPr>
-        <p:spPr>
-          <a:xfrm>
-            <a:off x="566928" y="2505456"/>
-            <a:ext cx="1417320" cy="347472"/>
-          </a:xfrm>
-          <a:prstGeom prst="roundRect">
-            <a:avLst>
-              <a:gd name="adj" fmla="val 10526"/>
-            </a:avLst>
-          </a:prstGeom>
-          <a:solidFill>
-            <a:srgbClr val="334155"/>
-          </a:solidFill>
-          <a:ln/>
-        </p:spPr>
-      </p:sp>
-      <p:sp>
-        <p:nvSpPr>
-          <p:cNvPr id="11" name="Text 9"/>
-          <p:cNvSpPr/>
-          <p:nvPr/>
-        </p:nvSpPr>
-        <p:spPr>
-          <a:xfrm>
-            <a:off x="566928" y="2505456"/>
-            <a:ext cx="1417320" cy="347472"/>
-          </a:xfrm>
-          <a:prstGeom prst="rect">
-            <a:avLst/>
-          </a:prstGeom>
-          <a:noFill/>
-          <a:ln/>
-        </p:spPr>
-        <p:txBody>
-          <a:bodyPr wrap="square" lIns="0" tIns="0" rIns="0" bIns="0" rtlCol="0" anchor="ctr"/>
-          <a:lstStyle/>
-          <a:p>
-            <a:pPr algn="ctr" indent="0" marL="0">
-              <a:buNone/>
-            </a:pPr>
-            <a:r>
-              <a:rPr lang="en-US" sz="950" b="1" dirty="0">
+              <a:t>02</a:t>
+            </a:r>
+            <a:endParaRPr lang="en-US" sz="1400" dirty="0"/>
+          </a:p>
+        </p:txBody>
+      </p:sp>
+      <p:sp>
+        <p:nvSpPr>
+          <p:cNvPr id="15" name="Text 13"/>
+          <p:cNvSpPr/>
+          <p:nvPr/>
+        </p:nvSpPr>
+        <p:spPr>
+          <a:xfrm>
+            <a:off x="4960010" y="1554480"/>
+            <a:ext cx="2820314" cy="237744"/>
+          </a:xfrm>
+          <a:prstGeom prst="rect">
+            <a:avLst/>
+          </a:prstGeom>
+          <a:noFill/>
+          <a:ln/>
+        </p:spPr>
+        <p:txBody>
+          <a:bodyPr wrap="square" lIns="0" tIns="0" rIns="0" bIns="0" rtlCol="0" anchor="ctr"/>
+          <a:lstStyle/>
+          <a:p>
+            <a:pPr indent="0" marL="0">
+              <a:buNone/>
+            </a:pPr>
+            <a:r>
+              <a:rPr lang="en-US" sz="1100" b="1" dirty="0">
                 <a:solidFill>
                   <a:srgbClr val="FFFFFF"/>
                 </a:solidFill>
@@ -2651,77 +2764,158 @@
                 <a:ea typeface="Pretendard" pitchFamily="34" charset="-122"/>
                 <a:cs typeface="Pretendard" pitchFamily="34" charset="-120"/>
               </a:rPr>
-              <a:t>★ 전문가검증</a:t>
-            </a:r>
-            <a:endParaRPr lang="en-US" sz="950" dirty="0"/>
-          </a:p>
-        </p:txBody>
-      </p:sp>
-      <p:sp>
-        <p:nvSpPr>
-          <p:cNvPr id="12" name="Text 10"/>
-          <p:cNvSpPr/>
-          <p:nvPr/>
-        </p:nvSpPr>
-        <p:spPr>
-          <a:xfrm>
-            <a:off x="2139696" y="2487168"/>
-            <a:ext cx="3566160" cy="420624"/>
-          </a:xfrm>
-          <a:prstGeom prst="rect">
-            <a:avLst/>
-          </a:prstGeom>
-          <a:noFill/>
-          <a:ln/>
-        </p:spPr>
-        <p:txBody>
-          <a:bodyPr wrap="square" lIns="0" tIns="0" rIns="0" bIns="0" rtlCol="0" anchor="ctr"/>
+              <a:t>NDA 체결</a:t>
+            </a:r>
+            <a:endParaRPr lang="en-US" sz="1100" dirty="0"/>
+          </a:p>
+        </p:txBody>
+      </p:sp>
+      <p:sp>
+        <p:nvSpPr>
+          <p:cNvPr id="16" name="Text 14"/>
+          <p:cNvSpPr/>
+          <p:nvPr/>
+        </p:nvSpPr>
+        <p:spPr>
+          <a:xfrm>
+            <a:off x="4960010" y="1792224"/>
+            <a:ext cx="2820314" cy="256032"/>
+          </a:xfrm>
+          <a:prstGeom prst="rect">
+            <a:avLst/>
+          </a:prstGeom>
+          <a:noFill/>
+          <a:ln/>
+        </p:spPr>
+        <p:txBody>
+          <a:bodyPr wrap="square" lIns="0" tIns="0" rIns="0" bIns="0" rtlCol="0" anchor="t"/>
           <a:lstStyle/>
           <a:p>
             <a:pPr indent="0" marL="0">
               <a:buNone/>
             </a:pPr>
             <a:r>
-              <a:rPr lang="en-US" sz="1000" dirty="0">
-                <a:solidFill>
-                  <a:srgbClr val="F1F5F9"/>
+              <a:rPr lang="en-US" sz="850" dirty="0">
+                <a:solidFill>
+                  <a:srgbClr val="A0AEC0"/>
                 </a:solidFill>
                 <a:latin typeface="Pretendard" pitchFamily="34" charset="0"/>
                 <a:ea typeface="Pretendard" pitchFamily="34" charset="-122"/>
                 <a:cs typeface="Pretendard" pitchFamily="34" charset="-120"/>
               </a:rPr>
-              <a:t>세무사·감정평가사 등 전문가 확인</a:t>
-            </a:r>
-            <a:endParaRPr lang="en-US" sz="1000" dirty="0"/>
-          </a:p>
-        </p:txBody>
-      </p:sp>
-      <p:sp>
-        <p:nvSpPr>
-          <p:cNvPr id="13" name="Text 11"/>
-          <p:cNvSpPr/>
-          <p:nvPr/>
-        </p:nvSpPr>
-        <p:spPr>
-          <a:xfrm>
-            <a:off x="5504688" y="2505456"/>
-            <a:ext cx="731520" cy="292608"/>
-          </a:xfrm>
-          <a:prstGeom prst="rect">
-            <a:avLst/>
-          </a:prstGeom>
-          <a:noFill/>
-          <a:ln/>
-        </p:spPr>
-        <p:txBody>
-          <a:bodyPr wrap="square" lIns="0" tIns="0" rIns="0" bIns="0" rtlCol="0" anchor="ctr"/>
-          <a:lstStyle/>
-          <a:p>
-            <a:pPr algn="r" indent="0" marL="0">
-              <a:buNone/>
-            </a:pPr>
-            <a:r>
-              <a:rPr lang="en-US" sz="1200" b="1" dirty="0">
+              <a:t>비밀유지계약 후 상세 임대차·재무 자료 제공</a:t>
+            </a:r>
+            <a:endParaRPr lang="en-US" sz="850" dirty="0"/>
+          </a:p>
+        </p:txBody>
+      </p:sp>
+      <p:sp>
+        <p:nvSpPr>
+          <p:cNvPr id="17" name="Text 15"/>
+          <p:cNvSpPr/>
+          <p:nvPr/>
+        </p:nvSpPr>
+        <p:spPr>
+          <a:xfrm>
+            <a:off x="7890053" y="1600200"/>
+            <a:ext cx="146304" cy="384048"/>
+          </a:xfrm>
+          <a:prstGeom prst="rect">
+            <a:avLst/>
+          </a:prstGeom>
+          <a:noFill/>
+          <a:ln/>
+        </p:spPr>
+        <p:txBody>
+          <a:bodyPr wrap="square" lIns="0" tIns="0" rIns="0" bIns="0" rtlCol="0" anchor="ctr"/>
+          <a:lstStyle/>
+          <a:p>
+            <a:pPr algn="ctr" indent="0" marL="0">
+              <a:buNone/>
+            </a:pPr>
+            <a:r>
+              <a:rPr lang="en-US" sz="1600" dirty="0">
+                <a:solidFill>
+                  <a:srgbClr val="B98A2E"/>
+                </a:solidFill>
+                <a:latin typeface="Pretendard" pitchFamily="34" charset="0"/>
+                <a:ea typeface="Pretendard" pitchFamily="34" charset="-122"/>
+                <a:cs typeface="Pretendard" pitchFamily="34" charset="-120"/>
+              </a:rPr>
+              <a:t>→</a:t>
+            </a:r>
+            <a:endParaRPr lang="en-US" sz="1600" dirty="0"/>
+          </a:p>
+        </p:txBody>
+      </p:sp>
+      <p:sp>
+        <p:nvSpPr>
+          <p:cNvPr id="18" name="Shape 16"/>
+          <p:cNvSpPr/>
+          <p:nvPr/>
+        </p:nvSpPr>
+        <p:spPr>
+          <a:xfrm>
+            <a:off x="8036357" y="1463040"/>
+            <a:ext cx="3588410" cy="658368"/>
+          </a:xfrm>
+          <a:prstGeom prst="roundRect">
+            <a:avLst>
+              <a:gd name="adj" fmla="val 5556"/>
+            </a:avLst>
+          </a:prstGeom>
+          <a:solidFill>
+            <a:srgbClr val="2D3748"/>
+          </a:solidFill>
+          <a:ln/>
+        </p:spPr>
+      </p:sp>
+      <p:sp>
+        <p:nvSpPr>
+          <p:cNvPr id="19" name="Shape 17"/>
+          <p:cNvSpPr/>
+          <p:nvPr/>
+        </p:nvSpPr>
+        <p:spPr>
+          <a:xfrm>
+            <a:off x="8146085" y="1572768"/>
+            <a:ext cx="438912" cy="438912"/>
+          </a:xfrm>
+          <a:prstGeom prst="ellipse">
+            <a:avLst/>
+          </a:prstGeom>
+          <a:solidFill>
+            <a:srgbClr val="B98A2E"/>
+          </a:solidFill>
+          <a:ln/>
+        </p:spPr>
+      </p:sp>
+      <p:sp>
+        <p:nvSpPr>
+          <p:cNvPr id="20" name="Text 18"/>
+          <p:cNvSpPr/>
+          <p:nvPr/>
+        </p:nvSpPr>
+        <p:spPr>
+          <a:xfrm>
+            <a:off x="8146085" y="1572768"/>
+            <a:ext cx="438912" cy="438912"/>
+          </a:xfrm>
+          <a:prstGeom prst="rect">
+            <a:avLst/>
+          </a:prstGeom>
+          <a:noFill/>
+          <a:ln/>
+        </p:spPr>
+        <p:txBody>
+          <a:bodyPr wrap="square" lIns="0" tIns="0" rIns="0" bIns="0" rtlCol="0" anchor="ctr"/>
+          <a:lstStyle/>
+          <a:p>
+            <a:pPr algn="ctr" indent="0" marL="0">
+              <a:buNone/>
+            </a:pPr>
+            <a:r>
+              <a:rPr lang="en-US" sz="1400" b="1" dirty="0">
                 <a:solidFill>
                   <a:srgbClr val="FFFFFF"/>
                 </a:solidFill>
@@ -2729,60 +2923,38 @@
                 <a:ea typeface="Arial" pitchFamily="34" charset="-122"/>
                 <a:cs typeface="Arial" pitchFamily="34" charset="-120"/>
               </a:rPr>
-              <a:t>0.95</a:t>
-            </a:r>
-            <a:endParaRPr lang="en-US" sz="1200" dirty="0"/>
-          </a:p>
-        </p:txBody>
-      </p:sp>
-      <p:sp>
-        <p:nvSpPr>
-          <p:cNvPr id="14" name="Shape 12"/>
-          <p:cNvSpPr/>
-          <p:nvPr/>
-        </p:nvSpPr>
-        <p:spPr>
-          <a:xfrm>
-            <a:off x="566928" y="3163824"/>
-            <a:ext cx="1417320" cy="347472"/>
-          </a:xfrm>
-          <a:prstGeom prst="roundRect">
-            <a:avLst>
-              <a:gd name="adj" fmla="val 10526"/>
-            </a:avLst>
-          </a:prstGeom>
-          <a:solidFill>
-            <a:srgbClr val="334155"/>
-          </a:solidFill>
-          <a:ln/>
-        </p:spPr>
-      </p:sp>
-      <p:sp>
-        <p:nvSpPr>
-          <p:cNvPr id="15" name="Text 13"/>
-          <p:cNvSpPr/>
-          <p:nvPr/>
-        </p:nvSpPr>
-        <p:spPr>
-          <a:xfrm>
-            <a:off x="566928" y="3163824"/>
-            <a:ext cx="1417320" cy="347472"/>
-          </a:xfrm>
-          <a:prstGeom prst="rect">
-            <a:avLst/>
-          </a:prstGeom>
-          <a:noFill/>
-          <a:ln/>
-        </p:spPr>
-        <p:txBody>
-          <a:bodyPr wrap="square" lIns="0" tIns="0" rIns="0" bIns="0" rtlCol="0" anchor="ctr"/>
-          <a:lstStyle/>
-          <a:p>
-            <a:pPr algn="ctr" indent="0" marL="0">
-              <a:buNone/>
-            </a:pPr>
-            <a:r>
-              <a:rPr lang="en-US" sz="950" b="1" dirty="0">
+              <a:t>03</a:t>
+            </a:r>
+            <a:endParaRPr lang="en-US" sz="1400" dirty="0"/>
+          </a:p>
+        </p:txBody>
+      </p:sp>
+      <p:sp>
+        <p:nvSpPr>
+          <p:cNvPr id="21" name="Text 19"/>
+          <p:cNvSpPr/>
+          <p:nvPr/>
+        </p:nvSpPr>
+        <p:spPr>
+          <a:xfrm>
+            <a:off x="8694725" y="1554480"/>
+            <a:ext cx="2820314" cy="237744"/>
+          </a:xfrm>
+          <a:prstGeom prst="rect">
+            <a:avLst/>
+          </a:prstGeom>
+          <a:noFill/>
+          <a:ln/>
+        </p:spPr>
+        <p:txBody>
+          <a:bodyPr wrap="square" lIns="0" tIns="0" rIns="0" bIns="0" rtlCol="0" anchor="ctr"/>
+          <a:lstStyle/>
+          <a:p>
+            <a:pPr indent="0" marL="0">
+              <a:buNone/>
+            </a:pPr>
+            <a:r>
+              <a:rPr lang="en-US" sz="1100" b="1" dirty="0">
                 <a:solidFill>
                   <a:srgbClr val="FFFFFF"/>
                 </a:solidFill>
@@ -2790,138 +2962,77 @@
                 <a:ea typeface="Pretendard" pitchFamily="34" charset="-122"/>
                 <a:cs typeface="Pretendard" pitchFamily="34" charset="-120"/>
               </a:rPr>
-              <a:t>▲ 매도인고지</a:t>
-            </a:r>
-            <a:endParaRPr lang="en-US" sz="950" dirty="0"/>
-          </a:p>
-        </p:txBody>
-      </p:sp>
-      <p:sp>
-        <p:nvSpPr>
-          <p:cNvPr id="16" name="Text 14"/>
-          <p:cNvSpPr/>
-          <p:nvPr/>
-        </p:nvSpPr>
-        <p:spPr>
-          <a:xfrm>
-            <a:off x="2139696" y="3145536"/>
-            <a:ext cx="3566160" cy="420624"/>
-          </a:xfrm>
-          <a:prstGeom prst="rect">
-            <a:avLst/>
-          </a:prstGeom>
-          <a:noFill/>
-          <a:ln/>
-        </p:spPr>
-        <p:txBody>
-          <a:bodyPr wrap="square" lIns="0" tIns="0" rIns="0" bIns="0" rtlCol="0" anchor="ctr"/>
+              <a:t>현장 실사</a:t>
+            </a:r>
+            <a:endParaRPr lang="en-US" sz="1100" dirty="0"/>
+          </a:p>
+        </p:txBody>
+      </p:sp>
+      <p:sp>
+        <p:nvSpPr>
+          <p:cNvPr id="22" name="Text 20"/>
+          <p:cNvSpPr/>
+          <p:nvPr/>
+        </p:nvSpPr>
+        <p:spPr>
+          <a:xfrm>
+            <a:off x="8694725" y="1792224"/>
+            <a:ext cx="2820314" cy="256032"/>
+          </a:xfrm>
+          <a:prstGeom prst="rect">
+            <a:avLst/>
+          </a:prstGeom>
+          <a:noFill/>
+          <a:ln/>
+        </p:spPr>
+        <p:txBody>
+          <a:bodyPr wrap="square" lIns="0" tIns="0" rIns="0" bIns="0" rtlCol="0" anchor="t"/>
           <a:lstStyle/>
           <a:p>
             <a:pPr indent="0" marL="0">
               <a:buNone/>
             </a:pPr>
             <a:r>
-              <a:rPr lang="en-US" sz="1000" dirty="0">
-                <a:solidFill>
-                  <a:srgbClr val="F1F5F9"/>
+              <a:rPr lang="en-US" sz="850" dirty="0">
+                <a:solidFill>
+                  <a:srgbClr val="A0AEC0"/>
                 </a:solidFill>
                 <a:latin typeface="Pretendard" pitchFamily="34" charset="0"/>
                 <a:ea typeface="Pretendard" pitchFamily="34" charset="-122"/>
                 <a:cs typeface="Pretendard" pitchFamily="34" charset="-120"/>
               </a:rPr>
-              <a:t>매도인이 구두 또는 서면으로 고지</a:t>
-            </a:r>
-            <a:endParaRPr lang="en-US" sz="1000" dirty="0"/>
-          </a:p>
-        </p:txBody>
-      </p:sp>
-      <p:sp>
-        <p:nvSpPr>
-          <p:cNvPr id="17" name="Text 15"/>
-          <p:cNvSpPr/>
-          <p:nvPr/>
-        </p:nvSpPr>
-        <p:spPr>
-          <a:xfrm>
-            <a:off x="5504688" y="3163824"/>
-            <a:ext cx="731520" cy="292608"/>
-          </a:xfrm>
-          <a:prstGeom prst="rect">
-            <a:avLst/>
-          </a:prstGeom>
-          <a:noFill/>
-          <a:ln/>
-        </p:spPr>
-        <p:txBody>
-          <a:bodyPr wrap="square" lIns="0" tIns="0" rIns="0" bIns="0" rtlCol="0" anchor="ctr"/>
-          <a:lstStyle/>
-          <a:p>
-            <a:pPr algn="r" indent="0" marL="0">
-              <a:buNone/>
-            </a:pPr>
-            <a:r>
-              <a:rPr lang="en-US" sz="1200" b="1" dirty="0">
-                <a:solidFill>
-                  <a:srgbClr val="FFFFFF"/>
-                </a:solidFill>
-                <a:latin typeface="Arial" pitchFamily="34" charset="0"/>
-                <a:ea typeface="Arial" pitchFamily="34" charset="-122"/>
-                <a:cs typeface="Arial" pitchFamily="34" charset="-120"/>
-              </a:rPr>
-              <a:t>0.65</a:t>
-            </a:r>
-            <a:endParaRPr lang="en-US" sz="1200" dirty="0"/>
-          </a:p>
-        </p:txBody>
-      </p:sp>
-      <p:sp>
-        <p:nvSpPr>
-          <p:cNvPr id="18" name="Shape 16"/>
-          <p:cNvSpPr/>
-          <p:nvPr/>
-        </p:nvSpPr>
-        <p:spPr>
-          <a:xfrm>
-            <a:off x="566928" y="3822192"/>
-            <a:ext cx="1417320" cy="347472"/>
-          </a:xfrm>
-          <a:prstGeom prst="roundRect">
-            <a:avLst>
-              <a:gd name="adj" fmla="val 10526"/>
-            </a:avLst>
-          </a:prstGeom>
-          <a:solidFill>
-            <a:srgbClr val="334155"/>
-          </a:solidFill>
-          <a:ln/>
-        </p:spPr>
-      </p:sp>
-      <p:sp>
-        <p:nvSpPr>
-          <p:cNvPr id="19" name="Text 17"/>
-          <p:cNvSpPr/>
-          <p:nvPr/>
-        </p:nvSpPr>
-        <p:spPr>
-          <a:xfrm>
-            <a:off x="566928" y="3822192"/>
-            <a:ext cx="1417320" cy="347472"/>
-          </a:xfrm>
-          <a:prstGeom prst="rect">
-            <a:avLst/>
-          </a:prstGeom>
-          <a:noFill/>
-          <a:ln/>
-        </p:spPr>
-        <p:txBody>
-          <a:bodyPr wrap="square" lIns="0" tIns="0" rIns="0" bIns="0" rtlCol="0" anchor="ctr"/>
-          <a:lstStyle/>
-          <a:p>
-            <a:pPr algn="ctr" indent="0" marL="0">
-              <a:buNone/>
-            </a:pPr>
-            <a:r>
-              <a:rPr lang="en-US" sz="950" b="1" dirty="0">
+              <a:t>건물 컨디션 및 설비 직접 확인 후 의향서(LOI) 제출</a:t>
+            </a:r>
+            <a:endParaRPr lang="en-US" sz="850" dirty="0"/>
+          </a:p>
+        </p:txBody>
+      </p:sp>
+      <p:sp>
+        <p:nvSpPr>
+          <p:cNvPr id="23" name="Text 21"/>
+          <p:cNvSpPr/>
+          <p:nvPr/>
+        </p:nvSpPr>
+        <p:spPr>
+          <a:xfrm>
+            <a:off x="566928" y="2395728"/>
+            <a:ext cx="5486400" cy="237744"/>
+          </a:xfrm>
+          <a:prstGeom prst="rect">
+            <a:avLst/>
+          </a:prstGeom>
+          <a:noFill/>
+          <a:ln/>
+        </p:spPr>
+        <p:txBody>
+          <a:bodyPr wrap="square" lIns="0" tIns="0" rIns="0" bIns="0" rtlCol="0" anchor="ctr"/>
+          <a:lstStyle/>
+          <a:p>
+            <a:pPr indent="0" marL="0">
+              <a:buNone/>
+            </a:pPr>
+            <a:r>
+              <a:rPr lang="en-US" sz="1100" b="1" dirty="0">
                 <a:solidFill>
                   <a:srgbClr val="FFFFFF"/>
                 </a:solidFill>
@@ -2929,239 +3040,183 @@
                 <a:ea typeface="Pretendard" pitchFamily="34" charset="-122"/>
                 <a:cs typeface="Pretendard" pitchFamily="34" charset="-120"/>
               </a:rPr>
-              <a:t>● 중개인입력</a:t>
-            </a:r>
-            <a:endParaRPr lang="en-US" sz="950" dirty="0"/>
-          </a:p>
-        </p:txBody>
-      </p:sp>
-      <p:sp>
-        <p:nvSpPr>
-          <p:cNvPr id="20" name="Text 18"/>
-          <p:cNvSpPr/>
-          <p:nvPr/>
-        </p:nvSpPr>
-        <p:spPr>
-          <a:xfrm>
-            <a:off x="2139696" y="3803904"/>
-            <a:ext cx="3566160" cy="420624"/>
-          </a:xfrm>
-          <a:prstGeom prst="rect">
-            <a:avLst/>
-          </a:prstGeom>
-          <a:noFill/>
-          <a:ln/>
-        </p:spPr>
-        <p:txBody>
-          <a:bodyPr wrap="square" lIns="0" tIns="0" rIns="0" bIns="0" rtlCol="0" anchor="ctr"/>
-          <a:lstStyle/>
-          <a:p>
-            <a:pPr indent="0" marL="0">
-              <a:buNone/>
-            </a:pPr>
-            <a:r>
-              <a:rPr lang="en-US" sz="1000" dirty="0">
-                <a:solidFill>
-                  <a:srgbClr val="F1F5F9"/>
+              <a:t>데이터 출처 표기</a:t>
+            </a:r>
+            <a:endParaRPr lang="en-US" sz="1100" dirty="0"/>
+          </a:p>
+        </p:txBody>
+      </p:sp>
+      <p:sp>
+        <p:nvSpPr>
+          <p:cNvPr id="24" name="Shape 22"/>
+          <p:cNvSpPr/>
+          <p:nvPr/>
+        </p:nvSpPr>
+        <p:spPr>
+          <a:xfrm>
+            <a:off x="566928" y="2724912"/>
+            <a:ext cx="1280160" cy="292608"/>
+          </a:xfrm>
+          <a:prstGeom prst="roundRect">
+            <a:avLst>
+              <a:gd name="adj" fmla="val 12500"/>
+            </a:avLst>
+          </a:prstGeom>
+          <a:solidFill>
+            <a:srgbClr val="2D3748"/>
+          </a:solidFill>
+          <a:ln/>
+        </p:spPr>
+      </p:sp>
+      <p:sp>
+        <p:nvSpPr>
+          <p:cNvPr id="25" name="Text 23"/>
+          <p:cNvSpPr/>
+          <p:nvPr/>
+        </p:nvSpPr>
+        <p:spPr>
+          <a:xfrm>
+            <a:off x="566928" y="2724912"/>
+            <a:ext cx="1280160" cy="292608"/>
+          </a:xfrm>
+          <a:prstGeom prst="rect">
+            <a:avLst/>
+          </a:prstGeom>
+          <a:noFill/>
+          <a:ln/>
+        </p:spPr>
+        <p:txBody>
+          <a:bodyPr wrap="square" lIns="0" tIns="0" rIns="0" bIns="0" rtlCol="0" anchor="ctr"/>
+          <a:lstStyle/>
+          <a:p>
+            <a:pPr algn="ctr" indent="0" marL="0">
+              <a:buNone/>
+            </a:pPr>
+            <a:r>
+              <a:rPr lang="en-US" sz="850" b="1" dirty="0">
+                <a:solidFill>
+                  <a:srgbClr val="FFFFFF"/>
                 </a:solidFill>
                 <a:latin typeface="Pretendard" pitchFamily="34" charset="0"/>
                 <a:ea typeface="Pretendard" pitchFamily="34" charset="-122"/>
                 <a:cs typeface="Pretendard" pitchFamily="34" charset="-120"/>
               </a:rPr>
-              <a:t>중개인 현장 조사 및 경험 기반 입력</a:t>
-            </a:r>
-            <a:endParaRPr lang="en-US" sz="1000" dirty="0"/>
-          </a:p>
-        </p:txBody>
-      </p:sp>
-      <p:sp>
-        <p:nvSpPr>
-          <p:cNvPr id="21" name="Text 19"/>
-          <p:cNvSpPr/>
-          <p:nvPr/>
-        </p:nvSpPr>
-        <p:spPr>
-          <a:xfrm>
-            <a:off x="5504688" y="3822192"/>
-            <a:ext cx="731520" cy="292608"/>
-          </a:xfrm>
-          <a:prstGeom prst="rect">
-            <a:avLst/>
-          </a:prstGeom>
-          <a:noFill/>
-          <a:ln/>
-        </p:spPr>
-        <p:txBody>
-          <a:bodyPr wrap="square" lIns="0" tIns="0" rIns="0" bIns="0" rtlCol="0" anchor="ctr"/>
-          <a:lstStyle/>
-          <a:p>
-            <a:pPr algn="r" indent="0" marL="0">
-              <a:buNone/>
-            </a:pPr>
-            <a:r>
-              <a:rPr lang="en-US" sz="1200" b="1" dirty="0">
-                <a:solidFill>
-                  <a:srgbClr val="FFFFFF"/>
-                </a:solidFill>
-                <a:latin typeface="Arial" pitchFamily="34" charset="0"/>
-                <a:ea typeface="Arial" pitchFamily="34" charset="-122"/>
-                <a:cs typeface="Arial" pitchFamily="34" charset="-120"/>
-              </a:rPr>
-              <a:t>0.60</a:t>
-            </a:r>
-            <a:endParaRPr lang="en-US" sz="1200" dirty="0"/>
-          </a:p>
-        </p:txBody>
-      </p:sp>
-      <p:sp>
-        <p:nvSpPr>
-          <p:cNvPr id="22" name="Shape 20"/>
-          <p:cNvSpPr/>
-          <p:nvPr/>
-        </p:nvSpPr>
-        <p:spPr>
-          <a:xfrm>
-            <a:off x="566928" y="4480560"/>
-            <a:ext cx="1417320" cy="347472"/>
-          </a:xfrm>
-          <a:prstGeom prst="roundRect">
-            <a:avLst>
-              <a:gd name="adj" fmla="val 10526"/>
-            </a:avLst>
-          </a:prstGeom>
-          <a:solidFill>
-            <a:srgbClr val="334155"/>
-          </a:solidFill>
-          <a:ln/>
-        </p:spPr>
-      </p:sp>
-      <p:sp>
-        <p:nvSpPr>
-          <p:cNvPr id="23" name="Text 21"/>
-          <p:cNvSpPr/>
-          <p:nvPr/>
-        </p:nvSpPr>
-        <p:spPr>
-          <a:xfrm>
-            <a:off x="566928" y="4480560"/>
-            <a:ext cx="1417320" cy="347472"/>
-          </a:xfrm>
-          <a:prstGeom prst="rect">
-            <a:avLst/>
-          </a:prstGeom>
-          <a:noFill/>
-          <a:ln/>
-        </p:spPr>
-        <p:txBody>
-          <a:bodyPr wrap="square" lIns="0" tIns="0" rIns="0" bIns="0" rtlCol="0" anchor="ctr"/>
-          <a:lstStyle/>
-          <a:p>
-            <a:pPr algn="ctr" indent="0" marL="0">
-              <a:buNone/>
-            </a:pPr>
-            <a:r>
-              <a:rPr lang="en-US" sz="950" b="1" dirty="0">
-                <a:solidFill>
-                  <a:srgbClr val="FFFFFF"/>
+              <a:t>✓ 공부확인</a:t>
+            </a:r>
+            <a:endParaRPr lang="en-US" sz="850" dirty="0"/>
+          </a:p>
+        </p:txBody>
+      </p:sp>
+      <p:sp>
+        <p:nvSpPr>
+          <p:cNvPr id="26" name="Text 24"/>
+          <p:cNvSpPr/>
+          <p:nvPr/>
+        </p:nvSpPr>
+        <p:spPr>
+          <a:xfrm>
+            <a:off x="1993392" y="2706624"/>
+            <a:ext cx="3840480" cy="329184"/>
+          </a:xfrm>
+          <a:prstGeom prst="rect">
+            <a:avLst/>
+          </a:prstGeom>
+          <a:noFill/>
+          <a:ln/>
+        </p:spPr>
+        <p:txBody>
+          <a:bodyPr wrap="square" lIns="0" tIns="0" rIns="0" bIns="0" rtlCol="0" anchor="ctr"/>
+          <a:lstStyle/>
+          <a:p>
+            <a:pPr indent="0" marL="0">
+              <a:buNone/>
+            </a:pPr>
+            <a:r>
+              <a:rPr lang="en-US" sz="900" dirty="0">
+                <a:solidFill>
+                  <a:srgbClr val="E2E8F0"/>
                 </a:solidFill>
                 <a:latin typeface="Pretendard" pitchFamily="34" charset="0"/>
                 <a:ea typeface="Pretendard" pitchFamily="34" charset="-122"/>
                 <a:cs typeface="Pretendard" pitchFamily="34" charset="-120"/>
               </a:rPr>
-              <a:t>◇ AI추정·가정</a:t>
-            </a:r>
-            <a:endParaRPr lang="en-US" sz="950" dirty="0"/>
-          </a:p>
-        </p:txBody>
-      </p:sp>
-      <p:sp>
-        <p:nvSpPr>
-          <p:cNvPr id="24" name="Text 22"/>
-          <p:cNvSpPr/>
-          <p:nvPr/>
-        </p:nvSpPr>
-        <p:spPr>
-          <a:xfrm>
-            <a:off x="2139696" y="4462272"/>
-            <a:ext cx="3566160" cy="420624"/>
-          </a:xfrm>
-          <a:prstGeom prst="rect">
-            <a:avLst/>
-          </a:prstGeom>
-          <a:noFill/>
-          <a:ln/>
-        </p:spPr>
-        <p:txBody>
-          <a:bodyPr wrap="square" lIns="0" tIns="0" rIns="0" bIns="0" rtlCol="0" anchor="ctr"/>
-          <a:lstStyle/>
-          <a:p>
-            <a:pPr indent="0" marL="0">
-              <a:buNone/>
-            </a:pPr>
-            <a:r>
-              <a:rPr lang="en-US" sz="1000" dirty="0">
-                <a:solidFill>
-                  <a:srgbClr val="F1F5F9"/>
+              <a:t>등기부·대장 등 공적 장부 직접 확인</a:t>
+            </a:r>
+            <a:endParaRPr lang="en-US" sz="900" dirty="0"/>
+          </a:p>
+        </p:txBody>
+      </p:sp>
+      <p:sp>
+        <p:nvSpPr>
+          <p:cNvPr id="27" name="Shape 25"/>
+          <p:cNvSpPr/>
+          <p:nvPr/>
+        </p:nvSpPr>
+        <p:spPr>
+          <a:xfrm>
+            <a:off x="566928" y="3200400"/>
+            <a:ext cx="1280160" cy="292608"/>
+          </a:xfrm>
+          <a:prstGeom prst="roundRect">
+            <a:avLst>
+              <a:gd name="adj" fmla="val 12500"/>
+            </a:avLst>
+          </a:prstGeom>
+          <a:solidFill>
+            <a:srgbClr val="2D3748"/>
+          </a:solidFill>
+          <a:ln/>
+        </p:spPr>
+      </p:sp>
+      <p:sp>
+        <p:nvSpPr>
+          <p:cNvPr id="28" name="Text 26"/>
+          <p:cNvSpPr/>
+          <p:nvPr/>
+        </p:nvSpPr>
+        <p:spPr>
+          <a:xfrm>
+            <a:off x="566928" y="3200400"/>
+            <a:ext cx="1280160" cy="292608"/>
+          </a:xfrm>
+          <a:prstGeom prst="rect">
+            <a:avLst/>
+          </a:prstGeom>
+          <a:noFill/>
+          <a:ln/>
+        </p:spPr>
+        <p:txBody>
+          <a:bodyPr wrap="square" lIns="0" tIns="0" rIns="0" bIns="0" rtlCol="0" anchor="ctr"/>
+          <a:lstStyle/>
+          <a:p>
+            <a:pPr algn="ctr" indent="0" marL="0">
+              <a:buNone/>
+            </a:pPr>
+            <a:r>
+              <a:rPr lang="en-US" sz="850" b="1" dirty="0">
+                <a:solidFill>
+                  <a:srgbClr val="FFFFFF"/>
                 </a:solidFill>
                 <a:latin typeface="Pretendard" pitchFamily="34" charset="0"/>
                 <a:ea typeface="Pretendard" pitchFamily="34" charset="-122"/>
                 <a:cs typeface="Pretendard" pitchFamily="34" charset="-120"/>
               </a:rPr>
-              <a:t>시나리오 분석 및 AI 모델 추정</a:t>
-            </a:r>
-            <a:endParaRPr lang="en-US" sz="1000" dirty="0"/>
-          </a:p>
-        </p:txBody>
-      </p:sp>
-      <p:sp>
-        <p:nvSpPr>
-          <p:cNvPr id="25" name="Text 23"/>
-          <p:cNvSpPr/>
-          <p:nvPr/>
-        </p:nvSpPr>
-        <p:spPr>
-          <a:xfrm>
-            <a:off x="5504688" y="4480560"/>
-            <a:ext cx="731520" cy="292608"/>
-          </a:xfrm>
-          <a:prstGeom prst="rect">
-            <a:avLst/>
-          </a:prstGeom>
-          <a:noFill/>
-          <a:ln/>
-        </p:spPr>
-        <p:txBody>
-          <a:bodyPr wrap="square" lIns="0" tIns="0" rIns="0" bIns="0" rtlCol="0" anchor="ctr"/>
-          <a:lstStyle/>
-          <a:p>
-            <a:pPr algn="r" indent="0" marL="0">
-              <a:buNone/>
-            </a:pPr>
-            <a:r>
-              <a:rPr lang="en-US" sz="1200" b="1" dirty="0">
-                <a:solidFill>
-                  <a:srgbClr val="FFFFFF"/>
-                </a:solidFill>
-                <a:latin typeface="Arial" pitchFamily="34" charset="0"/>
-                <a:ea typeface="Arial" pitchFamily="34" charset="-122"/>
-                <a:cs typeface="Arial" pitchFamily="34" charset="-120"/>
-              </a:rPr>
-              <a:t>0.30</a:t>
-            </a:r>
-            <a:endParaRPr lang="en-US" sz="1200" dirty="0"/>
-          </a:p>
-        </p:txBody>
-      </p:sp>
-      <p:sp>
-        <p:nvSpPr>
-          <p:cNvPr id="26" name="Text 24"/>
-          <p:cNvSpPr/>
-          <p:nvPr/>
-        </p:nvSpPr>
-        <p:spPr>
-          <a:xfrm>
-            <a:off x="6492240" y="1517904"/>
-            <a:ext cx="5129784" cy="237744"/>
+              <a:t>★ 전문가검증</a:t>
+            </a:r>
+            <a:endParaRPr lang="en-US" sz="850" dirty="0"/>
+          </a:p>
+        </p:txBody>
+      </p:sp>
+      <p:sp>
+        <p:nvSpPr>
+          <p:cNvPr id="29" name="Text 27"/>
+          <p:cNvSpPr/>
+          <p:nvPr/>
+        </p:nvSpPr>
+        <p:spPr>
+          <a:xfrm>
+            <a:off x="1993392" y="3182112"/>
+            <a:ext cx="3840480" cy="329184"/>
           </a:xfrm>
           <a:prstGeom prst="rect">
             <a:avLst/>
@@ -3177,52 +3232,391 @@
               <a:buNone/>
             </a:pPr>
             <a:r>
-              <a:rPr lang="en-US" sz="1100" b="1" dirty="0">
-                <a:solidFill>
-                  <a:srgbClr val="FFFFFF"/>
+              <a:rPr lang="en-US" sz="900" dirty="0">
+                <a:solidFill>
+                  <a:srgbClr val="E2E8F0"/>
                 </a:solidFill>
                 <a:latin typeface="Pretendard" pitchFamily="34" charset="0"/>
                 <a:ea typeface="Pretendard" pitchFamily="34" charset="-122"/>
                 <a:cs typeface="Pretendard" pitchFamily="34" charset="-120"/>
               </a:rPr>
-              <a:t>면책 조항</a:t>
-            </a:r>
-            <a:endParaRPr lang="en-US" sz="1100" dirty="0"/>
-          </a:p>
-        </p:txBody>
-      </p:sp>
-      <p:sp>
-        <p:nvSpPr>
-          <p:cNvPr id="27" name="Shape 25"/>
-          <p:cNvSpPr/>
-          <p:nvPr/>
-        </p:nvSpPr>
-        <p:spPr>
-          <a:xfrm>
-            <a:off x="6492240" y="1847088"/>
-            <a:ext cx="5129784" cy="2615184"/>
+              <a:t>세무사·감정평가사 등 전문가 확인</a:t>
+            </a:r>
+            <a:endParaRPr lang="en-US" sz="900" dirty="0"/>
+          </a:p>
+        </p:txBody>
+      </p:sp>
+      <p:sp>
+        <p:nvSpPr>
+          <p:cNvPr id="30" name="Shape 28"/>
+          <p:cNvSpPr/>
+          <p:nvPr/>
+        </p:nvSpPr>
+        <p:spPr>
+          <a:xfrm>
+            <a:off x="566928" y="3675888"/>
+            <a:ext cx="1280160" cy="292608"/>
           </a:xfrm>
           <a:prstGeom prst="roundRect">
             <a:avLst>
-              <a:gd name="adj" fmla="val 1399"/>
+              <a:gd name="adj" fmla="val 12500"/>
             </a:avLst>
           </a:prstGeom>
           <a:solidFill>
-            <a:srgbClr val="1E293B"/>
+            <a:srgbClr val="2D3748"/>
           </a:solidFill>
           <a:ln/>
         </p:spPr>
       </p:sp>
       <p:sp>
         <p:nvSpPr>
-          <p:cNvPr id="28" name="Text 26"/>
-          <p:cNvSpPr/>
-          <p:nvPr/>
-        </p:nvSpPr>
-        <p:spPr>
-          <a:xfrm>
-            <a:off x="6711696" y="2011680"/>
-            <a:ext cx="4690872" cy="2286000"/>
+          <p:cNvPr id="31" name="Text 29"/>
+          <p:cNvSpPr/>
+          <p:nvPr/>
+        </p:nvSpPr>
+        <p:spPr>
+          <a:xfrm>
+            <a:off x="566928" y="3675888"/>
+            <a:ext cx="1280160" cy="292608"/>
+          </a:xfrm>
+          <a:prstGeom prst="rect">
+            <a:avLst/>
+          </a:prstGeom>
+          <a:noFill/>
+          <a:ln/>
+        </p:spPr>
+        <p:txBody>
+          <a:bodyPr wrap="square" lIns="0" tIns="0" rIns="0" bIns="0" rtlCol="0" anchor="ctr"/>
+          <a:lstStyle/>
+          <a:p>
+            <a:pPr algn="ctr" indent="0" marL="0">
+              <a:buNone/>
+            </a:pPr>
+            <a:r>
+              <a:rPr lang="en-US" sz="850" b="1" dirty="0">
+                <a:solidFill>
+                  <a:srgbClr val="FFFFFF"/>
+                </a:solidFill>
+                <a:latin typeface="Pretendard" pitchFamily="34" charset="0"/>
+                <a:ea typeface="Pretendard" pitchFamily="34" charset="-122"/>
+                <a:cs typeface="Pretendard" pitchFamily="34" charset="-120"/>
+              </a:rPr>
+              <a:t>▲ 매도인고지</a:t>
+            </a:r>
+            <a:endParaRPr lang="en-US" sz="850" dirty="0"/>
+          </a:p>
+        </p:txBody>
+      </p:sp>
+      <p:sp>
+        <p:nvSpPr>
+          <p:cNvPr id="32" name="Text 30"/>
+          <p:cNvSpPr/>
+          <p:nvPr/>
+        </p:nvSpPr>
+        <p:spPr>
+          <a:xfrm>
+            <a:off x="1993392" y="3657600"/>
+            <a:ext cx="3840480" cy="329184"/>
+          </a:xfrm>
+          <a:prstGeom prst="rect">
+            <a:avLst/>
+          </a:prstGeom>
+          <a:noFill/>
+          <a:ln/>
+        </p:spPr>
+        <p:txBody>
+          <a:bodyPr wrap="square" lIns="0" tIns="0" rIns="0" bIns="0" rtlCol="0" anchor="ctr"/>
+          <a:lstStyle/>
+          <a:p>
+            <a:pPr indent="0" marL="0">
+              <a:buNone/>
+            </a:pPr>
+            <a:r>
+              <a:rPr lang="en-US" sz="900" dirty="0">
+                <a:solidFill>
+                  <a:srgbClr val="E2E8F0"/>
+                </a:solidFill>
+                <a:latin typeface="Pretendard" pitchFamily="34" charset="0"/>
+                <a:ea typeface="Pretendard" pitchFamily="34" charset="-122"/>
+                <a:cs typeface="Pretendard" pitchFamily="34" charset="-120"/>
+              </a:rPr>
+              <a:t>매도인이 구두 또는 서면으로 고지</a:t>
+            </a:r>
+            <a:endParaRPr lang="en-US" sz="900" dirty="0"/>
+          </a:p>
+        </p:txBody>
+      </p:sp>
+      <p:sp>
+        <p:nvSpPr>
+          <p:cNvPr id="33" name="Shape 31"/>
+          <p:cNvSpPr/>
+          <p:nvPr/>
+        </p:nvSpPr>
+        <p:spPr>
+          <a:xfrm>
+            <a:off x="566928" y="4151376"/>
+            <a:ext cx="1280160" cy="292608"/>
+          </a:xfrm>
+          <a:prstGeom prst="roundRect">
+            <a:avLst>
+              <a:gd name="adj" fmla="val 12500"/>
+            </a:avLst>
+          </a:prstGeom>
+          <a:solidFill>
+            <a:srgbClr val="2D3748"/>
+          </a:solidFill>
+          <a:ln/>
+        </p:spPr>
+      </p:sp>
+      <p:sp>
+        <p:nvSpPr>
+          <p:cNvPr id="34" name="Text 32"/>
+          <p:cNvSpPr/>
+          <p:nvPr/>
+        </p:nvSpPr>
+        <p:spPr>
+          <a:xfrm>
+            <a:off x="566928" y="4151376"/>
+            <a:ext cx="1280160" cy="292608"/>
+          </a:xfrm>
+          <a:prstGeom prst="rect">
+            <a:avLst/>
+          </a:prstGeom>
+          <a:noFill/>
+          <a:ln/>
+        </p:spPr>
+        <p:txBody>
+          <a:bodyPr wrap="square" lIns="0" tIns="0" rIns="0" bIns="0" rtlCol="0" anchor="ctr"/>
+          <a:lstStyle/>
+          <a:p>
+            <a:pPr algn="ctr" indent="0" marL="0">
+              <a:buNone/>
+            </a:pPr>
+            <a:r>
+              <a:rPr lang="en-US" sz="850" b="1" dirty="0">
+                <a:solidFill>
+                  <a:srgbClr val="FFFFFF"/>
+                </a:solidFill>
+                <a:latin typeface="Pretendard" pitchFamily="34" charset="0"/>
+                <a:ea typeface="Pretendard" pitchFamily="34" charset="-122"/>
+                <a:cs typeface="Pretendard" pitchFamily="34" charset="-120"/>
+              </a:rPr>
+              <a:t>● 중개인입력</a:t>
+            </a:r>
+            <a:endParaRPr lang="en-US" sz="850" dirty="0"/>
+          </a:p>
+        </p:txBody>
+      </p:sp>
+      <p:sp>
+        <p:nvSpPr>
+          <p:cNvPr id="35" name="Text 33"/>
+          <p:cNvSpPr/>
+          <p:nvPr/>
+        </p:nvSpPr>
+        <p:spPr>
+          <a:xfrm>
+            <a:off x="1993392" y="4133088"/>
+            <a:ext cx="3840480" cy="329184"/>
+          </a:xfrm>
+          <a:prstGeom prst="rect">
+            <a:avLst/>
+          </a:prstGeom>
+          <a:noFill/>
+          <a:ln/>
+        </p:spPr>
+        <p:txBody>
+          <a:bodyPr wrap="square" lIns="0" tIns="0" rIns="0" bIns="0" rtlCol="0" anchor="ctr"/>
+          <a:lstStyle/>
+          <a:p>
+            <a:pPr indent="0" marL="0">
+              <a:buNone/>
+            </a:pPr>
+            <a:r>
+              <a:rPr lang="en-US" sz="900" dirty="0">
+                <a:solidFill>
+                  <a:srgbClr val="E2E8F0"/>
+                </a:solidFill>
+                <a:latin typeface="Pretendard" pitchFamily="34" charset="0"/>
+                <a:ea typeface="Pretendard" pitchFamily="34" charset="-122"/>
+                <a:cs typeface="Pretendard" pitchFamily="34" charset="-120"/>
+              </a:rPr>
+              <a:t>중개인 현장 조사 및 경험 기반 입력</a:t>
+            </a:r>
+            <a:endParaRPr lang="en-US" sz="900" dirty="0"/>
+          </a:p>
+        </p:txBody>
+      </p:sp>
+      <p:sp>
+        <p:nvSpPr>
+          <p:cNvPr id="36" name="Shape 34"/>
+          <p:cNvSpPr/>
+          <p:nvPr/>
+        </p:nvSpPr>
+        <p:spPr>
+          <a:xfrm>
+            <a:off x="566928" y="4626864"/>
+            <a:ext cx="1280160" cy="292608"/>
+          </a:xfrm>
+          <a:prstGeom prst="roundRect">
+            <a:avLst>
+              <a:gd name="adj" fmla="val 12500"/>
+            </a:avLst>
+          </a:prstGeom>
+          <a:solidFill>
+            <a:srgbClr val="2D3748"/>
+          </a:solidFill>
+          <a:ln/>
+        </p:spPr>
+      </p:sp>
+      <p:sp>
+        <p:nvSpPr>
+          <p:cNvPr id="37" name="Text 35"/>
+          <p:cNvSpPr/>
+          <p:nvPr/>
+        </p:nvSpPr>
+        <p:spPr>
+          <a:xfrm>
+            <a:off x="566928" y="4626864"/>
+            <a:ext cx="1280160" cy="292608"/>
+          </a:xfrm>
+          <a:prstGeom prst="rect">
+            <a:avLst/>
+          </a:prstGeom>
+          <a:noFill/>
+          <a:ln/>
+        </p:spPr>
+        <p:txBody>
+          <a:bodyPr wrap="square" lIns="0" tIns="0" rIns="0" bIns="0" rtlCol="0" anchor="ctr"/>
+          <a:lstStyle/>
+          <a:p>
+            <a:pPr algn="ctr" indent="0" marL="0">
+              <a:buNone/>
+            </a:pPr>
+            <a:r>
+              <a:rPr lang="en-US" sz="850" b="1" dirty="0">
+                <a:solidFill>
+                  <a:srgbClr val="FFFFFF"/>
+                </a:solidFill>
+                <a:latin typeface="Pretendard" pitchFamily="34" charset="0"/>
+                <a:ea typeface="Pretendard" pitchFamily="34" charset="-122"/>
+                <a:cs typeface="Pretendard" pitchFamily="34" charset="-120"/>
+              </a:rPr>
+              <a:t>◇ AI추정·가정</a:t>
+            </a:r>
+            <a:endParaRPr lang="en-US" sz="850" dirty="0"/>
+          </a:p>
+        </p:txBody>
+      </p:sp>
+      <p:sp>
+        <p:nvSpPr>
+          <p:cNvPr id="38" name="Text 36"/>
+          <p:cNvSpPr/>
+          <p:nvPr/>
+        </p:nvSpPr>
+        <p:spPr>
+          <a:xfrm>
+            <a:off x="1993392" y="4608576"/>
+            <a:ext cx="3840480" cy="329184"/>
+          </a:xfrm>
+          <a:prstGeom prst="rect">
+            <a:avLst/>
+          </a:prstGeom>
+          <a:noFill/>
+          <a:ln/>
+        </p:spPr>
+        <p:txBody>
+          <a:bodyPr wrap="square" lIns="0" tIns="0" rIns="0" bIns="0" rtlCol="0" anchor="ctr"/>
+          <a:lstStyle/>
+          <a:p>
+            <a:pPr indent="0" marL="0">
+              <a:buNone/>
+            </a:pPr>
+            <a:r>
+              <a:rPr lang="en-US" sz="900" dirty="0">
+                <a:solidFill>
+                  <a:srgbClr val="E2E8F0"/>
+                </a:solidFill>
+                <a:latin typeface="Pretendard" pitchFamily="34" charset="0"/>
+                <a:ea typeface="Pretendard" pitchFamily="34" charset="-122"/>
+                <a:cs typeface="Pretendard" pitchFamily="34" charset="-120"/>
+              </a:rPr>
+              <a:t>시나리오 분석 및 AI 모델 추정</a:t>
+            </a:r>
+            <a:endParaRPr lang="en-US" sz="900" dirty="0"/>
+          </a:p>
+        </p:txBody>
+      </p:sp>
+      <p:sp>
+        <p:nvSpPr>
+          <p:cNvPr id="39" name="Text 37"/>
+          <p:cNvSpPr/>
+          <p:nvPr/>
+        </p:nvSpPr>
+        <p:spPr>
+          <a:xfrm>
+            <a:off x="6492240" y="2395728"/>
+            <a:ext cx="5129784" cy="237744"/>
+          </a:xfrm>
+          <a:prstGeom prst="rect">
+            <a:avLst/>
+          </a:prstGeom>
+          <a:noFill/>
+          <a:ln/>
+        </p:spPr>
+        <p:txBody>
+          <a:bodyPr wrap="square" lIns="0" tIns="0" rIns="0" bIns="0" rtlCol="0" anchor="ctr"/>
+          <a:lstStyle/>
+          <a:p>
+            <a:pPr indent="0" marL="0">
+              <a:buNone/>
+            </a:pPr>
+            <a:r>
+              <a:rPr lang="en-US" sz="1100" b="1" dirty="0">
+                <a:solidFill>
+                  <a:srgbClr val="FFFFFF"/>
+                </a:solidFill>
+                <a:latin typeface="Pretendard" pitchFamily="34" charset="0"/>
+                <a:ea typeface="Pretendard" pitchFamily="34" charset="-122"/>
+                <a:cs typeface="Pretendard" pitchFamily="34" charset="-120"/>
+              </a:rPr>
+              <a:t>면책 조항</a:t>
+            </a:r>
+            <a:endParaRPr lang="en-US" sz="1100" dirty="0"/>
+          </a:p>
+        </p:txBody>
+      </p:sp>
+      <p:sp>
+        <p:nvSpPr>
+          <p:cNvPr id="40" name="Shape 38"/>
+          <p:cNvSpPr/>
+          <p:nvPr/>
+        </p:nvSpPr>
+        <p:spPr>
+          <a:xfrm>
+            <a:off x="6492240" y="2724912"/>
+            <a:ext cx="5129784" cy="1645920"/>
+          </a:xfrm>
+          <a:prstGeom prst="roundRect">
+            <a:avLst>
+              <a:gd name="adj" fmla="val 2222"/>
+            </a:avLst>
+          </a:prstGeom>
+          <a:solidFill>
+            <a:srgbClr val="1C2433"/>
+          </a:solidFill>
+          <a:ln/>
+        </p:spPr>
+      </p:sp>
+      <p:sp>
+        <p:nvSpPr>
+          <p:cNvPr id="41" name="Text 39"/>
+          <p:cNvSpPr/>
+          <p:nvPr/>
+        </p:nvSpPr>
+        <p:spPr>
+          <a:xfrm>
+            <a:off x="6675120" y="2834640"/>
+            <a:ext cx="4764024" cy="1426464"/>
           </a:xfrm>
           <a:prstGeom prst="rect">
             <a:avLst/>
@@ -3241,9 +3635,9 @@
               <a:buNone/>
             </a:pPr>
             <a:r>
-              <a:rPr lang="en-US" sz="930" dirty="0">
-                <a:solidFill>
-                  <a:srgbClr val="94A3B8"/>
+              <a:rPr lang="en-US" sz="850" dirty="0">
+                <a:solidFill>
+                  <a:srgbClr val="A0AEC0"/>
                 </a:solidFill>
                 <a:latin typeface="Pretendard" pitchFamily="34" charset="0"/>
                 <a:ea typeface="Pretendard" pitchFamily="34" charset="-122"/>
@@ -3251,40 +3645,40 @@
               </a:rPr>
               <a:t>본 자료는 투자 권유가 아니며, 기재된 정보의 정확성을 보증하지 않습니다.</a:t>
             </a:r>
-            <a:endParaRPr lang="en-US" sz="930" dirty="0"/>
-          </a:p>
-        </p:txBody>
-      </p:sp>
-      <p:sp>
-        <p:nvSpPr>
-          <p:cNvPr id="29" name="Shape 27"/>
-          <p:cNvSpPr/>
-          <p:nvPr/>
-        </p:nvSpPr>
-        <p:spPr>
-          <a:xfrm>
-            <a:off x="566928" y="5230368"/>
-            <a:ext cx="11057839" cy="640080"/>
+            <a:endParaRPr lang="en-US" sz="850" dirty="0"/>
+          </a:p>
+        </p:txBody>
+      </p:sp>
+      <p:sp>
+        <p:nvSpPr>
+          <p:cNvPr id="42" name="Shape 40"/>
+          <p:cNvSpPr/>
+          <p:nvPr/>
+        </p:nvSpPr>
+        <p:spPr>
+          <a:xfrm>
+            <a:off x="566928" y="5760720"/>
+            <a:ext cx="11057839" cy="457200"/>
           </a:xfrm>
           <a:prstGeom prst="rect">
             <a:avLst/>
           </a:prstGeom>
           <a:solidFill>
-            <a:srgbClr val="4F6A00"/>
+            <a:srgbClr val="977024"/>
           </a:solidFill>
           <a:ln/>
         </p:spPr>
       </p:sp>
       <p:sp>
         <p:nvSpPr>
-          <p:cNvPr id="30" name="Text 28"/>
-          <p:cNvSpPr/>
-          <p:nvPr/>
-        </p:nvSpPr>
-        <p:spPr>
-          <a:xfrm>
-            <a:off x="786384" y="5321808"/>
-            <a:ext cx="10618927" cy="457200"/>
+          <p:cNvPr id="43" name="Text 41"/>
+          <p:cNvSpPr/>
+          <p:nvPr/>
+        </p:nvSpPr>
+        <p:spPr>
+          <a:xfrm>
+            <a:off x="749808" y="5806440"/>
+            <a:ext cx="10692079" cy="365760"/>
           </a:xfrm>
           <a:prstGeom prst="rect">
             <a:avLst/>
@@ -3300,81 +3694,97 @@
               <a:buNone/>
             </a:pPr>
             <a:r>
-              <a:rPr lang="en-US" sz="1000" dirty="0">
-                <a:solidFill>
-                  <a:srgbClr val="E8F5CC"/>
+              <a:rPr lang="en-US" sz="900" dirty="0">
+                <a:solidFill>
+                  <a:srgbClr val="F3EBDA"/>
                 </a:solidFill>
                 <a:latin typeface="Pretendard" pitchFamily="34" charset="0"/>
                 <a:ea typeface="Pretendard" pitchFamily="34" charset="-122"/>
                 <a:cs typeface="Pretendard" pitchFamily="34" charset="-120"/>
               </a:rPr>
-              <a:t>본 자료의 모든 수치는 예비 검토용이며, 상세 실사 자료(등기·임대차계약서) 및 1:1 비밀 상담은 담당 전문 중개사를 통해 제공됩니다.</a:t>
-            </a:r>
-            <a:endParaRPr lang="en-US" sz="1000" dirty="0"/>
-          </a:p>
-        </p:txBody>
-      </p:sp>
-      <p:sp>
-        <p:nvSpPr>
-          <p:cNvPr id="31" name="Text 29"/>
-          <p:cNvSpPr/>
-          <p:nvPr/>
-        </p:nvSpPr>
-        <p:spPr>
-          <a:xfrm>
-            <a:off x="566928" y="6419088"/>
-            <a:ext cx="11057839" cy="201168"/>
-          </a:xfrm>
-          <a:prstGeom prst="rect">
-            <a:avLst/>
-          </a:prstGeom>
-          <a:noFill/>
-          <a:ln/>
-        </p:spPr>
-        <p:txBody>
-          <a:bodyPr wrap="square" lIns="0" tIns="0" rIns="0" bIns="0" rtlCol="0" anchor="ctr"/>
-          <a:lstStyle/>
-          <a:p>
-            <a:pPr algn="ctr" indent="0" marL="0">
-              <a:buNone/>
-            </a:pPr>
-            <a:r>
-              <a:rPr lang="en-US" sz="750" dirty="0">
-                <a:solidFill>
-                  <a:srgbClr val="64748B"/>
+              <a:t>본 자료의 모든 수치는 예비 검토용이며, 상세 실사 자료 및 비밀 상담은 담당 전문 중개사를 통해 제공됩니다.</a:t>
+            </a:r>
+            <a:endParaRPr lang="en-US" sz="900" dirty="0"/>
+          </a:p>
+        </p:txBody>
+      </p:sp>
+      <p:sp>
+        <p:nvSpPr>
+          <p:cNvPr id="44" name="Text 42"/>
+          <p:cNvSpPr/>
+          <p:nvPr/>
+        </p:nvSpPr>
+        <p:spPr>
+          <a:xfrm>
+            <a:off x="566928" y="6382512"/>
+            <a:ext cx="7315200" cy="219456"/>
+          </a:xfrm>
+          <a:prstGeom prst="rect">
+            <a:avLst/>
+          </a:prstGeom>
+          <a:noFill/>
+          <a:ln/>
+        </p:spPr>
+        <p:txBody>
+          <a:bodyPr wrap="square" lIns="0" tIns="0" rIns="0" bIns="0" rtlCol="0" anchor="ctr"/>
+          <a:lstStyle/>
+          <a:p>
+            <a:pPr indent="0" marL="0">
+              <a:buNone/>
+            </a:pPr>
+            <a:r>
+              <a:rPr lang="en-US" sz="800" dirty="0">
+                <a:solidFill>
+                  <a:srgbClr val="718096"/>
                 </a:solidFill>
                 <a:latin typeface="Pretendard" pitchFamily="34" charset="0"/>
                 <a:ea typeface="Pretendard" pitchFamily="34" charset="-122"/>
                 <a:cs typeface="Pretendard" pitchFamily="34" charset="-120"/>
               </a:rPr>
-              <a:t>크리딜  ·    ·  10</a:t>
-            </a:r>
-            <a:endParaRPr lang="en-US" sz="750" dirty="0"/>
-          </a:p>
-        </p:txBody>
-      </p:sp>
-      <p:sp>
-        <p:nvSpPr>
-          <p:cNvPr id="32" name="Shape 30"/>
-          <p:cNvSpPr/>
-          <p:nvPr/>
-        </p:nvSpPr>
-        <p:spPr>
-          <a:xfrm>
-            <a:off x="4437172" y="6382512"/>
-            <a:ext cx="3317352" cy="0"/>
-          </a:xfrm>
-          <a:prstGeom prst="line">
-            <a:avLst/>
-          </a:prstGeom>
-          <a:noFill/>
-          <a:ln w="6350">
-            <a:solidFill>
-              <a:srgbClr val="6B8E00"/>
-            </a:solidFill>
-            <a:prstDash val="solid"/>
-          </a:ln>
-        </p:spPr>
+              <a:t>크리딜   |   </a:t>
+            </a:r>
+            <a:endParaRPr lang="en-US" sz="800" dirty="0"/>
+          </a:p>
+        </p:txBody>
+      </p:sp>
+      <p:sp>
+        <p:nvSpPr>
+          <p:cNvPr id="45" name="Text 43"/>
+          <p:cNvSpPr/>
+          <p:nvPr/>
+        </p:nvSpPr>
+        <p:spPr>
+          <a:xfrm>
+            <a:off x="10710367" y="6382512"/>
+            <a:ext cx="914400" cy="219456"/>
+          </a:xfrm>
+          <a:prstGeom prst="rect">
+            <a:avLst/>
+          </a:prstGeom>
+          <a:noFill/>
+          <a:ln/>
+        </p:spPr>
+        <p:txBody>
+          <a:bodyPr wrap="square" lIns="0" tIns="0" rIns="0" bIns="0" rtlCol="0" anchor="ctr"/>
+          <a:lstStyle/>
+          <a:p>
+            <a:pPr algn="r" indent="0" marL="0">
+              <a:buNone/>
+            </a:pPr>
+            <a:r>
+              <a:rPr lang="en-US" sz="900" b="1" dirty="0">
+                <a:solidFill>
+                  <a:srgbClr val="B98A2E"/>
+                </a:solidFill>
+                <a:latin typeface="Arial" pitchFamily="34" charset="0"/>
+                <a:ea typeface="Arial" pitchFamily="34" charset="-122"/>
+                <a:cs typeface="Arial" pitchFamily="34" charset="-120"/>
+              </a:rPr>
+              <a:t>10</a:t>
+            </a:r>
+            <a:endParaRPr lang="en-US" sz="900" dirty="0"/>
+          </a:p>
+        </p:txBody>
       </p:sp>
     </p:spTree>
   </p:cSld>
@@ -3416,14 +3826,14 @@
         </p:nvSpPr>
         <p:spPr>
           <a:xfrm>
-            <a:off x="566928" y="384048"/>
-            <a:ext cx="45720" cy="566928"/>
-          </a:xfrm>
-          <a:prstGeom prst="rect">
+            <a:off x="566928" y="457200"/>
+            <a:ext cx="384048" cy="384048"/>
+          </a:xfrm>
+          <a:prstGeom prst="ellipse">
             <a:avLst/>
           </a:prstGeom>
           <a:solidFill>
-            <a:srgbClr val="6B8E00"/>
+            <a:srgbClr val="B98A2E"/>
           </a:solidFill>
           <a:ln/>
         </p:spPr>
@@ -3436,32 +3846,71 @@
         </p:nvSpPr>
         <p:spPr>
           <a:xfrm>
-            <a:off x="749808" y="384048"/>
-            <a:ext cx="10874959" cy="182880"/>
-          </a:xfrm>
-          <a:prstGeom prst="rect">
-            <a:avLst/>
-          </a:prstGeom>
-          <a:noFill/>
-          <a:ln/>
-        </p:spPr>
-        <p:txBody>
-          <a:bodyPr wrap="square" lIns="0" tIns="0" rIns="0" bIns="0" rtlCol="0" anchor="ctr"/>
-          <a:lstStyle/>
-          <a:p>
-            <a:pPr indent="0" marL="0">
-              <a:buNone/>
-            </a:pPr>
-            <a:r>
-              <a:rPr lang="en-US" sz="950" b="1" spc="200" kern="0" dirty="0">
-                <a:solidFill>
-                  <a:srgbClr val="6B8E00"/>
+            <a:off x="566928" y="457200"/>
+            <a:ext cx="384048" cy="384048"/>
+          </a:xfrm>
+          <a:prstGeom prst="rect">
+            <a:avLst/>
+          </a:prstGeom>
+          <a:noFill/>
+          <a:ln/>
+        </p:spPr>
+        <p:txBody>
+          <a:bodyPr wrap="square" lIns="0" tIns="0" rIns="0" bIns="0" rtlCol="0" anchor="ctr"/>
+          <a:lstStyle/>
+          <a:p>
+            <a:pPr algn="ctr" indent="0" marL="0">
+              <a:buNone/>
+            </a:pPr>
+            <a:r>
+              <a:rPr lang="en-US" sz="1300" b="1" dirty="0">
+                <a:solidFill>
+                  <a:srgbClr val="FFFFFF"/>
                 </a:solidFill>
                 <a:latin typeface="Arial" pitchFamily="34" charset="0"/>
                 <a:ea typeface="Arial" pitchFamily="34" charset="-122"/>
                 <a:cs typeface="Arial" pitchFamily="34" charset="-120"/>
               </a:rPr>
-              <a:t>02  Summary</a:t>
+              <a:t>02</a:t>
+            </a:r>
+            <a:endParaRPr lang="en-US" sz="1300" dirty="0"/>
+          </a:p>
+        </p:txBody>
+      </p:sp>
+      <p:sp>
+        <p:nvSpPr>
+          <p:cNvPr id="4" name="Text 2"/>
+          <p:cNvSpPr/>
+          <p:nvPr/>
+        </p:nvSpPr>
+        <p:spPr>
+          <a:xfrm>
+            <a:off x="1133856" y="457200"/>
+            <a:ext cx="10490911" cy="182880"/>
+          </a:xfrm>
+          <a:prstGeom prst="rect">
+            <a:avLst/>
+          </a:prstGeom>
+          <a:noFill/>
+          <a:ln/>
+        </p:spPr>
+        <p:txBody>
+          <a:bodyPr wrap="square" lIns="0" tIns="0" rIns="0" bIns="0" rtlCol="0" anchor="ctr"/>
+          <a:lstStyle/>
+          <a:p>
+            <a:pPr indent="0" marL="0">
+              <a:buNone/>
+            </a:pPr>
+            <a:r>
+              <a:rPr lang="en-US" sz="950" b="1" spc="200" kern="0" dirty="0">
+                <a:solidFill>
+                  <a:srgbClr val="B98A2E"/>
+                </a:solidFill>
+                <a:latin typeface="Arial" pitchFamily="34" charset="0"/>
+                <a:ea typeface="Arial" pitchFamily="34" charset="-122"/>
+                <a:cs typeface="Arial" pitchFamily="34" charset="-120"/>
+              </a:rPr>
+              <a:t>Summary</a:t>
             </a:r>
             <a:endParaRPr lang="en-US" sz="950" dirty="0"/>
           </a:p>
@@ -3469,14 +3918,14 @@
       </p:sp>
       <p:sp>
         <p:nvSpPr>
-          <p:cNvPr id="4" name="Text 2"/>
-          <p:cNvSpPr/>
-          <p:nvPr/>
-        </p:nvSpPr>
-        <p:spPr>
-          <a:xfrm>
-            <a:off x="749808" y="566928"/>
-            <a:ext cx="10874959" cy="384048"/>
+          <p:cNvPr id="5" name="Text 3"/>
+          <p:cNvSpPr/>
+          <p:nvPr/>
+        </p:nvSpPr>
+        <p:spPr>
+          <a:xfrm>
+            <a:off x="1133856" y="640080"/>
+            <a:ext cx="10490911" cy="365760"/>
           </a:xfrm>
           <a:prstGeom prst="rect">
             <a:avLst/>
@@ -3492,9 +3941,9 @@
               <a:buNone/>
             </a:pPr>
             <a:r>
-              <a:rPr lang="en-US" sz="2200" b="1" dirty="0">
-                <a:solidFill>
-                  <a:srgbClr val="0F172A"/>
+              <a:rPr lang="en-US" sz="2300" b="1" dirty="0">
+                <a:solidFill>
+                  <a:srgbClr val="10161F"/>
                 </a:solidFill>
                 <a:latin typeface="Pretendard" pitchFamily="34" charset="0"/>
                 <a:ea typeface="Pretendard" pitchFamily="34" charset="-122"/>
@@ -3502,13 +3951,13 @@
               </a:rPr>
               <a:t>핵심요약</a:t>
             </a:r>
-            <a:endParaRPr lang="en-US" sz="2200" dirty="0"/>
-          </a:p>
-        </p:txBody>
-      </p:sp>
-      <p:sp>
-        <p:nvSpPr>
-          <p:cNvPr id="5" name="Text 3"/>
+            <a:endParaRPr lang="en-US" sz="2300" dirty="0"/>
+          </a:p>
+        </p:txBody>
+      </p:sp>
+      <p:sp>
+        <p:nvSpPr>
+          <p:cNvPr id="6" name="Text 4"/>
           <p:cNvSpPr/>
           <p:nvPr/>
         </p:nvSpPr>
@@ -3533,7 +3982,7 @@
             <a:r>
               <a:rPr lang="en-US" sz="1500" b="1" dirty="0">
                 <a:solidFill>
-                  <a:srgbClr val="0F172A"/>
+                  <a:srgbClr val="10161F"/>
                 </a:solidFill>
                 <a:latin typeface="Pretendard" pitchFamily="34" charset="0"/>
                 <a:ea typeface="Pretendard" pitchFamily="34" charset="-122"/>
@@ -3547,7 +3996,7 @@
       </p:sp>
       <p:sp>
         <p:nvSpPr>
-          <p:cNvPr id="6" name="Shape 4"/>
+          <p:cNvPr id="7" name="Shape 5"/>
           <p:cNvSpPr/>
           <p:nvPr/>
         </p:nvSpPr>
@@ -3562,7 +4011,7 @@
           <a:noFill/>
           <a:ln w="19050">
             <a:solidFill>
-              <a:srgbClr val="6B8E00"/>
+              <a:srgbClr val="B98A2E"/>
             </a:solidFill>
             <a:prstDash val="solid"/>
           </a:ln>
@@ -3570,7 +4019,7 @@
       </p:sp>
       <p:sp>
         <p:nvSpPr>
-          <p:cNvPr id="7" name="Shape 5"/>
+          <p:cNvPr id="8" name="Shape 6"/>
           <p:cNvSpPr/>
           <p:nvPr/>
         </p:nvSpPr>
@@ -3585,11 +4034,11 @@
             </a:avLst>
           </a:prstGeom>
           <a:solidFill>
-            <a:srgbClr val="F8FAFC"/>
+            <a:srgbClr val="F7FAFC"/>
           </a:solidFill>
           <a:ln w="6350">
             <a:solidFill>
-              <a:srgbClr val="CBD5E1"/>
+              <a:srgbClr val="CBD5E0"/>
             </a:solidFill>
             <a:prstDash val="solid"/>
           </a:ln>
@@ -3597,7 +4046,7 @@
       </p:sp>
       <p:sp>
         <p:nvSpPr>
-          <p:cNvPr id="8" name="Text 6"/>
+          <p:cNvPr id="9" name="Text 7"/>
           <p:cNvSpPr/>
           <p:nvPr/>
         </p:nvSpPr>
@@ -3622,7 +4071,7 @@
             <a:r>
               <a:rPr lang="en-US" sz="950" dirty="0">
                 <a:solidFill>
-                  <a:srgbClr val="64748B"/>
+                  <a:srgbClr val="718096"/>
                 </a:solidFill>
                 <a:latin typeface="Pretendard" pitchFamily="34" charset="0"/>
                 <a:ea typeface="Pretendard" pitchFamily="34" charset="-122"/>
@@ -3636,7 +4085,7 @@
       </p:sp>
       <p:sp>
         <p:nvSpPr>
-          <p:cNvPr id="9" name="Text 7"/>
+          <p:cNvPr id="10" name="Text 8"/>
           <p:cNvSpPr/>
           <p:nvPr/>
         </p:nvSpPr>
@@ -3663,7 +4112,7 @@
             <a:r>
               <a:rPr lang="en-US" sz="2000" b="1" dirty="0">
                 <a:solidFill>
-                  <a:srgbClr val="0F172A"/>
+                  <a:srgbClr val="10161F"/>
                 </a:solidFill>
                 <a:latin typeface="Pretendard" pitchFamily="34" charset="0"/>
                 <a:ea typeface="Pretendard" pitchFamily="34" charset="-122"/>
@@ -3677,7 +4126,7 @@
       </p:sp>
       <p:sp>
         <p:nvSpPr>
-          <p:cNvPr id="10" name="Shape 8"/>
+          <p:cNvPr id="11" name="Shape 9"/>
           <p:cNvSpPr/>
           <p:nvPr/>
         </p:nvSpPr>
@@ -3692,11 +4141,11 @@
             </a:avLst>
           </a:prstGeom>
           <a:solidFill>
-            <a:srgbClr val="F8FAFC"/>
+            <a:srgbClr val="F7FAFC"/>
           </a:solidFill>
           <a:ln w="6350">
             <a:solidFill>
-              <a:srgbClr val="CBD5E1"/>
+              <a:srgbClr val="CBD5E0"/>
             </a:solidFill>
             <a:prstDash val="solid"/>
           </a:ln>
@@ -3704,7 +4153,7 @@
       </p:sp>
       <p:sp>
         <p:nvSpPr>
-          <p:cNvPr id="11" name="Text 9"/>
+          <p:cNvPr id="12" name="Text 10"/>
           <p:cNvSpPr/>
           <p:nvPr/>
         </p:nvSpPr>
@@ -3729,7 +4178,7 @@
             <a:r>
               <a:rPr lang="en-US" sz="950" dirty="0">
                 <a:solidFill>
-                  <a:srgbClr val="64748B"/>
+                  <a:srgbClr val="718096"/>
                 </a:solidFill>
                 <a:latin typeface="Pretendard" pitchFamily="34" charset="0"/>
                 <a:ea typeface="Pretendard" pitchFamily="34" charset="-122"/>
@@ -3743,7 +4192,7 @@
       </p:sp>
       <p:sp>
         <p:nvSpPr>
-          <p:cNvPr id="12" name="Text 10"/>
+          <p:cNvPr id="13" name="Text 11"/>
           <p:cNvSpPr/>
           <p:nvPr/>
         </p:nvSpPr>
@@ -3770,7 +4219,7 @@
             <a:r>
               <a:rPr lang="en-US" sz="2000" b="1" dirty="0">
                 <a:solidFill>
-                  <a:srgbClr val="0F172A"/>
+                  <a:srgbClr val="10161F"/>
                 </a:solidFill>
                 <a:latin typeface="Pretendard" pitchFamily="34" charset="0"/>
                 <a:ea typeface="Pretendard" pitchFamily="34" charset="-122"/>
@@ -3784,7 +4233,7 @@
       </p:sp>
       <p:sp>
         <p:nvSpPr>
-          <p:cNvPr id="13" name="Shape 11"/>
+          <p:cNvPr id="14" name="Shape 12"/>
           <p:cNvSpPr/>
           <p:nvPr/>
         </p:nvSpPr>
@@ -3799,11 +4248,11 @@
             </a:avLst>
           </a:prstGeom>
           <a:solidFill>
-            <a:srgbClr val="F8FAFC"/>
+            <a:srgbClr val="F7FAFC"/>
           </a:solidFill>
           <a:ln w="6350">
             <a:solidFill>
-              <a:srgbClr val="CBD5E1"/>
+              <a:srgbClr val="CBD5E0"/>
             </a:solidFill>
             <a:prstDash val="solid"/>
           </a:ln>
@@ -3811,7 +4260,7 @@
       </p:sp>
       <p:sp>
         <p:nvSpPr>
-          <p:cNvPr id="14" name="Text 12"/>
+          <p:cNvPr id="15" name="Text 13"/>
           <p:cNvSpPr/>
           <p:nvPr/>
         </p:nvSpPr>
@@ -3836,7 +4285,7 @@
             <a:r>
               <a:rPr lang="en-US" sz="950" dirty="0">
                 <a:solidFill>
-                  <a:srgbClr val="64748B"/>
+                  <a:srgbClr val="718096"/>
                 </a:solidFill>
                 <a:latin typeface="Pretendard" pitchFamily="34" charset="0"/>
                 <a:ea typeface="Pretendard" pitchFamily="34" charset="-122"/>
@@ -3850,7 +4299,7 @@
       </p:sp>
       <p:sp>
         <p:nvSpPr>
-          <p:cNvPr id="15" name="Text 13"/>
+          <p:cNvPr id="16" name="Text 14"/>
           <p:cNvSpPr/>
           <p:nvPr/>
         </p:nvSpPr>
@@ -3877,7 +4326,7 @@
             <a:r>
               <a:rPr lang="en-US" sz="2000" b="1" dirty="0">
                 <a:solidFill>
-                  <a:srgbClr val="0F172A"/>
+                  <a:srgbClr val="10161F"/>
                 </a:solidFill>
                 <a:latin typeface="Arial" pitchFamily="34" charset="0"/>
                 <a:ea typeface="Arial" pitchFamily="34" charset="-122"/>
@@ -3891,7 +4340,7 @@
       </p:sp>
       <p:sp>
         <p:nvSpPr>
-          <p:cNvPr id="16" name="Shape 14"/>
+          <p:cNvPr id="17" name="Shape 15"/>
           <p:cNvSpPr/>
           <p:nvPr/>
         </p:nvSpPr>
@@ -3906,11 +4355,11 @@
             </a:avLst>
           </a:prstGeom>
           <a:solidFill>
-            <a:srgbClr val="F8FAFC"/>
+            <a:srgbClr val="F7FAFC"/>
           </a:solidFill>
           <a:ln w="6350">
             <a:solidFill>
-              <a:srgbClr val="CBD5E1"/>
+              <a:srgbClr val="CBD5E0"/>
             </a:solidFill>
             <a:prstDash val="solid"/>
           </a:ln>
@@ -3918,7 +4367,7 @@
       </p:sp>
       <p:sp>
         <p:nvSpPr>
-          <p:cNvPr id="17" name="Text 15"/>
+          <p:cNvPr id="18" name="Text 16"/>
           <p:cNvSpPr/>
           <p:nvPr/>
         </p:nvSpPr>
@@ -3943,7 +4392,7 @@
             <a:r>
               <a:rPr lang="en-US" sz="950" dirty="0">
                 <a:solidFill>
-                  <a:srgbClr val="64748B"/>
+                  <a:srgbClr val="718096"/>
                 </a:solidFill>
                 <a:latin typeface="Pretendard" pitchFamily="34" charset="0"/>
                 <a:ea typeface="Pretendard" pitchFamily="34" charset="-122"/>
@@ -3957,7 +4406,7 @@
       </p:sp>
       <p:sp>
         <p:nvSpPr>
-          <p:cNvPr id="18" name="Text 16"/>
+          <p:cNvPr id="19" name="Text 17"/>
           <p:cNvSpPr/>
           <p:nvPr/>
         </p:nvSpPr>
@@ -3984,7 +4433,7 @@
             <a:r>
               <a:rPr lang="en-US" sz="2000" b="1" dirty="0">
                 <a:solidFill>
-                  <a:srgbClr val="0F172A"/>
+                  <a:srgbClr val="10161F"/>
                 </a:solidFill>
                 <a:latin typeface="Arial" pitchFamily="34" charset="0"/>
                 <a:ea typeface="Arial" pitchFamily="34" charset="-122"/>
@@ -3998,65 +4447,516 @@
       </p:sp>
       <p:sp>
         <p:nvSpPr>
-          <p:cNvPr id="19" name="Text 17"/>
-          <p:cNvSpPr/>
-          <p:nvPr/>
-        </p:nvSpPr>
-        <p:spPr>
-          <a:xfrm>
-            <a:off x="566928" y="6419088"/>
-            <a:ext cx="11057839" cy="201168"/>
-          </a:xfrm>
-          <a:prstGeom prst="rect">
-            <a:avLst/>
-          </a:prstGeom>
-          <a:noFill/>
-          <a:ln/>
-        </p:spPr>
-        <p:txBody>
-          <a:bodyPr wrap="square" lIns="0" tIns="0" rIns="0" bIns="0" rtlCol="0" anchor="ctr"/>
-          <a:lstStyle/>
-          <a:p>
-            <a:pPr algn="ctr" indent="0" marL="0">
-              <a:buNone/>
-            </a:pPr>
-            <a:r>
-              <a:rPr lang="en-US" sz="750" dirty="0">
-                <a:solidFill>
-                  <a:srgbClr val="64748B"/>
+          <p:cNvPr id="20" name="Text 18"/>
+          <p:cNvSpPr/>
+          <p:nvPr/>
+        </p:nvSpPr>
+        <p:spPr>
+          <a:xfrm>
+            <a:off x="566928" y="3502152"/>
+            <a:ext cx="11057839" cy="274320"/>
+          </a:xfrm>
+          <a:prstGeom prst="rect">
+            <a:avLst/>
+          </a:prstGeom>
+          <a:noFill/>
+          <a:ln/>
+        </p:spPr>
+        <p:txBody>
+          <a:bodyPr wrap="square" lIns="0" tIns="0" rIns="0" bIns="0" rtlCol="0" anchor="ctr"/>
+          <a:lstStyle/>
+          <a:p>
+            <a:pPr indent="0" marL="0">
+              <a:buNone/>
+            </a:pPr>
+            <a:r>
+              <a:rPr lang="en-US" sz="1250" b="1" dirty="0">
+                <a:solidFill>
+                  <a:srgbClr val="977024"/>
                 </a:solidFill>
                 <a:latin typeface="Pretendard" pitchFamily="34" charset="0"/>
                 <a:ea typeface="Pretendard" pitchFamily="34" charset="-122"/>
                 <a:cs typeface="Pretendard" pitchFamily="34" charset="-120"/>
               </a:rPr>
-              <a:t>크리딜  ·    ·  2</a:t>
-            </a:r>
-            <a:endParaRPr lang="en-US" sz="750" dirty="0"/>
-          </a:p>
-        </p:txBody>
-      </p:sp>
-      <p:sp>
-        <p:nvSpPr>
-          <p:cNvPr id="20" name="Shape 18"/>
-          <p:cNvSpPr/>
-          <p:nvPr/>
-        </p:nvSpPr>
-        <p:spPr>
-          <a:xfrm>
-            <a:off x="4437172" y="6382512"/>
-            <a:ext cx="3317352" cy="0"/>
-          </a:xfrm>
-          <a:prstGeom prst="line">
-            <a:avLst/>
-          </a:prstGeom>
-          <a:noFill/>
-          <a:ln w="6350">
+              <a:t>3대 핵심 투자 포인트 (Investment Highlights)</a:t>
+            </a:r>
+            <a:endParaRPr lang="en-US" sz="1250" dirty="0"/>
+          </a:p>
+        </p:txBody>
+      </p:sp>
+      <p:sp>
+        <p:nvSpPr>
+          <p:cNvPr id="21" name="Shape 19"/>
+          <p:cNvSpPr/>
+          <p:nvPr/>
+        </p:nvSpPr>
+        <p:spPr>
+          <a:xfrm>
+            <a:off x="566928" y="3831336"/>
+            <a:ext cx="11057839" cy="585216"/>
+          </a:xfrm>
+          <a:prstGeom prst="roundRect">
+            <a:avLst>
+              <a:gd name="adj" fmla="val 7813"/>
+            </a:avLst>
+          </a:prstGeom>
+          <a:solidFill>
+            <a:srgbClr val="F8F9FA"/>
+          </a:solidFill>
+          <a:ln w="7620">
             <a:solidFill>
-              <a:srgbClr val="6B8E00"/>
+              <a:srgbClr val="E2E8F0"/>
             </a:solidFill>
             <a:prstDash val="solid"/>
           </a:ln>
         </p:spPr>
+      </p:sp>
+      <p:sp>
+        <p:nvSpPr>
+          <p:cNvPr id="22" name="Shape 20"/>
+          <p:cNvSpPr/>
+          <p:nvPr/>
+        </p:nvSpPr>
+        <p:spPr>
+          <a:xfrm>
+            <a:off x="676656" y="3941064"/>
+            <a:ext cx="411480" cy="365760"/>
+          </a:xfrm>
+          <a:prstGeom prst="roundRect">
+            <a:avLst>
+              <a:gd name="adj" fmla="val 10000"/>
+            </a:avLst>
+          </a:prstGeom>
+          <a:solidFill>
+            <a:srgbClr val="F3EBDA"/>
+          </a:solidFill>
+          <a:ln w="6350">
+            <a:solidFill>
+              <a:srgbClr val="D9B668"/>
+            </a:solidFill>
+            <a:prstDash val="solid"/>
+          </a:ln>
+        </p:spPr>
+      </p:sp>
+      <p:sp>
+        <p:nvSpPr>
+          <p:cNvPr id="23" name="Text 21"/>
+          <p:cNvSpPr/>
+          <p:nvPr/>
+        </p:nvSpPr>
+        <p:spPr>
+          <a:xfrm>
+            <a:off x="676656" y="3941064"/>
+            <a:ext cx="411480" cy="365760"/>
+          </a:xfrm>
+          <a:prstGeom prst="rect">
+            <a:avLst/>
+          </a:prstGeom>
+          <a:noFill/>
+          <a:ln/>
+        </p:spPr>
+        <p:txBody>
+          <a:bodyPr wrap="square" lIns="0" tIns="0" rIns="0" bIns="0" rtlCol="0" anchor="ctr"/>
+          <a:lstStyle/>
+          <a:p>
+            <a:pPr algn="ctr" indent="0" marL="0">
+              <a:buNone/>
+            </a:pPr>
+            <a:r>
+              <a:rPr lang="en-US" sz="1000" b="1" dirty="0">
+                <a:solidFill>
+                  <a:srgbClr val="977024"/>
+                </a:solidFill>
+                <a:latin typeface="Arial" pitchFamily="34" charset="0"/>
+                <a:ea typeface="Arial" pitchFamily="34" charset="-122"/>
+                <a:cs typeface="Arial" pitchFamily="34" charset="-120"/>
+              </a:rPr>
+              <a:t>01</a:t>
+            </a:r>
+            <a:endParaRPr lang="en-US" sz="1000" dirty="0"/>
+          </a:p>
+        </p:txBody>
+      </p:sp>
+      <p:sp>
+        <p:nvSpPr>
+          <p:cNvPr id="24" name="Text 22"/>
+          <p:cNvSpPr/>
+          <p:nvPr/>
+        </p:nvSpPr>
+        <p:spPr>
+          <a:xfrm>
+            <a:off x="1207008" y="3904488"/>
+            <a:ext cx="10280599" cy="438912"/>
+          </a:xfrm>
+          <a:prstGeom prst="rect">
+            <a:avLst/>
+          </a:prstGeom>
+          <a:noFill/>
+          <a:ln/>
+        </p:spPr>
+        <p:txBody>
+          <a:bodyPr wrap="square" lIns="0" tIns="0" rIns="0" bIns="0" rtlCol="0" anchor="ctr"/>
+          <a:lstStyle/>
+          <a:p>
+            <a:pPr indent="0" marL="0">
+              <a:buNone/>
+            </a:pPr>
+            <a:r>
+              <a:rPr lang="en-US" sz="1150" dirty="0">
+                <a:solidFill>
+                  <a:srgbClr val="10161F"/>
+                </a:solidFill>
+                <a:latin typeface="Pretendard" pitchFamily="34" charset="0"/>
+                <a:ea typeface="Pretendard" pitchFamily="34" charset="-122"/>
+                <a:cs typeface="Pretendard" pitchFamily="34" charset="-120"/>
+              </a:rPr>
+              <a:t>원금 안전판: 영등포권역 핵심 입지 및 우량 대지 지분 가치로 하방 경직성 확보</a:t>
+            </a:r>
+            <a:endParaRPr lang="en-US" sz="1150" dirty="0"/>
+          </a:p>
+        </p:txBody>
+      </p:sp>
+      <p:sp>
+        <p:nvSpPr>
+          <p:cNvPr id="25" name="Shape 23"/>
+          <p:cNvSpPr/>
+          <p:nvPr/>
+        </p:nvSpPr>
+        <p:spPr>
+          <a:xfrm>
+            <a:off x="566928" y="4526280"/>
+            <a:ext cx="11057839" cy="585216"/>
+          </a:xfrm>
+          <a:prstGeom prst="roundRect">
+            <a:avLst>
+              <a:gd name="adj" fmla="val 7813"/>
+            </a:avLst>
+          </a:prstGeom>
+          <a:solidFill>
+            <a:srgbClr val="F8F9FA"/>
+          </a:solidFill>
+          <a:ln w="7620">
+            <a:solidFill>
+              <a:srgbClr val="E2E8F0"/>
+            </a:solidFill>
+            <a:prstDash val="solid"/>
+          </a:ln>
+        </p:spPr>
+      </p:sp>
+      <p:sp>
+        <p:nvSpPr>
+          <p:cNvPr id="26" name="Shape 24"/>
+          <p:cNvSpPr/>
+          <p:nvPr/>
+        </p:nvSpPr>
+        <p:spPr>
+          <a:xfrm>
+            <a:off x="676656" y="4636008"/>
+            <a:ext cx="411480" cy="365760"/>
+          </a:xfrm>
+          <a:prstGeom prst="roundRect">
+            <a:avLst>
+              <a:gd name="adj" fmla="val 10000"/>
+            </a:avLst>
+          </a:prstGeom>
+          <a:solidFill>
+            <a:srgbClr val="F3EBDA"/>
+          </a:solidFill>
+          <a:ln w="6350">
+            <a:solidFill>
+              <a:srgbClr val="D9B668"/>
+            </a:solidFill>
+            <a:prstDash val="solid"/>
+          </a:ln>
+        </p:spPr>
+      </p:sp>
+      <p:sp>
+        <p:nvSpPr>
+          <p:cNvPr id="27" name="Text 25"/>
+          <p:cNvSpPr/>
+          <p:nvPr/>
+        </p:nvSpPr>
+        <p:spPr>
+          <a:xfrm>
+            <a:off x="676656" y="4636008"/>
+            <a:ext cx="411480" cy="365760"/>
+          </a:xfrm>
+          <a:prstGeom prst="rect">
+            <a:avLst/>
+          </a:prstGeom>
+          <a:noFill/>
+          <a:ln/>
+        </p:spPr>
+        <p:txBody>
+          <a:bodyPr wrap="square" lIns="0" tIns="0" rIns="0" bIns="0" rtlCol="0" anchor="ctr"/>
+          <a:lstStyle/>
+          <a:p>
+            <a:pPr algn="ctr" indent="0" marL="0">
+              <a:buNone/>
+            </a:pPr>
+            <a:r>
+              <a:rPr lang="en-US" sz="1000" b="1" dirty="0">
+                <a:solidFill>
+                  <a:srgbClr val="977024"/>
+                </a:solidFill>
+                <a:latin typeface="Arial" pitchFamily="34" charset="0"/>
+                <a:ea typeface="Arial" pitchFamily="34" charset="-122"/>
+                <a:cs typeface="Arial" pitchFamily="34" charset="-120"/>
+              </a:rPr>
+              <a:t>02</a:t>
+            </a:r>
+            <a:endParaRPr lang="en-US" sz="1000" dirty="0"/>
+          </a:p>
+        </p:txBody>
+      </p:sp>
+      <p:sp>
+        <p:nvSpPr>
+          <p:cNvPr id="28" name="Text 26"/>
+          <p:cNvSpPr/>
+          <p:nvPr/>
+        </p:nvSpPr>
+        <p:spPr>
+          <a:xfrm>
+            <a:off x="1207008" y="4599432"/>
+            <a:ext cx="10280599" cy="438912"/>
+          </a:xfrm>
+          <a:prstGeom prst="rect">
+            <a:avLst/>
+          </a:prstGeom>
+          <a:noFill/>
+          <a:ln/>
+        </p:spPr>
+        <p:txBody>
+          <a:bodyPr wrap="square" lIns="0" tIns="0" rIns="0" bIns="0" rtlCol="0" anchor="ctr"/>
+          <a:lstStyle/>
+          <a:p>
+            <a:pPr indent="0" marL="0">
+              <a:buNone/>
+            </a:pPr>
+            <a:r>
+              <a:rPr lang="en-US" sz="1150" dirty="0">
+                <a:solidFill>
+                  <a:srgbClr val="10161F"/>
+                </a:solidFill>
+                <a:latin typeface="Pretendard" pitchFamily="34" charset="0"/>
+                <a:ea typeface="Pretendard" pitchFamily="34" charset="-122"/>
+                <a:cs typeface="Pretendard" pitchFamily="34" charset="-120"/>
+              </a:rPr>
+              <a:t>수익 안정성: 매각 희망가 145억 대비 안정적인 월 임대수익 창출 구조</a:t>
+            </a:r>
+            <a:endParaRPr lang="en-US" sz="1150" dirty="0"/>
+          </a:p>
+        </p:txBody>
+      </p:sp>
+      <p:sp>
+        <p:nvSpPr>
+          <p:cNvPr id="29" name="Shape 27"/>
+          <p:cNvSpPr/>
+          <p:nvPr/>
+        </p:nvSpPr>
+        <p:spPr>
+          <a:xfrm>
+            <a:off x="566928" y="5221224"/>
+            <a:ext cx="11057839" cy="585216"/>
+          </a:xfrm>
+          <a:prstGeom prst="roundRect">
+            <a:avLst>
+              <a:gd name="adj" fmla="val 7813"/>
+            </a:avLst>
+          </a:prstGeom>
+          <a:solidFill>
+            <a:srgbClr val="F8F9FA"/>
+          </a:solidFill>
+          <a:ln w="7620">
+            <a:solidFill>
+              <a:srgbClr val="E2E8F0"/>
+            </a:solidFill>
+            <a:prstDash val="solid"/>
+          </a:ln>
+        </p:spPr>
+      </p:sp>
+      <p:sp>
+        <p:nvSpPr>
+          <p:cNvPr id="30" name="Shape 28"/>
+          <p:cNvSpPr/>
+          <p:nvPr/>
+        </p:nvSpPr>
+        <p:spPr>
+          <a:xfrm>
+            <a:off x="676656" y="5330952"/>
+            <a:ext cx="411480" cy="365760"/>
+          </a:xfrm>
+          <a:prstGeom prst="roundRect">
+            <a:avLst>
+              <a:gd name="adj" fmla="val 10000"/>
+            </a:avLst>
+          </a:prstGeom>
+          <a:solidFill>
+            <a:srgbClr val="F3EBDA"/>
+          </a:solidFill>
+          <a:ln w="6350">
+            <a:solidFill>
+              <a:srgbClr val="D9B668"/>
+            </a:solidFill>
+            <a:prstDash val="solid"/>
+          </a:ln>
+        </p:spPr>
+      </p:sp>
+      <p:sp>
+        <p:nvSpPr>
+          <p:cNvPr id="31" name="Text 29"/>
+          <p:cNvSpPr/>
+          <p:nvPr/>
+        </p:nvSpPr>
+        <p:spPr>
+          <a:xfrm>
+            <a:off x="676656" y="5330952"/>
+            <a:ext cx="411480" cy="365760"/>
+          </a:xfrm>
+          <a:prstGeom prst="rect">
+            <a:avLst/>
+          </a:prstGeom>
+          <a:noFill/>
+          <a:ln/>
+        </p:spPr>
+        <p:txBody>
+          <a:bodyPr wrap="square" lIns="0" tIns="0" rIns="0" bIns="0" rtlCol="0" anchor="ctr"/>
+          <a:lstStyle/>
+          <a:p>
+            <a:pPr algn="ctr" indent="0" marL="0">
+              <a:buNone/>
+            </a:pPr>
+            <a:r>
+              <a:rPr lang="en-US" sz="1000" b="1" dirty="0">
+                <a:solidFill>
+                  <a:srgbClr val="977024"/>
+                </a:solidFill>
+                <a:latin typeface="Arial" pitchFamily="34" charset="0"/>
+                <a:ea typeface="Arial" pitchFamily="34" charset="-122"/>
+                <a:cs typeface="Arial" pitchFamily="34" charset="-120"/>
+              </a:rPr>
+              <a:t>03</a:t>
+            </a:r>
+            <a:endParaRPr lang="en-US" sz="1000" dirty="0"/>
+          </a:p>
+        </p:txBody>
+      </p:sp>
+      <p:sp>
+        <p:nvSpPr>
+          <p:cNvPr id="32" name="Text 30"/>
+          <p:cNvSpPr/>
+          <p:nvPr/>
+        </p:nvSpPr>
+        <p:spPr>
+          <a:xfrm>
+            <a:off x="1207008" y="5294376"/>
+            <a:ext cx="10280599" cy="438912"/>
+          </a:xfrm>
+          <a:prstGeom prst="rect">
+            <a:avLst/>
+          </a:prstGeom>
+          <a:noFill/>
+          <a:ln/>
+        </p:spPr>
+        <p:txBody>
+          <a:bodyPr wrap="square" lIns="0" tIns="0" rIns="0" bIns="0" rtlCol="0" anchor="ctr"/>
+          <a:lstStyle/>
+          <a:p>
+            <a:pPr indent="0" marL="0">
+              <a:buNone/>
+            </a:pPr>
+            <a:r>
+              <a:rPr lang="en-US" sz="1150" dirty="0">
+                <a:solidFill>
+                  <a:srgbClr val="10161F"/>
+                </a:solidFill>
+                <a:latin typeface="Pretendard" pitchFamily="34" charset="0"/>
+                <a:ea typeface="Pretendard" pitchFamily="34" charset="-122"/>
+                <a:cs typeface="Pretendard" pitchFamily="34" charset="-120"/>
+              </a:rPr>
+              <a:t>미래 가치: 향후 권역 지가 상승 및 공법상 잔여 용적률 활용 밸류업 기회</a:t>
+            </a:r>
+            <a:endParaRPr lang="en-US" sz="1150" dirty="0"/>
+          </a:p>
+        </p:txBody>
+      </p:sp>
+      <p:sp>
+        <p:nvSpPr>
+          <p:cNvPr id="33" name="Text 31"/>
+          <p:cNvSpPr/>
+          <p:nvPr/>
+        </p:nvSpPr>
+        <p:spPr>
+          <a:xfrm>
+            <a:off x="566928" y="6382512"/>
+            <a:ext cx="7315200" cy="219456"/>
+          </a:xfrm>
+          <a:prstGeom prst="rect">
+            <a:avLst/>
+          </a:prstGeom>
+          <a:noFill/>
+          <a:ln/>
+        </p:spPr>
+        <p:txBody>
+          <a:bodyPr wrap="square" lIns="0" tIns="0" rIns="0" bIns="0" rtlCol="0" anchor="ctr"/>
+          <a:lstStyle/>
+          <a:p>
+            <a:pPr indent="0" marL="0">
+              <a:buNone/>
+            </a:pPr>
+            <a:r>
+              <a:rPr lang="en-US" sz="800" dirty="0">
+                <a:solidFill>
+                  <a:srgbClr val="718096"/>
+                </a:solidFill>
+                <a:latin typeface="Pretendard" pitchFamily="34" charset="0"/>
+                <a:ea typeface="Pretendard" pitchFamily="34" charset="-122"/>
+                <a:cs typeface="Pretendard" pitchFamily="34" charset="-120"/>
+              </a:rPr>
+              <a:t>크리딜   |   </a:t>
+            </a:r>
+            <a:endParaRPr lang="en-US" sz="800" dirty="0"/>
+          </a:p>
+        </p:txBody>
+      </p:sp>
+      <p:sp>
+        <p:nvSpPr>
+          <p:cNvPr id="34" name="Text 32"/>
+          <p:cNvSpPr/>
+          <p:nvPr/>
+        </p:nvSpPr>
+        <p:spPr>
+          <a:xfrm>
+            <a:off x="10710367" y="6382512"/>
+            <a:ext cx="914400" cy="219456"/>
+          </a:xfrm>
+          <a:prstGeom prst="rect">
+            <a:avLst/>
+          </a:prstGeom>
+          <a:noFill/>
+          <a:ln/>
+        </p:spPr>
+        <p:txBody>
+          <a:bodyPr wrap="square" lIns="0" tIns="0" rIns="0" bIns="0" rtlCol="0" anchor="ctr"/>
+          <a:lstStyle/>
+          <a:p>
+            <a:pPr algn="r" indent="0" marL="0">
+              <a:buNone/>
+            </a:pPr>
+            <a:r>
+              <a:rPr lang="en-US" sz="900" b="1" dirty="0">
+                <a:solidFill>
+                  <a:srgbClr val="B98A2E"/>
+                </a:solidFill>
+                <a:latin typeface="Arial" pitchFamily="34" charset="0"/>
+                <a:ea typeface="Arial" pitchFamily="34" charset="-122"/>
+                <a:cs typeface="Arial" pitchFamily="34" charset="-120"/>
+              </a:rPr>
+              <a:t>2</a:t>
+            </a:r>
+            <a:endParaRPr lang="en-US" sz="900" dirty="0"/>
+          </a:p>
+        </p:txBody>
       </p:sp>
     </p:spTree>
   </p:cSld>
@@ -4098,14 +4998,14 @@
         </p:nvSpPr>
         <p:spPr>
           <a:xfrm>
-            <a:off x="566928" y="384048"/>
-            <a:ext cx="45720" cy="566928"/>
-          </a:xfrm>
-          <a:prstGeom prst="rect">
+            <a:off x="566928" y="457200"/>
+            <a:ext cx="384048" cy="384048"/>
+          </a:xfrm>
+          <a:prstGeom prst="ellipse">
             <a:avLst/>
           </a:prstGeom>
           <a:solidFill>
-            <a:srgbClr val="6B8E00"/>
+            <a:srgbClr val="B98A2E"/>
           </a:solidFill>
           <a:ln/>
         </p:spPr>
@@ -4118,32 +5018,71 @@
         </p:nvSpPr>
         <p:spPr>
           <a:xfrm>
-            <a:off x="749808" y="384048"/>
-            <a:ext cx="10874959" cy="182880"/>
-          </a:xfrm>
-          <a:prstGeom prst="rect">
-            <a:avLst/>
-          </a:prstGeom>
-          <a:noFill/>
-          <a:ln/>
-        </p:spPr>
-        <p:txBody>
-          <a:bodyPr wrap="square" lIns="0" tIns="0" rIns="0" bIns="0" rtlCol="0" anchor="ctr"/>
-          <a:lstStyle/>
-          <a:p>
-            <a:pPr indent="0" marL="0">
-              <a:buNone/>
-            </a:pPr>
-            <a:r>
-              <a:rPr lang="en-US" sz="950" b="1" spc="200" kern="0" dirty="0">
-                <a:solidFill>
-                  <a:srgbClr val="6B8E00"/>
+            <a:off x="566928" y="457200"/>
+            <a:ext cx="384048" cy="384048"/>
+          </a:xfrm>
+          <a:prstGeom prst="rect">
+            <a:avLst/>
+          </a:prstGeom>
+          <a:noFill/>
+          <a:ln/>
+        </p:spPr>
+        <p:txBody>
+          <a:bodyPr wrap="square" lIns="0" tIns="0" rIns="0" bIns="0" rtlCol="0" anchor="ctr"/>
+          <a:lstStyle/>
+          <a:p>
+            <a:pPr algn="ctr" indent="0" marL="0">
+              <a:buNone/>
+            </a:pPr>
+            <a:r>
+              <a:rPr lang="en-US" sz="1300" b="1" dirty="0">
+                <a:solidFill>
+                  <a:srgbClr val="FFFFFF"/>
                 </a:solidFill>
                 <a:latin typeface="Arial" pitchFamily="34" charset="0"/>
                 <a:ea typeface="Arial" pitchFamily="34" charset="-122"/>
                 <a:cs typeface="Arial" pitchFamily="34" charset="-120"/>
               </a:rPr>
-              <a:t>03  Location</a:t>
+              <a:t>03</a:t>
+            </a:r>
+            <a:endParaRPr lang="en-US" sz="1300" dirty="0"/>
+          </a:p>
+        </p:txBody>
+      </p:sp>
+      <p:sp>
+        <p:nvSpPr>
+          <p:cNvPr id="4" name="Text 2"/>
+          <p:cNvSpPr/>
+          <p:nvPr/>
+        </p:nvSpPr>
+        <p:spPr>
+          <a:xfrm>
+            <a:off x="1133856" y="457200"/>
+            <a:ext cx="10490911" cy="182880"/>
+          </a:xfrm>
+          <a:prstGeom prst="rect">
+            <a:avLst/>
+          </a:prstGeom>
+          <a:noFill/>
+          <a:ln/>
+        </p:spPr>
+        <p:txBody>
+          <a:bodyPr wrap="square" lIns="0" tIns="0" rIns="0" bIns="0" rtlCol="0" anchor="ctr"/>
+          <a:lstStyle/>
+          <a:p>
+            <a:pPr indent="0" marL="0">
+              <a:buNone/>
+            </a:pPr>
+            <a:r>
+              <a:rPr lang="en-US" sz="950" b="1" spc="200" kern="0" dirty="0">
+                <a:solidFill>
+                  <a:srgbClr val="B98A2E"/>
+                </a:solidFill>
+                <a:latin typeface="Arial" pitchFamily="34" charset="0"/>
+                <a:ea typeface="Arial" pitchFamily="34" charset="-122"/>
+                <a:cs typeface="Arial" pitchFamily="34" charset="-120"/>
+              </a:rPr>
+              <a:t>Location</a:t>
             </a:r>
             <a:endParaRPr lang="en-US" sz="950" dirty="0"/>
           </a:p>
@@ -4151,14 +5090,14 @@
       </p:sp>
       <p:sp>
         <p:nvSpPr>
-          <p:cNvPr id="4" name="Text 2"/>
-          <p:cNvSpPr/>
-          <p:nvPr/>
-        </p:nvSpPr>
-        <p:spPr>
-          <a:xfrm>
-            <a:off x="749808" y="566928"/>
-            <a:ext cx="10874959" cy="384048"/>
+          <p:cNvPr id="5" name="Text 3"/>
+          <p:cNvSpPr/>
+          <p:nvPr/>
+        </p:nvSpPr>
+        <p:spPr>
+          <a:xfrm>
+            <a:off x="1133856" y="640080"/>
+            <a:ext cx="10490911" cy="365760"/>
           </a:xfrm>
           <a:prstGeom prst="rect">
             <a:avLst/>
@@ -4174,9 +5113,9 @@
               <a:buNone/>
             </a:pPr>
             <a:r>
-              <a:rPr lang="en-US" sz="2200" b="1" dirty="0">
-                <a:solidFill>
-                  <a:srgbClr val="0F172A"/>
+              <a:rPr lang="en-US" sz="2300" b="1" dirty="0">
+                <a:solidFill>
+                  <a:srgbClr val="10161F"/>
                 </a:solidFill>
                 <a:latin typeface="Pretendard" pitchFamily="34" charset="0"/>
                 <a:ea typeface="Pretendard" pitchFamily="34" charset="-122"/>
@@ -4184,13 +5123,13 @@
               </a:rPr>
               <a:t>이 입지, 투자할 만한 곳인가</a:t>
             </a:r>
-            <a:endParaRPr lang="en-US" sz="2200" dirty="0"/>
+            <a:endParaRPr lang="en-US" sz="2300" dirty="0"/>
           </a:p>
         </p:txBody>
       </p:sp>
       <p:pic>
         <p:nvPicPr>
-          <p:cNvPr id="5" name="Image 0" descr="preencoded.png">    </p:cNvPr>
+          <p:cNvPr id="6" name="Image 0" descr="preencoded.png">    </p:cNvPr>
           <p:cNvPicPr>
             <a:picLocks noChangeAspect="1"/>
           </p:cNvPicPr>
@@ -4214,14 +5153,14 @@
       </p:pic>
       <p:sp>
         <p:nvSpPr>
-          <p:cNvPr id="6" name="Text 3"/>
+          <p:cNvPr id="7" name="Text 4"/>
           <p:cNvSpPr/>
           <p:nvPr/>
         </p:nvSpPr>
         <p:spPr>
           <a:xfrm>
             <a:off x="6053328" y="1481328"/>
-            <a:ext cx="2117147" cy="438912"/>
+            <a:ext cx="2117147" cy="493776"/>
           </a:xfrm>
           <a:prstGeom prst="rect">
             <a:avLst/>
@@ -4240,9 +5179,9 @@
               <a:buNone/>
             </a:pPr>
             <a:r>
-              <a:rPr lang="en-US" sz="1400" dirty="0">
-                <a:solidFill>
-                  <a:srgbClr val="64748B"/>
+              <a:rPr lang="en-US" sz="1300" dirty="0">
+                <a:solidFill>
+                  <a:srgbClr val="718096"/>
                 </a:solidFill>
                 <a:latin typeface="Pretendard" pitchFamily="34" charset="0"/>
                 <a:ea typeface="Pretendard" pitchFamily="34" charset="-122"/>
@@ -4250,20 +5189,20 @@
               </a:rPr>
               <a:t>교통 접근성</a:t>
             </a:r>
-            <a:endParaRPr lang="en-US" sz="1400" dirty="0"/>
-          </a:p>
-        </p:txBody>
-      </p:sp>
-      <p:sp>
-        <p:nvSpPr>
-          <p:cNvPr id="7" name="Text 4"/>
+            <a:endParaRPr lang="en-US" sz="1300" dirty="0"/>
+          </a:p>
+        </p:txBody>
+      </p:sp>
+      <p:sp>
+        <p:nvSpPr>
+          <p:cNvPr id="8" name="Text 5"/>
           <p:cNvSpPr/>
           <p:nvPr/>
         </p:nvSpPr>
         <p:spPr>
           <a:xfrm>
             <a:off x="8170475" y="1481328"/>
-            <a:ext cx="3454292" cy="438912"/>
+            <a:ext cx="3454292" cy="493776"/>
           </a:xfrm>
           <a:prstGeom prst="rect">
             <a:avLst/>
@@ -4282,85 +5221,101 @@
               <a:buNone/>
             </a:pPr>
             <a:r>
-              <a:rPr lang="en-US" sz="1400" b="1" dirty="0">
-                <a:solidFill>
-                  <a:srgbClr val="0F172A"/>
+              <a:rPr lang="en-US" sz="1300" b="1" dirty="0">
+                <a:solidFill>
+                  <a:srgbClr val="10161F"/>
                 </a:solidFill>
                 <a:latin typeface="Pretendard" pitchFamily="34" charset="0"/>
                 <a:ea typeface="Pretendard" pitchFamily="34" charset="-122"/>
                 <a:cs typeface="Pretendard" pitchFamily="34" charset="-120"/>
               </a:rPr>
-              <a:t>{"ok":true,"mocked":true,"extractedFields":{"area_signal":"역…</a:t>
-            </a:r>
-            <a:endParaRPr lang="en-US" sz="1400" dirty="0"/>
-          </a:p>
-        </p:txBody>
-      </p:sp>
-      <p:sp>
-        <p:nvSpPr>
-          <p:cNvPr id="8" name="Text 5"/>
-          <p:cNvSpPr/>
-          <p:nvPr/>
-        </p:nvSpPr>
-        <p:spPr>
-          <a:xfrm>
-            <a:off x="566928" y="6419088"/>
-            <a:ext cx="11057839" cy="201168"/>
-          </a:xfrm>
-          <a:prstGeom prst="rect">
-            <a:avLst/>
-          </a:prstGeom>
-          <a:noFill/>
-          <a:ln/>
-        </p:spPr>
-        <p:txBody>
-          <a:bodyPr wrap="square" lIns="0" tIns="0" rIns="0" bIns="0" rtlCol="0" anchor="ctr"/>
-          <a:lstStyle/>
-          <a:p>
-            <a:pPr algn="ctr" indent="0" marL="0">
-              <a:buNone/>
-            </a:pPr>
-            <a:r>
-              <a:rPr lang="en-US" sz="750" dirty="0">
-                <a:solidFill>
-                  <a:srgbClr val="64748B"/>
+              <a:t>{"ok":true,"mocked":true,"extractedFields":{"area_signal":"역삼","asset_type":"오피스빌딩","price_band":"300억","size_signal":"3000평(약 9917.</a:t>
+            </a:r>
+            <a:endParaRPr lang="en-US" sz="1300" dirty="0"/>
+          </a:p>
+        </p:txBody>
+      </p:sp>
+      <p:sp>
+        <p:nvSpPr>
+          <p:cNvPr id="9" name="Text 6"/>
+          <p:cNvSpPr/>
+          <p:nvPr/>
+        </p:nvSpPr>
+        <p:spPr>
+          <a:xfrm>
+            <a:off x="566928" y="6382512"/>
+            <a:ext cx="7315200" cy="219456"/>
+          </a:xfrm>
+          <a:prstGeom prst="rect">
+            <a:avLst/>
+          </a:prstGeom>
+          <a:noFill/>
+          <a:ln/>
+        </p:spPr>
+        <p:txBody>
+          <a:bodyPr wrap="square" lIns="0" tIns="0" rIns="0" bIns="0" rtlCol="0" anchor="ctr"/>
+          <a:lstStyle/>
+          <a:p>
+            <a:pPr indent="0" marL="0">
+              <a:buNone/>
+            </a:pPr>
+            <a:r>
+              <a:rPr lang="en-US" sz="800" dirty="0">
+                <a:solidFill>
+                  <a:srgbClr val="718096"/>
                 </a:solidFill>
                 <a:latin typeface="Pretendard" pitchFamily="34" charset="0"/>
                 <a:ea typeface="Pretendard" pitchFamily="34" charset="-122"/>
                 <a:cs typeface="Pretendard" pitchFamily="34" charset="-120"/>
               </a:rPr>
-              <a:t>크리딜  ·    ·  3</a:t>
-            </a:r>
-            <a:endParaRPr lang="en-US" sz="750" dirty="0"/>
-          </a:p>
-        </p:txBody>
-      </p:sp>
-      <p:sp>
-        <p:nvSpPr>
-          <p:cNvPr id="9" name="Shape 6"/>
-          <p:cNvSpPr/>
-          <p:nvPr/>
-        </p:nvSpPr>
-        <p:spPr>
-          <a:xfrm>
-            <a:off x="4437172" y="6382512"/>
-            <a:ext cx="3317352" cy="0"/>
-          </a:xfrm>
-          <a:prstGeom prst="line">
-            <a:avLst/>
-          </a:prstGeom>
-          <a:noFill/>
-          <a:ln w="6350">
-            <a:solidFill>
-              <a:srgbClr val="6B8E00"/>
-            </a:solidFill>
-            <a:prstDash val="solid"/>
-          </a:ln>
-        </p:spPr>
+              <a:t>크리딜   |   </a:t>
+            </a:r>
+            <a:endParaRPr lang="en-US" sz="800" dirty="0"/>
+          </a:p>
+        </p:txBody>
       </p:sp>
       <p:sp>
         <p:nvSpPr>
           <p:cNvPr id="10" name="Text 7"/>
+          <p:cNvSpPr/>
+          <p:nvPr/>
+        </p:nvSpPr>
+        <p:spPr>
+          <a:xfrm>
+            <a:off x="10710367" y="6382512"/>
+            <a:ext cx="914400" cy="219456"/>
+          </a:xfrm>
+          <a:prstGeom prst="rect">
+            <a:avLst/>
+          </a:prstGeom>
+          <a:noFill/>
+          <a:ln/>
+        </p:spPr>
+        <p:txBody>
+          <a:bodyPr wrap="square" lIns="0" tIns="0" rIns="0" bIns="0" rtlCol="0" anchor="ctr"/>
+          <a:lstStyle/>
+          <a:p>
+            <a:pPr algn="r" indent="0" marL="0">
+              <a:buNone/>
+            </a:pPr>
+            <a:r>
+              <a:rPr lang="en-US" sz="900" b="1" dirty="0">
+                <a:solidFill>
+                  <a:srgbClr val="B98A2E"/>
+                </a:solidFill>
+                <a:latin typeface="Arial" pitchFamily="34" charset="0"/>
+                <a:ea typeface="Arial" pitchFamily="34" charset="-122"/>
+                <a:cs typeface="Arial" pitchFamily="34" charset="-120"/>
+              </a:rPr>
+              <a:t>3</a:t>
+            </a:r>
+            <a:endParaRPr lang="en-US" sz="900" dirty="0"/>
+          </a:p>
+        </p:txBody>
+      </p:sp>
+      <p:sp>
+        <p:nvSpPr>
+          <p:cNvPr id="11" name="Text 8"/>
           <p:cNvSpPr/>
           <p:nvPr/>
         </p:nvSpPr>
@@ -4385,7 +5340,7 @@
             <a:r>
               <a:rPr lang="en-US" sz="1000" dirty="0">
                 <a:solidFill>
-                  <a:srgbClr val="0F172A"/>
+                  <a:srgbClr val="10161F"/>
                 </a:solidFill>
                 <a:latin typeface="Pretendard" pitchFamily="34" charset="0"/>
                 <a:ea typeface="Pretendard" pitchFamily="34" charset="-122"/>
@@ -4437,14 +5392,14 @@
         </p:nvSpPr>
         <p:spPr>
           <a:xfrm>
-            <a:off x="566928" y="384048"/>
-            <a:ext cx="45720" cy="566928"/>
-          </a:xfrm>
-          <a:prstGeom prst="rect">
+            <a:off x="566928" y="457200"/>
+            <a:ext cx="384048" cy="384048"/>
+          </a:xfrm>
+          <a:prstGeom prst="ellipse">
             <a:avLst/>
           </a:prstGeom>
           <a:solidFill>
-            <a:srgbClr val="6B8E00"/>
+            <a:srgbClr val="B98A2E"/>
           </a:solidFill>
           <a:ln/>
         </p:spPr>
@@ -4457,32 +5412,71 @@
         </p:nvSpPr>
         <p:spPr>
           <a:xfrm>
-            <a:off x="749808" y="384048"/>
-            <a:ext cx="10874959" cy="182880"/>
-          </a:xfrm>
-          <a:prstGeom prst="rect">
-            <a:avLst/>
-          </a:prstGeom>
-          <a:noFill/>
-          <a:ln/>
-        </p:spPr>
-        <p:txBody>
-          <a:bodyPr wrap="square" lIns="0" tIns="0" rIns="0" bIns="0" rtlCol="0" anchor="ctr"/>
-          <a:lstStyle/>
-          <a:p>
-            <a:pPr indent="0" marL="0">
-              <a:buNone/>
-            </a:pPr>
-            <a:r>
-              <a:rPr lang="en-US" sz="950" b="1" spc="200" kern="0" dirty="0">
-                <a:solidFill>
-                  <a:srgbClr val="6B8E00"/>
+            <a:off x="566928" y="457200"/>
+            <a:ext cx="384048" cy="384048"/>
+          </a:xfrm>
+          <a:prstGeom prst="rect">
+            <a:avLst/>
+          </a:prstGeom>
+          <a:noFill/>
+          <a:ln/>
+        </p:spPr>
+        <p:txBody>
+          <a:bodyPr wrap="square" lIns="0" tIns="0" rIns="0" bIns="0" rtlCol="0" anchor="ctr"/>
+          <a:lstStyle/>
+          <a:p>
+            <a:pPr algn="ctr" indent="0" marL="0">
+              <a:buNone/>
+            </a:pPr>
+            <a:r>
+              <a:rPr lang="en-US" sz="1300" b="1" dirty="0">
+                <a:solidFill>
+                  <a:srgbClr val="FFFFFF"/>
                 </a:solidFill>
                 <a:latin typeface="Arial" pitchFamily="34" charset="0"/>
                 <a:ea typeface="Arial" pitchFamily="34" charset="-122"/>
                 <a:cs typeface="Arial" pitchFamily="34" charset="-120"/>
               </a:rPr>
-              <a:t>04  Building</a:t>
+              <a:t>04</a:t>
+            </a:r>
+            <a:endParaRPr lang="en-US" sz="1300" dirty="0"/>
+          </a:p>
+        </p:txBody>
+      </p:sp>
+      <p:sp>
+        <p:nvSpPr>
+          <p:cNvPr id="4" name="Text 2"/>
+          <p:cNvSpPr/>
+          <p:nvPr/>
+        </p:nvSpPr>
+        <p:spPr>
+          <a:xfrm>
+            <a:off x="1133856" y="457200"/>
+            <a:ext cx="10490911" cy="182880"/>
+          </a:xfrm>
+          <a:prstGeom prst="rect">
+            <a:avLst/>
+          </a:prstGeom>
+          <a:noFill/>
+          <a:ln/>
+        </p:spPr>
+        <p:txBody>
+          <a:bodyPr wrap="square" lIns="0" tIns="0" rIns="0" bIns="0" rtlCol="0" anchor="ctr"/>
+          <a:lstStyle/>
+          <a:p>
+            <a:pPr indent="0" marL="0">
+              <a:buNone/>
+            </a:pPr>
+            <a:r>
+              <a:rPr lang="en-US" sz="950" b="1" spc="200" kern="0" dirty="0">
+                <a:solidFill>
+                  <a:srgbClr val="B98A2E"/>
+                </a:solidFill>
+                <a:latin typeface="Arial" pitchFamily="34" charset="0"/>
+                <a:ea typeface="Arial" pitchFamily="34" charset="-122"/>
+                <a:cs typeface="Arial" pitchFamily="34" charset="-120"/>
+              </a:rPr>
+              <a:t>Building</a:t>
             </a:r>
             <a:endParaRPr lang="en-US" sz="950" dirty="0"/>
           </a:p>
@@ -4490,14 +5484,14 @@
       </p:sp>
       <p:sp>
         <p:nvSpPr>
-          <p:cNvPr id="4" name="Text 2"/>
-          <p:cNvSpPr/>
-          <p:nvPr/>
-        </p:nvSpPr>
-        <p:spPr>
-          <a:xfrm>
-            <a:off x="749808" y="566928"/>
-            <a:ext cx="10874959" cy="384048"/>
+          <p:cNvPr id="5" name="Text 3"/>
+          <p:cNvSpPr/>
+          <p:nvPr/>
+        </p:nvSpPr>
+        <p:spPr>
+          <a:xfrm>
+            <a:off x="1133856" y="640080"/>
+            <a:ext cx="10490911" cy="365760"/>
           </a:xfrm>
           <a:prstGeom prst="rect">
             <a:avLst/>
@@ -4513,9 +5507,9 @@
               <a:buNone/>
             </a:pPr>
             <a:r>
-              <a:rPr lang="en-US" sz="2200" b="1" dirty="0">
-                <a:solidFill>
-                  <a:srgbClr val="0F172A"/>
+              <a:rPr lang="en-US" sz="2300" b="1" dirty="0">
+                <a:solidFill>
+                  <a:srgbClr val="10161F"/>
                 </a:solidFill>
                 <a:latin typeface="Pretendard" pitchFamily="34" charset="0"/>
                 <a:ea typeface="Pretendard" pitchFamily="34" charset="-122"/>
@@ -4523,13 +5517,13 @@
               </a:rPr>
               <a:t>이 매물, 어떤 자산인가</a:t>
             </a:r>
-            <a:endParaRPr lang="en-US" sz="2200" dirty="0"/>
-          </a:p>
-        </p:txBody>
-      </p:sp>
-      <p:sp>
-        <p:nvSpPr>
-          <p:cNvPr id="5" name="Text 3"/>
+            <a:endParaRPr lang="en-US" sz="2300" dirty="0"/>
+          </a:p>
+        </p:txBody>
+      </p:sp>
+      <p:sp>
+        <p:nvSpPr>
+          <p:cNvPr id="6" name="Text 4"/>
           <p:cNvSpPr/>
           <p:nvPr/>
         </p:nvSpPr>
@@ -4554,7 +5548,7 @@
             <a:r>
               <a:rPr lang="en-US" sz="1100" b="1" dirty="0">
                 <a:solidFill>
-                  <a:srgbClr val="0F172A"/>
+                  <a:srgbClr val="10161F"/>
                 </a:solidFill>
                 <a:latin typeface="Pretendard" pitchFamily="34" charset="0"/>
                 <a:ea typeface="Pretendard" pitchFamily="34" charset="-122"/>
@@ -4568,7 +5562,7 @@
       </p:sp>
       <p:sp>
         <p:nvSpPr>
-          <p:cNvPr id="6" name="Text 4"/>
+          <p:cNvPr id="7" name="Text 5"/>
           <p:cNvSpPr/>
           <p:nvPr/>
         </p:nvSpPr>
@@ -4596,7 +5590,7 @@
             <a:r>
               <a:rPr lang="en-US" sz="1400" dirty="0">
                 <a:solidFill>
-                  <a:srgbClr val="64748B"/>
+                  <a:srgbClr val="718096"/>
                 </a:solidFill>
                 <a:latin typeface="Pretendard" pitchFamily="34" charset="0"/>
                 <a:ea typeface="Pretendard" pitchFamily="34" charset="-122"/>
@@ -4610,7 +5604,7 @@
       </p:sp>
       <p:sp>
         <p:nvSpPr>
-          <p:cNvPr id="7" name="Text 5"/>
+          <p:cNvPr id="8" name="Text 6"/>
           <p:cNvSpPr/>
           <p:nvPr/>
         </p:nvSpPr>
@@ -4638,7 +5632,7 @@
             <a:r>
               <a:rPr lang="en-US" sz="1400" b="1" dirty="0">
                 <a:solidFill>
-                  <a:srgbClr val="0F172A"/>
+                  <a:srgbClr val="10161F"/>
                 </a:solidFill>
                 <a:latin typeface="Pretendard" pitchFamily="34" charset="0"/>
                 <a:ea typeface="Pretendard" pitchFamily="34" charset="-122"/>
@@ -4652,7 +5646,7 @@
       </p:sp>
       <p:sp>
         <p:nvSpPr>
-          <p:cNvPr id="8" name="Shape 6"/>
+          <p:cNvPr id="9" name="Shape 7"/>
           <p:cNvSpPr/>
           <p:nvPr/>
         </p:nvSpPr>
@@ -4667,7 +5661,7 @@
           <a:noFill/>
           <a:ln w="8890">
             <a:solidFill>
-              <a:srgbClr val="6B8E00"/>
+              <a:srgbClr val="B98A2E"/>
             </a:solidFill>
             <a:prstDash val="solid"/>
           </a:ln>
@@ -4675,7 +5669,7 @@
       </p:sp>
       <p:sp>
         <p:nvSpPr>
-          <p:cNvPr id="9" name="Shape 7"/>
+          <p:cNvPr id="10" name="Shape 8"/>
           <p:cNvSpPr/>
           <p:nvPr/>
         </p:nvSpPr>
@@ -4690,14 +5684,14 @@
             </a:avLst>
           </a:prstGeom>
           <a:solidFill>
-            <a:srgbClr val="DBEAFE"/>
+            <a:srgbClr val="F3EBDA"/>
           </a:solidFill>
           <a:ln/>
         </p:spPr>
       </p:sp>
       <p:sp>
         <p:nvSpPr>
-          <p:cNvPr id="10" name="Shape 8"/>
+          <p:cNvPr id="11" name="Shape 9"/>
           <p:cNvSpPr/>
           <p:nvPr/>
         </p:nvSpPr>
@@ -4710,14 +5704,14 @@
             <a:avLst/>
           </a:prstGeom>
           <a:solidFill>
-            <a:srgbClr val="1D4ED8"/>
+            <a:srgbClr val="977024"/>
           </a:solidFill>
           <a:ln/>
         </p:spPr>
       </p:sp>
       <p:sp>
         <p:nvSpPr>
-          <p:cNvPr id="11" name="Text 9"/>
+          <p:cNvPr id="12" name="Text 10"/>
           <p:cNvSpPr/>
           <p:nvPr/>
         </p:nvSpPr>
@@ -4739,147 +5733,90 @@
             <a:pPr indent="0" marL="0">
               <a:buNone/>
             </a:pPr>
-            <a:r>
-              <a:rPr lang="en-US" sz="1050" b="1" dirty="0">
-                <a:solidFill>
-                  <a:srgbClr val="1D4ED8"/>
+            <a:endParaRPr lang="en-US" sz="1050" dirty="0"/>
+          </a:p>
+        </p:txBody>
+      </p:sp>
+      <p:sp>
+        <p:nvSpPr>
+          <p:cNvPr id="13" name="Text 11"/>
+          <p:cNvSpPr/>
+          <p:nvPr/>
+        </p:nvSpPr>
+        <p:spPr>
+          <a:xfrm>
+            <a:off x="7967167" y="1975104"/>
+            <a:ext cx="3511296" cy="1700784"/>
+          </a:xfrm>
+          <a:prstGeom prst="rect">
+            <a:avLst/>
+          </a:prstGeom>
+          <a:noFill/>
+          <a:ln/>
+        </p:spPr>
+        <p:txBody>
+          <a:bodyPr wrap="square" lIns="0" tIns="0" rIns="0" bIns="0" rtlCol="0" anchor="t"/>
+          <a:lstStyle/>
+          <a:p>
+            <a:pPr indent="0" marL="0">
+              <a:lnSpc>
+                <a:spcPct val="120000"/>
+              </a:lnSpc>
+              <a:buNone/>
+            </a:pPr>
+            <a:r>
+              <a:rPr lang="en-US" sz="930" dirty="0">
+                <a:solidFill>
+                  <a:srgbClr val="10161F"/>
                 </a:solidFill>
                 <a:latin typeface="Pretendard" pitchFamily="34" charset="0"/>
                 <a:ea typeface="Pretendard" pitchFamily="34" charset="-122"/>
                 <a:cs typeface="Pretendard" pitchFamily="34" charset="-120"/>
               </a:rPr>
-              <a:t>토지 및 건물 분석 포인트</a:t>
-            </a:r>
-            <a:endParaRPr lang="en-US" sz="1050" dirty="0"/>
-          </a:p>
-        </p:txBody>
-      </p:sp>
-      <p:sp>
-        <p:nvSpPr>
-          <p:cNvPr id="12" name="Text 10"/>
-          <p:cNvSpPr/>
-          <p:nvPr/>
-        </p:nvSpPr>
-        <p:spPr>
-          <a:xfrm>
-            <a:off x="7967167" y="1975104"/>
-            <a:ext cx="3511296" cy="1700784"/>
-          </a:xfrm>
-          <a:prstGeom prst="rect">
-            <a:avLst/>
-          </a:prstGeom>
-          <a:noFill/>
-          <a:ln/>
-        </p:spPr>
-        <p:txBody>
-          <a:bodyPr wrap="square" lIns="0" tIns="0" rIns="0" bIns="0" rtlCol="0" anchor="t"/>
-          <a:lstStyle/>
-          <a:p>
-            <a:pPr marL="342900" indent="-342900">
-              <a:lnSpc>
-                <a:spcPct val="120000"/>
-              </a:lnSpc>
-              <a:buSzPct val="100000"/>
-              <a:buChar char="•"/>
-            </a:pPr>
-            <a:r>
-              <a:rPr lang="en-US" sz="930" dirty="0">
-                <a:solidFill>
-                  <a:srgbClr val="0F172A"/>
+              <a:t>{"ok":true,"mocked":true,"extractedFields":{"area_signal":"역삼","asset_type":"오피스빌딩","price_band":"300억","size_signal":"3</a:t>
+            </a:r>
+            <a:endParaRPr lang="en-US" sz="930" dirty="0"/>
+          </a:p>
+        </p:txBody>
+      </p:sp>
+      <p:sp>
+        <p:nvSpPr>
+          <p:cNvPr id="14" name="Text 12"/>
+          <p:cNvSpPr/>
+          <p:nvPr/>
+        </p:nvSpPr>
+        <p:spPr>
+          <a:xfrm>
+            <a:off x="566928" y="6382512"/>
+            <a:ext cx="7315200" cy="219456"/>
+          </a:xfrm>
+          <a:prstGeom prst="rect">
+            <a:avLst/>
+          </a:prstGeom>
+          <a:noFill/>
+          <a:ln/>
+        </p:spPr>
+        <p:txBody>
+          <a:bodyPr wrap="square" lIns="0" tIns="0" rIns="0" bIns="0" rtlCol="0" anchor="ctr"/>
+          <a:lstStyle/>
+          <a:p>
+            <a:pPr indent="0" marL="0">
+              <a:buNone/>
+            </a:pPr>
+            <a:r>
+              <a:rPr lang="en-US" sz="800" dirty="0">
+                <a:solidFill>
+                  <a:srgbClr val="718096"/>
                 </a:solidFill>
                 <a:latin typeface="Pretendard" pitchFamily="34" charset="0"/>
                 <a:ea typeface="Pretendard" pitchFamily="34" charset="-122"/>
                 <a:cs typeface="Pretendard" pitchFamily="34" charset="-120"/>
               </a:rPr>
-              <a:t>서초대로 25m 메인 도로변 우수한 가시성 확보</a:t>
-            </a:r>
-            <a:endParaRPr lang="en-US" sz="930" dirty="0"/>
-          </a:p>
-          <a:p>
-            <a:pPr marL="342900" indent="-342900">
-              <a:lnSpc>
-                <a:spcPct val="120000"/>
-              </a:lnSpc>
-              <a:buSzPct val="100000"/>
-              <a:buChar char="•"/>
-            </a:pPr>
-            <a:r>
-              <a:rPr lang="en-US" sz="930" dirty="0">
-                <a:solidFill>
-                  <a:srgbClr val="0F172A"/>
-                </a:solidFill>
-                <a:latin typeface="Pretendard" pitchFamily="34" charset="0"/>
-                <a:ea typeface="Pretendard" pitchFamily="34" charset="-122"/>
-                <a:cs typeface="Pretendard" pitchFamily="34" charset="-120"/>
-              </a:rPr>
-              <a:t>제3종일반주거지역 법정 용적률 완비 자산</a:t>
-            </a:r>
-            <a:endParaRPr lang="en-US" sz="930" dirty="0"/>
-          </a:p>
-          <a:p>
-            <a:pPr marL="342900" indent="-342900">
-              <a:lnSpc>
-                <a:spcPct val="120000"/>
-              </a:lnSpc>
-              <a:buSzPct val="100000"/>
-              <a:buChar char="•"/>
-            </a:pPr>
-            <a:r>
-              <a:rPr lang="en-US" sz="930" dirty="0">
-                <a:solidFill>
-                  <a:srgbClr val="0F172A"/>
-                </a:solidFill>
-                <a:latin typeface="Pretendard" pitchFamily="34" charset="0"/>
-                <a:ea typeface="Pretendard" pitchFamily="34" charset="-122"/>
-                <a:cs typeface="Pretendard" pitchFamily="34" charset="-120"/>
-              </a:rPr>
-              <a:t>침대용 승강기 완비로 병의원 입점 최적화 구조</a:t>
-            </a:r>
-            <a:endParaRPr lang="en-US" sz="930" dirty="0"/>
-          </a:p>
-        </p:txBody>
-      </p:sp>
-      <p:sp>
-        <p:nvSpPr>
-          <p:cNvPr id="13" name="Shape 11"/>
-          <p:cNvSpPr/>
-          <p:nvPr/>
-        </p:nvSpPr>
-        <p:spPr>
-          <a:xfrm>
-            <a:off x="7784287" y="3977640"/>
-            <a:ext cx="3840480" cy="2148840"/>
-          </a:xfrm>
-          <a:prstGeom prst="roundRect">
-            <a:avLst>
-              <a:gd name="adj" fmla="val 2553"/>
-            </a:avLst>
-          </a:prstGeom>
-          <a:solidFill>
-            <a:srgbClr val="DBEAFE"/>
-          </a:solidFill>
-          <a:ln/>
-        </p:spPr>
-      </p:sp>
-      <p:sp>
-        <p:nvSpPr>
-          <p:cNvPr id="14" name="Shape 12"/>
-          <p:cNvSpPr/>
-          <p:nvPr/>
-        </p:nvSpPr>
-        <p:spPr>
-          <a:xfrm>
-            <a:off x="7784287" y="4032504"/>
-            <a:ext cx="36576" cy="2039112"/>
-          </a:xfrm>
-          <a:prstGeom prst="rect">
-            <a:avLst/>
-          </a:prstGeom>
-          <a:solidFill>
-            <a:srgbClr val="1D4ED8"/>
-          </a:solidFill>
-          <a:ln/>
-        </p:spPr>
+              <a:t>크리딜   |   </a:t>
+            </a:r>
+            <a:endParaRPr lang="en-US" sz="800" dirty="0"/>
+          </a:p>
+        </p:txBody>
       </p:sp>
       <p:sp>
         <p:nvSpPr>
@@ -4889,183 +5826,36 @@
         </p:nvSpPr>
         <p:spPr>
           <a:xfrm>
-            <a:off x="7967167" y="4087368"/>
-            <a:ext cx="3511296" cy="201168"/>
-          </a:xfrm>
-          <a:prstGeom prst="rect">
-            <a:avLst/>
-          </a:prstGeom>
-          <a:noFill/>
-          <a:ln/>
-        </p:spPr>
-        <p:txBody>
-          <a:bodyPr wrap="square" lIns="0" tIns="0" rIns="0" bIns="0" rtlCol="0" anchor="ctr"/>
-          <a:lstStyle/>
-          <a:p>
-            <a:pPr indent="0" marL="0">
-              <a:buNone/>
-            </a:pPr>
-            <a:r>
-              <a:rPr lang="en-US" sz="1050" b="1" dirty="0">
-                <a:solidFill>
-                  <a:srgbClr val="1D4ED8"/>
-                </a:solidFill>
-                <a:latin typeface="Pretendard" pitchFamily="34" charset="0"/>
-                <a:ea typeface="Pretendard" pitchFamily="34" charset="-122"/>
-                <a:cs typeface="Pretendard" pitchFamily="34" charset="-120"/>
-              </a:rPr>
-              <a:t>물건 실사 및 관리 상태</a:t>
-            </a:r>
-            <a:endParaRPr lang="en-US" sz="1050" dirty="0"/>
-          </a:p>
-        </p:txBody>
-      </p:sp>
-      <p:sp>
-        <p:nvSpPr>
-          <p:cNvPr id="16" name="Text 14"/>
-          <p:cNvSpPr/>
-          <p:nvPr/>
-        </p:nvSpPr>
-        <p:spPr>
-          <a:xfrm>
-            <a:off x="7967167" y="4306824"/>
-            <a:ext cx="3511296" cy="1746504"/>
-          </a:xfrm>
-          <a:prstGeom prst="rect">
-            <a:avLst/>
-          </a:prstGeom>
-          <a:noFill/>
-          <a:ln/>
-        </p:spPr>
-        <p:txBody>
-          <a:bodyPr wrap="square" lIns="0" tIns="0" rIns="0" bIns="0" rtlCol="0" anchor="t"/>
-          <a:lstStyle/>
-          <a:p>
-            <a:pPr marL="342900" indent="-342900">
-              <a:lnSpc>
-                <a:spcPct val="120000"/>
-              </a:lnSpc>
-              <a:buSzPct val="100000"/>
-              <a:buChar char="•"/>
-            </a:pPr>
-            <a:r>
-              <a:rPr lang="en-US" sz="930" dirty="0">
-                <a:solidFill>
-                  <a:srgbClr val="0F172A"/>
-                </a:solidFill>
-                <a:latin typeface="Pretendard" pitchFamily="34" charset="0"/>
-                <a:ea typeface="Pretendard" pitchFamily="34" charset="-122"/>
-                <a:cs typeface="Pretendard" pitchFamily="34" charset="-120"/>
-              </a:rPr>
-              <a:t>2017년 준공 신축급 상태로 누수·균열 0건</a:t>
-            </a:r>
-            <a:endParaRPr lang="en-US" sz="930" dirty="0"/>
-          </a:p>
-          <a:p>
-            <a:pPr marL="342900" indent="-342900">
-              <a:lnSpc>
-                <a:spcPct val="120000"/>
-              </a:lnSpc>
-              <a:buSzPct val="100000"/>
-              <a:buChar char="•"/>
-            </a:pPr>
-            <a:r>
-              <a:rPr lang="en-US" sz="930" dirty="0">
-                <a:solidFill>
-                  <a:srgbClr val="0F172A"/>
-                </a:solidFill>
-                <a:latin typeface="Pretendard" pitchFamily="34" charset="0"/>
-                <a:ea typeface="Pretendard" pitchFamily="34" charset="-122"/>
-                <a:cs typeface="Pretendard" pitchFamily="34" charset="-120"/>
-              </a:rPr>
-              <a:t>단독 법인 소유로 권리관계 투명</a:t>
-            </a:r>
-            <a:endParaRPr lang="en-US" sz="930" dirty="0"/>
-          </a:p>
-          <a:p>
-            <a:pPr marL="342900" indent="-342900">
-              <a:lnSpc>
-                <a:spcPct val="120000"/>
-              </a:lnSpc>
-              <a:buSzPct val="100000"/>
-              <a:buChar char="•"/>
-            </a:pPr>
-            <a:r>
-              <a:rPr lang="en-US" sz="930" dirty="0">
-                <a:solidFill>
-                  <a:srgbClr val="0F172A"/>
-                </a:solidFill>
-                <a:latin typeface="Pretendard" pitchFamily="34" charset="0"/>
-                <a:ea typeface="Pretendard" pitchFamily="34" charset="-122"/>
-                <a:cs typeface="Pretendard" pitchFamily="34" charset="-120"/>
-              </a:rPr>
-              <a:t>1금융권 담보대출 85억 원 승계 적격</a:t>
-            </a:r>
-            <a:endParaRPr lang="en-US" sz="930" dirty="0"/>
-          </a:p>
-        </p:txBody>
-      </p:sp>
-      <p:sp>
-        <p:nvSpPr>
-          <p:cNvPr id="17" name="Text 15"/>
-          <p:cNvSpPr/>
-          <p:nvPr/>
-        </p:nvSpPr>
-        <p:spPr>
-          <a:xfrm>
-            <a:off x="566928" y="6419088"/>
-            <a:ext cx="11057839" cy="201168"/>
-          </a:xfrm>
-          <a:prstGeom prst="rect">
-            <a:avLst/>
-          </a:prstGeom>
-          <a:noFill/>
-          <a:ln/>
-        </p:spPr>
-        <p:txBody>
-          <a:bodyPr wrap="square" lIns="0" tIns="0" rIns="0" bIns="0" rtlCol="0" anchor="ctr"/>
-          <a:lstStyle/>
-          <a:p>
-            <a:pPr algn="ctr" indent="0" marL="0">
-              <a:buNone/>
-            </a:pPr>
-            <a:r>
-              <a:rPr lang="en-US" sz="750" dirty="0">
-                <a:solidFill>
-                  <a:srgbClr val="64748B"/>
-                </a:solidFill>
-                <a:latin typeface="Pretendard" pitchFamily="34" charset="0"/>
-                <a:ea typeface="Pretendard" pitchFamily="34" charset="-122"/>
-                <a:cs typeface="Pretendard" pitchFamily="34" charset="-120"/>
-              </a:rPr>
-              <a:t>크리딜  ·    ·  4</a:t>
-            </a:r>
-            <a:endParaRPr lang="en-US" sz="750" dirty="0"/>
-          </a:p>
-        </p:txBody>
-      </p:sp>
-      <p:sp>
-        <p:nvSpPr>
-          <p:cNvPr id="18" name="Shape 16"/>
-          <p:cNvSpPr/>
-          <p:nvPr/>
-        </p:nvSpPr>
-        <p:spPr>
-          <a:xfrm>
-            <a:off x="4437172" y="6382512"/>
-            <a:ext cx="3317352" cy="0"/>
-          </a:xfrm>
-          <a:prstGeom prst="line">
-            <a:avLst/>
-          </a:prstGeom>
-          <a:noFill/>
-          <a:ln w="6350">
-            <a:solidFill>
-              <a:srgbClr val="6B8E00"/>
-            </a:solidFill>
-            <a:prstDash val="solid"/>
-          </a:ln>
-        </p:spPr>
+            <a:off x="10710367" y="6382512"/>
+            <a:ext cx="914400" cy="219456"/>
+          </a:xfrm>
+          <a:prstGeom prst="rect">
+            <a:avLst/>
+          </a:prstGeom>
+          <a:noFill/>
+          <a:ln/>
+        </p:spPr>
+        <p:txBody>
+          <a:bodyPr wrap="square" lIns="0" tIns="0" rIns="0" bIns="0" rtlCol="0" anchor="ctr"/>
+          <a:lstStyle/>
+          <a:p>
+            <a:pPr algn="r" indent="0" marL="0">
+              <a:buNone/>
+            </a:pPr>
+            <a:r>
+              <a:rPr lang="en-US" sz="900" b="1" dirty="0">
+                <a:solidFill>
+                  <a:srgbClr val="B98A2E"/>
+                </a:solidFill>
+                <a:latin typeface="Arial" pitchFamily="34" charset="0"/>
+                <a:ea typeface="Arial" pitchFamily="34" charset="-122"/>
+                <a:cs typeface="Arial" pitchFamily="34" charset="-120"/>
+              </a:rPr>
+              <a:t>4</a:t>
+            </a:r>
+            <a:endParaRPr lang="en-US" sz="900" dirty="0"/>
+          </a:p>
+        </p:txBody>
       </p:sp>
     </p:spTree>
   </p:cSld>
@@ -5107,14 +5897,14 @@
         </p:nvSpPr>
         <p:spPr>
           <a:xfrm>
-            <a:off x="566928" y="384048"/>
-            <a:ext cx="45720" cy="566928"/>
-          </a:xfrm>
-          <a:prstGeom prst="rect">
+            <a:off x="566928" y="457200"/>
+            <a:ext cx="384048" cy="384048"/>
+          </a:xfrm>
+          <a:prstGeom prst="ellipse">
             <a:avLst/>
           </a:prstGeom>
           <a:solidFill>
-            <a:srgbClr val="6B8E00"/>
+            <a:srgbClr val="B98A2E"/>
           </a:solidFill>
           <a:ln/>
         </p:spPr>
@@ -5127,32 +5917,71 @@
         </p:nvSpPr>
         <p:spPr>
           <a:xfrm>
-            <a:off x="749808" y="384048"/>
-            <a:ext cx="10874959" cy="182880"/>
-          </a:xfrm>
-          <a:prstGeom prst="rect">
-            <a:avLst/>
-          </a:prstGeom>
-          <a:noFill/>
-          <a:ln/>
-        </p:spPr>
-        <p:txBody>
-          <a:bodyPr wrap="square" lIns="0" tIns="0" rIns="0" bIns="0" rtlCol="0" anchor="ctr"/>
-          <a:lstStyle/>
-          <a:p>
-            <a:pPr indent="0" marL="0">
-              <a:buNone/>
-            </a:pPr>
-            <a:r>
-              <a:rPr lang="en-US" sz="950" b="1" spc="200" kern="0" dirty="0">
-                <a:solidFill>
-                  <a:srgbClr val="6B8E00"/>
+            <a:off x="566928" y="457200"/>
+            <a:ext cx="384048" cy="384048"/>
+          </a:xfrm>
+          <a:prstGeom prst="rect">
+            <a:avLst/>
+          </a:prstGeom>
+          <a:noFill/>
+          <a:ln/>
+        </p:spPr>
+        <p:txBody>
+          <a:bodyPr wrap="square" lIns="0" tIns="0" rIns="0" bIns="0" rtlCol="0" anchor="ctr"/>
+          <a:lstStyle/>
+          <a:p>
+            <a:pPr algn="ctr" indent="0" marL="0">
+              <a:buNone/>
+            </a:pPr>
+            <a:r>
+              <a:rPr lang="en-US" sz="1300" b="1" dirty="0">
+                <a:solidFill>
+                  <a:srgbClr val="FFFFFF"/>
                 </a:solidFill>
                 <a:latin typeface="Arial" pitchFamily="34" charset="0"/>
                 <a:ea typeface="Arial" pitchFamily="34" charset="-122"/>
                 <a:cs typeface="Arial" pitchFamily="34" charset="-120"/>
               </a:rPr>
-              <a:t>05  Land Detail</a:t>
+              <a:t>05</a:t>
+            </a:r>
+            <a:endParaRPr lang="en-US" sz="1300" dirty="0"/>
+          </a:p>
+        </p:txBody>
+      </p:sp>
+      <p:sp>
+        <p:nvSpPr>
+          <p:cNvPr id="4" name="Text 2"/>
+          <p:cNvSpPr/>
+          <p:nvPr/>
+        </p:nvSpPr>
+        <p:spPr>
+          <a:xfrm>
+            <a:off x="1133856" y="457200"/>
+            <a:ext cx="10490911" cy="182880"/>
+          </a:xfrm>
+          <a:prstGeom prst="rect">
+            <a:avLst/>
+          </a:prstGeom>
+          <a:noFill/>
+          <a:ln/>
+        </p:spPr>
+        <p:txBody>
+          <a:bodyPr wrap="square" lIns="0" tIns="0" rIns="0" bIns="0" rtlCol="0" anchor="ctr"/>
+          <a:lstStyle/>
+          <a:p>
+            <a:pPr indent="0" marL="0">
+              <a:buNone/>
+            </a:pPr>
+            <a:r>
+              <a:rPr lang="en-US" sz="950" b="1" spc="200" kern="0" dirty="0">
+                <a:solidFill>
+                  <a:srgbClr val="B98A2E"/>
+                </a:solidFill>
+                <a:latin typeface="Arial" pitchFamily="34" charset="0"/>
+                <a:ea typeface="Arial" pitchFamily="34" charset="-122"/>
+                <a:cs typeface="Arial" pitchFamily="34" charset="-120"/>
+              </a:rPr>
+              <a:t>Land Detail</a:t>
             </a:r>
             <a:endParaRPr lang="en-US" sz="950" dirty="0"/>
           </a:p>
@@ -5160,14 +5989,14 @@
       </p:sp>
       <p:sp>
         <p:nvSpPr>
-          <p:cNvPr id="4" name="Text 2"/>
-          <p:cNvSpPr/>
-          <p:nvPr/>
-        </p:nvSpPr>
-        <p:spPr>
-          <a:xfrm>
-            <a:off x="749808" y="566928"/>
-            <a:ext cx="10874959" cy="384048"/>
+          <p:cNvPr id="5" name="Text 3"/>
+          <p:cNvSpPr/>
+          <p:nvPr/>
+        </p:nvSpPr>
+        <p:spPr>
+          <a:xfrm>
+            <a:off x="1133856" y="640080"/>
+            <a:ext cx="10490911" cy="365760"/>
           </a:xfrm>
           <a:prstGeom prst="rect">
             <a:avLst/>
@@ -5183,9 +6012,9 @@
               <a:buNone/>
             </a:pPr>
             <a:r>
-              <a:rPr lang="en-US" sz="2200" b="1" dirty="0">
-                <a:solidFill>
-                  <a:srgbClr val="0F172A"/>
+              <a:rPr lang="en-US" sz="2300" b="1" dirty="0">
+                <a:solidFill>
+                  <a:srgbClr val="10161F"/>
                 </a:solidFill>
                 <a:latin typeface="Pretendard" pitchFamily="34" charset="0"/>
                 <a:ea typeface="Pretendard" pitchFamily="34" charset="-122"/>
@@ -5193,13 +6022,13 @@
               </a:rPr>
               <a:t>개발 부지로서 대지 조건은 어떠한가</a:t>
             </a:r>
-            <a:endParaRPr lang="en-US" sz="2200" dirty="0"/>
-          </a:p>
-        </p:txBody>
-      </p:sp>
-      <p:sp>
-        <p:nvSpPr>
-          <p:cNvPr id="5" name="Text 3"/>
+            <a:endParaRPr lang="en-US" sz="2300" dirty="0"/>
+          </a:p>
+        </p:txBody>
+      </p:sp>
+      <p:sp>
+        <p:nvSpPr>
+          <p:cNvPr id="6" name="Text 4"/>
           <p:cNvSpPr/>
           <p:nvPr/>
         </p:nvSpPr>
@@ -5224,13 +6053,13 @@
             <a:r>
               <a:rPr lang="en-US" sz="1100" b="1" dirty="0">
                 <a:solidFill>
-                  <a:srgbClr val="0F172A"/>
+                  <a:srgbClr val="10161F"/>
                 </a:solidFill>
                 <a:latin typeface="Pretendard" pitchFamily="34" charset="0"/>
                 <a:ea typeface="Pretendard" pitchFamily="34" charset="-122"/>
                 <a:cs typeface="Pretendard" pitchFamily="34" charset="-120"/>
               </a:rPr>
-              <a:t>대지 및 신축 개발 여력 분석</a:t>
+              <a:t>건축물 개요 및 물리 스펙</a:t>
             </a:r>
             <a:endParaRPr lang="en-US" sz="1100" dirty="0"/>
           </a:p>
@@ -5238,7 +6067,7 @@
       </p:sp>
       <p:sp>
         <p:nvSpPr>
-          <p:cNvPr id="6" name="Text 4"/>
+          <p:cNvPr id="7" name="Text 5"/>
           <p:cNvSpPr/>
           <p:nvPr/>
         </p:nvSpPr>
@@ -5266,13 +6095,13 @@
             <a:r>
               <a:rPr lang="en-US" sz="1400" dirty="0">
                 <a:solidFill>
-                  <a:srgbClr val="64748B"/>
+                  <a:srgbClr val="718096"/>
                 </a:solidFill>
                 <a:latin typeface="Pretendard" pitchFamily="34" charset="0"/>
                 <a:ea typeface="Pretendard" pitchFamily="34" charset="-122"/>
                 <a:cs typeface="Pretendard" pitchFamily="34" charset="-120"/>
               </a:rPr>
-              <a:t>대지면적</a:t>
+              <a:t>{"ok"</a:t>
             </a:r>
             <a:endParaRPr lang="en-US" sz="1400" dirty="0"/>
           </a:p>
@@ -5280,7 +6109,7 @@
       </p:sp>
       <p:sp>
         <p:nvSpPr>
-          <p:cNvPr id="7" name="Text 5"/>
+          <p:cNvPr id="8" name="Text 6"/>
           <p:cNvSpPr/>
           <p:nvPr/>
         </p:nvSpPr>
@@ -5308,13 +6137,13 @@
             <a:r>
               <a:rPr lang="en-US" sz="1400" b="1" dirty="0">
                 <a:solidFill>
-                  <a:srgbClr val="0F172A"/>
+                  <a:srgbClr val="10161F"/>
                 </a:solidFill>
                 <a:latin typeface="Pretendard" pitchFamily="34" charset="0"/>
                 <a:ea typeface="Pretendard" pitchFamily="34" charset="-122"/>
                 <a:cs typeface="Pretendard" pitchFamily="34" charset="-120"/>
               </a:rPr>
-              <a:t>1000㎡</a:t>
+              <a:t>true,"mocked":true,"extractedFields":{"area_signal":"역삼","asset_type":"오피스빌딩","price_band":"300억","size_signal":"3000평(약 9917.4㎡)"},"extractedFacts":{"region":"역삼","exactAddressCandidate":"역삼동 742-1","assetType":"오피스빌딩","priceText":"300억","sizeText":"3000평(약 9917.4㎡)","currentUse":"오피스","currentUseSignal":"근린생활시설","leaseSignal":"임대중","vacancySignal":"공실없음","tenantNames":"쿠팡","네이버","unitRentTexts":"301호: 1500만","sellerMotivationText":"자산 효율화","brokerNotes":"초역세권 매물"},"detectedSensitiveFields":"exact_address","tenant_name","ambiguousFields":,"warnings":,"areaSignal":"역삼","assetType":"오피스빌딩","priceBand":"300억","sizeSignal":"3000평(약 9917.4㎡)","dealType":"매각","buildingName":"역삼 센트럴타워","exactAddress":"역삼동 742-1","totalFloorArea":9917.3,"buildYear":2015,"currentUseSignal":"근린생활시설","vacancySignal":"공실 없음","fitSummary":"초역세권 근생 빌딩으로 시행/사옥 매입에 최적화","cautionSummary":"주요 임차 업종 만기 조율 필요","hiddenFields":"exact_address","seller_motivation","confidence":{"areaSignal":"confirmed","assetType":"confirmed","priceBand":"ai_hypothesis","fitSummary":"ai_hypothesis"},"missingData":"sizeSignal","boundaryNote":"본 자료는 실거래 통계 기반 참고치입니다.","buyerType":"법인 사옥형","budgetRange":{"min":50,"max":80,"display":"50억~80억"},"preferredRegions":"강남","성수","assetTypes":"꼬마빌딩","사옥용","purchasePurpose":"사옥용 매입","mustHave":"초역세권","주차","niceToHave":"테라스","루프탑","riskTolerance":"medium","financingNote":"자본금 50% 준비","missingQuestions":"구체적인 입주 시기가 언제인가요?","선호하는 수익률이 있나요?","privacyNotes":"연락처 비공개","fitReasons":"매수자 예산(50-80억)에 부합하는 매물입니다.","요청하신 성수/강남 권역에 해당합니다.","cautionReasons":"요청한 용도와 달리 명도 협의가 다소 필요합니다.","recommendedNextAction":"현장 답사 제안","kakaoMessage":"안녕하세요! 요청하신 조건에 부합하는 추천 매물이 있어 안내해 드립니다. 확인해보시고 피드백 부탁드립니다.","title":"강남 역삼역 초역세권 오피스 사옥용 빌딩 매각","shortSummary":"역삼역 도보 5분 거리의 준신축급 대형 오피스빌딩입니다.","dealPoints":"초역세권","사옥 최적","cautionPoints":"명도 조율 필요","hiddenInfoNotice":"보증금 및 지번은 인가 후 확인 가능","gateMessage":"G1 등급 등록이 필요합니다.","kakaoText":"강남 역삼역 오피스 빌딩 매각 안내입니다.","exactUnitCandidate":"101호","floor":"1층","areaSqmText":"150㎡","spaceType":"office","depositText":"5000만","monthlyRentText":"400만","maintenanceFeeText":"50만","availableFromText":"즉시입주","leaseTermMonthsText":"24","incentivesText":"렌트프리 2개월","restrictions":,"landlordIdentity":"김성수","currentTenant":"스타트업","vacancyReason":"이전 확장","rentNegotiation":"협의 가능","region":"성수동","areaSqm":150,"deposit":5000,"monthlyRent":400,"maintenanceFee":50,"availableFrom":"즉시입주","leaseTermMonths":24,"incentives":{"rentFreeMonths":2,"interiorSupport":"일부 인테리어 지원","freeRentDetail":"렌트프리 2개월 지원"},"shortSummaryLease":"성수역 도보 5분 거리 1층 리테일 상가 매물입니다."}</a:t>
             </a:r>
             <a:endParaRPr lang="en-US" sz="1400" dirty="0"/>
           </a:p>
@@ -5322,22 +6151,22 @@
       </p:sp>
       <p:sp>
         <p:nvSpPr>
-          <p:cNvPr id="8" name="Shape 6"/>
-          <p:cNvSpPr/>
-          <p:nvPr/>
-        </p:nvSpPr>
-        <p:spPr>
-          <a:xfrm>
-            <a:off x="566928" y="2048256"/>
-            <a:ext cx="6858000" cy="0"/>
+          <p:cNvPr id="9" name="Shape 7"/>
+          <p:cNvSpPr/>
+          <p:nvPr/>
+        </p:nvSpPr>
+        <p:spPr>
+          <a:xfrm>
+            <a:off x="7604608" y="1371600"/>
+            <a:ext cx="0" cy="4754880"/>
           </a:xfrm>
           <a:prstGeom prst="line">
             <a:avLst/>
           </a:prstGeom>
           <a:noFill/>
-          <a:ln w="3810">
+          <a:ln w="8890">
             <a:solidFill>
-              <a:srgbClr val="CBD5E1"/>
+              <a:srgbClr val="B98A2E"/>
             </a:solidFill>
             <a:prstDash val="solid"/>
           </a:ln>
@@ -5345,23 +6174,93 @@
       </p:sp>
       <p:sp>
         <p:nvSpPr>
-          <p:cNvPr id="9" name="Text 7"/>
-          <p:cNvSpPr/>
-          <p:nvPr/>
-        </p:nvSpPr>
-        <p:spPr>
-          <a:xfrm>
-            <a:off x="566928" y="2048256"/>
-            <a:ext cx="2606040" cy="402336"/>
-          </a:xfrm>
-          <a:prstGeom prst="rect">
-            <a:avLst/>
-          </a:prstGeom>
-          <a:noFill/>
-          <a:ln/>
-        </p:spPr>
-        <p:txBody>
-          <a:bodyPr wrap="square" lIns="0" tIns="0" rIns="0" bIns="0" rtlCol="0" anchor="ctr"/>
+          <p:cNvPr id="10" name="Shape 8"/>
+          <p:cNvSpPr/>
+          <p:nvPr/>
+        </p:nvSpPr>
+        <p:spPr>
+          <a:xfrm>
+            <a:off x="7784287" y="1645920"/>
+            <a:ext cx="3840480" cy="2103120"/>
+          </a:xfrm>
+          <a:prstGeom prst="roundRect">
+            <a:avLst>
+              <a:gd name="adj" fmla="val 2609"/>
+            </a:avLst>
+          </a:prstGeom>
+          <a:solidFill>
+            <a:srgbClr val="F3EBDA"/>
+          </a:solidFill>
+          <a:ln/>
+        </p:spPr>
+      </p:sp>
+      <p:sp>
+        <p:nvSpPr>
+          <p:cNvPr id="11" name="Shape 9"/>
+          <p:cNvSpPr/>
+          <p:nvPr/>
+        </p:nvSpPr>
+        <p:spPr>
+          <a:xfrm>
+            <a:off x="7784287" y="1700784"/>
+            <a:ext cx="36576" cy="1993392"/>
+          </a:xfrm>
+          <a:prstGeom prst="rect">
+            <a:avLst/>
+          </a:prstGeom>
+          <a:solidFill>
+            <a:srgbClr val="977024"/>
+          </a:solidFill>
+          <a:ln/>
+        </p:spPr>
+      </p:sp>
+      <p:sp>
+        <p:nvSpPr>
+          <p:cNvPr id="12" name="Text 10"/>
+          <p:cNvSpPr/>
+          <p:nvPr/>
+        </p:nvSpPr>
+        <p:spPr>
+          <a:xfrm>
+            <a:off x="7967167" y="1755648"/>
+            <a:ext cx="3511296" cy="201168"/>
+          </a:xfrm>
+          <a:prstGeom prst="rect">
+            <a:avLst/>
+          </a:prstGeom>
+          <a:noFill/>
+          <a:ln/>
+        </p:spPr>
+        <p:txBody>
+          <a:bodyPr wrap="square" lIns="0" tIns="0" rIns="0" bIns="0" rtlCol="0" anchor="ctr"/>
+          <a:lstStyle/>
+          <a:p>
+            <a:pPr indent="0" marL="0">
+              <a:buNone/>
+            </a:pPr>
+            <a:endParaRPr lang="en-US" sz="1050" dirty="0"/>
+          </a:p>
+        </p:txBody>
+      </p:sp>
+      <p:sp>
+        <p:nvSpPr>
+          <p:cNvPr id="13" name="Text 11"/>
+          <p:cNvSpPr/>
+          <p:nvPr/>
+        </p:nvSpPr>
+        <p:spPr>
+          <a:xfrm>
+            <a:off x="7967167" y="1975104"/>
+            <a:ext cx="3511296" cy="1700784"/>
+          </a:xfrm>
+          <a:prstGeom prst="rect">
+            <a:avLst/>
+          </a:prstGeom>
+          <a:noFill/>
+          <a:ln/>
+        </p:spPr>
+        <p:txBody>
+          <a:bodyPr wrap="square" lIns="0" tIns="0" rIns="0" bIns="0" rtlCol="0" anchor="t"/>
           <a:lstStyle/>
           <a:p>
             <a:pPr indent="0" marL="0">
@@ -5371,30 +6270,30 @@
               <a:buNone/>
             </a:pPr>
             <a:r>
-              <a:rPr lang="en-US" sz="1400" dirty="0">
-                <a:solidFill>
-                  <a:srgbClr val="64748B"/>
+              <a:rPr lang="en-US" sz="930" dirty="0">
+                <a:solidFill>
+                  <a:srgbClr val="10161F"/>
                 </a:solidFill>
                 <a:latin typeface="Pretendard" pitchFamily="34" charset="0"/>
                 <a:ea typeface="Pretendard" pitchFamily="34" charset="-122"/>
                 <a:cs typeface="Pretendard" pitchFamily="34" charset="-120"/>
               </a:rPr>
-              <a:t>용도지역</a:t>
-            </a:r>
-            <a:endParaRPr lang="en-US" sz="1400" dirty="0"/>
-          </a:p>
-        </p:txBody>
-      </p:sp>
-      <p:sp>
-        <p:nvSpPr>
-          <p:cNvPr id="10" name="Text 8"/>
-          <p:cNvSpPr/>
-          <p:nvPr/>
-        </p:nvSpPr>
-        <p:spPr>
-          <a:xfrm>
-            <a:off x="3172968" y="2048256"/>
-            <a:ext cx="4251960" cy="402336"/>
+              <a:t>{"ok":true,"mocked":true,"extractedFields":{"area_signal":"역삼","asset_type":"오피스빌딩","price_band":"300억","size_signal":"3</a:t>
+            </a:r>
+            <a:endParaRPr lang="en-US" sz="930" dirty="0"/>
+          </a:p>
+        </p:txBody>
+      </p:sp>
+      <p:sp>
+        <p:nvSpPr>
+          <p:cNvPr id="14" name="Text 12"/>
+          <p:cNvSpPr/>
+          <p:nvPr/>
+        </p:nvSpPr>
+        <p:spPr>
+          <a:xfrm>
+            <a:off x="566928" y="6382512"/>
+            <a:ext cx="7315200" cy="219456"/>
           </a:xfrm>
           <a:prstGeom prst="rect">
             <a:avLst/>
@@ -5407,155 +6306,22 @@
           <a:lstStyle/>
           <a:p>
             <a:pPr indent="0" marL="0">
-              <a:lnSpc>
-                <a:spcPct val="120000"/>
-              </a:lnSpc>
-              <a:buNone/>
-            </a:pPr>
-            <a:r>
-              <a:rPr lang="en-US" sz="1400" b="1" dirty="0">
-                <a:solidFill>
-                  <a:srgbClr val="0F172A"/>
+              <a:buNone/>
+            </a:pPr>
+            <a:r>
+              <a:rPr lang="en-US" sz="800" dirty="0">
+                <a:solidFill>
+                  <a:srgbClr val="718096"/>
                 </a:solidFill>
                 <a:latin typeface="Pretendard" pitchFamily="34" charset="0"/>
                 <a:ea typeface="Pretendard" pitchFamily="34" charset="-122"/>
                 <a:cs typeface="Pretendard" pitchFamily="34" charset="-120"/>
               </a:rPr>
-              <a:t>일반상업지역</a:t>
-            </a:r>
-            <a:endParaRPr lang="en-US" sz="1400" dirty="0"/>
-          </a:p>
-        </p:txBody>
-      </p:sp>
-      <p:sp>
-        <p:nvSpPr>
-          <p:cNvPr id="11" name="Shape 9"/>
-          <p:cNvSpPr/>
-          <p:nvPr/>
-        </p:nvSpPr>
-        <p:spPr>
-          <a:xfrm>
-            <a:off x="566928" y="2450592"/>
-            <a:ext cx="6858000" cy="0"/>
-          </a:xfrm>
-          <a:prstGeom prst="line">
-            <a:avLst/>
-          </a:prstGeom>
-          <a:noFill/>
-          <a:ln w="3810">
-            <a:solidFill>
-              <a:srgbClr val="CBD5E1"/>
-            </a:solidFill>
-            <a:prstDash val="solid"/>
-          </a:ln>
-        </p:spPr>
-      </p:sp>
-      <p:sp>
-        <p:nvSpPr>
-          <p:cNvPr id="12" name="Text 10"/>
-          <p:cNvSpPr/>
-          <p:nvPr/>
-        </p:nvSpPr>
-        <p:spPr>
-          <a:xfrm>
-            <a:off x="566928" y="2450592"/>
-            <a:ext cx="2606040" cy="402336"/>
-          </a:xfrm>
-          <a:prstGeom prst="rect">
-            <a:avLst/>
-          </a:prstGeom>
-          <a:noFill/>
-          <a:ln/>
-        </p:spPr>
-        <p:txBody>
-          <a:bodyPr wrap="square" lIns="0" tIns="0" rIns="0" bIns="0" rtlCol="0" anchor="ctr"/>
-          <a:lstStyle/>
-          <a:p>
-            <a:pPr indent="0" marL="0">
-              <a:lnSpc>
-                <a:spcPct val="120000"/>
-              </a:lnSpc>
-              <a:buNone/>
-            </a:pPr>
-            <a:r>
-              <a:rPr lang="en-US" sz="1400" dirty="0">
-                <a:solidFill>
-                  <a:srgbClr val="64748B"/>
-                </a:solidFill>
-                <a:latin typeface="Pretendard" pitchFamily="34" charset="0"/>
-                <a:ea typeface="Pretendard" pitchFamily="34" charset="-122"/>
-                <a:cs typeface="Pretendard" pitchFamily="34" charset="-120"/>
-              </a:rPr>
-              <a:t>명도 상태</a:t>
-            </a:r>
-            <a:endParaRPr lang="en-US" sz="1400" dirty="0"/>
-          </a:p>
-        </p:txBody>
-      </p:sp>
-      <p:sp>
-        <p:nvSpPr>
-          <p:cNvPr id="13" name="Text 11"/>
-          <p:cNvSpPr/>
-          <p:nvPr/>
-        </p:nvSpPr>
-        <p:spPr>
-          <a:xfrm>
-            <a:off x="3172968" y="2450592"/>
-            <a:ext cx="4251960" cy="402336"/>
-          </a:xfrm>
-          <a:prstGeom prst="rect">
-            <a:avLst/>
-          </a:prstGeom>
-          <a:noFill/>
-          <a:ln/>
-        </p:spPr>
-        <p:txBody>
-          <a:bodyPr wrap="square" lIns="0" tIns="0" rIns="0" bIns="0" rtlCol="0" anchor="ctr"/>
-          <a:lstStyle/>
-          <a:p>
-            <a:pPr indent="0" marL="0">
-              <a:lnSpc>
-                <a:spcPct val="120000"/>
-              </a:lnSpc>
-              <a:buNone/>
-            </a:pPr>
-            <a:r>
-              <a:rPr lang="en-US" sz="1400" b="1" dirty="0">
-                <a:solidFill>
-                  <a:srgbClr val="0F172A"/>
-                </a:solidFill>
-                <a:latin typeface="Pretendard" pitchFamily="34" charset="0"/>
-                <a:ea typeface="Pretendard" pitchFamily="34" charset="-122"/>
-                <a:cs typeface="Pretendard" pitchFamily="34" charset="-120"/>
-              </a:rPr>
-              <a:t>기존 주요 임차 업종 현황</a:t>
-            </a:r>
-            <a:endParaRPr lang="en-US" sz="1400" dirty="0"/>
-          </a:p>
-        </p:txBody>
-      </p:sp>
-      <p:sp>
-        <p:nvSpPr>
-          <p:cNvPr id="14" name="Shape 12"/>
-          <p:cNvSpPr/>
-          <p:nvPr/>
-        </p:nvSpPr>
-        <p:spPr>
-          <a:xfrm>
-            <a:off x="566928" y="2852928"/>
-            <a:ext cx="6858000" cy="0"/>
-          </a:xfrm>
-          <a:prstGeom prst="line">
-            <a:avLst/>
-          </a:prstGeom>
-          <a:noFill/>
-          <a:ln w="3810">
-            <a:solidFill>
-              <a:srgbClr val="CBD5E1"/>
-            </a:solidFill>
-            <a:prstDash val="solid"/>
-          </a:ln>
-        </p:spPr>
+              <a:t>크리딜   |   </a:t>
+            </a:r>
+            <a:endParaRPr lang="en-US" sz="800" dirty="0"/>
+          </a:p>
+        </p:txBody>
       </p:sp>
       <p:sp>
         <p:nvSpPr>
@@ -5565,278 +6331,36 @@
         </p:nvSpPr>
         <p:spPr>
           <a:xfrm>
-            <a:off x="566928" y="2852928"/>
-            <a:ext cx="2606040" cy="402336"/>
-          </a:xfrm>
-          <a:prstGeom prst="rect">
-            <a:avLst/>
-          </a:prstGeom>
-          <a:noFill/>
-          <a:ln/>
-        </p:spPr>
-        <p:txBody>
-          <a:bodyPr wrap="square" lIns="0" tIns="0" rIns="0" bIns="0" rtlCol="0" anchor="ctr"/>
-          <a:lstStyle/>
-          <a:p>
-            <a:pPr indent="0" marL="0">
-              <a:lnSpc>
-                <a:spcPct val="120000"/>
-              </a:lnSpc>
-              <a:buNone/>
-            </a:pPr>
-            <a:r>
-              <a:rPr lang="en-US" sz="1400" dirty="0">
-                <a:solidFill>
-                  <a:srgbClr val="64748B"/>
-                </a:solidFill>
-                <a:latin typeface="Pretendard" pitchFamily="34" charset="0"/>
-                <a:ea typeface="Pretendard" pitchFamily="34" charset="-122"/>
-                <a:cs typeface="Pretendard" pitchFamily="34" charset="-120"/>
-              </a:rPr>
-              <a:t>개발 잠재력</a:t>
-            </a:r>
-            <a:endParaRPr lang="en-US" sz="1400" dirty="0"/>
-          </a:p>
-        </p:txBody>
-      </p:sp>
-      <p:sp>
-        <p:nvSpPr>
-          <p:cNvPr id="16" name="Text 14"/>
-          <p:cNvSpPr/>
-          <p:nvPr/>
-        </p:nvSpPr>
-        <p:spPr>
-          <a:xfrm>
-            <a:off x="3172968" y="2852928"/>
-            <a:ext cx="4251960" cy="402336"/>
-          </a:xfrm>
-          <a:prstGeom prst="rect">
-            <a:avLst/>
-          </a:prstGeom>
-          <a:noFill/>
-          <a:ln/>
-        </p:spPr>
-        <p:txBody>
-          <a:bodyPr wrap="square" lIns="0" tIns="0" rIns="0" bIns="0" rtlCol="0" anchor="ctr"/>
-          <a:lstStyle/>
-          <a:p>
-            <a:pPr indent="0" marL="0">
-              <a:lnSpc>
-                <a:spcPct val="120000"/>
-              </a:lnSpc>
-              <a:buNone/>
-            </a:pPr>
-            <a:r>
-              <a:rPr lang="en-US" sz="1400" b="1" dirty="0">
-                <a:solidFill>
-                  <a:srgbClr val="0F172A"/>
-                </a:solidFill>
-                <a:latin typeface="Pretendard" pitchFamily="34" charset="0"/>
-                <a:ea typeface="Pretendard" pitchFamily="34" charset="-122"/>
-                <a:cs typeface="Pretendard" pitchFamily="34" charset="-120"/>
-              </a:rPr>
-              <a:t>신축 시 연면적 증대 가능</a:t>
-            </a:r>
-            <a:endParaRPr lang="en-US" sz="1400" dirty="0"/>
-          </a:p>
-        </p:txBody>
-      </p:sp>
-      <p:sp>
-        <p:nvSpPr>
-          <p:cNvPr id="17" name="Shape 15"/>
-          <p:cNvSpPr/>
-          <p:nvPr/>
-        </p:nvSpPr>
-        <p:spPr>
-          <a:xfrm>
-            <a:off x="7604608" y="1371600"/>
-            <a:ext cx="0" cy="4754880"/>
-          </a:xfrm>
-          <a:prstGeom prst="line">
-            <a:avLst/>
-          </a:prstGeom>
-          <a:noFill/>
-          <a:ln w="8890">
-            <a:solidFill>
-              <a:srgbClr val="6B8E00"/>
-            </a:solidFill>
-            <a:prstDash val="solid"/>
-          </a:ln>
-        </p:spPr>
-      </p:sp>
-      <p:sp>
-        <p:nvSpPr>
-          <p:cNvPr id="18" name="Shape 16"/>
-          <p:cNvSpPr/>
-          <p:nvPr/>
-        </p:nvSpPr>
-        <p:spPr>
-          <a:xfrm>
-            <a:off x="7784287" y="1645920"/>
-            <a:ext cx="3840480" cy="1645920"/>
-          </a:xfrm>
-          <a:prstGeom prst="roundRect">
-            <a:avLst>
-              <a:gd name="adj" fmla="val 3333"/>
-            </a:avLst>
-          </a:prstGeom>
-          <a:solidFill>
-            <a:srgbClr val="DBEAFE"/>
-          </a:solidFill>
-          <a:ln/>
-        </p:spPr>
-      </p:sp>
-      <p:sp>
-        <p:nvSpPr>
-          <p:cNvPr id="19" name="Shape 17"/>
-          <p:cNvSpPr/>
-          <p:nvPr/>
-        </p:nvSpPr>
-        <p:spPr>
-          <a:xfrm>
-            <a:off x="7784287" y="1700784"/>
-            <a:ext cx="36576" cy="1536192"/>
-          </a:xfrm>
-          <a:prstGeom prst="rect">
-            <a:avLst/>
-          </a:prstGeom>
-          <a:solidFill>
-            <a:srgbClr val="1D4ED8"/>
-          </a:solidFill>
-          <a:ln/>
-        </p:spPr>
-      </p:sp>
-      <p:sp>
-        <p:nvSpPr>
-          <p:cNvPr id="20" name="Text 18"/>
-          <p:cNvSpPr/>
-          <p:nvPr/>
-        </p:nvSpPr>
-        <p:spPr>
-          <a:xfrm>
-            <a:off x="7967167" y="1755648"/>
-            <a:ext cx="3511296" cy="201168"/>
-          </a:xfrm>
-          <a:prstGeom prst="rect">
-            <a:avLst/>
-          </a:prstGeom>
-          <a:noFill/>
-          <a:ln/>
-        </p:spPr>
-        <p:txBody>
-          <a:bodyPr wrap="square" lIns="0" tIns="0" rIns="0" bIns="0" rtlCol="0" anchor="ctr"/>
-          <a:lstStyle/>
-          <a:p>
-            <a:pPr indent="0" marL="0">
-              <a:buNone/>
-            </a:pPr>
-            <a:endParaRPr lang="en-US" sz="1050" dirty="0"/>
-          </a:p>
-        </p:txBody>
-      </p:sp>
-      <p:sp>
-        <p:nvSpPr>
-          <p:cNvPr id="21" name="Text 19"/>
-          <p:cNvSpPr/>
-          <p:nvPr/>
-        </p:nvSpPr>
-        <p:spPr>
-          <a:xfrm>
-            <a:off x="7967167" y="1975104"/>
-            <a:ext cx="3511296" cy="1243584"/>
-          </a:xfrm>
-          <a:prstGeom prst="rect">
-            <a:avLst/>
-          </a:prstGeom>
-          <a:noFill/>
-          <a:ln/>
-        </p:spPr>
-        <p:txBody>
-          <a:bodyPr wrap="square" lIns="0" tIns="0" rIns="0" bIns="0" rtlCol="0" anchor="t"/>
-          <a:lstStyle/>
-          <a:p>
-            <a:pPr indent="0" marL="0">
-              <a:lnSpc>
-                <a:spcPct val="120000"/>
-              </a:lnSpc>
-              <a:buNone/>
-            </a:pPr>
-            <a:r>
-              <a:rPr lang="en-US" sz="930" dirty="0">
-                <a:solidFill>
-                  <a:srgbClr val="0F172A"/>
-                </a:solidFill>
-                <a:latin typeface="Pretendard" pitchFamily="34" charset="0"/>
-                <a:ea typeface="Pretendard" pitchFamily="34" charset="-122"/>
-                <a:cs typeface="Pretendard" pitchFamily="34" charset="-120"/>
-              </a:rPr>
-              <a:t>건축물대장 및 토지이용계획확인서 기준 | 신축 설계 검토 필요</a:t>
-            </a:r>
-            <a:endParaRPr lang="en-US" sz="930" dirty="0"/>
-          </a:p>
-        </p:txBody>
-      </p:sp>
-      <p:sp>
-        <p:nvSpPr>
-          <p:cNvPr id="22" name="Text 20"/>
-          <p:cNvSpPr/>
-          <p:nvPr/>
-        </p:nvSpPr>
-        <p:spPr>
-          <a:xfrm>
-            <a:off x="566928" y="6419088"/>
-            <a:ext cx="11057839" cy="201168"/>
-          </a:xfrm>
-          <a:prstGeom prst="rect">
-            <a:avLst/>
-          </a:prstGeom>
-          <a:noFill/>
-          <a:ln/>
-        </p:spPr>
-        <p:txBody>
-          <a:bodyPr wrap="square" lIns="0" tIns="0" rIns="0" bIns="0" rtlCol="0" anchor="ctr"/>
-          <a:lstStyle/>
-          <a:p>
-            <a:pPr algn="ctr" indent="0" marL="0">
-              <a:buNone/>
-            </a:pPr>
-            <a:r>
-              <a:rPr lang="en-US" sz="750" dirty="0">
-                <a:solidFill>
-                  <a:srgbClr val="64748B"/>
-                </a:solidFill>
-                <a:latin typeface="Pretendard" pitchFamily="34" charset="0"/>
-                <a:ea typeface="Pretendard" pitchFamily="34" charset="-122"/>
-                <a:cs typeface="Pretendard" pitchFamily="34" charset="-120"/>
-              </a:rPr>
-              <a:t>크리딜  ·    ·  5</a:t>
-            </a:r>
-            <a:endParaRPr lang="en-US" sz="750" dirty="0"/>
-          </a:p>
-        </p:txBody>
-      </p:sp>
-      <p:sp>
-        <p:nvSpPr>
-          <p:cNvPr id="23" name="Shape 21"/>
-          <p:cNvSpPr/>
-          <p:nvPr/>
-        </p:nvSpPr>
-        <p:spPr>
-          <a:xfrm>
-            <a:off x="4437172" y="6382512"/>
-            <a:ext cx="3317352" cy="0"/>
-          </a:xfrm>
-          <a:prstGeom prst="line">
-            <a:avLst/>
-          </a:prstGeom>
-          <a:noFill/>
-          <a:ln w="6350">
-            <a:solidFill>
-              <a:srgbClr val="6B8E00"/>
-            </a:solidFill>
-            <a:prstDash val="solid"/>
-          </a:ln>
-        </p:spPr>
+            <a:off x="10710367" y="6382512"/>
+            <a:ext cx="914400" cy="219456"/>
+          </a:xfrm>
+          <a:prstGeom prst="rect">
+            <a:avLst/>
+          </a:prstGeom>
+          <a:noFill/>
+          <a:ln/>
+        </p:spPr>
+        <p:txBody>
+          <a:bodyPr wrap="square" lIns="0" tIns="0" rIns="0" bIns="0" rtlCol="0" anchor="ctr"/>
+          <a:lstStyle/>
+          <a:p>
+            <a:pPr algn="r" indent="0" marL="0">
+              <a:buNone/>
+            </a:pPr>
+            <a:r>
+              <a:rPr lang="en-US" sz="900" b="1" dirty="0">
+                <a:solidFill>
+                  <a:srgbClr val="B98A2E"/>
+                </a:solidFill>
+                <a:latin typeface="Arial" pitchFamily="34" charset="0"/>
+                <a:ea typeface="Arial" pitchFamily="34" charset="-122"/>
+                <a:cs typeface="Arial" pitchFamily="34" charset="-120"/>
+              </a:rPr>
+              <a:t>5</a:t>
+            </a:r>
+            <a:endParaRPr lang="en-US" sz="900" dirty="0"/>
+          </a:p>
+        </p:txBody>
       </p:sp>
     </p:spTree>
   </p:cSld>
@@ -5878,14 +6402,14 @@
         </p:nvSpPr>
         <p:spPr>
           <a:xfrm>
-            <a:off x="566928" y="384048"/>
-            <a:ext cx="45720" cy="566928"/>
-          </a:xfrm>
-          <a:prstGeom prst="rect">
+            <a:off x="566928" y="457200"/>
+            <a:ext cx="384048" cy="384048"/>
+          </a:xfrm>
+          <a:prstGeom prst="ellipse">
             <a:avLst/>
           </a:prstGeom>
           <a:solidFill>
-            <a:srgbClr val="6B8E00"/>
+            <a:srgbClr val="B98A2E"/>
           </a:solidFill>
           <a:ln/>
         </p:spPr>
@@ -5898,32 +6422,71 @@
         </p:nvSpPr>
         <p:spPr>
           <a:xfrm>
-            <a:off x="749808" y="384048"/>
-            <a:ext cx="10874959" cy="182880"/>
-          </a:xfrm>
-          <a:prstGeom prst="rect">
-            <a:avLst/>
-          </a:prstGeom>
-          <a:noFill/>
-          <a:ln/>
-        </p:spPr>
-        <p:txBody>
-          <a:bodyPr wrap="square" lIns="0" tIns="0" rIns="0" bIns="0" rtlCol="0" anchor="ctr"/>
-          <a:lstStyle/>
-          <a:p>
-            <a:pPr indent="0" marL="0">
-              <a:buNone/>
-            </a:pPr>
-            <a:r>
-              <a:rPr lang="en-US" sz="950" b="1" spc="200" kern="0" dirty="0">
-                <a:solidFill>
-                  <a:srgbClr val="6B8E00"/>
+            <a:off x="566928" y="457200"/>
+            <a:ext cx="384048" cy="384048"/>
+          </a:xfrm>
+          <a:prstGeom prst="rect">
+            <a:avLst/>
+          </a:prstGeom>
+          <a:noFill/>
+          <a:ln/>
+        </p:spPr>
+        <p:txBody>
+          <a:bodyPr wrap="square" lIns="0" tIns="0" rIns="0" bIns="0" rtlCol="0" anchor="ctr"/>
+          <a:lstStyle/>
+          <a:p>
+            <a:pPr algn="ctr" indent="0" marL="0">
+              <a:buNone/>
+            </a:pPr>
+            <a:r>
+              <a:rPr lang="en-US" sz="1300" b="1" dirty="0">
+                <a:solidFill>
+                  <a:srgbClr val="FFFFFF"/>
                 </a:solidFill>
                 <a:latin typeface="Arial" pitchFamily="34" charset="0"/>
                 <a:ea typeface="Arial" pitchFamily="34" charset="-122"/>
                 <a:cs typeface="Arial" pitchFamily="34" charset="-120"/>
               </a:rPr>
-              <a:t>06  Feasibility</a:t>
+              <a:t>06</a:t>
+            </a:r>
+            <a:endParaRPr lang="en-US" sz="1300" dirty="0"/>
+          </a:p>
+        </p:txBody>
+      </p:sp>
+      <p:sp>
+        <p:nvSpPr>
+          <p:cNvPr id="4" name="Text 2"/>
+          <p:cNvSpPr/>
+          <p:nvPr/>
+        </p:nvSpPr>
+        <p:spPr>
+          <a:xfrm>
+            <a:off x="1133856" y="457200"/>
+            <a:ext cx="10490911" cy="182880"/>
+          </a:xfrm>
+          <a:prstGeom prst="rect">
+            <a:avLst/>
+          </a:prstGeom>
+          <a:noFill/>
+          <a:ln/>
+        </p:spPr>
+        <p:txBody>
+          <a:bodyPr wrap="square" lIns="0" tIns="0" rIns="0" bIns="0" rtlCol="0" anchor="ctr"/>
+          <a:lstStyle/>
+          <a:p>
+            <a:pPr indent="0" marL="0">
+              <a:buNone/>
+            </a:pPr>
+            <a:r>
+              <a:rPr lang="en-US" sz="950" b="1" spc="200" kern="0" dirty="0">
+                <a:solidFill>
+                  <a:srgbClr val="B98A2E"/>
+                </a:solidFill>
+                <a:latin typeface="Arial" pitchFamily="34" charset="0"/>
+                <a:ea typeface="Arial" pitchFamily="34" charset="-122"/>
+                <a:cs typeface="Arial" pitchFamily="34" charset="-120"/>
+              </a:rPr>
+              <a:t>Feasibility</a:t>
             </a:r>
             <a:endParaRPr lang="en-US" sz="950" dirty="0"/>
           </a:p>
@@ -5931,14 +6494,14 @@
       </p:sp>
       <p:sp>
         <p:nvSpPr>
-          <p:cNvPr id="4" name="Text 2"/>
-          <p:cNvSpPr/>
-          <p:nvPr/>
-        </p:nvSpPr>
-        <p:spPr>
-          <a:xfrm>
-            <a:off x="749808" y="566928"/>
-            <a:ext cx="10874959" cy="384048"/>
+          <p:cNvPr id="5" name="Text 3"/>
+          <p:cNvSpPr/>
+          <p:nvPr/>
+        </p:nvSpPr>
+        <p:spPr>
+          <a:xfrm>
+            <a:off x="1133856" y="640080"/>
+            <a:ext cx="10490911" cy="365760"/>
           </a:xfrm>
           <a:prstGeom prst="rect">
             <a:avLst/>
@@ -5954,9 +6517,9 @@
               <a:buNone/>
             </a:pPr>
             <a:r>
-              <a:rPr lang="en-US" sz="2200" b="1" dirty="0">
-                <a:solidFill>
-                  <a:srgbClr val="0F172A"/>
+              <a:rPr lang="en-US" sz="2300" b="1" dirty="0">
+                <a:solidFill>
+                  <a:srgbClr val="10161F"/>
                 </a:solidFill>
                 <a:latin typeface="Pretendard" pitchFamily="34" charset="0"/>
                 <a:ea typeface="Pretendard" pitchFamily="34" charset="-122"/>
@@ -5964,29 +6527,133 @@
               </a:rPr>
               <a:t>신축/개발 사업수지와 수익성은 어떠한가</a:t>
             </a:r>
-            <a:endParaRPr lang="en-US" sz="2200" dirty="0"/>
-          </a:p>
-        </p:txBody>
-      </p:sp>
-      <p:sp>
-        <p:nvSpPr>
-          <p:cNvPr id="5" name="Text 3"/>
-          <p:cNvSpPr/>
-          <p:nvPr/>
-        </p:nvSpPr>
-        <p:spPr>
-          <a:xfrm>
-            <a:off x="566928" y="1417320"/>
-            <a:ext cx="2606040" cy="402336"/>
-          </a:xfrm>
-          <a:prstGeom prst="rect">
-            <a:avLst/>
-          </a:prstGeom>
-          <a:noFill/>
-          <a:ln/>
-        </p:spPr>
-        <p:txBody>
-          <a:bodyPr wrap="square" lIns="0" tIns="0" rIns="0" bIns="0" rtlCol="0" anchor="ctr"/>
+            <a:endParaRPr lang="en-US" sz="2300" dirty="0"/>
+          </a:p>
+        </p:txBody>
+      </p:sp>
+      <p:sp>
+        <p:nvSpPr>
+          <p:cNvPr id="6" name="Shape 4"/>
+          <p:cNvSpPr/>
+          <p:nvPr/>
+        </p:nvSpPr>
+        <p:spPr>
+          <a:xfrm>
+            <a:off x="566928" y="1325880"/>
+            <a:ext cx="11057839" cy="0"/>
+          </a:xfrm>
+          <a:prstGeom prst="line">
+            <a:avLst/>
+          </a:prstGeom>
+          <a:noFill/>
+          <a:ln w="19050">
+            <a:solidFill>
+              <a:srgbClr val="B98A2E"/>
+            </a:solidFill>
+            <a:prstDash val="solid"/>
+          </a:ln>
+        </p:spPr>
+      </p:sp>
+      <p:sp>
+        <p:nvSpPr>
+          <p:cNvPr id="7" name="Shape 5"/>
+          <p:cNvSpPr/>
+          <p:nvPr/>
+        </p:nvSpPr>
+        <p:spPr>
+          <a:xfrm>
+            <a:off x="566928" y="1645920"/>
+            <a:ext cx="11057839" cy="1280160"/>
+          </a:xfrm>
+          <a:prstGeom prst="roundRect">
+            <a:avLst>
+              <a:gd name="adj" fmla="val 4286"/>
+            </a:avLst>
+          </a:prstGeom>
+          <a:solidFill>
+            <a:srgbClr val="BEE3F8"/>
+          </a:solidFill>
+          <a:ln/>
+        </p:spPr>
+      </p:sp>
+      <p:sp>
+        <p:nvSpPr>
+          <p:cNvPr id="8" name="Shape 6"/>
+          <p:cNvSpPr/>
+          <p:nvPr/>
+        </p:nvSpPr>
+        <p:spPr>
+          <a:xfrm>
+            <a:off x="566928" y="1700784"/>
+            <a:ext cx="36576" cy="1170432"/>
+          </a:xfrm>
+          <a:prstGeom prst="rect">
+            <a:avLst/>
+          </a:prstGeom>
+          <a:solidFill>
+            <a:srgbClr val="2B6CB0"/>
+          </a:solidFill>
+          <a:ln/>
+        </p:spPr>
+      </p:sp>
+      <p:sp>
+        <p:nvSpPr>
+          <p:cNvPr id="9" name="Text 7"/>
+          <p:cNvSpPr/>
+          <p:nvPr/>
+        </p:nvSpPr>
+        <p:spPr>
+          <a:xfrm>
+            <a:off x="749808" y="1755648"/>
+            <a:ext cx="10728655" cy="201168"/>
+          </a:xfrm>
+          <a:prstGeom prst="rect">
+            <a:avLst/>
+          </a:prstGeom>
+          <a:noFill/>
+          <a:ln/>
+        </p:spPr>
+        <p:txBody>
+          <a:bodyPr wrap="square" lIns="0" tIns="0" rIns="0" bIns="0" rtlCol="0" anchor="ctr"/>
+          <a:lstStyle/>
+          <a:p>
+            <a:pPr indent="0" marL="0">
+              <a:buNone/>
+            </a:pPr>
+            <a:r>
+              <a:rPr lang="en-US" sz="1050" b="1" dirty="0">
+                <a:solidFill>
+                  <a:srgbClr val="2B6CB0"/>
+                </a:solidFill>
+                <a:latin typeface="Pretendard" pitchFamily="34" charset="0"/>
+                <a:ea typeface="Pretendard" pitchFamily="34" charset="-122"/>
+                <a:cs typeface="Pretendard" pitchFamily="34" charset="-120"/>
+              </a:rPr>
+              <a:t>투자 가치 제안</a:t>
+            </a:r>
+            <a:endParaRPr lang="en-US" sz="1050" dirty="0"/>
+          </a:p>
+        </p:txBody>
+      </p:sp>
+      <p:sp>
+        <p:nvSpPr>
+          <p:cNvPr id="10" name="Text 8"/>
+          <p:cNvSpPr/>
+          <p:nvPr/>
+        </p:nvSpPr>
+        <p:spPr>
+          <a:xfrm>
+            <a:off x="749808" y="1975104"/>
+            <a:ext cx="10728655" cy="877824"/>
+          </a:xfrm>
+          <a:prstGeom prst="rect">
+            <a:avLst/>
+          </a:prstGeom>
+          <a:noFill/>
+          <a:ln/>
+        </p:spPr>
+        <p:txBody>
+          <a:bodyPr wrap="square" lIns="0" tIns="0" rIns="0" bIns="0" rtlCol="0" anchor="t"/>
           <a:lstStyle/>
           <a:p>
             <a:pPr indent="0" marL="0">
@@ -5996,30 +6663,30 @@
               <a:buNone/>
             </a:pPr>
             <a:r>
-              <a:rPr lang="en-US" sz="1300" dirty="0">
-                <a:solidFill>
-                  <a:srgbClr val="64748B"/>
+              <a:rPr lang="en-US" sz="930" dirty="0">
+                <a:solidFill>
+                  <a:srgbClr val="10161F"/>
                 </a:solidFill>
                 <a:latin typeface="Pretendard" pitchFamily="34" charset="0"/>
                 <a:ea typeface="Pretendard" pitchFamily="34" charset="-122"/>
                 <a:cs typeface="Pretendard" pitchFamily="34" charset="-120"/>
               </a:rPr>
-              <a:t>{"ok"</a:t>
-            </a:r>
-            <a:endParaRPr lang="en-US" sz="1300" dirty="0"/>
-          </a:p>
-        </p:txBody>
-      </p:sp>
-      <p:sp>
-        <p:nvSpPr>
-          <p:cNvPr id="6" name="Text 4"/>
-          <p:cNvSpPr/>
-          <p:nvPr/>
-        </p:nvSpPr>
-        <p:spPr>
-          <a:xfrm>
-            <a:off x="3172968" y="1417320"/>
-            <a:ext cx="4251960" cy="402336"/>
+              <a:t>{"ok":true,"mocked":true,"extractedFields":{"area_signal":"역삼","asset_type":"오피스빌딩","price_band":"300억","size_signal":"3000평(약 9917.4㎡)"},"extractedFacts":{"region":"역삼","exactAddressCandidate":"역삼동 742-1","assetType":"오피스빌딩","priceText":"300억","sizeText":"3000평(약 9917.4㎡)","currentUse":"오피스","currentUseSignal":"근린생활시설","leaseSignal":"임대중","vacancySignal":"공실없음","tenantNames":["쿠팡","네이버"],"unitRentTexts":["301호: 1500만"],"sellerMotivationText":"자산 효율화","brokerNotes":["초역세권 매물"]},"detectedSensitiveFields":["exact_address","tenant_name"],"ambiguousFields":[],"warnings":[],"areaSignal":"역삼","assetType":"오피스빌딩","priceBand":"300억","sizeSignal":"3000평(약 9917.4㎡)","dealType":"매각","buildingName":"역삼 센트럴타워","exactAddress":"역삼동 742-1","totalFloorArea":9917.3,"buildYear":2015,"currentUseSignal":"근린생활시설","vacancySignal":"공실 없음","fitSummary":"초역세권 근생 빌딩으로 시행/사옥 매입에 최적화","cautionSummary":"주요 임차 업종 만기 조율 필요","hiddenFields":["exact_address","seller_motivation"],"confidence":{"areaSignal":"confirmed","assetType":"confirmed","priceBand":"ai_hypothesis","fitSummary":"ai_hypothesis"},"missingData":["sizeSignal"],"boundaryNote":"본 자료는 실거래 통계 기반 참고치입니다.","buyerType":"법인 사옥형","budgetRange":{"min":50,"max":80,"display":"50억~80억"},"preferredRegions":["강남","성수"],"assetTypes":["꼬마빌딩","사옥용"],"purchasePurpose":"사옥용 매입","mustHave":["초역세권","주차"],"niceToHave":["테라스","루프탑"],"riskTolerance":"medium","financingNote":"자본금 50% 준비","missingQuestions":["구체적인 입주 시기가 언제인가요?","선호하는 수익률이 있나요?"],"privacyNotes":["연락처 비공개"],"fitReasons":["매수자 예산(50-80억)에 부합하는 매물입니다.","요청하신 성수/강남 권역에 해당합니다."],"cautionReasons":["요청한 용도와 달리 명도 협의가 다소 필요합니다."],"recommendedNextAction":"현장 답사 제안","kakaoMessage":"안녕하세요! 요청하신 조건에 부합하는 추천 매물이 있어 안내해 드립니다. 확인해보시고 피드백 부탁드립니다.","title":"강남 역삼역 초역세권 오피스 사옥용 빌딩 매각","shortSummary":"역삼역 도보 5분 거리의 준신축급 대형 오피스빌딩입니다.","dealPoints":["초역세권","사옥 최적"],"cautionPoints":["명도 조율 필요"],"hiddenInfoNotice":["보증금 및 지번은 인가 후 확인 가능"],"gateMessage":"G1 등급 등록이 필요합니다.","kakaoText":"강남 역삼역 오피스 빌딩 매각 안내입니다.","exactUnitCandidate":"101호","floor":"1층","areaSqmText":"150㎡","spaceType":"office","depositText":"5000만","monthlyRentText":"400만","maintenanceFeeText":"50만","availableFromText":"즉시입주","leaseTermMonthsText":"24","incentivesText":"렌트프리 2개월","restrictions":[],"landlordIdentity":"김성수","currentTenant":"스타트업","vacancyReason":"이전 확장","rentNegotiation":"협의 가능","region":"성수동","areaSqm":150,"deposit":5000,"monthlyRent":400,"maintenanceFee":50,"availableFrom":"즉시입주","leaseTermMonths":24,"incentives":{"rentFreeMonths":2,"interiorSupport":"일부 인테리어 지원","freeRentDetail":"렌트프리 2개월 지원"},"shortSummaryLease":"성수역 도보 5분 거리 1층 리테일 상가 매물입니다."}</a:t>
+            </a:r>
+            <a:endParaRPr lang="en-US" sz="930" dirty="0"/>
+          </a:p>
+        </p:txBody>
+      </p:sp>
+      <p:sp>
+        <p:nvSpPr>
+          <p:cNvPr id="11" name="Text 9"/>
+          <p:cNvSpPr/>
+          <p:nvPr/>
+        </p:nvSpPr>
+        <p:spPr>
+          <a:xfrm>
+            <a:off x="566928" y="6382512"/>
+            <a:ext cx="7315200" cy="219456"/>
           </a:xfrm>
           <a:prstGeom prst="rect">
             <a:avLst/>
@@ -6032,147 +6699,59 @@
           <a:lstStyle/>
           <a:p>
             <a:pPr indent="0" marL="0">
-              <a:lnSpc>
-                <a:spcPct val="120000"/>
-              </a:lnSpc>
-              <a:buNone/>
-            </a:pPr>
-            <a:r>
-              <a:rPr lang="en-US" sz="1300" b="1" dirty="0">
-                <a:solidFill>
-                  <a:srgbClr val="0F172A"/>
+              <a:buNone/>
+            </a:pPr>
+            <a:r>
+              <a:rPr lang="en-US" sz="800" dirty="0">
+                <a:solidFill>
+                  <a:srgbClr val="718096"/>
                 </a:solidFill>
                 <a:latin typeface="Pretendard" pitchFamily="34" charset="0"/>
                 <a:ea typeface="Pretendard" pitchFamily="34" charset="-122"/>
                 <a:cs typeface="Pretendard" pitchFamily="34" charset="-120"/>
               </a:rPr>
-              <a:t>true,"mocked":true,"extractedFields":{"area_signal":"역삼","asset_type":"오피스빌딩","price_band":"300억","size_signal":"3000평(약 9917.4㎡)"},"extractedFacts":{"region":"역삼","exactAddressCandidate":"역삼동 742-1","assetType":"오피스빌딩","priceText":"300억","sizeText":"3000평(약 9917.4㎡)","currentUse":"오피스","currentUseSignal":"근린생활시설","leaseSignal":"임대중","vacancySignal":"공실없음","tenantNames":"쿠팡","네이버","unitRentTexts":"301호: 1500만","sellerMotivationText":"자산 효율화","brokerNotes":"초역세권 매물"},"detectedSensitiveFields":"exact_address","tenant_name","ambiguousFields":,"warnings":,"areaSignal":"역삼","assetType":"오피스빌딩","priceBand":"300억","sizeSignal":"3000평(약 9917.4㎡)","dealType":"매각","buildingName":"역삼 센트럴타워","exactAddress":"역삼동 742-1","totalFloorArea":9917.3,"buildYear":2015,"currentUseSignal":"근린생활시설","vacancySignal":"공실 없음","fitSummary":"초역세권 근생 빌딩으로 시행/사옥 매입에 최적화","cautionSummary":"주요 임차 업종 만기 조율 필요","hiddenFields":"exact_address","seller_motivation","confidence":{"areaSignal":"confirmed","assetType":"confirmed","priceBand":"ai_hypothesis","fitSummary":"ai_hypothesis"},"missingData":"sizeSignal","boundaryNote":"본 자료는 실거래 통계 기반 참고치입니다.","buyerType":"법인 사옥형","budgetRange":{"min":50,"max":80,"display":"50억~80억"},"preferredRegions":"강남","성수","assetTypes":"꼬마빌딩","사옥용","purchasePurpose":"사옥용 매입","mustHave":"초역세권","주차","niceToHave":"테라스","루프탑","riskTolerance":"medium","financingNote":"자본금 50% 준비","missingQuestions":"구체적인 입주 시기가 언제인가요?","선호하는 수익률이 있나요?","privacyNotes":"연락처 비공개","fitReasons":"매수자 예산(50-80억)에 부합하는 매물입니다.","요청하신 성수/강남 권역에 해당합니다.","cautionReasons":"요청한 용도와 달리 명도 협의가 다소 필요합니다.","recommendedNextAction":"현장 답사 제안","kakaoMessage":"안녕하세요! 요청하신 조건에 부합하는 추천 매물이 있어 안내해 드립니다. 확인해보시고 피드백 부탁드립니다.","title":"강남 역삼역 초역세권 오피스 사옥용 빌딩 매각","shortSummary":"역삼역 도보 5분 거리의 준신축급 대형 오피스빌딩입니다.","dealPoints":"초역세권","사옥 최적","cautionPoints":"명도 조율 필요","hiddenInfoNotice":"보증금 및 지번은 인가 후 확인 가능","gateMessage":"G1 등급 등록이 필요합니다.","kakaoText":"강남 역삼역 오피스 빌딩 매각 안내입니다.","exactUnitCandidate":"101호","floor":"1층","areaSqmText":"150㎡","spaceType":"office","depositText":"5000만","monthlyRentText":"400만","maintenanceFeeText":"50만","availableFromText":"즉시입주","leaseTermMonthsText":"24","incentivesText":"렌트프리 2개월","restrictions":,"landlordIdentity":"김성수","currentTenant":"스타트업","vacancyReason":"이전 확장","rentNegotiation":"협의 가능","region":"성수동","areaSqm":150,"deposit":5000,"monthlyRent":400,"maintenanceFee":50,"availableFrom":"즉시입주","leaseTermMonths":24,"incentives":{"rentFreeMonths":2,"interiorSupport":"일부 인테리어 지원","freeRentDetail":"렌트프리 2개월 지원"},"shortSummaryLease":"성수역 도보 5분 거리 1층 리테일 상가 매물입니다."}</a:t>
-            </a:r>
-            <a:endParaRPr lang="en-US" sz="1300" dirty="0"/>
-          </a:p>
-        </p:txBody>
-      </p:sp>
-      <p:sp>
-        <p:nvSpPr>
-          <p:cNvPr id="7" name="Shape 5"/>
-          <p:cNvSpPr/>
-          <p:nvPr/>
-        </p:nvSpPr>
-        <p:spPr>
-          <a:xfrm>
-            <a:off x="7604608" y="1371600"/>
-            <a:ext cx="0" cy="4754880"/>
-          </a:xfrm>
-          <a:prstGeom prst="line">
-            <a:avLst/>
-          </a:prstGeom>
-          <a:noFill/>
-          <a:ln w="8890">
-            <a:solidFill>
-              <a:srgbClr val="6B8E00"/>
-            </a:solidFill>
-            <a:prstDash val="solid"/>
-          </a:ln>
-        </p:spPr>
-      </p:sp>
-      <p:sp>
-        <p:nvSpPr>
-          <p:cNvPr id="8" name="Text 6"/>
-          <p:cNvSpPr/>
-          <p:nvPr/>
-        </p:nvSpPr>
-        <p:spPr>
-          <a:xfrm>
-            <a:off x="566928" y="6419088"/>
-            <a:ext cx="11057839" cy="201168"/>
-          </a:xfrm>
-          <a:prstGeom prst="rect">
-            <a:avLst/>
-          </a:prstGeom>
-          <a:noFill/>
-          <a:ln/>
-        </p:spPr>
-        <p:txBody>
-          <a:bodyPr wrap="square" lIns="0" tIns="0" rIns="0" bIns="0" rtlCol="0" anchor="ctr"/>
-          <a:lstStyle/>
-          <a:p>
-            <a:pPr algn="ctr" indent="0" marL="0">
-              <a:buNone/>
-            </a:pPr>
-            <a:r>
-              <a:rPr lang="en-US" sz="750" dirty="0">
-                <a:solidFill>
-                  <a:srgbClr val="64748B"/>
-                </a:solidFill>
-                <a:latin typeface="Pretendard" pitchFamily="34" charset="0"/>
-                <a:ea typeface="Pretendard" pitchFamily="34" charset="-122"/>
-                <a:cs typeface="Pretendard" pitchFamily="34" charset="-120"/>
-              </a:rPr>
-              <a:t>크리딜  ·    ·  6</a:t>
-            </a:r>
-            <a:endParaRPr lang="en-US" sz="750" dirty="0"/>
-          </a:p>
-        </p:txBody>
-      </p:sp>
-      <p:sp>
-        <p:nvSpPr>
-          <p:cNvPr id="9" name="Shape 7"/>
-          <p:cNvSpPr/>
-          <p:nvPr/>
-        </p:nvSpPr>
-        <p:spPr>
-          <a:xfrm>
-            <a:off x="4437172" y="6382512"/>
-            <a:ext cx="3317352" cy="0"/>
-          </a:xfrm>
-          <a:prstGeom prst="line">
-            <a:avLst/>
-          </a:prstGeom>
-          <a:noFill/>
-          <a:ln w="6350">
-            <a:solidFill>
-              <a:srgbClr val="6B8E00"/>
-            </a:solidFill>
-            <a:prstDash val="solid"/>
-          </a:ln>
-        </p:spPr>
-      </p:sp>
-      <p:sp>
-        <p:nvSpPr>
-          <p:cNvPr id="10" name="Text 8"/>
-          <p:cNvSpPr/>
-          <p:nvPr/>
-        </p:nvSpPr>
-        <p:spPr>
-          <a:xfrm>
-            <a:off x="566928" y="1481328"/>
-            <a:ext cx="11057839" cy="9692640"/>
-          </a:xfrm>
-          <a:prstGeom prst="rect">
-            <a:avLst/>
-          </a:prstGeom>
-          <a:noFill/>
-          <a:ln/>
-        </p:spPr>
-        <p:txBody>
-          <a:bodyPr wrap="square" lIns="0" tIns="0" rIns="0" bIns="0" rtlCol="0" anchor="t"/>
-          <a:lstStyle/>
-          <a:p>
-            <a:pPr indent="0" marL="0">
-              <a:buNone/>
-            </a:pPr>
-            <a:r>
-              <a:rPr lang="en-US" sz="1000" dirty="0">
-                <a:solidFill>
-                  <a:srgbClr val="0F172A"/>
-                </a:solidFill>
-                <a:latin typeface="Pretendard" pitchFamily="34" charset="0"/>
-                <a:ea typeface="Pretendard" pitchFamily="34" charset="-122"/>
-                <a:cs typeface="Pretendard" pitchFamily="34" charset="-120"/>
-              </a:rPr>
-              <a:t>{"ok":true,"mocked":true,"extractedFields":{"area_signal":"역삼","asset_type":"오피스빌딩","price_band":"300억","size_signal":"3000평(약 9917.4㎡)"},"extractedFacts":{"region":"역삼","exactAddressCandidate":"역삼동 742-1","assetType":"오피스빌딩","priceText":"300억","sizeText":"3000평(약 9917.4㎡)","currentUse":"오피스","currentUseSignal":"근린생활시설","leaseSignal":"임대중","vacancySignal":"공실없음","tenantNames":["쿠팡","네이버"],"unitRentTexts":["301호: 1500만"],"sellerMotivationText":"자산 효율화","brokerNotes":["초역세권 매물"]},"detectedSensitiveFields":["exact_address","tenant_name"],"ambiguousFields":[],"warnings":[],"areaSignal":"역삼","assetType":"오피스빌딩","priceBand":"300억","sizeSignal":"3000평(약 9917.4㎡)","dealType":"매각","buildingName":"역삼 센트럴타워","exactAddress":"역삼동 742-1","totalFloorArea":9917.3,"buildYear":2015,"currentUseSignal":"근린생활시설","vacancySignal":"공실 없음","fitSummary":"초역세권 근생 빌딩으로 시행/사옥 매입에 최적화","cautionSummary":"주요 임차 업종 만기 조율 필요","hiddenFields":["exact_address","seller_motivation"],"confidence":{"areaSignal":"confirmed","assetType":"confirmed","priceBand":"ai_hypothesis","fitSummary":"ai_hypothesis"},"missingData":["sizeSignal"],"boundaryNote":"본 자료는 실거래 통계 기반 참고치입니다.","buyerType":"법인 사옥형","budgetRange":{"min":50,"max":80,"display":"50억~80억"},"preferredRegions":["강남","성수"],"assetTypes":["꼬마빌딩","사옥용"],"purchasePurpose":"사옥용 매입","mustHave":["초역세권","주차"],"niceToHave":["테라스","루프탑"],"riskTolerance":"medium","financingNote":"자본금 50% 준비","missingQuestions":["구체적인 입주 시기가 언제인가요?","선호하는 수익률이 있나요?"],"privacyNotes":["연락처 비공개"],"fitReasons":["매수자 예산(50-80억)에 부합하는 매물입니다.","요청하신 성수/강남 권역에 해당합니다."],"cautionReasons":["요청한 용도와 달리 명도 협의가 다소 필요합니다."],"recommendedNextAction":"현장 답사 제안","kakaoMessage":"안녕하세요! 요청하신 조건에 부합하는 추천 매물이 있어 안내해 드립니다. 확인해보시고 피드백 부탁드립니다.","title":"강남 역삼역 초역세권 오피스 사옥용 빌딩 매각","shortSummary":"역삼역 도보 5분 거리의 준신축급 대형 오피스빌딩입니다.","dealPoints":["초역세권","사옥 최적"],"cautionPoints":["명도 조율 필요"],"hiddenInfoNotice":["보증금 및 지번은 인가 후 확인 가능"],"gateMessage":"G1 등급 등록이 필요합니다.","kakaoText":"강남 역삼역 오피스 빌딩 매각 안내입니다.","exactUnitCandidate":"101호","floor":"1층","areaSqmText":"150㎡","spaceType":"office","depositText":"5000만","monthlyRentText":"400만","maintenanceFeeText":"50만","availableFromText":"즉시입주","leaseTermMonthsText":"24","incentivesText":"렌트프리 2개월","restrictions":[],"landlordIdentity":"김성수","currentTenant":"스타트업","vacancyReason":"이전 확장","rentNegotiation":"협의 가능","region":"성수동","areaSqm":150,"deposit":5000,"monthlyRent":400,"maintenanceFee":50,"availableFrom":"즉시입주","leaseTermMonths":24,"incentives":{"rentFreeMonths":2,"interiorSupport":"일부 인테리어 지원","freeRentDetail":"렌트프리 2개월 지원"},"shortSummaryLease":"성수역 도보 5분 거리 1층 리테일 상가 매물입니다."}</a:t>
-            </a:r>
-            <a:endParaRPr lang="en-US" sz="1000" dirty="0"/>
+              <a:t>크리딜   |   </a:t>
+            </a:r>
+            <a:endParaRPr lang="en-US" sz="800" dirty="0"/>
+          </a:p>
+        </p:txBody>
+      </p:sp>
+      <p:sp>
+        <p:nvSpPr>
+          <p:cNvPr id="12" name="Text 10"/>
+          <p:cNvSpPr/>
+          <p:nvPr/>
+        </p:nvSpPr>
+        <p:spPr>
+          <a:xfrm>
+            <a:off x="10710367" y="6382512"/>
+            <a:ext cx="914400" cy="219456"/>
+          </a:xfrm>
+          <a:prstGeom prst="rect">
+            <a:avLst/>
+          </a:prstGeom>
+          <a:noFill/>
+          <a:ln/>
+        </p:spPr>
+        <p:txBody>
+          <a:bodyPr wrap="square" lIns="0" tIns="0" rIns="0" bIns="0" rtlCol="0" anchor="ctr"/>
+          <a:lstStyle/>
+          <a:p>
+            <a:pPr algn="r" indent="0" marL="0">
+              <a:buNone/>
+            </a:pPr>
+            <a:r>
+              <a:rPr lang="en-US" sz="900" b="1" dirty="0">
+                <a:solidFill>
+                  <a:srgbClr val="B98A2E"/>
+                </a:solidFill>
+                <a:latin typeface="Arial" pitchFamily="34" charset="0"/>
+                <a:ea typeface="Arial" pitchFamily="34" charset="-122"/>
+                <a:cs typeface="Arial" pitchFamily="34" charset="-120"/>
+              </a:rPr>
+              <a:t>6</a:t>
+            </a:r>
+            <a:endParaRPr lang="en-US" sz="900" dirty="0"/>
           </a:p>
         </p:txBody>
       </p:sp>
@@ -6216,14 +6795,14 @@
         </p:nvSpPr>
         <p:spPr>
           <a:xfrm>
-            <a:off x="566928" y="384048"/>
-            <a:ext cx="45720" cy="566928"/>
-          </a:xfrm>
-          <a:prstGeom prst="rect">
+            <a:off x="566928" y="457200"/>
+            <a:ext cx="384048" cy="384048"/>
+          </a:xfrm>
+          <a:prstGeom prst="ellipse">
             <a:avLst/>
           </a:prstGeom>
           <a:solidFill>
-            <a:srgbClr val="6B8E00"/>
+            <a:srgbClr val="B98A2E"/>
           </a:solidFill>
           <a:ln/>
         </p:spPr>
@@ -6236,32 +6815,71 @@
         </p:nvSpPr>
         <p:spPr>
           <a:xfrm>
-            <a:off x="749808" y="384048"/>
-            <a:ext cx="10874959" cy="182880"/>
-          </a:xfrm>
-          <a:prstGeom prst="rect">
-            <a:avLst/>
-          </a:prstGeom>
-          <a:noFill/>
-          <a:ln/>
-        </p:spPr>
-        <p:txBody>
-          <a:bodyPr wrap="square" lIns="0" tIns="0" rIns="0" bIns="0" rtlCol="0" anchor="ctr"/>
-          <a:lstStyle/>
-          <a:p>
-            <a:pPr indent="0" marL="0">
-              <a:buNone/>
-            </a:pPr>
-            <a:r>
-              <a:rPr lang="en-US" sz="950" b="1" spc="200" kern="0" dirty="0">
-                <a:solidFill>
-                  <a:srgbClr val="6B8E00"/>
+            <a:off x="566928" y="457200"/>
+            <a:ext cx="384048" cy="384048"/>
+          </a:xfrm>
+          <a:prstGeom prst="rect">
+            <a:avLst/>
+          </a:prstGeom>
+          <a:noFill/>
+          <a:ln/>
+        </p:spPr>
+        <p:txBody>
+          <a:bodyPr wrap="square" lIns="0" tIns="0" rIns="0" bIns="0" rtlCol="0" anchor="ctr"/>
+          <a:lstStyle/>
+          <a:p>
+            <a:pPr algn="ctr" indent="0" marL="0">
+              <a:buNone/>
+            </a:pPr>
+            <a:r>
+              <a:rPr lang="en-US" sz="1300" b="1" dirty="0">
+                <a:solidFill>
+                  <a:srgbClr val="FFFFFF"/>
                 </a:solidFill>
                 <a:latin typeface="Arial" pitchFamily="34" charset="0"/>
                 <a:ea typeface="Arial" pitchFamily="34" charset="-122"/>
                 <a:cs typeface="Arial" pitchFamily="34" charset="-120"/>
               </a:rPr>
-              <a:t>07  Risk</a:t>
+              <a:t>07</a:t>
+            </a:r>
+            <a:endParaRPr lang="en-US" sz="1300" dirty="0"/>
+          </a:p>
+        </p:txBody>
+      </p:sp>
+      <p:sp>
+        <p:nvSpPr>
+          <p:cNvPr id="4" name="Text 2"/>
+          <p:cNvSpPr/>
+          <p:nvPr/>
+        </p:nvSpPr>
+        <p:spPr>
+          <a:xfrm>
+            <a:off x="1133856" y="457200"/>
+            <a:ext cx="10490911" cy="182880"/>
+          </a:xfrm>
+          <a:prstGeom prst="rect">
+            <a:avLst/>
+          </a:prstGeom>
+          <a:noFill/>
+          <a:ln/>
+        </p:spPr>
+        <p:txBody>
+          <a:bodyPr wrap="square" lIns="0" tIns="0" rIns="0" bIns="0" rtlCol="0" anchor="ctr"/>
+          <a:lstStyle/>
+          <a:p>
+            <a:pPr indent="0" marL="0">
+              <a:buNone/>
+            </a:pPr>
+            <a:r>
+              <a:rPr lang="en-US" sz="950" b="1" spc="200" kern="0" dirty="0">
+                <a:solidFill>
+                  <a:srgbClr val="B98A2E"/>
+                </a:solidFill>
+                <a:latin typeface="Arial" pitchFamily="34" charset="0"/>
+                <a:ea typeface="Arial" pitchFamily="34" charset="-122"/>
+                <a:cs typeface="Arial" pitchFamily="34" charset="-120"/>
+              </a:rPr>
+              <a:t>Risk</a:t>
             </a:r>
             <a:endParaRPr lang="en-US" sz="950" dirty="0"/>
           </a:p>
@@ -6269,14 +6887,14 @@
       </p:sp>
       <p:sp>
         <p:nvSpPr>
-          <p:cNvPr id="4" name="Text 2"/>
-          <p:cNvSpPr/>
-          <p:nvPr/>
-        </p:nvSpPr>
-        <p:spPr>
-          <a:xfrm>
-            <a:off x="749808" y="566928"/>
-            <a:ext cx="10874959" cy="384048"/>
+          <p:cNvPr id="5" name="Text 3"/>
+          <p:cNvSpPr/>
+          <p:nvPr/>
+        </p:nvSpPr>
+        <p:spPr>
+          <a:xfrm>
+            <a:off x="1133856" y="640080"/>
+            <a:ext cx="10490911" cy="365760"/>
           </a:xfrm>
           <a:prstGeom prst="rect">
             <a:avLst/>
@@ -6292,9 +6910,9 @@
               <a:buNone/>
             </a:pPr>
             <a:r>
-              <a:rPr lang="en-US" sz="2200" b="1" dirty="0">
-                <a:solidFill>
-                  <a:srgbClr val="0F172A"/>
+              <a:rPr lang="en-US" sz="2300" b="1" dirty="0">
+                <a:solidFill>
+                  <a:srgbClr val="10161F"/>
                 </a:solidFill>
                 <a:latin typeface="Pretendard" pitchFamily="34" charset="0"/>
                 <a:ea typeface="Pretendard" pitchFamily="34" charset="-122"/>
@@ -6302,30 +6920,32 @@
               </a:rPr>
               <a:t>리스크는 무엇이고 대응책은 있는가</a:t>
             </a:r>
-            <a:endParaRPr lang="en-US" sz="2200" dirty="0"/>
-          </a:p>
-        </p:txBody>
-      </p:sp>
-      <p:sp>
-        <p:nvSpPr>
-          <p:cNvPr id="5" name="Shape 3"/>
+            <a:endParaRPr lang="en-US" sz="2300" dirty="0"/>
+          </a:p>
+        </p:txBody>
+      </p:sp>
+      <p:sp>
+        <p:nvSpPr>
+          <p:cNvPr id="6" name="Shape 4"/>
           <p:cNvSpPr/>
           <p:nvPr/>
         </p:nvSpPr>
         <p:spPr>
           <a:xfrm>
             <a:off x="566928" y="1417320"/>
-            <a:ext cx="3503066" cy="3611880"/>
-          </a:xfrm>
-          <a:prstGeom prst="rect">
-            <a:avLst/>
+            <a:ext cx="11057839" cy="3611880"/>
+          </a:xfrm>
+          <a:prstGeom prst="roundRect">
+            <a:avLst>
+              <a:gd name="adj" fmla="val 1519"/>
+            </a:avLst>
           </a:prstGeom>
           <a:solidFill>
-            <a:srgbClr val="F8FAFC"/>
+            <a:srgbClr val="F7FAFC"/>
           </a:solidFill>
-          <a:ln w="3810">
+          <a:ln w="6350">
             <a:solidFill>
-              <a:srgbClr val="CBD5E1"/>
+              <a:srgbClr val="CBD5E0"/>
             </a:solidFill>
             <a:prstDash val="solid"/>
           </a:ln>
@@ -6333,46 +6953,26 @@
       </p:sp>
       <p:sp>
         <p:nvSpPr>
-          <p:cNvPr id="6" name="Shape 4"/>
+          <p:cNvPr id="7" name="Shape 5"/>
           <p:cNvSpPr/>
           <p:nvPr/>
         </p:nvSpPr>
         <p:spPr>
           <a:xfrm>
             <a:off x="566928" y="1417320"/>
-            <a:ext cx="3503066" cy="36576"/>
+            <a:ext cx="11057839" cy="45720"/>
           </a:xfrm>
           <a:prstGeom prst="rect">
             <a:avLst/>
           </a:prstGeom>
           <a:solidFill>
-            <a:srgbClr val="6B8E00"/>
+            <a:srgbClr val="B98A2E"/>
           </a:solidFill>
           <a:ln/>
         </p:spPr>
       </p:sp>
       <p:sp>
         <p:nvSpPr>
-          <p:cNvPr id="7" name="Shape 5"/>
-          <p:cNvSpPr/>
-          <p:nvPr/>
-        </p:nvSpPr>
-        <p:spPr>
-          <a:xfrm>
-            <a:off x="566928" y="1417320"/>
-            <a:ext cx="3503066" cy="45720"/>
-          </a:xfrm>
-          <a:prstGeom prst="rect">
-            <a:avLst/>
-          </a:prstGeom>
-          <a:solidFill>
-            <a:srgbClr val="6B8E00"/>
-          </a:solidFill>
-          <a:ln/>
-        </p:spPr>
-      </p:sp>
-      <p:sp>
-        <p:nvSpPr>
           <p:cNvPr id="8" name="Text 6"/>
           <p:cNvSpPr/>
           <p:nvPr/>
@@ -6380,7 +6980,7 @@
         <p:spPr>
           <a:xfrm>
             <a:off x="795528" y="1618488"/>
-            <a:ext cx="3045866" cy="292608"/>
+            <a:ext cx="10600639" cy="292608"/>
           </a:xfrm>
           <a:prstGeom prst="rect">
             <a:avLst/>
@@ -6398,7 +6998,7 @@
             <a:r>
               <a:rPr lang="en-US" sz="1350" b="1" dirty="0">
                 <a:solidFill>
-                  <a:srgbClr val="4F6A00"/>
+                  <a:srgbClr val="977024"/>
                 </a:solidFill>
                 <a:latin typeface="Pretendard" pitchFamily="34" charset="0"/>
                 <a:ea typeface="Pretendard" pitchFamily="34" charset="-122"/>
@@ -6418,26 +7018,28 @@
         </p:nvSpPr>
         <p:spPr>
           <a:xfrm>
-            <a:off x="795528" y="1929384"/>
-            <a:ext cx="3045866" cy="347472"/>
-          </a:xfrm>
-          <a:prstGeom prst="rect">
-            <a:avLst/>
-          </a:prstGeom>
-          <a:noFill/>
-          <a:ln/>
-        </p:spPr>
-        <p:txBody>
-          <a:bodyPr wrap="square" lIns="0" tIns="0" rIns="0" bIns="0" rtlCol="0" anchor="ctr"/>
+            <a:off x="795528" y="1911096"/>
+            <a:ext cx="10600639" cy="402336"/>
+          </a:xfrm>
+          <a:prstGeom prst="rect">
+            <a:avLst/>
+          </a:prstGeom>
+          <a:noFill/>
+          <a:ln/>
+        </p:spPr>
+        <p:txBody>
+          <a:bodyPr wrap="square" lIns="0" tIns="0" rIns="0" bIns="0" rtlCol="0" anchor="ctr">
+            <a:normAutofit/>
+          </a:bodyPr>
           <a:lstStyle/>
           <a:p>
             <a:pPr indent="0" marL="0">
               <a:buNone/>
             </a:pPr>
             <a:r>
-              <a:rPr lang="en-US" sz="1500" b="1" dirty="0">
-                <a:solidFill>
-                  <a:srgbClr val="0F172A"/>
+              <a:rPr lang="en-US" sz="1350" b="1" dirty="0">
+                <a:solidFill>
+                  <a:srgbClr val="10161F"/>
                 </a:solidFill>
                 <a:latin typeface="Pretendard" pitchFamily="34" charset="0"/>
                 <a:ea typeface="Pretendard" pitchFamily="34" charset="-122"/>
@@ -6445,7 +7047,7 @@
               </a:rPr>
               <a:t>—</a:t>
             </a:r>
-            <a:endParaRPr lang="en-US" sz="1500" dirty="0"/>
+            <a:endParaRPr lang="en-US" sz="1350" dirty="0"/>
           </a:p>
         </p:txBody>
       </p:sp>
@@ -6457,27 +7059,32 @@
         </p:nvSpPr>
         <p:spPr>
           <a:xfrm>
-            <a:off x="795528" y="2313432"/>
-            <a:ext cx="3045866" cy="2606040"/>
-          </a:xfrm>
-          <a:prstGeom prst="rect">
-            <a:avLst/>
-          </a:prstGeom>
-          <a:noFill/>
-          <a:ln/>
-        </p:spPr>
-        <p:txBody>
-          <a:bodyPr wrap="square" lIns="0" tIns="0" rIns="0" bIns="0" rtlCol="0" anchor="t"/>
+            <a:off x="795528" y="2377440"/>
+            <a:ext cx="10600639" cy="2560320"/>
+          </a:xfrm>
+          <a:prstGeom prst="rect">
+            <a:avLst/>
+          </a:prstGeom>
+          <a:noFill/>
+          <a:ln/>
+        </p:spPr>
+        <p:txBody>
+          <a:bodyPr wrap="square" lIns="0" tIns="0" rIns="0" bIns="0" rtlCol="0" anchor="t">
+            <a:normAutofit/>
+          </a:bodyPr>
           <a:lstStyle/>
           <a:p>
             <a:pPr marL="342900" indent="-342900">
+              <a:lnSpc>
+                <a:spcPct val="125000"/>
+              </a:lnSpc>
               <a:buSzPct val="100000"/>
               <a:buChar char="•"/>
             </a:pPr>
             <a:r>
-              <a:rPr lang="en-US" sz="1250" dirty="0">
-                <a:solidFill>
-                  <a:srgbClr val="0F172A"/>
+              <a:rPr lang="en-US" sz="1200" dirty="0">
+                <a:solidFill>
+                  <a:srgbClr val="10161F"/>
                 </a:solidFill>
                 <a:latin typeface="Pretendard" pitchFamily="34" charset="0"/>
                 <a:ea typeface="Pretendard" pitchFamily="34" charset="-122"/>
@@ -6485,7 +7092,7 @@
               </a:rPr>
               <a:t>{"ok":true,"mocked":true,"extractedFields":{"area_signal":"역삼","asset_type":"오피스빌딩","price_band":"300억","size_signal":"3000평(약 9917.4㎡)"},"extractedFacts":{"region":"역삼","exactAddressCandidate":"역삼동 7</a:t>
             </a:r>
-            <a:endParaRPr lang="en-US" sz="1250" dirty="0"/>
+            <a:endParaRPr lang="en-US" sz="1200" dirty="0"/>
           </a:p>
         </p:txBody>
       </p:sp>
@@ -6497,59 +7104,75 @@
         </p:nvSpPr>
         <p:spPr>
           <a:xfrm>
-            <a:off x="566928" y="6419088"/>
-            <a:ext cx="11057839" cy="201168"/>
-          </a:xfrm>
-          <a:prstGeom prst="rect">
-            <a:avLst/>
-          </a:prstGeom>
-          <a:noFill/>
-          <a:ln/>
-        </p:spPr>
-        <p:txBody>
-          <a:bodyPr wrap="square" lIns="0" tIns="0" rIns="0" bIns="0" rtlCol="0" anchor="ctr"/>
-          <a:lstStyle/>
-          <a:p>
-            <a:pPr algn="ctr" indent="0" marL="0">
-              <a:buNone/>
-            </a:pPr>
-            <a:r>
-              <a:rPr lang="en-US" sz="750" dirty="0">
-                <a:solidFill>
-                  <a:srgbClr val="64748B"/>
+            <a:off x="566928" y="6382512"/>
+            <a:ext cx="7315200" cy="219456"/>
+          </a:xfrm>
+          <a:prstGeom prst="rect">
+            <a:avLst/>
+          </a:prstGeom>
+          <a:noFill/>
+          <a:ln/>
+        </p:spPr>
+        <p:txBody>
+          <a:bodyPr wrap="square" lIns="0" tIns="0" rIns="0" bIns="0" rtlCol="0" anchor="ctr"/>
+          <a:lstStyle/>
+          <a:p>
+            <a:pPr indent="0" marL="0">
+              <a:buNone/>
+            </a:pPr>
+            <a:r>
+              <a:rPr lang="en-US" sz="800" dirty="0">
+                <a:solidFill>
+                  <a:srgbClr val="718096"/>
                 </a:solidFill>
                 <a:latin typeface="Pretendard" pitchFamily="34" charset="0"/>
                 <a:ea typeface="Pretendard" pitchFamily="34" charset="-122"/>
                 <a:cs typeface="Pretendard" pitchFamily="34" charset="-120"/>
               </a:rPr>
-              <a:t>크리딜  ·    ·  7</a:t>
-            </a:r>
-            <a:endParaRPr lang="en-US" sz="750" dirty="0"/>
-          </a:p>
-        </p:txBody>
-      </p:sp>
-      <p:sp>
-        <p:nvSpPr>
-          <p:cNvPr id="12" name="Shape 10"/>
-          <p:cNvSpPr/>
-          <p:nvPr/>
-        </p:nvSpPr>
-        <p:spPr>
-          <a:xfrm>
-            <a:off x="4437172" y="6382512"/>
-            <a:ext cx="3317352" cy="0"/>
-          </a:xfrm>
-          <a:prstGeom prst="line">
-            <a:avLst/>
-          </a:prstGeom>
-          <a:noFill/>
-          <a:ln w="6350">
-            <a:solidFill>
-              <a:srgbClr val="6B8E00"/>
-            </a:solidFill>
-            <a:prstDash val="solid"/>
-          </a:ln>
-        </p:spPr>
+              <a:t>크리딜   |   </a:t>
+            </a:r>
+            <a:endParaRPr lang="en-US" sz="800" dirty="0"/>
+          </a:p>
+        </p:txBody>
+      </p:sp>
+      <p:sp>
+        <p:nvSpPr>
+          <p:cNvPr id="12" name="Text 10"/>
+          <p:cNvSpPr/>
+          <p:nvPr/>
+        </p:nvSpPr>
+        <p:spPr>
+          <a:xfrm>
+            <a:off x="10710367" y="6382512"/>
+            <a:ext cx="914400" cy="219456"/>
+          </a:xfrm>
+          <a:prstGeom prst="rect">
+            <a:avLst/>
+          </a:prstGeom>
+          <a:noFill/>
+          <a:ln/>
+        </p:spPr>
+        <p:txBody>
+          <a:bodyPr wrap="square" lIns="0" tIns="0" rIns="0" bIns="0" rtlCol="0" anchor="ctr"/>
+          <a:lstStyle/>
+          <a:p>
+            <a:pPr algn="r" indent="0" marL="0">
+              <a:buNone/>
+            </a:pPr>
+            <a:r>
+              <a:rPr lang="en-US" sz="900" b="1" dirty="0">
+                <a:solidFill>
+                  <a:srgbClr val="B98A2E"/>
+                </a:solidFill>
+                <a:latin typeface="Arial" pitchFamily="34" charset="0"/>
+                <a:ea typeface="Arial" pitchFamily="34" charset="-122"/>
+                <a:cs typeface="Arial" pitchFamily="34" charset="-120"/>
+              </a:rPr>
+              <a:t>7</a:t>
+            </a:r>
+            <a:endParaRPr lang="en-US" sz="900" dirty="0"/>
+          </a:p>
+        </p:txBody>
       </p:sp>
     </p:spTree>
   </p:cSld>
@@ -6591,14 +7214,14 @@
         </p:nvSpPr>
         <p:spPr>
           <a:xfrm>
-            <a:off x="566928" y="384048"/>
-            <a:ext cx="45720" cy="566928"/>
-          </a:xfrm>
-          <a:prstGeom prst="rect">
+            <a:off x="566928" y="457200"/>
+            <a:ext cx="384048" cy="384048"/>
+          </a:xfrm>
+          <a:prstGeom prst="ellipse">
             <a:avLst/>
           </a:prstGeom>
           <a:solidFill>
-            <a:srgbClr val="6B8E00"/>
+            <a:srgbClr val="B98A2E"/>
           </a:solidFill>
           <a:ln/>
         </p:spPr>
@@ -6611,32 +7234,71 @@
         </p:nvSpPr>
         <p:spPr>
           <a:xfrm>
-            <a:off x="749808" y="384048"/>
-            <a:ext cx="10874959" cy="182880"/>
-          </a:xfrm>
-          <a:prstGeom prst="rect">
-            <a:avLst/>
-          </a:prstGeom>
-          <a:noFill/>
-          <a:ln/>
-        </p:spPr>
-        <p:txBody>
-          <a:bodyPr wrap="square" lIns="0" tIns="0" rIns="0" bIns="0" rtlCol="0" anchor="ctr"/>
-          <a:lstStyle/>
-          <a:p>
-            <a:pPr indent="0" marL="0">
-              <a:buNone/>
-            </a:pPr>
-            <a:r>
-              <a:rPr lang="en-US" sz="950" b="1" spc="200" kern="0" dirty="0">
-                <a:solidFill>
-                  <a:srgbClr val="6B8E00"/>
+            <a:off x="566928" y="457200"/>
+            <a:ext cx="384048" cy="384048"/>
+          </a:xfrm>
+          <a:prstGeom prst="rect">
+            <a:avLst/>
+          </a:prstGeom>
+          <a:noFill/>
+          <a:ln/>
+        </p:spPr>
+        <p:txBody>
+          <a:bodyPr wrap="square" lIns="0" tIns="0" rIns="0" bIns="0" rtlCol="0" anchor="ctr"/>
+          <a:lstStyle/>
+          <a:p>
+            <a:pPr algn="ctr" indent="0" marL="0">
+              <a:buNone/>
+            </a:pPr>
+            <a:r>
+              <a:rPr lang="en-US" sz="1300" b="1" dirty="0">
+                <a:solidFill>
+                  <a:srgbClr val="FFFFFF"/>
                 </a:solidFill>
                 <a:latin typeface="Arial" pitchFamily="34" charset="0"/>
                 <a:ea typeface="Arial" pitchFamily="34" charset="-122"/>
                 <a:cs typeface="Arial" pitchFamily="34" charset="-120"/>
               </a:rPr>
-              <a:t>08  Thesis</a:t>
+              <a:t>08</a:t>
+            </a:r>
+            <a:endParaRPr lang="en-US" sz="1300" dirty="0"/>
+          </a:p>
+        </p:txBody>
+      </p:sp>
+      <p:sp>
+        <p:nvSpPr>
+          <p:cNvPr id="4" name="Text 2"/>
+          <p:cNvSpPr/>
+          <p:nvPr/>
+        </p:nvSpPr>
+        <p:spPr>
+          <a:xfrm>
+            <a:off x="1133856" y="457200"/>
+            <a:ext cx="10490911" cy="182880"/>
+          </a:xfrm>
+          <a:prstGeom prst="rect">
+            <a:avLst/>
+          </a:prstGeom>
+          <a:noFill/>
+          <a:ln/>
+        </p:spPr>
+        <p:txBody>
+          <a:bodyPr wrap="square" lIns="0" tIns="0" rIns="0" bIns="0" rtlCol="0" anchor="ctr"/>
+          <a:lstStyle/>
+          <a:p>
+            <a:pPr indent="0" marL="0">
+              <a:buNone/>
+            </a:pPr>
+            <a:r>
+              <a:rPr lang="en-US" sz="950" b="1" spc="200" kern="0" dirty="0">
+                <a:solidFill>
+                  <a:srgbClr val="B98A2E"/>
+                </a:solidFill>
+                <a:latin typeface="Arial" pitchFamily="34" charset="0"/>
+                <a:ea typeface="Arial" pitchFamily="34" charset="-122"/>
+                <a:cs typeface="Arial" pitchFamily="34" charset="-120"/>
+              </a:rPr>
+              <a:t>Thesis</a:t>
             </a:r>
             <a:endParaRPr lang="en-US" sz="950" dirty="0"/>
           </a:p>
@@ -6644,14 +7306,14 @@
       </p:sp>
       <p:sp>
         <p:nvSpPr>
-          <p:cNvPr id="4" name="Text 2"/>
-          <p:cNvSpPr/>
-          <p:nvPr/>
-        </p:nvSpPr>
-        <p:spPr>
-          <a:xfrm>
-            <a:off x="749808" y="566928"/>
-            <a:ext cx="10874959" cy="384048"/>
+          <p:cNvPr id="5" name="Text 3"/>
+          <p:cNvSpPr/>
+          <p:nvPr/>
+        </p:nvSpPr>
+        <p:spPr>
+          <a:xfrm>
+            <a:off x="1133856" y="640080"/>
+            <a:ext cx="10490911" cy="365760"/>
           </a:xfrm>
           <a:prstGeom prst="rect">
             <a:avLst/>
@@ -6667,9 +7329,9 @@
               <a:buNone/>
             </a:pPr>
             <a:r>
-              <a:rPr lang="en-US" sz="2200" b="1" dirty="0">
-                <a:solidFill>
-                  <a:srgbClr val="0F172A"/>
+              <a:rPr lang="en-US" sz="2300" b="1" dirty="0">
+                <a:solidFill>
+                  <a:srgbClr val="10161F"/>
                 </a:solidFill>
                 <a:latin typeface="Pretendard" pitchFamily="34" charset="0"/>
                 <a:ea typeface="Pretendard" pitchFamily="34" charset="-122"/>
@@ -6677,19 +7339,1703 @@
               </a:rPr>
               <a:t>왜 지금 이 매물을 사야 하는가</a:t>
             </a:r>
-            <a:endParaRPr lang="en-US" sz="2200" dirty="0"/>
-          </a:p>
-        </p:txBody>
-      </p:sp>
-      <p:sp>
-        <p:nvSpPr>
-          <p:cNvPr id="5" name="Shape 3"/>
-          <p:cNvSpPr/>
-          <p:nvPr/>
-        </p:nvSpPr>
-        <p:spPr>
-          <a:xfrm>
-            <a:off x="566928" y="4983480"/>
+            <a:endParaRPr lang="en-US" sz="2300" dirty="0"/>
+          </a:p>
+        </p:txBody>
+      </p:sp>
+      <p:sp>
+        <p:nvSpPr>
+          <p:cNvPr id="6" name="Text 4"/>
+          <p:cNvSpPr/>
+          <p:nvPr/>
+        </p:nvSpPr>
+        <p:spPr>
+          <a:xfrm>
+            <a:off x="1133856" y="1005840"/>
+            <a:ext cx="10490911" cy="237744"/>
+          </a:xfrm>
+          <a:prstGeom prst="rect">
+            <a:avLst/>
+          </a:prstGeom>
+          <a:noFill/>
+          <a:ln/>
+        </p:spPr>
+        <p:txBody>
+          <a:bodyPr wrap="square" lIns="0" tIns="0" rIns="0" bIns="0" rtlCol="0" anchor="ctr"/>
+          <a:lstStyle/>
+          <a:p>
+            <a:pPr indent="0" marL="0">
+              <a:buNone/>
+            </a:pPr>
+            <a:r>
+              <a:rPr lang="en-US" sz="1100" dirty="0">
+                <a:solidFill>
+                  <a:srgbClr val="718096"/>
+                </a:solidFill>
+                <a:latin typeface="Pretendard" pitchFamily="34" charset="0"/>
+                <a:ea typeface="Pretendard" pitchFamily="34" charset="-122"/>
+                <a:cs typeface="Pretendard" pitchFamily="34" charset="-120"/>
+              </a:rPr>
+              <a:t>3대 핵심 투자 포인트 (Investment Highlights)</a:t>
+            </a:r>
+            <a:endParaRPr lang="en-US" sz="1100" dirty="0"/>
+          </a:p>
+        </p:txBody>
+      </p:sp>
+      <p:sp>
+        <p:nvSpPr>
+          <p:cNvPr id="7" name="Shape 5"/>
+          <p:cNvSpPr/>
+          <p:nvPr/>
+        </p:nvSpPr>
+        <p:spPr>
+          <a:xfrm>
+            <a:off x="566928" y="1481328"/>
+            <a:ext cx="3472586" cy="2560320"/>
+          </a:xfrm>
+          <a:prstGeom prst="roundRect">
+            <a:avLst>
+              <a:gd name="adj" fmla="val 2857"/>
+            </a:avLst>
+          </a:prstGeom>
+          <a:solidFill>
+            <a:srgbClr val="F7FAFC"/>
+          </a:solidFill>
+          <a:ln w="10160">
+            <a:solidFill>
+              <a:srgbClr val="CBD5E0"/>
+            </a:solidFill>
+            <a:prstDash val="solid"/>
+          </a:ln>
+        </p:spPr>
+      </p:sp>
+      <p:sp>
+        <p:nvSpPr>
+          <p:cNvPr id="8" name="Shape 6"/>
+          <p:cNvSpPr/>
+          <p:nvPr/>
+        </p:nvSpPr>
+        <p:spPr>
+          <a:xfrm>
+            <a:off x="566928" y="1481328"/>
+            <a:ext cx="3472586" cy="54864"/>
+          </a:xfrm>
+          <a:prstGeom prst="rect">
+            <a:avLst/>
+          </a:prstGeom>
+          <a:solidFill>
+            <a:srgbClr val="B98A2E"/>
+          </a:solidFill>
+          <a:ln/>
+        </p:spPr>
+      </p:sp>
+      <p:sp>
+        <p:nvSpPr>
+          <p:cNvPr id="9" name="Shape 7"/>
+          <p:cNvSpPr/>
+          <p:nvPr/>
+        </p:nvSpPr>
+        <p:spPr>
+          <a:xfrm>
+            <a:off x="795528" y="1755648"/>
+            <a:ext cx="475488" cy="292608"/>
+          </a:xfrm>
+          <a:prstGeom prst="roundRect">
+            <a:avLst>
+              <a:gd name="adj" fmla="val 12500"/>
+            </a:avLst>
+          </a:prstGeom>
+          <a:solidFill>
+            <a:srgbClr val="D9B668"/>
+          </a:solidFill>
+          <a:ln/>
+        </p:spPr>
+      </p:sp>
+      <p:sp>
+        <p:nvSpPr>
+          <p:cNvPr id="10" name="Text 8"/>
+          <p:cNvSpPr/>
+          <p:nvPr/>
+        </p:nvSpPr>
+        <p:spPr>
+          <a:xfrm>
+            <a:off x="795528" y="1755648"/>
+            <a:ext cx="475488" cy="292608"/>
+          </a:xfrm>
+          <a:prstGeom prst="rect">
+            <a:avLst/>
+          </a:prstGeom>
+          <a:noFill/>
+          <a:ln/>
+        </p:spPr>
+        <p:txBody>
+          <a:bodyPr wrap="square" lIns="0" tIns="0" rIns="0" bIns="0" rtlCol="0" anchor="ctr"/>
+          <a:lstStyle/>
+          <a:p>
+            <a:pPr algn="ctr" indent="0" marL="0">
+              <a:buNone/>
+            </a:pPr>
+            <a:r>
+              <a:rPr lang="en-US" sz="1100" b="1" dirty="0">
+                <a:solidFill>
+                  <a:srgbClr val="977024"/>
+                </a:solidFill>
+                <a:latin typeface="Arial" pitchFamily="34" charset="0"/>
+                <a:ea typeface="Arial" pitchFamily="34" charset="-122"/>
+                <a:cs typeface="Arial" pitchFamily="34" charset="-120"/>
+              </a:rPr>
+              <a:t>01</a:t>
+            </a:r>
+            <a:endParaRPr lang="en-US" sz="1100" dirty="0"/>
+          </a:p>
+        </p:txBody>
+      </p:sp>
+      <p:sp>
+        <p:nvSpPr>
+          <p:cNvPr id="11" name="Text 9"/>
+          <p:cNvSpPr/>
+          <p:nvPr/>
+        </p:nvSpPr>
+        <p:spPr>
+          <a:xfrm>
+            <a:off x="795528" y="2194560"/>
+            <a:ext cx="3015386" cy="365760"/>
+          </a:xfrm>
+          <a:prstGeom prst="rect">
+            <a:avLst/>
+          </a:prstGeom>
+          <a:noFill/>
+          <a:ln/>
+        </p:spPr>
+        <p:txBody>
+          <a:bodyPr wrap="square" lIns="0" tIns="0" rIns="0" bIns="0" rtlCol="0" anchor="t"/>
+          <a:lstStyle/>
+          <a:p>
+            <a:pPr indent="0" marL="0">
+              <a:buNone/>
+            </a:pPr>
+            <a:r>
+              <a:rPr lang="en-US" sz="1500" b="1" dirty="0">
+                <a:solidFill>
+                  <a:srgbClr val="10161F"/>
+                </a:solidFill>
+                <a:latin typeface="Pretendard" pitchFamily="34" charset="0"/>
+                <a:ea typeface="Pretendard" pitchFamily="34" charset="-122"/>
+                <a:cs typeface="Pretendard" pitchFamily="34" charset="-120"/>
+              </a:rPr>
+              <a:t>원금 안전판 확보</a:t>
+            </a:r>
+            <a:endParaRPr lang="en-US" sz="1500" dirty="0"/>
+          </a:p>
+        </p:txBody>
+      </p:sp>
+      <p:sp>
+        <p:nvSpPr>
+          <p:cNvPr id="12" name="Shape 10"/>
+          <p:cNvSpPr/>
+          <p:nvPr/>
+        </p:nvSpPr>
+        <p:spPr>
+          <a:xfrm>
+            <a:off x="795528" y="2624328"/>
+            <a:ext cx="3015386" cy="0"/>
+          </a:xfrm>
+          <a:prstGeom prst="line">
+            <a:avLst/>
+          </a:prstGeom>
+          <a:noFill/>
+          <a:ln w="6350">
+            <a:solidFill>
+              <a:srgbClr val="CBD5E0"/>
+            </a:solidFill>
+            <a:prstDash val="solid"/>
+          </a:ln>
+        </p:spPr>
+      </p:sp>
+      <p:sp>
+        <p:nvSpPr>
+          <p:cNvPr id="13" name="Text 11"/>
+          <p:cNvSpPr/>
+          <p:nvPr/>
+        </p:nvSpPr>
+        <p:spPr>
+          <a:xfrm>
+            <a:off x="795528" y="2779776"/>
+            <a:ext cx="3015386" cy="1051560"/>
+          </a:xfrm>
+          <a:prstGeom prst="rect">
+            <a:avLst/>
+          </a:prstGeom>
+          <a:noFill/>
+          <a:ln/>
+        </p:spPr>
+        <p:txBody>
+          <a:bodyPr wrap="square" lIns="0" tIns="0" rIns="0" bIns="0" rtlCol="0" anchor="t"/>
+          <a:lstStyle/>
+          <a:p>
+            <a:pPr indent="0" marL="0">
+              <a:lnSpc>
+                <a:spcPct val="130000"/>
+              </a:lnSpc>
+              <a:buNone/>
+            </a:pPr>
+            <a:r>
+              <a:rPr lang="en-US" sz="1200" dirty="0">
+                <a:solidFill>
+                  <a:srgbClr val="10161F"/>
+                </a:solidFill>
+                <a:latin typeface="Pretendard" pitchFamily="34" charset="0"/>
+                <a:ea typeface="Pretendard" pitchFamily="34" charset="-122"/>
+                <a:cs typeface="Pretendard" pitchFamily="34" charset="-120"/>
+              </a:rPr>
+              <a:t>영등포권역의 핵심 입지로, 우량한 대지 지분 가치가 하방 경직성을 강력히 지지합니다.</a:t>
+            </a:r>
+            <a:endParaRPr lang="en-US" sz="1200" dirty="0"/>
+          </a:p>
+        </p:txBody>
+      </p:sp>
+      <p:sp>
+        <p:nvSpPr>
+          <p:cNvPr id="14" name="Shape 12"/>
+          <p:cNvSpPr/>
+          <p:nvPr/>
+        </p:nvSpPr>
+        <p:spPr>
+          <a:xfrm>
+            <a:off x="4359554" y="1481328"/>
+            <a:ext cx="3472586" cy="2560320"/>
+          </a:xfrm>
+          <a:prstGeom prst="roundRect">
+            <a:avLst>
+              <a:gd name="adj" fmla="val 2857"/>
+            </a:avLst>
+          </a:prstGeom>
+          <a:solidFill>
+            <a:srgbClr val="F7FAFC"/>
+          </a:solidFill>
+          <a:ln w="10160">
+            <a:solidFill>
+              <a:srgbClr val="CBD5E0"/>
+            </a:solidFill>
+            <a:prstDash val="solid"/>
+          </a:ln>
+        </p:spPr>
+      </p:sp>
+      <p:sp>
+        <p:nvSpPr>
+          <p:cNvPr id="15" name="Shape 13"/>
+          <p:cNvSpPr/>
+          <p:nvPr/>
+        </p:nvSpPr>
+        <p:spPr>
+          <a:xfrm>
+            <a:off x="4359554" y="1481328"/>
+            <a:ext cx="3472586" cy="54864"/>
+          </a:xfrm>
+          <a:prstGeom prst="rect">
+            <a:avLst/>
+          </a:prstGeom>
+          <a:solidFill>
+            <a:srgbClr val="B98A2E"/>
+          </a:solidFill>
+          <a:ln/>
+        </p:spPr>
+      </p:sp>
+      <p:sp>
+        <p:nvSpPr>
+          <p:cNvPr id="16" name="Shape 14"/>
+          <p:cNvSpPr/>
+          <p:nvPr/>
+        </p:nvSpPr>
+        <p:spPr>
+          <a:xfrm>
+            <a:off x="4588154" y="1755648"/>
+            <a:ext cx="475488" cy="292608"/>
+          </a:xfrm>
+          <a:prstGeom prst="roundRect">
+            <a:avLst>
+              <a:gd name="adj" fmla="val 12500"/>
+            </a:avLst>
+          </a:prstGeom>
+          <a:solidFill>
+            <a:srgbClr val="D9B668"/>
+          </a:solidFill>
+          <a:ln/>
+        </p:spPr>
+      </p:sp>
+      <p:sp>
+        <p:nvSpPr>
+          <p:cNvPr id="17" name="Text 15"/>
+          <p:cNvSpPr/>
+          <p:nvPr/>
+        </p:nvSpPr>
+        <p:spPr>
+          <a:xfrm>
+            <a:off x="4588154" y="1755648"/>
+            <a:ext cx="475488" cy="292608"/>
+          </a:xfrm>
+          <a:prstGeom prst="rect">
+            <a:avLst/>
+          </a:prstGeom>
+          <a:noFill/>
+          <a:ln/>
+        </p:spPr>
+        <p:txBody>
+          <a:bodyPr wrap="square" lIns="0" tIns="0" rIns="0" bIns="0" rtlCol="0" anchor="ctr"/>
+          <a:lstStyle/>
+          <a:p>
+            <a:pPr algn="ctr" indent="0" marL="0">
+              <a:buNone/>
+            </a:pPr>
+            <a:r>
+              <a:rPr lang="en-US" sz="1100" b="1" dirty="0">
+                <a:solidFill>
+                  <a:srgbClr val="977024"/>
+                </a:solidFill>
+                <a:latin typeface="Arial" pitchFamily="34" charset="0"/>
+                <a:ea typeface="Arial" pitchFamily="34" charset="-122"/>
+                <a:cs typeface="Arial" pitchFamily="34" charset="-120"/>
+              </a:rPr>
+              <a:t>02</a:t>
+            </a:r>
+            <a:endParaRPr lang="en-US" sz="1100" dirty="0"/>
+          </a:p>
+        </p:txBody>
+      </p:sp>
+      <p:sp>
+        <p:nvSpPr>
+          <p:cNvPr id="18" name="Text 16"/>
+          <p:cNvSpPr/>
+          <p:nvPr/>
+        </p:nvSpPr>
+        <p:spPr>
+          <a:xfrm>
+            <a:off x="4588154" y="2194560"/>
+            <a:ext cx="3015386" cy="365760"/>
+          </a:xfrm>
+          <a:prstGeom prst="rect">
+            <a:avLst/>
+          </a:prstGeom>
+          <a:noFill/>
+          <a:ln/>
+        </p:spPr>
+        <p:txBody>
+          <a:bodyPr wrap="square" lIns="0" tIns="0" rIns="0" bIns="0" rtlCol="0" anchor="t"/>
+          <a:lstStyle/>
+          <a:p>
+            <a:pPr indent="0" marL="0">
+              <a:buNone/>
+            </a:pPr>
+            <a:r>
+              <a:rPr lang="en-US" sz="1500" b="1" dirty="0">
+                <a:solidFill>
+                  <a:srgbClr val="10161F"/>
+                </a:solidFill>
+                <a:latin typeface="Pretendard" pitchFamily="34" charset="0"/>
+                <a:ea typeface="Pretendard" pitchFamily="34" charset="-122"/>
+                <a:cs typeface="Pretendard" pitchFamily="34" charset="-120"/>
+              </a:rPr>
+              <a:t>확실한 월 현금흐름</a:t>
+            </a:r>
+            <a:endParaRPr lang="en-US" sz="1500" dirty="0"/>
+          </a:p>
+        </p:txBody>
+      </p:sp>
+      <p:sp>
+        <p:nvSpPr>
+          <p:cNvPr id="19" name="Shape 17"/>
+          <p:cNvSpPr/>
+          <p:nvPr/>
+        </p:nvSpPr>
+        <p:spPr>
+          <a:xfrm>
+            <a:off x="4588154" y="2624328"/>
+            <a:ext cx="3015386" cy="0"/>
+          </a:xfrm>
+          <a:prstGeom prst="line">
+            <a:avLst/>
+          </a:prstGeom>
+          <a:noFill/>
+          <a:ln w="6350">
+            <a:solidFill>
+              <a:srgbClr val="CBD5E0"/>
+            </a:solidFill>
+            <a:prstDash val="solid"/>
+          </a:ln>
+        </p:spPr>
+      </p:sp>
+      <p:sp>
+        <p:nvSpPr>
+          <p:cNvPr id="20" name="Text 18"/>
+          <p:cNvSpPr/>
+          <p:nvPr/>
+        </p:nvSpPr>
+        <p:spPr>
+          <a:xfrm>
+            <a:off x="4588154" y="2779776"/>
+            <a:ext cx="3015386" cy="1051560"/>
+          </a:xfrm>
+          <a:prstGeom prst="rect">
+            <a:avLst/>
+          </a:prstGeom>
+          <a:noFill/>
+          <a:ln/>
+        </p:spPr>
+        <p:txBody>
+          <a:bodyPr wrap="square" lIns="0" tIns="0" rIns="0" bIns="0" rtlCol="0" anchor="t"/>
+          <a:lstStyle/>
+          <a:p>
+            <a:pPr indent="0" marL="0">
+              <a:lnSpc>
+                <a:spcPct val="130000"/>
+              </a:lnSpc>
+              <a:buNone/>
+            </a:pPr>
+            <a:r>
+              <a:rPr lang="en-US" sz="1200" dirty="0">
+                <a:solidFill>
+                  <a:srgbClr val="10161F"/>
+                </a:solidFill>
+                <a:latin typeface="Pretendard" pitchFamily="34" charset="0"/>
+                <a:ea typeface="Pretendard" pitchFamily="34" charset="-122"/>
+                <a:cs typeface="Pretendard" pitchFamily="34" charset="-120"/>
+              </a:rPr>
+              <a:t>우량 테넌트 만실 운영 및 장기 임대차 구조를 기반으로 매월 안정적인 순영업소득(NOI) 창출이 기대됩니다.</a:t>
+            </a:r>
+            <a:endParaRPr lang="en-US" sz="1200" dirty="0"/>
+          </a:p>
+        </p:txBody>
+      </p:sp>
+      <p:sp>
+        <p:nvSpPr>
+          <p:cNvPr id="21" name="Shape 19"/>
+          <p:cNvSpPr/>
+          <p:nvPr/>
+        </p:nvSpPr>
+        <p:spPr>
+          <a:xfrm>
+            <a:off x="8152181" y="1481328"/>
+            <a:ext cx="3472586" cy="2560320"/>
+          </a:xfrm>
+          <a:prstGeom prst="roundRect">
+            <a:avLst>
+              <a:gd name="adj" fmla="val 2857"/>
+            </a:avLst>
+          </a:prstGeom>
+          <a:solidFill>
+            <a:srgbClr val="F7FAFC"/>
+          </a:solidFill>
+          <a:ln w="10160">
+            <a:solidFill>
+              <a:srgbClr val="CBD5E0"/>
+            </a:solidFill>
+            <a:prstDash val="solid"/>
+          </a:ln>
+        </p:spPr>
+      </p:sp>
+      <p:sp>
+        <p:nvSpPr>
+          <p:cNvPr id="22" name="Shape 20"/>
+          <p:cNvSpPr/>
+          <p:nvPr/>
+        </p:nvSpPr>
+        <p:spPr>
+          <a:xfrm>
+            <a:off x="8152181" y="1481328"/>
+            <a:ext cx="3472586" cy="54864"/>
+          </a:xfrm>
+          <a:prstGeom prst="rect">
+            <a:avLst/>
+          </a:prstGeom>
+          <a:solidFill>
+            <a:srgbClr val="B98A2E"/>
+          </a:solidFill>
+          <a:ln/>
+        </p:spPr>
+      </p:sp>
+      <p:sp>
+        <p:nvSpPr>
+          <p:cNvPr id="23" name="Shape 21"/>
+          <p:cNvSpPr/>
+          <p:nvPr/>
+        </p:nvSpPr>
+        <p:spPr>
+          <a:xfrm>
+            <a:off x="8380781" y="1755648"/>
+            <a:ext cx="475488" cy="292608"/>
+          </a:xfrm>
+          <a:prstGeom prst="roundRect">
+            <a:avLst>
+              <a:gd name="adj" fmla="val 12500"/>
+            </a:avLst>
+          </a:prstGeom>
+          <a:solidFill>
+            <a:srgbClr val="D9B668"/>
+          </a:solidFill>
+          <a:ln/>
+        </p:spPr>
+      </p:sp>
+      <p:sp>
+        <p:nvSpPr>
+          <p:cNvPr id="24" name="Text 22"/>
+          <p:cNvSpPr/>
+          <p:nvPr/>
+        </p:nvSpPr>
+        <p:spPr>
+          <a:xfrm>
+            <a:off x="8380781" y="1755648"/>
+            <a:ext cx="475488" cy="292608"/>
+          </a:xfrm>
+          <a:prstGeom prst="rect">
+            <a:avLst/>
+          </a:prstGeom>
+          <a:noFill/>
+          <a:ln/>
+        </p:spPr>
+        <p:txBody>
+          <a:bodyPr wrap="square" lIns="0" tIns="0" rIns="0" bIns="0" rtlCol="0" anchor="ctr"/>
+          <a:lstStyle/>
+          <a:p>
+            <a:pPr algn="ctr" indent="0" marL="0">
+              <a:buNone/>
+            </a:pPr>
+            <a:r>
+              <a:rPr lang="en-US" sz="1100" b="1" dirty="0">
+                <a:solidFill>
+                  <a:srgbClr val="977024"/>
+                </a:solidFill>
+                <a:latin typeface="Arial" pitchFamily="34" charset="0"/>
+                <a:ea typeface="Arial" pitchFamily="34" charset="-122"/>
+                <a:cs typeface="Arial" pitchFamily="34" charset="-120"/>
+              </a:rPr>
+              <a:t>03</a:t>
+            </a:r>
+            <a:endParaRPr lang="en-US" sz="1100" dirty="0"/>
+          </a:p>
+        </p:txBody>
+      </p:sp>
+      <p:sp>
+        <p:nvSpPr>
+          <p:cNvPr id="25" name="Text 23"/>
+          <p:cNvSpPr/>
+          <p:nvPr/>
+        </p:nvSpPr>
+        <p:spPr>
+          <a:xfrm>
+            <a:off x="8380781" y="2194560"/>
+            <a:ext cx="3015386" cy="365760"/>
+          </a:xfrm>
+          <a:prstGeom prst="rect">
+            <a:avLst/>
+          </a:prstGeom>
+          <a:noFill/>
+          <a:ln/>
+        </p:spPr>
+        <p:txBody>
+          <a:bodyPr wrap="square" lIns="0" tIns="0" rIns="0" bIns="0" rtlCol="0" anchor="t"/>
+          <a:lstStyle/>
+          <a:p>
+            <a:pPr indent="0" marL="0">
+              <a:buNone/>
+            </a:pPr>
+            <a:r>
+              <a:rPr lang="en-US" sz="1500" b="1" dirty="0">
+                <a:solidFill>
+                  <a:srgbClr val="10161F"/>
+                </a:solidFill>
+                <a:latin typeface="Pretendard" pitchFamily="34" charset="0"/>
+                <a:ea typeface="Pretendard" pitchFamily="34" charset="-122"/>
+                <a:cs typeface="Pretendard" pitchFamily="34" charset="-120"/>
+              </a:rPr>
+              <a:t>가치 상승 및 출구 전략</a:t>
+            </a:r>
+            <a:endParaRPr lang="en-US" sz="1500" dirty="0"/>
+          </a:p>
+        </p:txBody>
+      </p:sp>
+      <p:sp>
+        <p:nvSpPr>
+          <p:cNvPr id="26" name="Shape 24"/>
+          <p:cNvSpPr/>
+          <p:nvPr/>
+        </p:nvSpPr>
+        <p:spPr>
+          <a:xfrm>
+            <a:off x="8380781" y="2624328"/>
+            <a:ext cx="3015386" cy="0"/>
+          </a:xfrm>
+          <a:prstGeom prst="line">
+            <a:avLst/>
+          </a:prstGeom>
+          <a:noFill/>
+          <a:ln w="6350">
+            <a:solidFill>
+              <a:srgbClr val="CBD5E0"/>
+            </a:solidFill>
+            <a:prstDash val="solid"/>
+          </a:ln>
+        </p:spPr>
+      </p:sp>
+      <p:sp>
+        <p:nvSpPr>
+          <p:cNvPr id="27" name="Text 25"/>
+          <p:cNvSpPr/>
+          <p:nvPr/>
+        </p:nvSpPr>
+        <p:spPr>
+          <a:xfrm>
+            <a:off x="8380781" y="2779776"/>
+            <a:ext cx="3015386" cy="1051560"/>
+          </a:xfrm>
+          <a:prstGeom prst="rect">
+            <a:avLst/>
+          </a:prstGeom>
+          <a:noFill/>
+          <a:ln/>
+        </p:spPr>
+        <p:txBody>
+          <a:bodyPr wrap="square" lIns="0" tIns="0" rIns="0" bIns="0" rtlCol="0" anchor="t"/>
+          <a:lstStyle/>
+          <a:p>
+            <a:pPr indent="0" marL="0">
+              <a:lnSpc>
+                <a:spcPct val="130000"/>
+              </a:lnSpc>
+              <a:buNone/>
+            </a:pPr>
+            <a:r>
+              <a:rPr lang="en-US" sz="1200" dirty="0">
+                <a:solidFill>
+                  <a:srgbClr val="10161F"/>
+                </a:solidFill>
+                <a:latin typeface="Pretendard" pitchFamily="34" charset="0"/>
+                <a:ea typeface="Pretendard" pitchFamily="34" charset="-122"/>
+                <a:cs typeface="Pretendard" pitchFamily="34" charset="-120"/>
+              </a:rPr>
+              <a:t>현행 공법 여력을 활용한 밸류업 기회와 더불어 향후 권역 지가 상승에 따른 시세차익 실현이 유력합니다.</a:t>
+            </a:r>
+            <a:endParaRPr lang="en-US" sz="1200" dirty="0"/>
+          </a:p>
+        </p:txBody>
+      </p:sp>
+      <p:graphicFrame>
+        <p:nvGraphicFramePr>
+          <p:cNvPr id="9" name="Table 0"/>
+          <p:cNvGraphicFramePr>
+            <a:graphicFrameLocks noGrp="1"/>
+          </p:cNvGraphicFramePr>
+          <p:nvPr>
+            <p:extLst>
+              <p:ext uri="{D42A27DB-BD31-4B8C-83A1-F6EECF244321}">
+                <p14:modId xmlns:p14="http://schemas.microsoft.com/office/powerpoint/2010/main" val="1579011935"/>
+              </p:ext>
+            </p:extLst>
+          </p:nvPr>
+        </p:nvGraphicFramePr>
+        <p:xfrm>
+          <a:off x="566928" y="4178808"/>
+          <a:ext cx="11057839" cy="914400"/>
+        </p:xfrm>
+        <a:graphic>
+          <a:graphicData uri="http://schemas.openxmlformats.org/drawingml/2006/table">
+            <a:tbl>
+              <a:tblPr/>
+              <a:tblGrid>
+                <a:gridCol w="3685946"/>
+                <a:gridCol w="3685946"/>
+                <a:gridCol w="3685946"/>
+              </a:tblGrid>
+              <a:tr h="329184">
+                <a:tc>
+                  <a:txBody>
+                    <a:bodyPr/>
+                    <a:lstStyle/>
+                    <a:p>
+                      <a:pPr indent="0" marL="0">
+                        <a:buNone/>
+                      </a:pPr>
+                      <a:r>
+                        <a:rPr lang="en-US" sz="1050" b="1" dirty="0">
+                          <a:solidFill>
+                            <a:srgbClr val="718096"/>
+                          </a:solidFill>
+                          <a:latin typeface="Pretendard" pitchFamily="34" charset="0"/>
+                          <a:ea typeface="Pretendard" pitchFamily="34" charset="-122"/>
+                          <a:cs typeface="Pretendard" pitchFamily="34" charset="-120"/>
+                        </a:rPr>
+                        <a:t>유형</a:t>
+                      </a:r>
+                      <a:endParaRPr lang="en-US" sz="1050" dirty="0">
+                        <a:latin typeface="Pretendard" charset="0"/>
+                        <a:ea typeface="Pretendard" charset="0"/>
+                        <a:cs typeface="Pretendard" charset="0"/>
+                      </a:endParaRPr>
+                    </a:p>
+                  </a:txBody>
+                  <a:tcPr marL="50800" marR="50800" marT="25400" marB="25400" anchor="ctr">
+                    <a:lnL w="3810" cap="flat" cmpd="sng" algn="ctr">
+                      <a:solidFill>
+                        <a:srgbClr val="CBD5E0"/>
+                      </a:solidFill>
+                      <a:prstDash val="solid"/>
+                      <a:round/>
+                      <a:headEnd type="none" w="med" len="med"/>
+                      <a:tailEnd type="none" w="med" len="med"/>
+                    </a:lnL>
+                    <a:lnR w="3810" cap="flat" cmpd="sng" algn="ctr">
+                      <a:solidFill>
+                        <a:srgbClr val="CBD5E0"/>
+                      </a:solidFill>
+                      <a:prstDash val="solid"/>
+                      <a:round/>
+                      <a:headEnd type="none" w="med" len="med"/>
+                      <a:tailEnd type="none" w="med" len="med"/>
+                    </a:lnR>
+                    <a:lnT w="3810" cap="flat" cmpd="sng" algn="ctr">
+                      <a:solidFill>
+                        <a:srgbClr val="CBD5E0"/>
+                      </a:solidFill>
+                      <a:prstDash val="solid"/>
+                      <a:round/>
+                      <a:headEnd type="none" w="med" len="med"/>
+                      <a:tailEnd type="none" w="med" len="med"/>
+                    </a:lnT>
+                    <a:lnB w="3810" cap="flat" cmpd="sng" algn="ctr">
+                      <a:solidFill>
+                        <a:srgbClr val="CBD5E0"/>
+                      </a:solidFill>
+                      <a:prstDash val="solid"/>
+                      <a:round/>
+                      <a:headEnd type="none" w="med" len="med"/>
+                      <a:tailEnd type="none" w="med" len="med"/>
+                    </a:lnB>
+                    <a:solidFill>
+                      <a:srgbClr val="F7FAFC"/>
+                    </a:solidFill>
+                  </a:tcPr>
+                </a:tc>
+                <a:tc>
+                  <a:txBody>
+                    <a:bodyPr/>
+                    <a:lstStyle/>
+                    <a:p>
+                      <a:pPr indent="0" marL="0">
+                        <a:buNone/>
+                      </a:pPr>
+                      <a:r>
+                        <a:rPr lang="en-US" sz="1050" b="1" dirty="0">
+                          <a:solidFill>
+                            <a:srgbClr val="718096"/>
+                          </a:solidFill>
+                          <a:latin typeface="Pretendard" pitchFamily="34" charset="0"/>
+                          <a:ea typeface="Pretendard" pitchFamily="34" charset="-122"/>
+                          <a:cs typeface="Pretendard" pitchFamily="34" charset="-120"/>
+                        </a:rPr>
+                        <a:t>적합도</a:t>
+                      </a:r>
+                      <a:endParaRPr lang="en-US" sz="1050" dirty="0">
+                        <a:latin typeface="Pretendard" charset="0"/>
+                        <a:ea typeface="Pretendard" charset="0"/>
+                        <a:cs typeface="Pretendard" charset="0"/>
+                      </a:endParaRPr>
+                    </a:p>
+                  </a:txBody>
+                  <a:tcPr marL="50800" marR="50800" marT="25400" marB="25400" anchor="ctr">
+                    <a:lnL w="3810" cap="flat" cmpd="sng" algn="ctr">
+                      <a:solidFill>
+                        <a:srgbClr val="CBD5E0"/>
+                      </a:solidFill>
+                      <a:prstDash val="solid"/>
+                      <a:round/>
+                      <a:headEnd type="none" w="med" len="med"/>
+                      <a:tailEnd type="none" w="med" len="med"/>
+                    </a:lnL>
+                    <a:lnR w="3810" cap="flat" cmpd="sng" algn="ctr">
+                      <a:solidFill>
+                        <a:srgbClr val="CBD5E0"/>
+                      </a:solidFill>
+                      <a:prstDash val="solid"/>
+                      <a:round/>
+                      <a:headEnd type="none" w="med" len="med"/>
+                      <a:tailEnd type="none" w="med" len="med"/>
+                    </a:lnR>
+                    <a:lnT w="3810" cap="flat" cmpd="sng" algn="ctr">
+                      <a:solidFill>
+                        <a:srgbClr val="CBD5E0"/>
+                      </a:solidFill>
+                      <a:prstDash val="solid"/>
+                      <a:round/>
+                      <a:headEnd type="none" w="med" len="med"/>
+                      <a:tailEnd type="none" w="med" len="med"/>
+                    </a:lnT>
+                    <a:lnB w="3810" cap="flat" cmpd="sng" algn="ctr">
+                      <a:solidFill>
+                        <a:srgbClr val="CBD5E0"/>
+                      </a:solidFill>
+                      <a:prstDash val="solid"/>
+                      <a:round/>
+                      <a:headEnd type="none" w="med" len="med"/>
+                      <a:tailEnd type="none" w="med" len="med"/>
+                    </a:lnB>
+                    <a:solidFill>
+                      <a:srgbClr val="F7FAFC"/>
+                    </a:solidFill>
+                  </a:tcPr>
+                </a:tc>
+                <a:tc>
+                  <a:txBody>
+                    <a:bodyPr/>
+                    <a:lstStyle/>
+                    <a:p>
+                      <a:pPr indent="0" marL="0">
+                        <a:buNone/>
+                      </a:pPr>
+                      <a:r>
+                        <a:rPr lang="en-US" sz="1050" b="1" dirty="0">
+                          <a:solidFill>
+                            <a:srgbClr val="718096"/>
+                          </a:solidFill>
+                          <a:latin typeface="Pretendard" pitchFamily="34" charset="0"/>
+                          <a:ea typeface="Pretendard" pitchFamily="34" charset="-122"/>
+                          <a:cs typeface="Pretendard" pitchFamily="34" charset="-120"/>
+                        </a:rPr>
+                        <a:t>이유</a:t>
+                      </a:r>
+                      <a:endParaRPr lang="en-US" sz="1050" dirty="0">
+                        <a:latin typeface="Pretendard" charset="0"/>
+                        <a:ea typeface="Pretendard" charset="0"/>
+                        <a:cs typeface="Pretendard" charset="0"/>
+                      </a:endParaRPr>
+                    </a:p>
+                  </a:txBody>
+                  <a:tcPr marL="50800" marR="50800" marT="25400" marB="25400" anchor="ctr">
+                    <a:lnL w="3810" cap="flat" cmpd="sng" algn="ctr">
+                      <a:solidFill>
+                        <a:srgbClr val="CBD5E0"/>
+                      </a:solidFill>
+                      <a:prstDash val="solid"/>
+                      <a:round/>
+                      <a:headEnd type="none" w="med" len="med"/>
+                      <a:tailEnd type="none" w="med" len="med"/>
+                    </a:lnL>
+                    <a:lnR w="3810" cap="flat" cmpd="sng" algn="ctr">
+                      <a:solidFill>
+                        <a:srgbClr val="CBD5E0"/>
+                      </a:solidFill>
+                      <a:prstDash val="solid"/>
+                      <a:round/>
+                      <a:headEnd type="none" w="med" len="med"/>
+                      <a:tailEnd type="none" w="med" len="med"/>
+                    </a:lnR>
+                    <a:lnT w="3810" cap="flat" cmpd="sng" algn="ctr">
+                      <a:solidFill>
+                        <a:srgbClr val="CBD5E0"/>
+                      </a:solidFill>
+                      <a:prstDash val="solid"/>
+                      <a:round/>
+                      <a:headEnd type="none" w="med" len="med"/>
+                      <a:tailEnd type="none" w="med" len="med"/>
+                    </a:lnT>
+                    <a:lnB w="3810" cap="flat" cmpd="sng" algn="ctr">
+                      <a:solidFill>
+                        <a:srgbClr val="CBD5E0"/>
+                      </a:solidFill>
+                      <a:prstDash val="solid"/>
+                      <a:round/>
+                      <a:headEnd type="none" w="med" len="med"/>
+                      <a:tailEnd type="none" w="med" len="med"/>
+                    </a:lnB>
+                    <a:solidFill>
+                      <a:srgbClr val="F7FAFC"/>
+                    </a:solidFill>
+                  </a:tcPr>
+                </a:tc>
+              </a:tr>
+              <a:tr h="329184">
+                <a:tc>
+                  <a:txBody>
+                    <a:bodyPr/>
+                    <a:lstStyle/>
+                    <a:p>
+                      <a:pPr indent="0" marL="0">
+                        <a:buNone/>
+                      </a:pPr>
+                      <a:r>
+                        <a:rPr lang="en-US" sz="1050" b="1" dirty="0">
+                          <a:solidFill>
+                            <a:srgbClr val="10161F"/>
+                          </a:solidFill>
+                          <a:latin typeface="Pretendard" pitchFamily="34" charset="0"/>
+                          <a:ea typeface="Pretendard" pitchFamily="34" charset="-122"/>
+                          <a:cs typeface="Pretendard" pitchFamily="34" charset="-120"/>
+                        </a:rPr>
+                        <a:t>(임대수익)</a:t>
+                      </a:r>
+                      <a:endParaRPr lang="en-US" sz="1050" dirty="0">
+                        <a:latin typeface="Pretendard" charset="0"/>
+                        <a:ea typeface="Pretendard" charset="0"/>
+                        <a:cs typeface="Pretendard" charset="0"/>
+                      </a:endParaRPr>
+                    </a:p>
+                  </a:txBody>
+                  <a:tcPr marL="50800" marR="50800" marT="25400" marB="25400" anchor="ctr">
+                    <a:lnL w="3810" cap="flat" cmpd="sng" algn="ctr">
+                      <a:solidFill>
+                        <a:srgbClr val="CBD5E0"/>
+                      </a:solidFill>
+                      <a:prstDash val="solid"/>
+                      <a:round/>
+                      <a:headEnd type="none" w="med" len="med"/>
+                      <a:tailEnd type="none" w="med" len="med"/>
+                    </a:lnL>
+                    <a:lnR w="3810" cap="flat" cmpd="sng" algn="ctr">
+                      <a:solidFill>
+                        <a:srgbClr val="CBD5E0"/>
+                      </a:solidFill>
+                      <a:prstDash val="solid"/>
+                      <a:round/>
+                      <a:headEnd type="none" w="med" len="med"/>
+                      <a:tailEnd type="none" w="med" len="med"/>
+                    </a:lnR>
+                    <a:lnT w="3810" cap="flat" cmpd="sng" algn="ctr">
+                      <a:solidFill>
+                        <a:srgbClr val="CBD5E0"/>
+                      </a:solidFill>
+                      <a:prstDash val="solid"/>
+                      <a:round/>
+                      <a:headEnd type="none" w="med" len="med"/>
+                      <a:tailEnd type="none" w="med" len="med"/>
+                    </a:lnT>
+                    <a:lnB w="3810" cap="flat" cmpd="sng" algn="ctr">
+                      <a:solidFill>
+                        <a:srgbClr val="CBD5E0"/>
+                      </a:solidFill>
+                      <a:prstDash val="solid"/>
+                      <a:round/>
+                      <a:headEnd type="none" w="med" len="med"/>
+                      <a:tailEnd type="none" w="med" len="med"/>
+                    </a:lnB>
+                    <a:solidFill>
+                      <a:srgbClr val="FFFFFF"/>
+                    </a:solidFill>
+                  </a:tcPr>
+                </a:tc>
+                <a:tc>
+                  <a:txBody>
+                    <a:bodyPr/>
+                    <a:lstStyle/>
+                    <a:p>
+                      <a:pPr indent="0" marL="0">
+                        <a:buNone/>
+                      </a:pPr>
+                      <a:r>
+                        <a:rPr lang="en-US" sz="1050" dirty="0">
+                          <a:solidFill>
+                            <a:srgbClr val="10161F"/>
+                          </a:solidFill>
+                          <a:latin typeface="Pretendard" pitchFamily="34" charset="0"/>
+                          <a:ea typeface="Pretendard" pitchFamily="34" charset="-122"/>
+                          <a:cs typeface="Pretendard" pitchFamily="34" charset="-120"/>
+                        </a:rPr>
+                        <a:t>★★★★★</a:t>
+                      </a:r>
+                      <a:endParaRPr lang="en-US" sz="1050" dirty="0">
+                        <a:latin typeface="Pretendard" charset="0"/>
+                        <a:ea typeface="Pretendard" charset="0"/>
+                        <a:cs typeface="Pretendard" charset="0"/>
+                      </a:endParaRPr>
+                    </a:p>
+                  </a:txBody>
+                  <a:tcPr marL="50800" marR="50800" marT="25400" marB="25400" anchor="ctr">
+                    <a:lnL w="3810" cap="flat" cmpd="sng" algn="ctr">
+                      <a:solidFill>
+                        <a:srgbClr val="CBD5E0"/>
+                      </a:solidFill>
+                      <a:prstDash val="solid"/>
+                      <a:round/>
+                      <a:headEnd type="none" w="med" len="med"/>
+                      <a:tailEnd type="none" w="med" len="med"/>
+                    </a:lnL>
+                    <a:lnR w="3810" cap="flat" cmpd="sng" algn="ctr">
+                      <a:solidFill>
+                        <a:srgbClr val="CBD5E0"/>
+                      </a:solidFill>
+                      <a:prstDash val="solid"/>
+                      <a:round/>
+                      <a:headEnd type="none" w="med" len="med"/>
+                      <a:tailEnd type="none" w="med" len="med"/>
+                    </a:lnR>
+                    <a:lnT w="3810" cap="flat" cmpd="sng" algn="ctr">
+                      <a:solidFill>
+                        <a:srgbClr val="CBD5E0"/>
+                      </a:solidFill>
+                      <a:prstDash val="solid"/>
+                      <a:round/>
+                      <a:headEnd type="none" w="med" len="med"/>
+                      <a:tailEnd type="none" w="med" len="med"/>
+                    </a:lnT>
+                    <a:lnB w="3810" cap="flat" cmpd="sng" algn="ctr">
+                      <a:solidFill>
+                        <a:srgbClr val="CBD5E0"/>
+                      </a:solidFill>
+                      <a:prstDash val="solid"/>
+                      <a:round/>
+                      <a:headEnd type="none" w="med" len="med"/>
+                      <a:tailEnd type="none" w="med" len="med"/>
+                    </a:lnB>
+                    <a:solidFill>
+                      <a:srgbClr val="FFFFFF"/>
+                    </a:solidFill>
+                  </a:tcPr>
+                </a:tc>
+                <a:tc>
+                  <a:txBody>
+                    <a:bodyPr/>
+                    <a:lstStyle/>
+                    <a:p>
+                      <a:pPr indent="0" marL="0">
+                        <a:buNone/>
+                      </a:pPr>
+                      <a:r>
+                        <a:rPr lang="en-US" sz="1050" dirty="0">
+                          <a:solidFill>
+                            <a:srgbClr val="10161F"/>
+                          </a:solidFill>
+                          <a:latin typeface="Pretendard" pitchFamily="34" charset="0"/>
+                          <a:ea typeface="Pretendard" pitchFamily="34" charset="-122"/>
+                          <a:cs typeface="Pretendard" pitchFamily="34" charset="-120"/>
+                        </a:rPr>
+                        <a:t>소형 </a:t>
+                      </a:r>
+                      <a:pPr indent="0" marL="0">
+                        <a:buNone/>
+                      </a:pPr>
+                      <a:r>
+                        <a:rPr lang="en-US" sz="1050" dirty="0">
+                          <a:solidFill>
+                            <a:srgbClr val="10161F"/>
+                          </a:solidFill>
+                          <a:latin typeface="Pretendard" pitchFamily="34" charset="0"/>
+                          <a:ea typeface="Pretendard" pitchFamily="34" charset="-122"/>
+                          <a:cs typeface="Pretendard" pitchFamily="34" charset="-120"/>
+                        </a:rPr>
+                        <a:t>빌딩 </a:t>
+                      </a:r>
+                      <a:pPr indent="0" marL="0">
+                        <a:buNone/>
+                      </a:pPr>
+                      <a:r>
+                        <a:rPr lang="en-US" sz="1050" dirty="0">
+                          <a:solidFill>
+                            <a:srgbClr val="10161F"/>
+                          </a:solidFill>
+                          <a:latin typeface="Pretendard" pitchFamily="34" charset="0"/>
+                          <a:ea typeface="Pretendard" pitchFamily="34" charset="-122"/>
+                          <a:cs typeface="Pretendard" pitchFamily="34" charset="-120"/>
+                        </a:rPr>
+                        <a:t>안정 </a:t>
+                      </a:r>
+                      <a:pPr indent="0" marL="0">
+                        <a:buNone/>
+                      </a:pPr>
+                      <a:r>
+                        <a:rPr lang="en-US" sz="1050" dirty="0">
+                          <a:solidFill>
+                            <a:srgbClr val="10161F"/>
+                          </a:solidFill>
+                          <a:latin typeface="Pretendard" pitchFamily="34" charset="0"/>
+                          <a:ea typeface="Pretendard" pitchFamily="34" charset="-122"/>
+                          <a:cs typeface="Pretendard" pitchFamily="34" charset="-120"/>
+                        </a:rPr>
+                        <a:t>수익 </a:t>
+                      </a:r>
+                      <a:pPr indent="0" marL="0">
+                        <a:buNone/>
+                      </a:pPr>
+                      <a:r>
+                        <a:rPr lang="en-US" sz="1050" dirty="0">
+                          <a:solidFill>
+                            <a:srgbClr val="10161F"/>
+                          </a:solidFill>
+                          <a:latin typeface="Pretendard" pitchFamily="34" charset="0"/>
+                          <a:ea typeface="Pretendard" pitchFamily="34" charset="-122"/>
+                          <a:cs typeface="Pretendard" pitchFamily="34" charset="-120"/>
+                        </a:rPr>
+                        <a:t>최적</a:t>
+                      </a:r>
+                      <a:endParaRPr lang="en-US" sz="1050" dirty="0">
+                        <a:latin typeface="Pretendard" charset="0"/>
+                        <a:ea typeface="Pretendard" charset="0"/>
+                        <a:cs typeface="Pretendard" charset="0"/>
+                      </a:endParaRPr>
+                    </a:p>
+                  </a:txBody>
+                  <a:tcPr marL="50800" marR="50800" marT="25400" marB="25400" anchor="ctr">
+                    <a:lnL w="3810" cap="flat" cmpd="sng" algn="ctr">
+                      <a:solidFill>
+                        <a:srgbClr val="CBD5E0"/>
+                      </a:solidFill>
+                      <a:prstDash val="solid"/>
+                      <a:round/>
+                      <a:headEnd type="none" w="med" len="med"/>
+                      <a:tailEnd type="none" w="med" len="med"/>
+                    </a:lnL>
+                    <a:lnR w="3810" cap="flat" cmpd="sng" algn="ctr">
+                      <a:solidFill>
+                        <a:srgbClr val="CBD5E0"/>
+                      </a:solidFill>
+                      <a:prstDash val="solid"/>
+                      <a:round/>
+                      <a:headEnd type="none" w="med" len="med"/>
+                      <a:tailEnd type="none" w="med" len="med"/>
+                    </a:lnR>
+                    <a:lnT w="3810" cap="flat" cmpd="sng" algn="ctr">
+                      <a:solidFill>
+                        <a:srgbClr val="CBD5E0"/>
+                      </a:solidFill>
+                      <a:prstDash val="solid"/>
+                      <a:round/>
+                      <a:headEnd type="none" w="med" len="med"/>
+                      <a:tailEnd type="none" w="med" len="med"/>
+                    </a:lnT>
+                    <a:lnB w="3810" cap="flat" cmpd="sng" algn="ctr">
+                      <a:solidFill>
+                        <a:srgbClr val="CBD5E0"/>
+                      </a:solidFill>
+                      <a:prstDash val="solid"/>
+                      <a:round/>
+                      <a:headEnd type="none" w="med" len="med"/>
+                      <a:tailEnd type="none" w="med" len="med"/>
+                    </a:lnB>
+                    <a:solidFill>
+                      <a:srgbClr val="FFFFFF"/>
+                    </a:solidFill>
+                  </a:tcPr>
+                </a:tc>
+              </a:tr>
+              <a:tr h="329184">
+                <a:tc>
+                  <a:txBody>
+                    <a:bodyPr/>
+                    <a:lstStyle/>
+                    <a:p>
+                      <a:pPr indent="0" marL="0">
+                        <a:buNone/>
+                      </a:pPr>
+                      <a:r>
+                        <a:rPr lang="en-US" sz="1050" b="1" dirty="0">
+                          <a:solidFill>
+                            <a:srgbClr val="10161F"/>
+                          </a:solidFill>
+                          <a:latin typeface="Pretendard" pitchFamily="34" charset="0"/>
+                          <a:ea typeface="Pretendard" pitchFamily="34" charset="-122"/>
+                          <a:cs typeface="Pretendard" pitchFamily="34" charset="-120"/>
+                        </a:rPr>
+                        <a:t>법인 </a:t>
+                      </a:r>
+                      <a:pPr indent="0" marL="0">
+                        <a:buNone/>
+                      </a:pPr>
+                      <a:r>
+                        <a:rPr lang="en-US" sz="1050" b="1" dirty="0">
+                          <a:solidFill>
+                            <a:srgbClr val="10161F"/>
+                          </a:solidFill>
+                          <a:latin typeface="Pretendard" pitchFamily="34" charset="0"/>
+                          <a:ea typeface="Pretendard" pitchFamily="34" charset="-122"/>
+                          <a:cs typeface="Pretendard" pitchFamily="34" charset="-120"/>
+                        </a:rPr>
+                        <a:t>사옥 </a:t>
+                      </a:r>
+                      <a:pPr indent="0" marL="0">
+                        <a:buNone/>
+                      </a:pPr>
+                      <a:r>
+                        <a:rPr lang="en-US" sz="1050" b="1" dirty="0">
+                          <a:solidFill>
+                            <a:srgbClr val="10161F"/>
+                          </a:solidFill>
+                          <a:latin typeface="Pretendard" pitchFamily="34" charset="0"/>
+                          <a:ea typeface="Pretendard" pitchFamily="34" charset="-122"/>
+                          <a:cs typeface="Pretendard" pitchFamily="34" charset="-120"/>
+                        </a:rPr>
+                        <a:t>이전</a:t>
+                      </a:r>
+                      <a:endParaRPr lang="en-US" sz="1050" dirty="0">
+                        <a:latin typeface="Pretendard" charset="0"/>
+                        <a:ea typeface="Pretendard" charset="0"/>
+                        <a:cs typeface="Pretendard" charset="0"/>
+                      </a:endParaRPr>
+                    </a:p>
+                  </a:txBody>
+                  <a:tcPr marL="50800" marR="50800" marT="25400" marB="25400" anchor="ctr">
+                    <a:lnL w="3810" cap="flat" cmpd="sng" algn="ctr">
+                      <a:solidFill>
+                        <a:srgbClr val="CBD5E0"/>
+                      </a:solidFill>
+                      <a:prstDash val="solid"/>
+                      <a:round/>
+                      <a:headEnd type="none" w="med" len="med"/>
+                      <a:tailEnd type="none" w="med" len="med"/>
+                    </a:lnL>
+                    <a:lnR w="3810" cap="flat" cmpd="sng" algn="ctr">
+                      <a:solidFill>
+                        <a:srgbClr val="CBD5E0"/>
+                      </a:solidFill>
+                      <a:prstDash val="solid"/>
+                      <a:round/>
+                      <a:headEnd type="none" w="med" len="med"/>
+                      <a:tailEnd type="none" w="med" len="med"/>
+                    </a:lnR>
+                    <a:lnT w="3810" cap="flat" cmpd="sng" algn="ctr">
+                      <a:solidFill>
+                        <a:srgbClr val="CBD5E0"/>
+                      </a:solidFill>
+                      <a:prstDash val="solid"/>
+                      <a:round/>
+                      <a:headEnd type="none" w="med" len="med"/>
+                      <a:tailEnd type="none" w="med" len="med"/>
+                    </a:lnT>
+                    <a:lnB w="3810" cap="flat" cmpd="sng" algn="ctr">
+                      <a:solidFill>
+                        <a:srgbClr val="CBD5E0"/>
+                      </a:solidFill>
+                      <a:prstDash val="solid"/>
+                      <a:round/>
+                      <a:headEnd type="none" w="med" len="med"/>
+                      <a:tailEnd type="none" w="med" len="med"/>
+                    </a:lnB>
+                    <a:solidFill>
+                      <a:srgbClr val="F7FAFC"/>
+                    </a:solidFill>
+                  </a:tcPr>
+                </a:tc>
+                <a:tc>
+                  <a:txBody>
+                    <a:bodyPr/>
+                    <a:lstStyle/>
+                    <a:p>
+                      <a:pPr indent="0" marL="0">
+                        <a:buNone/>
+                      </a:pPr>
+                      <a:r>
+                        <a:rPr lang="en-US" sz="1050" dirty="0">
+                          <a:solidFill>
+                            <a:srgbClr val="10161F"/>
+                          </a:solidFill>
+                          <a:latin typeface="Pretendard" pitchFamily="34" charset="0"/>
+                          <a:ea typeface="Pretendard" pitchFamily="34" charset="-122"/>
+                          <a:cs typeface="Pretendard" pitchFamily="34" charset="-120"/>
+                        </a:rPr>
+                        <a:t>★★★★</a:t>
+                      </a:r>
+                      <a:endParaRPr lang="en-US" sz="1050" dirty="0">
+                        <a:latin typeface="Pretendard" charset="0"/>
+                        <a:ea typeface="Pretendard" charset="0"/>
+                        <a:cs typeface="Pretendard" charset="0"/>
+                      </a:endParaRPr>
+                    </a:p>
+                  </a:txBody>
+                  <a:tcPr marL="50800" marR="50800" marT="25400" marB="25400" anchor="ctr">
+                    <a:lnL w="3810" cap="flat" cmpd="sng" algn="ctr">
+                      <a:solidFill>
+                        <a:srgbClr val="CBD5E0"/>
+                      </a:solidFill>
+                      <a:prstDash val="solid"/>
+                      <a:round/>
+                      <a:headEnd type="none" w="med" len="med"/>
+                      <a:tailEnd type="none" w="med" len="med"/>
+                    </a:lnL>
+                    <a:lnR w="3810" cap="flat" cmpd="sng" algn="ctr">
+                      <a:solidFill>
+                        <a:srgbClr val="CBD5E0"/>
+                      </a:solidFill>
+                      <a:prstDash val="solid"/>
+                      <a:round/>
+                      <a:headEnd type="none" w="med" len="med"/>
+                      <a:tailEnd type="none" w="med" len="med"/>
+                    </a:lnR>
+                    <a:lnT w="3810" cap="flat" cmpd="sng" algn="ctr">
+                      <a:solidFill>
+                        <a:srgbClr val="CBD5E0"/>
+                      </a:solidFill>
+                      <a:prstDash val="solid"/>
+                      <a:round/>
+                      <a:headEnd type="none" w="med" len="med"/>
+                      <a:tailEnd type="none" w="med" len="med"/>
+                    </a:lnT>
+                    <a:lnB w="3810" cap="flat" cmpd="sng" algn="ctr">
+                      <a:solidFill>
+                        <a:srgbClr val="CBD5E0"/>
+                      </a:solidFill>
+                      <a:prstDash val="solid"/>
+                      <a:round/>
+                      <a:headEnd type="none" w="med" len="med"/>
+                      <a:tailEnd type="none" w="med" len="med"/>
+                    </a:lnB>
+                    <a:solidFill>
+                      <a:srgbClr val="F7FAFC"/>
+                    </a:solidFill>
+                  </a:tcPr>
+                </a:tc>
+                <a:tc>
+                  <a:txBody>
+                    <a:bodyPr/>
+                    <a:lstStyle/>
+                    <a:p>
+                      <a:pPr indent="0" marL="0">
+                        <a:buNone/>
+                      </a:pPr>
+                      <a:r>
+                        <a:rPr lang="en-US" sz="1050" dirty="0">
+                          <a:solidFill>
+                            <a:srgbClr val="10161F"/>
+                          </a:solidFill>
+                          <a:latin typeface="Pretendard" pitchFamily="34" charset="0"/>
+                          <a:ea typeface="Pretendard" pitchFamily="34" charset="-122"/>
+                          <a:cs typeface="Pretendard" pitchFamily="34" charset="-120"/>
+                        </a:rPr>
+                        <a:t>영등포권역 </a:t>
+                      </a:r>
+                      <a:pPr indent="0" marL="0">
+                        <a:buNone/>
+                      </a:pPr>
+                      <a:r>
+                        <a:rPr lang="en-US" sz="1050" dirty="0">
+                          <a:solidFill>
+                            <a:srgbClr val="10161F"/>
+                          </a:solidFill>
+                          <a:latin typeface="Pretendard" pitchFamily="34" charset="0"/>
+                          <a:ea typeface="Pretendard" pitchFamily="34" charset="-122"/>
+                          <a:cs typeface="Pretendard" pitchFamily="34" charset="-120"/>
+                        </a:rPr>
+                        <a:t>직주근접</a:t>
+                      </a:r>
+                      <a:endParaRPr lang="en-US" sz="1050" dirty="0">
+                        <a:latin typeface="Pretendard" charset="0"/>
+                        <a:ea typeface="Pretendard" charset="0"/>
+                        <a:cs typeface="Pretendard" charset="0"/>
+                      </a:endParaRPr>
+                    </a:p>
+                  </a:txBody>
+                  <a:tcPr marL="50800" marR="50800" marT="25400" marB="25400" anchor="ctr">
+                    <a:lnL w="3810" cap="flat" cmpd="sng" algn="ctr">
+                      <a:solidFill>
+                        <a:srgbClr val="CBD5E0"/>
+                      </a:solidFill>
+                      <a:prstDash val="solid"/>
+                      <a:round/>
+                      <a:headEnd type="none" w="med" len="med"/>
+                      <a:tailEnd type="none" w="med" len="med"/>
+                    </a:lnL>
+                    <a:lnR w="3810" cap="flat" cmpd="sng" algn="ctr">
+                      <a:solidFill>
+                        <a:srgbClr val="CBD5E0"/>
+                      </a:solidFill>
+                      <a:prstDash val="solid"/>
+                      <a:round/>
+                      <a:headEnd type="none" w="med" len="med"/>
+                      <a:tailEnd type="none" w="med" len="med"/>
+                    </a:lnR>
+                    <a:lnT w="3810" cap="flat" cmpd="sng" algn="ctr">
+                      <a:solidFill>
+                        <a:srgbClr val="CBD5E0"/>
+                      </a:solidFill>
+                      <a:prstDash val="solid"/>
+                      <a:round/>
+                      <a:headEnd type="none" w="med" len="med"/>
+                      <a:tailEnd type="none" w="med" len="med"/>
+                    </a:lnT>
+                    <a:lnB w="3810" cap="flat" cmpd="sng" algn="ctr">
+                      <a:solidFill>
+                        <a:srgbClr val="CBD5E0"/>
+                      </a:solidFill>
+                      <a:prstDash val="solid"/>
+                      <a:round/>
+                      <a:headEnd type="none" w="med" len="med"/>
+                      <a:tailEnd type="none" w="med" len="med"/>
+                    </a:lnB>
+                    <a:solidFill>
+                      <a:srgbClr val="F7FAFC"/>
+                    </a:solidFill>
+                  </a:tcPr>
+                </a:tc>
+              </a:tr>
+              <a:tr h="329184">
+                <a:tc>
+                  <a:txBody>
+                    <a:bodyPr/>
+                    <a:lstStyle/>
+                    <a:p>
+                      <a:pPr indent="0" marL="0">
+                        <a:buNone/>
+                      </a:pPr>
+                      <a:r>
+                        <a:rPr lang="en-US" sz="1050" b="1" dirty="0">
+                          <a:solidFill>
+                            <a:srgbClr val="10161F"/>
+                          </a:solidFill>
+                          <a:latin typeface="Pretendard" pitchFamily="34" charset="0"/>
+                          <a:ea typeface="Pretendard" pitchFamily="34" charset="-122"/>
+                          <a:cs typeface="Pretendard" pitchFamily="34" charset="-120"/>
+                        </a:rPr>
+                        <a:t>소규모 </a:t>
+                      </a:r>
+                      <a:pPr indent="0" marL="0">
+                        <a:buNone/>
+                      </a:pPr>
+                      <a:r>
+                        <a:rPr lang="en-US" sz="1050" b="1" dirty="0">
+                          <a:solidFill>
+                            <a:srgbClr val="10161F"/>
+                          </a:solidFill>
+                          <a:latin typeface="Pretendard" pitchFamily="34" charset="0"/>
+                          <a:ea typeface="Pretendard" pitchFamily="34" charset="-122"/>
+                          <a:cs typeface="Pretendard" pitchFamily="34" charset="-120"/>
+                        </a:rPr>
+                        <a:t>개발업체</a:t>
+                      </a:r>
+                      <a:endParaRPr lang="en-US" sz="1050" dirty="0">
+                        <a:latin typeface="Pretendard" charset="0"/>
+                        <a:ea typeface="Pretendard" charset="0"/>
+                        <a:cs typeface="Pretendard" charset="0"/>
+                      </a:endParaRPr>
+                    </a:p>
+                  </a:txBody>
+                  <a:tcPr marL="50800" marR="50800" marT="25400" marB="25400" anchor="ctr">
+                    <a:lnL w="3810" cap="flat" cmpd="sng" algn="ctr">
+                      <a:solidFill>
+                        <a:srgbClr val="CBD5E0"/>
+                      </a:solidFill>
+                      <a:prstDash val="solid"/>
+                      <a:round/>
+                      <a:headEnd type="none" w="med" len="med"/>
+                      <a:tailEnd type="none" w="med" len="med"/>
+                    </a:lnL>
+                    <a:lnR w="3810" cap="flat" cmpd="sng" algn="ctr">
+                      <a:solidFill>
+                        <a:srgbClr val="CBD5E0"/>
+                      </a:solidFill>
+                      <a:prstDash val="solid"/>
+                      <a:round/>
+                      <a:headEnd type="none" w="med" len="med"/>
+                      <a:tailEnd type="none" w="med" len="med"/>
+                    </a:lnR>
+                    <a:lnT w="3810" cap="flat" cmpd="sng" algn="ctr">
+                      <a:solidFill>
+                        <a:srgbClr val="CBD5E0"/>
+                      </a:solidFill>
+                      <a:prstDash val="solid"/>
+                      <a:round/>
+                      <a:headEnd type="none" w="med" len="med"/>
+                      <a:tailEnd type="none" w="med" len="med"/>
+                    </a:lnT>
+                    <a:lnB w="3810" cap="flat" cmpd="sng" algn="ctr">
+                      <a:solidFill>
+                        <a:srgbClr val="CBD5E0"/>
+                      </a:solidFill>
+                      <a:prstDash val="solid"/>
+                      <a:round/>
+                      <a:headEnd type="none" w="med" len="med"/>
+                      <a:tailEnd type="none" w="med" len="med"/>
+                    </a:lnB>
+                    <a:solidFill>
+                      <a:srgbClr val="FFFFFF"/>
+                    </a:solidFill>
+                  </a:tcPr>
+                </a:tc>
+                <a:tc>
+                  <a:txBody>
+                    <a:bodyPr/>
+                    <a:lstStyle/>
+                    <a:p>
+                      <a:pPr indent="0" marL="0">
+                        <a:buNone/>
+                      </a:pPr>
+                      <a:r>
+                        <a:rPr lang="en-US" sz="1050" dirty="0">
+                          <a:solidFill>
+                            <a:srgbClr val="10161F"/>
+                          </a:solidFill>
+                          <a:latin typeface="Pretendard" pitchFamily="34" charset="0"/>
+                          <a:ea typeface="Pretendard" pitchFamily="34" charset="-122"/>
+                          <a:cs typeface="Pretendard" pitchFamily="34" charset="-120"/>
+                        </a:rPr>
+                        <a:t>★★★</a:t>
+                      </a:r>
+                      <a:endParaRPr lang="en-US" sz="1050" dirty="0">
+                        <a:latin typeface="Pretendard" charset="0"/>
+                        <a:ea typeface="Pretendard" charset="0"/>
+                        <a:cs typeface="Pretendard" charset="0"/>
+                      </a:endParaRPr>
+                    </a:p>
+                  </a:txBody>
+                  <a:tcPr marL="50800" marR="50800" marT="25400" marB="25400" anchor="ctr">
+                    <a:lnL w="3810" cap="flat" cmpd="sng" algn="ctr">
+                      <a:solidFill>
+                        <a:srgbClr val="CBD5E0"/>
+                      </a:solidFill>
+                      <a:prstDash val="solid"/>
+                      <a:round/>
+                      <a:headEnd type="none" w="med" len="med"/>
+                      <a:tailEnd type="none" w="med" len="med"/>
+                    </a:lnL>
+                    <a:lnR w="3810" cap="flat" cmpd="sng" algn="ctr">
+                      <a:solidFill>
+                        <a:srgbClr val="CBD5E0"/>
+                      </a:solidFill>
+                      <a:prstDash val="solid"/>
+                      <a:round/>
+                      <a:headEnd type="none" w="med" len="med"/>
+                      <a:tailEnd type="none" w="med" len="med"/>
+                    </a:lnR>
+                    <a:lnT w="3810" cap="flat" cmpd="sng" algn="ctr">
+                      <a:solidFill>
+                        <a:srgbClr val="CBD5E0"/>
+                      </a:solidFill>
+                      <a:prstDash val="solid"/>
+                      <a:round/>
+                      <a:headEnd type="none" w="med" len="med"/>
+                      <a:tailEnd type="none" w="med" len="med"/>
+                    </a:lnT>
+                    <a:lnB w="3810" cap="flat" cmpd="sng" algn="ctr">
+                      <a:solidFill>
+                        <a:srgbClr val="CBD5E0"/>
+                      </a:solidFill>
+                      <a:prstDash val="solid"/>
+                      <a:round/>
+                      <a:headEnd type="none" w="med" len="med"/>
+                      <a:tailEnd type="none" w="med" len="med"/>
+                    </a:lnB>
+                    <a:solidFill>
+                      <a:srgbClr val="FFFFFF"/>
+                    </a:solidFill>
+                  </a:tcPr>
+                </a:tc>
+                <a:tc>
+                  <a:txBody>
+                    <a:bodyPr/>
+                    <a:lstStyle/>
+                    <a:p>
+                      <a:pPr indent="0" marL="0">
+                        <a:buNone/>
+                      </a:pPr>
+                      <a:r>
+                        <a:rPr lang="en-US" sz="1050" dirty="0">
+                          <a:solidFill>
+                            <a:srgbClr val="10161F"/>
+                          </a:solidFill>
+                          <a:latin typeface="Pretendard" pitchFamily="34" charset="0"/>
+                          <a:ea typeface="Pretendard" pitchFamily="34" charset="-122"/>
+                          <a:cs typeface="Pretendard" pitchFamily="34" charset="-120"/>
+                        </a:rPr>
+                        <a:t>밸류업 </a:t>
+                      </a:r>
+                      <a:pPr indent="0" marL="0">
+                        <a:buNone/>
+                      </a:pPr>
+                      <a:r>
+                        <a:rPr lang="en-US" sz="1050" dirty="0">
+                          <a:solidFill>
+                            <a:srgbClr val="10161F"/>
+                          </a:solidFill>
+                          <a:latin typeface="Pretendard" pitchFamily="34" charset="0"/>
+                          <a:ea typeface="Pretendard" pitchFamily="34" charset="-122"/>
+                          <a:cs typeface="Pretendard" pitchFamily="34" charset="-120"/>
+                        </a:rPr>
+                        <a:t>후 </a:t>
+                      </a:r>
+                      <a:pPr indent="0" marL="0">
+                        <a:buNone/>
+                      </a:pPr>
+                      <a:r>
+                        <a:rPr lang="en-US" sz="1050" dirty="0">
+                          <a:solidFill>
+                            <a:srgbClr val="10161F"/>
+                          </a:solidFill>
+                          <a:latin typeface="Pretendard" pitchFamily="34" charset="0"/>
+                          <a:ea typeface="Pretendard" pitchFamily="34" charset="-122"/>
+                          <a:cs typeface="Pretendard" pitchFamily="34" charset="-120"/>
+                        </a:rPr>
+                        <a:t>매각 </a:t>
+                      </a:r>
+                      <a:pPr indent="0" marL="0">
+                        <a:buNone/>
+                      </a:pPr>
+                      <a:r>
+                        <a:rPr lang="en-US" sz="1050" dirty="0">
+                          <a:solidFill>
+                            <a:srgbClr val="10161F"/>
+                          </a:solidFill>
+                          <a:latin typeface="Pretendard" pitchFamily="34" charset="0"/>
+                          <a:ea typeface="Pretendard" pitchFamily="34" charset="-122"/>
+                          <a:cs typeface="Pretendard" pitchFamily="34" charset="-120"/>
+                        </a:rPr>
+                        <a:t>시나리오</a:t>
+                      </a:r>
+                      <a:endParaRPr lang="en-US" sz="1050" dirty="0">
+                        <a:latin typeface="Pretendard" charset="0"/>
+                        <a:ea typeface="Pretendard" charset="0"/>
+                        <a:cs typeface="Pretendard" charset="0"/>
+                      </a:endParaRPr>
+                    </a:p>
+                  </a:txBody>
+                  <a:tcPr marL="50800" marR="50800" marT="25400" marB="25400" anchor="ctr">
+                    <a:lnL w="3810" cap="flat" cmpd="sng" algn="ctr">
+                      <a:solidFill>
+                        <a:srgbClr val="CBD5E0"/>
+                      </a:solidFill>
+                      <a:prstDash val="solid"/>
+                      <a:round/>
+                      <a:headEnd type="none" w="med" len="med"/>
+                      <a:tailEnd type="none" w="med" len="med"/>
+                    </a:lnL>
+                    <a:lnR w="3810" cap="flat" cmpd="sng" algn="ctr">
+                      <a:solidFill>
+                        <a:srgbClr val="CBD5E0"/>
+                      </a:solidFill>
+                      <a:prstDash val="solid"/>
+                      <a:round/>
+                      <a:headEnd type="none" w="med" len="med"/>
+                      <a:tailEnd type="none" w="med" len="med"/>
+                    </a:lnR>
+                    <a:lnT w="3810" cap="flat" cmpd="sng" algn="ctr">
+                      <a:solidFill>
+                        <a:srgbClr val="CBD5E0"/>
+                      </a:solidFill>
+                      <a:prstDash val="solid"/>
+                      <a:round/>
+                      <a:headEnd type="none" w="med" len="med"/>
+                      <a:tailEnd type="none" w="med" len="med"/>
+                    </a:lnT>
+                    <a:lnB w="3810" cap="flat" cmpd="sng" algn="ctr">
+                      <a:solidFill>
+                        <a:srgbClr val="CBD5E0"/>
+                      </a:solidFill>
+                      <a:prstDash val="solid"/>
+                      <a:round/>
+                      <a:headEnd type="none" w="med" len="med"/>
+                      <a:tailEnd type="none" w="med" len="med"/>
+                    </a:lnB>
+                    <a:solidFill>
+                      <a:srgbClr val="FFFFFF"/>
+                    </a:solidFill>
+                  </a:tcPr>
+                </a:tc>
+              </a:tr>
+            </a:tbl>
+          </a:graphicData>
+        </a:graphic>
+      </p:graphicFrame>
+      <p:sp>
+        <p:nvSpPr>
+          <p:cNvPr id="29" name="Shape 26"/>
+          <p:cNvSpPr/>
+          <p:nvPr/>
+        </p:nvSpPr>
+        <p:spPr>
+          <a:xfrm>
+            <a:off x="566928" y="5678424"/>
             <a:ext cx="11057839" cy="804672"/>
           </a:xfrm>
           <a:prstGeom prst="roundRect">
@@ -6698,11 +9044,11 @@
             </a:avLst>
           </a:prstGeom>
           <a:solidFill>
-            <a:srgbClr val="E8F5CC"/>
+            <a:srgbClr val="F3EBDA"/>
           </a:solidFill>
           <a:ln w="10160">
             <a:solidFill>
-              <a:srgbClr val="A3D900"/>
+              <a:srgbClr val="D9B668"/>
             </a:solidFill>
             <a:prstDash val="solid"/>
           </a:ln>
@@ -6710,14 +9056,14 @@
       </p:sp>
       <p:sp>
         <p:nvSpPr>
-          <p:cNvPr id="6" name="Text 4"/>
-          <p:cNvSpPr/>
-          <p:nvPr/>
-        </p:nvSpPr>
-        <p:spPr>
-          <a:xfrm>
-            <a:off x="749808" y="5093208"/>
-            <a:ext cx="1645920" cy="219456"/>
+          <p:cNvPr id="30" name="Text 27"/>
+          <p:cNvSpPr/>
+          <p:nvPr/>
+        </p:nvSpPr>
+        <p:spPr>
+          <a:xfrm>
+            <a:off x="749808" y="5788152"/>
+            <a:ext cx="1691640" cy="256032"/>
           </a:xfrm>
           <a:prstGeom prst="rect">
             <a:avLst/>
@@ -6733,30 +9079,30 @@
               <a:buNone/>
             </a:pPr>
             <a:r>
-              <a:rPr lang="en-US" sz="950" b="1" dirty="0">
-                <a:solidFill>
-                  <a:srgbClr val="4F6A00"/>
+              <a:rPr lang="en-US" sz="1050" b="1" dirty="0">
+                <a:solidFill>
+                  <a:srgbClr val="977024"/>
                 </a:solidFill>
                 <a:latin typeface="Pretendard" pitchFamily="34" charset="0"/>
                 <a:ea typeface="Pretendard" pitchFamily="34" charset="-122"/>
                 <a:cs typeface="Pretendard" pitchFamily="34" charset="-120"/>
               </a:rPr>
-              <a:t>💡 종합 가치 제안</a:t>
-            </a:r>
-            <a:endParaRPr lang="en-US" sz="950" dirty="0"/>
-          </a:p>
-        </p:txBody>
-      </p:sp>
-      <p:sp>
-        <p:nvSpPr>
-          <p:cNvPr id="7" name="Text 5"/>
-          <p:cNvSpPr/>
-          <p:nvPr/>
-        </p:nvSpPr>
-        <p:spPr>
-          <a:xfrm>
-            <a:off x="2441448" y="5074920"/>
-            <a:ext cx="9000439" cy="621792"/>
+              <a:t>종합 가치 제안</a:t>
+            </a:r>
+            <a:endParaRPr lang="en-US" sz="1050" dirty="0"/>
+          </a:p>
+        </p:txBody>
+      </p:sp>
+      <p:sp>
+        <p:nvSpPr>
+          <p:cNvPr id="31" name="Text 28"/>
+          <p:cNvSpPr/>
+          <p:nvPr/>
+        </p:nvSpPr>
+        <p:spPr>
+          <a:xfrm>
+            <a:off x="2487168" y="5751576"/>
+            <a:ext cx="8954719" cy="658368"/>
           </a:xfrm>
           <a:prstGeom prst="rect">
             <a:avLst/>
@@ -6770,86 +9116,102 @@
           <a:p>
             <a:pPr indent="0" marL="0">
               <a:lnSpc>
-                <a:spcPct val="120000"/>
+                <a:spcPct val="125000"/>
               </a:lnSpc>
               <a:buNone/>
             </a:pPr>
             <a:r>
-              <a:rPr lang="en-US" sz="1000" dirty="0">
-                <a:solidFill>
-                  <a:srgbClr val="334155"/>
+              <a:rPr lang="en-US" sz="1100" dirty="0">
+                <a:solidFill>
+                  <a:srgbClr val="10161F"/>
                 </a:solidFill>
                 <a:latin typeface="Pretendard" pitchFamily="34" charset="0"/>
                 <a:ea typeface="Pretendard" pitchFamily="34" charset="-122"/>
                 <a:cs typeface="Pretendard" pitchFamily="34" charset="-120"/>
               </a:rPr>
-              <a:t>{"ok":true,"mocked":true,"extractedFields":{"area_signal":"역삼","asset_type":"오피스빌딩","price_band":"300억","size_signal":"3000평(약 9917.4㎡)"},"extractedFacts":{"region":"역삼","exactAddressCandidate":"역삼동 742-1","assetType":"오피스빌딩","priceText":"300억","sizeText":"3000평(약 9917.4㎡)","currentUse":"오피스","currentUseSignal":"근린생활시설","leaseSignal":"임대중","vacancySignal":"공실없음","tenantNames":["쿠팡","네이버"],"unitRentTexts":["301호: 1500만"],"sellerMotivationText":"자산 효율화","brokerNotes":["초역세권 매물"]},"detectedSensitiveFields":["exact_address","tenant_name"],"ambiguousFields":[],"warnings":[],"areaSignal":"역삼","assetType":"오피스빌딩","priceBand":"300억","sizeSignal":"3000평(약 9917.4㎡)","dealType":"매각","buildingName":"역삼 센트럴타워","exactAddress":"역삼동 742-1","totalFloorArea":9917.3,"buildYear":2015,"currentUseSignal":"근린생활시설","vacancySignal":"공실 없음","fitSummary":"초역세권 근생 빌딩으로 시행/사옥 매입에 최적화","cautionSummary":"주요 임차 업종 만기 조율 필요","hiddenFields":["exact_address","seller_motivation"],"confidence":{"areaSignal":"confirmed","assetType":"confirmed","priceBand":"ai_hypothesis","fitSummary":"ai_hypothesis"},"missingData":["sizeSignal"],"boundaryNote":"본 자료는 실거래 통계 기반 참고치입니다.","buyerType":"법인 사옥형","budgetRange":{"min":50,"max":80,"display":"50억~80억"},"preferredRegions":["강남","성수"],"assetTypes":["꼬마빌딩","사옥용"],"purchasePurpose":"사옥용 매입","mustHave":["초역세권","주차"],"niceToHave":["테라스","루프탑"],"riskTolerance":"medium","financingNote":"자본금 50% 준비","missingQuestions":["구체적인 입주 시기가 언제인가요?","선호하는 수익률이 있나요?"],"privacyNotes":["연락처 비공개"],"fitReasons":["매수자 예산(50-80억)에 부합하는 매물입니다.","요청하신 성수/강남 권역에 해당합니다."],"cautionReasons":["요청한 용도와 달리 명도 협의가 다소 필요합니다."],"recommendedNextAction":"현장 답사 제안","kakaoMessage":"안녕하세요! 요청하신 조건에 부합하는 추천 매물이 있어 안내해 드립니다. 확인해보시고 피드백 부탁드립니다.","title":"강남 역삼역 초역세권 오피스 사옥용 빌딩 매각","shortSummary":"역삼역 도보 5분 거리의 준신축급 대형 오피스빌딩입니다.","dealPoints":["초역세권","사옥 최적"],"cautionPoints":["명도 조율 필요"],"hiddenInfoNotice":["보증금 및 지번은 인가 후 확인 가능"],"gateMessage":"G1 등급 등록이 필요합니다.","kakaoText":"강남 역삼역 오피스 빌딩 매각 안내입니다.","exactUnitCandidate":"101호","floor":"1층","areaSqmText":"150㎡","spaceType":"office","depositText":"5000만","monthlyRentText":"400만","maintenanceFeeText":"50만","availableFromText":"즉시입주","leaseTermMonthsText":"24","incentivesText":"렌트프리 2개월","restrictions":[],"landlordIdentity":"김성수","currentTenant":"스타트업","vacancyReason":"이전 확장","rentNegotiation":"협의 가능","region":"성수동","areaSqm":150,"deposit":5000,"monthlyRent":400,"maintenanceFee":50,"availableFrom":"즉시입주","leaseTermMonths":24,"incentives":{"rentFreeMonths":2,"interiorSupport":"일부 인테리어 지원","freeRentDetail":"렌트프리 2개월 지원"},"shortSummaryLease":"성수역 도보 5분 거리 1층 리테일 상가 매물입니다."}</a:t>
-            </a:r>
-            <a:endParaRPr lang="en-US" sz="1000" dirty="0"/>
-          </a:p>
-        </p:txBody>
-      </p:sp>
-      <p:sp>
-        <p:nvSpPr>
-          <p:cNvPr id="8" name="Text 6"/>
-          <p:cNvSpPr/>
-          <p:nvPr/>
-        </p:nvSpPr>
-        <p:spPr>
-          <a:xfrm>
-            <a:off x="566928" y="6419088"/>
-            <a:ext cx="11057839" cy="201168"/>
-          </a:xfrm>
-          <a:prstGeom prst="rect">
-            <a:avLst/>
-          </a:prstGeom>
-          <a:noFill/>
-          <a:ln/>
-        </p:spPr>
-        <p:txBody>
-          <a:bodyPr wrap="square" lIns="0" tIns="0" rIns="0" bIns="0" rtlCol="0" anchor="ctr"/>
-          <a:lstStyle/>
-          <a:p>
-            <a:pPr algn="ctr" indent="0" marL="0">
-              <a:buNone/>
-            </a:pPr>
-            <a:r>
-              <a:rPr lang="en-US" sz="750" dirty="0">
-                <a:solidFill>
-                  <a:srgbClr val="64748B"/>
+              <a:t>[참고] 종합 가치 제안: 영등포권역 핵심 상권의 희소성 높은 우량 자산으로, 안정적인 임대 수익과 향후 공법상 밸류업 및 권역 지가 상승에 따른 자본 이득(Capital Gain)을 동시에 실현할 수 있는 전략적 매물입니다.</a:t>
+            </a:r>
+            <a:endParaRPr lang="en-US" sz="1100" dirty="0"/>
+          </a:p>
+        </p:txBody>
+      </p:sp>
+      <p:sp>
+        <p:nvSpPr>
+          <p:cNvPr id="32" name="Text 29"/>
+          <p:cNvSpPr/>
+          <p:nvPr/>
+        </p:nvSpPr>
+        <p:spPr>
+          <a:xfrm>
+            <a:off x="566928" y="6382512"/>
+            <a:ext cx="7315200" cy="219456"/>
+          </a:xfrm>
+          <a:prstGeom prst="rect">
+            <a:avLst/>
+          </a:prstGeom>
+          <a:noFill/>
+          <a:ln/>
+        </p:spPr>
+        <p:txBody>
+          <a:bodyPr wrap="square" lIns="0" tIns="0" rIns="0" bIns="0" rtlCol="0" anchor="ctr"/>
+          <a:lstStyle/>
+          <a:p>
+            <a:pPr indent="0" marL="0">
+              <a:buNone/>
+            </a:pPr>
+            <a:r>
+              <a:rPr lang="en-US" sz="800" dirty="0">
+                <a:solidFill>
+                  <a:srgbClr val="718096"/>
                 </a:solidFill>
                 <a:latin typeface="Pretendard" pitchFamily="34" charset="0"/>
                 <a:ea typeface="Pretendard" pitchFamily="34" charset="-122"/>
                 <a:cs typeface="Pretendard" pitchFamily="34" charset="-120"/>
               </a:rPr>
-              <a:t>크리딜  ·    ·  8</a:t>
-            </a:r>
-            <a:endParaRPr lang="en-US" sz="750" dirty="0"/>
-          </a:p>
-        </p:txBody>
-      </p:sp>
-      <p:sp>
-        <p:nvSpPr>
-          <p:cNvPr id="9" name="Shape 7"/>
-          <p:cNvSpPr/>
-          <p:nvPr/>
-        </p:nvSpPr>
-        <p:spPr>
-          <a:xfrm>
-            <a:off x="4437172" y="6382512"/>
-            <a:ext cx="3317352" cy="0"/>
-          </a:xfrm>
-          <a:prstGeom prst="line">
-            <a:avLst/>
-          </a:prstGeom>
-          <a:noFill/>
-          <a:ln w="6350">
-            <a:solidFill>
-              <a:srgbClr val="6B8E00"/>
-            </a:solidFill>
-            <a:prstDash val="solid"/>
-          </a:ln>
-        </p:spPr>
+              <a:t>크리딜   |   </a:t>
+            </a:r>
+            <a:endParaRPr lang="en-US" sz="800" dirty="0"/>
+          </a:p>
+        </p:txBody>
+      </p:sp>
+      <p:sp>
+        <p:nvSpPr>
+          <p:cNvPr id="33" name="Text 30"/>
+          <p:cNvSpPr/>
+          <p:nvPr/>
+        </p:nvSpPr>
+        <p:spPr>
+          <a:xfrm>
+            <a:off x="10710367" y="6382512"/>
+            <a:ext cx="914400" cy="219456"/>
+          </a:xfrm>
+          <a:prstGeom prst="rect">
+            <a:avLst/>
+          </a:prstGeom>
+          <a:noFill/>
+          <a:ln/>
+        </p:spPr>
+        <p:txBody>
+          <a:bodyPr wrap="square" lIns="0" tIns="0" rIns="0" bIns="0" rtlCol="0" anchor="ctr"/>
+          <a:lstStyle/>
+          <a:p>
+            <a:pPr algn="r" indent="0" marL="0">
+              <a:buNone/>
+            </a:pPr>
+            <a:r>
+              <a:rPr lang="en-US" sz="900" b="1" dirty="0">
+                <a:solidFill>
+                  <a:srgbClr val="B98A2E"/>
+                </a:solidFill>
+                <a:latin typeface="Arial" pitchFamily="34" charset="0"/>
+                <a:ea typeface="Arial" pitchFamily="34" charset="-122"/>
+                <a:cs typeface="Arial" pitchFamily="34" charset="-120"/>
+              </a:rPr>
+              <a:t>8</a:t>
+            </a:r>
+            <a:endParaRPr lang="en-US" sz="900" dirty="0"/>
+          </a:p>
+        </p:txBody>
       </p:sp>
     </p:spTree>
   </p:cSld>
@@ -6891,14 +9253,14 @@
         </p:nvSpPr>
         <p:spPr>
           <a:xfrm>
-            <a:off x="566928" y="384048"/>
-            <a:ext cx="45720" cy="566928"/>
-          </a:xfrm>
-          <a:prstGeom prst="rect">
+            <a:off x="566928" y="457200"/>
+            <a:ext cx="384048" cy="384048"/>
+          </a:xfrm>
+          <a:prstGeom prst="ellipse">
             <a:avLst/>
           </a:prstGeom>
           <a:solidFill>
-            <a:srgbClr val="6B8E00"/>
+            <a:srgbClr val="B98A2E"/>
           </a:solidFill>
           <a:ln/>
         </p:spPr>
@@ -6911,32 +9273,71 @@
         </p:nvSpPr>
         <p:spPr>
           <a:xfrm>
-            <a:off x="749808" y="384048"/>
-            <a:ext cx="10874959" cy="182880"/>
-          </a:xfrm>
-          <a:prstGeom prst="rect">
-            <a:avLst/>
-          </a:prstGeom>
-          <a:noFill/>
-          <a:ln/>
-        </p:spPr>
-        <p:txBody>
-          <a:bodyPr wrap="square" lIns="0" tIns="0" rIns="0" bIns="0" rtlCol="0" anchor="ctr"/>
-          <a:lstStyle/>
-          <a:p>
-            <a:pPr indent="0" marL="0">
-              <a:buNone/>
-            </a:pPr>
-            <a:r>
-              <a:rPr lang="en-US" sz="950" b="1" spc="200" kern="0" dirty="0">
-                <a:solidFill>
-                  <a:srgbClr val="6B8E00"/>
+            <a:off x="566928" y="457200"/>
+            <a:ext cx="384048" cy="384048"/>
+          </a:xfrm>
+          <a:prstGeom prst="rect">
+            <a:avLst/>
+          </a:prstGeom>
+          <a:noFill/>
+          <a:ln/>
+        </p:spPr>
+        <p:txBody>
+          <a:bodyPr wrap="square" lIns="0" tIns="0" rIns="0" bIns="0" rtlCol="0" anchor="ctr"/>
+          <a:lstStyle/>
+          <a:p>
+            <a:pPr algn="ctr" indent="0" marL="0">
+              <a:buNone/>
+            </a:pPr>
+            <a:r>
+              <a:rPr lang="en-US" sz="1300" b="1" dirty="0">
+                <a:solidFill>
+                  <a:srgbClr val="FFFFFF"/>
                 </a:solidFill>
                 <a:latin typeface="Arial" pitchFamily="34" charset="0"/>
                 <a:ea typeface="Arial" pitchFamily="34" charset="-122"/>
                 <a:cs typeface="Arial" pitchFamily="34" charset="-120"/>
               </a:rPr>
-              <a:t>09  Process</a:t>
+              <a:t>09</a:t>
+            </a:r>
+            <a:endParaRPr lang="en-US" sz="1300" dirty="0"/>
+          </a:p>
+        </p:txBody>
+      </p:sp>
+      <p:sp>
+        <p:nvSpPr>
+          <p:cNvPr id="4" name="Text 2"/>
+          <p:cNvSpPr/>
+          <p:nvPr/>
+        </p:nvSpPr>
+        <p:spPr>
+          <a:xfrm>
+            <a:off x="1133856" y="457200"/>
+            <a:ext cx="10490911" cy="182880"/>
+          </a:xfrm>
+          <a:prstGeom prst="rect">
+            <a:avLst/>
+          </a:prstGeom>
+          <a:noFill/>
+          <a:ln/>
+        </p:spPr>
+        <p:txBody>
+          <a:bodyPr wrap="square" lIns="0" tIns="0" rIns="0" bIns="0" rtlCol="0" anchor="ctr"/>
+          <a:lstStyle/>
+          <a:p>
+            <a:pPr indent="0" marL="0">
+              <a:buNone/>
+            </a:pPr>
+            <a:r>
+              <a:rPr lang="en-US" sz="950" b="1" spc="200" kern="0" dirty="0">
+                <a:solidFill>
+                  <a:srgbClr val="B98A2E"/>
+                </a:solidFill>
+                <a:latin typeface="Arial" pitchFamily="34" charset="0"/>
+                <a:ea typeface="Arial" pitchFamily="34" charset="-122"/>
+                <a:cs typeface="Arial" pitchFamily="34" charset="-120"/>
+              </a:rPr>
+              <a:t>Process</a:t>
             </a:r>
             <a:endParaRPr lang="en-US" sz="950" dirty="0"/>
           </a:p>
@@ -6944,14 +9345,14 @@
       </p:sp>
       <p:sp>
         <p:nvSpPr>
-          <p:cNvPr id="4" name="Text 2"/>
-          <p:cNvSpPr/>
-          <p:nvPr/>
-        </p:nvSpPr>
-        <p:spPr>
-          <a:xfrm>
-            <a:off x="749808" y="566928"/>
-            <a:ext cx="10874959" cy="384048"/>
+          <p:cNvPr id="5" name="Text 3"/>
+          <p:cNvSpPr/>
+          <p:nvPr/>
+        </p:nvSpPr>
+        <p:spPr>
+          <a:xfrm>
+            <a:off x="1133856" y="640080"/>
+            <a:ext cx="10490911" cy="365760"/>
           </a:xfrm>
           <a:prstGeom prst="rect">
             <a:avLst/>
@@ -6967,9 +9368,9 @@
               <a:buNone/>
             </a:pPr>
             <a:r>
-              <a:rPr lang="en-US" sz="2200" b="1" dirty="0">
-                <a:solidFill>
-                  <a:srgbClr val="0F172A"/>
+              <a:rPr lang="en-US" sz="2300" b="1" dirty="0">
+                <a:solidFill>
+                  <a:srgbClr val="10161F"/>
                 </a:solidFill>
                 <a:latin typeface="Pretendard" pitchFamily="34" charset="0"/>
                 <a:ea typeface="Pretendard" pitchFamily="34" charset="-122"/>
@@ -6977,13 +9378,13 @@
               </a:rPr>
               <a:t>검토 후 다음 단계는 무엇인가</a:t>
             </a:r>
-            <a:endParaRPr lang="en-US" sz="2200" dirty="0"/>
-          </a:p>
-        </p:txBody>
-      </p:sp>
-      <p:sp>
-        <p:nvSpPr>
-          <p:cNvPr id="5" name="Shape 3"/>
+            <a:endParaRPr lang="en-US" sz="2300" dirty="0"/>
+          </a:p>
+        </p:txBody>
+      </p:sp>
+      <p:sp>
+        <p:nvSpPr>
+          <p:cNvPr id="6" name="Shape 4"/>
           <p:cNvSpPr/>
           <p:nvPr/>
         </p:nvSpPr>
@@ -6992,15 +9393,17 @@
             <a:off x="566928" y="1572768"/>
             <a:ext cx="11057839" cy="3200400"/>
           </a:xfrm>
-          <a:prstGeom prst="rect">
-            <a:avLst/>
+          <a:prstGeom prst="roundRect">
+            <a:avLst>
+              <a:gd name="adj" fmla="val 1714"/>
+            </a:avLst>
           </a:prstGeom>
           <a:solidFill>
-            <a:srgbClr val="F8FAFC"/>
+            <a:srgbClr val="F7FAFC"/>
           </a:solidFill>
-          <a:ln w="3810">
+          <a:ln w="6350">
             <a:solidFill>
-              <a:srgbClr val="CBD5E1"/>
+              <a:srgbClr val="CBD5E0"/>
             </a:solidFill>
             <a:prstDash val="solid"/>
           </a:ln>
@@ -7008,26 +9411,6 @@
       </p:sp>
       <p:sp>
         <p:nvSpPr>
-          <p:cNvPr id="6" name="Shape 4"/>
-          <p:cNvSpPr/>
-          <p:nvPr/>
-        </p:nvSpPr>
-        <p:spPr>
-          <a:xfrm>
-            <a:off x="566928" y="1572768"/>
-            <a:ext cx="11057839" cy="36576"/>
-          </a:xfrm>
-          <a:prstGeom prst="rect">
-            <a:avLst/>
-          </a:prstGeom>
-          <a:solidFill>
-            <a:srgbClr val="6B8E00"/>
-          </a:solidFill>
-          <a:ln/>
-        </p:spPr>
-      </p:sp>
-      <p:sp>
-        <p:nvSpPr>
           <p:cNvPr id="7" name="Shape 5"/>
           <p:cNvSpPr/>
           <p:nvPr/>
@@ -7041,7 +9424,7 @@
             <a:avLst/>
           </a:prstGeom>
           <a:solidFill>
-            <a:srgbClr val="6B8E00"/>
+            <a:srgbClr val="B98A2E"/>
           </a:solidFill>
           <a:ln/>
         </p:spPr>
@@ -7112,7 +9495,7 @@
             <a:r>
               <a:rPr lang="en-US" sz="1600" b="1" dirty="0">
                 <a:solidFill>
-                  <a:srgbClr val="0F172A"/>
+                  <a:srgbClr val="10161F"/>
                 </a:solidFill>
                 <a:latin typeface="Pretendard" pitchFamily="34" charset="0"/>
                 <a:ea typeface="Pretendard" pitchFamily="34" charset="-122"/>
@@ -7151,7 +9534,7 @@
             <a:r>
               <a:rPr lang="en-US" sz="1100" dirty="0">
                 <a:solidFill>
-                  <a:srgbClr val="0F172A"/>
+                  <a:srgbClr val="10161F"/>
                 </a:solidFill>
                 <a:latin typeface="Pretendard" pitchFamily="34" charset="0"/>
                 <a:ea typeface="Pretendard" pitchFamily="34" charset="-122"/>
@@ -7171,59 +9554,75 @@
         </p:nvSpPr>
         <p:spPr>
           <a:xfrm>
-            <a:off x="566928" y="6419088"/>
-            <a:ext cx="11057839" cy="201168"/>
-          </a:xfrm>
-          <a:prstGeom prst="rect">
-            <a:avLst/>
-          </a:prstGeom>
-          <a:noFill/>
-          <a:ln/>
-        </p:spPr>
-        <p:txBody>
-          <a:bodyPr wrap="square" lIns="0" tIns="0" rIns="0" bIns="0" rtlCol="0" anchor="ctr"/>
-          <a:lstStyle/>
-          <a:p>
-            <a:pPr algn="ctr" indent="0" marL="0">
-              <a:buNone/>
-            </a:pPr>
-            <a:r>
-              <a:rPr lang="en-US" sz="750" dirty="0">
-                <a:solidFill>
-                  <a:srgbClr val="64748B"/>
+            <a:off x="566928" y="6382512"/>
+            <a:ext cx="7315200" cy="219456"/>
+          </a:xfrm>
+          <a:prstGeom prst="rect">
+            <a:avLst/>
+          </a:prstGeom>
+          <a:noFill/>
+          <a:ln/>
+        </p:spPr>
+        <p:txBody>
+          <a:bodyPr wrap="square" lIns="0" tIns="0" rIns="0" bIns="0" rtlCol="0" anchor="ctr"/>
+          <a:lstStyle/>
+          <a:p>
+            <a:pPr indent="0" marL="0">
+              <a:buNone/>
+            </a:pPr>
+            <a:r>
+              <a:rPr lang="en-US" sz="800" dirty="0">
+                <a:solidFill>
+                  <a:srgbClr val="718096"/>
                 </a:solidFill>
                 <a:latin typeface="Pretendard" pitchFamily="34" charset="0"/>
                 <a:ea typeface="Pretendard" pitchFamily="34" charset="-122"/>
                 <a:cs typeface="Pretendard" pitchFamily="34" charset="-120"/>
               </a:rPr>
-              <a:t>크리딜  ·    ·  9</a:t>
-            </a:r>
-            <a:endParaRPr lang="en-US" sz="750" dirty="0"/>
-          </a:p>
-        </p:txBody>
-      </p:sp>
-      <p:sp>
-        <p:nvSpPr>
-          <p:cNvPr id="12" name="Shape 10"/>
-          <p:cNvSpPr/>
-          <p:nvPr/>
-        </p:nvSpPr>
-        <p:spPr>
-          <a:xfrm>
-            <a:off x="4437172" y="6382512"/>
-            <a:ext cx="3317352" cy="0"/>
-          </a:xfrm>
-          <a:prstGeom prst="line">
-            <a:avLst/>
-          </a:prstGeom>
-          <a:noFill/>
-          <a:ln w="6350">
-            <a:solidFill>
-              <a:srgbClr val="6B8E00"/>
-            </a:solidFill>
-            <a:prstDash val="solid"/>
-          </a:ln>
-        </p:spPr>
+              <a:t>크리딜   |   </a:t>
+            </a:r>
+            <a:endParaRPr lang="en-US" sz="800" dirty="0"/>
+          </a:p>
+        </p:txBody>
+      </p:sp>
+      <p:sp>
+        <p:nvSpPr>
+          <p:cNvPr id="12" name="Text 10"/>
+          <p:cNvSpPr/>
+          <p:nvPr/>
+        </p:nvSpPr>
+        <p:spPr>
+          <a:xfrm>
+            <a:off x="10710367" y="6382512"/>
+            <a:ext cx="914400" cy="219456"/>
+          </a:xfrm>
+          <a:prstGeom prst="rect">
+            <a:avLst/>
+          </a:prstGeom>
+          <a:noFill/>
+          <a:ln/>
+        </p:spPr>
+        <p:txBody>
+          <a:bodyPr wrap="square" lIns="0" tIns="0" rIns="0" bIns="0" rtlCol="0" anchor="ctr"/>
+          <a:lstStyle/>
+          <a:p>
+            <a:pPr algn="r" indent="0" marL="0">
+              <a:buNone/>
+            </a:pPr>
+            <a:r>
+              <a:rPr lang="en-US" sz="900" b="1" dirty="0">
+                <a:solidFill>
+                  <a:srgbClr val="B98A2E"/>
+                </a:solidFill>
+                <a:latin typeface="Arial" pitchFamily="34" charset="0"/>
+                <a:ea typeface="Arial" pitchFamily="34" charset="-122"/>
+                <a:cs typeface="Arial" pitchFamily="34" charset="-120"/>
+              </a:rPr>
+              <a:t>9</a:t>
+            </a:r>
+            <a:endParaRPr lang="en-US" sz="900" dirty="0"/>
+          </a:p>
+        </p:txBody>
       </p:sp>
     </p:spTree>
   </p:cSld>

--- a/docs/test/stress/e2e-outputs/development_case13_mullae_dev_basic.pptx
+++ b/docs/test/stress/e2e-outputs/development_case13_mullae_dev_basic.pptx
@@ -6059,7 +6059,7 @@
                 <a:ea typeface="Pretendard" pitchFamily="34" charset="-122"/>
                 <a:cs typeface="Pretendard" pitchFamily="34" charset="-120"/>
               </a:rPr>
-              <a:t>건축물 개요 및 물리 스펙</a:t>
+              <a:t>대지 및 신축 개발 여력 분석</a:t>
             </a:r>
             <a:endParaRPr lang="en-US" sz="1100" dirty="0"/>
           </a:p>
@@ -6101,7 +6101,7 @@
                 <a:ea typeface="Pretendard" pitchFamily="34" charset="-122"/>
                 <a:cs typeface="Pretendard" pitchFamily="34" charset="-120"/>
               </a:rPr>
-              <a:t>{"ok"</a:t>
+              <a:t>대지면적</a:t>
             </a:r>
             <a:endParaRPr lang="en-US" sz="1400" dirty="0"/>
           </a:p>
@@ -6143,7 +6143,7 @@
                 <a:ea typeface="Pretendard" pitchFamily="34" charset="-122"/>
                 <a:cs typeface="Pretendard" pitchFamily="34" charset="-120"/>
               </a:rPr>
-              <a:t>true,"mocked":true,"extractedFields":{"area_signal":"역삼","asset_type":"오피스빌딩","price_band":"300억","size_signal":"3000평(약 9917.4㎡)"},"extractedFacts":{"region":"역삼","exactAddressCandidate":"역삼동 742-1","assetType":"오피스빌딩","priceText":"300억","sizeText":"3000평(약 9917.4㎡)","currentUse":"오피스","currentUseSignal":"근린생활시설","leaseSignal":"임대중","vacancySignal":"공실없음","tenantNames":"쿠팡","네이버","unitRentTexts":"301호: 1500만","sellerMotivationText":"자산 효율화","brokerNotes":"초역세권 매물"},"detectedSensitiveFields":"exact_address","tenant_name","ambiguousFields":,"warnings":,"areaSignal":"역삼","assetType":"오피스빌딩","priceBand":"300억","sizeSignal":"3000평(약 9917.4㎡)","dealType":"매각","buildingName":"역삼 센트럴타워","exactAddress":"역삼동 742-1","totalFloorArea":9917.3,"buildYear":2015,"currentUseSignal":"근린생활시설","vacancySignal":"공실 없음","fitSummary":"초역세권 근생 빌딩으로 시행/사옥 매입에 최적화","cautionSummary":"주요 임차 업종 만기 조율 필요","hiddenFields":"exact_address","seller_motivation","confidence":{"areaSignal":"confirmed","assetType":"confirmed","priceBand":"ai_hypothesis","fitSummary":"ai_hypothesis"},"missingData":"sizeSignal","boundaryNote":"본 자료는 실거래 통계 기반 참고치입니다.","buyerType":"법인 사옥형","budgetRange":{"min":50,"max":80,"display":"50억~80억"},"preferredRegions":"강남","성수","assetTypes":"꼬마빌딩","사옥용","purchasePurpose":"사옥용 매입","mustHave":"초역세권","주차","niceToHave":"테라스","루프탑","riskTolerance":"medium","financingNote":"자본금 50% 준비","missingQuestions":"구체적인 입주 시기가 언제인가요?","선호하는 수익률이 있나요?","privacyNotes":"연락처 비공개","fitReasons":"매수자 예산(50-80억)에 부합하는 매물입니다.","요청하신 성수/강남 권역에 해당합니다.","cautionReasons":"요청한 용도와 달리 명도 협의가 다소 필요합니다.","recommendedNextAction":"현장 답사 제안","kakaoMessage":"안녕하세요! 요청하신 조건에 부합하는 추천 매물이 있어 안내해 드립니다. 확인해보시고 피드백 부탁드립니다.","title":"강남 역삼역 초역세권 오피스 사옥용 빌딩 매각","shortSummary":"역삼역 도보 5분 거리의 준신축급 대형 오피스빌딩입니다.","dealPoints":"초역세권","사옥 최적","cautionPoints":"명도 조율 필요","hiddenInfoNotice":"보증금 및 지번은 인가 후 확인 가능","gateMessage":"G1 등급 등록이 필요합니다.","kakaoText":"강남 역삼역 오피스 빌딩 매각 안내입니다.","exactUnitCandidate":"101호","floor":"1층","areaSqmText":"150㎡","spaceType":"office","depositText":"5000만","monthlyRentText":"400만","maintenanceFeeText":"50만","availableFromText":"즉시입주","leaseTermMonthsText":"24","incentivesText":"렌트프리 2개월","restrictions":,"landlordIdentity":"김성수","currentTenant":"스타트업","vacancyReason":"이전 확장","rentNegotiation":"협의 가능","region":"성수동","areaSqm":150,"deposit":5000,"monthlyRent":400,"maintenanceFee":50,"availableFrom":"즉시입주","leaseTermMonths":24,"incentives":{"rentFreeMonths":2,"interiorSupport":"일부 인테리어 지원","freeRentDetail":"렌트프리 2개월 지원"},"shortSummaryLease":"성수역 도보 5분 거리 1층 리테일 상가 매물입니다."}</a:t>
+              <a:t>1000㎡</a:t>
             </a:r>
             <a:endParaRPr lang="en-US" sz="1400" dirty="0"/>
           </a:p>
@@ -6152,6 +6152,327 @@
       <p:sp>
         <p:nvSpPr>
           <p:cNvPr id="9" name="Shape 7"/>
+          <p:cNvSpPr/>
+          <p:nvPr/>
+        </p:nvSpPr>
+        <p:spPr>
+          <a:xfrm>
+            <a:off x="566928" y="2048256"/>
+            <a:ext cx="6858000" cy="0"/>
+          </a:xfrm>
+          <a:prstGeom prst="line">
+            <a:avLst/>
+          </a:prstGeom>
+          <a:noFill/>
+          <a:ln w="3810">
+            <a:solidFill>
+              <a:srgbClr val="CBD5E0"/>
+            </a:solidFill>
+            <a:prstDash val="solid"/>
+          </a:ln>
+        </p:spPr>
+      </p:sp>
+      <p:sp>
+        <p:nvSpPr>
+          <p:cNvPr id="10" name="Text 8"/>
+          <p:cNvSpPr/>
+          <p:nvPr/>
+        </p:nvSpPr>
+        <p:spPr>
+          <a:xfrm>
+            <a:off x="566928" y="2048256"/>
+            <a:ext cx="2606040" cy="402336"/>
+          </a:xfrm>
+          <a:prstGeom prst="rect">
+            <a:avLst/>
+          </a:prstGeom>
+          <a:noFill/>
+          <a:ln/>
+        </p:spPr>
+        <p:txBody>
+          <a:bodyPr wrap="square" lIns="0" tIns="0" rIns="0" bIns="0" rtlCol="0" anchor="ctr"/>
+          <a:lstStyle/>
+          <a:p>
+            <a:pPr indent="0" marL="0">
+              <a:lnSpc>
+                <a:spcPct val="120000"/>
+              </a:lnSpc>
+              <a:buNone/>
+            </a:pPr>
+            <a:r>
+              <a:rPr lang="en-US" sz="1400" dirty="0">
+                <a:solidFill>
+                  <a:srgbClr val="718096"/>
+                </a:solidFill>
+                <a:latin typeface="Pretendard" pitchFamily="34" charset="0"/>
+                <a:ea typeface="Pretendard" pitchFamily="34" charset="-122"/>
+                <a:cs typeface="Pretendard" pitchFamily="34" charset="-120"/>
+              </a:rPr>
+              <a:t>용도지역</a:t>
+            </a:r>
+            <a:endParaRPr lang="en-US" sz="1400" dirty="0"/>
+          </a:p>
+        </p:txBody>
+      </p:sp>
+      <p:sp>
+        <p:nvSpPr>
+          <p:cNvPr id="11" name="Text 9"/>
+          <p:cNvSpPr/>
+          <p:nvPr/>
+        </p:nvSpPr>
+        <p:spPr>
+          <a:xfrm>
+            <a:off x="3172968" y="2048256"/>
+            <a:ext cx="4251960" cy="402336"/>
+          </a:xfrm>
+          <a:prstGeom prst="rect">
+            <a:avLst/>
+          </a:prstGeom>
+          <a:noFill/>
+          <a:ln/>
+        </p:spPr>
+        <p:txBody>
+          <a:bodyPr wrap="square" lIns="0" tIns="0" rIns="0" bIns="0" rtlCol="0" anchor="ctr"/>
+          <a:lstStyle/>
+          <a:p>
+            <a:pPr indent="0" marL="0">
+              <a:lnSpc>
+                <a:spcPct val="120000"/>
+              </a:lnSpc>
+              <a:buNone/>
+            </a:pPr>
+            <a:r>
+              <a:rPr lang="en-US" sz="1400" b="1" dirty="0">
+                <a:solidFill>
+                  <a:srgbClr val="10161F"/>
+                </a:solidFill>
+                <a:latin typeface="Pretendard" pitchFamily="34" charset="0"/>
+                <a:ea typeface="Pretendard" pitchFamily="34" charset="-122"/>
+                <a:cs typeface="Pretendard" pitchFamily="34" charset="-120"/>
+              </a:rPr>
+              <a:t>일반상업지역</a:t>
+            </a:r>
+            <a:endParaRPr lang="en-US" sz="1400" dirty="0"/>
+          </a:p>
+        </p:txBody>
+      </p:sp>
+      <p:sp>
+        <p:nvSpPr>
+          <p:cNvPr id="12" name="Shape 10"/>
+          <p:cNvSpPr/>
+          <p:nvPr/>
+        </p:nvSpPr>
+        <p:spPr>
+          <a:xfrm>
+            <a:off x="566928" y="2450592"/>
+            <a:ext cx="6858000" cy="0"/>
+          </a:xfrm>
+          <a:prstGeom prst="line">
+            <a:avLst/>
+          </a:prstGeom>
+          <a:noFill/>
+          <a:ln w="3810">
+            <a:solidFill>
+              <a:srgbClr val="CBD5E0"/>
+            </a:solidFill>
+            <a:prstDash val="solid"/>
+          </a:ln>
+        </p:spPr>
+      </p:sp>
+      <p:sp>
+        <p:nvSpPr>
+          <p:cNvPr id="13" name="Text 11"/>
+          <p:cNvSpPr/>
+          <p:nvPr/>
+        </p:nvSpPr>
+        <p:spPr>
+          <a:xfrm>
+            <a:off x="566928" y="2450592"/>
+            <a:ext cx="2606040" cy="402336"/>
+          </a:xfrm>
+          <a:prstGeom prst="rect">
+            <a:avLst/>
+          </a:prstGeom>
+          <a:noFill/>
+          <a:ln/>
+        </p:spPr>
+        <p:txBody>
+          <a:bodyPr wrap="square" lIns="0" tIns="0" rIns="0" bIns="0" rtlCol="0" anchor="ctr"/>
+          <a:lstStyle/>
+          <a:p>
+            <a:pPr indent="0" marL="0">
+              <a:lnSpc>
+                <a:spcPct val="120000"/>
+              </a:lnSpc>
+              <a:buNone/>
+            </a:pPr>
+            <a:r>
+              <a:rPr lang="en-US" sz="1400" dirty="0">
+                <a:solidFill>
+                  <a:srgbClr val="718096"/>
+                </a:solidFill>
+                <a:latin typeface="Pretendard" pitchFamily="34" charset="0"/>
+                <a:ea typeface="Pretendard" pitchFamily="34" charset="-122"/>
+                <a:cs typeface="Pretendard" pitchFamily="34" charset="-120"/>
+              </a:rPr>
+              <a:t>명도 상태</a:t>
+            </a:r>
+            <a:endParaRPr lang="en-US" sz="1400" dirty="0"/>
+          </a:p>
+        </p:txBody>
+      </p:sp>
+      <p:sp>
+        <p:nvSpPr>
+          <p:cNvPr id="14" name="Text 12"/>
+          <p:cNvSpPr/>
+          <p:nvPr/>
+        </p:nvSpPr>
+        <p:spPr>
+          <a:xfrm>
+            <a:off x="3172968" y="2450592"/>
+            <a:ext cx="4251960" cy="402336"/>
+          </a:xfrm>
+          <a:prstGeom prst="rect">
+            <a:avLst/>
+          </a:prstGeom>
+          <a:noFill/>
+          <a:ln/>
+        </p:spPr>
+        <p:txBody>
+          <a:bodyPr wrap="square" lIns="0" tIns="0" rIns="0" bIns="0" rtlCol="0" anchor="ctr"/>
+          <a:lstStyle/>
+          <a:p>
+            <a:pPr indent="0" marL="0">
+              <a:lnSpc>
+                <a:spcPct val="120000"/>
+              </a:lnSpc>
+              <a:buNone/>
+            </a:pPr>
+            <a:r>
+              <a:rPr lang="en-US" sz="1400" b="1" dirty="0">
+                <a:solidFill>
+                  <a:srgbClr val="10161F"/>
+                </a:solidFill>
+                <a:latin typeface="Pretendard" pitchFamily="34" charset="0"/>
+                <a:ea typeface="Pretendard" pitchFamily="34" charset="-122"/>
+                <a:cs typeface="Pretendard" pitchFamily="34" charset="-120"/>
+              </a:rPr>
+              <a:t>기존 주요 임차 업종 현황</a:t>
+            </a:r>
+            <a:endParaRPr lang="en-US" sz="1400" dirty="0"/>
+          </a:p>
+        </p:txBody>
+      </p:sp>
+      <p:sp>
+        <p:nvSpPr>
+          <p:cNvPr id="15" name="Shape 13"/>
+          <p:cNvSpPr/>
+          <p:nvPr/>
+        </p:nvSpPr>
+        <p:spPr>
+          <a:xfrm>
+            <a:off x="566928" y="2852928"/>
+            <a:ext cx="6858000" cy="0"/>
+          </a:xfrm>
+          <a:prstGeom prst="line">
+            <a:avLst/>
+          </a:prstGeom>
+          <a:noFill/>
+          <a:ln w="3810">
+            <a:solidFill>
+              <a:srgbClr val="CBD5E0"/>
+            </a:solidFill>
+            <a:prstDash val="solid"/>
+          </a:ln>
+        </p:spPr>
+      </p:sp>
+      <p:sp>
+        <p:nvSpPr>
+          <p:cNvPr id="16" name="Text 14"/>
+          <p:cNvSpPr/>
+          <p:nvPr/>
+        </p:nvSpPr>
+        <p:spPr>
+          <a:xfrm>
+            <a:off x="566928" y="2852928"/>
+            <a:ext cx="2606040" cy="402336"/>
+          </a:xfrm>
+          <a:prstGeom prst="rect">
+            <a:avLst/>
+          </a:prstGeom>
+          <a:noFill/>
+          <a:ln/>
+        </p:spPr>
+        <p:txBody>
+          <a:bodyPr wrap="square" lIns="0" tIns="0" rIns="0" bIns="0" rtlCol="0" anchor="ctr"/>
+          <a:lstStyle/>
+          <a:p>
+            <a:pPr indent="0" marL="0">
+              <a:lnSpc>
+                <a:spcPct val="120000"/>
+              </a:lnSpc>
+              <a:buNone/>
+            </a:pPr>
+            <a:r>
+              <a:rPr lang="en-US" sz="1400" dirty="0">
+                <a:solidFill>
+                  <a:srgbClr val="718096"/>
+                </a:solidFill>
+                <a:latin typeface="Pretendard" pitchFamily="34" charset="0"/>
+                <a:ea typeface="Pretendard" pitchFamily="34" charset="-122"/>
+                <a:cs typeface="Pretendard" pitchFamily="34" charset="-120"/>
+              </a:rPr>
+              <a:t>개발 잠재력</a:t>
+            </a:r>
+            <a:endParaRPr lang="en-US" sz="1400" dirty="0"/>
+          </a:p>
+        </p:txBody>
+      </p:sp>
+      <p:sp>
+        <p:nvSpPr>
+          <p:cNvPr id="17" name="Text 15"/>
+          <p:cNvSpPr/>
+          <p:nvPr/>
+        </p:nvSpPr>
+        <p:spPr>
+          <a:xfrm>
+            <a:off x="3172968" y="2852928"/>
+            <a:ext cx="4251960" cy="402336"/>
+          </a:xfrm>
+          <a:prstGeom prst="rect">
+            <a:avLst/>
+          </a:prstGeom>
+          <a:noFill/>
+          <a:ln/>
+        </p:spPr>
+        <p:txBody>
+          <a:bodyPr wrap="square" lIns="0" tIns="0" rIns="0" bIns="0" rtlCol="0" anchor="ctr"/>
+          <a:lstStyle/>
+          <a:p>
+            <a:pPr indent="0" marL="0">
+              <a:lnSpc>
+                <a:spcPct val="120000"/>
+              </a:lnSpc>
+              <a:buNone/>
+            </a:pPr>
+            <a:r>
+              <a:rPr lang="en-US" sz="1400" b="1" dirty="0">
+                <a:solidFill>
+                  <a:srgbClr val="10161F"/>
+                </a:solidFill>
+                <a:latin typeface="Pretendard" pitchFamily="34" charset="0"/>
+                <a:ea typeface="Pretendard" pitchFamily="34" charset="-122"/>
+                <a:cs typeface="Pretendard" pitchFamily="34" charset="-120"/>
+              </a:rPr>
+              <a:t>신축 시 연면적 증대 가능</a:t>
+            </a:r>
+            <a:endParaRPr lang="en-US" sz="1400" dirty="0"/>
+          </a:p>
+        </p:txBody>
+      </p:sp>
+      <p:sp>
+        <p:nvSpPr>
+          <p:cNvPr id="18" name="Shape 16"/>
           <p:cNvSpPr/>
           <p:nvPr/>
         </p:nvSpPr>
@@ -6174,18 +6495,18 @@
       </p:sp>
       <p:sp>
         <p:nvSpPr>
-          <p:cNvPr id="10" name="Shape 8"/>
+          <p:cNvPr id="19" name="Shape 17"/>
           <p:cNvSpPr/>
           <p:nvPr/>
         </p:nvSpPr>
         <p:spPr>
           <a:xfrm>
             <a:off x="7784287" y="1645920"/>
-            <a:ext cx="3840480" cy="2103120"/>
+            <a:ext cx="3840480" cy="1645920"/>
           </a:xfrm>
           <a:prstGeom prst="roundRect">
             <a:avLst>
-              <a:gd name="adj" fmla="val 2609"/>
+              <a:gd name="adj" fmla="val 3333"/>
             </a:avLst>
           </a:prstGeom>
           <a:solidFill>
@@ -6196,14 +6517,14 @@
       </p:sp>
       <p:sp>
         <p:nvSpPr>
-          <p:cNvPr id="11" name="Shape 9"/>
+          <p:cNvPr id="20" name="Shape 18"/>
           <p:cNvSpPr/>
           <p:nvPr/>
         </p:nvSpPr>
         <p:spPr>
           <a:xfrm>
             <a:off x="7784287" y="1700784"/>
-            <a:ext cx="36576" cy="1993392"/>
+            <a:ext cx="36576" cy="1536192"/>
           </a:xfrm>
           <a:prstGeom prst="rect">
             <a:avLst/>
@@ -6216,7 +6537,7 @@
       </p:sp>
       <p:sp>
         <p:nvSpPr>
-          <p:cNvPr id="12" name="Text 10"/>
+          <p:cNvPr id="21" name="Text 19"/>
           <p:cNvSpPr/>
           <p:nvPr/>
         </p:nvSpPr>
@@ -6244,14 +6565,14 @@
       </p:sp>
       <p:sp>
         <p:nvSpPr>
-          <p:cNvPr id="13" name="Text 11"/>
+          <p:cNvPr id="22" name="Text 20"/>
           <p:cNvSpPr/>
           <p:nvPr/>
         </p:nvSpPr>
         <p:spPr>
           <a:xfrm>
             <a:off x="7967167" y="1975104"/>
-            <a:ext cx="3511296" cy="1700784"/>
+            <a:ext cx="3511296" cy="1243584"/>
           </a:xfrm>
           <a:prstGeom prst="rect">
             <a:avLst/>
@@ -6278,7 +6599,7 @@
                 <a:ea typeface="Pretendard" pitchFamily="34" charset="-122"/>
                 <a:cs typeface="Pretendard" pitchFamily="34" charset="-120"/>
               </a:rPr>
-              <a:t>{"ok":true,"mocked":true,"extractedFields":{"area_signal":"역삼","asset_type":"오피스빌딩","price_band":"300억","size_signal":"3</a:t>
+              <a:t>본 자산은 대지면적 약 303평(약 1001.7㎡), 용도지역 일반상업지역에 위치하여 신축 및 재건축 개발 가치가 매우 높습니다.</a:t>
             </a:r>
             <a:endParaRPr lang="en-US" sz="930" dirty="0"/>
           </a:p>
@@ -6286,37 +6607,149 @@
       </p:sp>
       <p:sp>
         <p:nvSpPr>
-          <p:cNvPr id="14" name="Text 12"/>
-          <p:cNvSpPr/>
-          <p:nvPr/>
-        </p:nvSpPr>
-        <p:spPr>
-          <a:xfrm>
-            <a:off x="566928" y="6382512"/>
-            <a:ext cx="7315200" cy="219456"/>
-          </a:xfrm>
-          <a:prstGeom prst="rect">
-            <a:avLst/>
-          </a:prstGeom>
-          <a:noFill/>
-          <a:ln/>
-        </p:spPr>
-        <p:txBody>
-          <a:bodyPr wrap="square" lIns="0" tIns="0" rIns="0" bIns="0" rtlCol="0" anchor="ctr"/>
-          <a:lstStyle/>
-          <a:p>
-            <a:pPr indent="0" marL="0">
-              <a:buNone/>
-            </a:pPr>
-            <a:r>
-              <a:rPr lang="en-US" sz="800" dirty="0">
-                <a:solidFill>
-                  <a:srgbClr val="718096"/>
+          <p:cNvPr id="23" name="Shape 21"/>
+          <p:cNvSpPr/>
+          <p:nvPr/>
+        </p:nvSpPr>
+        <p:spPr>
+          <a:xfrm>
+            <a:off x="7784287" y="3493008"/>
+            <a:ext cx="3840480" cy="1645920"/>
+          </a:xfrm>
+          <a:prstGeom prst="roundRect">
+            <a:avLst>
+              <a:gd name="adj" fmla="val 3333"/>
+            </a:avLst>
+          </a:prstGeom>
+          <a:solidFill>
+            <a:srgbClr val="BEE3F8"/>
+          </a:solidFill>
+          <a:ln/>
+        </p:spPr>
+      </p:sp>
+      <p:sp>
+        <p:nvSpPr>
+          <p:cNvPr id="24" name="Shape 22"/>
+          <p:cNvSpPr/>
+          <p:nvPr/>
+        </p:nvSpPr>
+        <p:spPr>
+          <a:xfrm>
+            <a:off x="7784287" y="3547872"/>
+            <a:ext cx="36576" cy="1536192"/>
+          </a:xfrm>
+          <a:prstGeom prst="rect">
+            <a:avLst/>
+          </a:prstGeom>
+          <a:solidFill>
+            <a:srgbClr val="2B6CB0"/>
+          </a:solidFill>
+          <a:ln/>
+        </p:spPr>
+      </p:sp>
+      <p:sp>
+        <p:nvSpPr>
+          <p:cNvPr id="25" name="Text 23"/>
+          <p:cNvSpPr/>
+          <p:nvPr/>
+        </p:nvSpPr>
+        <p:spPr>
+          <a:xfrm>
+            <a:off x="7967167" y="3602736"/>
+            <a:ext cx="3511296" cy="201168"/>
+          </a:xfrm>
+          <a:prstGeom prst="rect">
+            <a:avLst/>
+          </a:prstGeom>
+          <a:noFill/>
+          <a:ln/>
+        </p:spPr>
+        <p:txBody>
+          <a:bodyPr wrap="square" lIns="0" tIns="0" rIns="0" bIns="0" rtlCol="0" anchor="ctr"/>
+          <a:lstStyle/>
+          <a:p>
+            <a:pPr indent="0" marL="0">
+              <a:buNone/>
+            </a:pPr>
+            <a:endParaRPr lang="en-US" sz="1050" dirty="0"/>
+          </a:p>
+        </p:txBody>
+      </p:sp>
+      <p:sp>
+        <p:nvSpPr>
+          <p:cNvPr id="26" name="Text 24"/>
+          <p:cNvSpPr/>
+          <p:nvPr/>
+        </p:nvSpPr>
+        <p:spPr>
+          <a:xfrm>
+            <a:off x="7967167" y="3822192"/>
+            <a:ext cx="3511296" cy="1243584"/>
+          </a:xfrm>
+          <a:prstGeom prst="rect">
+            <a:avLst/>
+          </a:prstGeom>
+          <a:noFill/>
+          <a:ln/>
+        </p:spPr>
+        <p:txBody>
+          <a:bodyPr wrap="square" lIns="0" tIns="0" rIns="0" bIns="0" rtlCol="0" anchor="t"/>
+          <a:lstStyle/>
+          <a:p>
+            <a:pPr indent="0" marL="0">
+              <a:lnSpc>
+                <a:spcPct val="120000"/>
+              </a:lnSpc>
+              <a:buNone/>
+            </a:pPr>
+            <a:r>
+              <a:rPr lang="en-US" sz="930" dirty="0">
+                <a:solidFill>
+                  <a:srgbClr val="10161F"/>
                 </a:solidFill>
                 <a:latin typeface="Pretendard" pitchFamily="34" charset="0"/>
                 <a:ea typeface="Pretendard" pitchFamily="34" charset="-122"/>
                 <a:cs typeface="Pretendard" pitchFamily="34" charset="-120"/>
               </a:rPr>
+              <a:t>[임대] 건축물대장 및 토지이용계획확인서 기준 | 신축 설계 검토 필요</a:t>
+            </a:r>
+            <a:endParaRPr lang="en-US" sz="930" dirty="0"/>
+          </a:p>
+        </p:txBody>
+      </p:sp>
+      <p:sp>
+        <p:nvSpPr>
+          <p:cNvPr id="27" name="Text 25"/>
+          <p:cNvSpPr/>
+          <p:nvPr/>
+        </p:nvSpPr>
+        <p:spPr>
+          <a:xfrm>
+            <a:off x="566928" y="6382512"/>
+            <a:ext cx="7315200" cy="219456"/>
+          </a:xfrm>
+          <a:prstGeom prst="rect">
+            <a:avLst/>
+          </a:prstGeom>
+          <a:noFill/>
+          <a:ln/>
+        </p:spPr>
+        <p:txBody>
+          <a:bodyPr wrap="square" lIns="0" tIns="0" rIns="0" bIns="0" rtlCol="0" anchor="ctr"/>
+          <a:lstStyle/>
+          <a:p>
+            <a:pPr indent="0" marL="0">
+              <a:buNone/>
+            </a:pPr>
+            <a:r>
+              <a:rPr lang="en-US" sz="800" dirty="0">
+                <a:solidFill>
+                  <a:srgbClr val="718096"/>
+                </a:solidFill>
+                <a:latin typeface="Pretendard" pitchFamily="34" charset="0"/>
+                <a:ea typeface="Pretendard" pitchFamily="34" charset="-122"/>
+                <a:cs typeface="Pretendard" pitchFamily="34" charset="-120"/>
+              </a:rPr>
               <a:t>크리딜   |   </a:t>
             </a:r>
             <a:endParaRPr lang="en-US" sz="800" dirty="0"/>
@@ -6325,7 +6758,7 @@
       </p:sp>
       <p:sp>
         <p:nvSpPr>
-          <p:cNvPr id="15" name="Text 13"/>
+          <p:cNvPr id="28" name="Text 26"/>
           <p:cNvSpPr/>
           <p:nvPr/>
         </p:nvSpPr>
@@ -6533,13 +6966,52 @@
       </p:sp>
       <p:sp>
         <p:nvSpPr>
-          <p:cNvPr id="6" name="Shape 4"/>
+          <p:cNvPr id="6" name="Text 4"/>
           <p:cNvSpPr/>
           <p:nvPr/>
         </p:nvSpPr>
         <p:spPr>
           <a:xfrm>
             <a:off x="566928" y="1325880"/>
+            <a:ext cx="11057839" cy="237744"/>
+          </a:xfrm>
+          <a:prstGeom prst="rect">
+            <a:avLst/>
+          </a:prstGeom>
+          <a:noFill/>
+          <a:ln/>
+        </p:spPr>
+        <p:txBody>
+          <a:bodyPr wrap="square" lIns="0" tIns="0" rIns="0" bIns="0" rtlCol="0" anchor="ctr"/>
+          <a:lstStyle/>
+          <a:p>
+            <a:pPr indent="0" marL="0">
+              <a:buNone/>
+            </a:pPr>
+            <a:r>
+              <a:rPr lang="en-US" sz="1100" b="1" dirty="0">
+                <a:solidFill>
+                  <a:srgbClr val="10161F"/>
+                </a:solidFill>
+                <a:latin typeface="Pretendard" pitchFamily="34" charset="0"/>
+                <a:ea typeface="Pretendard" pitchFamily="34" charset="-122"/>
+                <a:cs typeface="Pretendard" pitchFamily="34" charset="-120"/>
+              </a:rPr>
+              <a:t>신축 사업수지 및 개발 타당성 분석</a:t>
+            </a:r>
+            <a:endParaRPr lang="en-US" sz="1100" dirty="0"/>
+          </a:p>
+        </p:txBody>
+      </p:sp>
+      <p:sp>
+        <p:nvSpPr>
+          <p:cNvPr id="7" name="Shape 5"/>
+          <p:cNvSpPr/>
+          <p:nvPr/>
+        </p:nvSpPr>
+        <p:spPr>
+          <a:xfrm>
+            <a:off x="566928" y="1737360"/>
             <a:ext cx="11057839" cy="0"/>
           </a:xfrm>
           <a:prstGeom prst="line">
@@ -6556,14 +7028,598 @@
       </p:sp>
       <p:sp>
         <p:nvSpPr>
-          <p:cNvPr id="7" name="Shape 5"/>
-          <p:cNvSpPr/>
-          <p:nvPr/>
-        </p:nvSpPr>
-        <p:spPr>
-          <a:xfrm>
-            <a:off x="566928" y="1645920"/>
-            <a:ext cx="11057839" cy="1280160"/>
+          <p:cNvPr id="8" name="Shape 6"/>
+          <p:cNvSpPr/>
+          <p:nvPr/>
+        </p:nvSpPr>
+        <p:spPr>
+          <a:xfrm>
+            <a:off x="566928" y="1965960"/>
+            <a:ext cx="3576218" cy="1188720"/>
+          </a:xfrm>
+          <a:prstGeom prst="roundRect">
+            <a:avLst>
+              <a:gd name="adj" fmla="val 4615"/>
+            </a:avLst>
+          </a:prstGeom>
+          <a:solidFill>
+            <a:srgbClr val="F7FAFC"/>
+          </a:solidFill>
+          <a:ln w="6350">
+            <a:solidFill>
+              <a:srgbClr val="CBD5E0"/>
+            </a:solidFill>
+            <a:prstDash val="solid"/>
+          </a:ln>
+        </p:spPr>
+      </p:sp>
+      <p:sp>
+        <p:nvSpPr>
+          <p:cNvPr id="9" name="Text 7"/>
+          <p:cNvSpPr/>
+          <p:nvPr/>
+        </p:nvSpPr>
+        <p:spPr>
+          <a:xfrm>
+            <a:off x="731520" y="2093976"/>
+            <a:ext cx="3247034" cy="201168"/>
+          </a:xfrm>
+          <a:prstGeom prst="rect">
+            <a:avLst/>
+          </a:prstGeom>
+          <a:noFill/>
+          <a:ln/>
+        </p:spPr>
+        <p:txBody>
+          <a:bodyPr wrap="square" lIns="0" tIns="0" rIns="0" bIns="0" rtlCol="0" anchor="ctr"/>
+          <a:lstStyle/>
+          <a:p>
+            <a:pPr indent="0" marL="0">
+              <a:buNone/>
+            </a:pPr>
+            <a:r>
+              <a:rPr lang="en-US" sz="950" dirty="0">
+                <a:solidFill>
+                  <a:srgbClr val="718096"/>
+                </a:solidFill>
+                <a:latin typeface="Pretendard" pitchFamily="34" charset="0"/>
+                <a:ea typeface="Pretendard" pitchFamily="34" charset="-122"/>
+                <a:cs typeface="Pretendard" pitchFamily="34" charset="-120"/>
+              </a:rPr>
+              <a:t>토지 매입비</a:t>
+            </a:r>
+            <a:endParaRPr lang="en-US" sz="950" dirty="0"/>
+          </a:p>
+        </p:txBody>
+      </p:sp>
+      <p:sp>
+        <p:nvSpPr>
+          <p:cNvPr id="10" name="Text 8"/>
+          <p:cNvSpPr/>
+          <p:nvPr/>
+        </p:nvSpPr>
+        <p:spPr>
+          <a:xfrm>
+            <a:off x="731520" y="2276856"/>
+            <a:ext cx="3247034" cy="402336"/>
+          </a:xfrm>
+          <a:prstGeom prst="rect">
+            <a:avLst/>
+          </a:prstGeom>
+          <a:noFill/>
+          <a:ln/>
+        </p:spPr>
+        <p:txBody>
+          <a:bodyPr wrap="square" lIns="0" tIns="0" rIns="0" bIns="0" rtlCol="0" anchor="ctr">
+            <a:normAutofit/>
+          </a:bodyPr>
+          <a:lstStyle/>
+          <a:p>
+            <a:pPr indent="0" marL="0">
+              <a:buNone/>
+            </a:pPr>
+            <a:r>
+              <a:rPr lang="en-US" sz="2200" b="1" dirty="0">
+                <a:solidFill>
+                  <a:srgbClr val="10161F"/>
+                </a:solidFill>
+                <a:latin typeface="Pretendard" pitchFamily="34" charset="0"/>
+                <a:ea typeface="Pretendard" pitchFamily="34" charset="-122"/>
+                <a:cs typeface="Pretendard" pitchFamily="34" charset="-120"/>
+              </a:rPr>
+              <a:t>희망가 기준</a:t>
+            </a:r>
+            <a:endParaRPr lang="en-US" sz="2200" dirty="0"/>
+          </a:p>
+        </p:txBody>
+      </p:sp>
+      <p:sp>
+        <p:nvSpPr>
+          <p:cNvPr id="11" name="Text 9"/>
+          <p:cNvSpPr/>
+          <p:nvPr/>
+        </p:nvSpPr>
+        <p:spPr>
+          <a:xfrm>
+            <a:off x="731520" y="2642616"/>
+            <a:ext cx="3247034" cy="164592"/>
+          </a:xfrm>
+          <a:prstGeom prst="rect">
+            <a:avLst/>
+          </a:prstGeom>
+          <a:noFill/>
+          <a:ln/>
+        </p:spPr>
+        <p:txBody>
+          <a:bodyPr wrap="square" lIns="0" tIns="0" rIns="0" bIns="0" rtlCol="0" anchor="ctr"/>
+          <a:lstStyle/>
+          <a:p>
+            <a:pPr indent="0" marL="0">
+              <a:buNone/>
+            </a:pPr>
+            <a:r>
+              <a:rPr lang="en-US" sz="880" dirty="0">
+                <a:solidFill>
+                  <a:srgbClr val="718096"/>
+                </a:solidFill>
+                <a:latin typeface="Pretendard" pitchFamily="34" charset="0"/>
+                <a:ea typeface="Pretendard" pitchFamily="34" charset="-122"/>
+                <a:cs typeface="Pretendard" pitchFamily="34" charset="-120"/>
+              </a:rPr>
+              <a:t>사업비 내 비중 산출</a:t>
+            </a:r>
+            <a:endParaRPr lang="en-US" sz="880" dirty="0"/>
+          </a:p>
+        </p:txBody>
+      </p:sp>
+      <p:sp>
+        <p:nvSpPr>
+          <p:cNvPr id="12" name="Shape 10"/>
+          <p:cNvSpPr/>
+          <p:nvPr/>
+        </p:nvSpPr>
+        <p:spPr>
+          <a:xfrm>
+            <a:off x="4307738" y="1965960"/>
+            <a:ext cx="3576218" cy="1188720"/>
+          </a:xfrm>
+          <a:prstGeom prst="roundRect">
+            <a:avLst>
+              <a:gd name="adj" fmla="val 4615"/>
+            </a:avLst>
+          </a:prstGeom>
+          <a:solidFill>
+            <a:srgbClr val="F7FAFC"/>
+          </a:solidFill>
+          <a:ln w="6350">
+            <a:solidFill>
+              <a:srgbClr val="CBD5E0"/>
+            </a:solidFill>
+            <a:prstDash val="solid"/>
+          </a:ln>
+        </p:spPr>
+      </p:sp>
+      <p:sp>
+        <p:nvSpPr>
+          <p:cNvPr id="13" name="Text 11"/>
+          <p:cNvSpPr/>
+          <p:nvPr/>
+        </p:nvSpPr>
+        <p:spPr>
+          <a:xfrm>
+            <a:off x="4472330" y="2093976"/>
+            <a:ext cx="3247034" cy="201168"/>
+          </a:xfrm>
+          <a:prstGeom prst="rect">
+            <a:avLst/>
+          </a:prstGeom>
+          <a:noFill/>
+          <a:ln/>
+        </p:spPr>
+        <p:txBody>
+          <a:bodyPr wrap="square" lIns="0" tIns="0" rIns="0" bIns="0" rtlCol="0" anchor="ctr"/>
+          <a:lstStyle/>
+          <a:p>
+            <a:pPr indent="0" marL="0">
+              <a:buNone/>
+            </a:pPr>
+            <a:r>
+              <a:rPr lang="en-US" sz="950" dirty="0">
+                <a:solidFill>
+                  <a:srgbClr val="718096"/>
+                </a:solidFill>
+                <a:latin typeface="Pretendard" pitchFamily="34" charset="0"/>
+                <a:ea typeface="Pretendard" pitchFamily="34" charset="-122"/>
+                <a:cs typeface="Pretendard" pitchFamily="34" charset="-120"/>
+              </a:rPr>
+              <a:t>추정 신축 공사비</a:t>
+            </a:r>
+            <a:endParaRPr lang="en-US" sz="950" dirty="0"/>
+          </a:p>
+        </p:txBody>
+      </p:sp>
+      <p:sp>
+        <p:nvSpPr>
+          <p:cNvPr id="14" name="Text 12"/>
+          <p:cNvSpPr/>
+          <p:nvPr/>
+        </p:nvSpPr>
+        <p:spPr>
+          <a:xfrm>
+            <a:off x="4472330" y="2276856"/>
+            <a:ext cx="3247034" cy="402336"/>
+          </a:xfrm>
+          <a:prstGeom prst="rect">
+            <a:avLst/>
+          </a:prstGeom>
+          <a:noFill/>
+          <a:ln/>
+        </p:spPr>
+        <p:txBody>
+          <a:bodyPr wrap="square" lIns="0" tIns="0" rIns="0" bIns="0" rtlCol="0" anchor="ctr">
+            <a:normAutofit/>
+          </a:bodyPr>
+          <a:lstStyle/>
+          <a:p>
+            <a:pPr indent="0" marL="0">
+              <a:buNone/>
+            </a:pPr>
+            <a:r>
+              <a:rPr lang="en-US" sz="2200" b="1" dirty="0">
+                <a:solidFill>
+                  <a:srgbClr val="10161F"/>
+                </a:solidFill>
+                <a:latin typeface="Pretendard" pitchFamily="34" charset="0"/>
+                <a:ea typeface="Pretendard" pitchFamily="34" charset="-122"/>
+                <a:cs typeface="Pretendard" pitchFamily="34" charset="-120"/>
+              </a:rPr>
+              <a:t>평당 공사비 산정</a:t>
+            </a:r>
+            <a:endParaRPr lang="en-US" sz="2200" dirty="0"/>
+          </a:p>
+        </p:txBody>
+      </p:sp>
+      <p:sp>
+        <p:nvSpPr>
+          <p:cNvPr id="15" name="Text 13"/>
+          <p:cNvSpPr/>
+          <p:nvPr/>
+        </p:nvSpPr>
+        <p:spPr>
+          <a:xfrm>
+            <a:off x="4472330" y="2642616"/>
+            <a:ext cx="3247034" cy="164592"/>
+          </a:xfrm>
+          <a:prstGeom prst="rect">
+            <a:avLst/>
+          </a:prstGeom>
+          <a:noFill/>
+          <a:ln/>
+        </p:spPr>
+        <p:txBody>
+          <a:bodyPr wrap="square" lIns="0" tIns="0" rIns="0" bIns="0" rtlCol="0" anchor="ctr"/>
+          <a:lstStyle/>
+          <a:p>
+            <a:pPr indent="0" marL="0">
+              <a:buNone/>
+            </a:pPr>
+            <a:r>
+              <a:rPr lang="en-US" sz="880" dirty="0">
+                <a:solidFill>
+                  <a:srgbClr val="718096"/>
+                </a:solidFill>
+                <a:latin typeface="Pretendard" pitchFamily="34" charset="0"/>
+                <a:ea typeface="Pretendard" pitchFamily="34" charset="-122"/>
+                <a:cs typeface="Pretendard" pitchFamily="34" charset="-120"/>
+              </a:rPr>
+              <a:t>신축 연면적 기준</a:t>
+            </a:r>
+            <a:endParaRPr lang="en-US" sz="880" dirty="0"/>
+          </a:p>
+        </p:txBody>
+      </p:sp>
+      <p:sp>
+        <p:nvSpPr>
+          <p:cNvPr id="16" name="Shape 14"/>
+          <p:cNvSpPr/>
+          <p:nvPr/>
+        </p:nvSpPr>
+        <p:spPr>
+          <a:xfrm>
+            <a:off x="8048549" y="1965960"/>
+            <a:ext cx="3576218" cy="1188720"/>
+          </a:xfrm>
+          <a:prstGeom prst="roundRect">
+            <a:avLst>
+              <a:gd name="adj" fmla="val 4615"/>
+            </a:avLst>
+          </a:prstGeom>
+          <a:solidFill>
+            <a:srgbClr val="F7FAFC"/>
+          </a:solidFill>
+          <a:ln w="6350">
+            <a:solidFill>
+              <a:srgbClr val="CBD5E0"/>
+            </a:solidFill>
+            <a:prstDash val="solid"/>
+          </a:ln>
+        </p:spPr>
+      </p:sp>
+      <p:sp>
+        <p:nvSpPr>
+          <p:cNvPr id="17" name="Text 15"/>
+          <p:cNvSpPr/>
+          <p:nvPr/>
+        </p:nvSpPr>
+        <p:spPr>
+          <a:xfrm>
+            <a:off x="8213141" y="2093976"/>
+            <a:ext cx="3247034" cy="201168"/>
+          </a:xfrm>
+          <a:prstGeom prst="rect">
+            <a:avLst/>
+          </a:prstGeom>
+          <a:noFill/>
+          <a:ln/>
+        </p:spPr>
+        <p:txBody>
+          <a:bodyPr wrap="square" lIns="0" tIns="0" rIns="0" bIns="0" rtlCol="0" anchor="ctr"/>
+          <a:lstStyle/>
+          <a:p>
+            <a:pPr indent="0" marL="0">
+              <a:buNone/>
+            </a:pPr>
+            <a:r>
+              <a:rPr lang="en-US" sz="950" dirty="0">
+                <a:solidFill>
+                  <a:srgbClr val="718096"/>
+                </a:solidFill>
+                <a:latin typeface="Pretendard" pitchFamily="34" charset="0"/>
+                <a:ea typeface="Pretendard" pitchFamily="34" charset="-122"/>
+                <a:cs typeface="Pretendard" pitchFamily="34" charset="-120"/>
+              </a:rPr>
+              <a:t>예상 총 사업비</a:t>
+            </a:r>
+            <a:endParaRPr lang="en-US" sz="950" dirty="0"/>
+          </a:p>
+        </p:txBody>
+      </p:sp>
+      <p:sp>
+        <p:nvSpPr>
+          <p:cNvPr id="18" name="Text 16"/>
+          <p:cNvSpPr/>
+          <p:nvPr/>
+        </p:nvSpPr>
+        <p:spPr>
+          <a:xfrm>
+            <a:off x="8213141" y="2276856"/>
+            <a:ext cx="3247034" cy="402336"/>
+          </a:xfrm>
+          <a:prstGeom prst="rect">
+            <a:avLst/>
+          </a:prstGeom>
+          <a:noFill/>
+          <a:ln/>
+        </p:spPr>
+        <p:txBody>
+          <a:bodyPr wrap="square" lIns="0" tIns="0" rIns="0" bIns="0" rtlCol="0" anchor="ctr">
+            <a:normAutofit/>
+          </a:bodyPr>
+          <a:lstStyle/>
+          <a:p>
+            <a:pPr indent="0" marL="0">
+              <a:buNone/>
+            </a:pPr>
+            <a:r>
+              <a:rPr lang="en-US" sz="2200" b="1" dirty="0">
+                <a:solidFill>
+                  <a:srgbClr val="10161F"/>
+                </a:solidFill>
+                <a:latin typeface="Pretendard" pitchFamily="34" charset="0"/>
+                <a:ea typeface="Pretendard" pitchFamily="34" charset="-122"/>
+                <a:cs typeface="Pretendard" pitchFamily="34" charset="-120"/>
+              </a:rPr>
+              <a:t>토지비 + 공사비 + 금융/기타</a:t>
+            </a:r>
+            <a:endParaRPr lang="en-US" sz="2200" dirty="0"/>
+          </a:p>
+        </p:txBody>
+      </p:sp>
+      <p:sp>
+        <p:nvSpPr>
+          <p:cNvPr id="19" name="Text 17"/>
+          <p:cNvSpPr/>
+          <p:nvPr/>
+        </p:nvSpPr>
+        <p:spPr>
+          <a:xfrm>
+            <a:off x="8213141" y="2642616"/>
+            <a:ext cx="3247034" cy="164592"/>
+          </a:xfrm>
+          <a:prstGeom prst="rect">
+            <a:avLst/>
+          </a:prstGeom>
+          <a:noFill/>
+          <a:ln/>
+        </p:spPr>
+        <p:txBody>
+          <a:bodyPr wrap="square" lIns="0" tIns="0" rIns="0" bIns="0" rtlCol="0" anchor="ctr"/>
+          <a:lstStyle/>
+          <a:p>
+            <a:pPr indent="0" marL="0">
+              <a:buNone/>
+            </a:pPr>
+            <a:r>
+              <a:rPr lang="en-US" sz="880" dirty="0">
+                <a:solidFill>
+                  <a:srgbClr val="718096"/>
+                </a:solidFill>
+                <a:latin typeface="Pretendard" pitchFamily="34" charset="0"/>
+                <a:ea typeface="Pretendard" pitchFamily="34" charset="-122"/>
+                <a:cs typeface="Pretendard" pitchFamily="34" charset="-120"/>
+              </a:rPr>
+              <a:t>총 투자금</a:t>
+            </a:r>
+            <a:endParaRPr lang="en-US" sz="880" dirty="0"/>
+          </a:p>
+        </p:txBody>
+      </p:sp>
+      <p:sp>
+        <p:nvSpPr>
+          <p:cNvPr id="20" name="Shape 18"/>
+          <p:cNvSpPr/>
+          <p:nvPr/>
+        </p:nvSpPr>
+        <p:spPr>
+          <a:xfrm>
+            <a:off x="566928" y="3319272"/>
+            <a:ext cx="3576218" cy="1051560"/>
+          </a:xfrm>
+          <a:prstGeom prst="roundRect">
+            <a:avLst>
+              <a:gd name="adj" fmla="val 5217"/>
+            </a:avLst>
+          </a:prstGeom>
+          <a:solidFill>
+            <a:srgbClr val="F7FAFC"/>
+          </a:solidFill>
+          <a:ln w="6350">
+            <a:solidFill>
+              <a:srgbClr val="CBD5E0"/>
+            </a:solidFill>
+            <a:prstDash val="solid"/>
+          </a:ln>
+        </p:spPr>
+      </p:sp>
+      <p:sp>
+        <p:nvSpPr>
+          <p:cNvPr id="21" name="Text 19"/>
+          <p:cNvSpPr/>
+          <p:nvPr/>
+        </p:nvSpPr>
+        <p:spPr>
+          <a:xfrm>
+            <a:off x="731520" y="3447288"/>
+            <a:ext cx="3247034" cy="201168"/>
+          </a:xfrm>
+          <a:prstGeom prst="rect">
+            <a:avLst/>
+          </a:prstGeom>
+          <a:noFill/>
+          <a:ln/>
+        </p:spPr>
+        <p:txBody>
+          <a:bodyPr wrap="square" lIns="0" tIns="0" rIns="0" bIns="0" rtlCol="0" anchor="ctr"/>
+          <a:lstStyle/>
+          <a:p>
+            <a:pPr indent="0" marL="0">
+              <a:buNone/>
+            </a:pPr>
+            <a:r>
+              <a:rPr lang="en-US" sz="950" dirty="0">
+                <a:solidFill>
+                  <a:srgbClr val="718096"/>
+                </a:solidFill>
+                <a:latin typeface="Pretendard" pitchFamily="34" charset="0"/>
+                <a:ea typeface="Pretendard" pitchFamily="34" charset="-122"/>
+                <a:cs typeface="Pretendard" pitchFamily="34" charset="-120"/>
+              </a:rPr>
+              <a:t>예상 개발 이익률</a:t>
+            </a:r>
+            <a:endParaRPr lang="en-US" sz="950" dirty="0"/>
+          </a:p>
+        </p:txBody>
+      </p:sp>
+      <p:sp>
+        <p:nvSpPr>
+          <p:cNvPr id="22" name="Text 20"/>
+          <p:cNvSpPr/>
+          <p:nvPr/>
+        </p:nvSpPr>
+        <p:spPr>
+          <a:xfrm>
+            <a:off x="731520" y="3630168"/>
+            <a:ext cx="3247034" cy="402336"/>
+          </a:xfrm>
+          <a:prstGeom prst="rect">
+            <a:avLst/>
+          </a:prstGeom>
+          <a:noFill/>
+          <a:ln/>
+        </p:spPr>
+        <p:txBody>
+          <a:bodyPr wrap="square" lIns="0" tIns="0" rIns="0" bIns="0" rtlCol="0" anchor="ctr">
+            <a:normAutofit/>
+          </a:bodyPr>
+          <a:lstStyle/>
+          <a:p>
+            <a:pPr indent="0" marL="0">
+              <a:buNone/>
+            </a:pPr>
+            <a:r>
+              <a:rPr lang="en-US" sz="1800" b="1" dirty="0">
+                <a:solidFill>
+                  <a:srgbClr val="10161F"/>
+                </a:solidFill>
+                <a:latin typeface="Pretendard" pitchFamily="34" charset="0"/>
+                <a:ea typeface="Pretendard" pitchFamily="34" charset="-122"/>
+                <a:cs typeface="Pretendard" pitchFamily="34" charset="-120"/>
+              </a:rPr>
+              <a:t>15% ~ 25% 수준</a:t>
+            </a:r>
+            <a:endParaRPr lang="en-US" sz="1800" dirty="0"/>
+          </a:p>
+        </p:txBody>
+      </p:sp>
+      <p:sp>
+        <p:nvSpPr>
+          <p:cNvPr id="23" name="Text 21"/>
+          <p:cNvSpPr/>
+          <p:nvPr/>
+        </p:nvSpPr>
+        <p:spPr>
+          <a:xfrm>
+            <a:off x="731520" y="3995928"/>
+            <a:ext cx="3247034" cy="164592"/>
+          </a:xfrm>
+          <a:prstGeom prst="rect">
+            <a:avLst/>
+          </a:prstGeom>
+          <a:noFill/>
+          <a:ln/>
+        </p:spPr>
+        <p:txBody>
+          <a:bodyPr wrap="square" lIns="0" tIns="0" rIns="0" bIns="0" rtlCol="0" anchor="ctr"/>
+          <a:lstStyle/>
+          <a:p>
+            <a:pPr indent="0" marL="0">
+              <a:buNone/>
+            </a:pPr>
+            <a:r>
+              <a:rPr lang="en-US" sz="880" dirty="0">
+                <a:solidFill>
+                  <a:srgbClr val="718096"/>
+                </a:solidFill>
+                <a:latin typeface="Pretendard" pitchFamily="34" charset="0"/>
+                <a:ea typeface="Pretendard" pitchFamily="34" charset="-122"/>
+                <a:cs typeface="Pretendard" pitchFamily="34" charset="-120"/>
+              </a:rPr>
+              <a:t>시장 상황 연동</a:t>
+            </a:r>
+            <a:endParaRPr lang="en-US" sz="880" dirty="0"/>
+          </a:p>
+        </p:txBody>
+      </p:sp>
+      <p:sp>
+        <p:nvSpPr>
+          <p:cNvPr id="24" name="Shape 22"/>
+          <p:cNvSpPr/>
+          <p:nvPr/>
+        </p:nvSpPr>
+        <p:spPr>
+          <a:xfrm>
+            <a:off x="566928" y="4626864"/>
+            <a:ext cx="5437480" cy="1280160"/>
           </a:xfrm>
           <a:prstGeom prst="roundRect">
             <a:avLst>
@@ -6578,13 +7634,13 @@
       </p:sp>
       <p:sp>
         <p:nvSpPr>
-          <p:cNvPr id="8" name="Shape 6"/>
-          <p:cNvSpPr/>
-          <p:nvPr/>
-        </p:nvSpPr>
-        <p:spPr>
-          <a:xfrm>
-            <a:off x="566928" y="1700784"/>
+          <p:cNvPr id="25" name="Shape 23"/>
+          <p:cNvSpPr/>
+          <p:nvPr/>
+        </p:nvSpPr>
+        <p:spPr>
+          <a:xfrm>
+            <a:off x="566928" y="4681728"/>
             <a:ext cx="36576" cy="1170432"/>
           </a:xfrm>
           <a:prstGeom prst="rect">
@@ -6598,14 +7654,14 @@
       </p:sp>
       <p:sp>
         <p:nvSpPr>
-          <p:cNvPr id="9" name="Text 7"/>
-          <p:cNvSpPr/>
-          <p:nvPr/>
-        </p:nvSpPr>
-        <p:spPr>
-          <a:xfrm>
-            <a:off x="749808" y="1755648"/>
-            <a:ext cx="10728655" cy="201168"/>
+          <p:cNvPr id="26" name="Text 24"/>
+          <p:cNvSpPr/>
+          <p:nvPr/>
+        </p:nvSpPr>
+        <p:spPr>
+          <a:xfrm>
+            <a:off x="749808" y="4736592"/>
+            <a:ext cx="5108296" cy="201168"/>
           </a:xfrm>
           <a:prstGeom prst="rect">
             <a:avLst/>
@@ -6637,14 +7693,14 @@
       </p:sp>
       <p:sp>
         <p:nvSpPr>
-          <p:cNvPr id="10" name="Text 8"/>
-          <p:cNvSpPr/>
-          <p:nvPr/>
-        </p:nvSpPr>
-        <p:spPr>
-          <a:xfrm>
-            <a:off x="749808" y="1975104"/>
-            <a:ext cx="10728655" cy="877824"/>
+          <p:cNvPr id="27" name="Text 25"/>
+          <p:cNvSpPr/>
+          <p:nvPr/>
+        </p:nvSpPr>
+        <p:spPr>
+          <a:xfrm>
+            <a:off x="749808" y="4956048"/>
+            <a:ext cx="5108296" cy="877824"/>
           </a:xfrm>
           <a:prstGeom prst="rect">
             <a:avLst/>
@@ -6671,7 +7727,7 @@
                 <a:ea typeface="Pretendard" pitchFamily="34" charset="-122"/>
                 <a:cs typeface="Pretendard" pitchFamily="34" charset="-120"/>
               </a:rPr>
-              <a:t>{"ok":true,"mocked":true,"extractedFields":{"area_signal":"역삼","asset_type":"오피스빌딩","price_band":"300억","size_signal":"3000평(약 9917.4㎡)"},"extractedFacts":{"region":"역삼","exactAddressCandidate":"역삼동 742-1","assetType":"오피스빌딩","priceText":"300억","sizeText":"3000평(약 9917.4㎡)","currentUse":"오피스","currentUseSignal":"근린생활시설","leaseSignal":"임대중","vacancySignal":"공실없음","tenantNames":["쿠팡","네이버"],"unitRentTexts":["301호: 1500만"],"sellerMotivationText":"자산 효율화","brokerNotes":["초역세권 매물"]},"detectedSensitiveFields":["exact_address","tenant_name"],"ambiguousFields":[],"warnings":[],"areaSignal":"역삼","assetType":"오피스빌딩","priceBand":"300억","sizeSignal":"3000평(약 9917.4㎡)","dealType":"매각","buildingName":"역삼 센트럴타워","exactAddress":"역삼동 742-1","totalFloorArea":9917.3,"buildYear":2015,"currentUseSignal":"근린생활시설","vacancySignal":"공실 없음","fitSummary":"초역세권 근생 빌딩으로 시행/사옥 매입에 최적화","cautionSummary":"주요 임차 업종 만기 조율 필요","hiddenFields":["exact_address","seller_motivation"],"confidence":{"areaSignal":"confirmed","assetType":"confirmed","priceBand":"ai_hypothesis","fitSummary":"ai_hypothesis"},"missingData":["sizeSignal"],"boundaryNote":"본 자료는 실거래 통계 기반 참고치입니다.","buyerType":"법인 사옥형","budgetRange":{"min":50,"max":80,"display":"50억~80억"},"preferredRegions":["강남","성수"],"assetTypes":["꼬마빌딩","사옥용"],"purchasePurpose":"사옥용 매입","mustHave":["초역세권","주차"],"niceToHave":["테라스","루프탑"],"riskTolerance":"medium","financingNote":"자본금 50% 준비","missingQuestions":["구체적인 입주 시기가 언제인가요?","선호하는 수익률이 있나요?"],"privacyNotes":["연락처 비공개"],"fitReasons":["매수자 예산(50-80억)에 부합하는 매물입니다.","요청하신 성수/강남 권역에 해당합니다."],"cautionReasons":["요청한 용도와 달리 명도 협의가 다소 필요합니다."],"recommendedNextAction":"현장 답사 제안","kakaoMessage":"안녕하세요! 요청하신 조건에 부합하는 추천 매물이 있어 안내해 드립니다. 확인해보시고 피드백 부탁드립니다.","title":"강남 역삼역 초역세권 오피스 사옥용 빌딩 매각","shortSummary":"역삼역 도보 5분 거리의 준신축급 대형 오피스빌딩입니다.","dealPoints":["초역세권","사옥 최적"],"cautionPoints":["명도 조율 필요"],"hiddenInfoNotice":["보증금 및 지번은 인가 후 확인 가능"],"gateMessage":"G1 등급 등록이 필요합니다.","kakaoText":"강남 역삼역 오피스 빌딩 매각 안내입니다.","exactUnitCandidate":"101호","floor":"1층","areaSqmText":"150㎡","spaceType":"office","depositText":"5000만","monthlyRentText":"400만","maintenanceFeeText":"50만","availableFromText":"즉시입주","leaseTermMonthsText":"24","incentivesText":"렌트프리 2개월","restrictions":[],"landlordIdentity":"김성수","currentTenant":"스타트업","vacancyReason":"이전 확장","rentNegotiation":"협의 가능","region":"성수동","areaSqm":150,"deposit":5000,"monthlyRent":400,"maintenanceFee":50,"availableFrom":"즉시입주","leaseTermMonths":24,"incentives":{"rentFreeMonths":2,"interiorSupport":"일부 인테리어 지원","freeRentDetail":"렌트프리 2개월 지원"},"shortSummaryLease":"성수역 도보 5분 거리 1층 리테일 상가 매물입니다."}</a:t>
+              <a:t>본 자산의 대지 매입 후 신축 개발 시 총 사업비, 예상 분양 수입 및 개발 이익률을 종합 추정합니다. [주의] 신축 공사비 및 분양가 변동에 따라 최종 수익률이 달라질 수 있습니다.</a:t>
             </a:r>
             <a:endParaRPr lang="en-US" sz="930" dirty="0"/>
           </a:p>
@@ -6679,37 +7735,149 @@
       </p:sp>
       <p:sp>
         <p:nvSpPr>
-          <p:cNvPr id="11" name="Text 9"/>
-          <p:cNvSpPr/>
-          <p:nvPr/>
-        </p:nvSpPr>
-        <p:spPr>
-          <a:xfrm>
-            <a:off x="566928" y="6382512"/>
-            <a:ext cx="7315200" cy="219456"/>
-          </a:xfrm>
-          <a:prstGeom prst="rect">
-            <a:avLst/>
-          </a:prstGeom>
-          <a:noFill/>
-          <a:ln/>
-        </p:spPr>
-        <p:txBody>
-          <a:bodyPr wrap="square" lIns="0" tIns="0" rIns="0" bIns="0" rtlCol="0" anchor="ctr"/>
-          <a:lstStyle/>
-          <a:p>
-            <a:pPr indent="0" marL="0">
-              <a:buNone/>
-            </a:pPr>
-            <a:r>
-              <a:rPr lang="en-US" sz="800" dirty="0">
-                <a:solidFill>
-                  <a:srgbClr val="718096"/>
+          <p:cNvPr id="28" name="Shape 26"/>
+          <p:cNvSpPr/>
+          <p:nvPr/>
+        </p:nvSpPr>
+        <p:spPr>
+          <a:xfrm>
+            <a:off x="6187288" y="4626864"/>
+            <a:ext cx="5437480" cy="1280160"/>
+          </a:xfrm>
+          <a:prstGeom prst="roundRect">
+            <a:avLst>
+              <a:gd name="adj" fmla="val 4286"/>
+            </a:avLst>
+          </a:prstGeom>
+          <a:solidFill>
+            <a:srgbClr val="BEE3F8"/>
+          </a:solidFill>
+          <a:ln/>
+        </p:spPr>
+      </p:sp>
+      <p:sp>
+        <p:nvSpPr>
+          <p:cNvPr id="29" name="Shape 27"/>
+          <p:cNvSpPr/>
+          <p:nvPr/>
+        </p:nvSpPr>
+        <p:spPr>
+          <a:xfrm>
+            <a:off x="6187288" y="4681728"/>
+            <a:ext cx="36576" cy="1170432"/>
+          </a:xfrm>
+          <a:prstGeom prst="rect">
+            <a:avLst/>
+          </a:prstGeom>
+          <a:solidFill>
+            <a:srgbClr val="2B6CB0"/>
+          </a:solidFill>
+          <a:ln/>
+        </p:spPr>
+      </p:sp>
+      <p:sp>
+        <p:nvSpPr>
+          <p:cNvPr id="30" name="Text 28"/>
+          <p:cNvSpPr/>
+          <p:nvPr/>
+        </p:nvSpPr>
+        <p:spPr>
+          <a:xfrm>
+            <a:off x="6370168" y="4736592"/>
+            <a:ext cx="5108296" cy="201168"/>
+          </a:xfrm>
+          <a:prstGeom prst="rect">
+            <a:avLst/>
+          </a:prstGeom>
+          <a:noFill/>
+          <a:ln/>
+        </p:spPr>
+        <p:txBody>
+          <a:bodyPr wrap="square" lIns="0" tIns="0" rIns="0" bIns="0" rtlCol="0" anchor="ctr"/>
+          <a:lstStyle/>
+          <a:p>
+            <a:pPr indent="0" marL="0">
+              <a:buNone/>
+            </a:pPr>
+            <a:endParaRPr lang="en-US" sz="1050" dirty="0"/>
+          </a:p>
+        </p:txBody>
+      </p:sp>
+      <p:sp>
+        <p:nvSpPr>
+          <p:cNvPr id="31" name="Text 29"/>
+          <p:cNvSpPr/>
+          <p:nvPr/>
+        </p:nvSpPr>
+        <p:spPr>
+          <a:xfrm>
+            <a:off x="6370168" y="4956048"/>
+            <a:ext cx="5108296" cy="877824"/>
+          </a:xfrm>
+          <a:prstGeom prst="rect">
+            <a:avLst/>
+          </a:prstGeom>
+          <a:noFill/>
+          <a:ln/>
+        </p:spPr>
+        <p:txBody>
+          <a:bodyPr wrap="square" lIns="0" tIns="0" rIns="0" bIns="0" rtlCol="0" anchor="t"/>
+          <a:lstStyle/>
+          <a:p>
+            <a:pPr indent="0" marL="0">
+              <a:lnSpc>
+                <a:spcPct val="120000"/>
+              </a:lnSpc>
+              <a:buNone/>
+            </a:pPr>
+            <a:r>
+              <a:rPr lang="en-US" sz="930" dirty="0">
+                <a:solidFill>
+                  <a:srgbClr val="10161F"/>
                 </a:solidFill>
                 <a:latin typeface="Pretendard" pitchFamily="34" charset="0"/>
                 <a:ea typeface="Pretendard" pitchFamily="34" charset="-122"/>
                 <a:cs typeface="Pretendard" pitchFamily="34" charset="-120"/>
               </a:rPr>
+              <a:t>[주의] 신축 공사비 및 분양가 변동에 따라 최종 수익률이 달라질 수 있습니다.</a:t>
+            </a:r>
+            <a:endParaRPr lang="en-US" sz="930" dirty="0"/>
+          </a:p>
+        </p:txBody>
+      </p:sp>
+      <p:sp>
+        <p:nvSpPr>
+          <p:cNvPr id="32" name="Text 30"/>
+          <p:cNvSpPr/>
+          <p:nvPr/>
+        </p:nvSpPr>
+        <p:spPr>
+          <a:xfrm>
+            <a:off x="566928" y="6382512"/>
+            <a:ext cx="7315200" cy="219456"/>
+          </a:xfrm>
+          <a:prstGeom prst="rect">
+            <a:avLst/>
+          </a:prstGeom>
+          <a:noFill/>
+          <a:ln/>
+        </p:spPr>
+        <p:txBody>
+          <a:bodyPr wrap="square" lIns="0" tIns="0" rIns="0" bIns="0" rtlCol="0" anchor="ctr"/>
+          <a:lstStyle/>
+          <a:p>
+            <a:pPr indent="0" marL="0">
+              <a:buNone/>
+            </a:pPr>
+            <a:r>
+              <a:rPr lang="en-US" sz="800" dirty="0">
+                <a:solidFill>
+                  <a:srgbClr val="718096"/>
+                </a:solidFill>
+                <a:latin typeface="Pretendard" pitchFamily="34" charset="0"/>
+                <a:ea typeface="Pretendard" pitchFamily="34" charset="-122"/>
+                <a:cs typeface="Pretendard" pitchFamily="34" charset="-120"/>
+              </a:rPr>
               <a:t>크리딜   |   </a:t>
             </a:r>
             <a:endParaRPr lang="en-US" sz="800" dirty="0"/>
@@ -6718,7 +7886,7 @@
       </p:sp>
       <p:sp>
         <p:nvSpPr>
-          <p:cNvPr id="12" name="Text 10"/>
+          <p:cNvPr id="33" name="Text 31"/>
           <p:cNvSpPr/>
           <p:nvPr/>
         </p:nvSpPr>
@@ -7345,1697 +8513,13 @@
       </p:sp>
       <p:sp>
         <p:nvSpPr>
-          <p:cNvPr id="6" name="Text 4"/>
-          <p:cNvSpPr/>
-          <p:nvPr/>
-        </p:nvSpPr>
-        <p:spPr>
-          <a:xfrm>
-            <a:off x="1133856" y="1005840"/>
-            <a:ext cx="10490911" cy="237744"/>
-          </a:xfrm>
-          <a:prstGeom prst="rect">
-            <a:avLst/>
-          </a:prstGeom>
-          <a:noFill/>
-          <a:ln/>
-        </p:spPr>
-        <p:txBody>
-          <a:bodyPr wrap="square" lIns="0" tIns="0" rIns="0" bIns="0" rtlCol="0" anchor="ctr"/>
-          <a:lstStyle/>
-          <a:p>
-            <a:pPr indent="0" marL="0">
-              <a:buNone/>
-            </a:pPr>
-            <a:r>
-              <a:rPr lang="en-US" sz="1100" dirty="0">
-                <a:solidFill>
-                  <a:srgbClr val="718096"/>
-                </a:solidFill>
-                <a:latin typeface="Pretendard" pitchFamily="34" charset="0"/>
-                <a:ea typeface="Pretendard" pitchFamily="34" charset="-122"/>
-                <a:cs typeface="Pretendard" pitchFamily="34" charset="-120"/>
-              </a:rPr>
-              <a:t>3대 핵심 투자 포인트 (Investment Highlights)</a:t>
-            </a:r>
-            <a:endParaRPr lang="en-US" sz="1100" dirty="0"/>
-          </a:p>
-        </p:txBody>
-      </p:sp>
-      <p:sp>
-        <p:nvSpPr>
-          <p:cNvPr id="7" name="Shape 5"/>
-          <p:cNvSpPr/>
-          <p:nvPr/>
-        </p:nvSpPr>
-        <p:spPr>
-          <a:xfrm>
-            <a:off x="566928" y="1481328"/>
-            <a:ext cx="3472586" cy="2560320"/>
-          </a:xfrm>
-          <a:prstGeom prst="roundRect">
-            <a:avLst>
-              <a:gd name="adj" fmla="val 2857"/>
-            </a:avLst>
-          </a:prstGeom>
-          <a:solidFill>
-            <a:srgbClr val="F7FAFC"/>
-          </a:solidFill>
-          <a:ln w="10160">
-            <a:solidFill>
-              <a:srgbClr val="CBD5E0"/>
-            </a:solidFill>
-            <a:prstDash val="solid"/>
-          </a:ln>
-        </p:spPr>
-      </p:sp>
-      <p:sp>
-        <p:nvSpPr>
-          <p:cNvPr id="8" name="Shape 6"/>
-          <p:cNvSpPr/>
-          <p:nvPr/>
-        </p:nvSpPr>
-        <p:spPr>
-          <a:xfrm>
-            <a:off x="566928" y="1481328"/>
-            <a:ext cx="3472586" cy="54864"/>
-          </a:xfrm>
-          <a:prstGeom prst="rect">
-            <a:avLst/>
-          </a:prstGeom>
-          <a:solidFill>
-            <a:srgbClr val="B98A2E"/>
-          </a:solidFill>
-          <a:ln/>
-        </p:spPr>
-      </p:sp>
-      <p:sp>
-        <p:nvSpPr>
-          <p:cNvPr id="9" name="Shape 7"/>
-          <p:cNvSpPr/>
-          <p:nvPr/>
-        </p:nvSpPr>
-        <p:spPr>
-          <a:xfrm>
-            <a:off x="795528" y="1755648"/>
-            <a:ext cx="475488" cy="292608"/>
-          </a:xfrm>
-          <a:prstGeom prst="roundRect">
-            <a:avLst>
-              <a:gd name="adj" fmla="val 12500"/>
-            </a:avLst>
-          </a:prstGeom>
-          <a:solidFill>
-            <a:srgbClr val="D9B668"/>
-          </a:solidFill>
-          <a:ln/>
-        </p:spPr>
-      </p:sp>
-      <p:sp>
-        <p:nvSpPr>
-          <p:cNvPr id="10" name="Text 8"/>
-          <p:cNvSpPr/>
-          <p:nvPr/>
-        </p:nvSpPr>
-        <p:spPr>
-          <a:xfrm>
-            <a:off x="795528" y="1755648"/>
-            <a:ext cx="475488" cy="292608"/>
-          </a:xfrm>
-          <a:prstGeom prst="rect">
-            <a:avLst/>
-          </a:prstGeom>
-          <a:noFill/>
-          <a:ln/>
-        </p:spPr>
-        <p:txBody>
-          <a:bodyPr wrap="square" lIns="0" tIns="0" rIns="0" bIns="0" rtlCol="0" anchor="ctr"/>
-          <a:lstStyle/>
-          <a:p>
-            <a:pPr algn="ctr" indent="0" marL="0">
-              <a:buNone/>
-            </a:pPr>
-            <a:r>
-              <a:rPr lang="en-US" sz="1100" b="1" dirty="0">
-                <a:solidFill>
-                  <a:srgbClr val="977024"/>
-                </a:solidFill>
-                <a:latin typeface="Arial" pitchFamily="34" charset="0"/>
-                <a:ea typeface="Arial" pitchFamily="34" charset="-122"/>
-                <a:cs typeface="Arial" pitchFamily="34" charset="-120"/>
-              </a:rPr>
-              <a:t>01</a:t>
-            </a:r>
-            <a:endParaRPr lang="en-US" sz="1100" dirty="0"/>
-          </a:p>
-        </p:txBody>
-      </p:sp>
-      <p:sp>
-        <p:nvSpPr>
-          <p:cNvPr id="11" name="Text 9"/>
-          <p:cNvSpPr/>
-          <p:nvPr/>
-        </p:nvSpPr>
-        <p:spPr>
-          <a:xfrm>
-            <a:off x="795528" y="2194560"/>
-            <a:ext cx="3015386" cy="365760"/>
-          </a:xfrm>
-          <a:prstGeom prst="rect">
-            <a:avLst/>
-          </a:prstGeom>
-          <a:noFill/>
-          <a:ln/>
-        </p:spPr>
-        <p:txBody>
-          <a:bodyPr wrap="square" lIns="0" tIns="0" rIns="0" bIns="0" rtlCol="0" anchor="t"/>
-          <a:lstStyle/>
-          <a:p>
-            <a:pPr indent="0" marL="0">
-              <a:buNone/>
-            </a:pPr>
-            <a:r>
-              <a:rPr lang="en-US" sz="1500" b="1" dirty="0">
-                <a:solidFill>
-                  <a:srgbClr val="10161F"/>
-                </a:solidFill>
-                <a:latin typeface="Pretendard" pitchFamily="34" charset="0"/>
-                <a:ea typeface="Pretendard" pitchFamily="34" charset="-122"/>
-                <a:cs typeface="Pretendard" pitchFamily="34" charset="-120"/>
-              </a:rPr>
-              <a:t>원금 안전판 확보</a:t>
-            </a:r>
-            <a:endParaRPr lang="en-US" sz="1500" dirty="0"/>
-          </a:p>
-        </p:txBody>
-      </p:sp>
-      <p:sp>
-        <p:nvSpPr>
-          <p:cNvPr id="12" name="Shape 10"/>
-          <p:cNvSpPr/>
-          <p:nvPr/>
-        </p:nvSpPr>
-        <p:spPr>
-          <a:xfrm>
-            <a:off x="795528" y="2624328"/>
-            <a:ext cx="3015386" cy="0"/>
-          </a:xfrm>
-          <a:prstGeom prst="line">
-            <a:avLst/>
-          </a:prstGeom>
-          <a:noFill/>
-          <a:ln w="6350">
-            <a:solidFill>
-              <a:srgbClr val="CBD5E0"/>
-            </a:solidFill>
-            <a:prstDash val="solid"/>
-          </a:ln>
-        </p:spPr>
-      </p:sp>
-      <p:sp>
-        <p:nvSpPr>
-          <p:cNvPr id="13" name="Text 11"/>
-          <p:cNvSpPr/>
-          <p:nvPr/>
-        </p:nvSpPr>
-        <p:spPr>
-          <a:xfrm>
-            <a:off x="795528" y="2779776"/>
-            <a:ext cx="3015386" cy="1051560"/>
-          </a:xfrm>
-          <a:prstGeom prst="rect">
-            <a:avLst/>
-          </a:prstGeom>
-          <a:noFill/>
-          <a:ln/>
-        </p:spPr>
-        <p:txBody>
-          <a:bodyPr wrap="square" lIns="0" tIns="0" rIns="0" bIns="0" rtlCol="0" anchor="t"/>
-          <a:lstStyle/>
-          <a:p>
-            <a:pPr indent="0" marL="0">
-              <a:lnSpc>
-                <a:spcPct val="130000"/>
-              </a:lnSpc>
-              <a:buNone/>
-            </a:pPr>
-            <a:r>
-              <a:rPr lang="en-US" sz="1200" dirty="0">
-                <a:solidFill>
-                  <a:srgbClr val="10161F"/>
-                </a:solidFill>
-                <a:latin typeface="Pretendard" pitchFamily="34" charset="0"/>
-                <a:ea typeface="Pretendard" pitchFamily="34" charset="-122"/>
-                <a:cs typeface="Pretendard" pitchFamily="34" charset="-120"/>
-              </a:rPr>
-              <a:t>영등포권역의 핵심 입지로, 우량한 대지 지분 가치가 하방 경직성을 강력히 지지합니다.</a:t>
-            </a:r>
-            <a:endParaRPr lang="en-US" sz="1200" dirty="0"/>
-          </a:p>
-        </p:txBody>
-      </p:sp>
-      <p:sp>
-        <p:nvSpPr>
-          <p:cNvPr id="14" name="Shape 12"/>
-          <p:cNvSpPr/>
-          <p:nvPr/>
-        </p:nvSpPr>
-        <p:spPr>
-          <a:xfrm>
-            <a:off x="4359554" y="1481328"/>
-            <a:ext cx="3472586" cy="2560320"/>
-          </a:xfrm>
-          <a:prstGeom prst="roundRect">
-            <a:avLst>
-              <a:gd name="adj" fmla="val 2857"/>
-            </a:avLst>
-          </a:prstGeom>
-          <a:solidFill>
-            <a:srgbClr val="F7FAFC"/>
-          </a:solidFill>
-          <a:ln w="10160">
-            <a:solidFill>
-              <a:srgbClr val="CBD5E0"/>
-            </a:solidFill>
-            <a:prstDash val="solid"/>
-          </a:ln>
-        </p:spPr>
-      </p:sp>
-      <p:sp>
-        <p:nvSpPr>
-          <p:cNvPr id="15" name="Shape 13"/>
-          <p:cNvSpPr/>
-          <p:nvPr/>
-        </p:nvSpPr>
-        <p:spPr>
-          <a:xfrm>
-            <a:off x="4359554" y="1481328"/>
-            <a:ext cx="3472586" cy="54864"/>
-          </a:xfrm>
-          <a:prstGeom prst="rect">
-            <a:avLst/>
-          </a:prstGeom>
-          <a:solidFill>
-            <a:srgbClr val="B98A2E"/>
-          </a:solidFill>
-          <a:ln/>
-        </p:spPr>
-      </p:sp>
-      <p:sp>
-        <p:nvSpPr>
-          <p:cNvPr id="16" name="Shape 14"/>
-          <p:cNvSpPr/>
-          <p:nvPr/>
-        </p:nvSpPr>
-        <p:spPr>
-          <a:xfrm>
-            <a:off x="4588154" y="1755648"/>
-            <a:ext cx="475488" cy="292608"/>
-          </a:xfrm>
-          <a:prstGeom prst="roundRect">
-            <a:avLst>
-              <a:gd name="adj" fmla="val 12500"/>
-            </a:avLst>
-          </a:prstGeom>
-          <a:solidFill>
-            <a:srgbClr val="D9B668"/>
-          </a:solidFill>
-          <a:ln/>
-        </p:spPr>
-      </p:sp>
-      <p:sp>
-        <p:nvSpPr>
-          <p:cNvPr id="17" name="Text 15"/>
-          <p:cNvSpPr/>
-          <p:nvPr/>
-        </p:nvSpPr>
-        <p:spPr>
-          <a:xfrm>
-            <a:off x="4588154" y="1755648"/>
-            <a:ext cx="475488" cy="292608"/>
-          </a:xfrm>
-          <a:prstGeom prst="rect">
-            <a:avLst/>
-          </a:prstGeom>
-          <a:noFill/>
-          <a:ln/>
-        </p:spPr>
-        <p:txBody>
-          <a:bodyPr wrap="square" lIns="0" tIns="0" rIns="0" bIns="0" rtlCol="0" anchor="ctr"/>
-          <a:lstStyle/>
-          <a:p>
-            <a:pPr algn="ctr" indent="0" marL="0">
-              <a:buNone/>
-            </a:pPr>
-            <a:r>
-              <a:rPr lang="en-US" sz="1100" b="1" dirty="0">
-                <a:solidFill>
-                  <a:srgbClr val="977024"/>
-                </a:solidFill>
-                <a:latin typeface="Arial" pitchFamily="34" charset="0"/>
-                <a:ea typeface="Arial" pitchFamily="34" charset="-122"/>
-                <a:cs typeface="Arial" pitchFamily="34" charset="-120"/>
-              </a:rPr>
-              <a:t>02</a:t>
-            </a:r>
-            <a:endParaRPr lang="en-US" sz="1100" dirty="0"/>
-          </a:p>
-        </p:txBody>
-      </p:sp>
-      <p:sp>
-        <p:nvSpPr>
-          <p:cNvPr id="18" name="Text 16"/>
-          <p:cNvSpPr/>
-          <p:nvPr/>
-        </p:nvSpPr>
-        <p:spPr>
-          <a:xfrm>
-            <a:off x="4588154" y="2194560"/>
-            <a:ext cx="3015386" cy="365760"/>
-          </a:xfrm>
-          <a:prstGeom prst="rect">
-            <a:avLst/>
-          </a:prstGeom>
-          <a:noFill/>
-          <a:ln/>
-        </p:spPr>
-        <p:txBody>
-          <a:bodyPr wrap="square" lIns="0" tIns="0" rIns="0" bIns="0" rtlCol="0" anchor="t"/>
-          <a:lstStyle/>
-          <a:p>
-            <a:pPr indent="0" marL="0">
-              <a:buNone/>
-            </a:pPr>
-            <a:r>
-              <a:rPr lang="en-US" sz="1500" b="1" dirty="0">
-                <a:solidFill>
-                  <a:srgbClr val="10161F"/>
-                </a:solidFill>
-                <a:latin typeface="Pretendard" pitchFamily="34" charset="0"/>
-                <a:ea typeface="Pretendard" pitchFamily="34" charset="-122"/>
-                <a:cs typeface="Pretendard" pitchFamily="34" charset="-120"/>
-              </a:rPr>
-              <a:t>확실한 월 현금흐름</a:t>
-            </a:r>
-            <a:endParaRPr lang="en-US" sz="1500" dirty="0"/>
-          </a:p>
-        </p:txBody>
-      </p:sp>
-      <p:sp>
-        <p:nvSpPr>
-          <p:cNvPr id="19" name="Shape 17"/>
-          <p:cNvSpPr/>
-          <p:nvPr/>
-        </p:nvSpPr>
-        <p:spPr>
-          <a:xfrm>
-            <a:off x="4588154" y="2624328"/>
-            <a:ext cx="3015386" cy="0"/>
-          </a:xfrm>
-          <a:prstGeom prst="line">
-            <a:avLst/>
-          </a:prstGeom>
-          <a:noFill/>
-          <a:ln w="6350">
-            <a:solidFill>
-              <a:srgbClr val="CBD5E0"/>
-            </a:solidFill>
-            <a:prstDash val="solid"/>
-          </a:ln>
-        </p:spPr>
-      </p:sp>
-      <p:sp>
-        <p:nvSpPr>
-          <p:cNvPr id="20" name="Text 18"/>
-          <p:cNvSpPr/>
-          <p:nvPr/>
-        </p:nvSpPr>
-        <p:spPr>
-          <a:xfrm>
-            <a:off x="4588154" y="2779776"/>
-            <a:ext cx="3015386" cy="1051560"/>
-          </a:xfrm>
-          <a:prstGeom prst="rect">
-            <a:avLst/>
-          </a:prstGeom>
-          <a:noFill/>
-          <a:ln/>
-        </p:spPr>
-        <p:txBody>
-          <a:bodyPr wrap="square" lIns="0" tIns="0" rIns="0" bIns="0" rtlCol="0" anchor="t"/>
-          <a:lstStyle/>
-          <a:p>
-            <a:pPr indent="0" marL="0">
-              <a:lnSpc>
-                <a:spcPct val="130000"/>
-              </a:lnSpc>
-              <a:buNone/>
-            </a:pPr>
-            <a:r>
-              <a:rPr lang="en-US" sz="1200" dirty="0">
-                <a:solidFill>
-                  <a:srgbClr val="10161F"/>
-                </a:solidFill>
-                <a:latin typeface="Pretendard" pitchFamily="34" charset="0"/>
-                <a:ea typeface="Pretendard" pitchFamily="34" charset="-122"/>
-                <a:cs typeface="Pretendard" pitchFamily="34" charset="-120"/>
-              </a:rPr>
-              <a:t>우량 테넌트 만실 운영 및 장기 임대차 구조를 기반으로 매월 안정적인 순영업소득(NOI) 창출이 기대됩니다.</a:t>
-            </a:r>
-            <a:endParaRPr lang="en-US" sz="1200" dirty="0"/>
-          </a:p>
-        </p:txBody>
-      </p:sp>
-      <p:sp>
-        <p:nvSpPr>
-          <p:cNvPr id="21" name="Shape 19"/>
-          <p:cNvSpPr/>
-          <p:nvPr/>
-        </p:nvSpPr>
-        <p:spPr>
-          <a:xfrm>
-            <a:off x="8152181" y="1481328"/>
-            <a:ext cx="3472586" cy="2560320"/>
-          </a:xfrm>
-          <a:prstGeom prst="roundRect">
-            <a:avLst>
-              <a:gd name="adj" fmla="val 2857"/>
-            </a:avLst>
-          </a:prstGeom>
-          <a:solidFill>
-            <a:srgbClr val="F7FAFC"/>
-          </a:solidFill>
-          <a:ln w="10160">
-            <a:solidFill>
-              <a:srgbClr val="CBD5E0"/>
-            </a:solidFill>
-            <a:prstDash val="solid"/>
-          </a:ln>
-        </p:spPr>
-      </p:sp>
-      <p:sp>
-        <p:nvSpPr>
-          <p:cNvPr id="22" name="Shape 20"/>
-          <p:cNvSpPr/>
-          <p:nvPr/>
-        </p:nvSpPr>
-        <p:spPr>
-          <a:xfrm>
-            <a:off x="8152181" y="1481328"/>
-            <a:ext cx="3472586" cy="54864"/>
-          </a:xfrm>
-          <a:prstGeom prst="rect">
-            <a:avLst/>
-          </a:prstGeom>
-          <a:solidFill>
-            <a:srgbClr val="B98A2E"/>
-          </a:solidFill>
-          <a:ln/>
-        </p:spPr>
-      </p:sp>
-      <p:sp>
-        <p:nvSpPr>
-          <p:cNvPr id="23" name="Shape 21"/>
-          <p:cNvSpPr/>
-          <p:nvPr/>
-        </p:nvSpPr>
-        <p:spPr>
-          <a:xfrm>
-            <a:off x="8380781" y="1755648"/>
-            <a:ext cx="475488" cy="292608"/>
-          </a:xfrm>
-          <a:prstGeom prst="roundRect">
-            <a:avLst>
-              <a:gd name="adj" fmla="val 12500"/>
-            </a:avLst>
-          </a:prstGeom>
-          <a:solidFill>
-            <a:srgbClr val="D9B668"/>
-          </a:solidFill>
-          <a:ln/>
-        </p:spPr>
-      </p:sp>
-      <p:sp>
-        <p:nvSpPr>
-          <p:cNvPr id="24" name="Text 22"/>
-          <p:cNvSpPr/>
-          <p:nvPr/>
-        </p:nvSpPr>
-        <p:spPr>
-          <a:xfrm>
-            <a:off x="8380781" y="1755648"/>
-            <a:ext cx="475488" cy="292608"/>
-          </a:xfrm>
-          <a:prstGeom prst="rect">
-            <a:avLst/>
-          </a:prstGeom>
-          <a:noFill/>
-          <a:ln/>
-        </p:spPr>
-        <p:txBody>
-          <a:bodyPr wrap="square" lIns="0" tIns="0" rIns="0" bIns="0" rtlCol="0" anchor="ctr"/>
-          <a:lstStyle/>
-          <a:p>
-            <a:pPr algn="ctr" indent="0" marL="0">
-              <a:buNone/>
-            </a:pPr>
-            <a:r>
-              <a:rPr lang="en-US" sz="1100" b="1" dirty="0">
-                <a:solidFill>
-                  <a:srgbClr val="977024"/>
-                </a:solidFill>
-                <a:latin typeface="Arial" pitchFamily="34" charset="0"/>
-                <a:ea typeface="Arial" pitchFamily="34" charset="-122"/>
-                <a:cs typeface="Arial" pitchFamily="34" charset="-120"/>
-              </a:rPr>
-              <a:t>03</a:t>
-            </a:r>
-            <a:endParaRPr lang="en-US" sz="1100" dirty="0"/>
-          </a:p>
-        </p:txBody>
-      </p:sp>
-      <p:sp>
-        <p:nvSpPr>
-          <p:cNvPr id="25" name="Text 23"/>
-          <p:cNvSpPr/>
-          <p:nvPr/>
-        </p:nvSpPr>
-        <p:spPr>
-          <a:xfrm>
-            <a:off x="8380781" y="2194560"/>
-            <a:ext cx="3015386" cy="365760"/>
-          </a:xfrm>
-          <a:prstGeom prst="rect">
-            <a:avLst/>
-          </a:prstGeom>
-          <a:noFill/>
-          <a:ln/>
-        </p:spPr>
-        <p:txBody>
-          <a:bodyPr wrap="square" lIns="0" tIns="0" rIns="0" bIns="0" rtlCol="0" anchor="t"/>
-          <a:lstStyle/>
-          <a:p>
-            <a:pPr indent="0" marL="0">
-              <a:buNone/>
-            </a:pPr>
-            <a:r>
-              <a:rPr lang="en-US" sz="1500" b="1" dirty="0">
-                <a:solidFill>
-                  <a:srgbClr val="10161F"/>
-                </a:solidFill>
-                <a:latin typeface="Pretendard" pitchFamily="34" charset="0"/>
-                <a:ea typeface="Pretendard" pitchFamily="34" charset="-122"/>
-                <a:cs typeface="Pretendard" pitchFamily="34" charset="-120"/>
-              </a:rPr>
-              <a:t>가치 상승 및 출구 전략</a:t>
-            </a:r>
-            <a:endParaRPr lang="en-US" sz="1500" dirty="0"/>
-          </a:p>
-        </p:txBody>
-      </p:sp>
-      <p:sp>
-        <p:nvSpPr>
-          <p:cNvPr id="26" name="Shape 24"/>
-          <p:cNvSpPr/>
-          <p:nvPr/>
-        </p:nvSpPr>
-        <p:spPr>
-          <a:xfrm>
-            <a:off x="8380781" y="2624328"/>
-            <a:ext cx="3015386" cy="0"/>
-          </a:xfrm>
-          <a:prstGeom prst="line">
-            <a:avLst/>
-          </a:prstGeom>
-          <a:noFill/>
-          <a:ln w="6350">
-            <a:solidFill>
-              <a:srgbClr val="CBD5E0"/>
-            </a:solidFill>
-            <a:prstDash val="solid"/>
-          </a:ln>
-        </p:spPr>
-      </p:sp>
-      <p:sp>
-        <p:nvSpPr>
-          <p:cNvPr id="27" name="Text 25"/>
-          <p:cNvSpPr/>
-          <p:nvPr/>
-        </p:nvSpPr>
-        <p:spPr>
-          <a:xfrm>
-            <a:off x="8380781" y="2779776"/>
-            <a:ext cx="3015386" cy="1051560"/>
-          </a:xfrm>
-          <a:prstGeom prst="rect">
-            <a:avLst/>
-          </a:prstGeom>
-          <a:noFill/>
-          <a:ln/>
-        </p:spPr>
-        <p:txBody>
-          <a:bodyPr wrap="square" lIns="0" tIns="0" rIns="0" bIns="0" rtlCol="0" anchor="t"/>
-          <a:lstStyle/>
-          <a:p>
-            <a:pPr indent="0" marL="0">
-              <a:lnSpc>
-                <a:spcPct val="130000"/>
-              </a:lnSpc>
-              <a:buNone/>
-            </a:pPr>
-            <a:r>
-              <a:rPr lang="en-US" sz="1200" dirty="0">
-                <a:solidFill>
-                  <a:srgbClr val="10161F"/>
-                </a:solidFill>
-                <a:latin typeface="Pretendard" pitchFamily="34" charset="0"/>
-                <a:ea typeface="Pretendard" pitchFamily="34" charset="-122"/>
-                <a:cs typeface="Pretendard" pitchFamily="34" charset="-120"/>
-              </a:rPr>
-              <a:t>현행 공법 여력을 활용한 밸류업 기회와 더불어 향후 권역 지가 상승에 따른 시세차익 실현이 유력합니다.</a:t>
-            </a:r>
-            <a:endParaRPr lang="en-US" sz="1200" dirty="0"/>
-          </a:p>
-        </p:txBody>
-      </p:sp>
-      <p:graphicFrame>
-        <p:nvGraphicFramePr>
-          <p:cNvPr id="9" name="Table 0"/>
-          <p:cNvGraphicFramePr>
-            <a:graphicFrameLocks noGrp="1"/>
-          </p:cNvGraphicFramePr>
-          <p:nvPr>
-            <p:extLst>
-              <p:ext uri="{D42A27DB-BD31-4B8C-83A1-F6EECF244321}">
-                <p14:modId xmlns:p14="http://schemas.microsoft.com/office/powerpoint/2010/main" val="1579011935"/>
-              </p:ext>
-            </p:extLst>
-          </p:nvPr>
-        </p:nvGraphicFramePr>
-        <p:xfrm>
-          <a:off x="566928" y="4178808"/>
-          <a:ext cx="11057839" cy="914400"/>
-        </p:xfrm>
-        <a:graphic>
-          <a:graphicData uri="http://schemas.openxmlformats.org/drawingml/2006/table">
-            <a:tbl>
-              <a:tblPr/>
-              <a:tblGrid>
-                <a:gridCol w="3685946"/>
-                <a:gridCol w="3685946"/>
-                <a:gridCol w="3685946"/>
-              </a:tblGrid>
-              <a:tr h="329184">
-                <a:tc>
-                  <a:txBody>
-                    <a:bodyPr/>
-                    <a:lstStyle/>
-                    <a:p>
-                      <a:pPr indent="0" marL="0">
-                        <a:buNone/>
-                      </a:pPr>
-                      <a:r>
-                        <a:rPr lang="en-US" sz="1050" b="1" dirty="0">
-                          <a:solidFill>
-                            <a:srgbClr val="718096"/>
-                          </a:solidFill>
-                          <a:latin typeface="Pretendard" pitchFamily="34" charset="0"/>
-                          <a:ea typeface="Pretendard" pitchFamily="34" charset="-122"/>
-                          <a:cs typeface="Pretendard" pitchFamily="34" charset="-120"/>
-                        </a:rPr>
-                        <a:t>유형</a:t>
-                      </a:r>
-                      <a:endParaRPr lang="en-US" sz="1050" dirty="0">
-                        <a:latin typeface="Pretendard" charset="0"/>
-                        <a:ea typeface="Pretendard" charset="0"/>
-                        <a:cs typeface="Pretendard" charset="0"/>
-                      </a:endParaRPr>
-                    </a:p>
-                  </a:txBody>
-                  <a:tcPr marL="50800" marR="50800" marT="25400" marB="25400" anchor="ctr">
-                    <a:lnL w="3810" cap="flat" cmpd="sng" algn="ctr">
-                      <a:solidFill>
-                        <a:srgbClr val="CBD5E0"/>
-                      </a:solidFill>
-                      <a:prstDash val="solid"/>
-                      <a:round/>
-                      <a:headEnd type="none" w="med" len="med"/>
-                      <a:tailEnd type="none" w="med" len="med"/>
-                    </a:lnL>
-                    <a:lnR w="3810" cap="flat" cmpd="sng" algn="ctr">
-                      <a:solidFill>
-                        <a:srgbClr val="CBD5E0"/>
-                      </a:solidFill>
-                      <a:prstDash val="solid"/>
-                      <a:round/>
-                      <a:headEnd type="none" w="med" len="med"/>
-                      <a:tailEnd type="none" w="med" len="med"/>
-                    </a:lnR>
-                    <a:lnT w="3810" cap="flat" cmpd="sng" algn="ctr">
-                      <a:solidFill>
-                        <a:srgbClr val="CBD5E0"/>
-                      </a:solidFill>
-                      <a:prstDash val="solid"/>
-                      <a:round/>
-                      <a:headEnd type="none" w="med" len="med"/>
-                      <a:tailEnd type="none" w="med" len="med"/>
-                    </a:lnT>
-                    <a:lnB w="3810" cap="flat" cmpd="sng" algn="ctr">
-                      <a:solidFill>
-                        <a:srgbClr val="CBD5E0"/>
-                      </a:solidFill>
-                      <a:prstDash val="solid"/>
-                      <a:round/>
-                      <a:headEnd type="none" w="med" len="med"/>
-                      <a:tailEnd type="none" w="med" len="med"/>
-                    </a:lnB>
-                    <a:solidFill>
-                      <a:srgbClr val="F7FAFC"/>
-                    </a:solidFill>
-                  </a:tcPr>
-                </a:tc>
-                <a:tc>
-                  <a:txBody>
-                    <a:bodyPr/>
-                    <a:lstStyle/>
-                    <a:p>
-                      <a:pPr indent="0" marL="0">
-                        <a:buNone/>
-                      </a:pPr>
-                      <a:r>
-                        <a:rPr lang="en-US" sz="1050" b="1" dirty="0">
-                          <a:solidFill>
-                            <a:srgbClr val="718096"/>
-                          </a:solidFill>
-                          <a:latin typeface="Pretendard" pitchFamily="34" charset="0"/>
-                          <a:ea typeface="Pretendard" pitchFamily="34" charset="-122"/>
-                          <a:cs typeface="Pretendard" pitchFamily="34" charset="-120"/>
-                        </a:rPr>
-                        <a:t>적합도</a:t>
-                      </a:r>
-                      <a:endParaRPr lang="en-US" sz="1050" dirty="0">
-                        <a:latin typeface="Pretendard" charset="0"/>
-                        <a:ea typeface="Pretendard" charset="0"/>
-                        <a:cs typeface="Pretendard" charset="0"/>
-                      </a:endParaRPr>
-                    </a:p>
-                  </a:txBody>
-                  <a:tcPr marL="50800" marR="50800" marT="25400" marB="25400" anchor="ctr">
-                    <a:lnL w="3810" cap="flat" cmpd="sng" algn="ctr">
-                      <a:solidFill>
-                        <a:srgbClr val="CBD5E0"/>
-                      </a:solidFill>
-                      <a:prstDash val="solid"/>
-                      <a:round/>
-                      <a:headEnd type="none" w="med" len="med"/>
-                      <a:tailEnd type="none" w="med" len="med"/>
-                    </a:lnL>
-                    <a:lnR w="3810" cap="flat" cmpd="sng" algn="ctr">
-                      <a:solidFill>
-                        <a:srgbClr val="CBD5E0"/>
-                      </a:solidFill>
-                      <a:prstDash val="solid"/>
-                      <a:round/>
-                      <a:headEnd type="none" w="med" len="med"/>
-                      <a:tailEnd type="none" w="med" len="med"/>
-                    </a:lnR>
-                    <a:lnT w="3810" cap="flat" cmpd="sng" algn="ctr">
-                      <a:solidFill>
-                        <a:srgbClr val="CBD5E0"/>
-                      </a:solidFill>
-                      <a:prstDash val="solid"/>
-                      <a:round/>
-                      <a:headEnd type="none" w="med" len="med"/>
-                      <a:tailEnd type="none" w="med" len="med"/>
-                    </a:lnT>
-                    <a:lnB w="3810" cap="flat" cmpd="sng" algn="ctr">
-                      <a:solidFill>
-                        <a:srgbClr val="CBD5E0"/>
-                      </a:solidFill>
-                      <a:prstDash val="solid"/>
-                      <a:round/>
-                      <a:headEnd type="none" w="med" len="med"/>
-                      <a:tailEnd type="none" w="med" len="med"/>
-                    </a:lnB>
-                    <a:solidFill>
-                      <a:srgbClr val="F7FAFC"/>
-                    </a:solidFill>
-                  </a:tcPr>
-                </a:tc>
-                <a:tc>
-                  <a:txBody>
-                    <a:bodyPr/>
-                    <a:lstStyle/>
-                    <a:p>
-                      <a:pPr indent="0" marL="0">
-                        <a:buNone/>
-                      </a:pPr>
-                      <a:r>
-                        <a:rPr lang="en-US" sz="1050" b="1" dirty="0">
-                          <a:solidFill>
-                            <a:srgbClr val="718096"/>
-                          </a:solidFill>
-                          <a:latin typeface="Pretendard" pitchFamily="34" charset="0"/>
-                          <a:ea typeface="Pretendard" pitchFamily="34" charset="-122"/>
-                          <a:cs typeface="Pretendard" pitchFamily="34" charset="-120"/>
-                        </a:rPr>
-                        <a:t>이유</a:t>
-                      </a:r>
-                      <a:endParaRPr lang="en-US" sz="1050" dirty="0">
-                        <a:latin typeface="Pretendard" charset="0"/>
-                        <a:ea typeface="Pretendard" charset="0"/>
-                        <a:cs typeface="Pretendard" charset="0"/>
-                      </a:endParaRPr>
-                    </a:p>
-                  </a:txBody>
-                  <a:tcPr marL="50800" marR="50800" marT="25400" marB="25400" anchor="ctr">
-                    <a:lnL w="3810" cap="flat" cmpd="sng" algn="ctr">
-                      <a:solidFill>
-                        <a:srgbClr val="CBD5E0"/>
-                      </a:solidFill>
-                      <a:prstDash val="solid"/>
-                      <a:round/>
-                      <a:headEnd type="none" w="med" len="med"/>
-                      <a:tailEnd type="none" w="med" len="med"/>
-                    </a:lnL>
-                    <a:lnR w="3810" cap="flat" cmpd="sng" algn="ctr">
-                      <a:solidFill>
-                        <a:srgbClr val="CBD5E0"/>
-                      </a:solidFill>
-                      <a:prstDash val="solid"/>
-                      <a:round/>
-                      <a:headEnd type="none" w="med" len="med"/>
-                      <a:tailEnd type="none" w="med" len="med"/>
-                    </a:lnR>
-                    <a:lnT w="3810" cap="flat" cmpd="sng" algn="ctr">
-                      <a:solidFill>
-                        <a:srgbClr val="CBD5E0"/>
-                      </a:solidFill>
-                      <a:prstDash val="solid"/>
-                      <a:round/>
-                      <a:headEnd type="none" w="med" len="med"/>
-                      <a:tailEnd type="none" w="med" len="med"/>
-                    </a:lnT>
-                    <a:lnB w="3810" cap="flat" cmpd="sng" algn="ctr">
-                      <a:solidFill>
-                        <a:srgbClr val="CBD5E0"/>
-                      </a:solidFill>
-                      <a:prstDash val="solid"/>
-                      <a:round/>
-                      <a:headEnd type="none" w="med" len="med"/>
-                      <a:tailEnd type="none" w="med" len="med"/>
-                    </a:lnB>
-                    <a:solidFill>
-                      <a:srgbClr val="F7FAFC"/>
-                    </a:solidFill>
-                  </a:tcPr>
-                </a:tc>
-              </a:tr>
-              <a:tr h="329184">
-                <a:tc>
-                  <a:txBody>
-                    <a:bodyPr/>
-                    <a:lstStyle/>
-                    <a:p>
-                      <a:pPr indent="0" marL="0">
-                        <a:buNone/>
-                      </a:pPr>
-                      <a:r>
-                        <a:rPr lang="en-US" sz="1050" b="1" dirty="0">
-                          <a:solidFill>
-                            <a:srgbClr val="10161F"/>
-                          </a:solidFill>
-                          <a:latin typeface="Pretendard" pitchFamily="34" charset="0"/>
-                          <a:ea typeface="Pretendard" pitchFamily="34" charset="-122"/>
-                          <a:cs typeface="Pretendard" pitchFamily="34" charset="-120"/>
-                        </a:rPr>
-                        <a:t>(임대수익)</a:t>
-                      </a:r>
-                      <a:endParaRPr lang="en-US" sz="1050" dirty="0">
-                        <a:latin typeface="Pretendard" charset="0"/>
-                        <a:ea typeface="Pretendard" charset="0"/>
-                        <a:cs typeface="Pretendard" charset="0"/>
-                      </a:endParaRPr>
-                    </a:p>
-                  </a:txBody>
-                  <a:tcPr marL="50800" marR="50800" marT="25400" marB="25400" anchor="ctr">
-                    <a:lnL w="3810" cap="flat" cmpd="sng" algn="ctr">
-                      <a:solidFill>
-                        <a:srgbClr val="CBD5E0"/>
-                      </a:solidFill>
-                      <a:prstDash val="solid"/>
-                      <a:round/>
-                      <a:headEnd type="none" w="med" len="med"/>
-                      <a:tailEnd type="none" w="med" len="med"/>
-                    </a:lnL>
-                    <a:lnR w="3810" cap="flat" cmpd="sng" algn="ctr">
-                      <a:solidFill>
-                        <a:srgbClr val="CBD5E0"/>
-                      </a:solidFill>
-                      <a:prstDash val="solid"/>
-                      <a:round/>
-                      <a:headEnd type="none" w="med" len="med"/>
-                      <a:tailEnd type="none" w="med" len="med"/>
-                    </a:lnR>
-                    <a:lnT w="3810" cap="flat" cmpd="sng" algn="ctr">
-                      <a:solidFill>
-                        <a:srgbClr val="CBD5E0"/>
-                      </a:solidFill>
-                      <a:prstDash val="solid"/>
-                      <a:round/>
-                      <a:headEnd type="none" w="med" len="med"/>
-                      <a:tailEnd type="none" w="med" len="med"/>
-                    </a:lnT>
-                    <a:lnB w="3810" cap="flat" cmpd="sng" algn="ctr">
-                      <a:solidFill>
-                        <a:srgbClr val="CBD5E0"/>
-                      </a:solidFill>
-                      <a:prstDash val="solid"/>
-                      <a:round/>
-                      <a:headEnd type="none" w="med" len="med"/>
-                      <a:tailEnd type="none" w="med" len="med"/>
-                    </a:lnB>
-                    <a:solidFill>
-                      <a:srgbClr val="FFFFFF"/>
-                    </a:solidFill>
-                  </a:tcPr>
-                </a:tc>
-                <a:tc>
-                  <a:txBody>
-                    <a:bodyPr/>
-                    <a:lstStyle/>
-                    <a:p>
-                      <a:pPr indent="0" marL="0">
-                        <a:buNone/>
-                      </a:pPr>
-                      <a:r>
-                        <a:rPr lang="en-US" sz="1050" dirty="0">
-                          <a:solidFill>
-                            <a:srgbClr val="10161F"/>
-                          </a:solidFill>
-                          <a:latin typeface="Pretendard" pitchFamily="34" charset="0"/>
-                          <a:ea typeface="Pretendard" pitchFamily="34" charset="-122"/>
-                          <a:cs typeface="Pretendard" pitchFamily="34" charset="-120"/>
-                        </a:rPr>
-                        <a:t>★★★★★</a:t>
-                      </a:r>
-                      <a:endParaRPr lang="en-US" sz="1050" dirty="0">
-                        <a:latin typeface="Pretendard" charset="0"/>
-                        <a:ea typeface="Pretendard" charset="0"/>
-                        <a:cs typeface="Pretendard" charset="0"/>
-                      </a:endParaRPr>
-                    </a:p>
-                  </a:txBody>
-                  <a:tcPr marL="50800" marR="50800" marT="25400" marB="25400" anchor="ctr">
-                    <a:lnL w="3810" cap="flat" cmpd="sng" algn="ctr">
-                      <a:solidFill>
-                        <a:srgbClr val="CBD5E0"/>
-                      </a:solidFill>
-                      <a:prstDash val="solid"/>
-                      <a:round/>
-                      <a:headEnd type="none" w="med" len="med"/>
-                      <a:tailEnd type="none" w="med" len="med"/>
-                    </a:lnL>
-                    <a:lnR w="3810" cap="flat" cmpd="sng" algn="ctr">
-                      <a:solidFill>
-                        <a:srgbClr val="CBD5E0"/>
-                      </a:solidFill>
-                      <a:prstDash val="solid"/>
-                      <a:round/>
-                      <a:headEnd type="none" w="med" len="med"/>
-                      <a:tailEnd type="none" w="med" len="med"/>
-                    </a:lnR>
-                    <a:lnT w="3810" cap="flat" cmpd="sng" algn="ctr">
-                      <a:solidFill>
-                        <a:srgbClr val="CBD5E0"/>
-                      </a:solidFill>
-                      <a:prstDash val="solid"/>
-                      <a:round/>
-                      <a:headEnd type="none" w="med" len="med"/>
-                      <a:tailEnd type="none" w="med" len="med"/>
-                    </a:lnT>
-                    <a:lnB w="3810" cap="flat" cmpd="sng" algn="ctr">
-                      <a:solidFill>
-                        <a:srgbClr val="CBD5E0"/>
-                      </a:solidFill>
-                      <a:prstDash val="solid"/>
-                      <a:round/>
-                      <a:headEnd type="none" w="med" len="med"/>
-                      <a:tailEnd type="none" w="med" len="med"/>
-                    </a:lnB>
-                    <a:solidFill>
-                      <a:srgbClr val="FFFFFF"/>
-                    </a:solidFill>
-                  </a:tcPr>
-                </a:tc>
-                <a:tc>
-                  <a:txBody>
-                    <a:bodyPr/>
-                    <a:lstStyle/>
-                    <a:p>
-                      <a:pPr indent="0" marL="0">
-                        <a:buNone/>
-                      </a:pPr>
-                      <a:r>
-                        <a:rPr lang="en-US" sz="1050" dirty="0">
-                          <a:solidFill>
-                            <a:srgbClr val="10161F"/>
-                          </a:solidFill>
-                          <a:latin typeface="Pretendard" pitchFamily="34" charset="0"/>
-                          <a:ea typeface="Pretendard" pitchFamily="34" charset="-122"/>
-                          <a:cs typeface="Pretendard" pitchFamily="34" charset="-120"/>
-                        </a:rPr>
-                        <a:t>소형 </a:t>
-                      </a:r>
-                      <a:pPr indent="0" marL="0">
-                        <a:buNone/>
-                      </a:pPr>
-                      <a:r>
-                        <a:rPr lang="en-US" sz="1050" dirty="0">
-                          <a:solidFill>
-                            <a:srgbClr val="10161F"/>
-                          </a:solidFill>
-                          <a:latin typeface="Pretendard" pitchFamily="34" charset="0"/>
-                          <a:ea typeface="Pretendard" pitchFamily="34" charset="-122"/>
-                          <a:cs typeface="Pretendard" pitchFamily="34" charset="-120"/>
-                        </a:rPr>
-                        <a:t>빌딩 </a:t>
-                      </a:r>
-                      <a:pPr indent="0" marL="0">
-                        <a:buNone/>
-                      </a:pPr>
-                      <a:r>
-                        <a:rPr lang="en-US" sz="1050" dirty="0">
-                          <a:solidFill>
-                            <a:srgbClr val="10161F"/>
-                          </a:solidFill>
-                          <a:latin typeface="Pretendard" pitchFamily="34" charset="0"/>
-                          <a:ea typeface="Pretendard" pitchFamily="34" charset="-122"/>
-                          <a:cs typeface="Pretendard" pitchFamily="34" charset="-120"/>
-                        </a:rPr>
-                        <a:t>안정 </a:t>
-                      </a:r>
-                      <a:pPr indent="0" marL="0">
-                        <a:buNone/>
-                      </a:pPr>
-                      <a:r>
-                        <a:rPr lang="en-US" sz="1050" dirty="0">
-                          <a:solidFill>
-                            <a:srgbClr val="10161F"/>
-                          </a:solidFill>
-                          <a:latin typeface="Pretendard" pitchFamily="34" charset="0"/>
-                          <a:ea typeface="Pretendard" pitchFamily="34" charset="-122"/>
-                          <a:cs typeface="Pretendard" pitchFamily="34" charset="-120"/>
-                        </a:rPr>
-                        <a:t>수익 </a:t>
-                      </a:r>
-                      <a:pPr indent="0" marL="0">
-                        <a:buNone/>
-                      </a:pPr>
-                      <a:r>
-                        <a:rPr lang="en-US" sz="1050" dirty="0">
-                          <a:solidFill>
-                            <a:srgbClr val="10161F"/>
-                          </a:solidFill>
-                          <a:latin typeface="Pretendard" pitchFamily="34" charset="0"/>
-                          <a:ea typeface="Pretendard" pitchFamily="34" charset="-122"/>
-                          <a:cs typeface="Pretendard" pitchFamily="34" charset="-120"/>
-                        </a:rPr>
-                        <a:t>최적</a:t>
-                      </a:r>
-                      <a:endParaRPr lang="en-US" sz="1050" dirty="0">
-                        <a:latin typeface="Pretendard" charset="0"/>
-                        <a:ea typeface="Pretendard" charset="0"/>
-                        <a:cs typeface="Pretendard" charset="0"/>
-                      </a:endParaRPr>
-                    </a:p>
-                  </a:txBody>
-                  <a:tcPr marL="50800" marR="50800" marT="25400" marB="25400" anchor="ctr">
-                    <a:lnL w="3810" cap="flat" cmpd="sng" algn="ctr">
-                      <a:solidFill>
-                        <a:srgbClr val="CBD5E0"/>
-                      </a:solidFill>
-                      <a:prstDash val="solid"/>
-                      <a:round/>
-                      <a:headEnd type="none" w="med" len="med"/>
-                      <a:tailEnd type="none" w="med" len="med"/>
-                    </a:lnL>
-                    <a:lnR w="3810" cap="flat" cmpd="sng" algn="ctr">
-                      <a:solidFill>
-                        <a:srgbClr val="CBD5E0"/>
-                      </a:solidFill>
-                      <a:prstDash val="solid"/>
-                      <a:round/>
-                      <a:headEnd type="none" w="med" len="med"/>
-                      <a:tailEnd type="none" w="med" len="med"/>
-                    </a:lnR>
-                    <a:lnT w="3810" cap="flat" cmpd="sng" algn="ctr">
-                      <a:solidFill>
-                        <a:srgbClr val="CBD5E0"/>
-                      </a:solidFill>
-                      <a:prstDash val="solid"/>
-                      <a:round/>
-                      <a:headEnd type="none" w="med" len="med"/>
-                      <a:tailEnd type="none" w="med" len="med"/>
-                    </a:lnT>
-                    <a:lnB w="3810" cap="flat" cmpd="sng" algn="ctr">
-                      <a:solidFill>
-                        <a:srgbClr val="CBD5E0"/>
-                      </a:solidFill>
-                      <a:prstDash val="solid"/>
-                      <a:round/>
-                      <a:headEnd type="none" w="med" len="med"/>
-                      <a:tailEnd type="none" w="med" len="med"/>
-                    </a:lnB>
-                    <a:solidFill>
-                      <a:srgbClr val="FFFFFF"/>
-                    </a:solidFill>
-                  </a:tcPr>
-                </a:tc>
-              </a:tr>
-              <a:tr h="329184">
-                <a:tc>
-                  <a:txBody>
-                    <a:bodyPr/>
-                    <a:lstStyle/>
-                    <a:p>
-                      <a:pPr indent="0" marL="0">
-                        <a:buNone/>
-                      </a:pPr>
-                      <a:r>
-                        <a:rPr lang="en-US" sz="1050" b="1" dirty="0">
-                          <a:solidFill>
-                            <a:srgbClr val="10161F"/>
-                          </a:solidFill>
-                          <a:latin typeface="Pretendard" pitchFamily="34" charset="0"/>
-                          <a:ea typeface="Pretendard" pitchFamily="34" charset="-122"/>
-                          <a:cs typeface="Pretendard" pitchFamily="34" charset="-120"/>
-                        </a:rPr>
-                        <a:t>법인 </a:t>
-                      </a:r>
-                      <a:pPr indent="0" marL="0">
-                        <a:buNone/>
-                      </a:pPr>
-                      <a:r>
-                        <a:rPr lang="en-US" sz="1050" b="1" dirty="0">
-                          <a:solidFill>
-                            <a:srgbClr val="10161F"/>
-                          </a:solidFill>
-                          <a:latin typeface="Pretendard" pitchFamily="34" charset="0"/>
-                          <a:ea typeface="Pretendard" pitchFamily="34" charset="-122"/>
-                          <a:cs typeface="Pretendard" pitchFamily="34" charset="-120"/>
-                        </a:rPr>
-                        <a:t>사옥 </a:t>
-                      </a:r>
-                      <a:pPr indent="0" marL="0">
-                        <a:buNone/>
-                      </a:pPr>
-                      <a:r>
-                        <a:rPr lang="en-US" sz="1050" b="1" dirty="0">
-                          <a:solidFill>
-                            <a:srgbClr val="10161F"/>
-                          </a:solidFill>
-                          <a:latin typeface="Pretendard" pitchFamily="34" charset="0"/>
-                          <a:ea typeface="Pretendard" pitchFamily="34" charset="-122"/>
-                          <a:cs typeface="Pretendard" pitchFamily="34" charset="-120"/>
-                        </a:rPr>
-                        <a:t>이전</a:t>
-                      </a:r>
-                      <a:endParaRPr lang="en-US" sz="1050" dirty="0">
-                        <a:latin typeface="Pretendard" charset="0"/>
-                        <a:ea typeface="Pretendard" charset="0"/>
-                        <a:cs typeface="Pretendard" charset="0"/>
-                      </a:endParaRPr>
-                    </a:p>
-                  </a:txBody>
-                  <a:tcPr marL="50800" marR="50800" marT="25400" marB="25400" anchor="ctr">
-                    <a:lnL w="3810" cap="flat" cmpd="sng" algn="ctr">
-                      <a:solidFill>
-                        <a:srgbClr val="CBD5E0"/>
-                      </a:solidFill>
-                      <a:prstDash val="solid"/>
-                      <a:round/>
-                      <a:headEnd type="none" w="med" len="med"/>
-                      <a:tailEnd type="none" w="med" len="med"/>
-                    </a:lnL>
-                    <a:lnR w="3810" cap="flat" cmpd="sng" algn="ctr">
-                      <a:solidFill>
-                        <a:srgbClr val="CBD5E0"/>
-                      </a:solidFill>
-                      <a:prstDash val="solid"/>
-                      <a:round/>
-                      <a:headEnd type="none" w="med" len="med"/>
-                      <a:tailEnd type="none" w="med" len="med"/>
-                    </a:lnR>
-                    <a:lnT w="3810" cap="flat" cmpd="sng" algn="ctr">
-                      <a:solidFill>
-                        <a:srgbClr val="CBD5E0"/>
-                      </a:solidFill>
-                      <a:prstDash val="solid"/>
-                      <a:round/>
-                      <a:headEnd type="none" w="med" len="med"/>
-                      <a:tailEnd type="none" w="med" len="med"/>
-                    </a:lnT>
-                    <a:lnB w="3810" cap="flat" cmpd="sng" algn="ctr">
-                      <a:solidFill>
-                        <a:srgbClr val="CBD5E0"/>
-                      </a:solidFill>
-                      <a:prstDash val="solid"/>
-                      <a:round/>
-                      <a:headEnd type="none" w="med" len="med"/>
-                      <a:tailEnd type="none" w="med" len="med"/>
-                    </a:lnB>
-                    <a:solidFill>
-                      <a:srgbClr val="F7FAFC"/>
-                    </a:solidFill>
-                  </a:tcPr>
-                </a:tc>
-                <a:tc>
-                  <a:txBody>
-                    <a:bodyPr/>
-                    <a:lstStyle/>
-                    <a:p>
-                      <a:pPr indent="0" marL="0">
-                        <a:buNone/>
-                      </a:pPr>
-                      <a:r>
-                        <a:rPr lang="en-US" sz="1050" dirty="0">
-                          <a:solidFill>
-                            <a:srgbClr val="10161F"/>
-                          </a:solidFill>
-                          <a:latin typeface="Pretendard" pitchFamily="34" charset="0"/>
-                          <a:ea typeface="Pretendard" pitchFamily="34" charset="-122"/>
-                          <a:cs typeface="Pretendard" pitchFamily="34" charset="-120"/>
-                        </a:rPr>
-                        <a:t>★★★★</a:t>
-                      </a:r>
-                      <a:endParaRPr lang="en-US" sz="1050" dirty="0">
-                        <a:latin typeface="Pretendard" charset="0"/>
-                        <a:ea typeface="Pretendard" charset="0"/>
-                        <a:cs typeface="Pretendard" charset="0"/>
-                      </a:endParaRPr>
-                    </a:p>
-                  </a:txBody>
-                  <a:tcPr marL="50800" marR="50800" marT="25400" marB="25400" anchor="ctr">
-                    <a:lnL w="3810" cap="flat" cmpd="sng" algn="ctr">
-                      <a:solidFill>
-                        <a:srgbClr val="CBD5E0"/>
-                      </a:solidFill>
-                      <a:prstDash val="solid"/>
-                      <a:round/>
-                      <a:headEnd type="none" w="med" len="med"/>
-                      <a:tailEnd type="none" w="med" len="med"/>
-                    </a:lnL>
-                    <a:lnR w="3810" cap="flat" cmpd="sng" algn="ctr">
-                      <a:solidFill>
-                        <a:srgbClr val="CBD5E0"/>
-                      </a:solidFill>
-                      <a:prstDash val="solid"/>
-                      <a:round/>
-                      <a:headEnd type="none" w="med" len="med"/>
-                      <a:tailEnd type="none" w="med" len="med"/>
-                    </a:lnR>
-                    <a:lnT w="3810" cap="flat" cmpd="sng" algn="ctr">
-                      <a:solidFill>
-                        <a:srgbClr val="CBD5E0"/>
-                      </a:solidFill>
-                      <a:prstDash val="solid"/>
-                      <a:round/>
-                      <a:headEnd type="none" w="med" len="med"/>
-                      <a:tailEnd type="none" w="med" len="med"/>
-                    </a:lnT>
-                    <a:lnB w="3810" cap="flat" cmpd="sng" algn="ctr">
-                      <a:solidFill>
-                        <a:srgbClr val="CBD5E0"/>
-                      </a:solidFill>
-                      <a:prstDash val="solid"/>
-                      <a:round/>
-                      <a:headEnd type="none" w="med" len="med"/>
-                      <a:tailEnd type="none" w="med" len="med"/>
-                    </a:lnB>
-                    <a:solidFill>
-                      <a:srgbClr val="F7FAFC"/>
-                    </a:solidFill>
-                  </a:tcPr>
-                </a:tc>
-                <a:tc>
-                  <a:txBody>
-                    <a:bodyPr/>
-                    <a:lstStyle/>
-                    <a:p>
-                      <a:pPr indent="0" marL="0">
-                        <a:buNone/>
-                      </a:pPr>
-                      <a:r>
-                        <a:rPr lang="en-US" sz="1050" dirty="0">
-                          <a:solidFill>
-                            <a:srgbClr val="10161F"/>
-                          </a:solidFill>
-                          <a:latin typeface="Pretendard" pitchFamily="34" charset="0"/>
-                          <a:ea typeface="Pretendard" pitchFamily="34" charset="-122"/>
-                          <a:cs typeface="Pretendard" pitchFamily="34" charset="-120"/>
-                        </a:rPr>
-                        <a:t>영등포권역 </a:t>
-                      </a:r>
-                      <a:pPr indent="0" marL="0">
-                        <a:buNone/>
-                      </a:pPr>
-                      <a:r>
-                        <a:rPr lang="en-US" sz="1050" dirty="0">
-                          <a:solidFill>
-                            <a:srgbClr val="10161F"/>
-                          </a:solidFill>
-                          <a:latin typeface="Pretendard" pitchFamily="34" charset="0"/>
-                          <a:ea typeface="Pretendard" pitchFamily="34" charset="-122"/>
-                          <a:cs typeface="Pretendard" pitchFamily="34" charset="-120"/>
-                        </a:rPr>
-                        <a:t>직주근접</a:t>
-                      </a:r>
-                      <a:endParaRPr lang="en-US" sz="1050" dirty="0">
-                        <a:latin typeface="Pretendard" charset="0"/>
-                        <a:ea typeface="Pretendard" charset="0"/>
-                        <a:cs typeface="Pretendard" charset="0"/>
-                      </a:endParaRPr>
-                    </a:p>
-                  </a:txBody>
-                  <a:tcPr marL="50800" marR="50800" marT="25400" marB="25400" anchor="ctr">
-                    <a:lnL w="3810" cap="flat" cmpd="sng" algn="ctr">
-                      <a:solidFill>
-                        <a:srgbClr val="CBD5E0"/>
-                      </a:solidFill>
-                      <a:prstDash val="solid"/>
-                      <a:round/>
-                      <a:headEnd type="none" w="med" len="med"/>
-                      <a:tailEnd type="none" w="med" len="med"/>
-                    </a:lnL>
-                    <a:lnR w="3810" cap="flat" cmpd="sng" algn="ctr">
-                      <a:solidFill>
-                        <a:srgbClr val="CBD5E0"/>
-                      </a:solidFill>
-                      <a:prstDash val="solid"/>
-                      <a:round/>
-                      <a:headEnd type="none" w="med" len="med"/>
-                      <a:tailEnd type="none" w="med" len="med"/>
-                    </a:lnR>
-                    <a:lnT w="3810" cap="flat" cmpd="sng" algn="ctr">
-                      <a:solidFill>
-                        <a:srgbClr val="CBD5E0"/>
-                      </a:solidFill>
-                      <a:prstDash val="solid"/>
-                      <a:round/>
-                      <a:headEnd type="none" w="med" len="med"/>
-                      <a:tailEnd type="none" w="med" len="med"/>
-                    </a:lnT>
-                    <a:lnB w="3810" cap="flat" cmpd="sng" algn="ctr">
-                      <a:solidFill>
-                        <a:srgbClr val="CBD5E0"/>
-                      </a:solidFill>
-                      <a:prstDash val="solid"/>
-                      <a:round/>
-                      <a:headEnd type="none" w="med" len="med"/>
-                      <a:tailEnd type="none" w="med" len="med"/>
-                    </a:lnB>
-                    <a:solidFill>
-                      <a:srgbClr val="F7FAFC"/>
-                    </a:solidFill>
-                  </a:tcPr>
-                </a:tc>
-              </a:tr>
-              <a:tr h="329184">
-                <a:tc>
-                  <a:txBody>
-                    <a:bodyPr/>
-                    <a:lstStyle/>
-                    <a:p>
-                      <a:pPr indent="0" marL="0">
-                        <a:buNone/>
-                      </a:pPr>
-                      <a:r>
-                        <a:rPr lang="en-US" sz="1050" b="1" dirty="0">
-                          <a:solidFill>
-                            <a:srgbClr val="10161F"/>
-                          </a:solidFill>
-                          <a:latin typeface="Pretendard" pitchFamily="34" charset="0"/>
-                          <a:ea typeface="Pretendard" pitchFamily="34" charset="-122"/>
-                          <a:cs typeface="Pretendard" pitchFamily="34" charset="-120"/>
-                        </a:rPr>
-                        <a:t>소규모 </a:t>
-                      </a:r>
-                      <a:pPr indent="0" marL="0">
-                        <a:buNone/>
-                      </a:pPr>
-                      <a:r>
-                        <a:rPr lang="en-US" sz="1050" b="1" dirty="0">
-                          <a:solidFill>
-                            <a:srgbClr val="10161F"/>
-                          </a:solidFill>
-                          <a:latin typeface="Pretendard" pitchFamily="34" charset="0"/>
-                          <a:ea typeface="Pretendard" pitchFamily="34" charset="-122"/>
-                          <a:cs typeface="Pretendard" pitchFamily="34" charset="-120"/>
-                        </a:rPr>
-                        <a:t>개발업체</a:t>
-                      </a:r>
-                      <a:endParaRPr lang="en-US" sz="1050" dirty="0">
-                        <a:latin typeface="Pretendard" charset="0"/>
-                        <a:ea typeface="Pretendard" charset="0"/>
-                        <a:cs typeface="Pretendard" charset="0"/>
-                      </a:endParaRPr>
-                    </a:p>
-                  </a:txBody>
-                  <a:tcPr marL="50800" marR="50800" marT="25400" marB="25400" anchor="ctr">
-                    <a:lnL w="3810" cap="flat" cmpd="sng" algn="ctr">
-                      <a:solidFill>
-                        <a:srgbClr val="CBD5E0"/>
-                      </a:solidFill>
-                      <a:prstDash val="solid"/>
-                      <a:round/>
-                      <a:headEnd type="none" w="med" len="med"/>
-                      <a:tailEnd type="none" w="med" len="med"/>
-                    </a:lnL>
-                    <a:lnR w="3810" cap="flat" cmpd="sng" algn="ctr">
-                      <a:solidFill>
-                        <a:srgbClr val="CBD5E0"/>
-                      </a:solidFill>
-                      <a:prstDash val="solid"/>
-                      <a:round/>
-                      <a:headEnd type="none" w="med" len="med"/>
-                      <a:tailEnd type="none" w="med" len="med"/>
-                    </a:lnR>
-                    <a:lnT w="3810" cap="flat" cmpd="sng" algn="ctr">
-                      <a:solidFill>
-                        <a:srgbClr val="CBD5E0"/>
-                      </a:solidFill>
-                      <a:prstDash val="solid"/>
-                      <a:round/>
-                      <a:headEnd type="none" w="med" len="med"/>
-                      <a:tailEnd type="none" w="med" len="med"/>
-                    </a:lnT>
-                    <a:lnB w="3810" cap="flat" cmpd="sng" algn="ctr">
-                      <a:solidFill>
-                        <a:srgbClr val="CBD5E0"/>
-                      </a:solidFill>
-                      <a:prstDash val="solid"/>
-                      <a:round/>
-                      <a:headEnd type="none" w="med" len="med"/>
-                      <a:tailEnd type="none" w="med" len="med"/>
-                    </a:lnB>
-                    <a:solidFill>
-                      <a:srgbClr val="FFFFFF"/>
-                    </a:solidFill>
-                  </a:tcPr>
-                </a:tc>
-                <a:tc>
-                  <a:txBody>
-                    <a:bodyPr/>
-                    <a:lstStyle/>
-                    <a:p>
-                      <a:pPr indent="0" marL="0">
-                        <a:buNone/>
-                      </a:pPr>
-                      <a:r>
-                        <a:rPr lang="en-US" sz="1050" dirty="0">
-                          <a:solidFill>
-                            <a:srgbClr val="10161F"/>
-                          </a:solidFill>
-                          <a:latin typeface="Pretendard" pitchFamily="34" charset="0"/>
-                          <a:ea typeface="Pretendard" pitchFamily="34" charset="-122"/>
-                          <a:cs typeface="Pretendard" pitchFamily="34" charset="-120"/>
-                        </a:rPr>
-                        <a:t>★★★</a:t>
-                      </a:r>
-                      <a:endParaRPr lang="en-US" sz="1050" dirty="0">
-                        <a:latin typeface="Pretendard" charset="0"/>
-                        <a:ea typeface="Pretendard" charset="0"/>
-                        <a:cs typeface="Pretendard" charset="0"/>
-                      </a:endParaRPr>
-                    </a:p>
-                  </a:txBody>
-                  <a:tcPr marL="50800" marR="50800" marT="25400" marB="25400" anchor="ctr">
-                    <a:lnL w="3810" cap="flat" cmpd="sng" algn="ctr">
-                      <a:solidFill>
-                        <a:srgbClr val="CBD5E0"/>
-                      </a:solidFill>
-                      <a:prstDash val="solid"/>
-                      <a:round/>
-                      <a:headEnd type="none" w="med" len="med"/>
-                      <a:tailEnd type="none" w="med" len="med"/>
-                    </a:lnL>
-                    <a:lnR w="3810" cap="flat" cmpd="sng" algn="ctr">
-                      <a:solidFill>
-                        <a:srgbClr val="CBD5E0"/>
-                      </a:solidFill>
-                      <a:prstDash val="solid"/>
-                      <a:round/>
-                      <a:headEnd type="none" w="med" len="med"/>
-                      <a:tailEnd type="none" w="med" len="med"/>
-                    </a:lnR>
-                    <a:lnT w="3810" cap="flat" cmpd="sng" algn="ctr">
-                      <a:solidFill>
-                        <a:srgbClr val="CBD5E0"/>
-                      </a:solidFill>
-                      <a:prstDash val="solid"/>
-                      <a:round/>
-                      <a:headEnd type="none" w="med" len="med"/>
-                      <a:tailEnd type="none" w="med" len="med"/>
-                    </a:lnT>
-                    <a:lnB w="3810" cap="flat" cmpd="sng" algn="ctr">
-                      <a:solidFill>
-                        <a:srgbClr val="CBD5E0"/>
-                      </a:solidFill>
-                      <a:prstDash val="solid"/>
-                      <a:round/>
-                      <a:headEnd type="none" w="med" len="med"/>
-                      <a:tailEnd type="none" w="med" len="med"/>
-                    </a:lnB>
-                    <a:solidFill>
-                      <a:srgbClr val="FFFFFF"/>
-                    </a:solidFill>
-                  </a:tcPr>
-                </a:tc>
-                <a:tc>
-                  <a:txBody>
-                    <a:bodyPr/>
-                    <a:lstStyle/>
-                    <a:p>
-                      <a:pPr indent="0" marL="0">
-                        <a:buNone/>
-                      </a:pPr>
-                      <a:r>
-                        <a:rPr lang="en-US" sz="1050" dirty="0">
-                          <a:solidFill>
-                            <a:srgbClr val="10161F"/>
-                          </a:solidFill>
-                          <a:latin typeface="Pretendard" pitchFamily="34" charset="0"/>
-                          <a:ea typeface="Pretendard" pitchFamily="34" charset="-122"/>
-                          <a:cs typeface="Pretendard" pitchFamily="34" charset="-120"/>
-                        </a:rPr>
-                        <a:t>밸류업 </a:t>
-                      </a:r>
-                      <a:pPr indent="0" marL="0">
-                        <a:buNone/>
-                      </a:pPr>
-                      <a:r>
-                        <a:rPr lang="en-US" sz="1050" dirty="0">
-                          <a:solidFill>
-                            <a:srgbClr val="10161F"/>
-                          </a:solidFill>
-                          <a:latin typeface="Pretendard" pitchFamily="34" charset="0"/>
-                          <a:ea typeface="Pretendard" pitchFamily="34" charset="-122"/>
-                          <a:cs typeface="Pretendard" pitchFamily="34" charset="-120"/>
-                        </a:rPr>
-                        <a:t>후 </a:t>
-                      </a:r>
-                      <a:pPr indent="0" marL="0">
-                        <a:buNone/>
-                      </a:pPr>
-                      <a:r>
-                        <a:rPr lang="en-US" sz="1050" dirty="0">
-                          <a:solidFill>
-                            <a:srgbClr val="10161F"/>
-                          </a:solidFill>
-                          <a:latin typeface="Pretendard" pitchFamily="34" charset="0"/>
-                          <a:ea typeface="Pretendard" pitchFamily="34" charset="-122"/>
-                          <a:cs typeface="Pretendard" pitchFamily="34" charset="-120"/>
-                        </a:rPr>
-                        <a:t>매각 </a:t>
-                      </a:r>
-                      <a:pPr indent="0" marL="0">
-                        <a:buNone/>
-                      </a:pPr>
-                      <a:r>
-                        <a:rPr lang="en-US" sz="1050" dirty="0">
-                          <a:solidFill>
-                            <a:srgbClr val="10161F"/>
-                          </a:solidFill>
-                          <a:latin typeface="Pretendard" pitchFamily="34" charset="0"/>
-                          <a:ea typeface="Pretendard" pitchFamily="34" charset="-122"/>
-                          <a:cs typeface="Pretendard" pitchFamily="34" charset="-120"/>
-                        </a:rPr>
-                        <a:t>시나리오</a:t>
-                      </a:r>
-                      <a:endParaRPr lang="en-US" sz="1050" dirty="0">
-                        <a:latin typeface="Pretendard" charset="0"/>
-                        <a:ea typeface="Pretendard" charset="0"/>
-                        <a:cs typeface="Pretendard" charset="0"/>
-                      </a:endParaRPr>
-                    </a:p>
-                  </a:txBody>
-                  <a:tcPr marL="50800" marR="50800" marT="25400" marB="25400" anchor="ctr">
-                    <a:lnL w="3810" cap="flat" cmpd="sng" algn="ctr">
-                      <a:solidFill>
-                        <a:srgbClr val="CBD5E0"/>
-                      </a:solidFill>
-                      <a:prstDash val="solid"/>
-                      <a:round/>
-                      <a:headEnd type="none" w="med" len="med"/>
-                      <a:tailEnd type="none" w="med" len="med"/>
-                    </a:lnL>
-                    <a:lnR w="3810" cap="flat" cmpd="sng" algn="ctr">
-                      <a:solidFill>
-                        <a:srgbClr val="CBD5E0"/>
-                      </a:solidFill>
-                      <a:prstDash val="solid"/>
-                      <a:round/>
-                      <a:headEnd type="none" w="med" len="med"/>
-                      <a:tailEnd type="none" w="med" len="med"/>
-                    </a:lnR>
-                    <a:lnT w="3810" cap="flat" cmpd="sng" algn="ctr">
-                      <a:solidFill>
-                        <a:srgbClr val="CBD5E0"/>
-                      </a:solidFill>
-                      <a:prstDash val="solid"/>
-                      <a:round/>
-                      <a:headEnd type="none" w="med" len="med"/>
-                      <a:tailEnd type="none" w="med" len="med"/>
-                    </a:lnT>
-                    <a:lnB w="3810" cap="flat" cmpd="sng" algn="ctr">
-                      <a:solidFill>
-                        <a:srgbClr val="CBD5E0"/>
-                      </a:solidFill>
-                      <a:prstDash val="solid"/>
-                      <a:round/>
-                      <a:headEnd type="none" w="med" len="med"/>
-                      <a:tailEnd type="none" w="med" len="med"/>
-                    </a:lnB>
-                    <a:solidFill>
-                      <a:srgbClr val="FFFFFF"/>
-                    </a:solidFill>
-                  </a:tcPr>
-                </a:tc>
-              </a:tr>
-            </a:tbl>
-          </a:graphicData>
-        </a:graphic>
-      </p:graphicFrame>
-      <p:sp>
-        <p:nvSpPr>
-          <p:cNvPr id="29" name="Shape 26"/>
-          <p:cNvSpPr/>
-          <p:nvPr/>
-        </p:nvSpPr>
-        <p:spPr>
-          <a:xfrm>
-            <a:off x="566928" y="5678424"/>
+          <p:cNvPr id="6" name="Shape 4"/>
+          <p:cNvSpPr/>
+          <p:nvPr/>
+        </p:nvSpPr>
+        <p:spPr>
+          <a:xfrm>
+            <a:off x="566928" y="4983480"/>
             <a:ext cx="11057839" cy="804672"/>
           </a:xfrm>
           <a:prstGeom prst="roundRect">
@@ -9056,13 +8540,13 @@
       </p:sp>
       <p:sp>
         <p:nvSpPr>
-          <p:cNvPr id="30" name="Text 27"/>
-          <p:cNvSpPr/>
-          <p:nvPr/>
-        </p:nvSpPr>
-        <p:spPr>
-          <a:xfrm>
-            <a:off x="749808" y="5788152"/>
+          <p:cNvPr id="7" name="Text 5"/>
+          <p:cNvSpPr/>
+          <p:nvPr/>
+        </p:nvSpPr>
+        <p:spPr>
+          <a:xfrm>
+            <a:off x="749808" y="5093208"/>
             <a:ext cx="1691640" cy="256032"/>
           </a:xfrm>
           <a:prstGeom prst="rect">
@@ -9095,13 +8579,13 @@
       </p:sp>
       <p:sp>
         <p:nvSpPr>
-          <p:cNvPr id="31" name="Text 28"/>
-          <p:cNvSpPr/>
-          <p:nvPr/>
-        </p:nvSpPr>
-        <p:spPr>
-          <a:xfrm>
-            <a:off x="2487168" y="5751576"/>
+          <p:cNvPr id="8" name="Text 6"/>
+          <p:cNvSpPr/>
+          <p:nvPr/>
+        </p:nvSpPr>
+        <p:spPr>
+          <a:xfrm>
+            <a:off x="2487168" y="5056632"/>
             <a:ext cx="8954719" cy="658368"/>
           </a:xfrm>
           <a:prstGeom prst="rect">
@@ -9129,7 +8613,7 @@
                 <a:ea typeface="Pretendard" pitchFamily="34" charset="-122"/>
                 <a:cs typeface="Pretendard" pitchFamily="34" charset="-120"/>
               </a:rPr>
-              <a:t>[참고] 종합 가치 제안: 영등포권역 핵심 상권의 희소성 높은 우량 자산으로, 안정적인 임대 수익과 향후 공법상 밸류업 및 권역 지가 상승에 따른 자본 이득(Capital Gain)을 동시에 실현할 수 있는 전략적 매물입니다.</a:t>
+              <a:t>{"ok":true,"mocked":true,"extractedFields":{"area_signal":"역삼","asset_type":"오피스빌딩","price_band":"300억","size_signal":"3000평(약 9917.4㎡)"},"extractedFacts":{"region":"역삼","exactAddressCandidate":"역삼동 742-1","assetType":"오피스빌딩","priceText":"300억","sizeText":"3000평(약 9917.4㎡)","currentUse":"오피스","currentUseSignal":"근린생활시설","leaseSignal":"임대중","vacancySignal":"공실없음","tenantNames":["쿠팡","네이버"],"unitRentTexts":["301호: 1500만"],"sellerMotivationText":"자산 효율화","brokerNotes":["초역세권 매물"]},"detectedSensitiveFields":["exact_address","tenant_name"],"ambiguousFields":[],"warnings":[],"areaSignal":"역삼","assetType":"오피스빌딩","priceBand":"300억","sizeSignal":"3000평(약 9917.4㎡)","dealType":"매각","buildingName":"역삼 센트럴타워","exactAddress":"역삼동 742-1","totalFloorArea":9917.3,"buildYear":2015,"currentUseSignal":"근린생활시설","vacancySignal":"공실 없음","fitSummary":"초역세권 근생 빌딩으로 시행/사옥 매입에 최적화","cautionSummary":"주요 임차 업종 만기 조율 필요","hiddenFields":["exact_address","seller_motivation"],"confidence":{"areaSignal":"confirmed","assetType":"confirmed","priceBand":"ai_hypothesis","fitSummary":"ai_hypothesis"},"missingData":["sizeSignal"],"boundaryNote":"본 자료는 실거래 통계 기반 참고치입니다.","buyerType":"법인 사옥형","budgetRange":{"min":50,"max":80,"display":"50억~80억"},"preferredRegions":["강남","성수"],"assetTypes":["꼬마빌딩","사옥용"],"purchasePurpose":"사옥용 매입","mustHave":["초역세권","주차"],"niceToHave":["테라스","루프탑"],"riskTolerance":"medium","financingNote":"자본금 50% 준비","missingQuestions":["구체적인 입주 시기가 언제인가요?","선호하는 수익률이 있나요?"],"privacyNotes":["연락처 비공개"],"fitReasons":["매수자 예산(50-80억)에 부합하는 매물입니다.","요청하신 성수/강남 권역에 해당합니다."],"cautionReasons":["요청한 용도와 달리 명도 협의가 다소 필요합니다."],"recommendedNextAction":"현장 답사 제안","kakaoMessage":"안녕하세요! 요청하신 조건에 부합하는 추천 매물이 있어 안내해 드립니다. 확인해보시고 피드백 부탁드립니다.","title":"강남 역삼역 초역세권 오피스 사옥용 빌딩 매각","shortSummary":"역삼역 도보 5분 거리의 준신축급 대형 오피스빌딩입니다.","dealPoints":["초역세권","사옥 최적"],"cautionPoints":["명도 조율 필요"],"hiddenInfoNotice":["보증금 및 지번은 인가 후 확인 가능"],"gateMessage":"G1 등급 등록이 필요합니다.","kakaoText":"강남 역삼역 오피스 빌딩 매각 안내입니다.","exactUnitCandidate":"101호","floor":"1층","areaSqmText":"150㎡","spaceType":"office","depositText":"5000만","monthlyRentText":"400만","maintenanceFeeText":"50만","availableFromText":"즉시입주","leaseTermMonthsText":"24","incentivesText":"렌트프리 2개월","restrictions":[],"landlordIdentity":"김성수","currentTenant":"스타트업","vacancyReason":"이전 확장","rentNegotiation":"협의 가능","region":"성수동","areaSqm":150,"deposit":5000,"monthlyRent":400,"maintenanceFee":50,"availableFrom":"즉시입주","leaseTermMonths":24,"incentives":{"rentFreeMonths":2,"interiorSupport":"일부 인테리어 지원","freeRentDetail":"렌트프리 2개월 지원"},"shortSummaryLease":"성수역 도보 5분 거리 1층 리테일 상가 매물입니다."}</a:t>
             </a:r>
             <a:endParaRPr lang="en-US" sz="1100" dirty="0"/>
           </a:p>
@@ -9137,7 +8621,7 @@
       </p:sp>
       <p:sp>
         <p:nvSpPr>
-          <p:cNvPr id="32" name="Text 29"/>
+          <p:cNvPr id="9" name="Text 7"/>
           <p:cNvSpPr/>
           <p:nvPr/>
         </p:nvSpPr>
@@ -9176,7 +8660,7 @@
       </p:sp>
       <p:sp>
         <p:nvSpPr>
-          <p:cNvPr id="33" name="Text 30"/>
+          <p:cNvPr id="10" name="Text 8"/>
           <p:cNvSpPr/>
           <p:nvPr/>
         </p:nvSpPr>
@@ -9391,11 +8875,11 @@
         <p:spPr>
           <a:xfrm>
             <a:off x="566928" y="1572768"/>
-            <a:ext cx="11057839" cy="3200400"/>
+            <a:ext cx="2490140" cy="3200400"/>
           </a:xfrm>
           <a:prstGeom prst="roundRect">
             <a:avLst>
-              <a:gd name="adj" fmla="val 1714"/>
+              <a:gd name="adj" fmla="val 2203"/>
             </a:avLst>
           </a:prstGeom>
           <a:solidFill>
@@ -9477,7 +8961,7 @@
         <p:spPr>
           <a:xfrm>
             <a:off x="786384" y="2304288"/>
-            <a:ext cx="10618927" cy="365760"/>
+            <a:ext cx="2051228" cy="365760"/>
           </a:xfrm>
           <a:prstGeom prst="rect">
             <a:avLst/>
@@ -9501,7 +8985,7 @@
                 <a:ea typeface="Pretendard" pitchFamily="34" charset="-122"/>
                 <a:cs typeface="Pretendard" pitchFamily="34" charset="-120"/>
               </a:rPr>
-              <a:t>{"ok"</a:t>
+              <a:t>초기 관심 표명 → 담당자 연락</a:t>
             </a:r>
             <a:endParaRPr lang="en-US" sz="1600" dirty="0"/>
           </a:p>
@@ -9516,7 +9000,7 @@
         <p:spPr>
           <a:xfrm>
             <a:off x="786384" y="2761488"/>
-            <a:ext cx="10618927" cy="1828800"/>
+            <a:ext cx="2051228" cy="1828800"/>
           </a:xfrm>
           <a:prstGeom prst="rect">
             <a:avLst/>
@@ -9531,8 +9015,147 @@
             <a:pPr indent="0" marL="0">
               <a:buNone/>
             </a:pPr>
-            <a:r>
-              <a:rPr lang="en-US" sz="1100" dirty="0">
+            <a:endParaRPr lang="en-US" sz="1100" dirty="0"/>
+          </a:p>
+        </p:txBody>
+      </p:sp>
+      <p:sp>
+        <p:nvSpPr>
+          <p:cNvPr id="11" name="Shape 9"/>
+          <p:cNvSpPr/>
+          <p:nvPr/>
+        </p:nvSpPr>
+        <p:spPr>
+          <a:xfrm>
+            <a:off x="3148508" y="3035808"/>
+            <a:ext cx="182880" cy="274320"/>
+          </a:xfrm>
+          <a:prstGeom prst="rightArrow">
+            <a:avLst/>
+          </a:prstGeom>
+          <a:solidFill>
+            <a:srgbClr val="CBD5E0"/>
+          </a:solidFill>
+          <a:ln w="6350">
+            <a:solidFill>
+              <a:srgbClr val="718096"/>
+            </a:solidFill>
+            <a:prstDash val="solid"/>
+          </a:ln>
+        </p:spPr>
+      </p:sp>
+      <p:sp>
+        <p:nvSpPr>
+          <p:cNvPr id="12" name="Shape 10"/>
+          <p:cNvSpPr/>
+          <p:nvPr/>
+        </p:nvSpPr>
+        <p:spPr>
+          <a:xfrm>
+            <a:off x="3422828" y="1572768"/>
+            <a:ext cx="2490140" cy="3200400"/>
+          </a:xfrm>
+          <a:prstGeom prst="roundRect">
+            <a:avLst>
+              <a:gd name="adj" fmla="val 2203"/>
+            </a:avLst>
+          </a:prstGeom>
+          <a:solidFill>
+            <a:srgbClr val="F7FAFC"/>
+          </a:solidFill>
+          <a:ln w="6350">
+            <a:solidFill>
+              <a:srgbClr val="CBD5E0"/>
+            </a:solidFill>
+            <a:prstDash val="solid"/>
+          </a:ln>
+        </p:spPr>
+      </p:sp>
+      <p:sp>
+        <p:nvSpPr>
+          <p:cNvPr id="13" name="Shape 11"/>
+          <p:cNvSpPr/>
+          <p:nvPr/>
+        </p:nvSpPr>
+        <p:spPr>
+          <a:xfrm>
+            <a:off x="3642284" y="1792224"/>
+            <a:ext cx="384048" cy="384048"/>
+          </a:xfrm>
+          <a:prstGeom prst="ellipse">
+            <a:avLst/>
+          </a:prstGeom>
+          <a:solidFill>
+            <a:srgbClr val="B98A2E"/>
+          </a:solidFill>
+          <a:ln/>
+        </p:spPr>
+      </p:sp>
+      <p:sp>
+        <p:nvSpPr>
+          <p:cNvPr id="14" name="Text 12"/>
+          <p:cNvSpPr/>
+          <p:nvPr/>
+        </p:nvSpPr>
+        <p:spPr>
+          <a:xfrm>
+            <a:off x="3642284" y="1792224"/>
+            <a:ext cx="384048" cy="384048"/>
+          </a:xfrm>
+          <a:prstGeom prst="rect">
+            <a:avLst/>
+          </a:prstGeom>
+          <a:noFill/>
+          <a:ln/>
+        </p:spPr>
+        <p:txBody>
+          <a:bodyPr wrap="square" lIns="0" tIns="0" rIns="0" bIns="0" rtlCol="0" anchor="ctr"/>
+          <a:lstStyle/>
+          <a:p>
+            <a:pPr algn="ctr" indent="0" marL="0">
+              <a:buNone/>
+            </a:pPr>
+            <a:r>
+              <a:rPr lang="en-US" sz="1300" b="1" dirty="0">
+                <a:solidFill>
+                  <a:srgbClr val="FFFFFF"/>
+                </a:solidFill>
+                <a:latin typeface="Arial" pitchFamily="34" charset="0"/>
+                <a:ea typeface="Arial" pitchFamily="34" charset="-122"/>
+                <a:cs typeface="Arial" pitchFamily="34" charset="-120"/>
+              </a:rPr>
+              <a:t>STEP 2</a:t>
+            </a:r>
+            <a:endParaRPr lang="en-US" sz="1300" dirty="0"/>
+          </a:p>
+        </p:txBody>
+      </p:sp>
+      <p:sp>
+        <p:nvSpPr>
+          <p:cNvPr id="15" name="Text 13"/>
+          <p:cNvSpPr/>
+          <p:nvPr/>
+        </p:nvSpPr>
+        <p:spPr>
+          <a:xfrm>
+            <a:off x="3642284" y="2304288"/>
+            <a:ext cx="2051228" cy="365760"/>
+          </a:xfrm>
+          <a:prstGeom prst="rect">
+            <a:avLst/>
+          </a:prstGeom>
+          <a:noFill/>
+          <a:ln/>
+        </p:spPr>
+        <p:txBody>
+          <a:bodyPr wrap="square" rtlCol="0" anchor="ctr"/>
+          <a:lstStyle/>
+          <a:p>
+            <a:pPr indent="0" marL="0">
+              <a:buNone/>
+            </a:pPr>
+            <a:r>
+              <a:rPr lang="en-US" sz="1600" b="1" dirty="0">
                 <a:solidFill>
                   <a:srgbClr val="10161F"/>
                 </a:solidFill>
@@ -9540,45 +9163,429 @@
                 <a:ea typeface="Pretendard" pitchFamily="34" charset="-122"/>
                 <a:cs typeface="Pretendard" pitchFamily="34" charset="-120"/>
               </a:rPr>
-              <a:t>true,"mocked":true,"extractedFields":{"area_signal":"역삼","asset_type":"오피스빌딩","price_band":"300억","size_signal":"3000평(약 9917.4㎡)"},"extractedFacts":{"region":"역삼","exactAddressCandidate":"역삼동 742-1","assetType":"오피스빌딩","priceText":"300억","sizeText":"3000평(약 9917.4㎡)","currentUse":"오피스","currentUseSignal":"근린생활시설","leaseSignal":"임대중","vacancySignal":"공실없음","tenantNames":["쿠팡","네이버"],"unitRentTexts":["301호: 1500만"],"sellerMotivationText":"자산 효율화","brokerNotes":["초역세권 매물"]},"detectedSensitiveFields":["exact_address","tenant_name"],"ambiguousFields":[],"warnings":[],"areaSignal":"역삼","assetType":"오피스빌딩","priceBand":"300억","sizeSignal":"3000평(약 9917.4㎡)","dealType":"매각","buildingName":"역삼 센트럴타워","exactAddress":"역삼동 742-1","totalFloorArea":9917.3,"buildYear":2015,"currentUseSignal":"근린생활시설","vacancySignal":"공실 없음","fitSummary":"초역세권 근생 빌딩으로 시행/사옥 매입에 최적화","cautionSummary":"주요 임차 업종 만기 조율 필요","hiddenFields":["exact_address","seller_motivation"],"confidence":{"areaSignal":"confirmed","assetType":"confirmed","priceBand":"ai_hypothesis","fitSummary":"ai_hypothesis"},"missingData":["sizeSignal"],"boundaryNote":"본 자료는 실거래 통계 기반 참고치입니다.","buyerType":"법인 사옥형","budgetRange":{"min":50,"max":80,"display":"50억~80억"},"preferredRegions":["강남","성수"],"assetTypes":["꼬마빌딩","사옥용"],"purchasePurpose":"사옥용 매입","mustHave":["초역세권","주차"],"niceToHave":["테라스","루프탑"],"riskTolerance":"medium","financingNote":"자본금 50% 준비","missingQuestions":["구체적인 입주 시기가 언제인가요?","선호하는 수익률이 있나요?"],"privacyNotes":["연락처 비공개"],"fitReasons":["매수자 예산(50-80억)에 부합하는 매물입니다.","요청하신 성수/강남 권역에 해당합니다."],"cautionReasons":["요청한 용도와 달리 명도 협의가 다소 필요합니다."],"recommendedNextAction":"현장 답사 제안","kakaoMessage":"안녕하세요! 요청하신 조건에 부합하는 추천 매물이 있어 안내해 드립니다. 확인해보시고 피드백 부탁드립니다.","title":"강남 역삼역 초역세권 오피스 사옥용 빌딩 매각","shortSummary":"역삼역 도보 5분 거리의 준신축급 대형 오피스빌딩입니다.","dealPoints":["초역세권","사옥 최적"],"cautionPoints":["명도 조율 필요"],"hiddenInfoNotice":["보증금 및 지번은 인가 후 확인 가능"],"gateMessage":"G1 등급 등록이 필요합니다.","kakaoText":"강남 역삼역 오피스 빌딩 매각 안내입니다.","exactUnitCandidate":"101호","floor":"1층","areaSqmText":"150㎡","spaceType":"office","depositText":"5000만","monthlyRentText":"400만","maintenanceFeeText":"50만","availableFromText":"즉시입주","leaseTermMonthsText":"24","incentivesText":"렌트프리 2개월","restrictions":[],"landlordIdentity":"김성수","currentTenant":"스타트업","vacancyReason":"이전 확장","rentNegotiation":"협의 가능","region":"성수동","areaSqm":150,"deposit":5000,"monthlyRent":400,"maintenanceFee":50,"availableFrom":"즉시입주","leaseTermMonths":24,"incentives":{"rentFreeMonths":2,"interiorSupport":"일부 인테리어 지원","freeRentDetail":"렌트프리 2개월 지원"},"shortSummaryLease":"성수역 도보 5분 거리 1층 리테일 상가 매물입니다."}</a:t>
-            </a:r>
+              <a:t>NDA 체결 → 임차인 정보 및 임대차계약서 제공</a:t>
+            </a:r>
+            <a:endParaRPr lang="en-US" sz="1600" dirty="0"/>
+          </a:p>
+        </p:txBody>
+      </p:sp>
+      <p:sp>
+        <p:nvSpPr>
+          <p:cNvPr id="16" name="Text 14"/>
+          <p:cNvSpPr/>
+          <p:nvPr/>
+        </p:nvSpPr>
+        <p:spPr>
+          <a:xfrm>
+            <a:off x="3642284" y="2761488"/>
+            <a:ext cx="2051228" cy="1828800"/>
+          </a:xfrm>
+          <a:prstGeom prst="rect">
+            <a:avLst/>
+          </a:prstGeom>
+          <a:noFill/>
+          <a:ln/>
+        </p:spPr>
+        <p:txBody>
+          <a:bodyPr wrap="square" rtlCol="0" anchor="t"/>
+          <a:lstStyle/>
+          <a:p>
+            <a:pPr indent="0" marL="0">
+              <a:buNone/>
+            </a:pPr>
             <a:endParaRPr lang="en-US" sz="1100" dirty="0"/>
           </a:p>
         </p:txBody>
       </p:sp>
       <p:sp>
         <p:nvSpPr>
-          <p:cNvPr id="11" name="Text 9"/>
-          <p:cNvSpPr/>
-          <p:nvPr/>
-        </p:nvSpPr>
-        <p:spPr>
-          <a:xfrm>
-            <a:off x="566928" y="6382512"/>
-            <a:ext cx="7315200" cy="219456"/>
-          </a:xfrm>
-          <a:prstGeom prst="rect">
-            <a:avLst/>
-          </a:prstGeom>
-          <a:noFill/>
-          <a:ln/>
-        </p:spPr>
-        <p:txBody>
-          <a:bodyPr wrap="square" lIns="0" tIns="0" rIns="0" bIns="0" rtlCol="0" anchor="ctr"/>
-          <a:lstStyle/>
-          <a:p>
-            <a:pPr indent="0" marL="0">
-              <a:buNone/>
-            </a:pPr>
-            <a:r>
-              <a:rPr lang="en-US" sz="800" dirty="0">
-                <a:solidFill>
-                  <a:srgbClr val="718096"/>
+          <p:cNvPr id="17" name="Shape 15"/>
+          <p:cNvSpPr/>
+          <p:nvPr/>
+        </p:nvSpPr>
+        <p:spPr>
+          <a:xfrm>
+            <a:off x="6004408" y="3035808"/>
+            <a:ext cx="182880" cy="274320"/>
+          </a:xfrm>
+          <a:prstGeom prst="rightArrow">
+            <a:avLst/>
+          </a:prstGeom>
+          <a:solidFill>
+            <a:srgbClr val="CBD5E0"/>
+          </a:solidFill>
+          <a:ln w="6350">
+            <a:solidFill>
+              <a:srgbClr val="718096"/>
+            </a:solidFill>
+            <a:prstDash val="solid"/>
+          </a:ln>
+        </p:spPr>
+      </p:sp>
+      <p:sp>
+        <p:nvSpPr>
+          <p:cNvPr id="18" name="Shape 16"/>
+          <p:cNvSpPr/>
+          <p:nvPr/>
+        </p:nvSpPr>
+        <p:spPr>
+          <a:xfrm>
+            <a:off x="6278728" y="1572768"/>
+            <a:ext cx="2490140" cy="3200400"/>
+          </a:xfrm>
+          <a:prstGeom prst="roundRect">
+            <a:avLst>
+              <a:gd name="adj" fmla="val 2203"/>
+            </a:avLst>
+          </a:prstGeom>
+          <a:solidFill>
+            <a:srgbClr val="F7FAFC"/>
+          </a:solidFill>
+          <a:ln w="6350">
+            <a:solidFill>
+              <a:srgbClr val="CBD5E0"/>
+            </a:solidFill>
+            <a:prstDash val="solid"/>
+          </a:ln>
+        </p:spPr>
+      </p:sp>
+      <p:sp>
+        <p:nvSpPr>
+          <p:cNvPr id="19" name="Shape 17"/>
+          <p:cNvSpPr/>
+          <p:nvPr/>
+        </p:nvSpPr>
+        <p:spPr>
+          <a:xfrm>
+            <a:off x="6498184" y="1792224"/>
+            <a:ext cx="384048" cy="384048"/>
+          </a:xfrm>
+          <a:prstGeom prst="ellipse">
+            <a:avLst/>
+          </a:prstGeom>
+          <a:solidFill>
+            <a:srgbClr val="B98A2E"/>
+          </a:solidFill>
+          <a:ln/>
+        </p:spPr>
+      </p:sp>
+      <p:sp>
+        <p:nvSpPr>
+          <p:cNvPr id="20" name="Text 18"/>
+          <p:cNvSpPr/>
+          <p:nvPr/>
+        </p:nvSpPr>
+        <p:spPr>
+          <a:xfrm>
+            <a:off x="6498184" y="1792224"/>
+            <a:ext cx="384048" cy="384048"/>
+          </a:xfrm>
+          <a:prstGeom prst="rect">
+            <a:avLst/>
+          </a:prstGeom>
+          <a:noFill/>
+          <a:ln/>
+        </p:spPr>
+        <p:txBody>
+          <a:bodyPr wrap="square" lIns="0" tIns="0" rIns="0" bIns="0" rtlCol="0" anchor="ctr"/>
+          <a:lstStyle/>
+          <a:p>
+            <a:pPr algn="ctr" indent="0" marL="0">
+              <a:buNone/>
+            </a:pPr>
+            <a:r>
+              <a:rPr lang="en-US" sz="1300" b="1" dirty="0">
+                <a:solidFill>
+                  <a:srgbClr val="FFFFFF"/>
+                </a:solidFill>
+                <a:latin typeface="Arial" pitchFamily="34" charset="0"/>
+                <a:ea typeface="Arial" pitchFamily="34" charset="-122"/>
+                <a:cs typeface="Arial" pitchFamily="34" charset="-120"/>
+              </a:rPr>
+              <a:t>STEP 3</a:t>
+            </a:r>
+            <a:endParaRPr lang="en-US" sz="1300" dirty="0"/>
+          </a:p>
+        </p:txBody>
+      </p:sp>
+      <p:sp>
+        <p:nvSpPr>
+          <p:cNvPr id="21" name="Text 19"/>
+          <p:cNvSpPr/>
+          <p:nvPr/>
+        </p:nvSpPr>
+        <p:spPr>
+          <a:xfrm>
+            <a:off x="6498184" y="2304288"/>
+            <a:ext cx="2051228" cy="365760"/>
+          </a:xfrm>
+          <a:prstGeom prst="rect">
+            <a:avLst/>
+          </a:prstGeom>
+          <a:noFill/>
+          <a:ln/>
+        </p:spPr>
+        <p:txBody>
+          <a:bodyPr wrap="square" rtlCol="0" anchor="ctr"/>
+          <a:lstStyle/>
+          <a:p>
+            <a:pPr indent="0" marL="0">
+              <a:buNone/>
+            </a:pPr>
+            <a:r>
+              <a:rPr lang="en-US" sz="1600" b="1" dirty="0">
+                <a:solidFill>
+                  <a:srgbClr val="10161F"/>
                 </a:solidFill>
                 <a:latin typeface="Pretendard" pitchFamily="34" charset="0"/>
                 <a:ea typeface="Pretendard" pitchFamily="34" charset="-122"/>
                 <a:cs typeface="Pretendard" pitchFamily="34" charset="-120"/>
               </a:rPr>
+              <a:t>현장 실사 일정 조율 → 건물 컨디션 및 설비 직접 확인</a:t>
+            </a:r>
+            <a:endParaRPr lang="en-US" sz="1600" dirty="0"/>
+          </a:p>
+        </p:txBody>
+      </p:sp>
+      <p:sp>
+        <p:nvSpPr>
+          <p:cNvPr id="22" name="Text 20"/>
+          <p:cNvSpPr/>
+          <p:nvPr/>
+        </p:nvSpPr>
+        <p:spPr>
+          <a:xfrm>
+            <a:off x="6498184" y="2761488"/>
+            <a:ext cx="2051228" cy="1828800"/>
+          </a:xfrm>
+          <a:prstGeom prst="rect">
+            <a:avLst/>
+          </a:prstGeom>
+          <a:noFill/>
+          <a:ln/>
+        </p:spPr>
+        <p:txBody>
+          <a:bodyPr wrap="square" rtlCol="0" anchor="t"/>
+          <a:lstStyle/>
+          <a:p>
+            <a:pPr indent="0" marL="0">
+              <a:buNone/>
+            </a:pPr>
+            <a:endParaRPr lang="en-US" sz="1100" dirty="0"/>
+          </a:p>
+        </p:txBody>
+      </p:sp>
+      <p:sp>
+        <p:nvSpPr>
+          <p:cNvPr id="23" name="Shape 21"/>
+          <p:cNvSpPr/>
+          <p:nvPr/>
+        </p:nvSpPr>
+        <p:spPr>
+          <a:xfrm>
+            <a:off x="8860307" y="3035808"/>
+            <a:ext cx="182880" cy="274320"/>
+          </a:xfrm>
+          <a:prstGeom prst="rightArrow">
+            <a:avLst/>
+          </a:prstGeom>
+          <a:solidFill>
+            <a:srgbClr val="CBD5E0"/>
+          </a:solidFill>
+          <a:ln w="6350">
+            <a:solidFill>
+              <a:srgbClr val="718096"/>
+            </a:solidFill>
+            <a:prstDash val="solid"/>
+          </a:ln>
+        </p:spPr>
+      </p:sp>
+      <p:sp>
+        <p:nvSpPr>
+          <p:cNvPr id="24" name="Shape 22"/>
+          <p:cNvSpPr/>
+          <p:nvPr/>
+        </p:nvSpPr>
+        <p:spPr>
+          <a:xfrm>
+            <a:off x="9134627" y="1572768"/>
+            <a:ext cx="2490140" cy="3200400"/>
+          </a:xfrm>
+          <a:prstGeom prst="roundRect">
+            <a:avLst>
+              <a:gd name="adj" fmla="val 2203"/>
+            </a:avLst>
+          </a:prstGeom>
+          <a:solidFill>
+            <a:srgbClr val="F7FAFC"/>
+          </a:solidFill>
+          <a:ln w="6350">
+            <a:solidFill>
+              <a:srgbClr val="CBD5E0"/>
+            </a:solidFill>
+            <a:prstDash val="solid"/>
+          </a:ln>
+        </p:spPr>
+      </p:sp>
+      <p:sp>
+        <p:nvSpPr>
+          <p:cNvPr id="25" name="Shape 23"/>
+          <p:cNvSpPr/>
+          <p:nvPr/>
+        </p:nvSpPr>
+        <p:spPr>
+          <a:xfrm>
+            <a:off x="9354083" y="1792224"/>
+            <a:ext cx="384048" cy="384048"/>
+          </a:xfrm>
+          <a:prstGeom prst="ellipse">
+            <a:avLst/>
+          </a:prstGeom>
+          <a:solidFill>
+            <a:srgbClr val="B98A2E"/>
+          </a:solidFill>
+          <a:ln/>
+        </p:spPr>
+      </p:sp>
+      <p:sp>
+        <p:nvSpPr>
+          <p:cNvPr id="26" name="Text 24"/>
+          <p:cNvSpPr/>
+          <p:nvPr/>
+        </p:nvSpPr>
+        <p:spPr>
+          <a:xfrm>
+            <a:off x="9354083" y="1792224"/>
+            <a:ext cx="384048" cy="384048"/>
+          </a:xfrm>
+          <a:prstGeom prst="rect">
+            <a:avLst/>
+          </a:prstGeom>
+          <a:noFill/>
+          <a:ln/>
+        </p:spPr>
+        <p:txBody>
+          <a:bodyPr wrap="square" lIns="0" tIns="0" rIns="0" bIns="0" rtlCol="0" anchor="ctr"/>
+          <a:lstStyle/>
+          <a:p>
+            <a:pPr algn="ctr" indent="0" marL="0">
+              <a:buNone/>
+            </a:pPr>
+            <a:r>
+              <a:rPr lang="en-US" sz="1300" b="1" dirty="0">
+                <a:solidFill>
+                  <a:srgbClr val="FFFFFF"/>
+                </a:solidFill>
+                <a:latin typeface="Arial" pitchFamily="34" charset="0"/>
+                <a:ea typeface="Arial" pitchFamily="34" charset="-122"/>
+                <a:cs typeface="Arial" pitchFamily="34" charset="-120"/>
+              </a:rPr>
+              <a:t>STEP 4</a:t>
+            </a:r>
+            <a:endParaRPr lang="en-US" sz="1300" dirty="0"/>
+          </a:p>
+        </p:txBody>
+      </p:sp>
+      <p:sp>
+        <p:nvSpPr>
+          <p:cNvPr id="27" name="Text 25"/>
+          <p:cNvSpPr/>
+          <p:nvPr/>
+        </p:nvSpPr>
+        <p:spPr>
+          <a:xfrm>
+            <a:off x="9354083" y="2304288"/>
+            <a:ext cx="2051228" cy="365760"/>
+          </a:xfrm>
+          <a:prstGeom prst="rect">
+            <a:avLst/>
+          </a:prstGeom>
+          <a:noFill/>
+          <a:ln/>
+        </p:spPr>
+        <p:txBody>
+          <a:bodyPr wrap="square" rtlCol="0" anchor="ctr"/>
+          <a:lstStyle/>
+          <a:p>
+            <a:pPr indent="0" marL="0">
+              <a:buNone/>
+            </a:pPr>
+            <a:r>
+              <a:rPr lang="en-US" sz="1600" b="1" dirty="0">
+                <a:solidFill>
+                  <a:srgbClr val="10161F"/>
+                </a:solidFill>
+                <a:latin typeface="Pretendard" pitchFamily="34" charset="0"/>
+                <a:ea typeface="Pretendard" pitchFamily="34" charset="-122"/>
+                <a:cs typeface="Pretendard" pitchFamily="34" charset="-120"/>
+              </a:rPr>
+              <a:t>LOI(투자의향서) 제출 → 가격 협의 개시</a:t>
+            </a:r>
+            <a:endParaRPr lang="en-US" sz="1600" dirty="0"/>
+          </a:p>
+        </p:txBody>
+      </p:sp>
+      <p:sp>
+        <p:nvSpPr>
+          <p:cNvPr id="28" name="Text 26"/>
+          <p:cNvSpPr/>
+          <p:nvPr/>
+        </p:nvSpPr>
+        <p:spPr>
+          <a:xfrm>
+            <a:off x="9354083" y="2761488"/>
+            <a:ext cx="2051228" cy="1828800"/>
+          </a:xfrm>
+          <a:prstGeom prst="rect">
+            <a:avLst/>
+          </a:prstGeom>
+          <a:noFill/>
+          <a:ln/>
+        </p:spPr>
+        <p:txBody>
+          <a:bodyPr wrap="square" rtlCol="0" anchor="t"/>
+          <a:lstStyle/>
+          <a:p>
+            <a:pPr indent="0" marL="0">
+              <a:buNone/>
+            </a:pPr>
+            <a:endParaRPr lang="en-US" sz="1100" dirty="0"/>
+          </a:p>
+        </p:txBody>
+      </p:sp>
+      <p:sp>
+        <p:nvSpPr>
+          <p:cNvPr id="29" name="Text 27"/>
+          <p:cNvSpPr/>
+          <p:nvPr/>
+        </p:nvSpPr>
+        <p:spPr>
+          <a:xfrm>
+            <a:off x="566928" y="6382512"/>
+            <a:ext cx="7315200" cy="219456"/>
+          </a:xfrm>
+          <a:prstGeom prst="rect">
+            <a:avLst/>
+          </a:prstGeom>
+          <a:noFill/>
+          <a:ln/>
+        </p:spPr>
+        <p:txBody>
+          <a:bodyPr wrap="square" lIns="0" tIns="0" rIns="0" bIns="0" rtlCol="0" anchor="ctr"/>
+          <a:lstStyle/>
+          <a:p>
+            <a:pPr indent="0" marL="0">
+              <a:buNone/>
+            </a:pPr>
+            <a:r>
+              <a:rPr lang="en-US" sz="800" dirty="0">
+                <a:solidFill>
+                  <a:srgbClr val="718096"/>
+                </a:solidFill>
+                <a:latin typeface="Pretendard" pitchFamily="34" charset="0"/>
+                <a:ea typeface="Pretendard" pitchFamily="34" charset="-122"/>
+                <a:cs typeface="Pretendard" pitchFamily="34" charset="-120"/>
+              </a:rPr>
               <a:t>크리딜   |   </a:t>
             </a:r>
             <a:endParaRPr lang="en-US" sz="800" dirty="0"/>
@@ -9587,7 +9594,7 @@
       </p:sp>
       <p:sp>
         <p:nvSpPr>
-          <p:cNvPr id="12" name="Text 10"/>
+          <p:cNvPr id="30" name="Text 28"/>
           <p:cNvSpPr/>
           <p:nvPr/>
         </p:nvSpPr>

--- a/docs/test/stress/e2e-outputs/development_case13_mullae_dev_basic.pptx
+++ b/docs/test/stress/e2e-outputs/development_case13_mullae_dev_basic.pptx
@@ -4332,7 +4332,7 @@
                 <a:ea typeface="Arial" pitchFamily="34" charset="-122"/>
                 <a:cs typeface="Arial" pitchFamily="34" charset="-120"/>
               </a:rPr>
-              <a:t>192%</a:t>
+              <a:t>166.5%</a:t>
             </a:r>
             <a:endParaRPr lang="en-US" sz="2000" dirty="0"/>
           </a:p>
@@ -5160,6 +5160,45 @@
         <p:spPr>
           <a:xfrm>
             <a:off x="6053328" y="1481328"/>
+            <a:ext cx="5571439" cy="237744"/>
+          </a:xfrm>
+          <a:prstGeom prst="rect">
+            <a:avLst/>
+          </a:prstGeom>
+          <a:noFill/>
+          <a:ln/>
+        </p:spPr>
+        <p:txBody>
+          <a:bodyPr wrap="square" lIns="0" tIns="0" rIns="0" bIns="0" rtlCol="0" anchor="ctr"/>
+          <a:lstStyle/>
+          <a:p>
+            <a:pPr indent="0" marL="0">
+              <a:buNone/>
+            </a:pPr>
+            <a:r>
+              <a:rPr lang="en-US" sz="1100" b="1" dirty="0">
+                <a:solidFill>
+                  <a:srgbClr val="10161F"/>
+                </a:solidFill>
+                <a:latin typeface="Pretendard" pitchFamily="34" charset="0"/>
+                <a:ea typeface="Pretendard" pitchFamily="34" charset="-122"/>
+                <a:cs typeface="Pretendard" pitchFamily="34" charset="-120"/>
+              </a:rPr>
+              <a:t>[교통] 교통 및 도로 접근성</a:t>
+            </a:r>
+            <a:endParaRPr lang="en-US" sz="1100" dirty="0"/>
+          </a:p>
+        </p:txBody>
+      </p:sp>
+      <p:sp>
+        <p:nvSpPr>
+          <p:cNvPr id="8" name="Text 5"/>
+          <p:cNvSpPr/>
+          <p:nvPr/>
+        </p:nvSpPr>
+        <p:spPr>
+          <a:xfrm>
+            <a:off x="6053328" y="1801368"/>
             <a:ext cx="2117147" cy="493776"/>
           </a:xfrm>
           <a:prstGeom prst="rect">
@@ -5187,7 +5226,7 @@
                 <a:ea typeface="Pretendard" pitchFamily="34" charset="-122"/>
                 <a:cs typeface="Pretendard" pitchFamily="34" charset="-120"/>
               </a:rPr>
-              <a:t>교통 접근성</a:t>
+              <a:t>교통 접근성 상세 정보는 담당 브로커를 통해 확인하</a:t>
             </a:r>
             <a:endParaRPr lang="en-US" sz="1300" dirty="0"/>
           </a:p>
@@ -5195,13 +5234,13 @@
       </p:sp>
       <p:sp>
         <p:nvSpPr>
-          <p:cNvPr id="8" name="Text 5"/>
-          <p:cNvSpPr/>
-          <p:nvPr/>
-        </p:nvSpPr>
-        <p:spPr>
-          <a:xfrm>
-            <a:off x="8170475" y="1481328"/>
+          <p:cNvPr id="9" name="Text 6"/>
+          <p:cNvSpPr/>
+          <p:nvPr/>
+        </p:nvSpPr>
+        <p:spPr>
+          <a:xfrm>
+            <a:off x="8170475" y="1801368"/>
             <a:ext cx="3454292" cy="493776"/>
           </a:xfrm>
           <a:prstGeom prst="rect">
@@ -5220,6 +5259,102 @@
               </a:lnSpc>
               <a:buNone/>
             </a:pPr>
+            <a:endParaRPr lang="en-US" sz="1300" dirty="0"/>
+          </a:p>
+        </p:txBody>
+      </p:sp>
+      <p:sp>
+        <p:nvSpPr>
+          <p:cNvPr id="10" name="Shape 7"/>
+          <p:cNvSpPr/>
+          <p:nvPr/>
+        </p:nvSpPr>
+        <p:spPr>
+          <a:xfrm>
+            <a:off x="6053328" y="2295144"/>
+            <a:ext cx="5571439" cy="0"/>
+          </a:xfrm>
+          <a:prstGeom prst="line">
+            <a:avLst/>
+          </a:prstGeom>
+          <a:noFill/>
+          <a:ln w="3810">
+            <a:solidFill>
+              <a:srgbClr val="CBD5E0"/>
+            </a:solidFill>
+            <a:prstDash val="solid"/>
+          </a:ln>
+        </p:spPr>
+      </p:sp>
+      <p:sp>
+        <p:nvSpPr>
+          <p:cNvPr id="11" name="Text 8"/>
+          <p:cNvSpPr/>
+          <p:nvPr/>
+        </p:nvSpPr>
+        <p:spPr>
+          <a:xfrm>
+            <a:off x="6053328" y="2295144"/>
+            <a:ext cx="2117147" cy="493776"/>
+          </a:xfrm>
+          <a:prstGeom prst="rect">
+            <a:avLst/>
+          </a:prstGeom>
+          <a:noFill/>
+          <a:ln/>
+        </p:spPr>
+        <p:txBody>
+          <a:bodyPr wrap="square" lIns="0" tIns="0" rIns="0" bIns="0" rtlCol="0" anchor="ctr"/>
+          <a:lstStyle/>
+          <a:p>
+            <a:pPr indent="0" marL="0">
+              <a:lnSpc>
+                <a:spcPct val="120000"/>
+              </a:lnSpc>
+              <a:buNone/>
+            </a:pPr>
+            <a:r>
+              <a:rPr lang="en-US" sz="1300" dirty="0">
+                <a:solidFill>
+                  <a:srgbClr val="718096"/>
+                </a:solidFill>
+                <a:latin typeface="Pretendard" pitchFamily="34" charset="0"/>
+                <a:ea typeface="Pretendard" pitchFamily="34" charset="-122"/>
+                <a:cs typeface="Pretendard" pitchFamily="34" charset="-120"/>
+              </a:rPr>
+              <a:t>[건물] 주변 상권</a:t>
+            </a:r>
+            <a:endParaRPr lang="en-US" sz="1300" dirty="0"/>
+          </a:p>
+        </p:txBody>
+      </p:sp>
+      <p:sp>
+        <p:nvSpPr>
+          <p:cNvPr id="12" name="Text 9"/>
+          <p:cNvSpPr/>
+          <p:nvPr/>
+        </p:nvSpPr>
+        <p:spPr>
+          <a:xfrm>
+            <a:off x="8170475" y="2295144"/>
+            <a:ext cx="3454292" cy="493776"/>
+          </a:xfrm>
+          <a:prstGeom prst="rect">
+            <a:avLst/>
+          </a:prstGeom>
+          <a:noFill/>
+          <a:ln/>
+        </p:spPr>
+        <p:txBody>
+          <a:bodyPr wrap="square" lIns="0" tIns="0" rIns="0" bIns="0" rtlCol="0" anchor="ctr"/>
+          <a:lstStyle/>
+          <a:p>
+            <a:pPr indent="0" marL="0">
+              <a:lnSpc>
+                <a:spcPct val="120000"/>
+              </a:lnSpc>
+              <a:buNone/>
+            </a:pPr>
             <a:r>
               <a:rPr lang="en-US" sz="1300" b="1" dirty="0">
                 <a:solidFill>
@@ -5229,7 +5364,7 @@
                 <a:ea typeface="Pretendard" pitchFamily="34" charset="-122"/>
                 <a:cs typeface="Pretendard" pitchFamily="34" charset="-120"/>
               </a:rPr>
-              <a:t>{"ok":true,"mocked":true,"extractedFields":{"area_signal":"역삼","asset_type":"오피스빌딩","price_band":"300억","size_signal":"3000평(약 9917.</a:t>
+              <a:t>영등포권역 내 주요 비즈니스 및 유동인구 풍부한 상권 입지</a:t>
             </a:r>
             <a:endParaRPr lang="en-US" sz="1300" dirty="0"/>
           </a:p>
@@ -5237,7 +5372,103 @@
       </p:sp>
       <p:sp>
         <p:nvSpPr>
-          <p:cNvPr id="9" name="Text 6"/>
+          <p:cNvPr id="13" name="Shape 10"/>
+          <p:cNvSpPr/>
+          <p:nvPr/>
+        </p:nvSpPr>
+        <p:spPr>
+          <a:xfrm>
+            <a:off x="6053328" y="2788920"/>
+            <a:ext cx="5571439" cy="0"/>
+          </a:xfrm>
+          <a:prstGeom prst="line">
+            <a:avLst/>
+          </a:prstGeom>
+          <a:noFill/>
+          <a:ln w="3810">
+            <a:solidFill>
+              <a:srgbClr val="CBD5E0"/>
+            </a:solidFill>
+            <a:prstDash val="solid"/>
+          </a:ln>
+        </p:spPr>
+      </p:sp>
+      <p:sp>
+        <p:nvSpPr>
+          <p:cNvPr id="14" name="Text 11"/>
+          <p:cNvSpPr/>
+          <p:nvPr/>
+        </p:nvSpPr>
+        <p:spPr>
+          <a:xfrm>
+            <a:off x="6053328" y="2788920"/>
+            <a:ext cx="2117147" cy="493776"/>
+          </a:xfrm>
+          <a:prstGeom prst="rect">
+            <a:avLst/>
+          </a:prstGeom>
+          <a:noFill/>
+          <a:ln/>
+        </p:spPr>
+        <p:txBody>
+          <a:bodyPr wrap="square" lIns="0" tIns="0" rIns="0" bIns="0" rtlCol="0" anchor="ctr"/>
+          <a:lstStyle/>
+          <a:p>
+            <a:pPr indent="0" marL="0">
+              <a:lnSpc>
+                <a:spcPct val="120000"/>
+              </a:lnSpc>
+              <a:buNone/>
+            </a:pPr>
+            <a:r>
+              <a:rPr lang="en-US" sz="1300" dirty="0">
+                <a:solidFill>
+                  <a:srgbClr val="718096"/>
+                </a:solidFill>
+                <a:latin typeface="Pretendard" pitchFamily="34" charset="0"/>
+                <a:ea typeface="Pretendard" pitchFamily="34" charset="-122"/>
+                <a:cs typeface="Pretendard" pitchFamily="34" charset="-120"/>
+              </a:rPr>
+              <a:t>영등포권역 내 우수한 접근성과 높은 가시성을 갖춘</a:t>
+            </a:r>
+            <a:endParaRPr lang="en-US" sz="1300" dirty="0"/>
+          </a:p>
+        </p:txBody>
+      </p:sp>
+      <p:sp>
+        <p:nvSpPr>
+          <p:cNvPr id="15" name="Text 12"/>
+          <p:cNvSpPr/>
+          <p:nvPr/>
+        </p:nvSpPr>
+        <p:spPr>
+          <a:xfrm>
+            <a:off x="8170475" y="2788920"/>
+            <a:ext cx="3454292" cy="493776"/>
+          </a:xfrm>
+          <a:prstGeom prst="rect">
+            <a:avLst/>
+          </a:prstGeom>
+          <a:noFill/>
+          <a:ln/>
+        </p:spPr>
+        <p:txBody>
+          <a:bodyPr wrap="square" lIns="0" tIns="0" rIns="0" bIns="0" rtlCol="0" anchor="ctr"/>
+          <a:lstStyle/>
+          <a:p>
+            <a:pPr indent="0" marL="0">
+              <a:lnSpc>
+                <a:spcPct val="120000"/>
+              </a:lnSpc>
+              <a:buNone/>
+            </a:pPr>
+            <a:endParaRPr lang="en-US" sz="1300" dirty="0"/>
+          </a:p>
+        </p:txBody>
+      </p:sp>
+      <p:sp>
+        <p:nvSpPr>
+          <p:cNvPr id="16" name="Text 13"/>
           <p:cNvSpPr/>
           <p:nvPr/>
         </p:nvSpPr>
@@ -5276,7 +5507,7 @@
       </p:sp>
       <p:sp>
         <p:nvSpPr>
-          <p:cNvPr id="10" name="Text 7"/>
+          <p:cNvPr id="17" name="Text 14"/>
           <p:cNvSpPr/>
           <p:nvPr/>
         </p:nvSpPr>
@@ -5310,45 +5541,6 @@
               <a:t>3</a:t>
             </a:r>
             <a:endParaRPr lang="en-US" sz="900" dirty="0"/>
-          </a:p>
-        </p:txBody>
-      </p:sp>
-      <p:sp>
-        <p:nvSpPr>
-          <p:cNvPr id="11" name="Text 8"/>
-          <p:cNvSpPr/>
-          <p:nvPr/>
-        </p:nvSpPr>
-        <p:spPr>
-          <a:xfrm>
-            <a:off x="566928" y="1481328"/>
-            <a:ext cx="11057839" cy="9692640"/>
-          </a:xfrm>
-          <a:prstGeom prst="rect">
-            <a:avLst/>
-          </a:prstGeom>
-          <a:noFill/>
-          <a:ln/>
-        </p:spPr>
-        <p:txBody>
-          <a:bodyPr wrap="square" lIns="0" tIns="0" rIns="0" bIns="0" rtlCol="0" anchor="t"/>
-          <a:lstStyle/>
-          <a:p>
-            <a:pPr indent="0" marL="0">
-              <a:buNone/>
-            </a:pPr>
-            <a:r>
-              <a:rPr lang="en-US" sz="1000" dirty="0">
-                <a:solidFill>
-                  <a:srgbClr val="10161F"/>
-                </a:solidFill>
-                <a:latin typeface="Pretendard" pitchFamily="34" charset="0"/>
-                <a:ea typeface="Pretendard" pitchFamily="34" charset="-122"/>
-                <a:cs typeface="Pretendard" pitchFamily="34" charset="-120"/>
-              </a:rPr>
-              <a:t>{"ok":true,"mocked":true,"extractedFields":{"area_signal":"역삼","asset_type":"오피스빌딩","price_band":"300억","size_signal":"3000평(약 9917.4㎡)"},"extractedFacts":{"region":"역삼","exactAddressCandidate":"역삼동 742-1","assetType":"오피스빌딩","priceText":"300억","sizeText":"3000평(약 9917.4㎡)","currentUse":"오피스","currentUseSignal":"근린생활시설","leaseSignal":"임대중","vacancySignal":"공실없음","tenantNames":["쿠팡","네이버"],"unitRentTexts":["301호: 1500만"],"sellerMotivationText":"자산 효율화","brokerNotes":["초역세권 매물"]},"detectedSensitiveFields":["exact_address","tenant_name"],"ambiguousFields":[],"warnings":[],"areaSignal":"역삼","assetType":"오피스빌딩","priceBand":"300억","sizeSignal":"3000평(약 9917.4㎡)","dealType":"매각","buildingName":"역삼 센트럴타워","exactAddress":"역삼동 742-1","totalFloorArea":9917.3,"buildYear":2015,"currentUseSignal":"근린생활시설","vacancySignal":"공실 없음","fitSummary":"초역세권 근생 빌딩으로 시행/사옥 매입에 최적화","cautionSummary":"주요 임차 업종 만기 조율 필요","hiddenFields":["exact_address","seller_motivation"],"confidence":{"areaSignal":"confirmed","assetType":"confirmed","priceBand":"ai_hypothesis","fitSummary":"ai_hypothesis"},"missingData":["sizeSignal"],"boundaryNote":"본 자료는 실거래 통계 기반 참고치입니다.","buyerType":"법인 사옥형","budgetRange":{"min":50,"max":80,"display":"50억~80억"},"preferredRegions":["강남","성수"],"assetTypes":["꼬마빌딩","사옥용"],"purchasePurpose":"사옥용 매입","mustHave":["초역세권","주차"],"niceToHave":["테라스","루프탑"],"riskTolerance":"medium","financingNote":"자본금 50% 준비","missingQuestions":["구체적인 입주 시기가 언제인가요?","선호하는 수익률이 있나요?"],"privacyNotes":["연락처 비공개"],"fitReasons":["매수자 예산(50-80억)에 부합하는 매물입니다.","요청하신 성수/강남 권역에 해당합니다."],"cautionReasons":["요청한 용도와 달리 명도 협의가 다소 필요합니다."],"recommendedNextAction":"현장 답사 제안","kakaoMessage":"안녕하세요! 요청하신 조건에 부합하는 추천 매물이 있어 안내해 드립니다. 확인해보시고 피드백 부탁드립니다.","title":"강남 역삼역 초역세권 오피스 사옥용 빌딩 매각","shortSummary":"역삼역 도보 5분 거리의 준신축급 대형 오피스빌딩입니다.","dealPoints":["초역세권","사옥 최적"],"cautionPoints":["명도 조율 필요"],"hiddenInfoNotice":["보증금 및 지번은 인가 후 확인 가능"],"gateMessage":"G1 등급 등록이 필요합니다.","kakaoText":"강남 역삼역 오피스 빌딩 매각 안내입니다.","exactUnitCandidate":"101호","floor":"1층","areaSqmText":"150㎡","spaceType":"office","depositText":"5000만","monthlyRentText":"400만","maintenanceFeeText":"50만","availableFromText":"즉시입주","leaseTermMonthsText":"24","incentivesText":"렌트프리 2개월","restrictions":[],"landlordIdentity":"김성수","currentTenant":"스타트업","vacancyReason":"이전 확장","rentNegotiation":"협의 가능","region":"성수동","areaSqm":150,"deposit":5000,"monthlyRent":400,"maintenanceFee":50,"availableFrom":"즉시입주","leaseTermMonths":24,"incentives":{"rentFreeMonths":2,"interiorSupport":"일부 인테리어 지원","freeRentDetail":"렌트프리 2개월 지원"},"shortSummaryLease":"성수역 도보 5분 거리 1층 리테일 상가 매물입니다."}</a:t>
-            </a:r>
-            <a:endParaRPr lang="en-US" sz="1000" dirty="0"/>
           </a:p>
         </p:txBody>
       </p:sp>
@@ -5596,7 +5788,7 @@
                 <a:ea typeface="Pretendard" pitchFamily="34" charset="-122"/>
                 <a:cs typeface="Pretendard" pitchFamily="34" charset="-120"/>
               </a:rPr>
-              <a:t>{"ok"</a:t>
+              <a:t>소재지</a:t>
             </a:r>
             <a:endParaRPr lang="en-US" sz="1400" dirty="0"/>
           </a:p>
@@ -5638,7 +5830,7 @@
                 <a:ea typeface="Pretendard" pitchFamily="34" charset="-122"/>
                 <a:cs typeface="Pretendard" pitchFamily="34" charset="-120"/>
               </a:rPr>
-              <a:t>true,"mocked":true,"extractedFields":{"area_signal":"역삼","asset_type":"오피스빌딩","price_band":"300억","size_signal":"3000평(약 9917.4㎡)"},"extractedFacts":{"region":"역삼","exactAddressCandidate":"역삼동 742-1","assetType":"오피스빌딩","priceText":"300억","sizeText":"3000평(약 9917.4㎡)","currentUse":"오피스","currentUseSignal":"근린생활시설","leaseSignal":"임대중","vacancySignal":"공실없음","tenantNames":"쿠팡","네이버","unitRentTexts":"301호: 1500만","sellerMotivationText":"자산 효율화","brokerNotes":"초역세권 매물"},"detectedSensitiveFields":"exact_address","tenant_name","ambiguousFields":,"warnings":,"areaSignal":"역삼","assetType":"오피스빌딩","priceBand":"300억","sizeSignal":"3000평(약 9917.4㎡)","dealType":"매각","buildingName":"역삼 센트럴타워","exactAddress":"역삼동 742-1","totalFloorArea":9917.3,"buildYear":2015,"currentUseSignal":"근린생활시설","vacancySignal":"공실 없음","fitSummary":"초역세권 근생 빌딩으로 시행/사옥 매입에 최적화","cautionSummary":"주요 임차 업종 만기 조율 필요","hiddenFields":"exact_address","seller_motivation","confidence":{"areaSignal":"confirmed","assetType":"confirmed","priceBand":"ai_hypothesis","fitSummary":"ai_hypothesis"},"missingData":"sizeSignal","boundaryNote":"본 자료는 실거래 통계 기반 참고치입니다.","buyerType":"법인 사옥형","budgetRange":{"min":50,"max":80,"display":"50억~80억"},"preferredRegions":"강남","성수","assetTypes":"꼬마빌딩","사옥용","purchasePurpose":"사옥용 매입","mustHave":"초역세권","주차","niceToHave":"테라스","루프탑","riskTolerance":"medium","financingNote":"자본금 50% 준비","missingQuestions":"구체적인 입주 시기가 언제인가요?","선호하는 수익률이 있나요?","privacyNotes":"연락처 비공개","fitReasons":"매수자 예산(50-80억)에 부합하는 매물입니다.","요청하신 성수/강남 권역에 해당합니다.","cautionReasons":"요청한 용도와 달리 명도 협의가 다소 필요합니다.","recommendedNextAction":"현장 답사 제안","kakaoMessage":"안녕하세요! 요청하신 조건에 부합하는 추천 매물이 있어 안내해 드립니다. 확인해보시고 피드백 부탁드립니다.","title":"강남 역삼역 초역세권 오피스 사옥용 빌딩 매각","shortSummary":"역삼역 도보 5분 거리의 준신축급 대형 오피스빌딩입니다.","dealPoints":"초역세권","사옥 최적","cautionPoints":"명도 조율 필요","hiddenInfoNotice":"보증금 및 지번은 인가 후 확인 가능","gateMessage":"G1 등급 등록이 필요합니다.","kakaoText":"강남 역삼역 오피스 빌딩 매각 안내입니다.","exactUnitCandidate":"101호","floor":"1층","areaSqmText":"150㎡","spaceType":"office","depositText":"5000만","monthlyRentText":"400만","maintenanceFeeText":"50만","availableFromText":"즉시입주","leaseTermMonthsText":"24","incentivesText":"렌트프리 2개월","restrictions":,"landlordIdentity":"김성수","currentTenant":"스타트업","vacancyReason":"이전 확장","rentNegotiation":"협의 가능","region":"성수동","areaSqm":150,"deposit":5000,"monthlyRent":400,"maintenanceFee":50,"availableFrom":"즉시입주","leaseTermMonths":24,"incentives":{"rentFreeMonths":2,"interiorSupport":"일부 인테리어 지원","freeRentDetail":"렌트프리 2개월 지원"},"shortSummaryLease":"성수역 도보 5분 거리 1층 리테일 상가 매물입니다."}</a:t>
+              <a:t>영등포권역</a:t>
             </a:r>
             <a:endParaRPr lang="en-US" sz="1400" dirty="0"/>
           </a:p>
@@ -5647,6 +5839,862 @@
       <p:sp>
         <p:nvSpPr>
           <p:cNvPr id="9" name="Shape 7"/>
+          <p:cNvSpPr/>
+          <p:nvPr/>
+        </p:nvSpPr>
+        <p:spPr>
+          <a:xfrm>
+            <a:off x="566928" y="2048256"/>
+            <a:ext cx="6858000" cy="0"/>
+          </a:xfrm>
+          <a:prstGeom prst="line">
+            <a:avLst/>
+          </a:prstGeom>
+          <a:noFill/>
+          <a:ln w="3810">
+            <a:solidFill>
+              <a:srgbClr val="CBD5E0"/>
+            </a:solidFill>
+            <a:prstDash val="solid"/>
+          </a:ln>
+        </p:spPr>
+      </p:sp>
+      <p:sp>
+        <p:nvSpPr>
+          <p:cNvPr id="10" name="Text 8"/>
+          <p:cNvSpPr/>
+          <p:nvPr/>
+        </p:nvSpPr>
+        <p:spPr>
+          <a:xfrm>
+            <a:off x="566928" y="2048256"/>
+            <a:ext cx="2606040" cy="402336"/>
+          </a:xfrm>
+          <a:prstGeom prst="rect">
+            <a:avLst/>
+          </a:prstGeom>
+          <a:noFill/>
+          <a:ln/>
+        </p:spPr>
+        <p:txBody>
+          <a:bodyPr wrap="square" lIns="0" tIns="0" rIns="0" bIns="0" rtlCol="0" anchor="ctr"/>
+          <a:lstStyle/>
+          <a:p>
+            <a:pPr indent="0" marL="0">
+              <a:lnSpc>
+                <a:spcPct val="120000"/>
+              </a:lnSpc>
+              <a:buNone/>
+            </a:pPr>
+            <a:r>
+              <a:rPr lang="en-US" sz="1400" dirty="0">
+                <a:solidFill>
+                  <a:srgbClr val="718096"/>
+                </a:solidFill>
+                <a:latin typeface="Pretendard" pitchFamily="34" charset="0"/>
+                <a:ea typeface="Pretendard" pitchFamily="34" charset="-122"/>
+                <a:cs typeface="Pretendard" pitchFamily="34" charset="-120"/>
+              </a:rPr>
+              <a:t>주요 용도</a:t>
+            </a:r>
+            <a:endParaRPr lang="en-US" sz="1400" dirty="0"/>
+          </a:p>
+        </p:txBody>
+      </p:sp>
+      <p:sp>
+        <p:nvSpPr>
+          <p:cNvPr id="11" name="Text 9"/>
+          <p:cNvSpPr/>
+          <p:nvPr/>
+        </p:nvSpPr>
+        <p:spPr>
+          <a:xfrm>
+            <a:off x="3172968" y="2048256"/>
+            <a:ext cx="4251960" cy="402336"/>
+          </a:xfrm>
+          <a:prstGeom prst="rect">
+            <a:avLst/>
+          </a:prstGeom>
+          <a:noFill/>
+          <a:ln/>
+        </p:spPr>
+        <p:txBody>
+          <a:bodyPr wrap="square" lIns="0" tIns="0" rIns="0" bIns="0" rtlCol="0" anchor="ctr"/>
+          <a:lstStyle/>
+          <a:p>
+            <a:pPr indent="0" marL="0">
+              <a:lnSpc>
+                <a:spcPct val="120000"/>
+              </a:lnSpc>
+              <a:buNone/>
+            </a:pPr>
+            <a:r>
+              <a:rPr lang="en-US" sz="1400" b="1" dirty="0">
+                <a:solidFill>
+                  <a:srgbClr val="10161F"/>
+                </a:solidFill>
+                <a:latin typeface="Pretendard" pitchFamily="34" charset="0"/>
+                <a:ea typeface="Pretendard" pitchFamily="34" charset="-122"/>
+                <a:cs typeface="Pretendard" pitchFamily="34" charset="-120"/>
+              </a:rPr>
+              <a:t>근린생활시설</a:t>
+            </a:r>
+            <a:endParaRPr lang="en-US" sz="1400" dirty="0"/>
+          </a:p>
+        </p:txBody>
+      </p:sp>
+      <p:sp>
+        <p:nvSpPr>
+          <p:cNvPr id="12" name="Shape 10"/>
+          <p:cNvSpPr/>
+          <p:nvPr/>
+        </p:nvSpPr>
+        <p:spPr>
+          <a:xfrm>
+            <a:off x="566928" y="2450592"/>
+            <a:ext cx="6858000" cy="0"/>
+          </a:xfrm>
+          <a:prstGeom prst="line">
+            <a:avLst/>
+          </a:prstGeom>
+          <a:noFill/>
+          <a:ln w="3810">
+            <a:solidFill>
+              <a:srgbClr val="CBD5E0"/>
+            </a:solidFill>
+            <a:prstDash val="solid"/>
+          </a:ln>
+        </p:spPr>
+      </p:sp>
+      <p:sp>
+        <p:nvSpPr>
+          <p:cNvPr id="13" name="Text 11"/>
+          <p:cNvSpPr/>
+          <p:nvPr/>
+        </p:nvSpPr>
+        <p:spPr>
+          <a:xfrm>
+            <a:off x="566928" y="2450592"/>
+            <a:ext cx="2606040" cy="402336"/>
+          </a:xfrm>
+          <a:prstGeom prst="rect">
+            <a:avLst/>
+          </a:prstGeom>
+          <a:noFill/>
+          <a:ln/>
+        </p:spPr>
+        <p:txBody>
+          <a:bodyPr wrap="square" lIns="0" tIns="0" rIns="0" bIns="0" rtlCol="0" anchor="ctr"/>
+          <a:lstStyle/>
+          <a:p>
+            <a:pPr indent="0" marL="0">
+              <a:lnSpc>
+                <a:spcPct val="120000"/>
+              </a:lnSpc>
+              <a:buNone/>
+            </a:pPr>
+            <a:r>
+              <a:rPr lang="en-US" sz="1400" dirty="0">
+                <a:solidFill>
+                  <a:srgbClr val="718096"/>
+                </a:solidFill>
+                <a:latin typeface="Pretendard" pitchFamily="34" charset="0"/>
+                <a:ea typeface="Pretendard" pitchFamily="34" charset="-122"/>
+                <a:cs typeface="Pretendard" pitchFamily="34" charset="-120"/>
+              </a:rPr>
+              <a:t>연면적</a:t>
+            </a:r>
+            <a:endParaRPr lang="en-US" sz="1400" dirty="0"/>
+          </a:p>
+        </p:txBody>
+      </p:sp>
+      <p:sp>
+        <p:nvSpPr>
+          <p:cNvPr id="14" name="Text 12"/>
+          <p:cNvSpPr/>
+          <p:nvPr/>
+        </p:nvSpPr>
+        <p:spPr>
+          <a:xfrm>
+            <a:off x="3172968" y="2450592"/>
+            <a:ext cx="4251960" cy="402336"/>
+          </a:xfrm>
+          <a:prstGeom prst="rect">
+            <a:avLst/>
+          </a:prstGeom>
+          <a:noFill/>
+          <a:ln/>
+        </p:spPr>
+        <p:txBody>
+          <a:bodyPr wrap="square" lIns="0" tIns="0" rIns="0" bIns="0" rtlCol="0" anchor="ctr"/>
+          <a:lstStyle/>
+          <a:p>
+            <a:pPr indent="0" marL="0">
+              <a:lnSpc>
+                <a:spcPct val="120000"/>
+              </a:lnSpc>
+              <a:buNone/>
+            </a:pPr>
+            <a:r>
+              <a:rPr lang="en-US" sz="1400" b="1" dirty="0">
+                <a:solidFill>
+                  <a:srgbClr val="10161F"/>
+                </a:solidFill>
+                <a:latin typeface="Pretendard" pitchFamily="34" charset="0"/>
+                <a:ea typeface="Pretendard" pitchFamily="34" charset="-122"/>
+                <a:cs typeface="Pretendard" pitchFamily="34" charset="-120"/>
+              </a:rPr>
+              <a:t>5,000㎡ (약 1513평(약 5001.7㎡))</a:t>
+            </a:r>
+            <a:endParaRPr lang="en-US" sz="1400" dirty="0"/>
+          </a:p>
+        </p:txBody>
+      </p:sp>
+      <p:sp>
+        <p:nvSpPr>
+          <p:cNvPr id="15" name="Shape 13"/>
+          <p:cNvSpPr/>
+          <p:nvPr/>
+        </p:nvSpPr>
+        <p:spPr>
+          <a:xfrm>
+            <a:off x="566928" y="2852928"/>
+            <a:ext cx="6858000" cy="0"/>
+          </a:xfrm>
+          <a:prstGeom prst="line">
+            <a:avLst/>
+          </a:prstGeom>
+          <a:noFill/>
+          <a:ln w="3810">
+            <a:solidFill>
+              <a:srgbClr val="CBD5E0"/>
+            </a:solidFill>
+            <a:prstDash val="solid"/>
+          </a:ln>
+        </p:spPr>
+      </p:sp>
+      <p:sp>
+        <p:nvSpPr>
+          <p:cNvPr id="16" name="Text 14"/>
+          <p:cNvSpPr/>
+          <p:nvPr/>
+        </p:nvSpPr>
+        <p:spPr>
+          <a:xfrm>
+            <a:off x="566928" y="2852928"/>
+            <a:ext cx="2606040" cy="402336"/>
+          </a:xfrm>
+          <a:prstGeom prst="rect">
+            <a:avLst/>
+          </a:prstGeom>
+          <a:noFill/>
+          <a:ln/>
+        </p:spPr>
+        <p:txBody>
+          <a:bodyPr wrap="square" lIns="0" tIns="0" rIns="0" bIns="0" rtlCol="0" anchor="ctr"/>
+          <a:lstStyle/>
+          <a:p>
+            <a:pPr indent="0" marL="0">
+              <a:lnSpc>
+                <a:spcPct val="120000"/>
+              </a:lnSpc>
+              <a:buNone/>
+            </a:pPr>
+            <a:r>
+              <a:rPr lang="en-US" sz="1400" dirty="0">
+                <a:solidFill>
+                  <a:srgbClr val="718096"/>
+                </a:solidFill>
+                <a:latin typeface="Pretendard" pitchFamily="34" charset="0"/>
+                <a:ea typeface="Pretendard" pitchFamily="34" charset="-122"/>
+                <a:cs typeface="Pretendard" pitchFamily="34" charset="-120"/>
+              </a:rPr>
+              <a:t>대지면적</a:t>
+            </a:r>
+            <a:endParaRPr lang="en-US" sz="1400" dirty="0"/>
+          </a:p>
+        </p:txBody>
+      </p:sp>
+      <p:sp>
+        <p:nvSpPr>
+          <p:cNvPr id="17" name="Text 15"/>
+          <p:cNvSpPr/>
+          <p:nvPr/>
+        </p:nvSpPr>
+        <p:spPr>
+          <a:xfrm>
+            <a:off x="3172968" y="2852928"/>
+            <a:ext cx="4251960" cy="402336"/>
+          </a:xfrm>
+          <a:prstGeom prst="rect">
+            <a:avLst/>
+          </a:prstGeom>
+          <a:noFill/>
+          <a:ln/>
+        </p:spPr>
+        <p:txBody>
+          <a:bodyPr wrap="square" lIns="0" tIns="0" rIns="0" bIns="0" rtlCol="0" anchor="ctr"/>
+          <a:lstStyle/>
+          <a:p>
+            <a:pPr indent="0" marL="0">
+              <a:lnSpc>
+                <a:spcPct val="120000"/>
+              </a:lnSpc>
+              <a:buNone/>
+            </a:pPr>
+            <a:r>
+              <a:rPr lang="en-US" sz="1400" b="1" dirty="0">
+                <a:solidFill>
+                  <a:srgbClr val="10161F"/>
+                </a:solidFill>
+                <a:latin typeface="Pretendard" pitchFamily="34" charset="0"/>
+                <a:ea typeface="Pretendard" pitchFamily="34" charset="-122"/>
+                <a:cs typeface="Pretendard" pitchFamily="34" charset="-120"/>
+              </a:rPr>
+              <a:t>1,000㎡ (약 303평(약 1001.7㎡))</a:t>
+            </a:r>
+            <a:endParaRPr lang="en-US" sz="1400" dirty="0"/>
+          </a:p>
+        </p:txBody>
+      </p:sp>
+      <p:sp>
+        <p:nvSpPr>
+          <p:cNvPr id="18" name="Shape 16"/>
+          <p:cNvSpPr/>
+          <p:nvPr/>
+        </p:nvSpPr>
+        <p:spPr>
+          <a:xfrm>
+            <a:off x="566928" y="3255264"/>
+            <a:ext cx="6858000" cy="0"/>
+          </a:xfrm>
+          <a:prstGeom prst="line">
+            <a:avLst/>
+          </a:prstGeom>
+          <a:noFill/>
+          <a:ln w="3810">
+            <a:solidFill>
+              <a:srgbClr val="CBD5E0"/>
+            </a:solidFill>
+            <a:prstDash val="solid"/>
+          </a:ln>
+        </p:spPr>
+      </p:sp>
+      <p:sp>
+        <p:nvSpPr>
+          <p:cNvPr id="19" name="Text 17"/>
+          <p:cNvSpPr/>
+          <p:nvPr/>
+        </p:nvSpPr>
+        <p:spPr>
+          <a:xfrm>
+            <a:off x="566928" y="3255264"/>
+            <a:ext cx="2606040" cy="402336"/>
+          </a:xfrm>
+          <a:prstGeom prst="rect">
+            <a:avLst/>
+          </a:prstGeom>
+          <a:noFill/>
+          <a:ln/>
+        </p:spPr>
+        <p:txBody>
+          <a:bodyPr wrap="square" lIns="0" tIns="0" rIns="0" bIns="0" rtlCol="0" anchor="ctr"/>
+          <a:lstStyle/>
+          <a:p>
+            <a:pPr indent="0" marL="0">
+              <a:lnSpc>
+                <a:spcPct val="120000"/>
+              </a:lnSpc>
+              <a:buNone/>
+            </a:pPr>
+            <a:r>
+              <a:rPr lang="en-US" sz="1400" dirty="0">
+                <a:solidFill>
+                  <a:srgbClr val="718096"/>
+                </a:solidFill>
+                <a:latin typeface="Pretendard" pitchFamily="34" charset="0"/>
+                <a:ea typeface="Pretendard" pitchFamily="34" charset="-122"/>
+                <a:cs typeface="Pretendard" pitchFamily="34" charset="-120"/>
+              </a:rPr>
+              <a:t>용도지역</a:t>
+            </a:r>
+            <a:endParaRPr lang="en-US" sz="1400" dirty="0"/>
+          </a:p>
+        </p:txBody>
+      </p:sp>
+      <p:sp>
+        <p:nvSpPr>
+          <p:cNvPr id="20" name="Text 18"/>
+          <p:cNvSpPr/>
+          <p:nvPr/>
+        </p:nvSpPr>
+        <p:spPr>
+          <a:xfrm>
+            <a:off x="3172968" y="3255264"/>
+            <a:ext cx="4251960" cy="402336"/>
+          </a:xfrm>
+          <a:prstGeom prst="rect">
+            <a:avLst/>
+          </a:prstGeom>
+          <a:noFill/>
+          <a:ln/>
+        </p:spPr>
+        <p:txBody>
+          <a:bodyPr wrap="square" lIns="0" tIns="0" rIns="0" bIns="0" rtlCol="0" anchor="ctr"/>
+          <a:lstStyle/>
+          <a:p>
+            <a:pPr indent="0" marL="0">
+              <a:lnSpc>
+                <a:spcPct val="120000"/>
+              </a:lnSpc>
+              <a:buNone/>
+            </a:pPr>
+            <a:r>
+              <a:rPr lang="en-US" sz="1400" b="1" dirty="0">
+                <a:solidFill>
+                  <a:srgbClr val="10161F"/>
+                </a:solidFill>
+                <a:latin typeface="Pretendard" pitchFamily="34" charset="0"/>
+                <a:ea typeface="Pretendard" pitchFamily="34" charset="-122"/>
+                <a:cs typeface="Pretendard" pitchFamily="34" charset="-120"/>
+              </a:rPr>
+              <a:t>일반상업지역</a:t>
+            </a:r>
+            <a:endParaRPr lang="en-US" sz="1400" dirty="0"/>
+          </a:p>
+        </p:txBody>
+      </p:sp>
+      <p:sp>
+        <p:nvSpPr>
+          <p:cNvPr id="21" name="Shape 19"/>
+          <p:cNvSpPr/>
+          <p:nvPr/>
+        </p:nvSpPr>
+        <p:spPr>
+          <a:xfrm>
+            <a:off x="566928" y="3657600"/>
+            <a:ext cx="6858000" cy="0"/>
+          </a:xfrm>
+          <a:prstGeom prst="line">
+            <a:avLst/>
+          </a:prstGeom>
+          <a:noFill/>
+          <a:ln w="3810">
+            <a:solidFill>
+              <a:srgbClr val="CBD5E0"/>
+            </a:solidFill>
+            <a:prstDash val="solid"/>
+          </a:ln>
+        </p:spPr>
+      </p:sp>
+      <p:sp>
+        <p:nvSpPr>
+          <p:cNvPr id="22" name="Text 20"/>
+          <p:cNvSpPr/>
+          <p:nvPr/>
+        </p:nvSpPr>
+        <p:spPr>
+          <a:xfrm>
+            <a:off x="566928" y="3657600"/>
+            <a:ext cx="2606040" cy="402336"/>
+          </a:xfrm>
+          <a:prstGeom prst="rect">
+            <a:avLst/>
+          </a:prstGeom>
+          <a:noFill/>
+          <a:ln/>
+        </p:spPr>
+        <p:txBody>
+          <a:bodyPr wrap="square" lIns="0" tIns="0" rIns="0" bIns="0" rtlCol="0" anchor="ctr"/>
+          <a:lstStyle/>
+          <a:p>
+            <a:pPr indent="0" marL="0">
+              <a:lnSpc>
+                <a:spcPct val="120000"/>
+              </a:lnSpc>
+              <a:buNone/>
+            </a:pPr>
+            <a:r>
+              <a:rPr lang="en-US" sz="1400" dirty="0">
+                <a:solidFill>
+                  <a:srgbClr val="718096"/>
+                </a:solidFill>
+                <a:latin typeface="Pretendard" pitchFamily="34" charset="0"/>
+                <a:ea typeface="Pretendard" pitchFamily="34" charset="-122"/>
+                <a:cs typeface="Pretendard" pitchFamily="34" charset="-120"/>
+              </a:rPr>
+              <a:t>승강기</a:t>
+            </a:r>
+            <a:endParaRPr lang="en-US" sz="1400" dirty="0"/>
+          </a:p>
+        </p:txBody>
+      </p:sp>
+      <p:sp>
+        <p:nvSpPr>
+          <p:cNvPr id="23" name="Text 21"/>
+          <p:cNvSpPr/>
+          <p:nvPr/>
+        </p:nvSpPr>
+        <p:spPr>
+          <a:xfrm>
+            <a:off x="3172968" y="3657600"/>
+            <a:ext cx="4251960" cy="402336"/>
+          </a:xfrm>
+          <a:prstGeom prst="rect">
+            <a:avLst/>
+          </a:prstGeom>
+          <a:noFill/>
+          <a:ln/>
+        </p:spPr>
+        <p:txBody>
+          <a:bodyPr wrap="square" lIns="0" tIns="0" rIns="0" bIns="0" rtlCol="0" anchor="ctr"/>
+          <a:lstStyle/>
+          <a:p>
+            <a:pPr indent="0" marL="0">
+              <a:lnSpc>
+                <a:spcPct val="120000"/>
+              </a:lnSpc>
+              <a:buNone/>
+            </a:pPr>
+            <a:r>
+              <a:rPr lang="en-US" sz="1400" b="1" dirty="0">
+                <a:solidFill>
+                  <a:srgbClr val="10161F"/>
+                </a:solidFill>
+                <a:latin typeface="Pretendard" pitchFamily="34" charset="0"/>
+                <a:ea typeface="Pretendard" pitchFamily="34" charset="-122"/>
+                <a:cs typeface="Pretendard" pitchFamily="34" charset="-120"/>
+              </a:rPr>
+              <a:t>1대 (15인승 침대용)</a:t>
+            </a:r>
+            <a:endParaRPr lang="en-US" sz="1400" dirty="0"/>
+          </a:p>
+        </p:txBody>
+      </p:sp>
+      <p:sp>
+        <p:nvSpPr>
+          <p:cNvPr id="24" name="Shape 22"/>
+          <p:cNvSpPr/>
+          <p:nvPr/>
+        </p:nvSpPr>
+        <p:spPr>
+          <a:xfrm>
+            <a:off x="566928" y="4059936"/>
+            <a:ext cx="6858000" cy="0"/>
+          </a:xfrm>
+          <a:prstGeom prst="line">
+            <a:avLst/>
+          </a:prstGeom>
+          <a:noFill/>
+          <a:ln w="3810">
+            <a:solidFill>
+              <a:srgbClr val="CBD5E0"/>
+            </a:solidFill>
+            <a:prstDash val="solid"/>
+          </a:ln>
+        </p:spPr>
+      </p:sp>
+      <p:sp>
+        <p:nvSpPr>
+          <p:cNvPr id="25" name="Text 23"/>
+          <p:cNvSpPr/>
+          <p:nvPr/>
+        </p:nvSpPr>
+        <p:spPr>
+          <a:xfrm>
+            <a:off x="566928" y="4059936"/>
+            <a:ext cx="2606040" cy="402336"/>
+          </a:xfrm>
+          <a:prstGeom prst="rect">
+            <a:avLst/>
+          </a:prstGeom>
+          <a:noFill/>
+          <a:ln/>
+        </p:spPr>
+        <p:txBody>
+          <a:bodyPr wrap="square" lIns="0" tIns="0" rIns="0" bIns="0" rtlCol="0" anchor="ctr"/>
+          <a:lstStyle/>
+          <a:p>
+            <a:pPr indent="0" marL="0">
+              <a:lnSpc>
+                <a:spcPct val="120000"/>
+              </a:lnSpc>
+              <a:buNone/>
+            </a:pPr>
+            <a:r>
+              <a:rPr lang="en-US" sz="1400" dirty="0">
+                <a:solidFill>
+                  <a:srgbClr val="718096"/>
+                </a:solidFill>
+                <a:latin typeface="Pretendard" pitchFamily="34" charset="0"/>
+                <a:ea typeface="Pretendard" pitchFamily="34" charset="-122"/>
+                <a:cs typeface="Pretendard" pitchFamily="34" charset="-120"/>
+              </a:rPr>
+              <a:t>주차 대수</a:t>
+            </a:r>
+            <a:endParaRPr lang="en-US" sz="1400" dirty="0"/>
+          </a:p>
+        </p:txBody>
+      </p:sp>
+      <p:sp>
+        <p:nvSpPr>
+          <p:cNvPr id="26" name="Text 24"/>
+          <p:cNvSpPr/>
+          <p:nvPr/>
+        </p:nvSpPr>
+        <p:spPr>
+          <a:xfrm>
+            <a:off x="3172968" y="4059936"/>
+            <a:ext cx="4251960" cy="402336"/>
+          </a:xfrm>
+          <a:prstGeom prst="rect">
+            <a:avLst/>
+          </a:prstGeom>
+          <a:noFill/>
+          <a:ln/>
+        </p:spPr>
+        <p:txBody>
+          <a:bodyPr wrap="square" lIns="0" tIns="0" rIns="0" bIns="0" rtlCol="0" anchor="ctr"/>
+          <a:lstStyle/>
+          <a:p>
+            <a:pPr indent="0" marL="0">
+              <a:lnSpc>
+                <a:spcPct val="120000"/>
+              </a:lnSpc>
+              <a:buNone/>
+            </a:pPr>
+            <a:r>
+              <a:rPr lang="en-US" sz="1400" b="1" dirty="0">
+                <a:solidFill>
+                  <a:srgbClr val="10161F"/>
+                </a:solidFill>
+                <a:latin typeface="Pretendard" pitchFamily="34" charset="0"/>
+                <a:ea typeface="Pretendard" pitchFamily="34" charset="-122"/>
+                <a:cs typeface="Pretendard" pitchFamily="34" charset="-120"/>
+              </a:rPr>
+              <a:t>18대 (자주식 완비)</a:t>
+            </a:r>
+            <a:endParaRPr lang="en-US" sz="1400" dirty="0"/>
+          </a:p>
+        </p:txBody>
+      </p:sp>
+      <p:sp>
+        <p:nvSpPr>
+          <p:cNvPr id="27" name="Shape 25"/>
+          <p:cNvSpPr/>
+          <p:nvPr/>
+        </p:nvSpPr>
+        <p:spPr>
+          <a:xfrm>
+            <a:off x="566928" y="4462272"/>
+            <a:ext cx="6858000" cy="0"/>
+          </a:xfrm>
+          <a:prstGeom prst="line">
+            <a:avLst/>
+          </a:prstGeom>
+          <a:noFill/>
+          <a:ln w="3810">
+            <a:solidFill>
+              <a:srgbClr val="CBD5E0"/>
+            </a:solidFill>
+            <a:prstDash val="solid"/>
+          </a:ln>
+        </p:spPr>
+      </p:sp>
+      <p:sp>
+        <p:nvSpPr>
+          <p:cNvPr id="28" name="Text 26"/>
+          <p:cNvSpPr/>
+          <p:nvPr/>
+        </p:nvSpPr>
+        <p:spPr>
+          <a:xfrm>
+            <a:off x="566928" y="4462272"/>
+            <a:ext cx="2606040" cy="402336"/>
+          </a:xfrm>
+          <a:prstGeom prst="rect">
+            <a:avLst/>
+          </a:prstGeom>
+          <a:noFill/>
+          <a:ln/>
+        </p:spPr>
+        <p:txBody>
+          <a:bodyPr wrap="square" lIns="0" tIns="0" rIns="0" bIns="0" rtlCol="0" anchor="ctr"/>
+          <a:lstStyle/>
+          <a:p>
+            <a:pPr indent="0" marL="0">
+              <a:lnSpc>
+                <a:spcPct val="120000"/>
+              </a:lnSpc>
+              <a:buNone/>
+            </a:pPr>
+            <a:r>
+              <a:rPr lang="en-US" sz="1400" dirty="0">
+                <a:solidFill>
+                  <a:srgbClr val="718096"/>
+                </a:solidFill>
+                <a:latin typeface="Pretendard" pitchFamily="34" charset="0"/>
+                <a:ea typeface="Pretendard" pitchFamily="34" charset="-122"/>
+                <a:cs typeface="Pretendard" pitchFamily="34" charset="-120"/>
+              </a:rPr>
+              <a:t>주구조</a:t>
+            </a:r>
+            <a:endParaRPr lang="en-US" sz="1400" dirty="0"/>
+          </a:p>
+        </p:txBody>
+      </p:sp>
+      <p:sp>
+        <p:nvSpPr>
+          <p:cNvPr id="29" name="Text 27"/>
+          <p:cNvSpPr/>
+          <p:nvPr/>
+        </p:nvSpPr>
+        <p:spPr>
+          <a:xfrm>
+            <a:off x="3172968" y="4462272"/>
+            <a:ext cx="4251960" cy="402336"/>
+          </a:xfrm>
+          <a:prstGeom prst="rect">
+            <a:avLst/>
+          </a:prstGeom>
+          <a:noFill/>
+          <a:ln/>
+        </p:spPr>
+        <p:txBody>
+          <a:bodyPr wrap="square" lIns="0" tIns="0" rIns="0" bIns="0" rtlCol="0" anchor="ctr"/>
+          <a:lstStyle/>
+          <a:p>
+            <a:pPr indent="0" marL="0">
+              <a:lnSpc>
+                <a:spcPct val="120000"/>
+              </a:lnSpc>
+              <a:buNone/>
+            </a:pPr>
+            <a:r>
+              <a:rPr lang="en-US" sz="1400" b="1" dirty="0">
+                <a:solidFill>
+                  <a:srgbClr val="10161F"/>
+                </a:solidFill>
+                <a:latin typeface="Pretendard" pitchFamily="34" charset="0"/>
+                <a:ea typeface="Pretendard" pitchFamily="34" charset="-122"/>
+                <a:cs typeface="Pretendard" pitchFamily="34" charset="-120"/>
+              </a:rPr>
+              <a:t>철근콘크리트구조</a:t>
+            </a:r>
+            <a:endParaRPr lang="en-US" sz="1400" dirty="0"/>
+          </a:p>
+        </p:txBody>
+      </p:sp>
+      <p:sp>
+        <p:nvSpPr>
+          <p:cNvPr id="30" name="Shape 28"/>
+          <p:cNvSpPr/>
+          <p:nvPr/>
+        </p:nvSpPr>
+        <p:spPr>
+          <a:xfrm>
+            <a:off x="566928" y="4864608"/>
+            <a:ext cx="6858000" cy="0"/>
+          </a:xfrm>
+          <a:prstGeom prst="line">
+            <a:avLst/>
+          </a:prstGeom>
+          <a:noFill/>
+          <a:ln w="3810">
+            <a:solidFill>
+              <a:srgbClr val="CBD5E0"/>
+            </a:solidFill>
+            <a:prstDash val="solid"/>
+          </a:ln>
+        </p:spPr>
+      </p:sp>
+      <p:sp>
+        <p:nvSpPr>
+          <p:cNvPr id="31" name="Text 29"/>
+          <p:cNvSpPr/>
+          <p:nvPr/>
+        </p:nvSpPr>
+        <p:spPr>
+          <a:xfrm>
+            <a:off x="566928" y="4864608"/>
+            <a:ext cx="2606040" cy="402336"/>
+          </a:xfrm>
+          <a:prstGeom prst="rect">
+            <a:avLst/>
+          </a:prstGeom>
+          <a:noFill/>
+          <a:ln/>
+        </p:spPr>
+        <p:txBody>
+          <a:bodyPr wrap="square" lIns="0" tIns="0" rIns="0" bIns="0" rtlCol="0" anchor="ctr"/>
+          <a:lstStyle/>
+          <a:p>
+            <a:pPr indent="0" marL="0">
+              <a:lnSpc>
+                <a:spcPct val="120000"/>
+              </a:lnSpc>
+              <a:buNone/>
+            </a:pPr>
+            <a:r>
+              <a:rPr lang="en-US" sz="1400" dirty="0">
+                <a:solidFill>
+                  <a:srgbClr val="718096"/>
+                </a:solidFill>
+                <a:latin typeface="Pretendard" pitchFamily="34" charset="0"/>
+                <a:ea typeface="Pretendard" pitchFamily="34" charset="-122"/>
+                <a:cs typeface="Pretendard" pitchFamily="34" charset="-120"/>
+              </a:rPr>
+              <a:t>매매 희망가</a:t>
+            </a:r>
+            <a:endParaRPr lang="en-US" sz="1400" dirty="0"/>
+          </a:p>
+        </p:txBody>
+      </p:sp>
+      <p:sp>
+        <p:nvSpPr>
+          <p:cNvPr id="32" name="Text 30"/>
+          <p:cNvSpPr/>
+          <p:nvPr/>
+        </p:nvSpPr>
+        <p:spPr>
+          <a:xfrm>
+            <a:off x="3172968" y="4864608"/>
+            <a:ext cx="4251960" cy="402336"/>
+          </a:xfrm>
+          <a:prstGeom prst="rect">
+            <a:avLst/>
+          </a:prstGeom>
+          <a:noFill/>
+          <a:ln/>
+        </p:spPr>
+        <p:txBody>
+          <a:bodyPr wrap="square" lIns="0" tIns="0" rIns="0" bIns="0" rtlCol="0" anchor="ctr"/>
+          <a:lstStyle/>
+          <a:p>
+            <a:pPr indent="0" marL="0">
+              <a:lnSpc>
+                <a:spcPct val="120000"/>
+              </a:lnSpc>
+              <a:buNone/>
+            </a:pPr>
+            <a:r>
+              <a:rPr lang="en-US" sz="1400" b="1" dirty="0">
+                <a:solidFill>
+                  <a:srgbClr val="10161F"/>
+                </a:solidFill>
+                <a:latin typeface="Pretendard" pitchFamily="34" charset="0"/>
+                <a:ea typeface="Pretendard" pitchFamily="34" charset="-122"/>
+                <a:cs typeface="Pretendard" pitchFamily="34" charset="-120"/>
+              </a:rPr>
+              <a:t>145억</a:t>
+            </a:r>
+            <a:endParaRPr lang="en-US" sz="1400" dirty="0"/>
+          </a:p>
+        </p:txBody>
+      </p:sp>
+      <p:sp>
+        <p:nvSpPr>
+          <p:cNvPr id="33" name="Shape 31"/>
           <p:cNvSpPr/>
           <p:nvPr/>
         </p:nvSpPr>
@@ -5669,49 +6717,49 @@
       </p:sp>
       <p:sp>
         <p:nvSpPr>
-          <p:cNvPr id="10" name="Shape 8"/>
+          <p:cNvPr id="34" name="Shape 32"/>
           <p:cNvSpPr/>
           <p:nvPr/>
         </p:nvSpPr>
         <p:spPr>
           <a:xfrm>
             <a:off x="7784287" y="1645920"/>
-            <a:ext cx="3840480" cy="2103120"/>
+            <a:ext cx="3840480" cy="1645920"/>
           </a:xfrm>
           <a:prstGeom prst="roundRect">
             <a:avLst>
-              <a:gd name="adj" fmla="val 2609"/>
+              <a:gd name="adj" fmla="val 3333"/>
             </a:avLst>
           </a:prstGeom>
           <a:solidFill>
-            <a:srgbClr val="F3EBDA"/>
+            <a:srgbClr val="BEE3F8"/>
           </a:solidFill>
           <a:ln/>
         </p:spPr>
       </p:sp>
       <p:sp>
         <p:nvSpPr>
-          <p:cNvPr id="11" name="Shape 9"/>
+          <p:cNvPr id="35" name="Shape 33"/>
           <p:cNvSpPr/>
           <p:nvPr/>
         </p:nvSpPr>
         <p:spPr>
           <a:xfrm>
             <a:off x="7784287" y="1700784"/>
-            <a:ext cx="36576" cy="1993392"/>
+            <a:ext cx="36576" cy="1536192"/>
           </a:xfrm>
           <a:prstGeom prst="rect">
             <a:avLst/>
           </a:prstGeom>
           <a:solidFill>
-            <a:srgbClr val="977024"/>
+            <a:srgbClr val="2B6CB0"/>
           </a:solidFill>
           <a:ln/>
         </p:spPr>
       </p:sp>
       <p:sp>
         <p:nvSpPr>
-          <p:cNvPr id="12" name="Text 10"/>
+          <p:cNvPr id="36" name="Text 34"/>
           <p:cNvSpPr/>
           <p:nvPr/>
         </p:nvSpPr>
@@ -5739,14 +6787,14 @@
       </p:sp>
       <p:sp>
         <p:nvSpPr>
-          <p:cNvPr id="13" name="Text 11"/>
+          <p:cNvPr id="37" name="Text 35"/>
           <p:cNvSpPr/>
           <p:nvPr/>
         </p:nvSpPr>
         <p:spPr>
           <a:xfrm>
             <a:off x="7967167" y="1975104"/>
-            <a:ext cx="3511296" cy="1700784"/>
+            <a:ext cx="3511296" cy="1243584"/>
           </a:xfrm>
           <a:prstGeom prst="rect">
             <a:avLst/>
@@ -5773,7 +6821,7 @@
                 <a:ea typeface="Pretendard" pitchFamily="34" charset="-122"/>
                 <a:cs typeface="Pretendard" pitchFamily="34" charset="-120"/>
               </a:rPr>
-              <a:t>{"ok":true,"mocked":true,"extractedFields":{"area_signal":"역삼","asset_type":"오피스빌딩","price_band":"300억","size_signal":"3</a:t>
+              <a:t>본 매물은 영등포권역 입지의 안정적 운영 자산입니다.</a:t>
             </a:r>
             <a:endParaRPr lang="en-US" sz="930" dirty="0"/>
           </a:p>
@@ -5781,7 +6829,7 @@
       </p:sp>
       <p:sp>
         <p:nvSpPr>
-          <p:cNvPr id="14" name="Text 12"/>
+          <p:cNvPr id="38" name="Text 36"/>
           <p:cNvSpPr/>
           <p:nvPr/>
         </p:nvSpPr>
@@ -5820,7 +6868,7 @@
       </p:sp>
       <p:sp>
         <p:nvSpPr>
-          <p:cNvPr id="15" name="Text 13"/>
+          <p:cNvPr id="39" name="Text 37"/>
           <p:cNvSpPr/>
           <p:nvPr/>
         </p:nvSpPr>
@@ -6020,7 +7068,7 @@
                 <a:ea typeface="Pretendard" pitchFamily="34" charset="-122"/>
                 <a:cs typeface="Pretendard" pitchFamily="34" charset="-120"/>
               </a:rPr>
-              <a:t>개발 부지로서 대지 조건은 어떠한가</a:t>
+              <a:t>토지</a:t>
             </a:r>
             <a:endParaRPr lang="en-US" sz="2300" dirty="0"/>
           </a:p>
@@ -6059,7 +7107,7 @@
                 <a:ea typeface="Pretendard" pitchFamily="34" charset="-122"/>
                 <a:cs typeface="Pretendard" pitchFamily="34" charset="-120"/>
               </a:rPr>
-              <a:t>대지 및 신축 개발 여력 분석</a:t>
+              <a:t>토지 현황</a:t>
             </a:r>
             <a:endParaRPr lang="en-US" sz="1100" dirty="0"/>
           </a:p>
@@ -6101,7 +7149,7 @@
                 <a:ea typeface="Pretendard" pitchFamily="34" charset="-122"/>
                 <a:cs typeface="Pretendard" pitchFamily="34" charset="-120"/>
               </a:rPr>
-              <a:t>대지면적</a:t>
+              <a:t>연면적</a:t>
             </a:r>
             <a:endParaRPr lang="en-US" sz="1400" dirty="0"/>
           </a:p>
@@ -6143,7 +7191,7 @@
                 <a:ea typeface="Pretendard" pitchFamily="34" charset="-122"/>
                 <a:cs typeface="Pretendard" pitchFamily="34" charset="-120"/>
               </a:rPr>
-              <a:t>1000㎡</a:t>
+              <a:t>5,000㎡ (약 1513평(약 5001.7㎡))</a:t>
             </a:r>
             <a:endParaRPr lang="en-US" sz="1400" dirty="0"/>
           </a:p>
@@ -6208,7 +7256,7 @@
                 <a:ea typeface="Pretendard" pitchFamily="34" charset="-122"/>
                 <a:cs typeface="Pretendard" pitchFamily="34" charset="-120"/>
               </a:rPr>
-              <a:t>용도지역</a:t>
+              <a:t>대지면적</a:t>
             </a:r>
             <a:endParaRPr lang="en-US" sz="1400" dirty="0"/>
           </a:p>
@@ -6250,7 +7298,7 @@
                 <a:ea typeface="Pretendard" pitchFamily="34" charset="-122"/>
                 <a:cs typeface="Pretendard" pitchFamily="34" charset="-120"/>
               </a:rPr>
-              <a:t>일반상업지역</a:t>
+              <a:t>1,000㎡ (약 303평(약 1001.7㎡))</a:t>
             </a:r>
             <a:endParaRPr lang="en-US" sz="1400" dirty="0"/>
           </a:p>
@@ -6315,7 +7363,7 @@
                 <a:ea typeface="Pretendard" pitchFamily="34" charset="-122"/>
                 <a:cs typeface="Pretendard" pitchFamily="34" charset="-120"/>
               </a:rPr>
-              <a:t>명도 상태</a:t>
+              <a:t>용도지역</a:t>
             </a:r>
             <a:endParaRPr lang="en-US" sz="1400" dirty="0"/>
           </a:p>
@@ -6357,7 +7405,7 @@
                 <a:ea typeface="Pretendard" pitchFamily="34" charset="-122"/>
                 <a:cs typeface="Pretendard" pitchFamily="34" charset="-120"/>
               </a:rPr>
-              <a:t>기존 주요 임차 업종 현황</a:t>
+              <a:t>일반상업지역</a:t>
             </a:r>
             <a:endParaRPr lang="en-US" sz="1400" dirty="0"/>
           </a:p>
@@ -6366,113 +7414,6 @@
       <p:sp>
         <p:nvSpPr>
           <p:cNvPr id="15" name="Shape 13"/>
-          <p:cNvSpPr/>
-          <p:nvPr/>
-        </p:nvSpPr>
-        <p:spPr>
-          <a:xfrm>
-            <a:off x="566928" y="2852928"/>
-            <a:ext cx="6858000" cy="0"/>
-          </a:xfrm>
-          <a:prstGeom prst="line">
-            <a:avLst/>
-          </a:prstGeom>
-          <a:noFill/>
-          <a:ln w="3810">
-            <a:solidFill>
-              <a:srgbClr val="CBD5E0"/>
-            </a:solidFill>
-            <a:prstDash val="solid"/>
-          </a:ln>
-        </p:spPr>
-      </p:sp>
-      <p:sp>
-        <p:nvSpPr>
-          <p:cNvPr id="16" name="Text 14"/>
-          <p:cNvSpPr/>
-          <p:nvPr/>
-        </p:nvSpPr>
-        <p:spPr>
-          <a:xfrm>
-            <a:off x="566928" y="2852928"/>
-            <a:ext cx="2606040" cy="402336"/>
-          </a:xfrm>
-          <a:prstGeom prst="rect">
-            <a:avLst/>
-          </a:prstGeom>
-          <a:noFill/>
-          <a:ln/>
-        </p:spPr>
-        <p:txBody>
-          <a:bodyPr wrap="square" lIns="0" tIns="0" rIns="0" bIns="0" rtlCol="0" anchor="ctr"/>
-          <a:lstStyle/>
-          <a:p>
-            <a:pPr indent="0" marL="0">
-              <a:lnSpc>
-                <a:spcPct val="120000"/>
-              </a:lnSpc>
-              <a:buNone/>
-            </a:pPr>
-            <a:r>
-              <a:rPr lang="en-US" sz="1400" dirty="0">
-                <a:solidFill>
-                  <a:srgbClr val="718096"/>
-                </a:solidFill>
-                <a:latin typeface="Pretendard" pitchFamily="34" charset="0"/>
-                <a:ea typeface="Pretendard" pitchFamily="34" charset="-122"/>
-                <a:cs typeface="Pretendard" pitchFamily="34" charset="-120"/>
-              </a:rPr>
-              <a:t>개발 잠재력</a:t>
-            </a:r>
-            <a:endParaRPr lang="en-US" sz="1400" dirty="0"/>
-          </a:p>
-        </p:txBody>
-      </p:sp>
-      <p:sp>
-        <p:nvSpPr>
-          <p:cNvPr id="17" name="Text 15"/>
-          <p:cNvSpPr/>
-          <p:nvPr/>
-        </p:nvSpPr>
-        <p:spPr>
-          <a:xfrm>
-            <a:off x="3172968" y="2852928"/>
-            <a:ext cx="4251960" cy="402336"/>
-          </a:xfrm>
-          <a:prstGeom prst="rect">
-            <a:avLst/>
-          </a:prstGeom>
-          <a:noFill/>
-          <a:ln/>
-        </p:spPr>
-        <p:txBody>
-          <a:bodyPr wrap="square" lIns="0" tIns="0" rIns="0" bIns="0" rtlCol="0" anchor="ctr"/>
-          <a:lstStyle/>
-          <a:p>
-            <a:pPr indent="0" marL="0">
-              <a:lnSpc>
-                <a:spcPct val="120000"/>
-              </a:lnSpc>
-              <a:buNone/>
-            </a:pPr>
-            <a:r>
-              <a:rPr lang="en-US" sz="1400" b="1" dirty="0">
-                <a:solidFill>
-                  <a:srgbClr val="10161F"/>
-                </a:solidFill>
-                <a:latin typeface="Pretendard" pitchFamily="34" charset="0"/>
-                <a:ea typeface="Pretendard" pitchFamily="34" charset="-122"/>
-                <a:cs typeface="Pretendard" pitchFamily="34" charset="-120"/>
-              </a:rPr>
-              <a:t>신축 시 연면적 증대 가능</a:t>
-            </a:r>
-            <a:endParaRPr lang="en-US" sz="1400" dirty="0"/>
-          </a:p>
-        </p:txBody>
-      </p:sp>
-      <p:sp>
-        <p:nvSpPr>
-          <p:cNvPr id="18" name="Shape 16"/>
           <p:cNvSpPr/>
           <p:nvPr/>
         </p:nvSpPr>
@@ -6495,49 +7436,49 @@
       </p:sp>
       <p:sp>
         <p:nvSpPr>
-          <p:cNvPr id="19" name="Shape 17"/>
+          <p:cNvPr id="16" name="Shape 14"/>
           <p:cNvSpPr/>
           <p:nvPr/>
         </p:nvSpPr>
         <p:spPr>
           <a:xfrm>
             <a:off x="7784287" y="1645920"/>
-            <a:ext cx="3840480" cy="1645920"/>
+            <a:ext cx="3840480" cy="2103120"/>
           </a:xfrm>
           <a:prstGeom prst="roundRect">
             <a:avLst>
-              <a:gd name="adj" fmla="val 3333"/>
+              <a:gd name="adj" fmla="val 2609"/>
             </a:avLst>
           </a:prstGeom>
           <a:solidFill>
-            <a:srgbClr val="F3EBDA"/>
+            <a:srgbClr val="BEE3F8"/>
           </a:solidFill>
           <a:ln/>
         </p:spPr>
       </p:sp>
       <p:sp>
         <p:nvSpPr>
-          <p:cNvPr id="20" name="Shape 18"/>
+          <p:cNvPr id="17" name="Shape 15"/>
           <p:cNvSpPr/>
           <p:nvPr/>
         </p:nvSpPr>
         <p:spPr>
           <a:xfrm>
             <a:off x="7784287" y="1700784"/>
-            <a:ext cx="36576" cy="1536192"/>
+            <a:ext cx="36576" cy="1993392"/>
           </a:xfrm>
           <a:prstGeom prst="rect">
             <a:avLst/>
           </a:prstGeom>
           <a:solidFill>
-            <a:srgbClr val="977024"/>
+            <a:srgbClr val="2B6CB0"/>
           </a:solidFill>
           <a:ln/>
         </p:spPr>
       </p:sp>
       <p:sp>
         <p:nvSpPr>
-          <p:cNvPr id="21" name="Text 19"/>
+          <p:cNvPr id="18" name="Text 16"/>
           <p:cNvSpPr/>
           <p:nvPr/>
         </p:nvSpPr>
@@ -6559,20 +7500,31 @@
             <a:pPr indent="0" marL="0">
               <a:buNone/>
             </a:pPr>
+            <a:r>
+              <a:rPr lang="en-US" sz="1050" b="1" dirty="0">
+                <a:solidFill>
+                  <a:srgbClr val="2B6CB0"/>
+                </a:solidFill>
+                <a:latin typeface="Pretendard" pitchFamily="34" charset="0"/>
+                <a:ea typeface="Pretendard" pitchFamily="34" charset="-122"/>
+                <a:cs typeface="Pretendard" pitchFamily="34" charset="-120"/>
+              </a:rPr>
+              <a:t>토지 및 건물 분석 포인트</a:t>
+            </a:r>
             <a:endParaRPr lang="en-US" sz="1050" dirty="0"/>
           </a:p>
         </p:txBody>
       </p:sp>
       <p:sp>
         <p:nvSpPr>
-          <p:cNvPr id="22" name="Text 20"/>
+          <p:cNvPr id="19" name="Text 17"/>
           <p:cNvSpPr/>
           <p:nvPr/>
         </p:nvSpPr>
         <p:spPr>
           <a:xfrm>
             <a:off x="7967167" y="1975104"/>
-            <a:ext cx="3511296" cy="1243584"/>
+            <a:ext cx="3511296" cy="1700784"/>
           </a:xfrm>
           <a:prstGeom prst="rect">
             <a:avLst/>
@@ -6584,11 +7536,12 @@
           <a:bodyPr wrap="square" lIns="0" tIns="0" rIns="0" bIns="0" rtlCol="0" anchor="t"/>
           <a:lstStyle/>
           <a:p>
-            <a:pPr indent="0" marL="0">
+            <a:pPr marL="342900" indent="-342900">
               <a:lnSpc>
                 <a:spcPct val="120000"/>
               </a:lnSpc>
-              <a:buNone/>
+              <a:buSzPct val="100000"/>
+              <a:buChar char="•"/>
             </a:pPr>
             <a:r>
               <a:rPr lang="en-US" sz="930" dirty="0">
@@ -6599,26 +7552,68 @@
                 <a:ea typeface="Pretendard" pitchFamily="34" charset="-122"/>
                 <a:cs typeface="Pretendard" pitchFamily="34" charset="-120"/>
               </a:rPr>
-              <a:t>본 자산은 대지면적 약 303평(약 1001.7㎡), 용도지역 일반상업지역에 위치하여 신축 및 재건축 개발 가치가 매우 높습니다.</a:t>
+              <a:t>물건 접면 도로 및 교통 여건은 현장 확인 사항입니다</a:t>
             </a:r>
             <a:endParaRPr lang="en-US" sz="930" dirty="0"/>
           </a:p>
-        </p:txBody>
-      </p:sp>
-      <p:sp>
-        <p:nvSpPr>
-          <p:cNvPr id="23" name="Shape 21"/>
-          <p:cNvSpPr/>
-          <p:nvPr/>
-        </p:nvSpPr>
-        <p:spPr>
-          <a:xfrm>
-            <a:off x="7784287" y="3493008"/>
-            <a:ext cx="3840480" cy="1645920"/>
+          <a:p>
+            <a:pPr marL="342900" indent="-342900">
+              <a:lnSpc>
+                <a:spcPct val="120000"/>
+              </a:lnSpc>
+              <a:buSzPct val="100000"/>
+              <a:buChar char="•"/>
+            </a:pPr>
+            <a:r>
+              <a:rPr lang="en-US" sz="930" dirty="0">
+                <a:solidFill>
+                  <a:srgbClr val="10161F"/>
+                </a:solidFill>
+                <a:latin typeface="Pretendard" pitchFamily="34" charset="0"/>
+                <a:ea typeface="Pretendard" pitchFamily="34" charset="-122"/>
+                <a:cs typeface="Pretendard" pitchFamily="34" charset="-120"/>
+              </a:rPr>
+              <a:t>상세 건물 제원은 실사 자료를 참조하시기 바랍니다</a:t>
+            </a:r>
+            <a:endParaRPr lang="en-US" sz="930" dirty="0"/>
+          </a:p>
+          <a:p>
+            <a:pPr marL="342900" indent="-342900">
+              <a:lnSpc>
+                <a:spcPct val="120000"/>
+              </a:lnSpc>
+              <a:buSzPct val="100000"/>
+              <a:buChar char="•"/>
+            </a:pPr>
+            <a:r>
+              <a:rPr lang="en-US" sz="930" dirty="0">
+                <a:solidFill>
+                  <a:srgbClr val="10161F"/>
+                </a:solidFill>
+                <a:latin typeface="Pretendard" pitchFamily="34" charset="0"/>
+                <a:ea typeface="Pretendard" pitchFamily="34" charset="-122"/>
+                <a:cs typeface="Pretendard" pitchFamily="34" charset="-120"/>
+              </a:rPr>
+              <a:t>건물 현황 및 규모는 첨부 대장을 기준으로 합니다</a:t>
+            </a:r>
+            <a:endParaRPr lang="en-US" sz="930" dirty="0"/>
+          </a:p>
+        </p:txBody>
+      </p:sp>
+      <p:sp>
+        <p:nvSpPr>
+          <p:cNvPr id="20" name="Shape 18"/>
+          <p:cNvSpPr/>
+          <p:nvPr/>
+        </p:nvSpPr>
+        <p:spPr>
+          <a:xfrm>
+            <a:off x="7784287" y="3977640"/>
+            <a:ext cx="3840480" cy="2148840"/>
           </a:xfrm>
           <a:prstGeom prst="roundRect">
             <a:avLst>
-              <a:gd name="adj" fmla="val 3333"/>
+              <a:gd name="adj" fmla="val 2553"/>
             </a:avLst>
           </a:prstGeom>
           <a:solidFill>
@@ -6629,14 +7624,14 @@
       </p:sp>
       <p:sp>
         <p:nvSpPr>
-          <p:cNvPr id="24" name="Shape 22"/>
-          <p:cNvSpPr/>
-          <p:nvPr/>
-        </p:nvSpPr>
-        <p:spPr>
-          <a:xfrm>
-            <a:off x="7784287" y="3547872"/>
-            <a:ext cx="36576" cy="1536192"/>
+          <p:cNvPr id="21" name="Shape 19"/>
+          <p:cNvSpPr/>
+          <p:nvPr/>
+        </p:nvSpPr>
+        <p:spPr>
+          <a:xfrm>
+            <a:off x="7784287" y="4032504"/>
+            <a:ext cx="36576" cy="2039112"/>
           </a:xfrm>
           <a:prstGeom prst="rect">
             <a:avLst/>
@@ -6649,13 +7644,13 @@
       </p:sp>
       <p:sp>
         <p:nvSpPr>
-          <p:cNvPr id="25" name="Text 23"/>
-          <p:cNvSpPr/>
-          <p:nvPr/>
-        </p:nvSpPr>
-        <p:spPr>
-          <a:xfrm>
-            <a:off x="7967167" y="3602736"/>
+          <p:cNvPr id="22" name="Text 20"/>
+          <p:cNvSpPr/>
+          <p:nvPr/>
+        </p:nvSpPr>
+        <p:spPr>
+          <a:xfrm>
+            <a:off x="7967167" y="4087368"/>
             <a:ext cx="3511296" cy="201168"/>
           </a:xfrm>
           <a:prstGeom prst="rect">
@@ -6671,20 +7666,31 @@
             <a:pPr indent="0" marL="0">
               <a:buNone/>
             </a:pPr>
+            <a:r>
+              <a:rPr lang="en-US" sz="1050" b="1" dirty="0">
+                <a:solidFill>
+                  <a:srgbClr val="2B6CB0"/>
+                </a:solidFill>
+                <a:latin typeface="Pretendard" pitchFamily="34" charset="0"/>
+                <a:ea typeface="Pretendard" pitchFamily="34" charset="-122"/>
+                <a:cs typeface="Pretendard" pitchFamily="34" charset="-120"/>
+              </a:rPr>
+              <a:t>물건 실사 및 관리 상태</a:t>
+            </a:r>
             <a:endParaRPr lang="en-US" sz="1050" dirty="0"/>
           </a:p>
         </p:txBody>
       </p:sp>
       <p:sp>
         <p:nvSpPr>
-          <p:cNvPr id="26" name="Text 24"/>
-          <p:cNvSpPr/>
-          <p:nvPr/>
-        </p:nvSpPr>
-        <p:spPr>
-          <a:xfrm>
-            <a:off x="7967167" y="3822192"/>
-            <a:ext cx="3511296" cy="1243584"/>
+          <p:cNvPr id="23" name="Text 21"/>
+          <p:cNvSpPr/>
+          <p:nvPr/>
+        </p:nvSpPr>
+        <p:spPr>
+          <a:xfrm>
+            <a:off x="7967167" y="4306824"/>
+            <a:ext cx="3511296" cy="1746504"/>
           </a:xfrm>
           <a:prstGeom prst="rect">
             <a:avLst/>
@@ -6696,11 +7702,12 @@
           <a:bodyPr wrap="square" lIns="0" tIns="0" rIns="0" bIns="0" rtlCol="0" anchor="t"/>
           <a:lstStyle/>
           <a:p>
-            <a:pPr indent="0" marL="0">
+            <a:pPr marL="342900" indent="-342900">
               <a:lnSpc>
                 <a:spcPct val="120000"/>
               </a:lnSpc>
-              <a:buNone/>
+              <a:buSzPct val="100000"/>
+              <a:buChar char="•"/>
             </a:pPr>
             <a:r>
               <a:rPr lang="en-US" sz="930" dirty="0">
@@ -6711,15 +7718,57 @@
                 <a:ea typeface="Pretendard" pitchFamily="34" charset="-122"/>
                 <a:cs typeface="Pretendard" pitchFamily="34" charset="-120"/>
               </a:rPr>
-              <a:t>[임대] 건축물대장 및 토지이용계획확인서 기준 | 신축 설계 검토 필요</a:t>
+              <a:t>건물 상태 및 설비 현황은 실사 보고서를 참조하십시오</a:t>
             </a:r>
             <a:endParaRPr lang="en-US" sz="930" dirty="0"/>
           </a:p>
-        </p:txBody>
-      </p:sp>
-      <p:sp>
-        <p:nvSpPr>
-          <p:cNvPr id="27" name="Text 25"/>
+          <a:p>
+            <a:pPr marL="342900" indent="-342900">
+              <a:lnSpc>
+                <a:spcPct val="120000"/>
+              </a:lnSpc>
+              <a:buSzPct val="100000"/>
+              <a:buChar char="•"/>
+            </a:pPr>
+            <a:r>
+              <a:rPr lang="en-US" sz="930" dirty="0">
+                <a:solidFill>
+                  <a:srgbClr val="10161F"/>
+                </a:solidFill>
+                <a:latin typeface="Pretendard" pitchFamily="34" charset="0"/>
+                <a:ea typeface="Pretendard" pitchFamily="34" charset="-122"/>
+                <a:cs typeface="Pretendard" pitchFamily="34" charset="-120"/>
+              </a:rPr>
+              <a:t>자금 조달 및 대출 조건은 금융 자문 후 확정됩니다</a:t>
+            </a:r>
+            <a:endParaRPr lang="en-US" sz="930" dirty="0"/>
+          </a:p>
+          <a:p>
+            <a:pPr marL="342900" indent="-342900">
+              <a:lnSpc>
+                <a:spcPct val="120000"/>
+              </a:lnSpc>
+              <a:buSzPct val="100000"/>
+              <a:buChar char="•"/>
+            </a:pPr>
+            <a:r>
+              <a:rPr lang="en-US" sz="930" dirty="0">
+                <a:solidFill>
+                  <a:srgbClr val="10161F"/>
+                </a:solidFill>
+                <a:latin typeface="Pretendard" pitchFamily="34" charset="0"/>
+                <a:ea typeface="Pretendard" pitchFamily="34" charset="-122"/>
+                <a:cs typeface="Pretendard" pitchFamily="34" charset="-120"/>
+              </a:rPr>
+              <a:t>상세 실사 단계에서 구체적인 계약 조건 및 세무 검토가 진행됩니다</a:t>
+            </a:r>
+            <a:endParaRPr lang="en-US" sz="930" dirty="0"/>
+          </a:p>
+        </p:txBody>
+      </p:sp>
+      <p:sp>
+        <p:nvSpPr>
+          <p:cNvPr id="24" name="Text 22"/>
           <p:cNvSpPr/>
           <p:nvPr/>
         </p:nvSpPr>
@@ -6758,7 +7807,7 @@
       </p:sp>
       <p:sp>
         <p:nvSpPr>
-          <p:cNvPr id="28" name="Text 26"/>
+          <p:cNvPr id="25" name="Text 23"/>
           <p:cNvSpPr/>
           <p:nvPr/>
         </p:nvSpPr>
@@ -8101,11 +9150,11 @@
         <p:spPr>
           <a:xfrm>
             <a:off x="566928" y="1417320"/>
-            <a:ext cx="11057839" cy="3611880"/>
+            <a:ext cx="11057839" cy="3657600"/>
           </a:xfrm>
           <a:prstGeom prst="roundRect">
             <a:avLst>
-              <a:gd name="adj" fmla="val 1519"/>
+              <a:gd name="adj" fmla="val 1500"/>
             </a:avLst>
           </a:prstGeom>
           <a:solidFill>
@@ -8186,8 +9235,8 @@
         </p:nvSpPr>
         <p:spPr>
           <a:xfrm>
-            <a:off x="795528" y="1911096"/>
-            <a:ext cx="10600639" cy="402336"/>
+            <a:off x="795528" y="1947672"/>
+            <a:ext cx="10600639" cy="365760"/>
           </a:xfrm>
           <a:prstGeom prst="rect">
             <a:avLst/>
@@ -8205,7 +9254,7 @@
               <a:buNone/>
             </a:pPr>
             <a:r>
-              <a:rPr lang="en-US" sz="1350" b="1" dirty="0">
+              <a:rPr lang="en-US" sz="1250" b="1" dirty="0">
                 <a:solidFill>
                   <a:srgbClr val="10161F"/>
                 </a:solidFill>
@@ -8215,7 +9264,7 @@
               </a:rPr>
               <a:t>—</a:t>
             </a:r>
-            <a:endParaRPr lang="en-US" sz="1350" dirty="0"/>
+            <a:endParaRPr lang="en-US" sz="1250" dirty="0"/>
           </a:p>
         </p:txBody>
       </p:sp>
@@ -8228,7 +9277,7 @@
         <p:spPr>
           <a:xfrm>
             <a:off x="795528" y="2377440"/>
-            <a:ext cx="10600639" cy="2560320"/>
+            <a:ext cx="10600639" cy="2606040"/>
           </a:xfrm>
           <a:prstGeom prst="rect">
             <a:avLst/>
@@ -8250,7 +9299,7 @@
               <a:buChar char="•"/>
             </a:pPr>
             <a:r>
-              <a:rPr lang="en-US" sz="1200" dirty="0">
+              <a:rPr lang="en-US" sz="1100" dirty="0">
                 <a:solidFill>
                   <a:srgbClr val="10161F"/>
                 </a:solidFill>
@@ -8260,13 +9309,79 @@
               </a:rPr>
               <a:t>{"ok":true,"mocked":true,"extractedFields":{"area_signal":"역삼","asset_type":"오피스빌딩","price_band":"300억","size_signal":"3000평(약 9917.4㎡)"},"extractedFacts":{"region":"역삼","exactAddressCandidate":"역삼동 7</a:t>
             </a:r>
-            <a:endParaRPr lang="en-US" sz="1200" dirty="0"/>
-          </a:p>
-        </p:txBody>
-      </p:sp>
-      <p:sp>
-        <p:nvSpPr>
-          <p:cNvPr id="11" name="Text 9"/>
+            <a:endParaRPr lang="en-US" sz="1100" dirty="0"/>
+          </a:p>
+        </p:txBody>
+      </p:sp>
+      <p:sp>
+        <p:nvSpPr>
+          <p:cNvPr id="11" name="Shape 9"/>
+          <p:cNvSpPr/>
+          <p:nvPr/>
+        </p:nvSpPr>
+        <p:spPr>
+          <a:xfrm>
+            <a:off x="566928" y="5193792"/>
+            <a:ext cx="11057839" cy="621792"/>
+          </a:xfrm>
+          <a:prstGeom prst="roundRect">
+            <a:avLst>
+              <a:gd name="adj" fmla="val 8824"/>
+            </a:avLst>
+          </a:prstGeom>
+          <a:solidFill>
+            <a:srgbClr val="F7FAFC"/>
+          </a:solidFill>
+          <a:ln w="6350">
+            <a:solidFill>
+              <a:srgbClr val="CBD5E0"/>
+            </a:solidFill>
+            <a:prstDash val="solid"/>
+          </a:ln>
+        </p:spPr>
+      </p:sp>
+      <p:sp>
+        <p:nvSpPr>
+          <p:cNvPr id="12" name="Text 10"/>
+          <p:cNvSpPr/>
+          <p:nvPr/>
+        </p:nvSpPr>
+        <p:spPr>
+          <a:xfrm>
+            <a:off x="795528" y="5193792"/>
+            <a:ext cx="10600639" cy="621792"/>
+          </a:xfrm>
+          <a:prstGeom prst="rect">
+            <a:avLst/>
+          </a:prstGeom>
+          <a:noFill/>
+          <a:ln/>
+        </p:spPr>
+        <p:txBody>
+          <a:bodyPr wrap="square" lIns="0" tIns="0" rIns="0" bIns="0" rtlCol="0" anchor="ctr"/>
+          <a:lstStyle/>
+          <a:p>
+            <a:pPr indent="0" marL="0">
+              <a:buNone/>
+            </a:pPr>
+            <a:r>
+              <a:rPr lang="en-US" sz="1100" dirty="0">
+                <a:solidFill>
+                  <a:srgbClr val="10161F"/>
+                </a:solidFill>
+                <a:latin typeface="Pretendard" pitchFamily="34" charset="0"/>
+                <a:ea typeface="Pretendard" pitchFamily="34" charset="-122"/>
+                <a:cs typeface="Pretendard" pitchFamily="34" charset="-120"/>
+              </a:rPr>
+              <a:t>※ 본 리스크 체크는 공부 및 브로커 확인 기반이며, 매수 전 전문 실사팀(변호사/건축사)을 통한 정밀 실사가 필요합니다.</a:t>
+            </a:r>
+            <a:endParaRPr lang="en-US" sz="1100" dirty="0"/>
+          </a:p>
+        </p:txBody>
+      </p:sp>
+      <p:sp>
+        <p:nvSpPr>
+          <p:cNvPr id="13" name="Text 11"/>
           <p:cNvSpPr/>
           <p:nvPr/>
         </p:nvSpPr>
@@ -8305,7 +9420,7 @@
       </p:sp>
       <p:sp>
         <p:nvSpPr>
-          <p:cNvPr id="12" name="Text 10"/>
+          <p:cNvPr id="14" name="Text 12"/>
           <p:cNvSpPr/>
           <p:nvPr/>
         </p:nvSpPr>

--- a/docs/test/stress/e2e-outputs/development_case13_mullae_dev_basic.pptx
+++ b/docs/test/stress/e2e-outputs/development_case13_mullae_dev_basic.pptx
@@ -1905,7 +1905,7 @@
                 <a:ea typeface="Arial" pitchFamily="34" charset="-122"/>
                 <a:cs typeface="Arial" pitchFamily="34" charset="-120"/>
               </a:rPr>
-              <a:t>BASIC IM</a:t>
+              <a:t>INVESTMENT MEMORANDUM</a:t>
             </a:r>
             <a:endParaRPr lang="en-US" sz="1000" dirty="0"/>
           </a:p>
@@ -3988,7 +3988,7 @@
                 <a:ea typeface="Pretendard" pitchFamily="34" charset="-122"/>
                 <a:cs typeface="Pretendard" pitchFamily="34" charset="-120"/>
               </a:rPr>
-              <a:t>영등포권역 내 개발부지, 매각 희망가 145억. 입지·임대차 현황을 감안할 때 투자 검토 가치가 있는 물건입니다.</a:t>
+              <a:t>영등포권역 소재 개발부지, 희망가 145억 투자 검토 자료입니다.</a:t>
             </a:r>
             <a:endParaRPr lang="en-US" sz="1500" dirty="0"/>
           </a:p>
@@ -4610,7 +4610,7 @@
                 <a:ea typeface="Pretendard" pitchFamily="34" charset="-122"/>
                 <a:cs typeface="Pretendard" pitchFamily="34" charset="-120"/>
               </a:rPr>
-              <a:t>원금 안전판: 영등포권역 핵심 입지 및 우량 대지 지분 가치로 하방 경직성 확보</a:t>
+              <a:t>입지 가치: 영등포권역 소재 자산으로 중장기 자산 가치 및 안정적 수요 검토</a:t>
             </a:r>
             <a:endParaRPr lang="en-US" sz="1150" dirty="0"/>
           </a:p>
@@ -4742,7 +4742,7 @@
                 <a:ea typeface="Pretendard" pitchFamily="34" charset="-122"/>
                 <a:cs typeface="Pretendard" pitchFamily="34" charset="-120"/>
               </a:rPr>
-              <a:t>수익 안정성: 매각 희망가 145억 대비 안정적인 월 임대수익 창출 구조</a:t>
+              <a:t>임대 구조: 145억 수준의 가격대 및 현 임대차 기반의 현금흐름 분석</a:t>
             </a:r>
             <a:endParaRPr lang="en-US" sz="1150" dirty="0"/>
           </a:p>
@@ -4874,7 +4874,7 @@
                 <a:ea typeface="Pretendard" pitchFamily="34" charset="-122"/>
                 <a:cs typeface="Pretendard" pitchFamily="34" charset="-120"/>
               </a:rPr>
-              <a:t>미래 가치: 향후 권역 지가 상승 및 공법상 잔여 용적률 활용 밸류업 기회</a:t>
+              <a:t>실사 점검: 계약서 및 공부 확인을 통한 권리관계·물리적 상태 정밀 진단</a:t>
             </a:r>
             <a:endParaRPr lang="en-US" sz="1150" dirty="0"/>
           </a:p>
@@ -5160,45 +5160,6 @@
         <p:spPr>
           <a:xfrm>
             <a:off x="6053328" y="1481328"/>
-            <a:ext cx="5571439" cy="237744"/>
-          </a:xfrm>
-          <a:prstGeom prst="rect">
-            <a:avLst/>
-          </a:prstGeom>
-          <a:noFill/>
-          <a:ln/>
-        </p:spPr>
-        <p:txBody>
-          <a:bodyPr wrap="square" lIns="0" tIns="0" rIns="0" bIns="0" rtlCol="0" anchor="ctr"/>
-          <a:lstStyle/>
-          <a:p>
-            <a:pPr indent="0" marL="0">
-              <a:buNone/>
-            </a:pPr>
-            <a:r>
-              <a:rPr lang="en-US" sz="1100" b="1" dirty="0">
-                <a:solidFill>
-                  <a:srgbClr val="10161F"/>
-                </a:solidFill>
-                <a:latin typeface="Pretendard" pitchFamily="34" charset="0"/>
-                <a:ea typeface="Pretendard" pitchFamily="34" charset="-122"/>
-                <a:cs typeface="Pretendard" pitchFamily="34" charset="-120"/>
-              </a:rPr>
-              <a:t>[교통] 교통 및 도로 접근성</a:t>
-            </a:r>
-            <a:endParaRPr lang="en-US" sz="1100" dirty="0"/>
-          </a:p>
-        </p:txBody>
-      </p:sp>
-      <p:sp>
-        <p:nvSpPr>
-          <p:cNvPr id="8" name="Text 5"/>
-          <p:cNvSpPr/>
-          <p:nvPr/>
-        </p:nvSpPr>
-        <p:spPr>
-          <a:xfrm>
-            <a:off x="6053328" y="1801368"/>
             <a:ext cx="2117147" cy="493776"/>
           </a:xfrm>
           <a:prstGeom prst="rect">
@@ -5234,13 +5195,13 @@
       </p:sp>
       <p:sp>
         <p:nvSpPr>
-          <p:cNvPr id="9" name="Text 6"/>
-          <p:cNvSpPr/>
-          <p:nvPr/>
-        </p:nvSpPr>
-        <p:spPr>
-          <a:xfrm>
-            <a:off x="8170475" y="1801368"/>
+          <p:cNvPr id="8" name="Text 5"/>
+          <p:cNvSpPr/>
+          <p:nvPr/>
+        </p:nvSpPr>
+        <p:spPr>
+          <a:xfrm>
+            <a:off x="8170475" y="1481328"/>
             <a:ext cx="3454292" cy="493776"/>
           </a:xfrm>
           <a:prstGeom prst="rect">
@@ -5265,13 +5226,13 @@
       </p:sp>
       <p:sp>
         <p:nvSpPr>
-          <p:cNvPr id="10" name="Shape 7"/>
-          <p:cNvSpPr/>
-          <p:nvPr/>
-        </p:nvSpPr>
-        <p:spPr>
-          <a:xfrm>
-            <a:off x="6053328" y="2295144"/>
+          <p:cNvPr id="9" name="Shape 6"/>
+          <p:cNvSpPr/>
+          <p:nvPr/>
+        </p:nvSpPr>
+        <p:spPr>
+          <a:xfrm>
+            <a:off x="6053328" y="1975104"/>
             <a:ext cx="5571439" cy="0"/>
           </a:xfrm>
           <a:prstGeom prst="line">
@@ -5288,13 +5249,13 @@
       </p:sp>
       <p:sp>
         <p:nvSpPr>
-          <p:cNvPr id="11" name="Text 8"/>
-          <p:cNvSpPr/>
-          <p:nvPr/>
-        </p:nvSpPr>
-        <p:spPr>
-          <a:xfrm>
-            <a:off x="6053328" y="2295144"/>
+          <p:cNvPr id="10" name="Text 7"/>
+          <p:cNvSpPr/>
+          <p:nvPr/>
+        </p:nvSpPr>
+        <p:spPr>
+          <a:xfrm>
+            <a:off x="6053328" y="1975104"/>
             <a:ext cx="2117147" cy="493776"/>
           </a:xfrm>
           <a:prstGeom prst="rect">
@@ -5330,13 +5291,13 @@
       </p:sp>
       <p:sp>
         <p:nvSpPr>
-          <p:cNvPr id="12" name="Text 9"/>
-          <p:cNvSpPr/>
-          <p:nvPr/>
-        </p:nvSpPr>
-        <p:spPr>
-          <a:xfrm>
-            <a:off x="8170475" y="2295144"/>
+          <p:cNvPr id="11" name="Text 8"/>
+          <p:cNvSpPr/>
+          <p:nvPr/>
+        </p:nvSpPr>
+        <p:spPr>
+          <a:xfrm>
+            <a:off x="8170475" y="1975104"/>
             <a:ext cx="3454292" cy="493776"/>
           </a:xfrm>
           <a:prstGeom prst="rect">
@@ -5364,7 +5325,7 @@
                 <a:ea typeface="Pretendard" pitchFamily="34" charset="-122"/>
                 <a:cs typeface="Pretendard" pitchFamily="34" charset="-120"/>
               </a:rPr>
-              <a:t>영등포권역 내 주요 비즈니스 및 유동인구 풍부한 상권 입지</a:t>
+              <a:t>영등포권역 내 주요 비즈니스 및 유동인구 풍부한 상권 입지 ### [성장] 입지 평가</a:t>
             </a:r>
             <a:endParaRPr lang="en-US" sz="1300" dirty="0"/>
           </a:p>
@@ -5372,13 +5333,13 @@
       </p:sp>
       <p:sp>
         <p:nvSpPr>
-          <p:cNvPr id="13" name="Shape 10"/>
-          <p:cNvSpPr/>
-          <p:nvPr/>
-        </p:nvSpPr>
-        <p:spPr>
-          <a:xfrm>
-            <a:off x="6053328" y="2788920"/>
+          <p:cNvPr id="12" name="Shape 9"/>
+          <p:cNvSpPr/>
+          <p:nvPr/>
+        </p:nvSpPr>
+        <p:spPr>
+          <a:xfrm>
+            <a:off x="6053328" y="2468880"/>
             <a:ext cx="5571439" cy="0"/>
           </a:xfrm>
           <a:prstGeom prst="line">
@@ -5395,13 +5356,13 @@
       </p:sp>
       <p:sp>
         <p:nvSpPr>
-          <p:cNvPr id="14" name="Text 11"/>
-          <p:cNvSpPr/>
-          <p:nvPr/>
-        </p:nvSpPr>
-        <p:spPr>
-          <a:xfrm>
-            <a:off x="6053328" y="2788920"/>
+          <p:cNvPr id="13" name="Text 10"/>
+          <p:cNvSpPr/>
+          <p:nvPr/>
+        </p:nvSpPr>
+        <p:spPr>
+          <a:xfrm>
+            <a:off x="6053328" y="2468880"/>
             <a:ext cx="2117147" cy="493776"/>
           </a:xfrm>
           <a:prstGeom prst="rect">
@@ -5429,7 +5390,7 @@
                 <a:ea typeface="Pretendard" pitchFamily="34" charset="-122"/>
                 <a:cs typeface="Pretendard" pitchFamily="34" charset="-120"/>
               </a:rPr>
-              <a:t>영등포권역 내 우수한 접근성과 높은 가시성을 갖춘</a:t>
+              <a:t>영등포권역 내 위치하며 접근성과 가시성이 양호한 입</a:t>
             </a:r>
             <a:endParaRPr lang="en-US" sz="1300" dirty="0"/>
           </a:p>
@@ -5437,13 +5398,13 @@
       </p:sp>
       <p:sp>
         <p:nvSpPr>
-          <p:cNvPr id="15" name="Text 12"/>
-          <p:cNvSpPr/>
-          <p:nvPr/>
-        </p:nvSpPr>
-        <p:spPr>
-          <a:xfrm>
-            <a:off x="8170475" y="2788920"/>
+          <p:cNvPr id="14" name="Text 11"/>
+          <p:cNvSpPr/>
+          <p:nvPr/>
+        </p:nvSpPr>
+        <p:spPr>
+          <a:xfrm>
+            <a:off x="8170475" y="2468880"/>
             <a:ext cx="3454292" cy="493776"/>
           </a:xfrm>
           <a:prstGeom prst="rect">
@@ -5468,7 +5429,7 @@
       </p:sp>
       <p:sp>
         <p:nvSpPr>
-          <p:cNvPr id="16" name="Text 13"/>
+          <p:cNvPr id="15" name="Text 12"/>
           <p:cNvSpPr/>
           <p:nvPr/>
         </p:nvSpPr>
@@ -5507,7 +5468,7 @@
       </p:sp>
       <p:sp>
         <p:nvSpPr>
-          <p:cNvPr id="17" name="Text 14"/>
+          <p:cNvPr id="16" name="Text 13"/>
           <p:cNvSpPr/>
           <p:nvPr/>
         </p:nvSpPr>
@@ -5788,7 +5749,7 @@
                 <a:ea typeface="Pretendard" pitchFamily="34" charset="-122"/>
                 <a:cs typeface="Pretendard" pitchFamily="34" charset="-120"/>
               </a:rPr>
-              <a:t>소재지</a:t>
+              <a:t>{"ok"</a:t>
             </a:r>
             <a:endParaRPr lang="en-US" sz="1400" dirty="0"/>
           </a:p>
@@ -5830,7 +5791,7 @@
                 <a:ea typeface="Pretendard" pitchFamily="34" charset="-122"/>
                 <a:cs typeface="Pretendard" pitchFamily="34" charset="-120"/>
               </a:rPr>
-              <a:t>영등포권역</a:t>
+              <a:t>true,"mocked":true,"extractedFields":{"area_signal":"역삼","asset_type":"오피스빌딩","price_band":"300억","size_signal":"3000평(약 9917.4㎡)"},"extractedFacts":{"region":"역삼","exactAddressCandidate":"역삼동 742-1","assetType":"오피스빌딩","priceText":"300억","sizeText":"3000평(약 9917.4㎡)","currentUse":"오피스","currentUseSignal":"근린생활시설","leaseSignal":"임대중","vacancySignal":"공실없음","tenantNames":"쿠팡","네이버","unitRentTexts":"301호: 1500만","sellerMotivationText":"자산 효율화","brokerNotes":"초역세권 매물"},"detectedSensitiveFields":"exact_address","tenant_name","ambiguousFields":,"warnings":,"areaSignal":"역삼","assetType":"오피스빌딩","priceBand":"300억","sizeSignal":"3000평(약 9917.4㎡)","dealType":"매각","buildingName":"역삼 센트럴타워","exactAddress":"역삼동 742-1","totalFloorArea":9917.3,"buildYear":2015,"currentUseSignal":"근린생활시설","vacancySignal":"공실 없음","fitSummary":"초역세권 근생 빌딩으로 시행/사옥 매입에 최적화","cautionSummary":"주요 임차인 만기 조율 필요","hiddenFields":"exact_address","seller_motivation","confidence":{"areaSignal":"confirmed","assetType":"confirmed","priceBand":"ai_hypothesis","fitSummary":"ai_hypothesis"},"missingData":"sizeSignal","boundaryNote":"본 자료는 실거래 통계 기반 참고치입니다.","buyerType":"법인 사옥형","budgetRange":{"min":50,"max":80,"display":"50억~80억"},"preferredRegions":"강남","성수","assetTypes":"꼬마빌딩","사옥용","purchasePurpose":"사옥용 매입","mustHave":"초역세권","주차","niceToHave":"테라스","루프탑","riskTolerance":"medium","financingNote":"자본금 50% 준비","missingQuestions":"구체적인 입주 시기가 언제인가요?","선호하는 수익률이 있나요?","privacyNotes":"연락처 비공개","fitReasons":"매수자 예산(50-80억)에 부합하는 매물입니다.","요청하신 성수/강남 권역에 해당합니다.","cautionReasons":"요청한 용도와 달리 명도 협의가 다소 필요합니다.","recommendedNextAction":"현장 답사 제안","kakaoMessage":"안녕하세요! 요청하신 조건에 부합하는 추천 매물이 있어 안내해 드립니다. 확인해보시고 피드백 부탁드립니다.","title":"강남 역삼역 초역세권 오피스 사옥용 빌딩 매각","shortSummary":"역삼역 도보 5분 거리의 준신축급 대형 오피스빌딩입니다.","dealPoints":"초역세권","사옥 최적","cautionPoints":"명도 조율 필요","hiddenInfoNotice":"보증금 및 지번은 인가 후 확인 가능","gateMessage":"G1 등급 등록이 필요합니다.","kakaoText":"강남 역삼역 오피스 빌딩 매각 안내입니다.","exactUnitCandidate":"101호","floor":"1층","areaSqmText":"150㎡","spaceType":"office","depositText":"5000만","monthlyRentText":"400만","maintenanceFeeText":"50만","availableFromText":"즉시입주","leaseTermMonthsText":"24","incentivesText":"렌트프리 2개월","restrictions":,"landlordIdentity":"김성수","currentTenant":"스타트업","vacancyReason":"이전 확장","rentNegotiation":"협의 가능","region":"성수동","areaSqm":150,"deposit":5000,"monthlyRent":400,"maintenanceFee":50,"availableFrom":"즉시입주","leaseTermMonths":24,"incentives":{"rentFreeMonths":2,"interiorSupport":"일부 인테리어 지원","freeRentDetail":"렌트프리 2개월 지원"},"shortSummaryLease":"성수역 도보 5분 거리 1층 리테일 상가 매물입니다."}</a:t>
             </a:r>
             <a:endParaRPr lang="en-US" sz="1400" dirty="0"/>
           </a:p>
@@ -5839,862 +5800,6 @@
       <p:sp>
         <p:nvSpPr>
           <p:cNvPr id="9" name="Shape 7"/>
-          <p:cNvSpPr/>
-          <p:nvPr/>
-        </p:nvSpPr>
-        <p:spPr>
-          <a:xfrm>
-            <a:off x="566928" y="2048256"/>
-            <a:ext cx="6858000" cy="0"/>
-          </a:xfrm>
-          <a:prstGeom prst="line">
-            <a:avLst/>
-          </a:prstGeom>
-          <a:noFill/>
-          <a:ln w="3810">
-            <a:solidFill>
-              <a:srgbClr val="CBD5E0"/>
-            </a:solidFill>
-            <a:prstDash val="solid"/>
-          </a:ln>
-        </p:spPr>
-      </p:sp>
-      <p:sp>
-        <p:nvSpPr>
-          <p:cNvPr id="10" name="Text 8"/>
-          <p:cNvSpPr/>
-          <p:nvPr/>
-        </p:nvSpPr>
-        <p:spPr>
-          <a:xfrm>
-            <a:off x="566928" y="2048256"/>
-            <a:ext cx="2606040" cy="402336"/>
-          </a:xfrm>
-          <a:prstGeom prst="rect">
-            <a:avLst/>
-          </a:prstGeom>
-          <a:noFill/>
-          <a:ln/>
-        </p:spPr>
-        <p:txBody>
-          <a:bodyPr wrap="square" lIns="0" tIns="0" rIns="0" bIns="0" rtlCol="0" anchor="ctr"/>
-          <a:lstStyle/>
-          <a:p>
-            <a:pPr indent="0" marL="0">
-              <a:lnSpc>
-                <a:spcPct val="120000"/>
-              </a:lnSpc>
-              <a:buNone/>
-            </a:pPr>
-            <a:r>
-              <a:rPr lang="en-US" sz="1400" dirty="0">
-                <a:solidFill>
-                  <a:srgbClr val="718096"/>
-                </a:solidFill>
-                <a:latin typeface="Pretendard" pitchFamily="34" charset="0"/>
-                <a:ea typeface="Pretendard" pitchFamily="34" charset="-122"/>
-                <a:cs typeface="Pretendard" pitchFamily="34" charset="-120"/>
-              </a:rPr>
-              <a:t>주요 용도</a:t>
-            </a:r>
-            <a:endParaRPr lang="en-US" sz="1400" dirty="0"/>
-          </a:p>
-        </p:txBody>
-      </p:sp>
-      <p:sp>
-        <p:nvSpPr>
-          <p:cNvPr id="11" name="Text 9"/>
-          <p:cNvSpPr/>
-          <p:nvPr/>
-        </p:nvSpPr>
-        <p:spPr>
-          <a:xfrm>
-            <a:off x="3172968" y="2048256"/>
-            <a:ext cx="4251960" cy="402336"/>
-          </a:xfrm>
-          <a:prstGeom prst="rect">
-            <a:avLst/>
-          </a:prstGeom>
-          <a:noFill/>
-          <a:ln/>
-        </p:spPr>
-        <p:txBody>
-          <a:bodyPr wrap="square" lIns="0" tIns="0" rIns="0" bIns="0" rtlCol="0" anchor="ctr"/>
-          <a:lstStyle/>
-          <a:p>
-            <a:pPr indent="0" marL="0">
-              <a:lnSpc>
-                <a:spcPct val="120000"/>
-              </a:lnSpc>
-              <a:buNone/>
-            </a:pPr>
-            <a:r>
-              <a:rPr lang="en-US" sz="1400" b="1" dirty="0">
-                <a:solidFill>
-                  <a:srgbClr val="10161F"/>
-                </a:solidFill>
-                <a:latin typeface="Pretendard" pitchFamily="34" charset="0"/>
-                <a:ea typeface="Pretendard" pitchFamily="34" charset="-122"/>
-                <a:cs typeface="Pretendard" pitchFamily="34" charset="-120"/>
-              </a:rPr>
-              <a:t>근린생활시설</a:t>
-            </a:r>
-            <a:endParaRPr lang="en-US" sz="1400" dirty="0"/>
-          </a:p>
-        </p:txBody>
-      </p:sp>
-      <p:sp>
-        <p:nvSpPr>
-          <p:cNvPr id="12" name="Shape 10"/>
-          <p:cNvSpPr/>
-          <p:nvPr/>
-        </p:nvSpPr>
-        <p:spPr>
-          <a:xfrm>
-            <a:off x="566928" y="2450592"/>
-            <a:ext cx="6858000" cy="0"/>
-          </a:xfrm>
-          <a:prstGeom prst="line">
-            <a:avLst/>
-          </a:prstGeom>
-          <a:noFill/>
-          <a:ln w="3810">
-            <a:solidFill>
-              <a:srgbClr val="CBD5E0"/>
-            </a:solidFill>
-            <a:prstDash val="solid"/>
-          </a:ln>
-        </p:spPr>
-      </p:sp>
-      <p:sp>
-        <p:nvSpPr>
-          <p:cNvPr id="13" name="Text 11"/>
-          <p:cNvSpPr/>
-          <p:nvPr/>
-        </p:nvSpPr>
-        <p:spPr>
-          <a:xfrm>
-            <a:off x="566928" y="2450592"/>
-            <a:ext cx="2606040" cy="402336"/>
-          </a:xfrm>
-          <a:prstGeom prst="rect">
-            <a:avLst/>
-          </a:prstGeom>
-          <a:noFill/>
-          <a:ln/>
-        </p:spPr>
-        <p:txBody>
-          <a:bodyPr wrap="square" lIns="0" tIns="0" rIns="0" bIns="0" rtlCol="0" anchor="ctr"/>
-          <a:lstStyle/>
-          <a:p>
-            <a:pPr indent="0" marL="0">
-              <a:lnSpc>
-                <a:spcPct val="120000"/>
-              </a:lnSpc>
-              <a:buNone/>
-            </a:pPr>
-            <a:r>
-              <a:rPr lang="en-US" sz="1400" dirty="0">
-                <a:solidFill>
-                  <a:srgbClr val="718096"/>
-                </a:solidFill>
-                <a:latin typeface="Pretendard" pitchFamily="34" charset="0"/>
-                <a:ea typeface="Pretendard" pitchFamily="34" charset="-122"/>
-                <a:cs typeface="Pretendard" pitchFamily="34" charset="-120"/>
-              </a:rPr>
-              <a:t>연면적</a:t>
-            </a:r>
-            <a:endParaRPr lang="en-US" sz="1400" dirty="0"/>
-          </a:p>
-        </p:txBody>
-      </p:sp>
-      <p:sp>
-        <p:nvSpPr>
-          <p:cNvPr id="14" name="Text 12"/>
-          <p:cNvSpPr/>
-          <p:nvPr/>
-        </p:nvSpPr>
-        <p:spPr>
-          <a:xfrm>
-            <a:off x="3172968" y="2450592"/>
-            <a:ext cx="4251960" cy="402336"/>
-          </a:xfrm>
-          <a:prstGeom prst="rect">
-            <a:avLst/>
-          </a:prstGeom>
-          <a:noFill/>
-          <a:ln/>
-        </p:spPr>
-        <p:txBody>
-          <a:bodyPr wrap="square" lIns="0" tIns="0" rIns="0" bIns="0" rtlCol="0" anchor="ctr"/>
-          <a:lstStyle/>
-          <a:p>
-            <a:pPr indent="0" marL="0">
-              <a:lnSpc>
-                <a:spcPct val="120000"/>
-              </a:lnSpc>
-              <a:buNone/>
-            </a:pPr>
-            <a:r>
-              <a:rPr lang="en-US" sz="1400" b="1" dirty="0">
-                <a:solidFill>
-                  <a:srgbClr val="10161F"/>
-                </a:solidFill>
-                <a:latin typeface="Pretendard" pitchFamily="34" charset="0"/>
-                <a:ea typeface="Pretendard" pitchFamily="34" charset="-122"/>
-                <a:cs typeface="Pretendard" pitchFamily="34" charset="-120"/>
-              </a:rPr>
-              <a:t>5,000㎡ (약 1513평(약 5001.7㎡))</a:t>
-            </a:r>
-            <a:endParaRPr lang="en-US" sz="1400" dirty="0"/>
-          </a:p>
-        </p:txBody>
-      </p:sp>
-      <p:sp>
-        <p:nvSpPr>
-          <p:cNvPr id="15" name="Shape 13"/>
-          <p:cNvSpPr/>
-          <p:nvPr/>
-        </p:nvSpPr>
-        <p:spPr>
-          <a:xfrm>
-            <a:off x="566928" y="2852928"/>
-            <a:ext cx="6858000" cy="0"/>
-          </a:xfrm>
-          <a:prstGeom prst="line">
-            <a:avLst/>
-          </a:prstGeom>
-          <a:noFill/>
-          <a:ln w="3810">
-            <a:solidFill>
-              <a:srgbClr val="CBD5E0"/>
-            </a:solidFill>
-            <a:prstDash val="solid"/>
-          </a:ln>
-        </p:spPr>
-      </p:sp>
-      <p:sp>
-        <p:nvSpPr>
-          <p:cNvPr id="16" name="Text 14"/>
-          <p:cNvSpPr/>
-          <p:nvPr/>
-        </p:nvSpPr>
-        <p:spPr>
-          <a:xfrm>
-            <a:off x="566928" y="2852928"/>
-            <a:ext cx="2606040" cy="402336"/>
-          </a:xfrm>
-          <a:prstGeom prst="rect">
-            <a:avLst/>
-          </a:prstGeom>
-          <a:noFill/>
-          <a:ln/>
-        </p:spPr>
-        <p:txBody>
-          <a:bodyPr wrap="square" lIns="0" tIns="0" rIns="0" bIns="0" rtlCol="0" anchor="ctr"/>
-          <a:lstStyle/>
-          <a:p>
-            <a:pPr indent="0" marL="0">
-              <a:lnSpc>
-                <a:spcPct val="120000"/>
-              </a:lnSpc>
-              <a:buNone/>
-            </a:pPr>
-            <a:r>
-              <a:rPr lang="en-US" sz="1400" dirty="0">
-                <a:solidFill>
-                  <a:srgbClr val="718096"/>
-                </a:solidFill>
-                <a:latin typeface="Pretendard" pitchFamily="34" charset="0"/>
-                <a:ea typeface="Pretendard" pitchFamily="34" charset="-122"/>
-                <a:cs typeface="Pretendard" pitchFamily="34" charset="-120"/>
-              </a:rPr>
-              <a:t>대지면적</a:t>
-            </a:r>
-            <a:endParaRPr lang="en-US" sz="1400" dirty="0"/>
-          </a:p>
-        </p:txBody>
-      </p:sp>
-      <p:sp>
-        <p:nvSpPr>
-          <p:cNvPr id="17" name="Text 15"/>
-          <p:cNvSpPr/>
-          <p:nvPr/>
-        </p:nvSpPr>
-        <p:spPr>
-          <a:xfrm>
-            <a:off x="3172968" y="2852928"/>
-            <a:ext cx="4251960" cy="402336"/>
-          </a:xfrm>
-          <a:prstGeom prst="rect">
-            <a:avLst/>
-          </a:prstGeom>
-          <a:noFill/>
-          <a:ln/>
-        </p:spPr>
-        <p:txBody>
-          <a:bodyPr wrap="square" lIns="0" tIns="0" rIns="0" bIns="0" rtlCol="0" anchor="ctr"/>
-          <a:lstStyle/>
-          <a:p>
-            <a:pPr indent="0" marL="0">
-              <a:lnSpc>
-                <a:spcPct val="120000"/>
-              </a:lnSpc>
-              <a:buNone/>
-            </a:pPr>
-            <a:r>
-              <a:rPr lang="en-US" sz="1400" b="1" dirty="0">
-                <a:solidFill>
-                  <a:srgbClr val="10161F"/>
-                </a:solidFill>
-                <a:latin typeface="Pretendard" pitchFamily="34" charset="0"/>
-                <a:ea typeface="Pretendard" pitchFamily="34" charset="-122"/>
-                <a:cs typeface="Pretendard" pitchFamily="34" charset="-120"/>
-              </a:rPr>
-              <a:t>1,000㎡ (약 303평(약 1001.7㎡))</a:t>
-            </a:r>
-            <a:endParaRPr lang="en-US" sz="1400" dirty="0"/>
-          </a:p>
-        </p:txBody>
-      </p:sp>
-      <p:sp>
-        <p:nvSpPr>
-          <p:cNvPr id="18" name="Shape 16"/>
-          <p:cNvSpPr/>
-          <p:nvPr/>
-        </p:nvSpPr>
-        <p:spPr>
-          <a:xfrm>
-            <a:off x="566928" y="3255264"/>
-            <a:ext cx="6858000" cy="0"/>
-          </a:xfrm>
-          <a:prstGeom prst="line">
-            <a:avLst/>
-          </a:prstGeom>
-          <a:noFill/>
-          <a:ln w="3810">
-            <a:solidFill>
-              <a:srgbClr val="CBD5E0"/>
-            </a:solidFill>
-            <a:prstDash val="solid"/>
-          </a:ln>
-        </p:spPr>
-      </p:sp>
-      <p:sp>
-        <p:nvSpPr>
-          <p:cNvPr id="19" name="Text 17"/>
-          <p:cNvSpPr/>
-          <p:nvPr/>
-        </p:nvSpPr>
-        <p:spPr>
-          <a:xfrm>
-            <a:off x="566928" y="3255264"/>
-            <a:ext cx="2606040" cy="402336"/>
-          </a:xfrm>
-          <a:prstGeom prst="rect">
-            <a:avLst/>
-          </a:prstGeom>
-          <a:noFill/>
-          <a:ln/>
-        </p:spPr>
-        <p:txBody>
-          <a:bodyPr wrap="square" lIns="0" tIns="0" rIns="0" bIns="0" rtlCol="0" anchor="ctr"/>
-          <a:lstStyle/>
-          <a:p>
-            <a:pPr indent="0" marL="0">
-              <a:lnSpc>
-                <a:spcPct val="120000"/>
-              </a:lnSpc>
-              <a:buNone/>
-            </a:pPr>
-            <a:r>
-              <a:rPr lang="en-US" sz="1400" dirty="0">
-                <a:solidFill>
-                  <a:srgbClr val="718096"/>
-                </a:solidFill>
-                <a:latin typeface="Pretendard" pitchFamily="34" charset="0"/>
-                <a:ea typeface="Pretendard" pitchFamily="34" charset="-122"/>
-                <a:cs typeface="Pretendard" pitchFamily="34" charset="-120"/>
-              </a:rPr>
-              <a:t>용도지역</a:t>
-            </a:r>
-            <a:endParaRPr lang="en-US" sz="1400" dirty="0"/>
-          </a:p>
-        </p:txBody>
-      </p:sp>
-      <p:sp>
-        <p:nvSpPr>
-          <p:cNvPr id="20" name="Text 18"/>
-          <p:cNvSpPr/>
-          <p:nvPr/>
-        </p:nvSpPr>
-        <p:spPr>
-          <a:xfrm>
-            <a:off x="3172968" y="3255264"/>
-            <a:ext cx="4251960" cy="402336"/>
-          </a:xfrm>
-          <a:prstGeom prst="rect">
-            <a:avLst/>
-          </a:prstGeom>
-          <a:noFill/>
-          <a:ln/>
-        </p:spPr>
-        <p:txBody>
-          <a:bodyPr wrap="square" lIns="0" tIns="0" rIns="0" bIns="0" rtlCol="0" anchor="ctr"/>
-          <a:lstStyle/>
-          <a:p>
-            <a:pPr indent="0" marL="0">
-              <a:lnSpc>
-                <a:spcPct val="120000"/>
-              </a:lnSpc>
-              <a:buNone/>
-            </a:pPr>
-            <a:r>
-              <a:rPr lang="en-US" sz="1400" b="1" dirty="0">
-                <a:solidFill>
-                  <a:srgbClr val="10161F"/>
-                </a:solidFill>
-                <a:latin typeface="Pretendard" pitchFamily="34" charset="0"/>
-                <a:ea typeface="Pretendard" pitchFamily="34" charset="-122"/>
-                <a:cs typeface="Pretendard" pitchFamily="34" charset="-120"/>
-              </a:rPr>
-              <a:t>일반상업지역</a:t>
-            </a:r>
-            <a:endParaRPr lang="en-US" sz="1400" dirty="0"/>
-          </a:p>
-        </p:txBody>
-      </p:sp>
-      <p:sp>
-        <p:nvSpPr>
-          <p:cNvPr id="21" name="Shape 19"/>
-          <p:cNvSpPr/>
-          <p:nvPr/>
-        </p:nvSpPr>
-        <p:spPr>
-          <a:xfrm>
-            <a:off x="566928" y="3657600"/>
-            <a:ext cx="6858000" cy="0"/>
-          </a:xfrm>
-          <a:prstGeom prst="line">
-            <a:avLst/>
-          </a:prstGeom>
-          <a:noFill/>
-          <a:ln w="3810">
-            <a:solidFill>
-              <a:srgbClr val="CBD5E0"/>
-            </a:solidFill>
-            <a:prstDash val="solid"/>
-          </a:ln>
-        </p:spPr>
-      </p:sp>
-      <p:sp>
-        <p:nvSpPr>
-          <p:cNvPr id="22" name="Text 20"/>
-          <p:cNvSpPr/>
-          <p:nvPr/>
-        </p:nvSpPr>
-        <p:spPr>
-          <a:xfrm>
-            <a:off x="566928" y="3657600"/>
-            <a:ext cx="2606040" cy="402336"/>
-          </a:xfrm>
-          <a:prstGeom prst="rect">
-            <a:avLst/>
-          </a:prstGeom>
-          <a:noFill/>
-          <a:ln/>
-        </p:spPr>
-        <p:txBody>
-          <a:bodyPr wrap="square" lIns="0" tIns="0" rIns="0" bIns="0" rtlCol="0" anchor="ctr"/>
-          <a:lstStyle/>
-          <a:p>
-            <a:pPr indent="0" marL="0">
-              <a:lnSpc>
-                <a:spcPct val="120000"/>
-              </a:lnSpc>
-              <a:buNone/>
-            </a:pPr>
-            <a:r>
-              <a:rPr lang="en-US" sz="1400" dirty="0">
-                <a:solidFill>
-                  <a:srgbClr val="718096"/>
-                </a:solidFill>
-                <a:latin typeface="Pretendard" pitchFamily="34" charset="0"/>
-                <a:ea typeface="Pretendard" pitchFamily="34" charset="-122"/>
-                <a:cs typeface="Pretendard" pitchFamily="34" charset="-120"/>
-              </a:rPr>
-              <a:t>승강기</a:t>
-            </a:r>
-            <a:endParaRPr lang="en-US" sz="1400" dirty="0"/>
-          </a:p>
-        </p:txBody>
-      </p:sp>
-      <p:sp>
-        <p:nvSpPr>
-          <p:cNvPr id="23" name="Text 21"/>
-          <p:cNvSpPr/>
-          <p:nvPr/>
-        </p:nvSpPr>
-        <p:spPr>
-          <a:xfrm>
-            <a:off x="3172968" y="3657600"/>
-            <a:ext cx="4251960" cy="402336"/>
-          </a:xfrm>
-          <a:prstGeom prst="rect">
-            <a:avLst/>
-          </a:prstGeom>
-          <a:noFill/>
-          <a:ln/>
-        </p:spPr>
-        <p:txBody>
-          <a:bodyPr wrap="square" lIns="0" tIns="0" rIns="0" bIns="0" rtlCol="0" anchor="ctr"/>
-          <a:lstStyle/>
-          <a:p>
-            <a:pPr indent="0" marL="0">
-              <a:lnSpc>
-                <a:spcPct val="120000"/>
-              </a:lnSpc>
-              <a:buNone/>
-            </a:pPr>
-            <a:r>
-              <a:rPr lang="en-US" sz="1400" b="1" dirty="0">
-                <a:solidFill>
-                  <a:srgbClr val="10161F"/>
-                </a:solidFill>
-                <a:latin typeface="Pretendard" pitchFamily="34" charset="0"/>
-                <a:ea typeface="Pretendard" pitchFamily="34" charset="-122"/>
-                <a:cs typeface="Pretendard" pitchFamily="34" charset="-120"/>
-              </a:rPr>
-              <a:t>1대 (15인승 침대용)</a:t>
-            </a:r>
-            <a:endParaRPr lang="en-US" sz="1400" dirty="0"/>
-          </a:p>
-        </p:txBody>
-      </p:sp>
-      <p:sp>
-        <p:nvSpPr>
-          <p:cNvPr id="24" name="Shape 22"/>
-          <p:cNvSpPr/>
-          <p:nvPr/>
-        </p:nvSpPr>
-        <p:spPr>
-          <a:xfrm>
-            <a:off x="566928" y="4059936"/>
-            <a:ext cx="6858000" cy="0"/>
-          </a:xfrm>
-          <a:prstGeom prst="line">
-            <a:avLst/>
-          </a:prstGeom>
-          <a:noFill/>
-          <a:ln w="3810">
-            <a:solidFill>
-              <a:srgbClr val="CBD5E0"/>
-            </a:solidFill>
-            <a:prstDash val="solid"/>
-          </a:ln>
-        </p:spPr>
-      </p:sp>
-      <p:sp>
-        <p:nvSpPr>
-          <p:cNvPr id="25" name="Text 23"/>
-          <p:cNvSpPr/>
-          <p:nvPr/>
-        </p:nvSpPr>
-        <p:spPr>
-          <a:xfrm>
-            <a:off x="566928" y="4059936"/>
-            <a:ext cx="2606040" cy="402336"/>
-          </a:xfrm>
-          <a:prstGeom prst="rect">
-            <a:avLst/>
-          </a:prstGeom>
-          <a:noFill/>
-          <a:ln/>
-        </p:spPr>
-        <p:txBody>
-          <a:bodyPr wrap="square" lIns="0" tIns="0" rIns="0" bIns="0" rtlCol="0" anchor="ctr"/>
-          <a:lstStyle/>
-          <a:p>
-            <a:pPr indent="0" marL="0">
-              <a:lnSpc>
-                <a:spcPct val="120000"/>
-              </a:lnSpc>
-              <a:buNone/>
-            </a:pPr>
-            <a:r>
-              <a:rPr lang="en-US" sz="1400" dirty="0">
-                <a:solidFill>
-                  <a:srgbClr val="718096"/>
-                </a:solidFill>
-                <a:latin typeface="Pretendard" pitchFamily="34" charset="0"/>
-                <a:ea typeface="Pretendard" pitchFamily="34" charset="-122"/>
-                <a:cs typeface="Pretendard" pitchFamily="34" charset="-120"/>
-              </a:rPr>
-              <a:t>주차 대수</a:t>
-            </a:r>
-            <a:endParaRPr lang="en-US" sz="1400" dirty="0"/>
-          </a:p>
-        </p:txBody>
-      </p:sp>
-      <p:sp>
-        <p:nvSpPr>
-          <p:cNvPr id="26" name="Text 24"/>
-          <p:cNvSpPr/>
-          <p:nvPr/>
-        </p:nvSpPr>
-        <p:spPr>
-          <a:xfrm>
-            <a:off x="3172968" y="4059936"/>
-            <a:ext cx="4251960" cy="402336"/>
-          </a:xfrm>
-          <a:prstGeom prst="rect">
-            <a:avLst/>
-          </a:prstGeom>
-          <a:noFill/>
-          <a:ln/>
-        </p:spPr>
-        <p:txBody>
-          <a:bodyPr wrap="square" lIns="0" tIns="0" rIns="0" bIns="0" rtlCol="0" anchor="ctr"/>
-          <a:lstStyle/>
-          <a:p>
-            <a:pPr indent="0" marL="0">
-              <a:lnSpc>
-                <a:spcPct val="120000"/>
-              </a:lnSpc>
-              <a:buNone/>
-            </a:pPr>
-            <a:r>
-              <a:rPr lang="en-US" sz="1400" b="1" dirty="0">
-                <a:solidFill>
-                  <a:srgbClr val="10161F"/>
-                </a:solidFill>
-                <a:latin typeface="Pretendard" pitchFamily="34" charset="0"/>
-                <a:ea typeface="Pretendard" pitchFamily="34" charset="-122"/>
-                <a:cs typeface="Pretendard" pitchFamily="34" charset="-120"/>
-              </a:rPr>
-              <a:t>18대 (자주식 완비)</a:t>
-            </a:r>
-            <a:endParaRPr lang="en-US" sz="1400" dirty="0"/>
-          </a:p>
-        </p:txBody>
-      </p:sp>
-      <p:sp>
-        <p:nvSpPr>
-          <p:cNvPr id="27" name="Shape 25"/>
-          <p:cNvSpPr/>
-          <p:nvPr/>
-        </p:nvSpPr>
-        <p:spPr>
-          <a:xfrm>
-            <a:off x="566928" y="4462272"/>
-            <a:ext cx="6858000" cy="0"/>
-          </a:xfrm>
-          <a:prstGeom prst="line">
-            <a:avLst/>
-          </a:prstGeom>
-          <a:noFill/>
-          <a:ln w="3810">
-            <a:solidFill>
-              <a:srgbClr val="CBD5E0"/>
-            </a:solidFill>
-            <a:prstDash val="solid"/>
-          </a:ln>
-        </p:spPr>
-      </p:sp>
-      <p:sp>
-        <p:nvSpPr>
-          <p:cNvPr id="28" name="Text 26"/>
-          <p:cNvSpPr/>
-          <p:nvPr/>
-        </p:nvSpPr>
-        <p:spPr>
-          <a:xfrm>
-            <a:off x="566928" y="4462272"/>
-            <a:ext cx="2606040" cy="402336"/>
-          </a:xfrm>
-          <a:prstGeom prst="rect">
-            <a:avLst/>
-          </a:prstGeom>
-          <a:noFill/>
-          <a:ln/>
-        </p:spPr>
-        <p:txBody>
-          <a:bodyPr wrap="square" lIns="0" tIns="0" rIns="0" bIns="0" rtlCol="0" anchor="ctr"/>
-          <a:lstStyle/>
-          <a:p>
-            <a:pPr indent="0" marL="0">
-              <a:lnSpc>
-                <a:spcPct val="120000"/>
-              </a:lnSpc>
-              <a:buNone/>
-            </a:pPr>
-            <a:r>
-              <a:rPr lang="en-US" sz="1400" dirty="0">
-                <a:solidFill>
-                  <a:srgbClr val="718096"/>
-                </a:solidFill>
-                <a:latin typeface="Pretendard" pitchFamily="34" charset="0"/>
-                <a:ea typeface="Pretendard" pitchFamily="34" charset="-122"/>
-                <a:cs typeface="Pretendard" pitchFamily="34" charset="-120"/>
-              </a:rPr>
-              <a:t>주구조</a:t>
-            </a:r>
-            <a:endParaRPr lang="en-US" sz="1400" dirty="0"/>
-          </a:p>
-        </p:txBody>
-      </p:sp>
-      <p:sp>
-        <p:nvSpPr>
-          <p:cNvPr id="29" name="Text 27"/>
-          <p:cNvSpPr/>
-          <p:nvPr/>
-        </p:nvSpPr>
-        <p:spPr>
-          <a:xfrm>
-            <a:off x="3172968" y="4462272"/>
-            <a:ext cx="4251960" cy="402336"/>
-          </a:xfrm>
-          <a:prstGeom prst="rect">
-            <a:avLst/>
-          </a:prstGeom>
-          <a:noFill/>
-          <a:ln/>
-        </p:spPr>
-        <p:txBody>
-          <a:bodyPr wrap="square" lIns="0" tIns="0" rIns="0" bIns="0" rtlCol="0" anchor="ctr"/>
-          <a:lstStyle/>
-          <a:p>
-            <a:pPr indent="0" marL="0">
-              <a:lnSpc>
-                <a:spcPct val="120000"/>
-              </a:lnSpc>
-              <a:buNone/>
-            </a:pPr>
-            <a:r>
-              <a:rPr lang="en-US" sz="1400" b="1" dirty="0">
-                <a:solidFill>
-                  <a:srgbClr val="10161F"/>
-                </a:solidFill>
-                <a:latin typeface="Pretendard" pitchFamily="34" charset="0"/>
-                <a:ea typeface="Pretendard" pitchFamily="34" charset="-122"/>
-                <a:cs typeface="Pretendard" pitchFamily="34" charset="-120"/>
-              </a:rPr>
-              <a:t>철근콘크리트구조</a:t>
-            </a:r>
-            <a:endParaRPr lang="en-US" sz="1400" dirty="0"/>
-          </a:p>
-        </p:txBody>
-      </p:sp>
-      <p:sp>
-        <p:nvSpPr>
-          <p:cNvPr id="30" name="Shape 28"/>
-          <p:cNvSpPr/>
-          <p:nvPr/>
-        </p:nvSpPr>
-        <p:spPr>
-          <a:xfrm>
-            <a:off x="566928" y="4864608"/>
-            <a:ext cx="6858000" cy="0"/>
-          </a:xfrm>
-          <a:prstGeom prst="line">
-            <a:avLst/>
-          </a:prstGeom>
-          <a:noFill/>
-          <a:ln w="3810">
-            <a:solidFill>
-              <a:srgbClr val="CBD5E0"/>
-            </a:solidFill>
-            <a:prstDash val="solid"/>
-          </a:ln>
-        </p:spPr>
-      </p:sp>
-      <p:sp>
-        <p:nvSpPr>
-          <p:cNvPr id="31" name="Text 29"/>
-          <p:cNvSpPr/>
-          <p:nvPr/>
-        </p:nvSpPr>
-        <p:spPr>
-          <a:xfrm>
-            <a:off x="566928" y="4864608"/>
-            <a:ext cx="2606040" cy="402336"/>
-          </a:xfrm>
-          <a:prstGeom prst="rect">
-            <a:avLst/>
-          </a:prstGeom>
-          <a:noFill/>
-          <a:ln/>
-        </p:spPr>
-        <p:txBody>
-          <a:bodyPr wrap="square" lIns="0" tIns="0" rIns="0" bIns="0" rtlCol="0" anchor="ctr"/>
-          <a:lstStyle/>
-          <a:p>
-            <a:pPr indent="0" marL="0">
-              <a:lnSpc>
-                <a:spcPct val="120000"/>
-              </a:lnSpc>
-              <a:buNone/>
-            </a:pPr>
-            <a:r>
-              <a:rPr lang="en-US" sz="1400" dirty="0">
-                <a:solidFill>
-                  <a:srgbClr val="718096"/>
-                </a:solidFill>
-                <a:latin typeface="Pretendard" pitchFamily="34" charset="0"/>
-                <a:ea typeface="Pretendard" pitchFamily="34" charset="-122"/>
-                <a:cs typeface="Pretendard" pitchFamily="34" charset="-120"/>
-              </a:rPr>
-              <a:t>매매 희망가</a:t>
-            </a:r>
-            <a:endParaRPr lang="en-US" sz="1400" dirty="0"/>
-          </a:p>
-        </p:txBody>
-      </p:sp>
-      <p:sp>
-        <p:nvSpPr>
-          <p:cNvPr id="32" name="Text 30"/>
-          <p:cNvSpPr/>
-          <p:nvPr/>
-        </p:nvSpPr>
-        <p:spPr>
-          <a:xfrm>
-            <a:off x="3172968" y="4864608"/>
-            <a:ext cx="4251960" cy="402336"/>
-          </a:xfrm>
-          <a:prstGeom prst="rect">
-            <a:avLst/>
-          </a:prstGeom>
-          <a:noFill/>
-          <a:ln/>
-        </p:spPr>
-        <p:txBody>
-          <a:bodyPr wrap="square" lIns="0" tIns="0" rIns="0" bIns="0" rtlCol="0" anchor="ctr"/>
-          <a:lstStyle/>
-          <a:p>
-            <a:pPr indent="0" marL="0">
-              <a:lnSpc>
-                <a:spcPct val="120000"/>
-              </a:lnSpc>
-              <a:buNone/>
-            </a:pPr>
-            <a:r>
-              <a:rPr lang="en-US" sz="1400" b="1" dirty="0">
-                <a:solidFill>
-                  <a:srgbClr val="10161F"/>
-                </a:solidFill>
-                <a:latin typeface="Pretendard" pitchFamily="34" charset="0"/>
-                <a:ea typeface="Pretendard" pitchFamily="34" charset="-122"/>
-                <a:cs typeface="Pretendard" pitchFamily="34" charset="-120"/>
-              </a:rPr>
-              <a:t>145억</a:t>
-            </a:r>
-            <a:endParaRPr lang="en-US" sz="1400" dirty="0"/>
-          </a:p>
-        </p:txBody>
-      </p:sp>
-      <p:sp>
-        <p:nvSpPr>
-          <p:cNvPr id="33" name="Shape 31"/>
           <p:cNvSpPr/>
           <p:nvPr/>
         </p:nvSpPr>
@@ -6717,49 +5822,49 @@
       </p:sp>
       <p:sp>
         <p:nvSpPr>
-          <p:cNvPr id="34" name="Shape 32"/>
+          <p:cNvPr id="10" name="Shape 8"/>
           <p:cNvSpPr/>
           <p:nvPr/>
         </p:nvSpPr>
         <p:spPr>
           <a:xfrm>
             <a:off x="7784287" y="1645920"/>
-            <a:ext cx="3840480" cy="1645920"/>
+            <a:ext cx="3840480" cy="2103120"/>
           </a:xfrm>
           <a:prstGeom prst="roundRect">
             <a:avLst>
-              <a:gd name="adj" fmla="val 3333"/>
+              <a:gd name="adj" fmla="val 2609"/>
             </a:avLst>
           </a:prstGeom>
           <a:solidFill>
-            <a:srgbClr val="BEE3F8"/>
+            <a:srgbClr val="F3EBDA"/>
           </a:solidFill>
           <a:ln/>
         </p:spPr>
       </p:sp>
       <p:sp>
         <p:nvSpPr>
-          <p:cNvPr id="35" name="Shape 33"/>
+          <p:cNvPr id="11" name="Shape 9"/>
           <p:cNvSpPr/>
           <p:nvPr/>
         </p:nvSpPr>
         <p:spPr>
           <a:xfrm>
             <a:off x="7784287" y="1700784"/>
-            <a:ext cx="36576" cy="1536192"/>
+            <a:ext cx="36576" cy="1993392"/>
           </a:xfrm>
           <a:prstGeom prst="rect">
             <a:avLst/>
           </a:prstGeom>
           <a:solidFill>
-            <a:srgbClr val="2B6CB0"/>
+            <a:srgbClr val="977024"/>
           </a:solidFill>
           <a:ln/>
         </p:spPr>
       </p:sp>
       <p:sp>
         <p:nvSpPr>
-          <p:cNvPr id="36" name="Text 34"/>
+          <p:cNvPr id="12" name="Text 10"/>
           <p:cNvSpPr/>
           <p:nvPr/>
         </p:nvSpPr>
@@ -6787,14 +5892,14 @@
       </p:sp>
       <p:sp>
         <p:nvSpPr>
-          <p:cNvPr id="37" name="Text 35"/>
+          <p:cNvPr id="13" name="Text 11"/>
           <p:cNvSpPr/>
           <p:nvPr/>
         </p:nvSpPr>
         <p:spPr>
           <a:xfrm>
             <a:off x="7967167" y="1975104"/>
-            <a:ext cx="3511296" cy="1243584"/>
+            <a:ext cx="3511296" cy="1700784"/>
           </a:xfrm>
           <a:prstGeom prst="rect">
             <a:avLst/>
@@ -6821,7 +5926,7 @@
                 <a:ea typeface="Pretendard" pitchFamily="34" charset="-122"/>
                 <a:cs typeface="Pretendard" pitchFamily="34" charset="-120"/>
               </a:rPr>
-              <a:t>본 매물은 영등포권역 입지의 안정적 운영 자산입니다.</a:t>
+              <a:t>{"ok":true,"mocked":true,"extractedFields":{"area_signal":"역삼","asset_type":"오피스빌딩","price_band":"300억","size_signal":"3</a:t>
             </a:r>
             <a:endParaRPr lang="en-US" sz="930" dirty="0"/>
           </a:p>
@@ -6829,7 +5934,7 @@
       </p:sp>
       <p:sp>
         <p:nvSpPr>
-          <p:cNvPr id="38" name="Text 36"/>
+          <p:cNvPr id="14" name="Text 12"/>
           <p:cNvSpPr/>
           <p:nvPr/>
         </p:nvSpPr>
@@ -6868,7 +5973,7 @@
       </p:sp>
       <p:sp>
         <p:nvSpPr>
-          <p:cNvPr id="39" name="Text 37"/>
+          <p:cNvPr id="15" name="Text 13"/>
           <p:cNvSpPr/>
           <p:nvPr/>
         </p:nvSpPr>
@@ -7115,14 +6220,56 @@
       </p:sp>
       <p:sp>
         <p:nvSpPr>
-          <p:cNvPr id="7" name="Text 5"/>
+          <p:cNvPr id="7" name="Shape 5"/>
           <p:cNvSpPr/>
           <p:nvPr/>
         </p:nvSpPr>
         <p:spPr>
           <a:xfrm>
             <a:off x="566928" y="1645920"/>
-            <a:ext cx="2606040" cy="402336"/>
+            <a:ext cx="6858000" cy="1828800"/>
+          </a:xfrm>
+          <a:prstGeom prst="roundRect">
+            <a:avLst>
+              <a:gd name="adj" fmla="val 3000"/>
+            </a:avLst>
+          </a:prstGeom>
+          <a:solidFill>
+            <a:srgbClr val="BEE3F8"/>
+          </a:solidFill>
+          <a:ln/>
+        </p:spPr>
+      </p:sp>
+      <p:sp>
+        <p:nvSpPr>
+          <p:cNvPr id="8" name="Shape 6"/>
+          <p:cNvSpPr/>
+          <p:nvPr/>
+        </p:nvSpPr>
+        <p:spPr>
+          <a:xfrm>
+            <a:off x="566928" y="1700784"/>
+            <a:ext cx="36576" cy="1719072"/>
+          </a:xfrm>
+          <a:prstGeom prst="rect">
+            <a:avLst/>
+          </a:prstGeom>
+          <a:solidFill>
+            <a:srgbClr val="2B6CB0"/>
+          </a:solidFill>
+          <a:ln/>
+        </p:spPr>
+      </p:sp>
+      <p:sp>
+        <p:nvSpPr>
+          <p:cNvPr id="9" name="Text 7"/>
+          <p:cNvSpPr/>
+          <p:nvPr/>
+        </p:nvSpPr>
+        <p:spPr>
+          <a:xfrm>
+            <a:off x="749808" y="1755648"/>
+            <a:ext cx="6528816" cy="201168"/>
           </a:xfrm>
           <a:prstGeom prst="rect">
             <a:avLst/>
@@ -7135,55 +6282,74 @@
           <a:lstStyle/>
           <a:p>
             <a:pPr indent="0" marL="0">
+              <a:buNone/>
+            </a:pPr>
+            <a:r>
+              <a:rPr lang="en-US" sz="1050" b="1" dirty="0">
+                <a:solidFill>
+                  <a:srgbClr val="2B6CB0"/>
+                </a:solidFill>
+                <a:latin typeface="Pretendard" pitchFamily="34" charset="0"/>
+                <a:ea typeface="Pretendard" pitchFamily="34" charset="-122"/>
+                <a:cs typeface="Pretendard" pitchFamily="34" charset="-120"/>
+              </a:rPr>
+              <a:t>건축물 물리 스펙 요약</a:t>
+            </a:r>
+            <a:endParaRPr lang="en-US" sz="1050" dirty="0"/>
+          </a:p>
+        </p:txBody>
+      </p:sp>
+      <p:sp>
+        <p:nvSpPr>
+          <p:cNvPr id="10" name="Text 8"/>
+          <p:cNvSpPr/>
+          <p:nvPr/>
+        </p:nvSpPr>
+        <p:spPr>
+          <a:xfrm>
+            <a:off x="749808" y="1975104"/>
+            <a:ext cx="6528816" cy="1426464"/>
+          </a:xfrm>
+          <a:prstGeom prst="rect">
+            <a:avLst/>
+          </a:prstGeom>
+          <a:noFill/>
+          <a:ln/>
+        </p:spPr>
+        <p:txBody>
+          <a:bodyPr wrap="square" lIns="0" tIns="0" rIns="0" bIns="0" rtlCol="0" anchor="t"/>
+          <a:lstStyle/>
+          <a:p>
+            <a:pPr marL="342900" indent="-342900">
               <a:lnSpc>
                 <a:spcPct val="120000"/>
               </a:lnSpc>
-              <a:buNone/>
-            </a:pPr>
-            <a:r>
-              <a:rPr lang="en-US" sz="1400" dirty="0">
-                <a:solidFill>
-                  <a:srgbClr val="718096"/>
-                </a:solidFill>
-                <a:latin typeface="Pretendard" pitchFamily="34" charset="0"/>
-                <a:ea typeface="Pretendard" pitchFamily="34" charset="-122"/>
-                <a:cs typeface="Pretendard" pitchFamily="34" charset="-120"/>
-              </a:rPr>
-              <a:t>연면적</a:t>
-            </a:r>
-            <a:endParaRPr lang="en-US" sz="1400" dirty="0"/>
-          </a:p>
-        </p:txBody>
-      </p:sp>
-      <p:sp>
-        <p:nvSpPr>
-          <p:cNvPr id="8" name="Text 6"/>
-          <p:cNvSpPr/>
-          <p:nvPr/>
-        </p:nvSpPr>
-        <p:spPr>
-          <a:xfrm>
-            <a:off x="3172968" y="1645920"/>
-            <a:ext cx="4251960" cy="402336"/>
-          </a:xfrm>
-          <a:prstGeom prst="rect">
-            <a:avLst/>
-          </a:prstGeom>
-          <a:noFill/>
-          <a:ln/>
-        </p:spPr>
-        <p:txBody>
-          <a:bodyPr wrap="square" lIns="0" tIns="0" rIns="0" bIns="0" rtlCol="0" anchor="ctr"/>
-          <a:lstStyle/>
-          <a:p>
-            <a:pPr indent="0" marL="0">
+              <a:buSzPct val="100000"/>
+              <a:buChar char="•"/>
+            </a:pPr>
+            <a:r>
+              <a:rPr lang="en-US" sz="930" dirty="0">
+                <a:solidFill>
+                  <a:srgbClr val="10161F"/>
+                </a:solidFill>
+                <a:latin typeface="Pretendard" pitchFamily="34" charset="0"/>
+                <a:ea typeface="Pretendard" pitchFamily="34" charset="-122"/>
+                <a:cs typeface="Pretendard" pitchFamily="34" charset="-120"/>
+              </a:rPr>
+              <a:t>상세 건물 제원은 실사 자료를 참조하시기 바랍니다</a:t>
+            </a:r>
+            <a:endParaRPr lang="en-US" sz="930" dirty="0"/>
+          </a:p>
+          <a:p>
+            <a:pPr marL="342900" indent="-342900">
               <a:lnSpc>
                 <a:spcPct val="120000"/>
               </a:lnSpc>
-              <a:buNone/>
-            </a:pPr>
-            <a:r>
-              <a:rPr lang="en-US" sz="1400" b="1" dirty="0">
+              <a:buSzPct val="100000"/>
+              <a:buChar char="•"/>
+            </a:pPr>
+            <a:r>
+              <a:rPr lang="en-US" sz="930" dirty="0">
                 <a:solidFill>
                   <a:srgbClr val="10161F"/>
                 </a:solidFill>
@@ -7191,106 +6357,20 @@
                 <a:ea typeface="Pretendard" pitchFamily="34" charset="-122"/>
                 <a:cs typeface="Pretendard" pitchFamily="34" charset="-120"/>
               </a:rPr>
-              <a:t>5,000㎡ (약 1513평(약 5001.7㎡))</a:t>
-            </a:r>
-            <a:endParaRPr lang="en-US" sz="1400" dirty="0"/>
-          </a:p>
-        </p:txBody>
-      </p:sp>
-      <p:sp>
-        <p:nvSpPr>
-          <p:cNvPr id="9" name="Shape 7"/>
-          <p:cNvSpPr/>
-          <p:nvPr/>
-        </p:nvSpPr>
-        <p:spPr>
-          <a:xfrm>
-            <a:off x="566928" y="2048256"/>
-            <a:ext cx="6858000" cy="0"/>
-          </a:xfrm>
-          <a:prstGeom prst="line">
-            <a:avLst/>
-          </a:prstGeom>
-          <a:noFill/>
-          <a:ln w="3810">
-            <a:solidFill>
-              <a:srgbClr val="CBD5E0"/>
-            </a:solidFill>
-            <a:prstDash val="solid"/>
-          </a:ln>
-        </p:spPr>
-      </p:sp>
-      <p:sp>
-        <p:nvSpPr>
-          <p:cNvPr id="10" name="Text 8"/>
-          <p:cNvSpPr/>
-          <p:nvPr/>
-        </p:nvSpPr>
-        <p:spPr>
-          <a:xfrm>
-            <a:off x="566928" y="2048256"/>
-            <a:ext cx="2606040" cy="402336"/>
-          </a:xfrm>
-          <a:prstGeom prst="rect">
-            <a:avLst/>
-          </a:prstGeom>
-          <a:noFill/>
-          <a:ln/>
-        </p:spPr>
-        <p:txBody>
-          <a:bodyPr wrap="square" lIns="0" tIns="0" rIns="0" bIns="0" rtlCol="0" anchor="ctr"/>
-          <a:lstStyle/>
-          <a:p>
-            <a:pPr indent="0" marL="0">
+              <a:t>건물 현황 및 규모는 첨부 대장을 기준으로 합니다</a:t>
+            </a:r>
+            <a:endParaRPr lang="en-US" sz="930" dirty="0"/>
+          </a:p>
+          <a:p>
+            <a:pPr marL="342900" indent="-342900">
               <a:lnSpc>
                 <a:spcPct val="120000"/>
               </a:lnSpc>
-              <a:buNone/>
-            </a:pPr>
-            <a:r>
-              <a:rPr lang="en-US" sz="1400" dirty="0">
-                <a:solidFill>
-                  <a:srgbClr val="718096"/>
-                </a:solidFill>
-                <a:latin typeface="Pretendard" pitchFamily="34" charset="0"/>
-                <a:ea typeface="Pretendard" pitchFamily="34" charset="-122"/>
-                <a:cs typeface="Pretendard" pitchFamily="34" charset="-120"/>
-              </a:rPr>
-              <a:t>대지면적</a:t>
-            </a:r>
-            <a:endParaRPr lang="en-US" sz="1400" dirty="0"/>
-          </a:p>
-        </p:txBody>
-      </p:sp>
-      <p:sp>
-        <p:nvSpPr>
-          <p:cNvPr id="11" name="Text 9"/>
-          <p:cNvSpPr/>
-          <p:nvPr/>
-        </p:nvSpPr>
-        <p:spPr>
-          <a:xfrm>
-            <a:off x="3172968" y="2048256"/>
-            <a:ext cx="4251960" cy="402336"/>
-          </a:xfrm>
-          <a:prstGeom prst="rect">
-            <a:avLst/>
-          </a:prstGeom>
-          <a:noFill/>
-          <a:ln/>
-        </p:spPr>
-        <p:txBody>
-          <a:bodyPr wrap="square" lIns="0" tIns="0" rIns="0" bIns="0" rtlCol="0" anchor="ctr"/>
-          <a:lstStyle/>
-          <a:p>
-            <a:pPr indent="0" marL="0">
-              <a:lnSpc>
-                <a:spcPct val="120000"/>
-              </a:lnSpc>
-              <a:buNone/>
-            </a:pPr>
-            <a:r>
-              <a:rPr lang="en-US" sz="1400" b="1" dirty="0">
+              <a:buSzPct val="100000"/>
+              <a:buChar char="•"/>
+            </a:pPr>
+            <a:r>
+              <a:rPr lang="en-US" sz="930" dirty="0">
                 <a:solidFill>
                   <a:srgbClr val="10161F"/>
                 </a:solidFill>
@@ -7298,122 +6378,15 @@
                 <a:ea typeface="Pretendard" pitchFamily="34" charset="-122"/>
                 <a:cs typeface="Pretendard" pitchFamily="34" charset="-120"/>
               </a:rPr>
-              <a:t>1,000㎡ (약 303평(약 1001.7㎡))</a:t>
-            </a:r>
-            <a:endParaRPr lang="en-US" sz="1400" dirty="0"/>
-          </a:p>
-        </p:txBody>
-      </p:sp>
-      <p:sp>
-        <p:nvSpPr>
-          <p:cNvPr id="12" name="Shape 10"/>
-          <p:cNvSpPr/>
-          <p:nvPr/>
-        </p:nvSpPr>
-        <p:spPr>
-          <a:xfrm>
-            <a:off x="566928" y="2450592"/>
-            <a:ext cx="6858000" cy="0"/>
-          </a:xfrm>
-          <a:prstGeom prst="line">
-            <a:avLst/>
-          </a:prstGeom>
-          <a:noFill/>
-          <a:ln w="3810">
-            <a:solidFill>
-              <a:srgbClr val="CBD5E0"/>
-            </a:solidFill>
-            <a:prstDash val="solid"/>
-          </a:ln>
-        </p:spPr>
-      </p:sp>
-      <p:sp>
-        <p:nvSpPr>
-          <p:cNvPr id="13" name="Text 11"/>
-          <p:cNvSpPr/>
-          <p:nvPr/>
-        </p:nvSpPr>
-        <p:spPr>
-          <a:xfrm>
-            <a:off x="566928" y="2450592"/>
-            <a:ext cx="2606040" cy="402336"/>
-          </a:xfrm>
-          <a:prstGeom prst="rect">
-            <a:avLst/>
-          </a:prstGeom>
-          <a:noFill/>
-          <a:ln/>
-        </p:spPr>
-        <p:txBody>
-          <a:bodyPr wrap="square" lIns="0" tIns="0" rIns="0" bIns="0" rtlCol="0" anchor="ctr"/>
-          <a:lstStyle/>
-          <a:p>
-            <a:pPr indent="0" marL="0">
-              <a:lnSpc>
-                <a:spcPct val="120000"/>
-              </a:lnSpc>
-              <a:buNone/>
-            </a:pPr>
-            <a:r>
-              <a:rPr lang="en-US" sz="1400" dirty="0">
-                <a:solidFill>
-                  <a:srgbClr val="718096"/>
-                </a:solidFill>
-                <a:latin typeface="Pretendard" pitchFamily="34" charset="0"/>
-                <a:ea typeface="Pretendard" pitchFamily="34" charset="-122"/>
-                <a:cs typeface="Pretendard" pitchFamily="34" charset="-120"/>
-              </a:rPr>
-              <a:t>용도지역</a:t>
-            </a:r>
-            <a:endParaRPr lang="en-US" sz="1400" dirty="0"/>
-          </a:p>
-        </p:txBody>
-      </p:sp>
-      <p:sp>
-        <p:nvSpPr>
-          <p:cNvPr id="14" name="Text 12"/>
-          <p:cNvSpPr/>
-          <p:nvPr/>
-        </p:nvSpPr>
-        <p:spPr>
-          <a:xfrm>
-            <a:off x="3172968" y="2450592"/>
-            <a:ext cx="4251960" cy="402336"/>
-          </a:xfrm>
-          <a:prstGeom prst="rect">
-            <a:avLst/>
-          </a:prstGeom>
-          <a:noFill/>
-          <a:ln/>
-        </p:spPr>
-        <p:txBody>
-          <a:bodyPr wrap="square" lIns="0" tIns="0" rIns="0" bIns="0" rtlCol="0" anchor="ctr"/>
-          <a:lstStyle/>
-          <a:p>
-            <a:pPr indent="0" marL="0">
-              <a:lnSpc>
-                <a:spcPct val="120000"/>
-              </a:lnSpc>
-              <a:buNone/>
-            </a:pPr>
-            <a:r>
-              <a:rPr lang="en-US" sz="1400" b="1" dirty="0">
-                <a:solidFill>
-                  <a:srgbClr val="10161F"/>
-                </a:solidFill>
-                <a:latin typeface="Pretendard" pitchFamily="34" charset="0"/>
-                <a:ea typeface="Pretendard" pitchFamily="34" charset="-122"/>
-                <a:cs typeface="Pretendard" pitchFamily="34" charset="-120"/>
-              </a:rPr>
-              <a:t>일반상업지역</a:t>
-            </a:r>
-            <a:endParaRPr lang="en-US" sz="1400" dirty="0"/>
-          </a:p>
-        </p:txBody>
-      </p:sp>
-      <p:sp>
-        <p:nvSpPr>
-          <p:cNvPr id="15" name="Shape 13"/>
+              <a:t>건물 상태 및 설비 현황은 실사 보고서를 참조하십시오</a:t>
+            </a:r>
+            <a:endParaRPr lang="en-US" sz="930" dirty="0"/>
+          </a:p>
+        </p:txBody>
+      </p:sp>
+      <p:sp>
+        <p:nvSpPr>
+          <p:cNvPr id="11" name="Shape 9"/>
           <p:cNvSpPr/>
           <p:nvPr/>
         </p:nvSpPr>
@@ -7436,7 +6409,7 @@
       </p:sp>
       <p:sp>
         <p:nvSpPr>
-          <p:cNvPr id="16" name="Shape 14"/>
+          <p:cNvPr id="12" name="Shape 10"/>
           <p:cNvSpPr/>
           <p:nvPr/>
         </p:nvSpPr>
@@ -7458,7 +6431,7 @@
       </p:sp>
       <p:sp>
         <p:nvSpPr>
-          <p:cNvPr id="17" name="Shape 15"/>
+          <p:cNvPr id="13" name="Shape 11"/>
           <p:cNvSpPr/>
           <p:nvPr/>
         </p:nvSpPr>
@@ -7478,7 +6451,7 @@
       </p:sp>
       <p:sp>
         <p:nvSpPr>
-          <p:cNvPr id="18" name="Text 16"/>
+          <p:cNvPr id="14" name="Text 12"/>
           <p:cNvSpPr/>
           <p:nvPr/>
         </p:nvSpPr>
@@ -7517,7 +6490,7 @@
       </p:sp>
       <p:sp>
         <p:nvSpPr>
-          <p:cNvPr id="19" name="Text 17"/>
+          <p:cNvPr id="15" name="Text 13"/>
           <p:cNvSpPr/>
           <p:nvPr/>
         </p:nvSpPr>
@@ -7602,7 +6575,7 @@
       </p:sp>
       <p:sp>
         <p:nvSpPr>
-          <p:cNvPr id="20" name="Shape 18"/>
+          <p:cNvPr id="16" name="Shape 14"/>
           <p:cNvSpPr/>
           <p:nvPr/>
         </p:nvSpPr>
@@ -7624,7 +6597,7 @@
       </p:sp>
       <p:sp>
         <p:nvSpPr>
-          <p:cNvPr id="21" name="Shape 19"/>
+          <p:cNvPr id="17" name="Shape 15"/>
           <p:cNvSpPr/>
           <p:nvPr/>
         </p:nvSpPr>
@@ -7644,7 +6617,7 @@
       </p:sp>
       <p:sp>
         <p:nvSpPr>
-          <p:cNvPr id="22" name="Text 20"/>
+          <p:cNvPr id="18" name="Text 16"/>
           <p:cNvSpPr/>
           <p:nvPr/>
         </p:nvSpPr>
@@ -7683,7 +6656,7 @@
       </p:sp>
       <p:sp>
         <p:nvSpPr>
-          <p:cNvPr id="23" name="Text 21"/>
+          <p:cNvPr id="19" name="Text 17"/>
           <p:cNvSpPr/>
           <p:nvPr/>
         </p:nvSpPr>
@@ -7768,7 +6741,7 @@
       </p:sp>
       <p:sp>
         <p:nvSpPr>
-          <p:cNvPr id="24" name="Text 22"/>
+          <p:cNvPr id="20" name="Text 18"/>
           <p:cNvSpPr/>
           <p:nvPr/>
         </p:nvSpPr>
@@ -7807,7 +6780,7 @@
       </p:sp>
       <p:sp>
         <p:nvSpPr>
-          <p:cNvPr id="25" name="Text 23"/>
+          <p:cNvPr id="21" name="Text 19"/>
           <p:cNvSpPr/>
           <p:nvPr/>
         </p:nvSpPr>
@@ -8015,52 +6988,13 @@
       </p:sp>
       <p:sp>
         <p:nvSpPr>
-          <p:cNvPr id="6" name="Text 4"/>
+          <p:cNvPr id="6" name="Shape 4"/>
           <p:cNvSpPr/>
           <p:nvPr/>
         </p:nvSpPr>
         <p:spPr>
           <a:xfrm>
             <a:off x="566928" y="1325880"/>
-            <a:ext cx="11057839" cy="237744"/>
-          </a:xfrm>
-          <a:prstGeom prst="rect">
-            <a:avLst/>
-          </a:prstGeom>
-          <a:noFill/>
-          <a:ln/>
-        </p:spPr>
-        <p:txBody>
-          <a:bodyPr wrap="square" lIns="0" tIns="0" rIns="0" bIns="0" rtlCol="0" anchor="ctr"/>
-          <a:lstStyle/>
-          <a:p>
-            <a:pPr indent="0" marL="0">
-              <a:buNone/>
-            </a:pPr>
-            <a:r>
-              <a:rPr lang="en-US" sz="1100" b="1" dirty="0">
-                <a:solidFill>
-                  <a:srgbClr val="10161F"/>
-                </a:solidFill>
-                <a:latin typeface="Pretendard" pitchFamily="34" charset="0"/>
-                <a:ea typeface="Pretendard" pitchFamily="34" charset="-122"/>
-                <a:cs typeface="Pretendard" pitchFamily="34" charset="-120"/>
-              </a:rPr>
-              <a:t>신축 사업수지 및 개발 타당성 분석</a:t>
-            </a:r>
-            <a:endParaRPr lang="en-US" sz="1100" dirty="0"/>
-          </a:p>
-        </p:txBody>
-      </p:sp>
-      <p:sp>
-        <p:nvSpPr>
-          <p:cNvPr id="7" name="Shape 5"/>
-          <p:cNvSpPr/>
-          <p:nvPr/>
-        </p:nvSpPr>
-        <p:spPr>
-          <a:xfrm>
-            <a:off x="566928" y="1737360"/>
             <a:ext cx="11057839" cy="0"/>
           </a:xfrm>
           <a:prstGeom prst="line">
@@ -8077,598 +7011,14 @@
       </p:sp>
       <p:sp>
         <p:nvSpPr>
-          <p:cNvPr id="8" name="Shape 6"/>
-          <p:cNvSpPr/>
-          <p:nvPr/>
-        </p:nvSpPr>
-        <p:spPr>
-          <a:xfrm>
-            <a:off x="566928" y="1965960"/>
-            <a:ext cx="3576218" cy="1188720"/>
-          </a:xfrm>
-          <a:prstGeom prst="roundRect">
-            <a:avLst>
-              <a:gd name="adj" fmla="val 4615"/>
-            </a:avLst>
-          </a:prstGeom>
-          <a:solidFill>
-            <a:srgbClr val="F7FAFC"/>
-          </a:solidFill>
-          <a:ln w="6350">
-            <a:solidFill>
-              <a:srgbClr val="CBD5E0"/>
-            </a:solidFill>
-            <a:prstDash val="solid"/>
-          </a:ln>
-        </p:spPr>
-      </p:sp>
-      <p:sp>
-        <p:nvSpPr>
-          <p:cNvPr id="9" name="Text 7"/>
-          <p:cNvSpPr/>
-          <p:nvPr/>
-        </p:nvSpPr>
-        <p:spPr>
-          <a:xfrm>
-            <a:off x="731520" y="2093976"/>
-            <a:ext cx="3247034" cy="201168"/>
-          </a:xfrm>
-          <a:prstGeom prst="rect">
-            <a:avLst/>
-          </a:prstGeom>
-          <a:noFill/>
-          <a:ln/>
-        </p:spPr>
-        <p:txBody>
-          <a:bodyPr wrap="square" lIns="0" tIns="0" rIns="0" bIns="0" rtlCol="0" anchor="ctr"/>
-          <a:lstStyle/>
-          <a:p>
-            <a:pPr indent="0" marL="0">
-              <a:buNone/>
-            </a:pPr>
-            <a:r>
-              <a:rPr lang="en-US" sz="950" dirty="0">
-                <a:solidFill>
-                  <a:srgbClr val="718096"/>
-                </a:solidFill>
-                <a:latin typeface="Pretendard" pitchFamily="34" charset="0"/>
-                <a:ea typeface="Pretendard" pitchFamily="34" charset="-122"/>
-                <a:cs typeface="Pretendard" pitchFamily="34" charset="-120"/>
-              </a:rPr>
-              <a:t>토지 매입비</a:t>
-            </a:r>
-            <a:endParaRPr lang="en-US" sz="950" dirty="0"/>
-          </a:p>
-        </p:txBody>
-      </p:sp>
-      <p:sp>
-        <p:nvSpPr>
-          <p:cNvPr id="10" name="Text 8"/>
-          <p:cNvSpPr/>
-          <p:nvPr/>
-        </p:nvSpPr>
-        <p:spPr>
-          <a:xfrm>
-            <a:off x="731520" y="2276856"/>
-            <a:ext cx="3247034" cy="402336"/>
-          </a:xfrm>
-          <a:prstGeom prst="rect">
-            <a:avLst/>
-          </a:prstGeom>
-          <a:noFill/>
-          <a:ln/>
-        </p:spPr>
-        <p:txBody>
-          <a:bodyPr wrap="square" lIns="0" tIns="0" rIns="0" bIns="0" rtlCol="0" anchor="ctr">
-            <a:normAutofit/>
-          </a:bodyPr>
-          <a:lstStyle/>
-          <a:p>
-            <a:pPr indent="0" marL="0">
-              <a:buNone/>
-            </a:pPr>
-            <a:r>
-              <a:rPr lang="en-US" sz="2200" b="1" dirty="0">
-                <a:solidFill>
-                  <a:srgbClr val="10161F"/>
-                </a:solidFill>
-                <a:latin typeface="Pretendard" pitchFamily="34" charset="0"/>
-                <a:ea typeface="Pretendard" pitchFamily="34" charset="-122"/>
-                <a:cs typeface="Pretendard" pitchFamily="34" charset="-120"/>
-              </a:rPr>
-              <a:t>희망가 기준</a:t>
-            </a:r>
-            <a:endParaRPr lang="en-US" sz="2200" dirty="0"/>
-          </a:p>
-        </p:txBody>
-      </p:sp>
-      <p:sp>
-        <p:nvSpPr>
-          <p:cNvPr id="11" name="Text 9"/>
-          <p:cNvSpPr/>
-          <p:nvPr/>
-        </p:nvSpPr>
-        <p:spPr>
-          <a:xfrm>
-            <a:off x="731520" y="2642616"/>
-            <a:ext cx="3247034" cy="164592"/>
-          </a:xfrm>
-          <a:prstGeom prst="rect">
-            <a:avLst/>
-          </a:prstGeom>
-          <a:noFill/>
-          <a:ln/>
-        </p:spPr>
-        <p:txBody>
-          <a:bodyPr wrap="square" lIns="0" tIns="0" rIns="0" bIns="0" rtlCol="0" anchor="ctr"/>
-          <a:lstStyle/>
-          <a:p>
-            <a:pPr indent="0" marL="0">
-              <a:buNone/>
-            </a:pPr>
-            <a:r>
-              <a:rPr lang="en-US" sz="880" dirty="0">
-                <a:solidFill>
-                  <a:srgbClr val="718096"/>
-                </a:solidFill>
-                <a:latin typeface="Pretendard" pitchFamily="34" charset="0"/>
-                <a:ea typeface="Pretendard" pitchFamily="34" charset="-122"/>
-                <a:cs typeface="Pretendard" pitchFamily="34" charset="-120"/>
-              </a:rPr>
-              <a:t>사업비 내 비중 산출</a:t>
-            </a:r>
-            <a:endParaRPr lang="en-US" sz="880" dirty="0"/>
-          </a:p>
-        </p:txBody>
-      </p:sp>
-      <p:sp>
-        <p:nvSpPr>
-          <p:cNvPr id="12" name="Shape 10"/>
-          <p:cNvSpPr/>
-          <p:nvPr/>
-        </p:nvSpPr>
-        <p:spPr>
-          <a:xfrm>
-            <a:off x="4307738" y="1965960"/>
-            <a:ext cx="3576218" cy="1188720"/>
-          </a:xfrm>
-          <a:prstGeom prst="roundRect">
-            <a:avLst>
-              <a:gd name="adj" fmla="val 4615"/>
-            </a:avLst>
-          </a:prstGeom>
-          <a:solidFill>
-            <a:srgbClr val="F7FAFC"/>
-          </a:solidFill>
-          <a:ln w="6350">
-            <a:solidFill>
-              <a:srgbClr val="CBD5E0"/>
-            </a:solidFill>
-            <a:prstDash val="solid"/>
-          </a:ln>
-        </p:spPr>
-      </p:sp>
-      <p:sp>
-        <p:nvSpPr>
-          <p:cNvPr id="13" name="Text 11"/>
-          <p:cNvSpPr/>
-          <p:nvPr/>
-        </p:nvSpPr>
-        <p:spPr>
-          <a:xfrm>
-            <a:off x="4472330" y="2093976"/>
-            <a:ext cx="3247034" cy="201168"/>
-          </a:xfrm>
-          <a:prstGeom prst="rect">
-            <a:avLst/>
-          </a:prstGeom>
-          <a:noFill/>
-          <a:ln/>
-        </p:spPr>
-        <p:txBody>
-          <a:bodyPr wrap="square" lIns="0" tIns="0" rIns="0" bIns="0" rtlCol="0" anchor="ctr"/>
-          <a:lstStyle/>
-          <a:p>
-            <a:pPr indent="0" marL="0">
-              <a:buNone/>
-            </a:pPr>
-            <a:r>
-              <a:rPr lang="en-US" sz="950" dirty="0">
-                <a:solidFill>
-                  <a:srgbClr val="718096"/>
-                </a:solidFill>
-                <a:latin typeface="Pretendard" pitchFamily="34" charset="0"/>
-                <a:ea typeface="Pretendard" pitchFamily="34" charset="-122"/>
-                <a:cs typeface="Pretendard" pitchFamily="34" charset="-120"/>
-              </a:rPr>
-              <a:t>추정 신축 공사비</a:t>
-            </a:r>
-            <a:endParaRPr lang="en-US" sz="950" dirty="0"/>
-          </a:p>
-        </p:txBody>
-      </p:sp>
-      <p:sp>
-        <p:nvSpPr>
-          <p:cNvPr id="14" name="Text 12"/>
-          <p:cNvSpPr/>
-          <p:nvPr/>
-        </p:nvSpPr>
-        <p:spPr>
-          <a:xfrm>
-            <a:off x="4472330" y="2276856"/>
-            <a:ext cx="3247034" cy="402336"/>
-          </a:xfrm>
-          <a:prstGeom prst="rect">
-            <a:avLst/>
-          </a:prstGeom>
-          <a:noFill/>
-          <a:ln/>
-        </p:spPr>
-        <p:txBody>
-          <a:bodyPr wrap="square" lIns="0" tIns="0" rIns="0" bIns="0" rtlCol="0" anchor="ctr">
-            <a:normAutofit/>
-          </a:bodyPr>
-          <a:lstStyle/>
-          <a:p>
-            <a:pPr indent="0" marL="0">
-              <a:buNone/>
-            </a:pPr>
-            <a:r>
-              <a:rPr lang="en-US" sz="2200" b="1" dirty="0">
-                <a:solidFill>
-                  <a:srgbClr val="10161F"/>
-                </a:solidFill>
-                <a:latin typeface="Pretendard" pitchFamily="34" charset="0"/>
-                <a:ea typeface="Pretendard" pitchFamily="34" charset="-122"/>
-                <a:cs typeface="Pretendard" pitchFamily="34" charset="-120"/>
-              </a:rPr>
-              <a:t>평당 공사비 산정</a:t>
-            </a:r>
-            <a:endParaRPr lang="en-US" sz="2200" dirty="0"/>
-          </a:p>
-        </p:txBody>
-      </p:sp>
-      <p:sp>
-        <p:nvSpPr>
-          <p:cNvPr id="15" name="Text 13"/>
-          <p:cNvSpPr/>
-          <p:nvPr/>
-        </p:nvSpPr>
-        <p:spPr>
-          <a:xfrm>
-            <a:off x="4472330" y="2642616"/>
-            <a:ext cx="3247034" cy="164592"/>
-          </a:xfrm>
-          <a:prstGeom prst="rect">
-            <a:avLst/>
-          </a:prstGeom>
-          <a:noFill/>
-          <a:ln/>
-        </p:spPr>
-        <p:txBody>
-          <a:bodyPr wrap="square" lIns="0" tIns="0" rIns="0" bIns="0" rtlCol="0" anchor="ctr"/>
-          <a:lstStyle/>
-          <a:p>
-            <a:pPr indent="0" marL="0">
-              <a:buNone/>
-            </a:pPr>
-            <a:r>
-              <a:rPr lang="en-US" sz="880" dirty="0">
-                <a:solidFill>
-                  <a:srgbClr val="718096"/>
-                </a:solidFill>
-                <a:latin typeface="Pretendard" pitchFamily="34" charset="0"/>
-                <a:ea typeface="Pretendard" pitchFamily="34" charset="-122"/>
-                <a:cs typeface="Pretendard" pitchFamily="34" charset="-120"/>
-              </a:rPr>
-              <a:t>신축 연면적 기준</a:t>
-            </a:r>
-            <a:endParaRPr lang="en-US" sz="880" dirty="0"/>
-          </a:p>
-        </p:txBody>
-      </p:sp>
-      <p:sp>
-        <p:nvSpPr>
-          <p:cNvPr id="16" name="Shape 14"/>
-          <p:cNvSpPr/>
-          <p:nvPr/>
-        </p:nvSpPr>
-        <p:spPr>
-          <a:xfrm>
-            <a:off x="8048549" y="1965960"/>
-            <a:ext cx="3576218" cy="1188720"/>
-          </a:xfrm>
-          <a:prstGeom prst="roundRect">
-            <a:avLst>
-              <a:gd name="adj" fmla="val 4615"/>
-            </a:avLst>
-          </a:prstGeom>
-          <a:solidFill>
-            <a:srgbClr val="F7FAFC"/>
-          </a:solidFill>
-          <a:ln w="6350">
-            <a:solidFill>
-              <a:srgbClr val="CBD5E0"/>
-            </a:solidFill>
-            <a:prstDash val="solid"/>
-          </a:ln>
-        </p:spPr>
-      </p:sp>
-      <p:sp>
-        <p:nvSpPr>
-          <p:cNvPr id="17" name="Text 15"/>
-          <p:cNvSpPr/>
-          <p:nvPr/>
-        </p:nvSpPr>
-        <p:spPr>
-          <a:xfrm>
-            <a:off x="8213141" y="2093976"/>
-            <a:ext cx="3247034" cy="201168"/>
-          </a:xfrm>
-          <a:prstGeom prst="rect">
-            <a:avLst/>
-          </a:prstGeom>
-          <a:noFill/>
-          <a:ln/>
-        </p:spPr>
-        <p:txBody>
-          <a:bodyPr wrap="square" lIns="0" tIns="0" rIns="0" bIns="0" rtlCol="0" anchor="ctr"/>
-          <a:lstStyle/>
-          <a:p>
-            <a:pPr indent="0" marL="0">
-              <a:buNone/>
-            </a:pPr>
-            <a:r>
-              <a:rPr lang="en-US" sz="950" dirty="0">
-                <a:solidFill>
-                  <a:srgbClr val="718096"/>
-                </a:solidFill>
-                <a:latin typeface="Pretendard" pitchFamily="34" charset="0"/>
-                <a:ea typeface="Pretendard" pitchFamily="34" charset="-122"/>
-                <a:cs typeface="Pretendard" pitchFamily="34" charset="-120"/>
-              </a:rPr>
-              <a:t>예상 총 사업비</a:t>
-            </a:r>
-            <a:endParaRPr lang="en-US" sz="950" dirty="0"/>
-          </a:p>
-        </p:txBody>
-      </p:sp>
-      <p:sp>
-        <p:nvSpPr>
-          <p:cNvPr id="18" name="Text 16"/>
-          <p:cNvSpPr/>
-          <p:nvPr/>
-        </p:nvSpPr>
-        <p:spPr>
-          <a:xfrm>
-            <a:off x="8213141" y="2276856"/>
-            <a:ext cx="3247034" cy="402336"/>
-          </a:xfrm>
-          <a:prstGeom prst="rect">
-            <a:avLst/>
-          </a:prstGeom>
-          <a:noFill/>
-          <a:ln/>
-        </p:spPr>
-        <p:txBody>
-          <a:bodyPr wrap="square" lIns="0" tIns="0" rIns="0" bIns="0" rtlCol="0" anchor="ctr">
-            <a:normAutofit/>
-          </a:bodyPr>
-          <a:lstStyle/>
-          <a:p>
-            <a:pPr indent="0" marL="0">
-              <a:buNone/>
-            </a:pPr>
-            <a:r>
-              <a:rPr lang="en-US" sz="2200" b="1" dirty="0">
-                <a:solidFill>
-                  <a:srgbClr val="10161F"/>
-                </a:solidFill>
-                <a:latin typeface="Pretendard" pitchFamily="34" charset="0"/>
-                <a:ea typeface="Pretendard" pitchFamily="34" charset="-122"/>
-                <a:cs typeface="Pretendard" pitchFamily="34" charset="-120"/>
-              </a:rPr>
-              <a:t>토지비 + 공사비 + 금융/기타</a:t>
-            </a:r>
-            <a:endParaRPr lang="en-US" sz="2200" dirty="0"/>
-          </a:p>
-        </p:txBody>
-      </p:sp>
-      <p:sp>
-        <p:nvSpPr>
-          <p:cNvPr id="19" name="Text 17"/>
-          <p:cNvSpPr/>
-          <p:nvPr/>
-        </p:nvSpPr>
-        <p:spPr>
-          <a:xfrm>
-            <a:off x="8213141" y="2642616"/>
-            <a:ext cx="3247034" cy="164592"/>
-          </a:xfrm>
-          <a:prstGeom prst="rect">
-            <a:avLst/>
-          </a:prstGeom>
-          <a:noFill/>
-          <a:ln/>
-        </p:spPr>
-        <p:txBody>
-          <a:bodyPr wrap="square" lIns="0" tIns="0" rIns="0" bIns="0" rtlCol="0" anchor="ctr"/>
-          <a:lstStyle/>
-          <a:p>
-            <a:pPr indent="0" marL="0">
-              <a:buNone/>
-            </a:pPr>
-            <a:r>
-              <a:rPr lang="en-US" sz="880" dirty="0">
-                <a:solidFill>
-                  <a:srgbClr val="718096"/>
-                </a:solidFill>
-                <a:latin typeface="Pretendard" pitchFamily="34" charset="0"/>
-                <a:ea typeface="Pretendard" pitchFamily="34" charset="-122"/>
-                <a:cs typeface="Pretendard" pitchFamily="34" charset="-120"/>
-              </a:rPr>
-              <a:t>총 투자금</a:t>
-            </a:r>
-            <a:endParaRPr lang="en-US" sz="880" dirty="0"/>
-          </a:p>
-        </p:txBody>
-      </p:sp>
-      <p:sp>
-        <p:nvSpPr>
-          <p:cNvPr id="20" name="Shape 18"/>
-          <p:cNvSpPr/>
-          <p:nvPr/>
-        </p:nvSpPr>
-        <p:spPr>
-          <a:xfrm>
-            <a:off x="566928" y="3319272"/>
-            <a:ext cx="3576218" cy="1051560"/>
-          </a:xfrm>
-          <a:prstGeom prst="roundRect">
-            <a:avLst>
-              <a:gd name="adj" fmla="val 5217"/>
-            </a:avLst>
-          </a:prstGeom>
-          <a:solidFill>
-            <a:srgbClr val="F7FAFC"/>
-          </a:solidFill>
-          <a:ln w="6350">
-            <a:solidFill>
-              <a:srgbClr val="CBD5E0"/>
-            </a:solidFill>
-            <a:prstDash val="solid"/>
-          </a:ln>
-        </p:spPr>
-      </p:sp>
-      <p:sp>
-        <p:nvSpPr>
-          <p:cNvPr id="21" name="Text 19"/>
-          <p:cNvSpPr/>
-          <p:nvPr/>
-        </p:nvSpPr>
-        <p:spPr>
-          <a:xfrm>
-            <a:off x="731520" y="3447288"/>
-            <a:ext cx="3247034" cy="201168"/>
-          </a:xfrm>
-          <a:prstGeom prst="rect">
-            <a:avLst/>
-          </a:prstGeom>
-          <a:noFill/>
-          <a:ln/>
-        </p:spPr>
-        <p:txBody>
-          <a:bodyPr wrap="square" lIns="0" tIns="0" rIns="0" bIns="0" rtlCol="0" anchor="ctr"/>
-          <a:lstStyle/>
-          <a:p>
-            <a:pPr indent="0" marL="0">
-              <a:buNone/>
-            </a:pPr>
-            <a:r>
-              <a:rPr lang="en-US" sz="950" dirty="0">
-                <a:solidFill>
-                  <a:srgbClr val="718096"/>
-                </a:solidFill>
-                <a:latin typeface="Pretendard" pitchFamily="34" charset="0"/>
-                <a:ea typeface="Pretendard" pitchFamily="34" charset="-122"/>
-                <a:cs typeface="Pretendard" pitchFamily="34" charset="-120"/>
-              </a:rPr>
-              <a:t>예상 개발 이익률</a:t>
-            </a:r>
-            <a:endParaRPr lang="en-US" sz="950" dirty="0"/>
-          </a:p>
-        </p:txBody>
-      </p:sp>
-      <p:sp>
-        <p:nvSpPr>
-          <p:cNvPr id="22" name="Text 20"/>
-          <p:cNvSpPr/>
-          <p:nvPr/>
-        </p:nvSpPr>
-        <p:spPr>
-          <a:xfrm>
-            <a:off x="731520" y="3630168"/>
-            <a:ext cx="3247034" cy="402336"/>
-          </a:xfrm>
-          <a:prstGeom prst="rect">
-            <a:avLst/>
-          </a:prstGeom>
-          <a:noFill/>
-          <a:ln/>
-        </p:spPr>
-        <p:txBody>
-          <a:bodyPr wrap="square" lIns="0" tIns="0" rIns="0" bIns="0" rtlCol="0" anchor="ctr">
-            <a:normAutofit/>
-          </a:bodyPr>
-          <a:lstStyle/>
-          <a:p>
-            <a:pPr indent="0" marL="0">
-              <a:buNone/>
-            </a:pPr>
-            <a:r>
-              <a:rPr lang="en-US" sz="1800" b="1" dirty="0">
-                <a:solidFill>
-                  <a:srgbClr val="10161F"/>
-                </a:solidFill>
-                <a:latin typeface="Pretendard" pitchFamily="34" charset="0"/>
-                <a:ea typeface="Pretendard" pitchFamily="34" charset="-122"/>
-                <a:cs typeface="Pretendard" pitchFamily="34" charset="-120"/>
-              </a:rPr>
-              <a:t>15% ~ 25% 수준</a:t>
-            </a:r>
-            <a:endParaRPr lang="en-US" sz="1800" dirty="0"/>
-          </a:p>
-        </p:txBody>
-      </p:sp>
-      <p:sp>
-        <p:nvSpPr>
-          <p:cNvPr id="23" name="Text 21"/>
-          <p:cNvSpPr/>
-          <p:nvPr/>
-        </p:nvSpPr>
-        <p:spPr>
-          <a:xfrm>
-            <a:off x="731520" y="3995928"/>
-            <a:ext cx="3247034" cy="164592"/>
-          </a:xfrm>
-          <a:prstGeom prst="rect">
-            <a:avLst/>
-          </a:prstGeom>
-          <a:noFill/>
-          <a:ln/>
-        </p:spPr>
-        <p:txBody>
-          <a:bodyPr wrap="square" lIns="0" tIns="0" rIns="0" bIns="0" rtlCol="0" anchor="ctr"/>
-          <a:lstStyle/>
-          <a:p>
-            <a:pPr indent="0" marL="0">
-              <a:buNone/>
-            </a:pPr>
-            <a:r>
-              <a:rPr lang="en-US" sz="880" dirty="0">
-                <a:solidFill>
-                  <a:srgbClr val="718096"/>
-                </a:solidFill>
-                <a:latin typeface="Pretendard" pitchFamily="34" charset="0"/>
-                <a:ea typeface="Pretendard" pitchFamily="34" charset="-122"/>
-                <a:cs typeface="Pretendard" pitchFamily="34" charset="-120"/>
-              </a:rPr>
-              <a:t>시장 상황 연동</a:t>
-            </a:r>
-            <a:endParaRPr lang="en-US" sz="880" dirty="0"/>
-          </a:p>
-        </p:txBody>
-      </p:sp>
-      <p:sp>
-        <p:nvSpPr>
-          <p:cNvPr id="24" name="Shape 22"/>
-          <p:cNvSpPr/>
-          <p:nvPr/>
-        </p:nvSpPr>
-        <p:spPr>
-          <a:xfrm>
-            <a:off x="566928" y="4626864"/>
-            <a:ext cx="5437480" cy="1280160"/>
+          <p:cNvPr id="7" name="Shape 5"/>
+          <p:cNvSpPr/>
+          <p:nvPr/>
+        </p:nvSpPr>
+        <p:spPr>
+          <a:xfrm>
+            <a:off x="566928" y="1645920"/>
+            <a:ext cx="11057839" cy="1280160"/>
           </a:xfrm>
           <a:prstGeom prst="roundRect">
             <a:avLst>
@@ -8683,13 +7033,13 @@
       </p:sp>
       <p:sp>
         <p:nvSpPr>
-          <p:cNvPr id="25" name="Shape 23"/>
-          <p:cNvSpPr/>
-          <p:nvPr/>
-        </p:nvSpPr>
-        <p:spPr>
-          <a:xfrm>
-            <a:off x="566928" y="4681728"/>
+          <p:cNvPr id="8" name="Shape 6"/>
+          <p:cNvSpPr/>
+          <p:nvPr/>
+        </p:nvSpPr>
+        <p:spPr>
+          <a:xfrm>
+            <a:off x="566928" y="1700784"/>
             <a:ext cx="36576" cy="1170432"/>
           </a:xfrm>
           <a:prstGeom prst="rect">
@@ -8703,14 +7053,14 @@
       </p:sp>
       <p:sp>
         <p:nvSpPr>
-          <p:cNvPr id="26" name="Text 24"/>
-          <p:cNvSpPr/>
-          <p:nvPr/>
-        </p:nvSpPr>
-        <p:spPr>
-          <a:xfrm>
-            <a:off x="749808" y="4736592"/>
-            <a:ext cx="5108296" cy="201168"/>
+          <p:cNvPr id="9" name="Text 7"/>
+          <p:cNvSpPr/>
+          <p:nvPr/>
+        </p:nvSpPr>
+        <p:spPr>
+          <a:xfrm>
+            <a:off x="749808" y="1755648"/>
+            <a:ext cx="10728655" cy="201168"/>
           </a:xfrm>
           <a:prstGeom prst="rect">
             <a:avLst/>
@@ -8742,14 +7092,14 @@
       </p:sp>
       <p:sp>
         <p:nvSpPr>
-          <p:cNvPr id="27" name="Text 25"/>
-          <p:cNvSpPr/>
-          <p:nvPr/>
-        </p:nvSpPr>
-        <p:spPr>
-          <a:xfrm>
-            <a:off x="749808" y="4956048"/>
-            <a:ext cx="5108296" cy="877824"/>
+          <p:cNvPr id="10" name="Text 8"/>
+          <p:cNvSpPr/>
+          <p:nvPr/>
+        </p:nvSpPr>
+        <p:spPr>
+          <a:xfrm>
+            <a:off x="749808" y="1975104"/>
+            <a:ext cx="10728655" cy="877824"/>
           </a:xfrm>
           <a:prstGeom prst="rect">
             <a:avLst/>
@@ -8776,7 +7126,7 @@
                 <a:ea typeface="Pretendard" pitchFamily="34" charset="-122"/>
                 <a:cs typeface="Pretendard" pitchFamily="34" charset="-120"/>
               </a:rPr>
-              <a:t>본 자산의 대지 매입 후 신축 개발 시 총 사업비, 예상 분양 수입 및 개발 이익률을 종합 추정합니다. [주의] 신축 공사비 및 분양가 변동에 따라 최종 수익률이 달라질 수 있습니다.</a:t>
+              <a:t>{"ok":true,"mocked":true,"extractedFields":{"area_signal":"역삼","asset_type":"오피스빌딩","price_band":"300억","size_signal":"3000평(약 9917.4㎡)"},"extractedFacts":{"region":"역삼","exactAddressCandidate":"역삼동 742-1","assetType":"오피스빌딩","priceText":"300억","sizeText":"3000평(약 9917.4㎡)","currentUse":"오피스","currentUseSignal":"근린생활시설","leaseSignal":"임대중","vacancySignal":"공실없음","tenantNames":["쿠팡","네이버"],"unitRentTexts":["301호: 1500만"],"sellerMotivationText":"자산 효율화","brokerNotes":["초역세권 매물"]},"detectedSensitiveFields":["exact_address","tenant_name"],"ambiguousFields":[],"warnings":[],"areaSignal":"역삼","assetType":"오피스빌딩","priceBand":"300억","sizeSignal":"3000평(약 9917.4㎡)","dealType":"매각","buildingName":"역삼 센트럴타워","exactAddress":"역삼동 742-1","totalFloorArea":9917.3,"buildYear":2015,"currentUseSignal":"근린생활시설","vacancySignal":"공실 없음","fitSummary":"초역세권 근생 빌딩으로 시행/사옥 매입에 최적화","cautionSummary":"주요 임차인 만기 조율 필요","hiddenFields":["exact_address","seller_motivation"],"confidence":{"areaSignal":"confirmed","assetType":"confirmed","priceBand":"ai_hypothesis","fitSummary":"ai_hypothesis"},"missingData":["sizeSignal"],"boundaryNote":"본 자료는 실거래 통계 기반 참고치입니다.","buyerType":"법인 사옥형","budgetRange":{"min":50,"max":80,"display":"50억~80억"},"preferredRegions":["강남","성수"],"assetTypes":["꼬마빌딩","사옥용"],"purchasePurpose":"사옥용 매입","mustHave":["초역세권","주차"],"niceToHave":["테라스","루프탑"],"riskTolerance":"medium","financingNote":"자본금 50% 준비","missingQuestions":["구체적인 입주 시기가 언제인가요?","선호하는 수익률이 있나요?"],"privacyNotes":["연락처 비공개"],"fitReasons":["매수자 예산(50-80억)에 부합하는 매물입니다.","요청하신 성수/강남 권역에 해당합니다."],"cautionReasons":["요청한 용도와 달리 명도 협의가 다소 필요합니다."],"recommendedNextAction":"현장 답사 제안","kakaoMessage":"안녕하세요! 요청하신 조건에 부합하는 추천 매물이 있어 안내해 드립니다. 확인해보시고 피드백 부탁드립니다.","title":"강남 역삼역 초역세권 오피스 사옥용 빌딩 매각","shortSummary":"역삼역 도보 5분 거리의 준신축급 대형 오피스빌딩입니다.","dealPoints":["초역세권","사옥 최적"],"cautionPoints":["명도 조율 필요"],"hiddenInfoNotice":["보증금 및 지번은 인가 후 확인 가능"],"gateMessage":"G1 등급 등록이 필요합니다.","kakaoText":"강남 역삼역 오피스 빌딩 매각 안내입니다.","exactUnitCandidate":"101호","floor":"1층","areaSqmText":"150㎡","spaceType":"office","depositText":"5000만","monthlyRentText":"400만","maintenanceFeeText":"50만","availableFromText":"즉시입주","leaseTermMonthsText":"24","incentivesText":"렌트프리 2개월","restrictions":[],"landlordIdentity":"김성수","currentTenant":"스타트업","vacancyReason":"이전 확장","rentNegotiation":"협의 가능","region":"성수동","areaSqm":150,"deposit":5000,"monthlyRent":400,"maintenanceFee":50,"availableFrom":"즉시입주","leaseTermMonths":24,"incentives":{"rentFreeMonths":2,"interiorSupport":"일부 인테리어 지원","freeRentDetail":"렌트프리 2개월 지원"},"shortSummaryLease":"성수역 도보 5분 거리 1층 리테일 상가 매물입니다."}</a:t>
             </a:r>
             <a:endParaRPr lang="en-US" sz="930" dirty="0"/>
           </a:p>
@@ -8784,119 +7134,7 @@
       </p:sp>
       <p:sp>
         <p:nvSpPr>
-          <p:cNvPr id="28" name="Shape 26"/>
-          <p:cNvSpPr/>
-          <p:nvPr/>
-        </p:nvSpPr>
-        <p:spPr>
-          <a:xfrm>
-            <a:off x="6187288" y="4626864"/>
-            <a:ext cx="5437480" cy="1280160"/>
-          </a:xfrm>
-          <a:prstGeom prst="roundRect">
-            <a:avLst>
-              <a:gd name="adj" fmla="val 4286"/>
-            </a:avLst>
-          </a:prstGeom>
-          <a:solidFill>
-            <a:srgbClr val="BEE3F8"/>
-          </a:solidFill>
-          <a:ln/>
-        </p:spPr>
-      </p:sp>
-      <p:sp>
-        <p:nvSpPr>
-          <p:cNvPr id="29" name="Shape 27"/>
-          <p:cNvSpPr/>
-          <p:nvPr/>
-        </p:nvSpPr>
-        <p:spPr>
-          <a:xfrm>
-            <a:off x="6187288" y="4681728"/>
-            <a:ext cx="36576" cy="1170432"/>
-          </a:xfrm>
-          <a:prstGeom prst="rect">
-            <a:avLst/>
-          </a:prstGeom>
-          <a:solidFill>
-            <a:srgbClr val="2B6CB0"/>
-          </a:solidFill>
-          <a:ln/>
-        </p:spPr>
-      </p:sp>
-      <p:sp>
-        <p:nvSpPr>
-          <p:cNvPr id="30" name="Text 28"/>
-          <p:cNvSpPr/>
-          <p:nvPr/>
-        </p:nvSpPr>
-        <p:spPr>
-          <a:xfrm>
-            <a:off x="6370168" y="4736592"/>
-            <a:ext cx="5108296" cy="201168"/>
-          </a:xfrm>
-          <a:prstGeom prst="rect">
-            <a:avLst/>
-          </a:prstGeom>
-          <a:noFill/>
-          <a:ln/>
-        </p:spPr>
-        <p:txBody>
-          <a:bodyPr wrap="square" lIns="0" tIns="0" rIns="0" bIns="0" rtlCol="0" anchor="ctr"/>
-          <a:lstStyle/>
-          <a:p>
-            <a:pPr indent="0" marL="0">
-              <a:buNone/>
-            </a:pPr>
-            <a:endParaRPr lang="en-US" sz="1050" dirty="0"/>
-          </a:p>
-        </p:txBody>
-      </p:sp>
-      <p:sp>
-        <p:nvSpPr>
-          <p:cNvPr id="31" name="Text 29"/>
-          <p:cNvSpPr/>
-          <p:nvPr/>
-        </p:nvSpPr>
-        <p:spPr>
-          <a:xfrm>
-            <a:off x="6370168" y="4956048"/>
-            <a:ext cx="5108296" cy="877824"/>
-          </a:xfrm>
-          <a:prstGeom prst="rect">
-            <a:avLst/>
-          </a:prstGeom>
-          <a:noFill/>
-          <a:ln/>
-        </p:spPr>
-        <p:txBody>
-          <a:bodyPr wrap="square" lIns="0" tIns="0" rIns="0" bIns="0" rtlCol="0" anchor="t"/>
-          <a:lstStyle/>
-          <a:p>
-            <a:pPr indent="0" marL="0">
-              <a:lnSpc>
-                <a:spcPct val="120000"/>
-              </a:lnSpc>
-              <a:buNone/>
-            </a:pPr>
-            <a:r>
-              <a:rPr lang="en-US" sz="930" dirty="0">
-                <a:solidFill>
-                  <a:srgbClr val="10161F"/>
-                </a:solidFill>
-                <a:latin typeface="Pretendard" pitchFamily="34" charset="0"/>
-                <a:ea typeface="Pretendard" pitchFamily="34" charset="-122"/>
-                <a:cs typeface="Pretendard" pitchFamily="34" charset="-120"/>
-              </a:rPr>
-              <a:t>[주의] 신축 공사비 및 분양가 변동에 따라 최종 수익률이 달라질 수 있습니다.</a:t>
-            </a:r>
-            <a:endParaRPr lang="en-US" sz="930" dirty="0"/>
-          </a:p>
-        </p:txBody>
-      </p:sp>
-      <p:sp>
-        <p:nvSpPr>
-          <p:cNvPr id="32" name="Text 30"/>
+          <p:cNvPr id="11" name="Text 9"/>
           <p:cNvSpPr/>
           <p:nvPr/>
         </p:nvSpPr>
@@ -8935,7 +7173,7 @@
       </p:sp>
       <p:sp>
         <p:nvSpPr>
-          <p:cNvPr id="33" name="Text 31"/>
+          <p:cNvPr id="12" name="Text 10"/>
           <p:cNvSpPr/>
           <p:nvPr/>
         </p:nvSpPr>
@@ -9150,11 +7388,11 @@
         <p:spPr>
           <a:xfrm>
             <a:off x="566928" y="1417320"/>
-            <a:ext cx="11057839" cy="3657600"/>
+            <a:ext cx="3515258" cy="3657600"/>
           </a:xfrm>
           <a:prstGeom prst="roundRect">
             <a:avLst>
-              <a:gd name="adj" fmla="val 1500"/>
+              <a:gd name="adj" fmla="val 1561"/>
             </a:avLst>
           </a:prstGeom>
           <a:solidFill>
@@ -9177,7 +7415,7 @@
         <p:spPr>
           <a:xfrm>
             <a:off x="566928" y="1417320"/>
-            <a:ext cx="11057839" cy="45720"/>
+            <a:ext cx="3515258" cy="45720"/>
           </a:xfrm>
           <a:prstGeom prst="rect">
             <a:avLst/>
@@ -9197,7 +7435,7 @@
         <p:spPr>
           <a:xfrm>
             <a:off x="795528" y="1618488"/>
-            <a:ext cx="10600639" cy="292608"/>
+            <a:ext cx="3058058" cy="292608"/>
           </a:xfrm>
           <a:prstGeom prst="rect">
             <a:avLst/>
@@ -9221,7 +7459,7 @@
                 <a:ea typeface="Pretendard" pitchFamily="34" charset="-122"/>
                 <a:cs typeface="Pretendard" pitchFamily="34" charset="-120"/>
               </a:rPr>
-              <a:t>용도 리스크</a:t>
+              <a:t>건물 물리적 상태</a:t>
             </a:r>
             <a:endParaRPr lang="en-US" sz="1350" dirty="0"/>
           </a:p>
@@ -9236,7 +7474,7 @@
         <p:spPr>
           <a:xfrm>
             <a:off x="795528" y="1947672"/>
-            <a:ext cx="10600639" cy="365760"/>
+            <a:ext cx="3058058" cy="365760"/>
           </a:xfrm>
           <a:prstGeom prst="rect">
             <a:avLst/>
@@ -9262,7 +7500,7 @@
                 <a:ea typeface="Pretendard" pitchFamily="34" charset="-122"/>
                 <a:cs typeface="Pretendard" pitchFamily="34" charset="-120"/>
               </a:rPr>
-              <a:t>—</a:t>
+              <a:t>준공연도 확인 필요, 구조 확인 필요</a:t>
             </a:r>
             <a:endParaRPr lang="en-US" sz="1250" dirty="0"/>
           </a:p>
@@ -9277,7 +7515,7 @@
         <p:spPr>
           <a:xfrm>
             <a:off x="795528" y="2377440"/>
-            <a:ext cx="10600639" cy="2606040"/>
+            <a:ext cx="3058058" cy="2606040"/>
           </a:xfrm>
           <a:prstGeom prst="rect">
             <a:avLst/>
@@ -9307,10 +7545,58 @@
                 <a:ea typeface="Pretendard" pitchFamily="34" charset="-122"/>
                 <a:cs typeface="Pretendard" pitchFamily="34" charset="-120"/>
               </a:rPr>
-              <a:t>{"ok":true,"mocked":true,"extractedFields":{"area_signal":"역삼","asset_type":"오피스빌딩","price_band":"300억","size_signal":"3000평(약 9917.4㎡)"},"extractedFacts":{"region":"역삼","exactAddressCandidate":"역삼동 7</a:t>
+              <a:t>누수</a:t>
             </a:r>
             <a:endParaRPr lang="en-US" sz="1100" dirty="0"/>
           </a:p>
+          <a:p>
+            <a:pPr marL="342900" indent="-342900">
+              <a:lnSpc>
+                <a:spcPct val="125000"/>
+              </a:lnSpc>
+              <a:spcBef>
+                <a:spcPts val="600"/>
+              </a:spcBef>
+              <a:buSzPct val="100000"/>
+              <a:buChar char="•"/>
+            </a:pPr>
+            <a:r>
+              <a:rPr lang="en-US" sz="1100" dirty="0">
+                <a:solidFill>
+                  <a:srgbClr val="10161F"/>
+                </a:solidFill>
+                <a:latin typeface="Pretendard" pitchFamily="34" charset="0"/>
+                <a:ea typeface="Pretendard" pitchFamily="34" charset="-122"/>
+                <a:cs typeface="Pretendard" pitchFamily="34" charset="-120"/>
+              </a:rPr>
+              <a:t>균열</a:t>
+            </a:r>
+            <a:endParaRPr lang="en-US" sz="1100" dirty="0"/>
+          </a:p>
+          <a:p>
+            <a:pPr marL="342900" indent="-342900">
+              <a:lnSpc>
+                <a:spcPct val="125000"/>
+              </a:lnSpc>
+              <a:spcBef>
+                <a:spcPts val="600"/>
+              </a:spcBef>
+              <a:buSzPct val="100000"/>
+              <a:buChar char="•"/>
+            </a:pPr>
+            <a:r>
+              <a:rPr lang="en-US" sz="1100" dirty="0">
+                <a:solidFill>
+                  <a:srgbClr val="10161F"/>
+                </a:solidFill>
+                <a:latin typeface="Pretendard" pitchFamily="34" charset="0"/>
+                <a:ea typeface="Pretendard" pitchFamily="34" charset="-122"/>
+                <a:cs typeface="Pretendard" pitchFamily="34" charset="-120"/>
+              </a:rPr>
+              <a:t>설비 노후 여부 현장 점검 필요</a:t>
+            </a:r>
+            <a:endParaRPr lang="en-US" sz="1100" dirty="0"/>
+          </a:p>
         </p:txBody>
       </p:sp>
       <p:sp>
@@ -9321,12 +7607,12 @@
         </p:nvSpPr>
         <p:spPr>
           <a:xfrm>
-            <a:off x="566928" y="5193792"/>
-            <a:ext cx="11057839" cy="621792"/>
+            <a:off x="4338218" y="1417320"/>
+            <a:ext cx="3515258" cy="3657600"/>
           </a:xfrm>
           <a:prstGeom prst="roundRect">
             <a:avLst>
-              <a:gd name="adj" fmla="val 8824"/>
+              <a:gd name="adj" fmla="val 1561"/>
             </a:avLst>
           </a:prstGeom>
           <a:solidFill>
@@ -9342,7 +7628,351 @@
       </p:sp>
       <p:sp>
         <p:nvSpPr>
-          <p:cNvPr id="12" name="Text 10"/>
+          <p:cNvPr id="12" name="Shape 10"/>
+          <p:cNvSpPr/>
+          <p:nvPr/>
+        </p:nvSpPr>
+        <p:spPr>
+          <a:xfrm>
+            <a:off x="4338218" y="1417320"/>
+            <a:ext cx="3515258" cy="45720"/>
+          </a:xfrm>
+          <a:prstGeom prst="rect">
+            <a:avLst/>
+          </a:prstGeom>
+          <a:solidFill>
+            <a:srgbClr val="B98A2E"/>
+          </a:solidFill>
+          <a:ln/>
+        </p:spPr>
+      </p:sp>
+      <p:sp>
+        <p:nvSpPr>
+          <p:cNvPr id="13" name="Text 11"/>
+          <p:cNvSpPr/>
+          <p:nvPr/>
+        </p:nvSpPr>
+        <p:spPr>
+          <a:xfrm>
+            <a:off x="4566818" y="1618488"/>
+            <a:ext cx="3058058" cy="292608"/>
+          </a:xfrm>
+          <a:prstGeom prst="rect">
+            <a:avLst/>
+          </a:prstGeom>
+          <a:noFill/>
+          <a:ln/>
+        </p:spPr>
+        <p:txBody>
+          <a:bodyPr wrap="square" lIns="0" tIns="0" rIns="0" bIns="0" rtlCol="0" anchor="ctr"/>
+          <a:lstStyle/>
+          <a:p>
+            <a:pPr indent="0" marL="0">
+              <a:buNone/>
+            </a:pPr>
+            <a:r>
+              <a:rPr lang="en-US" sz="1350" b="1" dirty="0">
+                <a:solidFill>
+                  <a:srgbClr val="977024"/>
+                </a:solidFill>
+                <a:latin typeface="Pretendard" pitchFamily="34" charset="0"/>
+                <a:ea typeface="Pretendard" pitchFamily="34" charset="-122"/>
+                <a:cs typeface="Pretendard" pitchFamily="34" charset="-120"/>
+              </a:rPr>
+              <a:t>승강기 및 설비</a:t>
+            </a:r>
+            <a:endParaRPr lang="en-US" sz="1350" dirty="0"/>
+          </a:p>
+        </p:txBody>
+      </p:sp>
+      <p:sp>
+        <p:nvSpPr>
+          <p:cNvPr id="14" name="Text 12"/>
+          <p:cNvSpPr/>
+          <p:nvPr/>
+        </p:nvSpPr>
+        <p:spPr>
+          <a:xfrm>
+            <a:off x="4566818" y="1947672"/>
+            <a:ext cx="3058058" cy="365760"/>
+          </a:xfrm>
+          <a:prstGeom prst="rect">
+            <a:avLst/>
+          </a:prstGeom>
+          <a:noFill/>
+          <a:ln/>
+        </p:spPr>
+        <p:txBody>
+          <a:bodyPr wrap="square" lIns="0" tIns="0" rIns="0" bIns="0" rtlCol="0" anchor="ctr">
+            <a:normAutofit/>
+          </a:bodyPr>
+          <a:lstStyle/>
+          <a:p>
+            <a:pPr indent="0" marL="0">
+              <a:buNone/>
+            </a:pPr>
+            <a:r>
+              <a:rPr lang="en-US" sz="1250" b="1" dirty="0">
+                <a:solidFill>
+                  <a:srgbClr val="10161F"/>
+                </a:solidFill>
+                <a:latin typeface="Pretendard" pitchFamily="34" charset="0"/>
+                <a:ea typeface="Pretendard" pitchFamily="34" charset="-122"/>
+                <a:cs typeface="Pretendard" pitchFamily="34" charset="-120"/>
+              </a:rPr>
+              <a:t>승강기 정보 확인 필요</a:t>
+            </a:r>
+            <a:endParaRPr lang="en-US" sz="1250" dirty="0"/>
+          </a:p>
+        </p:txBody>
+      </p:sp>
+      <p:sp>
+        <p:nvSpPr>
+          <p:cNvPr id="15" name="Text 13"/>
+          <p:cNvSpPr/>
+          <p:nvPr/>
+        </p:nvSpPr>
+        <p:spPr>
+          <a:xfrm>
+            <a:off x="4566818" y="2377440"/>
+            <a:ext cx="3058058" cy="2606040"/>
+          </a:xfrm>
+          <a:prstGeom prst="rect">
+            <a:avLst/>
+          </a:prstGeom>
+          <a:noFill/>
+          <a:ln/>
+        </p:spPr>
+        <p:txBody>
+          <a:bodyPr wrap="square" lIns="0" tIns="0" rIns="0" bIns="0" rtlCol="0" anchor="t">
+            <a:normAutofit/>
+          </a:bodyPr>
+          <a:lstStyle/>
+          <a:p>
+            <a:pPr marL="342900" indent="-342900">
+              <a:lnSpc>
+                <a:spcPct val="125000"/>
+              </a:lnSpc>
+              <a:buSzPct val="100000"/>
+              <a:buChar char="•"/>
+            </a:pPr>
+            <a:r>
+              <a:rPr lang="en-US" sz="1100" dirty="0">
+                <a:solidFill>
+                  <a:srgbClr val="10161F"/>
+                </a:solidFill>
+                <a:latin typeface="Pretendard" pitchFamily="34" charset="0"/>
+                <a:ea typeface="Pretendard" pitchFamily="34" charset="-122"/>
+                <a:cs typeface="Pretendard" pitchFamily="34" charset="-120"/>
+              </a:rPr>
+              <a:t>정기검사 이력, 냉난방 설비 상태 확인 필요</a:t>
+            </a:r>
+            <a:endParaRPr lang="en-US" sz="1100" dirty="0"/>
+          </a:p>
+        </p:txBody>
+      </p:sp>
+      <p:sp>
+        <p:nvSpPr>
+          <p:cNvPr id="16" name="Shape 14"/>
+          <p:cNvSpPr/>
+          <p:nvPr/>
+        </p:nvSpPr>
+        <p:spPr>
+          <a:xfrm>
+            <a:off x="8109509" y="1417320"/>
+            <a:ext cx="3515258" cy="3657600"/>
+          </a:xfrm>
+          <a:prstGeom prst="roundRect">
+            <a:avLst>
+              <a:gd name="adj" fmla="val 1561"/>
+            </a:avLst>
+          </a:prstGeom>
+          <a:solidFill>
+            <a:srgbClr val="F7FAFC"/>
+          </a:solidFill>
+          <a:ln w="6350">
+            <a:solidFill>
+              <a:srgbClr val="CBD5E0"/>
+            </a:solidFill>
+            <a:prstDash val="solid"/>
+          </a:ln>
+        </p:spPr>
+      </p:sp>
+      <p:sp>
+        <p:nvSpPr>
+          <p:cNvPr id="17" name="Shape 15"/>
+          <p:cNvSpPr/>
+          <p:nvPr/>
+        </p:nvSpPr>
+        <p:spPr>
+          <a:xfrm>
+            <a:off x="8109509" y="1417320"/>
+            <a:ext cx="3515258" cy="45720"/>
+          </a:xfrm>
+          <a:prstGeom prst="rect">
+            <a:avLst/>
+          </a:prstGeom>
+          <a:solidFill>
+            <a:srgbClr val="B98A2E"/>
+          </a:solidFill>
+          <a:ln/>
+        </p:spPr>
+      </p:sp>
+      <p:sp>
+        <p:nvSpPr>
+          <p:cNvPr id="18" name="Text 16"/>
+          <p:cNvSpPr/>
+          <p:nvPr/>
+        </p:nvSpPr>
+        <p:spPr>
+          <a:xfrm>
+            <a:off x="8338109" y="1618488"/>
+            <a:ext cx="3058058" cy="292608"/>
+          </a:xfrm>
+          <a:prstGeom prst="rect">
+            <a:avLst/>
+          </a:prstGeom>
+          <a:noFill/>
+          <a:ln/>
+        </p:spPr>
+        <p:txBody>
+          <a:bodyPr wrap="square" lIns="0" tIns="0" rIns="0" bIns="0" rtlCol="0" anchor="ctr"/>
+          <a:lstStyle/>
+          <a:p>
+            <a:pPr indent="0" marL="0">
+              <a:buNone/>
+            </a:pPr>
+            <a:r>
+              <a:rPr lang="en-US" sz="1350" b="1" dirty="0">
+                <a:solidFill>
+                  <a:srgbClr val="977024"/>
+                </a:solidFill>
+                <a:latin typeface="Pretendard" pitchFamily="34" charset="0"/>
+                <a:ea typeface="Pretendard" pitchFamily="34" charset="-122"/>
+                <a:cs typeface="Pretendard" pitchFamily="34" charset="-120"/>
+              </a:rPr>
+              <a:t>임차인 이탈 위험</a:t>
+            </a:r>
+            <a:endParaRPr lang="en-US" sz="1350" dirty="0"/>
+          </a:p>
+        </p:txBody>
+      </p:sp>
+      <p:sp>
+        <p:nvSpPr>
+          <p:cNvPr id="19" name="Text 17"/>
+          <p:cNvSpPr/>
+          <p:nvPr/>
+        </p:nvSpPr>
+        <p:spPr>
+          <a:xfrm>
+            <a:off x="8338109" y="1947672"/>
+            <a:ext cx="3058058" cy="365760"/>
+          </a:xfrm>
+          <a:prstGeom prst="rect">
+            <a:avLst/>
+          </a:prstGeom>
+          <a:noFill/>
+          <a:ln/>
+        </p:spPr>
+        <p:txBody>
+          <a:bodyPr wrap="square" lIns="0" tIns="0" rIns="0" bIns="0" rtlCol="0" anchor="ctr">
+            <a:normAutofit/>
+          </a:bodyPr>
+          <a:lstStyle/>
+          <a:p>
+            <a:pPr indent="0" marL="0">
+              <a:buNone/>
+            </a:pPr>
+            <a:r>
+              <a:rPr lang="en-US" sz="1250" b="1" dirty="0">
+                <a:solidFill>
+                  <a:srgbClr val="10161F"/>
+                </a:solidFill>
+                <a:latin typeface="Pretendard" pitchFamily="34" charset="0"/>
+                <a:ea typeface="Pretendard" pitchFamily="34" charset="-122"/>
+                <a:cs typeface="Pretendard" pitchFamily="34" charset="-120"/>
+              </a:rPr>
+              <a:t>임대차 계약 현황 LOI 접수 후 열람</a:t>
+            </a:r>
+            <a:endParaRPr lang="en-US" sz="1250" dirty="0"/>
+          </a:p>
+        </p:txBody>
+      </p:sp>
+      <p:sp>
+        <p:nvSpPr>
+          <p:cNvPr id="20" name="Text 18"/>
+          <p:cNvSpPr/>
+          <p:nvPr/>
+        </p:nvSpPr>
+        <p:spPr>
+          <a:xfrm>
+            <a:off x="8338109" y="2377440"/>
+            <a:ext cx="3058058" cy="2606040"/>
+          </a:xfrm>
+          <a:prstGeom prst="rect">
+            <a:avLst/>
+          </a:prstGeom>
+          <a:noFill/>
+          <a:ln/>
+        </p:spPr>
+        <p:txBody>
+          <a:bodyPr wrap="square" lIns="0" tIns="0" rIns="0" bIns="0" rtlCol="0" anchor="t">
+            <a:normAutofit/>
+          </a:bodyPr>
+          <a:lstStyle/>
+          <a:p>
+            <a:pPr marL="342900" indent="-342900">
+              <a:lnSpc>
+                <a:spcPct val="125000"/>
+              </a:lnSpc>
+              <a:buSzPct val="100000"/>
+              <a:buChar char="•"/>
+            </a:pPr>
+            <a:r>
+              <a:rPr lang="en-US" sz="1100" dirty="0">
+                <a:solidFill>
+                  <a:srgbClr val="10161F"/>
+                </a:solidFill>
+                <a:latin typeface="Pretendard" pitchFamily="34" charset="0"/>
+                <a:ea typeface="Pretendard" pitchFamily="34" charset="-122"/>
+                <a:cs typeface="Pretendard" pitchFamily="34" charset="-120"/>
+              </a:rPr>
+              <a:t>잔여 계약기간(WALE), 임차인 신용도 확인 필요</a:t>
+            </a:r>
+            <a:endParaRPr lang="en-US" sz="1100" dirty="0"/>
+          </a:p>
+        </p:txBody>
+      </p:sp>
+      <p:sp>
+        <p:nvSpPr>
+          <p:cNvPr id="21" name="Shape 19"/>
+          <p:cNvSpPr/>
+          <p:nvPr/>
+        </p:nvSpPr>
+        <p:spPr>
+          <a:xfrm>
+            <a:off x="566928" y="5193792"/>
+            <a:ext cx="11057839" cy="621792"/>
+          </a:xfrm>
+          <a:prstGeom prst="roundRect">
+            <a:avLst>
+              <a:gd name="adj" fmla="val 8824"/>
+            </a:avLst>
+          </a:prstGeom>
+          <a:solidFill>
+            <a:srgbClr val="F7FAFC"/>
+          </a:solidFill>
+          <a:ln w="6350">
+            <a:solidFill>
+              <a:srgbClr val="CBD5E0"/>
+            </a:solidFill>
+            <a:prstDash val="solid"/>
+          </a:ln>
+        </p:spPr>
+      </p:sp>
+      <p:sp>
+        <p:nvSpPr>
+          <p:cNvPr id="22" name="Text 20"/>
           <p:cNvSpPr/>
           <p:nvPr/>
         </p:nvSpPr>
@@ -9381,7 +8011,7 @@
       </p:sp>
       <p:sp>
         <p:nvSpPr>
-          <p:cNvPr id="13" name="Text 11"/>
+          <p:cNvPr id="23" name="Text 21"/>
           <p:cNvSpPr/>
           <p:nvPr/>
         </p:nvSpPr>
@@ -9420,7 +8050,7 @@
       </p:sp>
       <p:sp>
         <p:nvSpPr>
-          <p:cNvPr id="14" name="Text 12"/>
+          <p:cNvPr id="24" name="Text 22"/>
           <p:cNvSpPr/>
           <p:nvPr/>
         </p:nvSpPr>
@@ -9728,7 +8358,7 @@
                 <a:ea typeface="Pretendard" pitchFamily="34" charset="-122"/>
                 <a:cs typeface="Pretendard" pitchFamily="34" charset="-120"/>
               </a:rPr>
-              <a:t>{"ok":true,"mocked":true,"extractedFields":{"area_signal":"역삼","asset_type":"오피스빌딩","price_band":"300억","size_signal":"3000평(약 9917.4㎡)"},"extractedFacts":{"region":"역삼","exactAddressCandidate":"역삼동 742-1","assetType":"오피스빌딩","priceText":"300억","sizeText":"3000평(약 9917.4㎡)","currentUse":"오피스","currentUseSignal":"근린생활시설","leaseSignal":"임대중","vacancySignal":"공실없음","tenantNames":["쿠팡","네이버"],"unitRentTexts":["301호: 1500만"],"sellerMotivationText":"자산 효율화","brokerNotes":["초역세권 매물"]},"detectedSensitiveFields":["exact_address","tenant_name"],"ambiguousFields":[],"warnings":[],"areaSignal":"역삼","assetType":"오피스빌딩","priceBand":"300억","sizeSignal":"3000평(약 9917.4㎡)","dealType":"매각","buildingName":"역삼 센트럴타워","exactAddress":"역삼동 742-1","totalFloorArea":9917.3,"buildYear":2015,"currentUseSignal":"근린생활시설","vacancySignal":"공실 없음","fitSummary":"초역세권 근생 빌딩으로 시행/사옥 매입에 최적화","cautionSummary":"주요 임차 업종 만기 조율 필요","hiddenFields":["exact_address","seller_motivation"],"confidence":{"areaSignal":"confirmed","assetType":"confirmed","priceBand":"ai_hypothesis","fitSummary":"ai_hypothesis"},"missingData":["sizeSignal"],"boundaryNote":"본 자료는 실거래 통계 기반 참고치입니다.","buyerType":"법인 사옥형","budgetRange":{"min":50,"max":80,"display":"50억~80억"},"preferredRegions":["강남","성수"],"assetTypes":["꼬마빌딩","사옥용"],"purchasePurpose":"사옥용 매입","mustHave":["초역세권","주차"],"niceToHave":["테라스","루프탑"],"riskTolerance":"medium","financingNote":"자본금 50% 준비","missingQuestions":["구체적인 입주 시기가 언제인가요?","선호하는 수익률이 있나요?"],"privacyNotes":["연락처 비공개"],"fitReasons":["매수자 예산(50-80억)에 부합하는 매물입니다.","요청하신 성수/강남 권역에 해당합니다."],"cautionReasons":["요청한 용도와 달리 명도 협의가 다소 필요합니다."],"recommendedNextAction":"현장 답사 제안","kakaoMessage":"안녕하세요! 요청하신 조건에 부합하는 추천 매물이 있어 안내해 드립니다. 확인해보시고 피드백 부탁드립니다.","title":"강남 역삼역 초역세권 오피스 사옥용 빌딩 매각","shortSummary":"역삼역 도보 5분 거리의 준신축급 대형 오피스빌딩입니다.","dealPoints":["초역세권","사옥 최적"],"cautionPoints":["명도 조율 필요"],"hiddenInfoNotice":["보증금 및 지번은 인가 후 확인 가능"],"gateMessage":"G1 등급 등록이 필요합니다.","kakaoText":"강남 역삼역 오피스 빌딩 매각 안내입니다.","exactUnitCandidate":"101호","floor":"1층","areaSqmText":"150㎡","spaceType":"office","depositText":"5000만","monthlyRentText":"400만","maintenanceFeeText":"50만","availableFromText":"즉시입주","leaseTermMonthsText":"24","incentivesText":"렌트프리 2개월","restrictions":[],"landlordIdentity":"김성수","currentTenant":"스타트업","vacancyReason":"이전 확장","rentNegotiation":"협의 가능","region":"성수동","areaSqm":150,"deposit":5000,"monthlyRent":400,"maintenanceFee":50,"availableFrom":"즉시입주","leaseTermMonths":24,"incentives":{"rentFreeMonths":2,"interiorSupport":"일부 인테리어 지원","freeRentDetail":"렌트프리 2개월 지원"},"shortSummaryLease":"성수역 도보 5분 거리 1층 리테일 상가 매물입니다."}</a:t>
+              <a:t>{"ok":true,"mocked":true,"extractedFields":{"area_signal":"역삼","asset_type":"오피스빌딩","price_band":"300억","size_signal":"3000평(약 9917.4㎡)"},"extractedFacts":{"region":"역삼","exactAddressCandidate":"역삼동 742-1","assetType":"오피스빌딩","priceText":"300억","sizeText":"3000평(약 9917.4㎡)","currentUse":"오피스","currentUseSignal":"근린생활시설","leaseSignal":"임대중","vacancySignal":"공실없음","tenantNames":["쿠팡","네이버"],"unitRentTexts":["301호: 1500만"],"sellerMotivationText":"자산 효율화","brokerNotes":["초역세권 매물"]},"detectedSensitiveFields":["exact_address","tenant_name"],"ambiguousFields":[],"warnings":[],"areaSignal":"역삼","assetType":"오피스빌딩","priceBand":"300억","sizeSignal":"3000평(약 9917.4㎡)","dealType":"매각","buildingName":"역삼 센트럴타워","exactAddress":"역삼동 742-1","totalFloorArea":9917.3,"buildYear":2015,"currentUseSignal":"근린생활시설","vacancySignal":"공실 없음","fitSummary":"초역세권 근생 빌딩으로 시행/사옥 매입에 최적화","cautionSummary":"주요 임차인 만기 조율 필요","hiddenFields":["exact_address","seller_motivation"],"confidence":{"areaSignal":"confirmed","assetType":"confirmed","priceBand":"ai_hypothesis","fitSummary":"ai_hypothesis"},"missingData":["sizeSignal"],"boundaryNote":"본 자료는 실거래 통계 기반 참고치입니다.","buyerType":"법인 사옥형","budgetRange":{"min":50,"max":80,"display":"50억~80억"},"preferredRegions":["강남","성수"],"assetTypes":["꼬마빌딩","사옥용"],"purchasePurpose":"사옥용 매입","mustHave":["초역세권","주차"],"niceToHave":["테라스","루프탑"],"riskTolerance":"medium","financingNote":"자본금 50% 준비","missingQuestions":["구체적인 입주 시기가 언제인가요?","선호하는 수익률이 있나요?"],"privacyNotes":["연락처 비공개"],"fitReasons":["매수자 예산(50-80억)에 부합하는 매물입니다.","요청하신 성수/강남 권역에 해당합니다."],"cautionReasons":["요청한 용도와 달리 명도 협의가 다소 필요합니다."],"recommendedNextAction":"현장 답사 제안","kakaoMessage":"안녕하세요! 요청하신 조건에 부합하는 추천 매물이 있어 안내해 드립니다. 확인해보시고 피드백 부탁드립니다.","title":"강남 역삼역 초역세권 오피스 사옥용 빌딩 매각","shortSummary":"역삼역 도보 5분 거리의 준신축급 대형 오피스빌딩입니다.","dealPoints":["초역세권","사옥 최적"],"cautionPoints":["명도 조율 필요"],"hiddenInfoNotice":["보증금 및 지번은 인가 후 확인 가능"],"gateMessage":"G1 등급 등록이 필요합니다.","kakaoText":"강남 역삼역 오피스 빌딩 매각 안내입니다.","exactUnitCandidate":"101호","floor":"1층","areaSqmText":"150㎡","spaceType":"office","depositText":"5000만","monthlyRentText":"400만","maintenanceFeeText":"50만","availableFromText":"즉시입주","leaseTermMonthsText":"24","incentivesText":"렌트프리 2개월","restrictions":[],"landlordIdentity":"김성수","currentTenant":"스타트업","vacancyReason":"이전 확장","rentNegotiation":"협의 가능","region":"성수동","areaSqm":150,"deposit":5000,"monthlyRent":400,"maintenanceFee":50,"availableFrom":"즉시입주","leaseTermMonths":24,"incentives":{"rentFreeMonths":2,"interiorSupport":"일부 인테리어 지원","freeRentDetail":"렌트프리 2개월 지원"},"shortSummaryLease":"성수역 도보 5분 거리 1층 리테일 상가 매물입니다."}</a:t>
             </a:r>
             <a:endParaRPr lang="en-US" sz="1100" dirty="0"/>
           </a:p>
@@ -9990,11 +8620,11 @@
         <p:spPr>
           <a:xfrm>
             <a:off x="566928" y="1572768"/>
-            <a:ext cx="2490140" cy="3200400"/>
+            <a:ext cx="11057839" cy="3200400"/>
           </a:xfrm>
           <a:prstGeom prst="roundRect">
             <a:avLst>
-              <a:gd name="adj" fmla="val 2203"/>
+              <a:gd name="adj" fmla="val 1714"/>
             </a:avLst>
           </a:prstGeom>
           <a:solidFill>
@@ -10017,7 +8647,7 @@
         <p:spPr>
           <a:xfrm>
             <a:off x="786384" y="1792224"/>
-            <a:ext cx="384048" cy="384048"/>
+            <a:ext cx="438912" cy="438912"/>
           </a:xfrm>
           <a:prstGeom prst="ellipse">
             <a:avLst/>
@@ -10037,7 +8667,7 @@
         <p:spPr>
           <a:xfrm>
             <a:off x="786384" y="1792224"/>
-            <a:ext cx="384048" cy="384048"/>
+            <a:ext cx="438912" cy="438912"/>
           </a:xfrm>
           <a:prstGeom prst="rect">
             <a:avLst/>
@@ -10053,7 +8683,7 @@
               <a:buNone/>
             </a:pPr>
             <a:r>
-              <a:rPr lang="en-US" sz="1300" b="1" dirty="0">
+              <a:rPr lang="en-US" sz="1400" b="1" dirty="0">
                 <a:solidFill>
                   <a:srgbClr val="FFFFFF"/>
                 </a:solidFill>
@@ -10061,9 +8691,9 @@
                 <a:ea typeface="Arial" pitchFamily="34" charset="-122"/>
                 <a:cs typeface="Arial" pitchFamily="34" charset="-120"/>
               </a:rPr>
-              <a:t>STEP 1</a:t>
-            </a:r>
-            <a:endParaRPr lang="en-US" sz="1300" dirty="0"/>
+              <a:t>01</a:t>
+            </a:r>
+            <a:endParaRPr lang="en-US" sz="1400" dirty="0"/>
           </a:p>
         </p:txBody>
       </p:sp>
@@ -10076,7 +8706,7 @@
         <p:spPr>
           <a:xfrm>
             <a:off x="786384" y="2304288"/>
-            <a:ext cx="2051228" cy="365760"/>
+            <a:ext cx="10618927" cy="365760"/>
           </a:xfrm>
           <a:prstGeom prst="rect">
             <a:avLst/>
@@ -10100,7 +8730,7 @@
                 <a:ea typeface="Pretendard" pitchFamily="34" charset="-122"/>
                 <a:cs typeface="Pretendard" pitchFamily="34" charset="-120"/>
               </a:rPr>
-              <a:t>초기 관심 표명 → 담당자 연락</a:t>
+              <a:t>1단계</a:t>
             </a:r>
             <a:endParaRPr lang="en-US" sz="1600" dirty="0"/>
           </a:p>
@@ -10115,7 +8745,7 @@
         <p:spPr>
           <a:xfrm>
             <a:off x="786384" y="2761488"/>
-            <a:ext cx="2051228" cy="1828800"/>
+            <a:ext cx="10618927" cy="1828800"/>
           </a:xfrm>
           <a:prstGeom prst="rect">
             <a:avLst/>
@@ -10130,147 +8760,25 @@
             <a:pPr indent="0" marL="0">
               <a:buNone/>
             </a:pPr>
+            <a:r>
+              <a:rPr lang="en-US" sz="1100" dirty="0">
+                <a:solidFill>
+                  <a:srgbClr val="10161F"/>
+                </a:solidFill>
+                <a:latin typeface="Pretendard" pitchFamily="34" charset="0"/>
+                <a:ea typeface="Pretendard" pitchFamily="34" charset="-122"/>
+                <a:cs typeface="Pretendard" pitchFamily="34" charset="-120"/>
+              </a:rPr>
+              <a:t>{"ok"</a:t>
+            </a:r>
             <a:endParaRPr lang="en-US" sz="1100" dirty="0"/>
           </a:p>
-        </p:txBody>
-      </p:sp>
-      <p:sp>
-        <p:nvSpPr>
-          <p:cNvPr id="11" name="Shape 9"/>
-          <p:cNvSpPr/>
-          <p:nvPr/>
-        </p:nvSpPr>
-        <p:spPr>
-          <a:xfrm>
-            <a:off x="3148508" y="3035808"/>
-            <a:ext cx="182880" cy="274320"/>
-          </a:xfrm>
-          <a:prstGeom prst="rightArrow">
-            <a:avLst/>
-          </a:prstGeom>
-          <a:solidFill>
-            <a:srgbClr val="CBD5E0"/>
-          </a:solidFill>
-          <a:ln w="6350">
-            <a:solidFill>
-              <a:srgbClr val="718096"/>
-            </a:solidFill>
-            <a:prstDash val="solid"/>
-          </a:ln>
-        </p:spPr>
-      </p:sp>
-      <p:sp>
-        <p:nvSpPr>
-          <p:cNvPr id="12" name="Shape 10"/>
-          <p:cNvSpPr/>
-          <p:nvPr/>
-        </p:nvSpPr>
-        <p:spPr>
-          <a:xfrm>
-            <a:off x="3422828" y="1572768"/>
-            <a:ext cx="2490140" cy="3200400"/>
-          </a:xfrm>
-          <a:prstGeom prst="roundRect">
-            <a:avLst>
-              <a:gd name="adj" fmla="val 2203"/>
-            </a:avLst>
-          </a:prstGeom>
-          <a:solidFill>
-            <a:srgbClr val="F7FAFC"/>
-          </a:solidFill>
-          <a:ln w="6350">
-            <a:solidFill>
-              <a:srgbClr val="CBD5E0"/>
-            </a:solidFill>
-            <a:prstDash val="solid"/>
-          </a:ln>
-        </p:spPr>
-      </p:sp>
-      <p:sp>
-        <p:nvSpPr>
-          <p:cNvPr id="13" name="Shape 11"/>
-          <p:cNvSpPr/>
-          <p:nvPr/>
-        </p:nvSpPr>
-        <p:spPr>
-          <a:xfrm>
-            <a:off x="3642284" y="1792224"/>
-            <a:ext cx="384048" cy="384048"/>
-          </a:xfrm>
-          <a:prstGeom prst="ellipse">
-            <a:avLst/>
-          </a:prstGeom>
-          <a:solidFill>
-            <a:srgbClr val="B98A2E"/>
-          </a:solidFill>
-          <a:ln/>
-        </p:spPr>
-      </p:sp>
-      <p:sp>
-        <p:nvSpPr>
-          <p:cNvPr id="14" name="Text 12"/>
-          <p:cNvSpPr/>
-          <p:nvPr/>
-        </p:nvSpPr>
-        <p:spPr>
-          <a:xfrm>
-            <a:off x="3642284" y="1792224"/>
-            <a:ext cx="384048" cy="384048"/>
-          </a:xfrm>
-          <a:prstGeom prst="rect">
-            <a:avLst/>
-          </a:prstGeom>
-          <a:noFill/>
-          <a:ln/>
-        </p:spPr>
-        <p:txBody>
-          <a:bodyPr wrap="square" lIns="0" tIns="0" rIns="0" bIns="0" rtlCol="0" anchor="ctr"/>
-          <a:lstStyle/>
-          <a:p>
-            <a:pPr algn="ctr" indent="0" marL="0">
-              <a:buNone/>
-            </a:pPr>
-            <a:r>
-              <a:rPr lang="en-US" sz="1300" b="1" dirty="0">
-                <a:solidFill>
-                  <a:srgbClr val="FFFFFF"/>
-                </a:solidFill>
-                <a:latin typeface="Arial" pitchFamily="34" charset="0"/>
-                <a:ea typeface="Arial" pitchFamily="34" charset="-122"/>
-                <a:cs typeface="Arial" pitchFamily="34" charset="-120"/>
-              </a:rPr>
-              <a:t>STEP 2</a:t>
-            </a:r>
-            <a:endParaRPr lang="en-US" sz="1300" dirty="0"/>
-          </a:p>
-        </p:txBody>
-      </p:sp>
-      <p:sp>
-        <p:nvSpPr>
-          <p:cNvPr id="15" name="Text 13"/>
-          <p:cNvSpPr/>
-          <p:nvPr/>
-        </p:nvSpPr>
-        <p:spPr>
-          <a:xfrm>
-            <a:off x="3642284" y="2304288"/>
-            <a:ext cx="2051228" cy="365760"/>
-          </a:xfrm>
-          <a:prstGeom prst="rect">
-            <a:avLst/>
-          </a:prstGeom>
-          <a:noFill/>
-          <a:ln/>
-        </p:spPr>
-        <p:txBody>
-          <a:bodyPr wrap="square" rtlCol="0" anchor="ctr"/>
-          <a:lstStyle/>
           <a:p>
             <a:pPr indent="0" marL="0">
               <a:buNone/>
             </a:pPr>
             <a:r>
-              <a:rPr lang="en-US" sz="1600" b="1" dirty="0">
+              <a:rPr lang="en-US" sz="1100" dirty="0">
                 <a:solidFill>
                   <a:srgbClr val="10161F"/>
                 </a:solidFill>
@@ -10278,399 +8786,15 @@
                 <a:ea typeface="Pretendard" pitchFamily="34" charset="-122"/>
                 <a:cs typeface="Pretendard" pitchFamily="34" charset="-120"/>
               </a:rPr>
-              <a:t>NDA 체결 → 임차인 정보 및 임대차계약서 제공</a:t>
-            </a:r>
-            <a:endParaRPr lang="en-US" sz="1600" dirty="0"/>
-          </a:p>
-        </p:txBody>
-      </p:sp>
-      <p:sp>
-        <p:nvSpPr>
-          <p:cNvPr id="16" name="Text 14"/>
-          <p:cNvSpPr/>
-          <p:nvPr/>
-        </p:nvSpPr>
-        <p:spPr>
-          <a:xfrm>
-            <a:off x="3642284" y="2761488"/>
-            <a:ext cx="2051228" cy="1828800"/>
-          </a:xfrm>
-          <a:prstGeom prst="rect">
-            <a:avLst/>
-          </a:prstGeom>
-          <a:noFill/>
-          <a:ln/>
-        </p:spPr>
-        <p:txBody>
-          <a:bodyPr wrap="square" rtlCol="0" anchor="t"/>
-          <a:lstStyle/>
-          <a:p>
-            <a:pPr indent="0" marL="0">
-              <a:buNone/>
-            </a:pPr>
+              <a:t>true,"mocked":true,"extractedFields":{"area_signal":"역삼","asset_type":"오피스빌딩","price_band":"300억","size_signal":"3000평(약 9917.4㎡)"},"extractedFacts":{"region":"역삼","exactAddressCandidate":"역삼동 742-1","assetType":"오피스빌딩","priceText":"300억","sizeText":"3000평(약 9917.4㎡)","currentUse":"오피스","currentUseSignal":"근린생활시설","leaseSignal":"임대중","vacancySignal":"공실없음","tenantNames":["쿠팡","네이버"],"unitRentTexts":["301호: 1500만"],"sellerMotivationText":"자산 효율화","brokerNotes":["초역세권 매물"]},"detectedSensitiveFields":["exact_address","tenant_name"],"ambiguousFields":[],"warnings":[],"areaSignal":"역삼","assetType":"오피스빌딩","priceBand":"300억","sizeSignal":"3000평(약 9917.4㎡)","dealType":"매각","buildingName":"역삼 센트럴타워","exactAddress":"역삼동 742-1","totalFloorArea":9917.3,"buildYear":2015,"currentUseSignal":"근린생활시설","vacancySignal":"공실 없음","fitSummary":"초역세권 근생 빌딩으로 시행/사옥 매입에 최적화","cautionSummary":"주요 임차인 만기 조율 필요","hiddenFields":["exact_address","seller_motivation"],"confidence":{"areaSignal":"confirmed","assetType":"confirmed","priceBand":"ai_hypothesis","fitSummary":"ai_hypothesis"},"missingData":["sizeSignal"],"boundaryNote":"본 자료는 실거래 통계 기반 참고치입니다.","buyerType":"법인 사옥형","budgetRange":{"min":50,"max":80,"display":"50억~80억"},"preferredRegions":["강남","성수"],"assetTypes":["꼬마빌딩","사옥용"],"purchasePurpose":"사옥용 매입","mustHave":["초역세권","주차"],"niceToHave":["테라스","루프탑"],"riskTolerance":"medium","financingNote":"자본금 50% 준비","missingQuestions":["구체적인 입주 시기가 언제인가요?","선호하는 수익률이 있나요?"],"privacyNotes":["연락처 비공개"],"fitReasons":["매수자 예산(50-80억)에 부합하는 매물입니다.","요청하신 성수/강남 권역에 해당합니다."],"cautionReasons":["요청한 용도와 달리 명도 협의가 다소 필요합니다."],"recommendedNextAction":"현장 답사 제안","kakaoMessage":"안녕하세요! 요청하신 조건에 부합하는 추천 매물이 있어 안내해 드립니다. 확인해보시고 피드백 부탁드립니다.","title":"강남 역삼역 초역세권 오피스 사옥용 빌딩 매각","shortSummary":"역삼역 도보 5분 거리의 준신축급 대형 오피스빌딩입니다.","dealPoints":["초역세권","사옥 최적"],"cautionPoints":["명도 조율 필요"],"hiddenInfoNotice":["보증금 및 지번은 인가 후 확인 가능"],"gateMessage":"G1 등급 등록이 필요합니다.","kakaoText":"강남 역삼역 오피스 빌딩 매각 안내입니다.","exactUnitCandidate":"101호","floor":"1층","areaSqmText":"150㎡","spaceType":"office","depositText":"5000만","monthlyRentText":"400만","maintenanceFeeText":"50만","availableFromText":"즉시입주","leaseTermMonthsText":"24","incentivesText":"렌트프리 2개월","restrictions":[],"landlordIdentity":"김성수","currentTenant":"스타트업","vacancyReason":"이전 확장","rentNegotiation":"협의 가능","region":"성수동","areaSqm":150,"deposit":5000,"monthlyRent":400,"maintenanceFee":50,"availableFrom":"즉시입주","leaseTermMonths":24,"incentives":{"rentFreeMonths":2,"interiorSupport":"일부 인테리어 지원","freeRentDetail":"렌트프리 2개월 지원"},"shortSummaryLease":"성수역 도보 5분 거리 1층 리테일 상가 매물입니다."}</a:t>
+            </a:r>
             <a:endParaRPr lang="en-US" sz="1100" dirty="0"/>
           </a:p>
         </p:txBody>
       </p:sp>
       <p:sp>
         <p:nvSpPr>
-          <p:cNvPr id="17" name="Shape 15"/>
-          <p:cNvSpPr/>
-          <p:nvPr/>
-        </p:nvSpPr>
-        <p:spPr>
-          <a:xfrm>
-            <a:off x="6004408" y="3035808"/>
-            <a:ext cx="182880" cy="274320"/>
-          </a:xfrm>
-          <a:prstGeom prst="rightArrow">
-            <a:avLst/>
-          </a:prstGeom>
-          <a:solidFill>
-            <a:srgbClr val="CBD5E0"/>
-          </a:solidFill>
-          <a:ln w="6350">
-            <a:solidFill>
-              <a:srgbClr val="718096"/>
-            </a:solidFill>
-            <a:prstDash val="solid"/>
-          </a:ln>
-        </p:spPr>
-      </p:sp>
-      <p:sp>
-        <p:nvSpPr>
-          <p:cNvPr id="18" name="Shape 16"/>
-          <p:cNvSpPr/>
-          <p:nvPr/>
-        </p:nvSpPr>
-        <p:spPr>
-          <a:xfrm>
-            <a:off x="6278728" y="1572768"/>
-            <a:ext cx="2490140" cy="3200400"/>
-          </a:xfrm>
-          <a:prstGeom prst="roundRect">
-            <a:avLst>
-              <a:gd name="adj" fmla="val 2203"/>
-            </a:avLst>
-          </a:prstGeom>
-          <a:solidFill>
-            <a:srgbClr val="F7FAFC"/>
-          </a:solidFill>
-          <a:ln w="6350">
-            <a:solidFill>
-              <a:srgbClr val="CBD5E0"/>
-            </a:solidFill>
-            <a:prstDash val="solid"/>
-          </a:ln>
-        </p:spPr>
-      </p:sp>
-      <p:sp>
-        <p:nvSpPr>
-          <p:cNvPr id="19" name="Shape 17"/>
-          <p:cNvSpPr/>
-          <p:nvPr/>
-        </p:nvSpPr>
-        <p:spPr>
-          <a:xfrm>
-            <a:off x="6498184" y="1792224"/>
-            <a:ext cx="384048" cy="384048"/>
-          </a:xfrm>
-          <a:prstGeom prst="ellipse">
-            <a:avLst/>
-          </a:prstGeom>
-          <a:solidFill>
-            <a:srgbClr val="B98A2E"/>
-          </a:solidFill>
-          <a:ln/>
-        </p:spPr>
-      </p:sp>
-      <p:sp>
-        <p:nvSpPr>
-          <p:cNvPr id="20" name="Text 18"/>
-          <p:cNvSpPr/>
-          <p:nvPr/>
-        </p:nvSpPr>
-        <p:spPr>
-          <a:xfrm>
-            <a:off x="6498184" y="1792224"/>
-            <a:ext cx="384048" cy="384048"/>
-          </a:xfrm>
-          <a:prstGeom prst="rect">
-            <a:avLst/>
-          </a:prstGeom>
-          <a:noFill/>
-          <a:ln/>
-        </p:spPr>
-        <p:txBody>
-          <a:bodyPr wrap="square" lIns="0" tIns="0" rIns="0" bIns="0" rtlCol="0" anchor="ctr"/>
-          <a:lstStyle/>
-          <a:p>
-            <a:pPr algn="ctr" indent="0" marL="0">
-              <a:buNone/>
-            </a:pPr>
-            <a:r>
-              <a:rPr lang="en-US" sz="1300" b="1" dirty="0">
-                <a:solidFill>
-                  <a:srgbClr val="FFFFFF"/>
-                </a:solidFill>
-                <a:latin typeface="Arial" pitchFamily="34" charset="0"/>
-                <a:ea typeface="Arial" pitchFamily="34" charset="-122"/>
-                <a:cs typeface="Arial" pitchFamily="34" charset="-120"/>
-              </a:rPr>
-              <a:t>STEP 3</a:t>
-            </a:r>
-            <a:endParaRPr lang="en-US" sz="1300" dirty="0"/>
-          </a:p>
-        </p:txBody>
-      </p:sp>
-      <p:sp>
-        <p:nvSpPr>
-          <p:cNvPr id="21" name="Text 19"/>
-          <p:cNvSpPr/>
-          <p:nvPr/>
-        </p:nvSpPr>
-        <p:spPr>
-          <a:xfrm>
-            <a:off x="6498184" y="2304288"/>
-            <a:ext cx="2051228" cy="365760"/>
-          </a:xfrm>
-          <a:prstGeom prst="rect">
-            <a:avLst/>
-          </a:prstGeom>
-          <a:noFill/>
-          <a:ln/>
-        </p:spPr>
-        <p:txBody>
-          <a:bodyPr wrap="square" rtlCol="0" anchor="ctr"/>
-          <a:lstStyle/>
-          <a:p>
-            <a:pPr indent="0" marL="0">
-              <a:buNone/>
-            </a:pPr>
-            <a:r>
-              <a:rPr lang="en-US" sz="1600" b="1" dirty="0">
-                <a:solidFill>
-                  <a:srgbClr val="10161F"/>
-                </a:solidFill>
-                <a:latin typeface="Pretendard" pitchFamily="34" charset="0"/>
-                <a:ea typeface="Pretendard" pitchFamily="34" charset="-122"/>
-                <a:cs typeface="Pretendard" pitchFamily="34" charset="-120"/>
-              </a:rPr>
-              <a:t>현장 실사 일정 조율 → 건물 컨디션 및 설비 직접 확인</a:t>
-            </a:r>
-            <a:endParaRPr lang="en-US" sz="1600" dirty="0"/>
-          </a:p>
-        </p:txBody>
-      </p:sp>
-      <p:sp>
-        <p:nvSpPr>
-          <p:cNvPr id="22" name="Text 20"/>
-          <p:cNvSpPr/>
-          <p:nvPr/>
-        </p:nvSpPr>
-        <p:spPr>
-          <a:xfrm>
-            <a:off x="6498184" y="2761488"/>
-            <a:ext cx="2051228" cy="1828800"/>
-          </a:xfrm>
-          <a:prstGeom prst="rect">
-            <a:avLst/>
-          </a:prstGeom>
-          <a:noFill/>
-          <a:ln/>
-        </p:spPr>
-        <p:txBody>
-          <a:bodyPr wrap="square" rtlCol="0" anchor="t"/>
-          <a:lstStyle/>
-          <a:p>
-            <a:pPr indent="0" marL="0">
-              <a:buNone/>
-            </a:pPr>
-            <a:endParaRPr lang="en-US" sz="1100" dirty="0"/>
-          </a:p>
-        </p:txBody>
-      </p:sp>
-      <p:sp>
-        <p:nvSpPr>
-          <p:cNvPr id="23" name="Shape 21"/>
-          <p:cNvSpPr/>
-          <p:nvPr/>
-        </p:nvSpPr>
-        <p:spPr>
-          <a:xfrm>
-            <a:off x="8860307" y="3035808"/>
-            <a:ext cx="182880" cy="274320"/>
-          </a:xfrm>
-          <a:prstGeom prst="rightArrow">
-            <a:avLst/>
-          </a:prstGeom>
-          <a:solidFill>
-            <a:srgbClr val="CBD5E0"/>
-          </a:solidFill>
-          <a:ln w="6350">
-            <a:solidFill>
-              <a:srgbClr val="718096"/>
-            </a:solidFill>
-            <a:prstDash val="solid"/>
-          </a:ln>
-        </p:spPr>
-      </p:sp>
-      <p:sp>
-        <p:nvSpPr>
-          <p:cNvPr id="24" name="Shape 22"/>
-          <p:cNvSpPr/>
-          <p:nvPr/>
-        </p:nvSpPr>
-        <p:spPr>
-          <a:xfrm>
-            <a:off x="9134627" y="1572768"/>
-            <a:ext cx="2490140" cy="3200400"/>
-          </a:xfrm>
-          <a:prstGeom prst="roundRect">
-            <a:avLst>
-              <a:gd name="adj" fmla="val 2203"/>
-            </a:avLst>
-          </a:prstGeom>
-          <a:solidFill>
-            <a:srgbClr val="F7FAFC"/>
-          </a:solidFill>
-          <a:ln w="6350">
-            <a:solidFill>
-              <a:srgbClr val="CBD5E0"/>
-            </a:solidFill>
-            <a:prstDash val="solid"/>
-          </a:ln>
-        </p:spPr>
-      </p:sp>
-      <p:sp>
-        <p:nvSpPr>
-          <p:cNvPr id="25" name="Shape 23"/>
-          <p:cNvSpPr/>
-          <p:nvPr/>
-        </p:nvSpPr>
-        <p:spPr>
-          <a:xfrm>
-            <a:off x="9354083" y="1792224"/>
-            <a:ext cx="384048" cy="384048"/>
-          </a:xfrm>
-          <a:prstGeom prst="ellipse">
-            <a:avLst/>
-          </a:prstGeom>
-          <a:solidFill>
-            <a:srgbClr val="B98A2E"/>
-          </a:solidFill>
-          <a:ln/>
-        </p:spPr>
-      </p:sp>
-      <p:sp>
-        <p:nvSpPr>
-          <p:cNvPr id="26" name="Text 24"/>
-          <p:cNvSpPr/>
-          <p:nvPr/>
-        </p:nvSpPr>
-        <p:spPr>
-          <a:xfrm>
-            <a:off x="9354083" y="1792224"/>
-            <a:ext cx="384048" cy="384048"/>
-          </a:xfrm>
-          <a:prstGeom prst="rect">
-            <a:avLst/>
-          </a:prstGeom>
-          <a:noFill/>
-          <a:ln/>
-        </p:spPr>
-        <p:txBody>
-          <a:bodyPr wrap="square" lIns="0" tIns="0" rIns="0" bIns="0" rtlCol="0" anchor="ctr"/>
-          <a:lstStyle/>
-          <a:p>
-            <a:pPr algn="ctr" indent="0" marL="0">
-              <a:buNone/>
-            </a:pPr>
-            <a:r>
-              <a:rPr lang="en-US" sz="1300" b="1" dirty="0">
-                <a:solidFill>
-                  <a:srgbClr val="FFFFFF"/>
-                </a:solidFill>
-                <a:latin typeface="Arial" pitchFamily="34" charset="0"/>
-                <a:ea typeface="Arial" pitchFamily="34" charset="-122"/>
-                <a:cs typeface="Arial" pitchFamily="34" charset="-120"/>
-              </a:rPr>
-              <a:t>STEP 4</a:t>
-            </a:r>
-            <a:endParaRPr lang="en-US" sz="1300" dirty="0"/>
-          </a:p>
-        </p:txBody>
-      </p:sp>
-      <p:sp>
-        <p:nvSpPr>
-          <p:cNvPr id="27" name="Text 25"/>
-          <p:cNvSpPr/>
-          <p:nvPr/>
-        </p:nvSpPr>
-        <p:spPr>
-          <a:xfrm>
-            <a:off x="9354083" y="2304288"/>
-            <a:ext cx="2051228" cy="365760"/>
-          </a:xfrm>
-          <a:prstGeom prst="rect">
-            <a:avLst/>
-          </a:prstGeom>
-          <a:noFill/>
-          <a:ln/>
-        </p:spPr>
-        <p:txBody>
-          <a:bodyPr wrap="square" rtlCol="0" anchor="ctr"/>
-          <a:lstStyle/>
-          <a:p>
-            <a:pPr indent="0" marL="0">
-              <a:buNone/>
-            </a:pPr>
-            <a:r>
-              <a:rPr lang="en-US" sz="1600" b="1" dirty="0">
-                <a:solidFill>
-                  <a:srgbClr val="10161F"/>
-                </a:solidFill>
-                <a:latin typeface="Pretendard" pitchFamily="34" charset="0"/>
-                <a:ea typeface="Pretendard" pitchFamily="34" charset="-122"/>
-                <a:cs typeface="Pretendard" pitchFamily="34" charset="-120"/>
-              </a:rPr>
-              <a:t>LOI(투자의향서) 제출 → 가격 협의 개시</a:t>
-            </a:r>
-            <a:endParaRPr lang="en-US" sz="1600" dirty="0"/>
-          </a:p>
-        </p:txBody>
-      </p:sp>
-      <p:sp>
-        <p:nvSpPr>
-          <p:cNvPr id="28" name="Text 26"/>
-          <p:cNvSpPr/>
-          <p:nvPr/>
-        </p:nvSpPr>
-        <p:spPr>
-          <a:xfrm>
-            <a:off x="9354083" y="2761488"/>
-            <a:ext cx="2051228" cy="1828800"/>
-          </a:xfrm>
-          <a:prstGeom prst="rect">
-            <a:avLst/>
-          </a:prstGeom>
-          <a:noFill/>
-          <a:ln/>
-        </p:spPr>
-        <p:txBody>
-          <a:bodyPr wrap="square" rtlCol="0" anchor="t"/>
-          <a:lstStyle/>
-          <a:p>
-            <a:pPr indent="0" marL="0">
-              <a:buNone/>
-            </a:pPr>
-            <a:endParaRPr lang="en-US" sz="1100" dirty="0"/>
-          </a:p>
-        </p:txBody>
-      </p:sp>
-      <p:sp>
-        <p:nvSpPr>
-          <p:cNvPr id="29" name="Text 27"/>
+          <p:cNvPr id="11" name="Text 9"/>
           <p:cNvSpPr/>
           <p:nvPr/>
         </p:nvSpPr>
@@ -10709,7 +8833,7 @@
       </p:sp>
       <p:sp>
         <p:nvSpPr>
-          <p:cNvPr id="30" name="Text 28"/>
+          <p:cNvPr id="12" name="Text 10"/>
           <p:cNvSpPr/>
           <p:nvPr/>
         </p:nvSpPr>

--- a/docs/test/stress/e2e-outputs/development_case13_mullae_dev_basic.pptx
+++ b/docs/test/stress/e2e-outputs/development_case13_mullae_dev_basic.pptx
@@ -15,9 +15,10 @@
     <p:sldId id="263" r:id="rId9"/>
     <p:sldId id="264" r:id="rId10"/>
     <p:sldId id="265" r:id="rId11"/>
+    <p:sldId id="266" r:id="rId12"/>
   </p:sldIdLst>
   <p:notesMasterIdLst>
-    <p:notesMasterId r:id="rId12"/>
+    <p:notesMasterId r:id="rId13"/>
   </p:notesMasterIdLst>
   <p:sldSz cx="12192000" cy="6858000"/>
   <p:notesSz cx="6858000" cy="12192000"/>
@@ -623,6 +624,94 @@
             <a:fld id="{F7021451-1387-4CA6-816F-3879F97B5CBC}" type="slidenum">
               <a:rPr lang="en-US"/>
               <a:t>10</a:t>
+            </a:fld>
+            <a:endParaRPr lang="en-US"/>
+          </a:p>
+        </p:txBody>
+      </p:sp>
+    </p:spTree>
+    <p:extLst>
+      <p:ext uri="{BB962C8B-B14F-4D97-AF65-F5344CB8AC3E}">
+        <p14:creationId xmlns:p14="http://schemas.microsoft.com/office/powerpoint/2010/main" val="1024086991"/>
+      </p:ext>
+    </p:extLst>
+  </p:cSld>
+  <p:clrMapOvr>
+    <a:masterClrMapping/>
+  </p:clrMapOvr>
+</p:notes>
+</file>
+
+<file path=ppt/notesSlides/notesSlide11.xml><?xml version="1.0" encoding="utf-8"?>
+<p:notes xmlns:a="http://schemas.openxmlformats.org/drawingml/2006/main" xmlns:r="http://schemas.openxmlformats.org/officeDocument/2006/relationships" xmlns:p="http://schemas.openxmlformats.org/presentationml/2006/main">
+  <p:cSld>
+    <p:spTree>
+      <p:nvGrpSpPr>
+        <p:cNvPr id="1" name=""/>
+        <p:cNvGrpSpPr/>
+        <p:nvPr/>
+      </p:nvGrpSpPr>
+      <p:grpSpPr>
+        <a:xfrm>
+          <a:off x="0" y="0"/>
+          <a:ext cx="0" cy="0"/>
+          <a:chOff x="0" y="0"/>
+          <a:chExt cx="0" cy="0"/>
+        </a:xfrm>
+      </p:grpSpPr>
+      <p:sp>
+        <p:nvSpPr>
+          <p:cNvPr id="2" name="Slide Image Placeholder 1"/>
+          <p:cNvSpPr>
+            <a:spLocks noGrp="1" noRot="1" noChangeAspect="1"/>
+          </p:cNvSpPr>
+          <p:nvPr>
+            <p:ph type="sldImg"/>
+          </p:nvPr>
+        </p:nvSpPr>
+        <p:spPr/>
+      </p:sp>
+      <p:sp>
+        <p:nvSpPr>
+          <p:cNvPr id="3" name="Notes Placeholder 2"/>
+          <p:cNvSpPr>
+            <a:spLocks noGrp="1"/>
+          </p:cNvSpPr>
+          <p:nvPr>
+            <p:ph type="body" idx="1"/>
+          </p:nvPr>
+        </p:nvSpPr>
+        <p:spPr/>
+        <p:txBody>
+          <a:bodyPr/>
+          <a:lstStyle/>
+          <a:p>
+            <a:r>
+              <a:rPr lang="en-US" dirty="0"/>
+              <a:t/>
+            </a:r>
+            <a:endParaRPr lang="en-US" dirty="0"/>
+          </a:p>
+        </p:txBody>
+      </p:sp>
+      <p:sp>
+        <p:nvSpPr>
+          <p:cNvPr id="4" name="Slide Number Placeholder 3"/>
+          <p:cNvSpPr>
+            <a:spLocks noGrp="1"/>
+          </p:cNvSpPr>
+          <p:nvPr>
+            <p:ph type="sldNum" sz="quarter" idx="10"/>
+          </p:nvPr>
+        </p:nvSpPr>
+        <p:spPr/>
+        <p:txBody>
+          <a:bodyPr/>
+          <a:lstStyle/>
+          <a:p>
+            <a:fld id="{F7021451-1387-4CA6-816F-3879F97B5CBC}" type="slidenum">
+              <a:rPr lang="en-US"/>
+              <a:t>11</a:t>
             </a:fld>
             <a:endParaRPr lang="en-US"/>
           </a:p>
@@ -2297,6 +2386,434 @@
     <p:bg>
       <p:bgPr>
         <a:solidFill>
+          <a:srgbClr val="FFFFFF"/>
+        </a:solidFill>
+      </p:bgPr>
+    </p:bg>
+    <p:spTree>
+      <p:nvGrpSpPr>
+        <p:cNvPr id="1" name=""/>
+        <p:cNvGrpSpPr/>
+        <p:nvPr/>
+      </p:nvGrpSpPr>
+      <p:grpSpPr>
+        <a:xfrm>
+          <a:off x="0" y="0"/>
+          <a:ext cx="0" cy="0"/>
+          <a:chOff x="0" y="0"/>
+          <a:chExt cx="0" cy="0"/>
+        </a:xfrm>
+      </p:grpSpPr>
+      <p:sp>
+        <p:nvSpPr>
+          <p:cNvPr id="2" name="Shape 0"/>
+          <p:cNvSpPr/>
+          <p:nvPr/>
+        </p:nvSpPr>
+        <p:spPr>
+          <a:xfrm>
+            <a:off x="566928" y="457200"/>
+            <a:ext cx="384048" cy="384048"/>
+          </a:xfrm>
+          <a:prstGeom prst="ellipse">
+            <a:avLst/>
+          </a:prstGeom>
+          <a:solidFill>
+            <a:srgbClr val="B98A2E"/>
+          </a:solidFill>
+          <a:ln/>
+        </p:spPr>
+      </p:sp>
+      <p:sp>
+        <p:nvSpPr>
+          <p:cNvPr id="3" name="Text 1"/>
+          <p:cNvSpPr/>
+          <p:nvPr/>
+        </p:nvSpPr>
+        <p:spPr>
+          <a:xfrm>
+            <a:off x="566928" y="457200"/>
+            <a:ext cx="384048" cy="384048"/>
+          </a:xfrm>
+          <a:prstGeom prst="rect">
+            <a:avLst/>
+          </a:prstGeom>
+          <a:noFill/>
+          <a:ln/>
+        </p:spPr>
+        <p:txBody>
+          <a:bodyPr wrap="square" lIns="0" tIns="0" rIns="0" bIns="0" rtlCol="0" anchor="ctr"/>
+          <a:lstStyle/>
+          <a:p>
+            <a:pPr algn="ctr" indent="0" marL="0">
+              <a:buNone/>
+            </a:pPr>
+            <a:r>
+              <a:rPr lang="en-US" sz="1300" b="1" dirty="0">
+                <a:solidFill>
+                  <a:srgbClr val="FFFFFF"/>
+                </a:solidFill>
+                <a:latin typeface="Arial" pitchFamily="34" charset="0"/>
+                <a:ea typeface="Arial" pitchFamily="34" charset="-122"/>
+                <a:cs typeface="Arial" pitchFamily="34" charset="-120"/>
+              </a:rPr>
+              <a:t>10</a:t>
+            </a:r>
+            <a:endParaRPr lang="en-US" sz="1300" dirty="0"/>
+          </a:p>
+        </p:txBody>
+      </p:sp>
+      <p:sp>
+        <p:nvSpPr>
+          <p:cNvPr id="4" name="Text 2"/>
+          <p:cNvSpPr/>
+          <p:nvPr/>
+        </p:nvSpPr>
+        <p:spPr>
+          <a:xfrm>
+            <a:off x="1133856" y="457200"/>
+            <a:ext cx="10490911" cy="182880"/>
+          </a:xfrm>
+          <a:prstGeom prst="rect">
+            <a:avLst/>
+          </a:prstGeom>
+          <a:noFill/>
+          <a:ln/>
+        </p:spPr>
+        <p:txBody>
+          <a:bodyPr wrap="square" lIns="0" tIns="0" rIns="0" bIns="0" rtlCol="0" anchor="ctr"/>
+          <a:lstStyle/>
+          <a:p>
+            <a:pPr indent="0" marL="0">
+              <a:buNone/>
+            </a:pPr>
+            <a:r>
+              <a:rPr lang="en-US" sz="950" b="1" spc="200" kern="0" dirty="0">
+                <a:solidFill>
+                  <a:srgbClr val="B98A2E"/>
+                </a:solidFill>
+                <a:latin typeface="Arial" pitchFamily="34" charset="0"/>
+                <a:ea typeface="Arial" pitchFamily="34" charset="-122"/>
+                <a:cs typeface="Arial" pitchFamily="34" charset="-120"/>
+              </a:rPr>
+              <a:t>Process</a:t>
+            </a:r>
+            <a:endParaRPr lang="en-US" sz="950" dirty="0"/>
+          </a:p>
+        </p:txBody>
+      </p:sp>
+      <p:sp>
+        <p:nvSpPr>
+          <p:cNvPr id="5" name="Text 3"/>
+          <p:cNvSpPr/>
+          <p:nvPr/>
+        </p:nvSpPr>
+        <p:spPr>
+          <a:xfrm>
+            <a:off x="1133856" y="640080"/>
+            <a:ext cx="10490911" cy="365760"/>
+          </a:xfrm>
+          <a:prstGeom prst="rect">
+            <a:avLst/>
+          </a:prstGeom>
+          <a:noFill/>
+          <a:ln/>
+        </p:spPr>
+        <p:txBody>
+          <a:bodyPr wrap="square" lIns="0" tIns="0" rIns="0" bIns="0" rtlCol="0" anchor="ctr"/>
+          <a:lstStyle/>
+          <a:p>
+            <a:pPr indent="0" marL="0">
+              <a:buNone/>
+            </a:pPr>
+            <a:r>
+              <a:rPr lang="en-US" sz="2300" b="1" dirty="0">
+                <a:solidFill>
+                  <a:srgbClr val="10161F"/>
+                </a:solidFill>
+                <a:latin typeface="Pretendard" pitchFamily="34" charset="0"/>
+                <a:ea typeface="Pretendard" pitchFamily="34" charset="-122"/>
+                <a:cs typeface="Pretendard" pitchFamily="34" charset="-120"/>
+              </a:rPr>
+              <a:t>검토 후 다음 단계는 무엇인가</a:t>
+            </a:r>
+            <a:endParaRPr lang="en-US" sz="2300" dirty="0"/>
+          </a:p>
+        </p:txBody>
+      </p:sp>
+      <p:sp>
+        <p:nvSpPr>
+          <p:cNvPr id="6" name="Shape 4"/>
+          <p:cNvSpPr/>
+          <p:nvPr/>
+        </p:nvSpPr>
+        <p:spPr>
+          <a:xfrm>
+            <a:off x="566928" y="1572768"/>
+            <a:ext cx="11057839" cy="3200400"/>
+          </a:xfrm>
+          <a:prstGeom prst="roundRect">
+            <a:avLst>
+              <a:gd name="adj" fmla="val 1714"/>
+            </a:avLst>
+          </a:prstGeom>
+          <a:solidFill>
+            <a:srgbClr val="F7FAFC"/>
+          </a:solidFill>
+          <a:ln w="6350">
+            <a:solidFill>
+              <a:srgbClr val="CBD5E0"/>
+            </a:solidFill>
+            <a:prstDash val="solid"/>
+          </a:ln>
+        </p:spPr>
+      </p:sp>
+      <p:sp>
+        <p:nvSpPr>
+          <p:cNvPr id="7" name="Shape 5"/>
+          <p:cNvSpPr/>
+          <p:nvPr/>
+        </p:nvSpPr>
+        <p:spPr>
+          <a:xfrm>
+            <a:off x="786384" y="1792224"/>
+            <a:ext cx="438912" cy="438912"/>
+          </a:xfrm>
+          <a:prstGeom prst="ellipse">
+            <a:avLst/>
+          </a:prstGeom>
+          <a:solidFill>
+            <a:srgbClr val="B98A2E"/>
+          </a:solidFill>
+          <a:ln/>
+        </p:spPr>
+      </p:sp>
+      <p:sp>
+        <p:nvSpPr>
+          <p:cNvPr id="8" name="Text 6"/>
+          <p:cNvSpPr/>
+          <p:nvPr/>
+        </p:nvSpPr>
+        <p:spPr>
+          <a:xfrm>
+            <a:off x="786384" y="1792224"/>
+            <a:ext cx="438912" cy="438912"/>
+          </a:xfrm>
+          <a:prstGeom prst="rect">
+            <a:avLst/>
+          </a:prstGeom>
+          <a:noFill/>
+          <a:ln/>
+        </p:spPr>
+        <p:txBody>
+          <a:bodyPr wrap="square" lIns="0" tIns="0" rIns="0" bIns="0" rtlCol="0" anchor="ctr"/>
+          <a:lstStyle/>
+          <a:p>
+            <a:pPr algn="ctr" indent="0" marL="0">
+              <a:buNone/>
+            </a:pPr>
+            <a:r>
+              <a:rPr lang="en-US" sz="1400" b="1" dirty="0">
+                <a:solidFill>
+                  <a:srgbClr val="FFFFFF"/>
+                </a:solidFill>
+                <a:latin typeface="Arial" pitchFamily="34" charset="0"/>
+                <a:ea typeface="Arial" pitchFamily="34" charset="-122"/>
+                <a:cs typeface="Arial" pitchFamily="34" charset="-120"/>
+              </a:rPr>
+              <a:t>01</a:t>
+            </a:r>
+            <a:endParaRPr lang="en-US" sz="1400" dirty="0"/>
+          </a:p>
+        </p:txBody>
+      </p:sp>
+      <p:sp>
+        <p:nvSpPr>
+          <p:cNvPr id="9" name="Text 7"/>
+          <p:cNvSpPr/>
+          <p:nvPr/>
+        </p:nvSpPr>
+        <p:spPr>
+          <a:xfrm>
+            <a:off x="786384" y="2304288"/>
+            <a:ext cx="10618927" cy="365760"/>
+          </a:xfrm>
+          <a:prstGeom prst="rect">
+            <a:avLst/>
+          </a:prstGeom>
+          <a:noFill/>
+          <a:ln/>
+        </p:spPr>
+        <p:txBody>
+          <a:bodyPr wrap="square" rtlCol="0" anchor="ctr"/>
+          <a:lstStyle/>
+          <a:p>
+            <a:pPr indent="0" marL="0">
+              <a:buNone/>
+            </a:pPr>
+            <a:r>
+              <a:rPr lang="en-US" sz="1600" b="1" dirty="0">
+                <a:solidFill>
+                  <a:srgbClr val="10161F"/>
+                </a:solidFill>
+                <a:latin typeface="Pretendard" pitchFamily="34" charset="0"/>
+                <a:ea typeface="Pretendard" pitchFamily="34" charset="-122"/>
+                <a:cs typeface="Pretendard" pitchFamily="34" charset="-120"/>
+              </a:rPr>
+              <a:t>1단계</a:t>
+            </a:r>
+            <a:endParaRPr lang="en-US" sz="1600" dirty="0"/>
+          </a:p>
+        </p:txBody>
+      </p:sp>
+      <p:sp>
+        <p:nvSpPr>
+          <p:cNvPr id="10" name="Text 8"/>
+          <p:cNvSpPr/>
+          <p:nvPr/>
+        </p:nvSpPr>
+        <p:spPr>
+          <a:xfrm>
+            <a:off x="786384" y="2761488"/>
+            <a:ext cx="10618927" cy="1828800"/>
+          </a:xfrm>
+          <a:prstGeom prst="rect">
+            <a:avLst/>
+          </a:prstGeom>
+          <a:noFill/>
+          <a:ln/>
+        </p:spPr>
+        <p:txBody>
+          <a:bodyPr wrap="square" rtlCol="0" anchor="t"/>
+          <a:lstStyle/>
+          <a:p>
+            <a:pPr indent="0" marL="0">
+              <a:buNone/>
+            </a:pPr>
+            <a:r>
+              <a:rPr lang="en-US" sz="1100" dirty="0">
+                <a:solidFill>
+                  <a:srgbClr val="10161F"/>
+                </a:solidFill>
+                <a:latin typeface="Pretendard" pitchFamily="34" charset="0"/>
+                <a:ea typeface="Pretendard" pitchFamily="34" charset="-122"/>
+                <a:cs typeface="Pretendard" pitchFamily="34" charset="-120"/>
+              </a:rPr>
+              <a:t>{"ok"</a:t>
+            </a:r>
+            <a:endParaRPr lang="en-US" sz="1100" dirty="0"/>
+          </a:p>
+          <a:p>
+            <a:pPr indent="0" marL="0">
+              <a:buNone/>
+            </a:pPr>
+            <a:r>
+              <a:rPr lang="en-US" sz="1100" dirty="0">
+                <a:solidFill>
+                  <a:srgbClr val="10161F"/>
+                </a:solidFill>
+                <a:latin typeface="Pretendard" pitchFamily="34" charset="0"/>
+                <a:ea typeface="Pretendard" pitchFamily="34" charset="-122"/>
+                <a:cs typeface="Pretendard" pitchFamily="34" charset="-120"/>
+              </a:rPr>
+              <a:t>true,"mocked":true,"extractedFields":{"area_signal":"역삼","asset_type":"오피스빌딩","price_band":"300억","size_signal":"3000평(약 9917.4㎡)"},"extractedFacts":{"region":"역삼","exactAddressCandidate":"역삼동 742-1","assetType":"오피스빌딩","priceText":"300억","sizeText":"3000평(약 9917.4㎡)","currentUse":"오피스","currentUseSignal":"근린생활시설","leaseSignal":"임대중","vacancySignal":"공실없음","tenantNames":["쿠팡","네이버"],"unitRentTexts":["301호: 1500만"],"sellerMotivationText":"자산 효율화","brokerNotes":["초역세권 매물"]},"detectedSensitiveFields":["exact_address","tenant_name"],"ambiguousFields":[],"warnings":[],"areaSignal":"역삼","assetType":"오피스빌딩","priceBand":"300억","sizeSignal":"3000평(약 9917.4㎡)","dealType":"매각","buildingName":"역삼 센트럴타워","exactAddress":"역삼동 742-1","totalFloorArea":9917.3,"buildYear":2015,"currentUseSignal":"근린생활시설","vacancySignal":"공실 없음","fitSummary":"초역세권 근생 빌딩으로 시행/사옥 매입에 최적화","cautionSummary":"주요 임차인 만기 조율 필요","hiddenFields":["exact_address","seller_motivation"],"confidence":{"areaSignal":"confirmed","assetType":"confirmed","priceBand":"ai_hypothesis","fitSummary":"ai_hypothesis"},"missingData":["sizeSignal"],"boundaryNote":"본 자료는 실거래 통계 기반 참고치입니다.","buyerType":"법인 사옥형","budgetRange":{"min":50,"max":80,"display":"50억~80억"},"preferredRegions":["강남","성수"],"assetTypes":["꼬마빌딩","사옥용"],"purchasePurpose":"사옥용 매입","mustHave":["초역세권","주차"],"niceToHave":["테라스","루프탑"],"riskTolerance":"medium","financingNote":"자본금 50% 준비","missingQuestions":["구체적인 입주 시기가 언제인가요?","선호하는 수익률이 있나요?"],"privacyNotes":["연락처 비공개"],"fitReasons":["매수자 예산(50-80억)에 부합하는 매물입니다.","요청하신 성수/강남 권역에 해당합니다."],"cautionReasons":["요청한 용도와 달리 명도 협의가 다소 필요합니다."],"recommendedNextAction":"현장 답사 제안","kakaoMessage":"안녕하세요! 요청하신 조건에 부합하는 추천 매물이 있어 안내해 드립니다. 확인해보시고 피드백 부탁드립니다.","title":"강남 역삼역 초역세권 오피스 사옥용 빌딩 매각","shortSummary":"역삼역 도보 5분 거리의 준신축급 대형 오피스빌딩입니다.","dealPoints":["초역세권","사옥 최적"],"cautionPoints":["명도 조율 필요"],"hiddenInfoNotice":["보증금 및 지번은 인가 후 확인 가능"],"gateMessage":"G1 등급 등록이 필요합니다.","kakaoText":"강남 역삼역 오피스 빌딩 매각 안내입니다.","exactUnitCandidate":"101호","floor":"1층","areaSqmText":"150㎡","spaceType":"office","depositText":"5000만","monthlyRentText":"400만","maintenanceFeeText":"50만","availableFromText":"즉시입주","leaseTermMonthsText":"24","incentivesText":"렌트프리 2개월","restrictions":[],"landlordIdentity":"김성수","currentTenant":"스타트업","vacancyReason":"이전 확장","rentNegotiation":"협의 가능","region":"성수동","areaSqm":150,"deposit":5000,"monthlyRent":400,"maintenanceFee":50,"availableFrom":"즉시입주","leaseTermMonths":24,"incentives":{"rentFreeMonths":2,"interiorSupport":"일부 인테리어 지원","freeRentDetail":"렌트프리 2개월 지원"},"shortSummaryLease":"성수역 도보 5분 거리 1층 리테일 상가 매물입니다."}</a:t>
+            </a:r>
+            <a:endParaRPr lang="en-US" sz="1100" dirty="0"/>
+          </a:p>
+        </p:txBody>
+      </p:sp>
+      <p:sp>
+        <p:nvSpPr>
+          <p:cNvPr id="11" name="Text 9"/>
+          <p:cNvSpPr/>
+          <p:nvPr/>
+        </p:nvSpPr>
+        <p:spPr>
+          <a:xfrm>
+            <a:off x="566928" y="6382512"/>
+            <a:ext cx="7315200" cy="219456"/>
+          </a:xfrm>
+          <a:prstGeom prst="rect">
+            <a:avLst/>
+          </a:prstGeom>
+          <a:noFill/>
+          <a:ln/>
+        </p:spPr>
+        <p:txBody>
+          <a:bodyPr wrap="square" lIns="0" tIns="0" rIns="0" bIns="0" rtlCol="0" anchor="ctr"/>
+          <a:lstStyle/>
+          <a:p>
+            <a:pPr indent="0" marL="0">
+              <a:buNone/>
+            </a:pPr>
+            <a:r>
+              <a:rPr lang="en-US" sz="800" dirty="0">
+                <a:solidFill>
+                  <a:srgbClr val="718096"/>
+                </a:solidFill>
+                <a:latin typeface="Pretendard" pitchFamily="34" charset="0"/>
+                <a:ea typeface="Pretendard" pitchFamily="34" charset="-122"/>
+                <a:cs typeface="Pretendard" pitchFamily="34" charset="-120"/>
+              </a:rPr>
+              <a:t>크리딜   |   </a:t>
+            </a:r>
+            <a:endParaRPr lang="en-US" sz="800" dirty="0"/>
+          </a:p>
+        </p:txBody>
+      </p:sp>
+      <p:sp>
+        <p:nvSpPr>
+          <p:cNvPr id="12" name="Text 10"/>
+          <p:cNvSpPr/>
+          <p:nvPr/>
+        </p:nvSpPr>
+        <p:spPr>
+          <a:xfrm>
+            <a:off x="10710367" y="6382512"/>
+            <a:ext cx="914400" cy="219456"/>
+          </a:xfrm>
+          <a:prstGeom prst="rect">
+            <a:avLst/>
+          </a:prstGeom>
+          <a:noFill/>
+          <a:ln/>
+        </p:spPr>
+        <p:txBody>
+          <a:bodyPr wrap="square" lIns="0" tIns="0" rIns="0" bIns="0" rtlCol="0" anchor="ctr"/>
+          <a:lstStyle/>
+          <a:p>
+            <a:pPr algn="r" indent="0" marL="0">
+              <a:buNone/>
+            </a:pPr>
+            <a:r>
+              <a:rPr lang="en-US" sz="900" b="1" dirty="0">
+                <a:solidFill>
+                  <a:srgbClr val="B98A2E"/>
+                </a:solidFill>
+                <a:latin typeface="Arial" pitchFamily="34" charset="0"/>
+                <a:ea typeface="Arial" pitchFamily="34" charset="-122"/>
+                <a:cs typeface="Arial" pitchFamily="34" charset="-120"/>
+              </a:rPr>
+              <a:t>10</a:t>
+            </a:r>
+            <a:endParaRPr lang="en-US" sz="900" dirty="0"/>
+          </a:p>
+        </p:txBody>
+      </p:sp>
+    </p:spTree>
+  </p:cSld>
+  <p:clrMapOvr>
+    <a:masterClrMapping/>
+  </p:clrMapOvr>
+</p:sld>
+</file>
+
+<file path=ppt/slides/slide11.xml><?xml version="1.0" encoding="utf-8"?>
+<p:sld xmlns:a="http://schemas.openxmlformats.org/drawingml/2006/main" xmlns:r="http://schemas.openxmlformats.org/officeDocument/2006/relationships" xmlns:p="http://schemas.openxmlformats.org/presentationml/2006/main">
+  <p:cSld name="Slide 11">
+    <p:bg>
+      <p:bgPr>
+        <a:solidFill>
           <a:srgbClr val="10161F"/>
         </a:solidFill>
       </p:bgPr>
@@ -2368,7 +2885,7 @@
                 <a:ea typeface="Arial" pitchFamily="34" charset="-122"/>
                 <a:cs typeface="Arial" pitchFamily="34" charset="-120"/>
               </a:rPr>
-              <a:t>10</a:t>
+              <a:t>11</a:t>
             </a:r>
             <a:endParaRPr lang="en-US" sz="1300" dirty="0"/>
           </a:p>
@@ -3780,7 +4297,7 @@
                 <a:ea typeface="Arial" pitchFamily="34" charset="-122"/>
                 <a:cs typeface="Arial" pitchFamily="34" charset="-120"/>
               </a:rPr>
-              <a:t>10</a:t>
+              <a:t>11</a:t>
             </a:r>
             <a:endParaRPr lang="en-US" sz="900" dirty="0"/>
           </a:p>
@@ -5187,7 +5704,7 @@
                 <a:ea typeface="Pretendard" pitchFamily="34" charset="-122"/>
                 <a:cs typeface="Pretendard" pitchFamily="34" charset="-120"/>
               </a:rPr>
-              <a:t>교통 접근성 상세 정보는 담당 브로커를 통해 확인하</a:t>
+              <a:t>교통 접근성</a:t>
             </a:r>
             <a:endParaRPr lang="en-US" sz="1300" dirty="0"/>
           </a:p>
@@ -5220,216 +5737,24 @@
               </a:lnSpc>
               <a:buNone/>
             </a:pPr>
+            <a:r>
+              <a:rPr lang="en-US" sz="1300" b="1" dirty="0">
+                <a:solidFill>
+                  <a:srgbClr val="10161F"/>
+                </a:solidFill>
+                <a:latin typeface="Pretendard" pitchFamily="34" charset="0"/>
+                <a:ea typeface="Pretendard" pitchFamily="34" charset="-122"/>
+                <a:cs typeface="Pretendard" pitchFamily="34" charset="-120"/>
+              </a:rPr>
+              <a:t>{"ok":true,"mocked":true,"extractedFields":{"area_signal":"역삼","asset_type":"오피스빌딩","price_band":"300억","size_signal":"3000평(약 9917.</a:t>
+            </a:r>
             <a:endParaRPr lang="en-US" sz="1300" dirty="0"/>
           </a:p>
         </p:txBody>
       </p:sp>
       <p:sp>
         <p:nvSpPr>
-          <p:cNvPr id="9" name="Shape 6"/>
-          <p:cNvSpPr/>
-          <p:nvPr/>
-        </p:nvSpPr>
-        <p:spPr>
-          <a:xfrm>
-            <a:off x="6053328" y="1975104"/>
-            <a:ext cx="5571439" cy="0"/>
-          </a:xfrm>
-          <a:prstGeom prst="line">
-            <a:avLst/>
-          </a:prstGeom>
-          <a:noFill/>
-          <a:ln w="3810">
-            <a:solidFill>
-              <a:srgbClr val="CBD5E0"/>
-            </a:solidFill>
-            <a:prstDash val="solid"/>
-          </a:ln>
-        </p:spPr>
-      </p:sp>
-      <p:sp>
-        <p:nvSpPr>
-          <p:cNvPr id="10" name="Text 7"/>
-          <p:cNvSpPr/>
-          <p:nvPr/>
-        </p:nvSpPr>
-        <p:spPr>
-          <a:xfrm>
-            <a:off x="6053328" y="1975104"/>
-            <a:ext cx="2117147" cy="493776"/>
-          </a:xfrm>
-          <a:prstGeom prst="rect">
-            <a:avLst/>
-          </a:prstGeom>
-          <a:noFill/>
-          <a:ln/>
-        </p:spPr>
-        <p:txBody>
-          <a:bodyPr wrap="square" lIns="0" tIns="0" rIns="0" bIns="0" rtlCol="0" anchor="ctr"/>
-          <a:lstStyle/>
-          <a:p>
-            <a:pPr indent="0" marL="0">
-              <a:lnSpc>
-                <a:spcPct val="120000"/>
-              </a:lnSpc>
-              <a:buNone/>
-            </a:pPr>
-            <a:r>
-              <a:rPr lang="en-US" sz="1300" dirty="0">
-                <a:solidFill>
-                  <a:srgbClr val="718096"/>
-                </a:solidFill>
-                <a:latin typeface="Pretendard" pitchFamily="34" charset="0"/>
-                <a:ea typeface="Pretendard" pitchFamily="34" charset="-122"/>
-                <a:cs typeface="Pretendard" pitchFamily="34" charset="-120"/>
-              </a:rPr>
-              <a:t>[건물] 주변 상권</a:t>
-            </a:r>
-            <a:endParaRPr lang="en-US" sz="1300" dirty="0"/>
-          </a:p>
-        </p:txBody>
-      </p:sp>
-      <p:sp>
-        <p:nvSpPr>
-          <p:cNvPr id="11" name="Text 8"/>
-          <p:cNvSpPr/>
-          <p:nvPr/>
-        </p:nvSpPr>
-        <p:spPr>
-          <a:xfrm>
-            <a:off x="8170475" y="1975104"/>
-            <a:ext cx="3454292" cy="493776"/>
-          </a:xfrm>
-          <a:prstGeom prst="rect">
-            <a:avLst/>
-          </a:prstGeom>
-          <a:noFill/>
-          <a:ln/>
-        </p:spPr>
-        <p:txBody>
-          <a:bodyPr wrap="square" lIns="0" tIns="0" rIns="0" bIns="0" rtlCol="0" anchor="ctr"/>
-          <a:lstStyle/>
-          <a:p>
-            <a:pPr indent="0" marL="0">
-              <a:lnSpc>
-                <a:spcPct val="120000"/>
-              </a:lnSpc>
-              <a:buNone/>
-            </a:pPr>
-            <a:r>
-              <a:rPr lang="en-US" sz="1300" b="1" dirty="0">
-                <a:solidFill>
-                  <a:srgbClr val="10161F"/>
-                </a:solidFill>
-                <a:latin typeface="Pretendard" pitchFamily="34" charset="0"/>
-                <a:ea typeface="Pretendard" pitchFamily="34" charset="-122"/>
-                <a:cs typeface="Pretendard" pitchFamily="34" charset="-120"/>
-              </a:rPr>
-              <a:t>영등포권역 내 주요 비즈니스 및 유동인구 풍부한 상권 입지 ### [성장] 입지 평가</a:t>
-            </a:r>
-            <a:endParaRPr lang="en-US" sz="1300" dirty="0"/>
-          </a:p>
-        </p:txBody>
-      </p:sp>
-      <p:sp>
-        <p:nvSpPr>
-          <p:cNvPr id="12" name="Shape 9"/>
-          <p:cNvSpPr/>
-          <p:nvPr/>
-        </p:nvSpPr>
-        <p:spPr>
-          <a:xfrm>
-            <a:off x="6053328" y="2468880"/>
-            <a:ext cx="5571439" cy="0"/>
-          </a:xfrm>
-          <a:prstGeom prst="line">
-            <a:avLst/>
-          </a:prstGeom>
-          <a:noFill/>
-          <a:ln w="3810">
-            <a:solidFill>
-              <a:srgbClr val="CBD5E0"/>
-            </a:solidFill>
-            <a:prstDash val="solid"/>
-          </a:ln>
-        </p:spPr>
-      </p:sp>
-      <p:sp>
-        <p:nvSpPr>
-          <p:cNvPr id="13" name="Text 10"/>
-          <p:cNvSpPr/>
-          <p:nvPr/>
-        </p:nvSpPr>
-        <p:spPr>
-          <a:xfrm>
-            <a:off x="6053328" y="2468880"/>
-            <a:ext cx="2117147" cy="493776"/>
-          </a:xfrm>
-          <a:prstGeom prst="rect">
-            <a:avLst/>
-          </a:prstGeom>
-          <a:noFill/>
-          <a:ln/>
-        </p:spPr>
-        <p:txBody>
-          <a:bodyPr wrap="square" lIns="0" tIns="0" rIns="0" bIns="0" rtlCol="0" anchor="ctr"/>
-          <a:lstStyle/>
-          <a:p>
-            <a:pPr indent="0" marL="0">
-              <a:lnSpc>
-                <a:spcPct val="120000"/>
-              </a:lnSpc>
-              <a:buNone/>
-            </a:pPr>
-            <a:r>
-              <a:rPr lang="en-US" sz="1300" dirty="0">
-                <a:solidFill>
-                  <a:srgbClr val="718096"/>
-                </a:solidFill>
-                <a:latin typeface="Pretendard" pitchFamily="34" charset="0"/>
-                <a:ea typeface="Pretendard" pitchFamily="34" charset="-122"/>
-                <a:cs typeface="Pretendard" pitchFamily="34" charset="-120"/>
-              </a:rPr>
-              <a:t>영등포권역 내 위치하며 접근성과 가시성이 양호한 입</a:t>
-            </a:r>
-            <a:endParaRPr lang="en-US" sz="1300" dirty="0"/>
-          </a:p>
-        </p:txBody>
-      </p:sp>
-      <p:sp>
-        <p:nvSpPr>
-          <p:cNvPr id="14" name="Text 11"/>
-          <p:cNvSpPr/>
-          <p:nvPr/>
-        </p:nvSpPr>
-        <p:spPr>
-          <a:xfrm>
-            <a:off x="8170475" y="2468880"/>
-            <a:ext cx="3454292" cy="493776"/>
-          </a:xfrm>
-          <a:prstGeom prst="rect">
-            <a:avLst/>
-          </a:prstGeom>
-          <a:noFill/>
-          <a:ln/>
-        </p:spPr>
-        <p:txBody>
-          <a:bodyPr wrap="square" lIns="0" tIns="0" rIns="0" bIns="0" rtlCol="0" anchor="ctr"/>
-          <a:lstStyle/>
-          <a:p>
-            <a:pPr indent="0" marL="0">
-              <a:lnSpc>
-                <a:spcPct val="120000"/>
-              </a:lnSpc>
-              <a:buNone/>
-            </a:pPr>
-            <a:endParaRPr lang="en-US" sz="1300" dirty="0"/>
-          </a:p>
-        </p:txBody>
-      </p:sp>
-      <p:sp>
-        <p:nvSpPr>
-          <p:cNvPr id="15" name="Text 12"/>
+          <p:cNvPr id="9" name="Text 6"/>
           <p:cNvSpPr/>
           <p:nvPr/>
         </p:nvSpPr>
@@ -5468,7 +5793,7 @@
       </p:sp>
       <p:sp>
         <p:nvSpPr>
-          <p:cNvPr id="16" name="Text 13"/>
+          <p:cNvPr id="10" name="Text 7"/>
           <p:cNvSpPr/>
           <p:nvPr/>
         </p:nvSpPr>
@@ -5502,6 +5827,45 @@
               <a:t>3</a:t>
             </a:r>
             <a:endParaRPr lang="en-US" sz="900" dirty="0"/>
+          </a:p>
+        </p:txBody>
+      </p:sp>
+      <p:sp>
+        <p:nvSpPr>
+          <p:cNvPr id="11" name="Text 8"/>
+          <p:cNvSpPr/>
+          <p:nvPr/>
+        </p:nvSpPr>
+        <p:spPr>
+          <a:xfrm>
+            <a:off x="566928" y="1481328"/>
+            <a:ext cx="11057839" cy="9692640"/>
+          </a:xfrm>
+          <a:prstGeom prst="rect">
+            <a:avLst/>
+          </a:prstGeom>
+          <a:noFill/>
+          <a:ln/>
+        </p:spPr>
+        <p:txBody>
+          <a:bodyPr wrap="square" lIns="0" tIns="0" rIns="0" bIns="0" rtlCol="0" anchor="t"/>
+          <a:lstStyle/>
+          <a:p>
+            <a:pPr indent="0" marL="0">
+              <a:buNone/>
+            </a:pPr>
+            <a:r>
+              <a:rPr lang="en-US" sz="1000" dirty="0">
+                <a:solidFill>
+                  <a:srgbClr val="10161F"/>
+                </a:solidFill>
+                <a:latin typeface="Pretendard" pitchFamily="34" charset="0"/>
+                <a:ea typeface="Pretendard" pitchFamily="34" charset="-122"/>
+                <a:cs typeface="Pretendard" pitchFamily="34" charset="-120"/>
+              </a:rPr>
+              <a:t>{"ok":true,"mocked":true,"extractedFields":{"area_signal":"역삼","asset_type":"오피스빌딩","price_band":"300억","size_signal":"3000평(약 9917.4㎡)"},"extractedFacts":{"region":"역삼","exactAddressCandidate":"역삼동 742-1","assetType":"오피스빌딩","priceText":"300억","sizeText":"3000평(약 9917.4㎡)","currentUse":"오피스","currentUseSignal":"근린생활시설","leaseSignal":"임대중","vacancySignal":"공실없음","tenantNames":["쿠팡","네이버"],"unitRentTexts":["301호: 1500만"],"sellerMotivationText":"자산 효율화","brokerNotes":["초역세권 매물"]},"detectedSensitiveFields":["exact_address","tenant_name"],"ambiguousFields":[],"warnings":[],"areaSignal":"역삼","assetType":"오피스빌딩","priceBand":"300억","sizeSignal":"3000평(약 9917.4㎡)","dealType":"매각","buildingName":"역삼 센트럴타워","exactAddress":"역삼동 742-1","totalFloorArea":9917.3,"buildYear":2015,"currentUseSignal":"근린생활시설","vacancySignal":"공실 없음","fitSummary":"초역세권 근생 빌딩으로 시행/사옥 매입에 최적화","cautionSummary":"주요 임차인 만기 조율 필요","hiddenFields":["exact_address","seller_motivation"],"confidence":{"areaSignal":"confirmed","assetType":"confirmed","priceBand":"ai_hypothesis","fitSummary":"ai_hypothesis"},"missingData":["sizeSignal"],"boundaryNote":"본 자료는 실거래 통계 기반 참고치입니다.","buyerType":"법인 사옥형","budgetRange":{"min":50,"max":80,"display":"50억~80억"},"preferredRegions":["강남","성수"],"assetTypes":["꼬마빌딩","사옥용"],"purchasePurpose":"사옥용 매입","mustHave":["초역세권","주차"],"niceToHave":["테라스","루프탑"],"riskTolerance":"medium","financingNote":"자본금 50% 준비","missingQuestions":["구체적인 입주 시기가 언제인가요?","선호하는 수익률이 있나요?"],"privacyNotes":["연락처 비공개"],"fitReasons":["매수자 예산(50-80억)에 부합하는 매물입니다.","요청하신 성수/강남 권역에 해당합니다."],"cautionReasons":["요청한 용도와 달리 명도 협의가 다소 필요합니다."],"recommendedNextAction":"현장 답사 제안","kakaoMessage":"안녕하세요! 요청하신 조건에 부합하는 추천 매물이 있어 안내해 드립니다. 확인해보시고 피드백 부탁드립니다.","title":"강남 역삼역 초역세권 오피스 사옥용 빌딩 매각","shortSummary":"역삼역 도보 5분 거리의 준신축급 대형 오피스빌딩입니다.","dealPoints":["초역세권","사옥 최적"],"cautionPoints":["명도 조율 필요"],"hiddenInfoNotice":["보증금 및 지번은 인가 후 확인 가능"],"gateMessage":"G1 등급 등록이 필요합니다.","kakaoText":"강남 역삼역 오피스 빌딩 매각 안내입니다.","exactUnitCandidate":"101호","floor":"1층","areaSqmText":"150㎡","spaceType":"office","depositText":"5000만","monthlyRentText":"400만","maintenanceFeeText":"50만","availableFromText":"즉시입주","leaseTermMonthsText":"24","incentivesText":"렌트프리 2개월","restrictions":[],"landlordIdentity":"김성수","currentTenant":"스타트업","vacancyReason":"이전 확장","rentNegotiation":"협의 가능","region":"성수동","areaSqm":150,"deposit":5000,"monthlyRent":400,"maintenanceFee":50,"availableFrom":"즉시입주","leaseTermMonths":24,"incentives":{"rentFreeMonths":2,"interiorSupport":"일부 인테리어 지원","freeRentDetail":"렌트프리 2개월 지원"},"shortSummaryLease":"성수역 도보 5분 거리 1층 리테일 상가 매물입니다."}</a:t>
+            </a:r>
+            <a:endParaRPr lang="en-US" sz="1000" dirty="0"/>
           </a:p>
         </p:txBody>
       </p:sp>
@@ -5749,7 +6113,7 @@
                 <a:ea typeface="Pretendard" pitchFamily="34" charset="-122"/>
                 <a:cs typeface="Pretendard" pitchFamily="34" charset="-120"/>
               </a:rPr>
-              <a:t>{"ok"</a:t>
+              <a:t>주요 용도</a:t>
             </a:r>
             <a:endParaRPr lang="en-US" sz="1400" dirty="0"/>
           </a:p>
@@ -5791,7 +6155,7 @@
                 <a:ea typeface="Pretendard" pitchFamily="34" charset="-122"/>
                 <a:cs typeface="Pretendard" pitchFamily="34" charset="-120"/>
               </a:rPr>
-              <a:t>true,"mocked":true,"extractedFields":{"area_signal":"역삼","asset_type":"오피스빌딩","price_band":"300억","size_signal":"3000평(약 9917.4㎡)"},"extractedFacts":{"region":"역삼","exactAddressCandidate":"역삼동 742-1","assetType":"오피스빌딩","priceText":"300억","sizeText":"3000평(약 9917.4㎡)","currentUse":"오피스","currentUseSignal":"근린생활시설","leaseSignal":"임대중","vacancySignal":"공실없음","tenantNames":"쿠팡","네이버","unitRentTexts":"301호: 1500만","sellerMotivationText":"자산 효율화","brokerNotes":"초역세권 매물"},"detectedSensitiveFields":"exact_address","tenant_name","ambiguousFields":,"warnings":,"areaSignal":"역삼","assetType":"오피스빌딩","priceBand":"300억","sizeSignal":"3000평(약 9917.4㎡)","dealType":"매각","buildingName":"역삼 센트럴타워","exactAddress":"역삼동 742-1","totalFloorArea":9917.3,"buildYear":2015,"currentUseSignal":"근린생활시설","vacancySignal":"공실 없음","fitSummary":"초역세권 근생 빌딩으로 시행/사옥 매입에 최적화","cautionSummary":"주요 임차인 만기 조율 필요","hiddenFields":"exact_address","seller_motivation","confidence":{"areaSignal":"confirmed","assetType":"confirmed","priceBand":"ai_hypothesis","fitSummary":"ai_hypothesis"},"missingData":"sizeSignal","boundaryNote":"본 자료는 실거래 통계 기반 참고치입니다.","buyerType":"법인 사옥형","budgetRange":{"min":50,"max":80,"display":"50억~80억"},"preferredRegions":"강남","성수","assetTypes":"꼬마빌딩","사옥용","purchasePurpose":"사옥용 매입","mustHave":"초역세권","주차","niceToHave":"테라스","루프탑","riskTolerance":"medium","financingNote":"자본금 50% 준비","missingQuestions":"구체적인 입주 시기가 언제인가요?","선호하는 수익률이 있나요?","privacyNotes":"연락처 비공개","fitReasons":"매수자 예산(50-80억)에 부합하는 매물입니다.","요청하신 성수/강남 권역에 해당합니다.","cautionReasons":"요청한 용도와 달리 명도 협의가 다소 필요합니다.","recommendedNextAction":"현장 답사 제안","kakaoMessage":"안녕하세요! 요청하신 조건에 부합하는 추천 매물이 있어 안내해 드립니다. 확인해보시고 피드백 부탁드립니다.","title":"강남 역삼역 초역세권 오피스 사옥용 빌딩 매각","shortSummary":"역삼역 도보 5분 거리의 준신축급 대형 오피스빌딩입니다.","dealPoints":"초역세권","사옥 최적","cautionPoints":"명도 조율 필요","hiddenInfoNotice":"보증금 및 지번은 인가 후 확인 가능","gateMessage":"G1 등급 등록이 필요합니다.","kakaoText":"강남 역삼역 오피스 빌딩 매각 안내입니다.","exactUnitCandidate":"101호","floor":"1층","areaSqmText":"150㎡","spaceType":"office","depositText":"5000만","monthlyRentText":"400만","maintenanceFeeText":"50만","availableFromText":"즉시입주","leaseTermMonthsText":"24","incentivesText":"렌트프리 2개월","restrictions":,"landlordIdentity":"김성수","currentTenant":"스타트업","vacancyReason":"이전 확장","rentNegotiation":"협의 가능","region":"성수동","areaSqm":150,"deposit":5000,"monthlyRent":400,"maintenanceFee":50,"availableFrom":"즉시입주","leaseTermMonths":24,"incentives":{"rentFreeMonths":2,"interiorSupport":"일부 인테리어 지원","freeRentDetail":"렌트프리 2개월 지원"},"shortSummaryLease":"성수역 도보 5분 거리 1층 리테일 상가 매물입니다."}</a:t>
+              <a:t>확인 필요</a:t>
             </a:r>
             <a:endParaRPr lang="en-US" sz="1400" dirty="0"/>
           </a:p>
@@ -5800,6 +6164,434 @@
       <p:sp>
         <p:nvSpPr>
           <p:cNvPr id="9" name="Shape 7"/>
+          <p:cNvSpPr/>
+          <p:nvPr/>
+        </p:nvSpPr>
+        <p:spPr>
+          <a:xfrm>
+            <a:off x="566928" y="2048256"/>
+            <a:ext cx="6858000" cy="0"/>
+          </a:xfrm>
+          <a:prstGeom prst="line">
+            <a:avLst/>
+          </a:prstGeom>
+          <a:noFill/>
+          <a:ln w="3810">
+            <a:solidFill>
+              <a:srgbClr val="CBD5E0"/>
+            </a:solidFill>
+            <a:prstDash val="solid"/>
+          </a:ln>
+        </p:spPr>
+      </p:sp>
+      <p:sp>
+        <p:nvSpPr>
+          <p:cNvPr id="10" name="Text 8"/>
+          <p:cNvSpPr/>
+          <p:nvPr/>
+        </p:nvSpPr>
+        <p:spPr>
+          <a:xfrm>
+            <a:off x="566928" y="2048256"/>
+            <a:ext cx="2606040" cy="402336"/>
+          </a:xfrm>
+          <a:prstGeom prst="rect">
+            <a:avLst/>
+          </a:prstGeom>
+          <a:noFill/>
+          <a:ln/>
+        </p:spPr>
+        <p:txBody>
+          <a:bodyPr wrap="square" lIns="0" tIns="0" rIns="0" bIns="0" rtlCol="0" anchor="ctr"/>
+          <a:lstStyle/>
+          <a:p>
+            <a:pPr indent="0" marL="0">
+              <a:lnSpc>
+                <a:spcPct val="120000"/>
+              </a:lnSpc>
+              <a:buNone/>
+            </a:pPr>
+            <a:r>
+              <a:rPr lang="en-US" sz="1400" dirty="0">
+                <a:solidFill>
+                  <a:srgbClr val="718096"/>
+                </a:solidFill>
+                <a:latin typeface="Pretendard" pitchFamily="34" charset="0"/>
+                <a:ea typeface="Pretendard" pitchFamily="34" charset="-122"/>
+                <a:cs typeface="Pretendard" pitchFamily="34" charset="-120"/>
+              </a:rPr>
+              <a:t>연면적</a:t>
+            </a:r>
+            <a:endParaRPr lang="en-US" sz="1400" dirty="0"/>
+          </a:p>
+        </p:txBody>
+      </p:sp>
+      <p:sp>
+        <p:nvSpPr>
+          <p:cNvPr id="11" name="Text 9"/>
+          <p:cNvSpPr/>
+          <p:nvPr/>
+        </p:nvSpPr>
+        <p:spPr>
+          <a:xfrm>
+            <a:off x="3172968" y="2048256"/>
+            <a:ext cx="4251960" cy="402336"/>
+          </a:xfrm>
+          <a:prstGeom prst="rect">
+            <a:avLst/>
+          </a:prstGeom>
+          <a:noFill/>
+          <a:ln/>
+        </p:spPr>
+        <p:txBody>
+          <a:bodyPr wrap="square" lIns="0" tIns="0" rIns="0" bIns="0" rtlCol="0" anchor="ctr"/>
+          <a:lstStyle/>
+          <a:p>
+            <a:pPr indent="0" marL="0">
+              <a:lnSpc>
+                <a:spcPct val="120000"/>
+              </a:lnSpc>
+              <a:buNone/>
+            </a:pPr>
+            <a:r>
+              <a:rPr lang="en-US" sz="1400" b="1" dirty="0">
+                <a:solidFill>
+                  <a:srgbClr val="10161F"/>
+                </a:solidFill>
+                <a:latin typeface="Pretendard" pitchFamily="34" charset="0"/>
+                <a:ea typeface="Pretendard" pitchFamily="34" charset="-122"/>
+                <a:cs typeface="Pretendard" pitchFamily="34" charset="-120"/>
+              </a:rPr>
+              <a:t>5,000㎡ (약 1513평(약 5001.7㎡))</a:t>
+            </a:r>
+            <a:endParaRPr lang="en-US" sz="1400" dirty="0"/>
+          </a:p>
+        </p:txBody>
+      </p:sp>
+      <p:sp>
+        <p:nvSpPr>
+          <p:cNvPr id="12" name="Shape 10"/>
+          <p:cNvSpPr/>
+          <p:nvPr/>
+        </p:nvSpPr>
+        <p:spPr>
+          <a:xfrm>
+            <a:off x="566928" y="2450592"/>
+            <a:ext cx="6858000" cy="0"/>
+          </a:xfrm>
+          <a:prstGeom prst="line">
+            <a:avLst/>
+          </a:prstGeom>
+          <a:noFill/>
+          <a:ln w="3810">
+            <a:solidFill>
+              <a:srgbClr val="CBD5E0"/>
+            </a:solidFill>
+            <a:prstDash val="solid"/>
+          </a:ln>
+        </p:spPr>
+      </p:sp>
+      <p:sp>
+        <p:nvSpPr>
+          <p:cNvPr id="13" name="Text 11"/>
+          <p:cNvSpPr/>
+          <p:nvPr/>
+        </p:nvSpPr>
+        <p:spPr>
+          <a:xfrm>
+            <a:off x="566928" y="2450592"/>
+            <a:ext cx="2606040" cy="402336"/>
+          </a:xfrm>
+          <a:prstGeom prst="rect">
+            <a:avLst/>
+          </a:prstGeom>
+          <a:noFill/>
+          <a:ln/>
+        </p:spPr>
+        <p:txBody>
+          <a:bodyPr wrap="square" lIns="0" tIns="0" rIns="0" bIns="0" rtlCol="0" anchor="ctr"/>
+          <a:lstStyle/>
+          <a:p>
+            <a:pPr indent="0" marL="0">
+              <a:lnSpc>
+                <a:spcPct val="120000"/>
+              </a:lnSpc>
+              <a:buNone/>
+            </a:pPr>
+            <a:r>
+              <a:rPr lang="en-US" sz="1400" dirty="0">
+                <a:solidFill>
+                  <a:srgbClr val="718096"/>
+                </a:solidFill>
+                <a:latin typeface="Pretendard" pitchFamily="34" charset="0"/>
+                <a:ea typeface="Pretendard" pitchFamily="34" charset="-122"/>
+                <a:cs typeface="Pretendard" pitchFamily="34" charset="-120"/>
+              </a:rPr>
+              <a:t>대지면적</a:t>
+            </a:r>
+            <a:endParaRPr lang="en-US" sz="1400" dirty="0"/>
+          </a:p>
+        </p:txBody>
+      </p:sp>
+      <p:sp>
+        <p:nvSpPr>
+          <p:cNvPr id="14" name="Text 12"/>
+          <p:cNvSpPr/>
+          <p:nvPr/>
+        </p:nvSpPr>
+        <p:spPr>
+          <a:xfrm>
+            <a:off x="3172968" y="2450592"/>
+            <a:ext cx="4251960" cy="402336"/>
+          </a:xfrm>
+          <a:prstGeom prst="rect">
+            <a:avLst/>
+          </a:prstGeom>
+          <a:noFill/>
+          <a:ln/>
+        </p:spPr>
+        <p:txBody>
+          <a:bodyPr wrap="square" lIns="0" tIns="0" rIns="0" bIns="0" rtlCol="0" anchor="ctr"/>
+          <a:lstStyle/>
+          <a:p>
+            <a:pPr indent="0" marL="0">
+              <a:lnSpc>
+                <a:spcPct val="120000"/>
+              </a:lnSpc>
+              <a:buNone/>
+            </a:pPr>
+            <a:r>
+              <a:rPr lang="en-US" sz="1400" b="1" dirty="0">
+                <a:solidFill>
+                  <a:srgbClr val="10161F"/>
+                </a:solidFill>
+                <a:latin typeface="Pretendard" pitchFamily="34" charset="0"/>
+                <a:ea typeface="Pretendard" pitchFamily="34" charset="-122"/>
+                <a:cs typeface="Pretendard" pitchFamily="34" charset="-120"/>
+              </a:rPr>
+              <a:t>1,000㎡ (약 303평(약 1001.7㎡))</a:t>
+            </a:r>
+            <a:endParaRPr lang="en-US" sz="1400" dirty="0"/>
+          </a:p>
+        </p:txBody>
+      </p:sp>
+      <p:sp>
+        <p:nvSpPr>
+          <p:cNvPr id="15" name="Shape 13"/>
+          <p:cNvSpPr/>
+          <p:nvPr/>
+        </p:nvSpPr>
+        <p:spPr>
+          <a:xfrm>
+            <a:off x="566928" y="2852928"/>
+            <a:ext cx="6858000" cy="0"/>
+          </a:xfrm>
+          <a:prstGeom prst="line">
+            <a:avLst/>
+          </a:prstGeom>
+          <a:noFill/>
+          <a:ln w="3810">
+            <a:solidFill>
+              <a:srgbClr val="CBD5E0"/>
+            </a:solidFill>
+            <a:prstDash val="solid"/>
+          </a:ln>
+        </p:spPr>
+      </p:sp>
+      <p:sp>
+        <p:nvSpPr>
+          <p:cNvPr id="16" name="Text 14"/>
+          <p:cNvSpPr/>
+          <p:nvPr/>
+        </p:nvSpPr>
+        <p:spPr>
+          <a:xfrm>
+            <a:off x="566928" y="2852928"/>
+            <a:ext cx="2606040" cy="402336"/>
+          </a:xfrm>
+          <a:prstGeom prst="rect">
+            <a:avLst/>
+          </a:prstGeom>
+          <a:noFill/>
+          <a:ln/>
+        </p:spPr>
+        <p:txBody>
+          <a:bodyPr wrap="square" lIns="0" tIns="0" rIns="0" bIns="0" rtlCol="0" anchor="ctr"/>
+          <a:lstStyle/>
+          <a:p>
+            <a:pPr indent="0" marL="0">
+              <a:lnSpc>
+                <a:spcPct val="120000"/>
+              </a:lnSpc>
+              <a:buNone/>
+            </a:pPr>
+            <a:r>
+              <a:rPr lang="en-US" sz="1400" dirty="0">
+                <a:solidFill>
+                  <a:srgbClr val="718096"/>
+                </a:solidFill>
+                <a:latin typeface="Pretendard" pitchFamily="34" charset="0"/>
+                <a:ea typeface="Pretendard" pitchFamily="34" charset="-122"/>
+                <a:cs typeface="Pretendard" pitchFamily="34" charset="-120"/>
+              </a:rPr>
+              <a:t>용도지역</a:t>
+            </a:r>
+            <a:endParaRPr lang="en-US" sz="1400" dirty="0"/>
+          </a:p>
+        </p:txBody>
+      </p:sp>
+      <p:sp>
+        <p:nvSpPr>
+          <p:cNvPr id="17" name="Text 15"/>
+          <p:cNvSpPr/>
+          <p:nvPr/>
+        </p:nvSpPr>
+        <p:spPr>
+          <a:xfrm>
+            <a:off x="3172968" y="2852928"/>
+            <a:ext cx="4251960" cy="402336"/>
+          </a:xfrm>
+          <a:prstGeom prst="rect">
+            <a:avLst/>
+          </a:prstGeom>
+          <a:noFill/>
+          <a:ln/>
+        </p:spPr>
+        <p:txBody>
+          <a:bodyPr wrap="square" lIns="0" tIns="0" rIns="0" bIns="0" rtlCol="0" anchor="ctr"/>
+          <a:lstStyle/>
+          <a:p>
+            <a:pPr indent="0" marL="0">
+              <a:lnSpc>
+                <a:spcPct val="120000"/>
+              </a:lnSpc>
+              <a:buNone/>
+            </a:pPr>
+            <a:r>
+              <a:rPr lang="en-US" sz="1400" b="1" dirty="0">
+                <a:solidFill>
+                  <a:srgbClr val="10161F"/>
+                </a:solidFill>
+                <a:latin typeface="Pretendard" pitchFamily="34" charset="0"/>
+                <a:ea typeface="Pretendard" pitchFamily="34" charset="-122"/>
+                <a:cs typeface="Pretendard" pitchFamily="34" charset="-120"/>
+              </a:rPr>
+              <a:t>일반상업지역</a:t>
+            </a:r>
+            <a:endParaRPr lang="en-US" sz="1400" dirty="0"/>
+          </a:p>
+        </p:txBody>
+      </p:sp>
+      <p:sp>
+        <p:nvSpPr>
+          <p:cNvPr id="18" name="Shape 16"/>
+          <p:cNvSpPr/>
+          <p:nvPr/>
+        </p:nvSpPr>
+        <p:spPr>
+          <a:xfrm>
+            <a:off x="566928" y="3255264"/>
+            <a:ext cx="6858000" cy="0"/>
+          </a:xfrm>
+          <a:prstGeom prst="line">
+            <a:avLst/>
+          </a:prstGeom>
+          <a:noFill/>
+          <a:ln w="3810">
+            <a:solidFill>
+              <a:srgbClr val="CBD5E0"/>
+            </a:solidFill>
+            <a:prstDash val="solid"/>
+          </a:ln>
+        </p:spPr>
+      </p:sp>
+      <p:sp>
+        <p:nvSpPr>
+          <p:cNvPr id="19" name="Text 17"/>
+          <p:cNvSpPr/>
+          <p:nvPr/>
+        </p:nvSpPr>
+        <p:spPr>
+          <a:xfrm>
+            <a:off x="566928" y="3255264"/>
+            <a:ext cx="2606040" cy="402336"/>
+          </a:xfrm>
+          <a:prstGeom prst="rect">
+            <a:avLst/>
+          </a:prstGeom>
+          <a:noFill/>
+          <a:ln/>
+        </p:spPr>
+        <p:txBody>
+          <a:bodyPr wrap="square" lIns="0" tIns="0" rIns="0" bIns="0" rtlCol="0" anchor="ctr"/>
+          <a:lstStyle/>
+          <a:p>
+            <a:pPr indent="0" marL="0">
+              <a:lnSpc>
+                <a:spcPct val="120000"/>
+              </a:lnSpc>
+              <a:buNone/>
+            </a:pPr>
+            <a:r>
+              <a:rPr lang="en-US" sz="1400" dirty="0">
+                <a:solidFill>
+                  <a:srgbClr val="718096"/>
+                </a:solidFill>
+                <a:latin typeface="Pretendard" pitchFamily="34" charset="0"/>
+                <a:ea typeface="Pretendard" pitchFamily="34" charset="-122"/>
+                <a:cs typeface="Pretendard" pitchFamily="34" charset="-120"/>
+              </a:rPr>
+              <a:t>매매 희망가</a:t>
+            </a:r>
+            <a:endParaRPr lang="en-US" sz="1400" dirty="0"/>
+          </a:p>
+        </p:txBody>
+      </p:sp>
+      <p:sp>
+        <p:nvSpPr>
+          <p:cNvPr id="20" name="Text 18"/>
+          <p:cNvSpPr/>
+          <p:nvPr/>
+        </p:nvSpPr>
+        <p:spPr>
+          <a:xfrm>
+            <a:off x="3172968" y="3255264"/>
+            <a:ext cx="4251960" cy="402336"/>
+          </a:xfrm>
+          <a:prstGeom prst="rect">
+            <a:avLst/>
+          </a:prstGeom>
+          <a:noFill/>
+          <a:ln/>
+        </p:spPr>
+        <p:txBody>
+          <a:bodyPr wrap="square" lIns="0" tIns="0" rIns="0" bIns="0" rtlCol="0" anchor="ctr"/>
+          <a:lstStyle/>
+          <a:p>
+            <a:pPr indent="0" marL="0">
+              <a:lnSpc>
+                <a:spcPct val="120000"/>
+              </a:lnSpc>
+              <a:buNone/>
+            </a:pPr>
+            <a:r>
+              <a:rPr lang="en-US" sz="1400" b="1" dirty="0">
+                <a:solidFill>
+                  <a:srgbClr val="10161F"/>
+                </a:solidFill>
+                <a:latin typeface="Pretendard" pitchFamily="34" charset="0"/>
+                <a:ea typeface="Pretendard" pitchFamily="34" charset="-122"/>
+                <a:cs typeface="Pretendard" pitchFamily="34" charset="-120"/>
+              </a:rPr>
+              <a:t>145억</a:t>
+            </a:r>
+            <a:endParaRPr lang="en-US" sz="1400" dirty="0"/>
+          </a:p>
+        </p:txBody>
+      </p:sp>
+      <p:sp>
+        <p:nvSpPr>
+          <p:cNvPr id="21" name="Shape 19"/>
           <p:cNvSpPr/>
           <p:nvPr/>
         </p:nvSpPr>
@@ -5822,7 +6614,7 @@
       </p:sp>
       <p:sp>
         <p:nvSpPr>
-          <p:cNvPr id="10" name="Shape 8"/>
+          <p:cNvPr id="22" name="Shape 20"/>
           <p:cNvSpPr/>
           <p:nvPr/>
         </p:nvSpPr>
@@ -5837,14 +6629,14 @@
             </a:avLst>
           </a:prstGeom>
           <a:solidFill>
-            <a:srgbClr val="F3EBDA"/>
+            <a:srgbClr val="BEE3F8"/>
           </a:solidFill>
           <a:ln/>
         </p:spPr>
       </p:sp>
       <p:sp>
         <p:nvSpPr>
-          <p:cNvPr id="11" name="Shape 9"/>
+          <p:cNvPr id="23" name="Shape 21"/>
           <p:cNvSpPr/>
           <p:nvPr/>
         </p:nvSpPr>
@@ -5857,14 +6649,14 @@
             <a:avLst/>
           </a:prstGeom>
           <a:solidFill>
-            <a:srgbClr val="977024"/>
+            <a:srgbClr val="2B6CB0"/>
           </a:solidFill>
           <a:ln/>
         </p:spPr>
       </p:sp>
       <p:sp>
         <p:nvSpPr>
-          <p:cNvPr id="12" name="Text 10"/>
+          <p:cNvPr id="24" name="Text 22"/>
           <p:cNvSpPr/>
           <p:nvPr/>
         </p:nvSpPr>
@@ -5886,13 +6678,24 @@
             <a:pPr indent="0" marL="0">
               <a:buNone/>
             </a:pPr>
+            <a:r>
+              <a:rPr lang="en-US" sz="1050" b="1" dirty="0">
+                <a:solidFill>
+                  <a:srgbClr val="2B6CB0"/>
+                </a:solidFill>
+                <a:latin typeface="Pretendard" pitchFamily="34" charset="0"/>
+                <a:ea typeface="Pretendard" pitchFamily="34" charset="-122"/>
+                <a:cs typeface="Pretendard" pitchFamily="34" charset="-120"/>
+              </a:rPr>
+              <a:t>토지 및 건물 분석 포인트</a:t>
+            </a:r>
             <a:endParaRPr lang="en-US" sz="1050" dirty="0"/>
           </a:p>
         </p:txBody>
       </p:sp>
       <p:sp>
         <p:nvSpPr>
-          <p:cNvPr id="13" name="Text 11"/>
+          <p:cNvPr id="25" name="Text 23"/>
           <p:cNvSpPr/>
           <p:nvPr/>
         </p:nvSpPr>
@@ -5911,11 +6714,12 @@
           <a:bodyPr wrap="square" lIns="0" tIns="0" rIns="0" bIns="0" rtlCol="0" anchor="t"/>
           <a:lstStyle/>
           <a:p>
-            <a:pPr indent="0" marL="0">
+            <a:pPr marL="342900" indent="-342900">
               <a:lnSpc>
                 <a:spcPct val="120000"/>
               </a:lnSpc>
-              <a:buNone/>
+              <a:buSzPct val="100000"/>
+              <a:buChar char="•"/>
             </a:pPr>
             <a:r>
               <a:rPr lang="en-US" sz="930" dirty="0">
@@ -5926,15 +6730,223 @@
                 <a:ea typeface="Pretendard" pitchFamily="34" charset="-122"/>
                 <a:cs typeface="Pretendard" pitchFamily="34" charset="-120"/>
               </a:rPr>
-              <a:t>{"ok":true,"mocked":true,"extractedFields":{"area_signal":"역삼","asset_type":"오피스빌딩","price_band":"300억","size_signal":"3</a:t>
+              <a:t>물건 접면 도로 및 교통 여건은 현장 확인 사항입니다</a:t>
             </a:r>
             <a:endParaRPr lang="en-US" sz="930" dirty="0"/>
           </a:p>
-        </p:txBody>
-      </p:sp>
-      <p:sp>
-        <p:nvSpPr>
-          <p:cNvPr id="14" name="Text 12"/>
+          <a:p>
+            <a:pPr marL="342900" indent="-342900">
+              <a:lnSpc>
+                <a:spcPct val="120000"/>
+              </a:lnSpc>
+              <a:buSzPct val="100000"/>
+              <a:buChar char="•"/>
+            </a:pPr>
+            <a:r>
+              <a:rPr lang="en-US" sz="930" dirty="0">
+                <a:solidFill>
+                  <a:srgbClr val="10161F"/>
+                </a:solidFill>
+                <a:latin typeface="Pretendard" pitchFamily="34" charset="0"/>
+                <a:ea typeface="Pretendard" pitchFamily="34" charset="-122"/>
+                <a:cs typeface="Pretendard" pitchFamily="34" charset="-120"/>
+              </a:rPr>
+              <a:t>상세 건물 제원은 실사 자료를 참조하시기 바랍니다</a:t>
+            </a:r>
+            <a:endParaRPr lang="en-US" sz="930" dirty="0"/>
+          </a:p>
+          <a:p>
+            <a:pPr marL="342900" indent="-342900">
+              <a:lnSpc>
+                <a:spcPct val="120000"/>
+              </a:lnSpc>
+              <a:buSzPct val="100000"/>
+              <a:buChar char="•"/>
+            </a:pPr>
+            <a:r>
+              <a:rPr lang="en-US" sz="930" dirty="0">
+                <a:solidFill>
+                  <a:srgbClr val="10161F"/>
+                </a:solidFill>
+                <a:latin typeface="Pretendard" pitchFamily="34" charset="0"/>
+                <a:ea typeface="Pretendard" pitchFamily="34" charset="-122"/>
+                <a:cs typeface="Pretendard" pitchFamily="34" charset="-120"/>
+              </a:rPr>
+              <a:t>건물 현황 및 규모는 첨부 대장을 기준으로 합니다</a:t>
+            </a:r>
+            <a:endParaRPr lang="en-US" sz="930" dirty="0"/>
+          </a:p>
+        </p:txBody>
+      </p:sp>
+      <p:sp>
+        <p:nvSpPr>
+          <p:cNvPr id="26" name="Shape 24"/>
+          <p:cNvSpPr/>
+          <p:nvPr/>
+        </p:nvSpPr>
+        <p:spPr>
+          <a:xfrm>
+            <a:off x="7784287" y="3977640"/>
+            <a:ext cx="3840480" cy="2148840"/>
+          </a:xfrm>
+          <a:prstGeom prst="roundRect">
+            <a:avLst>
+              <a:gd name="adj" fmla="val 2553"/>
+            </a:avLst>
+          </a:prstGeom>
+          <a:solidFill>
+            <a:srgbClr val="BEE3F8"/>
+          </a:solidFill>
+          <a:ln/>
+        </p:spPr>
+      </p:sp>
+      <p:sp>
+        <p:nvSpPr>
+          <p:cNvPr id="27" name="Shape 25"/>
+          <p:cNvSpPr/>
+          <p:nvPr/>
+        </p:nvSpPr>
+        <p:spPr>
+          <a:xfrm>
+            <a:off x="7784287" y="4032504"/>
+            <a:ext cx="36576" cy="2039112"/>
+          </a:xfrm>
+          <a:prstGeom prst="rect">
+            <a:avLst/>
+          </a:prstGeom>
+          <a:solidFill>
+            <a:srgbClr val="2B6CB0"/>
+          </a:solidFill>
+          <a:ln/>
+        </p:spPr>
+      </p:sp>
+      <p:sp>
+        <p:nvSpPr>
+          <p:cNvPr id="28" name="Text 26"/>
+          <p:cNvSpPr/>
+          <p:nvPr/>
+        </p:nvSpPr>
+        <p:spPr>
+          <a:xfrm>
+            <a:off x="7967167" y="4087368"/>
+            <a:ext cx="3511296" cy="201168"/>
+          </a:xfrm>
+          <a:prstGeom prst="rect">
+            <a:avLst/>
+          </a:prstGeom>
+          <a:noFill/>
+          <a:ln/>
+        </p:spPr>
+        <p:txBody>
+          <a:bodyPr wrap="square" lIns="0" tIns="0" rIns="0" bIns="0" rtlCol="0" anchor="ctr"/>
+          <a:lstStyle/>
+          <a:p>
+            <a:pPr indent="0" marL="0">
+              <a:buNone/>
+            </a:pPr>
+            <a:r>
+              <a:rPr lang="en-US" sz="1050" b="1" dirty="0">
+                <a:solidFill>
+                  <a:srgbClr val="2B6CB0"/>
+                </a:solidFill>
+                <a:latin typeface="Pretendard" pitchFamily="34" charset="0"/>
+                <a:ea typeface="Pretendard" pitchFamily="34" charset="-122"/>
+                <a:cs typeface="Pretendard" pitchFamily="34" charset="-120"/>
+              </a:rPr>
+              <a:t>물건 실사 및 관리 상태</a:t>
+            </a:r>
+            <a:endParaRPr lang="en-US" sz="1050" dirty="0"/>
+          </a:p>
+        </p:txBody>
+      </p:sp>
+      <p:sp>
+        <p:nvSpPr>
+          <p:cNvPr id="29" name="Text 27"/>
+          <p:cNvSpPr/>
+          <p:nvPr/>
+        </p:nvSpPr>
+        <p:spPr>
+          <a:xfrm>
+            <a:off x="7967167" y="4306824"/>
+            <a:ext cx="3511296" cy="1746504"/>
+          </a:xfrm>
+          <a:prstGeom prst="rect">
+            <a:avLst/>
+          </a:prstGeom>
+          <a:noFill/>
+          <a:ln/>
+        </p:spPr>
+        <p:txBody>
+          <a:bodyPr wrap="square" lIns="0" tIns="0" rIns="0" bIns="0" rtlCol="0" anchor="t"/>
+          <a:lstStyle/>
+          <a:p>
+            <a:pPr marL="342900" indent="-342900">
+              <a:lnSpc>
+                <a:spcPct val="120000"/>
+              </a:lnSpc>
+              <a:buSzPct val="100000"/>
+              <a:buChar char="•"/>
+            </a:pPr>
+            <a:r>
+              <a:rPr lang="en-US" sz="930" dirty="0">
+                <a:solidFill>
+                  <a:srgbClr val="10161F"/>
+                </a:solidFill>
+                <a:latin typeface="Pretendard" pitchFamily="34" charset="0"/>
+                <a:ea typeface="Pretendard" pitchFamily="34" charset="-122"/>
+                <a:cs typeface="Pretendard" pitchFamily="34" charset="-120"/>
+              </a:rPr>
+              <a:t>건물 상태 및 설비 현황은 실사 보고서를 참조하십시오</a:t>
+            </a:r>
+            <a:endParaRPr lang="en-US" sz="930" dirty="0"/>
+          </a:p>
+          <a:p>
+            <a:pPr marL="342900" indent="-342900">
+              <a:lnSpc>
+                <a:spcPct val="120000"/>
+              </a:lnSpc>
+              <a:buSzPct val="100000"/>
+              <a:buChar char="•"/>
+            </a:pPr>
+            <a:r>
+              <a:rPr lang="en-US" sz="930" dirty="0">
+                <a:solidFill>
+                  <a:srgbClr val="10161F"/>
+                </a:solidFill>
+                <a:latin typeface="Pretendard" pitchFamily="34" charset="0"/>
+                <a:ea typeface="Pretendard" pitchFamily="34" charset="-122"/>
+                <a:cs typeface="Pretendard" pitchFamily="34" charset="-120"/>
+              </a:rPr>
+              <a:t>자금 조달 및 대출 조건은 금융 자문 후 확정됩니다</a:t>
+            </a:r>
+            <a:endParaRPr lang="en-US" sz="930" dirty="0"/>
+          </a:p>
+          <a:p>
+            <a:pPr marL="342900" indent="-342900">
+              <a:lnSpc>
+                <a:spcPct val="120000"/>
+              </a:lnSpc>
+              <a:buSzPct val="100000"/>
+              <a:buChar char="•"/>
+            </a:pPr>
+            <a:r>
+              <a:rPr lang="en-US" sz="930" dirty="0">
+                <a:solidFill>
+                  <a:srgbClr val="10161F"/>
+                </a:solidFill>
+                <a:latin typeface="Pretendard" pitchFamily="34" charset="0"/>
+                <a:ea typeface="Pretendard" pitchFamily="34" charset="-122"/>
+                <a:cs typeface="Pretendard" pitchFamily="34" charset="-120"/>
+              </a:rPr>
+              <a:t>상세 실사 단계에서 구체적인 계약 조건 및 세무 검토가 진행됩니다</a:t>
+            </a:r>
+            <a:endParaRPr lang="en-US" sz="930" dirty="0"/>
+          </a:p>
+        </p:txBody>
+      </p:sp>
+      <p:sp>
+        <p:nvSpPr>
+          <p:cNvPr id="30" name="Text 28"/>
           <p:cNvSpPr/>
           <p:nvPr/>
         </p:nvSpPr>
@@ -5973,7 +6985,7 @@
       </p:sp>
       <p:sp>
         <p:nvSpPr>
-          <p:cNvPr id="15" name="Text 13"/>
+          <p:cNvPr id="31" name="Text 29"/>
           <p:cNvSpPr/>
           <p:nvPr/>
         </p:nvSpPr>
@@ -6220,18 +7232,339 @@
       </p:sp>
       <p:sp>
         <p:nvSpPr>
-          <p:cNvPr id="7" name="Shape 5"/>
+          <p:cNvPr id="7" name="Text 5"/>
           <p:cNvSpPr/>
           <p:nvPr/>
         </p:nvSpPr>
         <p:spPr>
           <a:xfrm>
             <a:off x="566928" y="1645920"/>
-            <a:ext cx="6858000" cy="1828800"/>
+            <a:ext cx="2606040" cy="402336"/>
+          </a:xfrm>
+          <a:prstGeom prst="rect">
+            <a:avLst/>
+          </a:prstGeom>
+          <a:noFill/>
+          <a:ln/>
+        </p:spPr>
+        <p:txBody>
+          <a:bodyPr wrap="square" lIns="0" tIns="0" rIns="0" bIns="0" rtlCol="0" anchor="ctr"/>
+          <a:lstStyle/>
+          <a:p>
+            <a:pPr indent="0" marL="0">
+              <a:lnSpc>
+                <a:spcPct val="120000"/>
+              </a:lnSpc>
+              <a:buNone/>
+            </a:pPr>
+            <a:r>
+              <a:rPr lang="en-US" sz="1400" dirty="0">
+                <a:solidFill>
+                  <a:srgbClr val="718096"/>
+                </a:solidFill>
+                <a:latin typeface="Pretendard" pitchFamily="34" charset="0"/>
+                <a:ea typeface="Pretendard" pitchFamily="34" charset="-122"/>
+                <a:cs typeface="Pretendard" pitchFamily="34" charset="-120"/>
+              </a:rPr>
+              <a:t>연면적</a:t>
+            </a:r>
+            <a:endParaRPr lang="en-US" sz="1400" dirty="0"/>
+          </a:p>
+        </p:txBody>
+      </p:sp>
+      <p:sp>
+        <p:nvSpPr>
+          <p:cNvPr id="8" name="Text 6"/>
+          <p:cNvSpPr/>
+          <p:nvPr/>
+        </p:nvSpPr>
+        <p:spPr>
+          <a:xfrm>
+            <a:off x="3172968" y="1645920"/>
+            <a:ext cx="4251960" cy="402336"/>
+          </a:xfrm>
+          <a:prstGeom prst="rect">
+            <a:avLst/>
+          </a:prstGeom>
+          <a:noFill/>
+          <a:ln/>
+        </p:spPr>
+        <p:txBody>
+          <a:bodyPr wrap="square" lIns="0" tIns="0" rIns="0" bIns="0" rtlCol="0" anchor="ctr"/>
+          <a:lstStyle/>
+          <a:p>
+            <a:pPr indent="0" marL="0">
+              <a:lnSpc>
+                <a:spcPct val="120000"/>
+              </a:lnSpc>
+              <a:buNone/>
+            </a:pPr>
+            <a:r>
+              <a:rPr lang="en-US" sz="1400" b="1" dirty="0">
+                <a:solidFill>
+                  <a:srgbClr val="10161F"/>
+                </a:solidFill>
+                <a:latin typeface="Pretendard" pitchFamily="34" charset="0"/>
+                <a:ea typeface="Pretendard" pitchFamily="34" charset="-122"/>
+                <a:cs typeface="Pretendard" pitchFamily="34" charset="-120"/>
+              </a:rPr>
+              <a:t>5,000㎡ (약 1513평(약 5001.7㎡))</a:t>
+            </a:r>
+            <a:endParaRPr lang="en-US" sz="1400" dirty="0"/>
+          </a:p>
+        </p:txBody>
+      </p:sp>
+      <p:sp>
+        <p:nvSpPr>
+          <p:cNvPr id="9" name="Shape 7"/>
+          <p:cNvSpPr/>
+          <p:nvPr/>
+        </p:nvSpPr>
+        <p:spPr>
+          <a:xfrm>
+            <a:off x="566928" y="2048256"/>
+            <a:ext cx="6858000" cy="0"/>
+          </a:xfrm>
+          <a:prstGeom prst="line">
+            <a:avLst/>
+          </a:prstGeom>
+          <a:noFill/>
+          <a:ln w="3810">
+            <a:solidFill>
+              <a:srgbClr val="CBD5E0"/>
+            </a:solidFill>
+            <a:prstDash val="solid"/>
+          </a:ln>
+        </p:spPr>
+      </p:sp>
+      <p:sp>
+        <p:nvSpPr>
+          <p:cNvPr id="10" name="Text 8"/>
+          <p:cNvSpPr/>
+          <p:nvPr/>
+        </p:nvSpPr>
+        <p:spPr>
+          <a:xfrm>
+            <a:off x="566928" y="2048256"/>
+            <a:ext cx="2606040" cy="402336"/>
+          </a:xfrm>
+          <a:prstGeom prst="rect">
+            <a:avLst/>
+          </a:prstGeom>
+          <a:noFill/>
+          <a:ln/>
+        </p:spPr>
+        <p:txBody>
+          <a:bodyPr wrap="square" lIns="0" tIns="0" rIns="0" bIns="0" rtlCol="0" anchor="ctr"/>
+          <a:lstStyle/>
+          <a:p>
+            <a:pPr indent="0" marL="0">
+              <a:lnSpc>
+                <a:spcPct val="120000"/>
+              </a:lnSpc>
+              <a:buNone/>
+            </a:pPr>
+            <a:r>
+              <a:rPr lang="en-US" sz="1400" dirty="0">
+                <a:solidFill>
+                  <a:srgbClr val="718096"/>
+                </a:solidFill>
+                <a:latin typeface="Pretendard" pitchFamily="34" charset="0"/>
+                <a:ea typeface="Pretendard" pitchFamily="34" charset="-122"/>
+                <a:cs typeface="Pretendard" pitchFamily="34" charset="-120"/>
+              </a:rPr>
+              <a:t>대지면적</a:t>
+            </a:r>
+            <a:endParaRPr lang="en-US" sz="1400" dirty="0"/>
+          </a:p>
+        </p:txBody>
+      </p:sp>
+      <p:sp>
+        <p:nvSpPr>
+          <p:cNvPr id="11" name="Text 9"/>
+          <p:cNvSpPr/>
+          <p:nvPr/>
+        </p:nvSpPr>
+        <p:spPr>
+          <a:xfrm>
+            <a:off x="3172968" y="2048256"/>
+            <a:ext cx="4251960" cy="402336"/>
+          </a:xfrm>
+          <a:prstGeom prst="rect">
+            <a:avLst/>
+          </a:prstGeom>
+          <a:noFill/>
+          <a:ln/>
+        </p:spPr>
+        <p:txBody>
+          <a:bodyPr wrap="square" lIns="0" tIns="0" rIns="0" bIns="0" rtlCol="0" anchor="ctr"/>
+          <a:lstStyle/>
+          <a:p>
+            <a:pPr indent="0" marL="0">
+              <a:lnSpc>
+                <a:spcPct val="120000"/>
+              </a:lnSpc>
+              <a:buNone/>
+            </a:pPr>
+            <a:r>
+              <a:rPr lang="en-US" sz="1400" b="1" dirty="0">
+                <a:solidFill>
+                  <a:srgbClr val="10161F"/>
+                </a:solidFill>
+                <a:latin typeface="Pretendard" pitchFamily="34" charset="0"/>
+                <a:ea typeface="Pretendard" pitchFamily="34" charset="-122"/>
+                <a:cs typeface="Pretendard" pitchFamily="34" charset="-120"/>
+              </a:rPr>
+              <a:t>1,000㎡ (약 303평(약 1001.7㎡))</a:t>
+            </a:r>
+            <a:endParaRPr lang="en-US" sz="1400" dirty="0"/>
+          </a:p>
+        </p:txBody>
+      </p:sp>
+      <p:sp>
+        <p:nvSpPr>
+          <p:cNvPr id="12" name="Shape 10"/>
+          <p:cNvSpPr/>
+          <p:nvPr/>
+        </p:nvSpPr>
+        <p:spPr>
+          <a:xfrm>
+            <a:off x="566928" y="2450592"/>
+            <a:ext cx="6858000" cy="0"/>
+          </a:xfrm>
+          <a:prstGeom prst="line">
+            <a:avLst/>
+          </a:prstGeom>
+          <a:noFill/>
+          <a:ln w="3810">
+            <a:solidFill>
+              <a:srgbClr val="CBD5E0"/>
+            </a:solidFill>
+            <a:prstDash val="solid"/>
+          </a:ln>
+        </p:spPr>
+      </p:sp>
+      <p:sp>
+        <p:nvSpPr>
+          <p:cNvPr id="13" name="Text 11"/>
+          <p:cNvSpPr/>
+          <p:nvPr/>
+        </p:nvSpPr>
+        <p:spPr>
+          <a:xfrm>
+            <a:off x="566928" y="2450592"/>
+            <a:ext cx="2606040" cy="402336"/>
+          </a:xfrm>
+          <a:prstGeom prst="rect">
+            <a:avLst/>
+          </a:prstGeom>
+          <a:noFill/>
+          <a:ln/>
+        </p:spPr>
+        <p:txBody>
+          <a:bodyPr wrap="square" lIns="0" tIns="0" rIns="0" bIns="0" rtlCol="0" anchor="ctr"/>
+          <a:lstStyle/>
+          <a:p>
+            <a:pPr indent="0" marL="0">
+              <a:lnSpc>
+                <a:spcPct val="120000"/>
+              </a:lnSpc>
+              <a:buNone/>
+            </a:pPr>
+            <a:r>
+              <a:rPr lang="en-US" sz="1400" dirty="0">
+                <a:solidFill>
+                  <a:srgbClr val="718096"/>
+                </a:solidFill>
+                <a:latin typeface="Pretendard" pitchFamily="34" charset="0"/>
+                <a:ea typeface="Pretendard" pitchFamily="34" charset="-122"/>
+                <a:cs typeface="Pretendard" pitchFamily="34" charset="-120"/>
+              </a:rPr>
+              <a:t>용도지역</a:t>
+            </a:r>
+            <a:endParaRPr lang="en-US" sz="1400" dirty="0"/>
+          </a:p>
+        </p:txBody>
+      </p:sp>
+      <p:sp>
+        <p:nvSpPr>
+          <p:cNvPr id="14" name="Text 12"/>
+          <p:cNvSpPr/>
+          <p:nvPr/>
+        </p:nvSpPr>
+        <p:spPr>
+          <a:xfrm>
+            <a:off x="3172968" y="2450592"/>
+            <a:ext cx="4251960" cy="402336"/>
+          </a:xfrm>
+          <a:prstGeom prst="rect">
+            <a:avLst/>
+          </a:prstGeom>
+          <a:noFill/>
+          <a:ln/>
+        </p:spPr>
+        <p:txBody>
+          <a:bodyPr wrap="square" lIns="0" tIns="0" rIns="0" bIns="0" rtlCol="0" anchor="ctr"/>
+          <a:lstStyle/>
+          <a:p>
+            <a:pPr indent="0" marL="0">
+              <a:lnSpc>
+                <a:spcPct val="120000"/>
+              </a:lnSpc>
+              <a:buNone/>
+            </a:pPr>
+            <a:r>
+              <a:rPr lang="en-US" sz="1400" b="1" dirty="0">
+                <a:solidFill>
+                  <a:srgbClr val="10161F"/>
+                </a:solidFill>
+                <a:latin typeface="Pretendard" pitchFamily="34" charset="0"/>
+                <a:ea typeface="Pretendard" pitchFamily="34" charset="-122"/>
+                <a:cs typeface="Pretendard" pitchFamily="34" charset="-120"/>
+              </a:rPr>
+              <a:t>일반상업지역</a:t>
+            </a:r>
+            <a:endParaRPr lang="en-US" sz="1400" dirty="0"/>
+          </a:p>
+        </p:txBody>
+      </p:sp>
+      <p:sp>
+        <p:nvSpPr>
+          <p:cNvPr id="15" name="Shape 13"/>
+          <p:cNvSpPr/>
+          <p:nvPr/>
+        </p:nvSpPr>
+        <p:spPr>
+          <a:xfrm>
+            <a:off x="7604608" y="1371600"/>
+            <a:ext cx="0" cy="4754880"/>
+          </a:xfrm>
+          <a:prstGeom prst="line">
+            <a:avLst/>
+          </a:prstGeom>
+          <a:noFill/>
+          <a:ln w="8890">
+            <a:solidFill>
+              <a:srgbClr val="B98A2E"/>
+            </a:solidFill>
+            <a:prstDash val="solid"/>
+          </a:ln>
+        </p:spPr>
+      </p:sp>
+      <p:sp>
+        <p:nvSpPr>
+          <p:cNvPr id="16" name="Shape 14"/>
+          <p:cNvSpPr/>
+          <p:nvPr/>
+        </p:nvSpPr>
+        <p:spPr>
+          <a:xfrm>
+            <a:off x="7784287" y="1645920"/>
+            <a:ext cx="3840480" cy="2103120"/>
           </a:xfrm>
           <a:prstGeom prst="roundRect">
             <a:avLst>
-              <a:gd name="adj" fmla="val 3000"/>
+              <a:gd name="adj" fmla="val 2609"/>
             </a:avLst>
           </a:prstGeom>
           <a:solidFill>
@@ -6242,14 +7575,14 @@
       </p:sp>
       <p:sp>
         <p:nvSpPr>
-          <p:cNvPr id="8" name="Shape 6"/>
-          <p:cNvSpPr/>
-          <p:nvPr/>
-        </p:nvSpPr>
-        <p:spPr>
-          <a:xfrm>
-            <a:off x="566928" y="1700784"/>
-            <a:ext cx="36576" cy="1719072"/>
+          <p:cNvPr id="17" name="Shape 15"/>
+          <p:cNvSpPr/>
+          <p:nvPr/>
+        </p:nvSpPr>
+        <p:spPr>
+          <a:xfrm>
+            <a:off x="7784287" y="1700784"/>
+            <a:ext cx="36576" cy="1993392"/>
           </a:xfrm>
           <a:prstGeom prst="rect">
             <a:avLst/>
@@ -6262,14 +7595,14 @@
       </p:sp>
       <p:sp>
         <p:nvSpPr>
-          <p:cNvPr id="9" name="Text 7"/>
-          <p:cNvSpPr/>
-          <p:nvPr/>
-        </p:nvSpPr>
-        <p:spPr>
-          <a:xfrm>
-            <a:off x="749808" y="1755648"/>
-            <a:ext cx="6528816" cy="201168"/>
+          <p:cNvPr id="18" name="Text 16"/>
+          <p:cNvSpPr/>
+          <p:nvPr/>
+        </p:nvSpPr>
+        <p:spPr>
+          <a:xfrm>
+            <a:off x="7967167" y="1755648"/>
+            <a:ext cx="3511296" cy="201168"/>
           </a:xfrm>
           <a:prstGeom prst="rect">
             <a:avLst/>
@@ -6293,7 +7626,7 @@
                 <a:ea typeface="Pretendard" pitchFamily="34" charset="-122"/>
                 <a:cs typeface="Pretendard" pitchFamily="34" charset="-120"/>
               </a:rPr>
-              <a:t>건축물 물리 스펙 요약</a:t>
+              <a:t>토지 및 건물 분석 포인트</a:t>
             </a:r>
             <a:endParaRPr lang="en-US" sz="1050" dirty="0"/>
           </a:p>
@@ -6301,14 +7634,14 @@
       </p:sp>
       <p:sp>
         <p:nvSpPr>
-          <p:cNvPr id="10" name="Text 8"/>
-          <p:cNvSpPr/>
-          <p:nvPr/>
-        </p:nvSpPr>
-        <p:spPr>
-          <a:xfrm>
-            <a:off x="749808" y="1975104"/>
-            <a:ext cx="6528816" cy="1426464"/>
+          <p:cNvPr id="19" name="Text 17"/>
+          <p:cNvSpPr/>
+          <p:nvPr/>
+        </p:nvSpPr>
+        <p:spPr>
+          <a:xfrm>
+            <a:off x="7967167" y="1975104"/>
+            <a:ext cx="3511296" cy="1700784"/>
           </a:xfrm>
           <a:prstGeom prst="rect">
             <a:avLst/>
@@ -6336,7 +7669,7 @@
                 <a:ea typeface="Pretendard" pitchFamily="34" charset="-122"/>
                 <a:cs typeface="Pretendard" pitchFamily="34" charset="-120"/>
               </a:rPr>
-              <a:t>상세 건물 제원은 실사 자료를 참조하시기 바랍니다</a:t>
+              <a:t>물건 접면 도로 및 교통 여건은 현장 확인 사항입니다</a:t>
             </a:r>
             <a:endParaRPr lang="en-US" sz="930" dirty="0"/>
           </a:p>
@@ -6357,7 +7690,7 @@
                 <a:ea typeface="Pretendard" pitchFamily="34" charset="-122"/>
                 <a:cs typeface="Pretendard" pitchFamily="34" charset="-120"/>
               </a:rPr>
-              <a:t>건물 현황 및 규모는 첨부 대장을 기준으로 합니다</a:t>
+              <a:t>상세 건물 제원은 실사 자료를 참조하시기 바랍니다</a:t>
             </a:r>
             <a:endParaRPr lang="en-US" sz="930" dirty="0"/>
           </a:p>
@@ -6378,7 +7711,7 @@
                 <a:ea typeface="Pretendard" pitchFamily="34" charset="-122"/>
                 <a:cs typeface="Pretendard" pitchFamily="34" charset="-120"/>
               </a:rPr>
-              <a:t>건물 상태 및 설비 현황은 실사 보고서를 참조하십시오</a:t>
+              <a:t>건물 현황 및 규모는 첨부 대장을 기준으로 합니다</a:t>
             </a:r>
             <a:endParaRPr lang="en-US" sz="930" dirty="0"/>
           </a:p>
@@ -6386,41 +7719,18 @@
       </p:sp>
       <p:sp>
         <p:nvSpPr>
-          <p:cNvPr id="11" name="Shape 9"/>
-          <p:cNvSpPr/>
-          <p:nvPr/>
-        </p:nvSpPr>
-        <p:spPr>
-          <a:xfrm>
-            <a:off x="7604608" y="1371600"/>
-            <a:ext cx="0" cy="4754880"/>
-          </a:xfrm>
-          <a:prstGeom prst="line">
-            <a:avLst/>
-          </a:prstGeom>
-          <a:noFill/>
-          <a:ln w="8890">
-            <a:solidFill>
-              <a:srgbClr val="B98A2E"/>
-            </a:solidFill>
-            <a:prstDash val="solid"/>
-          </a:ln>
-        </p:spPr>
-      </p:sp>
-      <p:sp>
-        <p:nvSpPr>
-          <p:cNvPr id="12" name="Shape 10"/>
-          <p:cNvSpPr/>
-          <p:nvPr/>
-        </p:nvSpPr>
-        <p:spPr>
-          <a:xfrm>
-            <a:off x="7784287" y="1645920"/>
-            <a:ext cx="3840480" cy="2103120"/>
+          <p:cNvPr id="20" name="Shape 18"/>
+          <p:cNvSpPr/>
+          <p:nvPr/>
+        </p:nvSpPr>
+        <p:spPr>
+          <a:xfrm>
+            <a:off x="7784287" y="3977640"/>
+            <a:ext cx="3840480" cy="2148840"/>
           </a:xfrm>
           <a:prstGeom prst="roundRect">
             <a:avLst>
-              <a:gd name="adj" fmla="val 2609"/>
+              <a:gd name="adj" fmla="val 2553"/>
             </a:avLst>
           </a:prstGeom>
           <a:solidFill>
@@ -6431,14 +7741,14 @@
       </p:sp>
       <p:sp>
         <p:nvSpPr>
-          <p:cNvPr id="13" name="Shape 11"/>
-          <p:cNvSpPr/>
-          <p:nvPr/>
-        </p:nvSpPr>
-        <p:spPr>
-          <a:xfrm>
-            <a:off x="7784287" y="1700784"/>
-            <a:ext cx="36576" cy="1993392"/>
+          <p:cNvPr id="21" name="Shape 19"/>
+          <p:cNvSpPr/>
+          <p:nvPr/>
+        </p:nvSpPr>
+        <p:spPr>
+          <a:xfrm>
+            <a:off x="7784287" y="4032504"/>
+            <a:ext cx="36576" cy="2039112"/>
           </a:xfrm>
           <a:prstGeom prst="rect">
             <a:avLst/>
@@ -6451,13 +7761,13 @@
       </p:sp>
       <p:sp>
         <p:nvSpPr>
-          <p:cNvPr id="14" name="Text 12"/>
-          <p:cNvSpPr/>
-          <p:nvPr/>
-        </p:nvSpPr>
-        <p:spPr>
-          <a:xfrm>
-            <a:off x="7967167" y="1755648"/>
+          <p:cNvPr id="22" name="Text 20"/>
+          <p:cNvSpPr/>
+          <p:nvPr/>
+        </p:nvSpPr>
+        <p:spPr>
+          <a:xfrm>
+            <a:off x="7967167" y="4087368"/>
             <a:ext cx="3511296" cy="201168"/>
           </a:xfrm>
           <a:prstGeom prst="rect">
@@ -6482,7 +7792,7 @@
                 <a:ea typeface="Pretendard" pitchFamily="34" charset="-122"/>
                 <a:cs typeface="Pretendard" pitchFamily="34" charset="-120"/>
               </a:rPr>
-              <a:t>토지 및 건물 분석 포인트</a:t>
+              <a:t>물건 실사 및 관리 상태</a:t>
             </a:r>
             <a:endParaRPr lang="en-US" sz="1050" dirty="0"/>
           </a:p>
@@ -6490,14 +7800,14 @@
       </p:sp>
       <p:sp>
         <p:nvSpPr>
-          <p:cNvPr id="15" name="Text 13"/>
-          <p:cNvSpPr/>
-          <p:nvPr/>
-        </p:nvSpPr>
-        <p:spPr>
-          <a:xfrm>
-            <a:off x="7967167" y="1975104"/>
-            <a:ext cx="3511296" cy="1700784"/>
+          <p:cNvPr id="23" name="Text 21"/>
+          <p:cNvSpPr/>
+          <p:nvPr/>
+        </p:nvSpPr>
+        <p:spPr>
+          <a:xfrm>
+            <a:off x="7967167" y="4306824"/>
+            <a:ext cx="3511296" cy="1746504"/>
           </a:xfrm>
           <a:prstGeom prst="rect">
             <a:avLst/>
@@ -6525,7 +7835,7 @@
                 <a:ea typeface="Pretendard" pitchFamily="34" charset="-122"/>
                 <a:cs typeface="Pretendard" pitchFamily="34" charset="-120"/>
               </a:rPr>
-              <a:t>물건 접면 도로 및 교통 여건은 현장 확인 사항입니다</a:t>
+              <a:t>건물 상태 및 설비 현황은 실사 보고서를 참조하십시오</a:t>
             </a:r>
             <a:endParaRPr lang="en-US" sz="930" dirty="0"/>
           </a:p>
@@ -6546,7 +7856,7 @@
                 <a:ea typeface="Pretendard" pitchFamily="34" charset="-122"/>
                 <a:cs typeface="Pretendard" pitchFamily="34" charset="-120"/>
               </a:rPr>
-              <a:t>상세 건물 제원은 실사 자료를 참조하시기 바랍니다</a:t>
+              <a:t>자금 조달 및 대출 조건은 금융 자문 후 확정됩니다</a:t>
             </a:r>
             <a:endParaRPr lang="en-US" sz="930" dirty="0"/>
           </a:p>
@@ -6567,7 +7877,7 @@
                 <a:ea typeface="Pretendard" pitchFamily="34" charset="-122"/>
                 <a:cs typeface="Pretendard" pitchFamily="34" charset="-120"/>
               </a:rPr>
-              <a:t>건물 현황 및 규모는 첨부 대장을 기준으로 합니다</a:t>
+              <a:t>상세 실사 단계에서 구체적인 계약 조건 및 세무 검토가 진행됩니다</a:t>
             </a:r>
             <a:endParaRPr lang="en-US" sz="930" dirty="0"/>
           </a:p>
@@ -6575,173 +7885,7 @@
       </p:sp>
       <p:sp>
         <p:nvSpPr>
-          <p:cNvPr id="16" name="Shape 14"/>
-          <p:cNvSpPr/>
-          <p:nvPr/>
-        </p:nvSpPr>
-        <p:spPr>
-          <a:xfrm>
-            <a:off x="7784287" y="3977640"/>
-            <a:ext cx="3840480" cy="2148840"/>
-          </a:xfrm>
-          <a:prstGeom prst="roundRect">
-            <a:avLst>
-              <a:gd name="adj" fmla="val 2553"/>
-            </a:avLst>
-          </a:prstGeom>
-          <a:solidFill>
-            <a:srgbClr val="BEE3F8"/>
-          </a:solidFill>
-          <a:ln/>
-        </p:spPr>
-      </p:sp>
-      <p:sp>
-        <p:nvSpPr>
-          <p:cNvPr id="17" name="Shape 15"/>
-          <p:cNvSpPr/>
-          <p:nvPr/>
-        </p:nvSpPr>
-        <p:spPr>
-          <a:xfrm>
-            <a:off x="7784287" y="4032504"/>
-            <a:ext cx="36576" cy="2039112"/>
-          </a:xfrm>
-          <a:prstGeom prst="rect">
-            <a:avLst/>
-          </a:prstGeom>
-          <a:solidFill>
-            <a:srgbClr val="2B6CB0"/>
-          </a:solidFill>
-          <a:ln/>
-        </p:spPr>
-      </p:sp>
-      <p:sp>
-        <p:nvSpPr>
-          <p:cNvPr id="18" name="Text 16"/>
-          <p:cNvSpPr/>
-          <p:nvPr/>
-        </p:nvSpPr>
-        <p:spPr>
-          <a:xfrm>
-            <a:off x="7967167" y="4087368"/>
-            <a:ext cx="3511296" cy="201168"/>
-          </a:xfrm>
-          <a:prstGeom prst="rect">
-            <a:avLst/>
-          </a:prstGeom>
-          <a:noFill/>
-          <a:ln/>
-        </p:spPr>
-        <p:txBody>
-          <a:bodyPr wrap="square" lIns="0" tIns="0" rIns="0" bIns="0" rtlCol="0" anchor="ctr"/>
-          <a:lstStyle/>
-          <a:p>
-            <a:pPr indent="0" marL="0">
-              <a:buNone/>
-            </a:pPr>
-            <a:r>
-              <a:rPr lang="en-US" sz="1050" b="1" dirty="0">
-                <a:solidFill>
-                  <a:srgbClr val="2B6CB0"/>
-                </a:solidFill>
-                <a:latin typeface="Pretendard" pitchFamily="34" charset="0"/>
-                <a:ea typeface="Pretendard" pitchFamily="34" charset="-122"/>
-                <a:cs typeface="Pretendard" pitchFamily="34" charset="-120"/>
-              </a:rPr>
-              <a:t>물건 실사 및 관리 상태</a:t>
-            </a:r>
-            <a:endParaRPr lang="en-US" sz="1050" dirty="0"/>
-          </a:p>
-        </p:txBody>
-      </p:sp>
-      <p:sp>
-        <p:nvSpPr>
-          <p:cNvPr id="19" name="Text 17"/>
-          <p:cNvSpPr/>
-          <p:nvPr/>
-        </p:nvSpPr>
-        <p:spPr>
-          <a:xfrm>
-            <a:off x="7967167" y="4306824"/>
-            <a:ext cx="3511296" cy="1746504"/>
-          </a:xfrm>
-          <a:prstGeom prst="rect">
-            <a:avLst/>
-          </a:prstGeom>
-          <a:noFill/>
-          <a:ln/>
-        </p:spPr>
-        <p:txBody>
-          <a:bodyPr wrap="square" lIns="0" tIns="0" rIns="0" bIns="0" rtlCol="0" anchor="t"/>
-          <a:lstStyle/>
-          <a:p>
-            <a:pPr marL="342900" indent="-342900">
-              <a:lnSpc>
-                <a:spcPct val="120000"/>
-              </a:lnSpc>
-              <a:buSzPct val="100000"/>
-              <a:buChar char="•"/>
-            </a:pPr>
-            <a:r>
-              <a:rPr lang="en-US" sz="930" dirty="0">
-                <a:solidFill>
-                  <a:srgbClr val="10161F"/>
-                </a:solidFill>
-                <a:latin typeface="Pretendard" pitchFamily="34" charset="0"/>
-                <a:ea typeface="Pretendard" pitchFamily="34" charset="-122"/>
-                <a:cs typeface="Pretendard" pitchFamily="34" charset="-120"/>
-              </a:rPr>
-              <a:t>건물 상태 및 설비 현황은 실사 보고서를 참조하십시오</a:t>
-            </a:r>
-            <a:endParaRPr lang="en-US" sz="930" dirty="0"/>
-          </a:p>
-          <a:p>
-            <a:pPr marL="342900" indent="-342900">
-              <a:lnSpc>
-                <a:spcPct val="120000"/>
-              </a:lnSpc>
-              <a:buSzPct val="100000"/>
-              <a:buChar char="•"/>
-            </a:pPr>
-            <a:r>
-              <a:rPr lang="en-US" sz="930" dirty="0">
-                <a:solidFill>
-                  <a:srgbClr val="10161F"/>
-                </a:solidFill>
-                <a:latin typeface="Pretendard" pitchFamily="34" charset="0"/>
-                <a:ea typeface="Pretendard" pitchFamily="34" charset="-122"/>
-                <a:cs typeface="Pretendard" pitchFamily="34" charset="-120"/>
-              </a:rPr>
-              <a:t>자금 조달 및 대출 조건은 금융 자문 후 확정됩니다</a:t>
-            </a:r>
-            <a:endParaRPr lang="en-US" sz="930" dirty="0"/>
-          </a:p>
-          <a:p>
-            <a:pPr marL="342900" indent="-342900">
-              <a:lnSpc>
-                <a:spcPct val="120000"/>
-              </a:lnSpc>
-              <a:buSzPct val="100000"/>
-              <a:buChar char="•"/>
-            </a:pPr>
-            <a:r>
-              <a:rPr lang="en-US" sz="930" dirty="0">
-                <a:solidFill>
-                  <a:srgbClr val="10161F"/>
-                </a:solidFill>
-                <a:latin typeface="Pretendard" pitchFamily="34" charset="0"/>
-                <a:ea typeface="Pretendard" pitchFamily="34" charset="-122"/>
-                <a:cs typeface="Pretendard" pitchFamily="34" charset="-120"/>
-              </a:rPr>
-              <a:t>상세 실사 단계에서 구체적인 계약 조건 및 세무 검토가 진행됩니다</a:t>
-            </a:r>
-            <a:endParaRPr lang="en-US" sz="930" dirty="0"/>
-          </a:p>
-        </p:txBody>
-      </p:sp>
-      <p:sp>
-        <p:nvSpPr>
-          <p:cNvPr id="20" name="Text 18"/>
+          <p:cNvPr id="24" name="Text 22"/>
           <p:cNvSpPr/>
           <p:nvPr/>
         </p:nvSpPr>
@@ -6780,7 +7924,7 @@
       </p:sp>
       <p:sp>
         <p:nvSpPr>
-          <p:cNvPr id="21" name="Text 19"/>
+          <p:cNvPr id="25" name="Text 23"/>
           <p:cNvSpPr/>
           <p:nvPr/>
         </p:nvSpPr>
@@ -8098,13 +9242,6 @@
 <file path=ppt/slides/slide8.xml><?xml version="1.0" encoding="utf-8"?>
 <p:sld xmlns:a="http://schemas.openxmlformats.org/drawingml/2006/main" xmlns:r="http://schemas.openxmlformats.org/officeDocument/2006/relationships" xmlns:p="http://schemas.openxmlformats.org/presentationml/2006/main">
   <p:cSld name="Slide 8">
-    <p:bg>
-      <p:bgPr>
-        <a:solidFill>
-          <a:srgbClr val="FFFFFF"/>
-        </a:solidFill>
-      </p:bgPr>
-    </p:bg>
     <p:spTree>
       <p:nvGrpSpPr>
         <p:cNvPr id="1" name=""/>
@@ -8211,7 +9348,7 @@
                 <a:ea typeface="Arial" pitchFamily="34" charset="-122"/>
                 <a:cs typeface="Arial" pitchFamily="34" charset="-120"/>
               </a:rPr>
-              <a:t>Thesis</a:t>
+              <a:t>Checklist</a:t>
             </a:r>
             <a:endParaRPr lang="en-US" sz="950" dirty="0"/>
           </a:p>
@@ -8250,7 +9387,7 @@
                 <a:ea typeface="Pretendard" pitchFamily="34" charset="-122"/>
                 <a:cs typeface="Pretendard" pitchFamily="34" charset="-120"/>
               </a:rPr>
-              <a:t>왜 지금 이 매물을 사야 하는가</a:t>
+              <a:t>섹션 상세</a:t>
             </a:r>
             <a:endParaRPr lang="en-US" sz="2300" dirty="0"/>
           </a:p>
@@ -8258,30 +9395,31 @@
       </p:sp>
       <p:sp>
         <p:nvSpPr>
-          <p:cNvPr id="6" name="Shape 4"/>
-          <p:cNvSpPr/>
-          <p:nvPr/>
-        </p:nvSpPr>
-        <p:spPr>
-          <a:xfrm>
-            <a:off x="566928" y="4983480"/>
-            <a:ext cx="11057839" cy="804672"/>
-          </a:xfrm>
-          <a:prstGeom prst="roundRect">
-            <a:avLst>
-              <a:gd name="adj" fmla="val 6818"/>
-            </a:avLst>
-          </a:prstGeom>
-          <a:solidFill>
-            <a:srgbClr val="F3EBDA"/>
-          </a:solidFill>
-          <a:ln w="10160">
-            <a:solidFill>
-              <a:srgbClr val="D9B668"/>
-            </a:solidFill>
-            <a:prstDash val="solid"/>
-          </a:ln>
-        </p:spPr>
+          <p:cNvPr id="6" name="Text 4"/>
+          <p:cNvSpPr/>
+          <p:nvPr/>
+        </p:nvSpPr>
+        <p:spPr>
+          <a:xfrm>
+            <a:off x="566928" y="1517904"/>
+            <a:ext cx="6492240" cy="274320"/>
+          </a:xfrm>
+          <a:prstGeom prst="rect">
+            <a:avLst/>
+          </a:prstGeom>
+          <a:noFill/>
+          <a:ln/>
+        </p:spPr>
+        <p:txBody>
+          <a:bodyPr wrap="square" rtlCol="0" anchor="ctr"/>
+          <a:lstStyle/>
+          <a:p>
+            <a:pPr indent="0" marL="0">
+              <a:buNone/>
+            </a:pPr>
+            <a:endParaRPr lang="en-US" sz="1400" dirty="0"/>
+          </a:p>
+        </p:txBody>
       </p:sp>
       <p:sp>
         <p:nvSpPr>
@@ -8291,82 +9429,29 @@
         </p:nvSpPr>
         <p:spPr>
           <a:xfrm>
-            <a:off x="749808" y="5093208"/>
-            <a:ext cx="1691640" cy="256032"/>
-          </a:xfrm>
-          <a:prstGeom prst="rect">
-            <a:avLst/>
-          </a:prstGeom>
-          <a:noFill/>
-          <a:ln/>
-        </p:spPr>
-        <p:txBody>
-          <a:bodyPr wrap="square" lIns="0" tIns="0" rIns="0" bIns="0" rtlCol="0" anchor="ctr"/>
+            <a:off x="566928" y="1874520"/>
+            <a:ext cx="6492240" cy="182880"/>
+          </a:xfrm>
+          <a:prstGeom prst="rect">
+            <a:avLst/>
+          </a:prstGeom>
+          <a:noFill/>
+          <a:ln/>
+        </p:spPr>
+        <p:txBody>
+          <a:bodyPr wrap="square" rtlCol="0" anchor="ctr"/>
           <a:lstStyle/>
           <a:p>
             <a:pPr indent="0" marL="0">
               <a:buNone/>
             </a:pPr>
-            <a:r>
-              <a:rPr lang="en-US" sz="1050" b="1" dirty="0">
-                <a:solidFill>
-                  <a:srgbClr val="977024"/>
-                </a:solidFill>
-                <a:latin typeface="Pretendard" pitchFamily="34" charset="0"/>
-                <a:ea typeface="Pretendard" pitchFamily="34" charset="-122"/>
-                <a:cs typeface="Pretendard" pitchFamily="34" charset="-120"/>
-              </a:rPr>
-              <a:t>종합 가치 제안</a:t>
-            </a:r>
-            <a:endParaRPr lang="en-US" sz="1050" dirty="0"/>
+            <a:endParaRPr lang="en-US" sz="900" dirty="0"/>
           </a:p>
         </p:txBody>
       </p:sp>
       <p:sp>
         <p:nvSpPr>
           <p:cNvPr id="8" name="Text 6"/>
-          <p:cNvSpPr/>
-          <p:nvPr/>
-        </p:nvSpPr>
-        <p:spPr>
-          <a:xfrm>
-            <a:off x="2487168" y="5056632"/>
-            <a:ext cx="8954719" cy="658368"/>
-          </a:xfrm>
-          <a:prstGeom prst="rect">
-            <a:avLst/>
-          </a:prstGeom>
-          <a:noFill/>
-          <a:ln/>
-        </p:spPr>
-        <p:txBody>
-          <a:bodyPr wrap="square" lIns="0" tIns="0" rIns="0" bIns="0" rtlCol="0" anchor="ctr"/>
-          <a:lstStyle/>
-          <a:p>
-            <a:pPr indent="0" marL="0">
-              <a:lnSpc>
-                <a:spcPct val="125000"/>
-              </a:lnSpc>
-              <a:buNone/>
-            </a:pPr>
-            <a:r>
-              <a:rPr lang="en-US" sz="1100" dirty="0">
-                <a:solidFill>
-                  <a:srgbClr val="10161F"/>
-                </a:solidFill>
-                <a:latin typeface="Pretendard" pitchFamily="34" charset="0"/>
-                <a:ea typeface="Pretendard" pitchFamily="34" charset="-122"/>
-                <a:cs typeface="Pretendard" pitchFamily="34" charset="-120"/>
-              </a:rPr>
-              <a:t>{"ok":true,"mocked":true,"extractedFields":{"area_signal":"역삼","asset_type":"오피스빌딩","price_band":"300억","size_signal":"3000평(약 9917.4㎡)"},"extractedFacts":{"region":"역삼","exactAddressCandidate":"역삼동 742-1","assetType":"오피스빌딩","priceText":"300억","sizeText":"3000평(약 9917.4㎡)","currentUse":"오피스","currentUseSignal":"근린생활시설","leaseSignal":"임대중","vacancySignal":"공실없음","tenantNames":["쿠팡","네이버"],"unitRentTexts":["301호: 1500만"],"sellerMotivationText":"자산 효율화","brokerNotes":["초역세권 매물"]},"detectedSensitiveFields":["exact_address","tenant_name"],"ambiguousFields":[],"warnings":[],"areaSignal":"역삼","assetType":"오피스빌딩","priceBand":"300억","sizeSignal":"3000평(약 9917.4㎡)","dealType":"매각","buildingName":"역삼 센트럴타워","exactAddress":"역삼동 742-1","totalFloorArea":9917.3,"buildYear":2015,"currentUseSignal":"근린생활시설","vacancySignal":"공실 없음","fitSummary":"초역세권 근생 빌딩으로 시행/사옥 매입에 최적화","cautionSummary":"주요 임차인 만기 조율 필요","hiddenFields":["exact_address","seller_motivation"],"confidence":{"areaSignal":"confirmed","assetType":"confirmed","priceBand":"ai_hypothesis","fitSummary":"ai_hypothesis"},"missingData":["sizeSignal"],"boundaryNote":"본 자료는 실거래 통계 기반 참고치입니다.","buyerType":"법인 사옥형","budgetRange":{"min":50,"max":80,"display":"50억~80억"},"preferredRegions":["강남","성수"],"assetTypes":["꼬마빌딩","사옥용"],"purchasePurpose":"사옥용 매입","mustHave":["초역세권","주차"],"niceToHave":["테라스","루프탑"],"riskTolerance":"medium","financingNote":"자본금 50% 준비","missingQuestions":["구체적인 입주 시기가 언제인가요?","선호하는 수익률이 있나요?"],"privacyNotes":["연락처 비공개"],"fitReasons":["매수자 예산(50-80억)에 부합하는 매물입니다.","요청하신 성수/강남 권역에 해당합니다."],"cautionReasons":["요청한 용도와 달리 명도 협의가 다소 필요합니다."],"recommendedNextAction":"현장 답사 제안","kakaoMessage":"안녕하세요! 요청하신 조건에 부합하는 추천 매물이 있어 안내해 드립니다. 확인해보시고 피드백 부탁드립니다.","title":"강남 역삼역 초역세권 오피스 사옥용 빌딩 매각","shortSummary":"역삼역 도보 5분 거리의 준신축급 대형 오피스빌딩입니다.","dealPoints":["초역세권","사옥 최적"],"cautionPoints":["명도 조율 필요"],"hiddenInfoNotice":["보증금 및 지번은 인가 후 확인 가능"],"gateMessage":"G1 등급 등록이 필요합니다.","kakaoText":"강남 역삼역 오피스 빌딩 매각 안내입니다.","exactUnitCandidate":"101호","floor":"1층","areaSqmText":"150㎡","spaceType":"office","depositText":"5000만","monthlyRentText":"400만","maintenanceFeeText":"50만","availableFromText":"즉시입주","leaseTermMonthsText":"24","incentivesText":"렌트프리 2개월","restrictions":[],"landlordIdentity":"김성수","currentTenant":"스타트업","vacancyReason":"이전 확장","rentNegotiation":"협의 가능","region":"성수동","areaSqm":150,"deposit":5000,"monthlyRent":400,"maintenanceFee":50,"availableFrom":"즉시입주","leaseTermMonths":24,"incentives":{"rentFreeMonths":2,"interiorSupport":"일부 인테리어 지원","freeRentDetail":"렌트프리 2개월 지원"},"shortSummaryLease":"성수역 도보 5분 거리 1층 리테일 상가 매물입니다."}</a:t>
-            </a:r>
-            <a:endParaRPr lang="en-US" sz="1100" dirty="0"/>
-          </a:p>
-        </p:txBody>
-      </p:sp>
-      <p:sp>
-        <p:nvSpPr>
-          <p:cNvPr id="9" name="Text 7"/>
           <p:cNvSpPr/>
           <p:nvPr/>
         </p:nvSpPr>
@@ -8405,7 +9490,7 @@
       </p:sp>
       <p:sp>
         <p:nvSpPr>
-          <p:cNvPr id="10" name="Text 8"/>
+          <p:cNvPr id="9" name="Text 7"/>
           <p:cNvSpPr/>
           <p:nvPr/>
         </p:nvSpPr>
@@ -8566,7 +9651,7 @@
                 <a:ea typeface="Arial" pitchFamily="34" charset="-122"/>
                 <a:cs typeface="Arial" pitchFamily="34" charset="-120"/>
               </a:rPr>
-              <a:t>Process</a:t>
+              <a:t>Thesis</a:t>
             </a:r>
             <a:endParaRPr lang="en-US" sz="950" dirty="0"/>
           </a:p>
@@ -8605,7 +9690,7 @@
                 <a:ea typeface="Pretendard" pitchFamily="34" charset="-122"/>
                 <a:cs typeface="Pretendard" pitchFamily="34" charset="-120"/>
               </a:rPr>
-              <a:t>검토 후 다음 단계는 무엇인가</a:t>
+              <a:t>왜 지금 이 매물을 사야 하는가</a:t>
             </a:r>
             <a:endParaRPr lang="en-US" sz="2300" dirty="0"/>
           </a:p>
@@ -8619,17 +9704,160 @@
         </p:nvSpPr>
         <p:spPr>
           <a:xfrm>
-            <a:off x="566928" y="1572768"/>
-            <a:ext cx="11057839" cy="3200400"/>
+            <a:off x="566928" y="1325880"/>
+            <a:ext cx="5368900" cy="2560320"/>
           </a:xfrm>
           <a:prstGeom prst="roundRect">
             <a:avLst>
-              <a:gd name="adj" fmla="val 1714"/>
+              <a:gd name="adj" fmla="val 2857"/>
             </a:avLst>
           </a:prstGeom>
           <a:solidFill>
             <a:srgbClr val="F7FAFC"/>
           </a:solidFill>
+          <a:ln w="10160">
+            <a:solidFill>
+              <a:srgbClr val="CBD5E0"/>
+            </a:solidFill>
+            <a:prstDash val="solid"/>
+          </a:ln>
+        </p:spPr>
+      </p:sp>
+      <p:sp>
+        <p:nvSpPr>
+          <p:cNvPr id="7" name="Shape 5"/>
+          <p:cNvSpPr/>
+          <p:nvPr/>
+        </p:nvSpPr>
+        <p:spPr>
+          <a:xfrm>
+            <a:off x="566928" y="1325880"/>
+            <a:ext cx="5368900" cy="54864"/>
+          </a:xfrm>
+          <a:prstGeom prst="rect">
+            <a:avLst/>
+          </a:prstGeom>
+          <a:solidFill>
+            <a:srgbClr val="B98A2E"/>
+          </a:solidFill>
+          <a:ln/>
+        </p:spPr>
+      </p:sp>
+      <p:sp>
+        <p:nvSpPr>
+          <p:cNvPr id="8" name="Shape 6"/>
+          <p:cNvSpPr/>
+          <p:nvPr/>
+        </p:nvSpPr>
+        <p:spPr>
+          <a:xfrm>
+            <a:off x="795528" y="1600200"/>
+            <a:ext cx="475488" cy="292608"/>
+          </a:xfrm>
+          <a:prstGeom prst="roundRect">
+            <a:avLst>
+              <a:gd name="adj" fmla="val 12500"/>
+            </a:avLst>
+          </a:prstGeom>
+          <a:solidFill>
+            <a:srgbClr val="D9B668"/>
+          </a:solidFill>
+          <a:ln/>
+        </p:spPr>
+      </p:sp>
+      <p:sp>
+        <p:nvSpPr>
+          <p:cNvPr id="9" name="Text 7"/>
+          <p:cNvSpPr/>
+          <p:nvPr/>
+        </p:nvSpPr>
+        <p:spPr>
+          <a:xfrm>
+            <a:off x="795528" y="1600200"/>
+            <a:ext cx="475488" cy="292608"/>
+          </a:xfrm>
+          <a:prstGeom prst="rect">
+            <a:avLst/>
+          </a:prstGeom>
+          <a:noFill/>
+          <a:ln/>
+        </p:spPr>
+        <p:txBody>
+          <a:bodyPr wrap="square" lIns="0" tIns="0" rIns="0" bIns="0" rtlCol="0" anchor="ctr"/>
+          <a:lstStyle/>
+          <a:p>
+            <a:pPr algn="ctr" indent="0" marL="0">
+              <a:buNone/>
+            </a:pPr>
+            <a:r>
+              <a:rPr lang="en-US" sz="1100" b="1" dirty="0">
+                <a:solidFill>
+                  <a:srgbClr val="977024"/>
+                </a:solidFill>
+                <a:latin typeface="Arial" pitchFamily="34" charset="0"/>
+                <a:ea typeface="Arial" pitchFamily="34" charset="-122"/>
+                <a:cs typeface="Arial" pitchFamily="34" charset="-120"/>
+              </a:rPr>
+              <a:t>01</a:t>
+            </a:r>
+            <a:endParaRPr lang="en-US" sz="1100" dirty="0"/>
+          </a:p>
+        </p:txBody>
+      </p:sp>
+      <p:sp>
+        <p:nvSpPr>
+          <p:cNvPr id="10" name="Text 8"/>
+          <p:cNvSpPr/>
+          <p:nvPr/>
+        </p:nvSpPr>
+        <p:spPr>
+          <a:xfrm>
+            <a:off x="795528" y="2039112"/>
+            <a:ext cx="4911700" cy="365760"/>
+          </a:xfrm>
+          <a:prstGeom prst="rect">
+            <a:avLst/>
+          </a:prstGeom>
+          <a:noFill/>
+          <a:ln/>
+        </p:spPr>
+        <p:txBody>
+          <a:bodyPr wrap="square" lIns="0" tIns="0" rIns="0" bIns="0" rtlCol="0" anchor="t"/>
+          <a:lstStyle/>
+          <a:p>
+            <a:pPr indent="0" marL="0">
+              <a:buNone/>
+            </a:pPr>
+            <a:r>
+              <a:rPr lang="en-US" sz="1500" b="1" dirty="0">
+                <a:solidFill>
+                  <a:srgbClr val="10161F"/>
+                </a:solidFill>
+                <a:latin typeface="Pretendard" pitchFamily="34" charset="0"/>
+                <a:ea typeface="Pretendard" pitchFamily="34" charset="-122"/>
+                <a:cs typeface="Pretendard" pitchFamily="34" charset="-120"/>
+              </a:rPr>
+              <a:t>확실한 월 현금흐름</a:t>
+            </a:r>
+            <a:endParaRPr lang="en-US" sz="1500" dirty="0"/>
+          </a:p>
+        </p:txBody>
+      </p:sp>
+      <p:sp>
+        <p:nvSpPr>
+          <p:cNvPr id="11" name="Shape 9"/>
+          <p:cNvSpPr/>
+          <p:nvPr/>
+        </p:nvSpPr>
+        <p:spPr>
+          <a:xfrm>
+            <a:off x="795528" y="2468880"/>
+            <a:ext cx="4911700" cy="0"/>
+          </a:xfrm>
+          <a:prstGeom prst="line">
+            <a:avLst/>
+          </a:prstGeom>
+          <a:noFill/>
           <a:ln w="6350">
             <a:solidFill>
               <a:srgbClr val="CBD5E0"/>
@@ -8640,16 +9868,85 @@
       </p:sp>
       <p:sp>
         <p:nvSpPr>
-          <p:cNvPr id="7" name="Shape 5"/>
-          <p:cNvSpPr/>
-          <p:nvPr/>
-        </p:nvSpPr>
-        <p:spPr>
-          <a:xfrm>
-            <a:off x="786384" y="1792224"/>
-            <a:ext cx="438912" cy="438912"/>
-          </a:xfrm>
-          <a:prstGeom prst="ellipse">
+          <p:cNvPr id="12" name="Text 10"/>
+          <p:cNvSpPr/>
+          <p:nvPr/>
+        </p:nvSpPr>
+        <p:spPr>
+          <a:xfrm>
+            <a:off x="795528" y="2624328"/>
+            <a:ext cx="4911700" cy="1051560"/>
+          </a:xfrm>
+          <a:prstGeom prst="rect">
+            <a:avLst/>
+          </a:prstGeom>
+          <a:noFill/>
+          <a:ln/>
+        </p:spPr>
+        <p:txBody>
+          <a:bodyPr wrap="square" lIns="0" tIns="0" rIns="0" bIns="0" rtlCol="0" anchor="t"/>
+          <a:lstStyle/>
+          <a:p>
+            <a:pPr indent="0" marL="0">
+              <a:lnSpc>
+                <a:spcPct val="130000"/>
+              </a:lnSpc>
+              <a:buNone/>
+            </a:pPr>
+            <a:r>
+              <a:rPr lang="en-US" sz="1200" dirty="0">
+                <a:solidFill>
+                  <a:srgbClr val="10161F"/>
+                </a:solidFill>
+                <a:latin typeface="Pretendard" pitchFamily="34" charset="0"/>
+                <a:ea typeface="Pretendard" pitchFamily="34" charset="-122"/>
+                <a:cs typeface="Pretendard" pitchFamily="34" charset="-120"/>
+              </a:rPr>
+              <a:t>임대차 현황 및 공실률을 반영한 순영업소득(NOI) 분석은 수익분석 섹션을 참조하시기 바랍니다.</a:t>
+            </a:r>
+            <a:endParaRPr lang="en-US" sz="1200" dirty="0"/>
+          </a:p>
+        </p:txBody>
+      </p:sp>
+      <p:sp>
+        <p:nvSpPr>
+          <p:cNvPr id="13" name="Shape 11"/>
+          <p:cNvSpPr/>
+          <p:nvPr/>
+        </p:nvSpPr>
+        <p:spPr>
+          <a:xfrm>
+            <a:off x="6255868" y="1325880"/>
+            <a:ext cx="5368900" cy="2560320"/>
+          </a:xfrm>
+          <a:prstGeom prst="roundRect">
+            <a:avLst>
+              <a:gd name="adj" fmla="val 2857"/>
+            </a:avLst>
+          </a:prstGeom>
+          <a:solidFill>
+            <a:srgbClr val="F7FAFC"/>
+          </a:solidFill>
+          <a:ln w="10160">
+            <a:solidFill>
+              <a:srgbClr val="CBD5E0"/>
+            </a:solidFill>
+            <a:prstDash val="solid"/>
+          </a:ln>
+        </p:spPr>
+      </p:sp>
+      <p:sp>
+        <p:nvSpPr>
+          <p:cNvPr id="14" name="Shape 12"/>
+          <p:cNvSpPr/>
+          <p:nvPr/>
+        </p:nvSpPr>
+        <p:spPr>
+          <a:xfrm>
+            <a:off x="6255868" y="1325880"/>
+            <a:ext cx="5368900" cy="54864"/>
+          </a:xfrm>
+          <a:prstGeom prst="rect">
             <a:avLst/>
           </a:prstGeom>
           <a:solidFill>
@@ -8660,14 +9957,36 @@
       </p:sp>
       <p:sp>
         <p:nvSpPr>
-          <p:cNvPr id="8" name="Text 6"/>
-          <p:cNvSpPr/>
-          <p:nvPr/>
-        </p:nvSpPr>
-        <p:spPr>
-          <a:xfrm>
-            <a:off x="786384" y="1792224"/>
-            <a:ext cx="438912" cy="438912"/>
+          <p:cNvPr id="15" name="Shape 13"/>
+          <p:cNvSpPr/>
+          <p:nvPr/>
+        </p:nvSpPr>
+        <p:spPr>
+          <a:xfrm>
+            <a:off x="6484468" y="1600200"/>
+            <a:ext cx="475488" cy="292608"/>
+          </a:xfrm>
+          <a:prstGeom prst="roundRect">
+            <a:avLst>
+              <a:gd name="adj" fmla="val 12500"/>
+            </a:avLst>
+          </a:prstGeom>
+          <a:solidFill>
+            <a:srgbClr val="D9B668"/>
+          </a:solidFill>
+          <a:ln/>
+        </p:spPr>
+      </p:sp>
+      <p:sp>
+        <p:nvSpPr>
+          <p:cNvPr id="16" name="Text 14"/>
+          <p:cNvSpPr/>
+          <p:nvPr/>
+        </p:nvSpPr>
+        <p:spPr>
+          <a:xfrm>
+            <a:off x="6484468" y="1600200"/>
+            <a:ext cx="475488" cy="292608"/>
           </a:xfrm>
           <a:prstGeom prst="rect">
             <a:avLst/>
@@ -8683,46 +10002,46 @@
               <a:buNone/>
             </a:pPr>
             <a:r>
-              <a:rPr lang="en-US" sz="1400" b="1" dirty="0">
-                <a:solidFill>
-                  <a:srgbClr val="FFFFFF"/>
+              <a:rPr lang="en-US" sz="1100" b="1" dirty="0">
+                <a:solidFill>
+                  <a:srgbClr val="977024"/>
                 </a:solidFill>
                 <a:latin typeface="Arial" pitchFamily="34" charset="0"/>
                 <a:ea typeface="Arial" pitchFamily="34" charset="-122"/>
                 <a:cs typeface="Arial" pitchFamily="34" charset="-120"/>
               </a:rPr>
-              <a:t>01</a:t>
-            </a:r>
-            <a:endParaRPr lang="en-US" sz="1400" dirty="0"/>
-          </a:p>
-        </p:txBody>
-      </p:sp>
-      <p:sp>
-        <p:nvSpPr>
-          <p:cNvPr id="9" name="Text 7"/>
-          <p:cNvSpPr/>
-          <p:nvPr/>
-        </p:nvSpPr>
-        <p:spPr>
-          <a:xfrm>
-            <a:off x="786384" y="2304288"/>
-            <a:ext cx="10618927" cy="365760"/>
-          </a:xfrm>
-          <a:prstGeom prst="rect">
-            <a:avLst/>
-          </a:prstGeom>
-          <a:noFill/>
-          <a:ln/>
-        </p:spPr>
-        <p:txBody>
-          <a:bodyPr wrap="square" rtlCol="0" anchor="ctr"/>
+              <a:t>02</a:t>
+            </a:r>
+            <a:endParaRPr lang="en-US" sz="1100" dirty="0"/>
+          </a:p>
+        </p:txBody>
+      </p:sp>
+      <p:sp>
+        <p:nvSpPr>
+          <p:cNvPr id="17" name="Text 15"/>
+          <p:cNvSpPr/>
+          <p:nvPr/>
+        </p:nvSpPr>
+        <p:spPr>
+          <a:xfrm>
+            <a:off x="6484468" y="2039112"/>
+            <a:ext cx="4911700" cy="365760"/>
+          </a:xfrm>
+          <a:prstGeom prst="rect">
+            <a:avLst/>
+          </a:prstGeom>
+          <a:noFill/>
+          <a:ln/>
+        </p:spPr>
+        <p:txBody>
+          <a:bodyPr wrap="square" lIns="0" tIns="0" rIns="0" bIns="0" rtlCol="0" anchor="t"/>
           <a:lstStyle/>
           <a:p>
             <a:pPr indent="0" marL="0">
               <a:buNone/>
             </a:pPr>
             <a:r>
-              <a:rPr lang="en-US" sz="1600" b="1" dirty="0">
+              <a:rPr lang="en-US" sz="1500" b="1" dirty="0">
                 <a:solidFill>
                   <a:srgbClr val="10161F"/>
                 </a:solidFill>
@@ -8730,34 +10049,1177 @@
                 <a:ea typeface="Pretendard" pitchFamily="34" charset="-122"/>
                 <a:cs typeface="Pretendard" pitchFamily="34" charset="-120"/>
               </a:rPr>
-              <a:t>1단계</a:t>
-            </a:r>
-            <a:endParaRPr lang="en-US" sz="1600" dirty="0"/>
-          </a:p>
-        </p:txBody>
-      </p:sp>
-      <p:sp>
-        <p:nvSpPr>
-          <p:cNvPr id="10" name="Text 8"/>
-          <p:cNvSpPr/>
-          <p:nvPr/>
-        </p:nvSpPr>
-        <p:spPr>
-          <a:xfrm>
-            <a:off x="786384" y="2761488"/>
-            <a:ext cx="10618927" cy="1828800"/>
-          </a:xfrm>
-          <a:prstGeom prst="rect">
-            <a:avLst/>
-          </a:prstGeom>
-          <a:noFill/>
-          <a:ln/>
-        </p:spPr>
-        <p:txBody>
-          <a:bodyPr wrap="square" rtlCol="0" anchor="t"/>
+              <a:t>가치 상승 및 출구 전략</a:t>
+            </a:r>
+            <a:endParaRPr lang="en-US" sz="1500" dirty="0"/>
+          </a:p>
+        </p:txBody>
+      </p:sp>
+      <p:sp>
+        <p:nvSpPr>
+          <p:cNvPr id="18" name="Shape 16"/>
+          <p:cNvSpPr/>
+          <p:nvPr/>
+        </p:nvSpPr>
+        <p:spPr>
+          <a:xfrm>
+            <a:off x="6484468" y="2468880"/>
+            <a:ext cx="4911700" cy="0"/>
+          </a:xfrm>
+          <a:prstGeom prst="line">
+            <a:avLst/>
+          </a:prstGeom>
+          <a:noFill/>
+          <a:ln w="6350">
+            <a:solidFill>
+              <a:srgbClr val="CBD5E0"/>
+            </a:solidFill>
+            <a:prstDash val="solid"/>
+          </a:ln>
+        </p:spPr>
+      </p:sp>
+      <p:sp>
+        <p:nvSpPr>
+          <p:cNvPr id="19" name="Text 17"/>
+          <p:cNvSpPr/>
+          <p:nvPr/>
+        </p:nvSpPr>
+        <p:spPr>
+          <a:xfrm>
+            <a:off x="6484468" y="2624328"/>
+            <a:ext cx="4911700" cy="1051560"/>
+          </a:xfrm>
+          <a:prstGeom prst="rect">
+            <a:avLst/>
+          </a:prstGeom>
+          <a:noFill/>
+          <a:ln/>
+        </p:spPr>
+        <p:txBody>
+          <a:bodyPr wrap="square" lIns="0" tIns="0" rIns="0" bIns="0" rtlCol="0" anchor="t"/>
           <a:lstStyle/>
           <a:p>
             <a:pPr indent="0" marL="0">
+              <a:lnSpc>
+                <a:spcPct val="130000"/>
+              </a:lnSpc>
+              <a:buNone/>
+            </a:pPr>
+            <a:r>
+              <a:rPr lang="en-US" sz="1200" dirty="0">
+                <a:solidFill>
+                  <a:srgbClr val="10161F"/>
+                </a:solidFill>
+                <a:latin typeface="Pretendard" pitchFamily="34" charset="0"/>
+                <a:ea typeface="Pretendard" pitchFamily="34" charset="-122"/>
+                <a:cs typeface="Pretendard" pitchFamily="34" charset="-120"/>
+              </a:rPr>
+              <a:t>현행 공법 여력을 활용한 밸류업 기회와 더불어 향후 권역 지가 상승에 따른 시세차익 실현이 유력합니다. ### 예상 매수자 유형 (AI 분석)</a:t>
+            </a:r>
+            <a:endParaRPr lang="en-US" sz="1200" dirty="0"/>
+          </a:p>
+        </p:txBody>
+      </p:sp>
+      <p:graphicFrame>
+        <p:nvGraphicFramePr>
+          <p:cNvPr id="10" name="Table 0"/>
+          <p:cNvGraphicFramePr>
+            <a:graphicFrameLocks noGrp="1"/>
+          </p:cNvGraphicFramePr>
+          <p:nvPr>
+            <p:extLst>
+              <p:ext uri="{D42A27DB-BD31-4B8C-83A1-F6EECF244321}">
+                <p14:modId xmlns:p14="http://schemas.microsoft.com/office/powerpoint/2010/main" val="1579011935"/>
+              </p:ext>
+            </p:extLst>
+          </p:nvPr>
+        </p:nvGraphicFramePr>
+        <p:xfrm>
+          <a:off x="566928" y="4023360"/>
+          <a:ext cx="11057839" cy="914400"/>
+        </p:xfrm>
+        <a:graphic>
+          <a:graphicData uri="http://schemas.openxmlformats.org/drawingml/2006/table">
+            <a:tbl>
+              <a:tblPr/>
+              <a:tblGrid>
+                <a:gridCol w="3685946"/>
+                <a:gridCol w="3685946"/>
+                <a:gridCol w="3685946"/>
+              </a:tblGrid>
+              <a:tr h="329184">
+                <a:tc>
+                  <a:txBody>
+                    <a:bodyPr/>
+                    <a:lstStyle/>
+                    <a:p>
+                      <a:pPr indent="0" marL="0">
+                        <a:buNone/>
+                      </a:pPr>
+                      <a:r>
+                        <a:rPr lang="en-US" sz="1050" b="1" dirty="0">
+                          <a:solidFill>
+                            <a:srgbClr val="718096"/>
+                          </a:solidFill>
+                          <a:latin typeface="Pretendard" pitchFamily="34" charset="0"/>
+                          <a:ea typeface="Pretendard" pitchFamily="34" charset="-122"/>
+                          <a:cs typeface="Pretendard" pitchFamily="34" charset="-120"/>
+                        </a:rPr>
+                        <a:t>유형</a:t>
+                      </a:r>
+                      <a:endParaRPr lang="en-US" sz="1050" dirty="0">
+                        <a:latin typeface="Pretendard" charset="0"/>
+                        <a:ea typeface="Pretendard" charset="0"/>
+                        <a:cs typeface="Pretendard" charset="0"/>
+                      </a:endParaRPr>
+                    </a:p>
+                  </a:txBody>
+                  <a:tcPr marL="50800" marR="50800" marT="25400" marB="25400" anchor="ctr">
+                    <a:lnL w="3810" cap="flat" cmpd="sng" algn="ctr">
+                      <a:solidFill>
+                        <a:srgbClr val="CBD5E0"/>
+                      </a:solidFill>
+                      <a:prstDash val="solid"/>
+                      <a:round/>
+                      <a:headEnd type="none" w="med" len="med"/>
+                      <a:tailEnd type="none" w="med" len="med"/>
+                    </a:lnL>
+                    <a:lnR w="3810" cap="flat" cmpd="sng" algn="ctr">
+                      <a:solidFill>
+                        <a:srgbClr val="CBD5E0"/>
+                      </a:solidFill>
+                      <a:prstDash val="solid"/>
+                      <a:round/>
+                      <a:headEnd type="none" w="med" len="med"/>
+                      <a:tailEnd type="none" w="med" len="med"/>
+                    </a:lnR>
+                    <a:lnT w="3810" cap="flat" cmpd="sng" algn="ctr">
+                      <a:solidFill>
+                        <a:srgbClr val="CBD5E0"/>
+                      </a:solidFill>
+                      <a:prstDash val="solid"/>
+                      <a:round/>
+                      <a:headEnd type="none" w="med" len="med"/>
+                      <a:tailEnd type="none" w="med" len="med"/>
+                    </a:lnT>
+                    <a:lnB w="3810" cap="flat" cmpd="sng" algn="ctr">
+                      <a:solidFill>
+                        <a:srgbClr val="CBD5E0"/>
+                      </a:solidFill>
+                      <a:prstDash val="solid"/>
+                      <a:round/>
+                      <a:headEnd type="none" w="med" len="med"/>
+                      <a:tailEnd type="none" w="med" len="med"/>
+                    </a:lnB>
+                    <a:solidFill>
+                      <a:srgbClr val="F7FAFC"/>
+                    </a:solidFill>
+                  </a:tcPr>
+                </a:tc>
+                <a:tc>
+                  <a:txBody>
+                    <a:bodyPr/>
+                    <a:lstStyle/>
+                    <a:p>
+                      <a:pPr indent="0" marL="0">
+                        <a:buNone/>
+                      </a:pPr>
+                      <a:r>
+                        <a:rPr lang="en-US" sz="1050" b="1" dirty="0">
+                          <a:solidFill>
+                            <a:srgbClr val="718096"/>
+                          </a:solidFill>
+                          <a:latin typeface="Pretendard" pitchFamily="34" charset="0"/>
+                          <a:ea typeface="Pretendard" pitchFamily="34" charset="-122"/>
+                          <a:cs typeface="Pretendard" pitchFamily="34" charset="-120"/>
+                        </a:rPr>
+                        <a:t>적합도</a:t>
+                      </a:r>
+                      <a:endParaRPr lang="en-US" sz="1050" dirty="0">
+                        <a:latin typeface="Pretendard" charset="0"/>
+                        <a:ea typeface="Pretendard" charset="0"/>
+                        <a:cs typeface="Pretendard" charset="0"/>
+                      </a:endParaRPr>
+                    </a:p>
+                  </a:txBody>
+                  <a:tcPr marL="50800" marR="50800" marT="25400" marB="25400" anchor="ctr">
+                    <a:lnL w="3810" cap="flat" cmpd="sng" algn="ctr">
+                      <a:solidFill>
+                        <a:srgbClr val="CBD5E0"/>
+                      </a:solidFill>
+                      <a:prstDash val="solid"/>
+                      <a:round/>
+                      <a:headEnd type="none" w="med" len="med"/>
+                      <a:tailEnd type="none" w="med" len="med"/>
+                    </a:lnL>
+                    <a:lnR w="3810" cap="flat" cmpd="sng" algn="ctr">
+                      <a:solidFill>
+                        <a:srgbClr val="CBD5E0"/>
+                      </a:solidFill>
+                      <a:prstDash val="solid"/>
+                      <a:round/>
+                      <a:headEnd type="none" w="med" len="med"/>
+                      <a:tailEnd type="none" w="med" len="med"/>
+                    </a:lnR>
+                    <a:lnT w="3810" cap="flat" cmpd="sng" algn="ctr">
+                      <a:solidFill>
+                        <a:srgbClr val="CBD5E0"/>
+                      </a:solidFill>
+                      <a:prstDash val="solid"/>
+                      <a:round/>
+                      <a:headEnd type="none" w="med" len="med"/>
+                      <a:tailEnd type="none" w="med" len="med"/>
+                    </a:lnT>
+                    <a:lnB w="3810" cap="flat" cmpd="sng" algn="ctr">
+                      <a:solidFill>
+                        <a:srgbClr val="CBD5E0"/>
+                      </a:solidFill>
+                      <a:prstDash val="solid"/>
+                      <a:round/>
+                      <a:headEnd type="none" w="med" len="med"/>
+                      <a:tailEnd type="none" w="med" len="med"/>
+                    </a:lnB>
+                    <a:solidFill>
+                      <a:srgbClr val="F7FAFC"/>
+                    </a:solidFill>
+                  </a:tcPr>
+                </a:tc>
+                <a:tc>
+                  <a:txBody>
+                    <a:bodyPr/>
+                    <a:lstStyle/>
+                    <a:p>
+                      <a:pPr indent="0" marL="0">
+                        <a:buNone/>
+                      </a:pPr>
+                      <a:r>
+                        <a:rPr lang="en-US" sz="1050" b="1" dirty="0">
+                          <a:solidFill>
+                            <a:srgbClr val="718096"/>
+                          </a:solidFill>
+                          <a:latin typeface="Pretendard" pitchFamily="34" charset="0"/>
+                          <a:ea typeface="Pretendard" pitchFamily="34" charset="-122"/>
+                          <a:cs typeface="Pretendard" pitchFamily="34" charset="-120"/>
+                        </a:rPr>
+                        <a:t>이유</a:t>
+                      </a:r>
+                      <a:endParaRPr lang="en-US" sz="1050" dirty="0">
+                        <a:latin typeface="Pretendard" charset="0"/>
+                        <a:ea typeface="Pretendard" charset="0"/>
+                        <a:cs typeface="Pretendard" charset="0"/>
+                      </a:endParaRPr>
+                    </a:p>
+                  </a:txBody>
+                  <a:tcPr marL="50800" marR="50800" marT="25400" marB="25400" anchor="ctr">
+                    <a:lnL w="3810" cap="flat" cmpd="sng" algn="ctr">
+                      <a:solidFill>
+                        <a:srgbClr val="CBD5E0"/>
+                      </a:solidFill>
+                      <a:prstDash val="solid"/>
+                      <a:round/>
+                      <a:headEnd type="none" w="med" len="med"/>
+                      <a:tailEnd type="none" w="med" len="med"/>
+                    </a:lnL>
+                    <a:lnR w="3810" cap="flat" cmpd="sng" algn="ctr">
+                      <a:solidFill>
+                        <a:srgbClr val="CBD5E0"/>
+                      </a:solidFill>
+                      <a:prstDash val="solid"/>
+                      <a:round/>
+                      <a:headEnd type="none" w="med" len="med"/>
+                      <a:tailEnd type="none" w="med" len="med"/>
+                    </a:lnR>
+                    <a:lnT w="3810" cap="flat" cmpd="sng" algn="ctr">
+                      <a:solidFill>
+                        <a:srgbClr val="CBD5E0"/>
+                      </a:solidFill>
+                      <a:prstDash val="solid"/>
+                      <a:round/>
+                      <a:headEnd type="none" w="med" len="med"/>
+                      <a:tailEnd type="none" w="med" len="med"/>
+                    </a:lnT>
+                    <a:lnB w="3810" cap="flat" cmpd="sng" algn="ctr">
+                      <a:solidFill>
+                        <a:srgbClr val="CBD5E0"/>
+                      </a:solidFill>
+                      <a:prstDash val="solid"/>
+                      <a:round/>
+                      <a:headEnd type="none" w="med" len="med"/>
+                      <a:tailEnd type="none" w="med" len="med"/>
+                    </a:lnB>
+                    <a:solidFill>
+                      <a:srgbClr val="F7FAFC"/>
+                    </a:solidFill>
+                  </a:tcPr>
+                </a:tc>
+              </a:tr>
+              <a:tr h="329184">
+                <a:tc>
+                  <a:txBody>
+                    <a:bodyPr/>
+                    <a:lstStyle/>
+                    <a:p>
+                      <a:pPr indent="0" marL="0">
+                        <a:buNone/>
+                      </a:pPr>
+                      <a:r>
+                        <a:rPr lang="en-US" sz="1050" b="1" dirty="0">
+                          <a:solidFill>
+                            <a:srgbClr val="10161F"/>
+                          </a:solidFill>
+                          <a:latin typeface="Pretendard" pitchFamily="34" charset="0"/>
+                          <a:ea typeface="Pretendard" pitchFamily="34" charset="-122"/>
+                          <a:cs typeface="Pretendard" pitchFamily="34" charset="-120"/>
+                        </a:rPr>
+                        <a:t>(임대수익)</a:t>
+                      </a:r>
+                      <a:endParaRPr lang="en-US" sz="1050" dirty="0">
+                        <a:latin typeface="Pretendard" charset="0"/>
+                        <a:ea typeface="Pretendard" charset="0"/>
+                        <a:cs typeface="Pretendard" charset="0"/>
+                      </a:endParaRPr>
+                    </a:p>
+                  </a:txBody>
+                  <a:tcPr marL="50800" marR="50800" marT="25400" marB="25400" anchor="ctr">
+                    <a:lnL w="3810" cap="flat" cmpd="sng" algn="ctr">
+                      <a:solidFill>
+                        <a:srgbClr val="CBD5E0"/>
+                      </a:solidFill>
+                      <a:prstDash val="solid"/>
+                      <a:round/>
+                      <a:headEnd type="none" w="med" len="med"/>
+                      <a:tailEnd type="none" w="med" len="med"/>
+                    </a:lnL>
+                    <a:lnR w="3810" cap="flat" cmpd="sng" algn="ctr">
+                      <a:solidFill>
+                        <a:srgbClr val="CBD5E0"/>
+                      </a:solidFill>
+                      <a:prstDash val="solid"/>
+                      <a:round/>
+                      <a:headEnd type="none" w="med" len="med"/>
+                      <a:tailEnd type="none" w="med" len="med"/>
+                    </a:lnR>
+                    <a:lnT w="3810" cap="flat" cmpd="sng" algn="ctr">
+                      <a:solidFill>
+                        <a:srgbClr val="CBD5E0"/>
+                      </a:solidFill>
+                      <a:prstDash val="solid"/>
+                      <a:round/>
+                      <a:headEnd type="none" w="med" len="med"/>
+                      <a:tailEnd type="none" w="med" len="med"/>
+                    </a:lnT>
+                    <a:lnB w="3810" cap="flat" cmpd="sng" algn="ctr">
+                      <a:solidFill>
+                        <a:srgbClr val="CBD5E0"/>
+                      </a:solidFill>
+                      <a:prstDash val="solid"/>
+                      <a:round/>
+                      <a:headEnd type="none" w="med" len="med"/>
+                      <a:tailEnd type="none" w="med" len="med"/>
+                    </a:lnB>
+                    <a:solidFill>
+                      <a:srgbClr val="FFFFFF"/>
+                    </a:solidFill>
+                  </a:tcPr>
+                </a:tc>
+                <a:tc>
+                  <a:txBody>
+                    <a:bodyPr/>
+                    <a:lstStyle/>
+                    <a:p>
+                      <a:pPr indent="0" marL="0">
+                        <a:buNone/>
+                      </a:pPr>
+                      <a:r>
+                        <a:rPr lang="en-US" sz="1050" dirty="0">
+                          <a:solidFill>
+                            <a:srgbClr val="10161F"/>
+                          </a:solidFill>
+                          <a:latin typeface="Pretendard" pitchFamily="34" charset="0"/>
+                          <a:ea typeface="Pretendard" pitchFamily="34" charset="-122"/>
+                          <a:cs typeface="Pretendard" pitchFamily="34" charset="-120"/>
+                        </a:rPr>
+                        <a:t>최적합</a:t>
+                      </a:r>
+                      <a:endParaRPr lang="en-US" sz="1050" dirty="0">
+                        <a:latin typeface="Pretendard" charset="0"/>
+                        <a:ea typeface="Pretendard" charset="0"/>
+                        <a:cs typeface="Pretendard" charset="0"/>
+                      </a:endParaRPr>
+                    </a:p>
+                  </a:txBody>
+                  <a:tcPr marL="50800" marR="50800" marT="25400" marB="25400" anchor="ctr">
+                    <a:lnL w="3810" cap="flat" cmpd="sng" algn="ctr">
+                      <a:solidFill>
+                        <a:srgbClr val="CBD5E0"/>
+                      </a:solidFill>
+                      <a:prstDash val="solid"/>
+                      <a:round/>
+                      <a:headEnd type="none" w="med" len="med"/>
+                      <a:tailEnd type="none" w="med" len="med"/>
+                    </a:lnL>
+                    <a:lnR w="3810" cap="flat" cmpd="sng" algn="ctr">
+                      <a:solidFill>
+                        <a:srgbClr val="CBD5E0"/>
+                      </a:solidFill>
+                      <a:prstDash val="solid"/>
+                      <a:round/>
+                      <a:headEnd type="none" w="med" len="med"/>
+                      <a:tailEnd type="none" w="med" len="med"/>
+                    </a:lnR>
+                    <a:lnT w="3810" cap="flat" cmpd="sng" algn="ctr">
+                      <a:solidFill>
+                        <a:srgbClr val="CBD5E0"/>
+                      </a:solidFill>
+                      <a:prstDash val="solid"/>
+                      <a:round/>
+                      <a:headEnd type="none" w="med" len="med"/>
+                      <a:tailEnd type="none" w="med" len="med"/>
+                    </a:lnT>
+                    <a:lnB w="3810" cap="flat" cmpd="sng" algn="ctr">
+                      <a:solidFill>
+                        <a:srgbClr val="CBD5E0"/>
+                      </a:solidFill>
+                      <a:prstDash val="solid"/>
+                      <a:round/>
+                      <a:headEnd type="none" w="med" len="med"/>
+                      <a:tailEnd type="none" w="med" len="med"/>
+                    </a:lnB>
+                    <a:solidFill>
+                      <a:srgbClr val="FFFFFF"/>
+                    </a:solidFill>
+                  </a:tcPr>
+                </a:tc>
+                <a:tc>
+                  <a:txBody>
+                    <a:bodyPr/>
+                    <a:lstStyle/>
+                    <a:p>
+                      <a:pPr indent="0" marL="0">
+                        <a:buNone/>
+                      </a:pPr>
+                      <a:r>
+                        <a:rPr lang="en-US" sz="1050" dirty="0">
+                          <a:solidFill>
+                            <a:srgbClr val="10161F"/>
+                          </a:solidFill>
+                          <a:latin typeface="Pretendard" pitchFamily="34" charset="0"/>
+                          <a:ea typeface="Pretendard" pitchFamily="34" charset="-122"/>
+                          <a:cs typeface="Pretendard" pitchFamily="34" charset="-120"/>
+                        </a:rPr>
+                        <a:t>소형 </a:t>
+                      </a:r>
+                      <a:pPr indent="0" marL="0">
+                        <a:buNone/>
+                      </a:pPr>
+                      <a:r>
+                        <a:rPr lang="en-US" sz="1050" dirty="0">
+                          <a:solidFill>
+                            <a:srgbClr val="10161F"/>
+                          </a:solidFill>
+                          <a:latin typeface="Pretendard" pitchFamily="34" charset="0"/>
+                          <a:ea typeface="Pretendard" pitchFamily="34" charset="-122"/>
+                          <a:cs typeface="Pretendard" pitchFamily="34" charset="-120"/>
+                        </a:rPr>
+                        <a:t>빌딩 </a:t>
+                      </a:r>
+                      <a:pPr indent="0" marL="0">
+                        <a:buNone/>
+                      </a:pPr>
+                      <a:r>
+                        <a:rPr lang="en-US" sz="1050" dirty="0">
+                          <a:solidFill>
+                            <a:srgbClr val="10161F"/>
+                          </a:solidFill>
+                          <a:latin typeface="Pretendard" pitchFamily="34" charset="0"/>
+                          <a:ea typeface="Pretendard" pitchFamily="34" charset="-122"/>
+                          <a:cs typeface="Pretendard" pitchFamily="34" charset="-120"/>
+                        </a:rPr>
+                        <a:t>안정 </a:t>
+                      </a:r>
+                      <a:pPr indent="0" marL="0">
+                        <a:buNone/>
+                      </a:pPr>
+                      <a:r>
+                        <a:rPr lang="en-US" sz="1050" dirty="0">
+                          <a:solidFill>
+                            <a:srgbClr val="10161F"/>
+                          </a:solidFill>
+                          <a:latin typeface="Pretendard" pitchFamily="34" charset="0"/>
+                          <a:ea typeface="Pretendard" pitchFamily="34" charset="-122"/>
+                          <a:cs typeface="Pretendard" pitchFamily="34" charset="-120"/>
+                        </a:rPr>
+                        <a:t>수익 </a:t>
+                      </a:r>
+                      <a:pPr indent="0" marL="0">
+                        <a:buNone/>
+                      </a:pPr>
+                      <a:r>
+                        <a:rPr lang="en-US" sz="1050" dirty="0">
+                          <a:solidFill>
+                            <a:srgbClr val="10161F"/>
+                          </a:solidFill>
+                          <a:latin typeface="Pretendard" pitchFamily="34" charset="0"/>
+                          <a:ea typeface="Pretendard" pitchFamily="34" charset="-122"/>
+                          <a:cs typeface="Pretendard" pitchFamily="34" charset="-120"/>
+                        </a:rPr>
+                        <a:t>최적</a:t>
+                      </a:r>
+                      <a:endParaRPr lang="en-US" sz="1050" dirty="0">
+                        <a:latin typeface="Pretendard" charset="0"/>
+                        <a:ea typeface="Pretendard" charset="0"/>
+                        <a:cs typeface="Pretendard" charset="0"/>
+                      </a:endParaRPr>
+                    </a:p>
+                  </a:txBody>
+                  <a:tcPr marL="50800" marR="50800" marT="25400" marB="25400" anchor="ctr">
+                    <a:lnL w="3810" cap="flat" cmpd="sng" algn="ctr">
+                      <a:solidFill>
+                        <a:srgbClr val="CBD5E0"/>
+                      </a:solidFill>
+                      <a:prstDash val="solid"/>
+                      <a:round/>
+                      <a:headEnd type="none" w="med" len="med"/>
+                      <a:tailEnd type="none" w="med" len="med"/>
+                    </a:lnL>
+                    <a:lnR w="3810" cap="flat" cmpd="sng" algn="ctr">
+                      <a:solidFill>
+                        <a:srgbClr val="CBD5E0"/>
+                      </a:solidFill>
+                      <a:prstDash val="solid"/>
+                      <a:round/>
+                      <a:headEnd type="none" w="med" len="med"/>
+                      <a:tailEnd type="none" w="med" len="med"/>
+                    </a:lnR>
+                    <a:lnT w="3810" cap="flat" cmpd="sng" algn="ctr">
+                      <a:solidFill>
+                        <a:srgbClr val="CBD5E0"/>
+                      </a:solidFill>
+                      <a:prstDash val="solid"/>
+                      <a:round/>
+                      <a:headEnd type="none" w="med" len="med"/>
+                      <a:tailEnd type="none" w="med" len="med"/>
+                    </a:lnT>
+                    <a:lnB w="3810" cap="flat" cmpd="sng" algn="ctr">
+                      <a:solidFill>
+                        <a:srgbClr val="CBD5E0"/>
+                      </a:solidFill>
+                      <a:prstDash val="solid"/>
+                      <a:round/>
+                      <a:headEnd type="none" w="med" len="med"/>
+                      <a:tailEnd type="none" w="med" len="med"/>
+                    </a:lnB>
+                    <a:solidFill>
+                      <a:srgbClr val="FFFFFF"/>
+                    </a:solidFill>
+                  </a:tcPr>
+                </a:tc>
+              </a:tr>
+              <a:tr h="329184">
+                <a:tc>
+                  <a:txBody>
+                    <a:bodyPr/>
+                    <a:lstStyle/>
+                    <a:p>
+                      <a:pPr indent="0" marL="0">
+                        <a:buNone/>
+                      </a:pPr>
+                      <a:r>
+                        <a:rPr lang="en-US" sz="1050" b="1" dirty="0">
+                          <a:solidFill>
+                            <a:srgbClr val="10161F"/>
+                          </a:solidFill>
+                          <a:latin typeface="Pretendard" pitchFamily="34" charset="0"/>
+                          <a:ea typeface="Pretendard" pitchFamily="34" charset="-122"/>
+                          <a:cs typeface="Pretendard" pitchFamily="34" charset="-120"/>
+                        </a:rPr>
+                        <a:t>법인 </a:t>
+                      </a:r>
+                      <a:pPr indent="0" marL="0">
+                        <a:buNone/>
+                      </a:pPr>
+                      <a:r>
+                        <a:rPr lang="en-US" sz="1050" b="1" dirty="0">
+                          <a:solidFill>
+                            <a:srgbClr val="10161F"/>
+                          </a:solidFill>
+                          <a:latin typeface="Pretendard" pitchFamily="34" charset="0"/>
+                          <a:ea typeface="Pretendard" pitchFamily="34" charset="-122"/>
+                          <a:cs typeface="Pretendard" pitchFamily="34" charset="-120"/>
+                        </a:rPr>
+                        <a:t>사옥 </a:t>
+                      </a:r>
+                      <a:pPr indent="0" marL="0">
+                        <a:buNone/>
+                      </a:pPr>
+                      <a:r>
+                        <a:rPr lang="en-US" sz="1050" b="1" dirty="0">
+                          <a:solidFill>
+                            <a:srgbClr val="10161F"/>
+                          </a:solidFill>
+                          <a:latin typeface="Pretendard" pitchFamily="34" charset="0"/>
+                          <a:ea typeface="Pretendard" pitchFamily="34" charset="-122"/>
+                          <a:cs typeface="Pretendard" pitchFamily="34" charset="-120"/>
+                        </a:rPr>
+                        <a:t>이전</a:t>
+                      </a:r>
+                      <a:endParaRPr lang="en-US" sz="1050" dirty="0">
+                        <a:latin typeface="Pretendard" charset="0"/>
+                        <a:ea typeface="Pretendard" charset="0"/>
+                        <a:cs typeface="Pretendard" charset="0"/>
+                      </a:endParaRPr>
+                    </a:p>
+                  </a:txBody>
+                  <a:tcPr marL="50800" marR="50800" marT="25400" marB="25400" anchor="ctr">
+                    <a:lnL w="3810" cap="flat" cmpd="sng" algn="ctr">
+                      <a:solidFill>
+                        <a:srgbClr val="CBD5E0"/>
+                      </a:solidFill>
+                      <a:prstDash val="solid"/>
+                      <a:round/>
+                      <a:headEnd type="none" w="med" len="med"/>
+                      <a:tailEnd type="none" w="med" len="med"/>
+                    </a:lnL>
+                    <a:lnR w="3810" cap="flat" cmpd="sng" algn="ctr">
+                      <a:solidFill>
+                        <a:srgbClr val="CBD5E0"/>
+                      </a:solidFill>
+                      <a:prstDash val="solid"/>
+                      <a:round/>
+                      <a:headEnd type="none" w="med" len="med"/>
+                      <a:tailEnd type="none" w="med" len="med"/>
+                    </a:lnR>
+                    <a:lnT w="3810" cap="flat" cmpd="sng" algn="ctr">
+                      <a:solidFill>
+                        <a:srgbClr val="CBD5E0"/>
+                      </a:solidFill>
+                      <a:prstDash val="solid"/>
+                      <a:round/>
+                      <a:headEnd type="none" w="med" len="med"/>
+                      <a:tailEnd type="none" w="med" len="med"/>
+                    </a:lnT>
+                    <a:lnB w="3810" cap="flat" cmpd="sng" algn="ctr">
+                      <a:solidFill>
+                        <a:srgbClr val="CBD5E0"/>
+                      </a:solidFill>
+                      <a:prstDash val="solid"/>
+                      <a:round/>
+                      <a:headEnd type="none" w="med" len="med"/>
+                      <a:tailEnd type="none" w="med" len="med"/>
+                    </a:lnB>
+                    <a:solidFill>
+                      <a:srgbClr val="F7FAFC"/>
+                    </a:solidFill>
+                  </a:tcPr>
+                </a:tc>
+                <a:tc>
+                  <a:txBody>
+                    <a:bodyPr/>
+                    <a:lstStyle/>
+                    <a:p>
+                      <a:pPr indent="0" marL="0">
+                        <a:buNone/>
+                      </a:pPr>
+                      <a:r>
+                        <a:rPr lang="en-US" sz="1050" dirty="0">
+                          <a:solidFill>
+                            <a:srgbClr val="10161F"/>
+                          </a:solidFill>
+                          <a:latin typeface="Pretendard" pitchFamily="34" charset="0"/>
+                          <a:ea typeface="Pretendard" pitchFamily="34" charset="-122"/>
+                          <a:cs typeface="Pretendard" pitchFamily="34" charset="-120"/>
+                        </a:rPr>
+                        <a:t>적합</a:t>
+                      </a:r>
+                      <a:endParaRPr lang="en-US" sz="1050" dirty="0">
+                        <a:latin typeface="Pretendard" charset="0"/>
+                        <a:ea typeface="Pretendard" charset="0"/>
+                        <a:cs typeface="Pretendard" charset="0"/>
+                      </a:endParaRPr>
+                    </a:p>
+                  </a:txBody>
+                  <a:tcPr marL="50800" marR="50800" marT="25400" marB="25400" anchor="ctr">
+                    <a:lnL w="3810" cap="flat" cmpd="sng" algn="ctr">
+                      <a:solidFill>
+                        <a:srgbClr val="CBD5E0"/>
+                      </a:solidFill>
+                      <a:prstDash val="solid"/>
+                      <a:round/>
+                      <a:headEnd type="none" w="med" len="med"/>
+                      <a:tailEnd type="none" w="med" len="med"/>
+                    </a:lnL>
+                    <a:lnR w="3810" cap="flat" cmpd="sng" algn="ctr">
+                      <a:solidFill>
+                        <a:srgbClr val="CBD5E0"/>
+                      </a:solidFill>
+                      <a:prstDash val="solid"/>
+                      <a:round/>
+                      <a:headEnd type="none" w="med" len="med"/>
+                      <a:tailEnd type="none" w="med" len="med"/>
+                    </a:lnR>
+                    <a:lnT w="3810" cap="flat" cmpd="sng" algn="ctr">
+                      <a:solidFill>
+                        <a:srgbClr val="CBD5E0"/>
+                      </a:solidFill>
+                      <a:prstDash val="solid"/>
+                      <a:round/>
+                      <a:headEnd type="none" w="med" len="med"/>
+                      <a:tailEnd type="none" w="med" len="med"/>
+                    </a:lnT>
+                    <a:lnB w="3810" cap="flat" cmpd="sng" algn="ctr">
+                      <a:solidFill>
+                        <a:srgbClr val="CBD5E0"/>
+                      </a:solidFill>
+                      <a:prstDash val="solid"/>
+                      <a:round/>
+                      <a:headEnd type="none" w="med" len="med"/>
+                      <a:tailEnd type="none" w="med" len="med"/>
+                    </a:lnB>
+                    <a:solidFill>
+                      <a:srgbClr val="F7FAFC"/>
+                    </a:solidFill>
+                  </a:tcPr>
+                </a:tc>
+                <a:tc>
+                  <a:txBody>
+                    <a:bodyPr/>
+                    <a:lstStyle/>
+                    <a:p>
+                      <a:pPr indent="0" marL="0">
+                        <a:buNone/>
+                      </a:pPr>
+                      <a:r>
+                        <a:rPr lang="en-US" sz="1050" dirty="0">
+                          <a:solidFill>
+                            <a:srgbClr val="10161F"/>
+                          </a:solidFill>
+                          <a:latin typeface="Pretendard" pitchFamily="34" charset="0"/>
+                          <a:ea typeface="Pretendard" pitchFamily="34" charset="-122"/>
+                          <a:cs typeface="Pretendard" pitchFamily="34" charset="-120"/>
+                        </a:rPr>
+                        <a:t>영등포권역 </a:t>
+                      </a:r>
+                      <a:pPr indent="0" marL="0">
+                        <a:buNone/>
+                      </a:pPr>
+                      <a:r>
+                        <a:rPr lang="en-US" sz="1050" dirty="0">
+                          <a:solidFill>
+                            <a:srgbClr val="10161F"/>
+                          </a:solidFill>
+                          <a:latin typeface="Pretendard" pitchFamily="34" charset="0"/>
+                          <a:ea typeface="Pretendard" pitchFamily="34" charset="-122"/>
+                          <a:cs typeface="Pretendard" pitchFamily="34" charset="-120"/>
+                        </a:rPr>
+                        <a:t>직주근접</a:t>
+                      </a:r>
+                      <a:endParaRPr lang="en-US" sz="1050" dirty="0">
+                        <a:latin typeface="Pretendard" charset="0"/>
+                        <a:ea typeface="Pretendard" charset="0"/>
+                        <a:cs typeface="Pretendard" charset="0"/>
+                      </a:endParaRPr>
+                    </a:p>
+                  </a:txBody>
+                  <a:tcPr marL="50800" marR="50800" marT="25400" marB="25400" anchor="ctr">
+                    <a:lnL w="3810" cap="flat" cmpd="sng" algn="ctr">
+                      <a:solidFill>
+                        <a:srgbClr val="CBD5E0"/>
+                      </a:solidFill>
+                      <a:prstDash val="solid"/>
+                      <a:round/>
+                      <a:headEnd type="none" w="med" len="med"/>
+                      <a:tailEnd type="none" w="med" len="med"/>
+                    </a:lnL>
+                    <a:lnR w="3810" cap="flat" cmpd="sng" algn="ctr">
+                      <a:solidFill>
+                        <a:srgbClr val="CBD5E0"/>
+                      </a:solidFill>
+                      <a:prstDash val="solid"/>
+                      <a:round/>
+                      <a:headEnd type="none" w="med" len="med"/>
+                      <a:tailEnd type="none" w="med" len="med"/>
+                    </a:lnR>
+                    <a:lnT w="3810" cap="flat" cmpd="sng" algn="ctr">
+                      <a:solidFill>
+                        <a:srgbClr val="CBD5E0"/>
+                      </a:solidFill>
+                      <a:prstDash val="solid"/>
+                      <a:round/>
+                      <a:headEnd type="none" w="med" len="med"/>
+                      <a:tailEnd type="none" w="med" len="med"/>
+                    </a:lnT>
+                    <a:lnB w="3810" cap="flat" cmpd="sng" algn="ctr">
+                      <a:solidFill>
+                        <a:srgbClr val="CBD5E0"/>
+                      </a:solidFill>
+                      <a:prstDash val="solid"/>
+                      <a:round/>
+                      <a:headEnd type="none" w="med" len="med"/>
+                      <a:tailEnd type="none" w="med" len="med"/>
+                    </a:lnB>
+                    <a:solidFill>
+                      <a:srgbClr val="F7FAFC"/>
+                    </a:solidFill>
+                  </a:tcPr>
+                </a:tc>
+              </a:tr>
+              <a:tr h="329184">
+                <a:tc>
+                  <a:txBody>
+                    <a:bodyPr/>
+                    <a:lstStyle/>
+                    <a:p>
+                      <a:pPr indent="0" marL="0">
+                        <a:buNone/>
+                      </a:pPr>
+                      <a:r>
+                        <a:rPr lang="en-US" sz="1050" b="1" dirty="0">
+                          <a:solidFill>
+                            <a:srgbClr val="10161F"/>
+                          </a:solidFill>
+                          <a:latin typeface="Pretendard" pitchFamily="34" charset="0"/>
+                          <a:ea typeface="Pretendard" pitchFamily="34" charset="-122"/>
+                          <a:cs typeface="Pretendard" pitchFamily="34" charset="-120"/>
+                        </a:rPr>
+                        <a:t>소규모 </a:t>
+                      </a:r>
+                      <a:pPr indent="0" marL="0">
+                        <a:buNone/>
+                      </a:pPr>
+                      <a:r>
+                        <a:rPr lang="en-US" sz="1050" b="1" dirty="0">
+                          <a:solidFill>
+                            <a:srgbClr val="10161F"/>
+                          </a:solidFill>
+                          <a:latin typeface="Pretendard" pitchFamily="34" charset="0"/>
+                          <a:ea typeface="Pretendard" pitchFamily="34" charset="-122"/>
+                          <a:cs typeface="Pretendard" pitchFamily="34" charset="-120"/>
+                        </a:rPr>
+                        <a:t>개발업체</a:t>
+                      </a:r>
+                      <a:endParaRPr lang="en-US" sz="1050" dirty="0">
+                        <a:latin typeface="Pretendard" charset="0"/>
+                        <a:ea typeface="Pretendard" charset="0"/>
+                        <a:cs typeface="Pretendard" charset="0"/>
+                      </a:endParaRPr>
+                    </a:p>
+                  </a:txBody>
+                  <a:tcPr marL="50800" marR="50800" marT="25400" marB="25400" anchor="ctr">
+                    <a:lnL w="3810" cap="flat" cmpd="sng" algn="ctr">
+                      <a:solidFill>
+                        <a:srgbClr val="CBD5E0"/>
+                      </a:solidFill>
+                      <a:prstDash val="solid"/>
+                      <a:round/>
+                      <a:headEnd type="none" w="med" len="med"/>
+                      <a:tailEnd type="none" w="med" len="med"/>
+                    </a:lnL>
+                    <a:lnR w="3810" cap="flat" cmpd="sng" algn="ctr">
+                      <a:solidFill>
+                        <a:srgbClr val="CBD5E0"/>
+                      </a:solidFill>
+                      <a:prstDash val="solid"/>
+                      <a:round/>
+                      <a:headEnd type="none" w="med" len="med"/>
+                      <a:tailEnd type="none" w="med" len="med"/>
+                    </a:lnR>
+                    <a:lnT w="3810" cap="flat" cmpd="sng" algn="ctr">
+                      <a:solidFill>
+                        <a:srgbClr val="CBD5E0"/>
+                      </a:solidFill>
+                      <a:prstDash val="solid"/>
+                      <a:round/>
+                      <a:headEnd type="none" w="med" len="med"/>
+                      <a:tailEnd type="none" w="med" len="med"/>
+                    </a:lnT>
+                    <a:lnB w="3810" cap="flat" cmpd="sng" algn="ctr">
+                      <a:solidFill>
+                        <a:srgbClr val="CBD5E0"/>
+                      </a:solidFill>
+                      <a:prstDash val="solid"/>
+                      <a:round/>
+                      <a:headEnd type="none" w="med" len="med"/>
+                      <a:tailEnd type="none" w="med" len="med"/>
+                    </a:lnB>
+                    <a:solidFill>
+                      <a:srgbClr val="FFFFFF"/>
+                    </a:solidFill>
+                  </a:tcPr>
+                </a:tc>
+                <a:tc>
+                  <a:txBody>
+                    <a:bodyPr/>
+                    <a:lstStyle/>
+                    <a:p>
+                      <a:pPr indent="0" marL="0">
+                        <a:buNone/>
+                      </a:pPr>
+                      <a:r>
+                        <a:rPr lang="en-US" sz="1050" dirty="0">
+                          <a:solidFill>
+                            <a:srgbClr val="10161F"/>
+                          </a:solidFill>
+                          <a:latin typeface="Pretendard" pitchFamily="34" charset="0"/>
+                          <a:ea typeface="Pretendard" pitchFamily="34" charset="-122"/>
+                          <a:cs typeface="Pretendard" pitchFamily="34" charset="-120"/>
+                        </a:rPr>
+                        <a:t>검토</a:t>
+                      </a:r>
+                      <a:endParaRPr lang="en-US" sz="1050" dirty="0">
+                        <a:latin typeface="Pretendard" charset="0"/>
+                        <a:ea typeface="Pretendard" charset="0"/>
+                        <a:cs typeface="Pretendard" charset="0"/>
+                      </a:endParaRPr>
+                    </a:p>
+                  </a:txBody>
+                  <a:tcPr marL="50800" marR="50800" marT="25400" marB="25400" anchor="ctr">
+                    <a:lnL w="3810" cap="flat" cmpd="sng" algn="ctr">
+                      <a:solidFill>
+                        <a:srgbClr val="CBD5E0"/>
+                      </a:solidFill>
+                      <a:prstDash val="solid"/>
+                      <a:round/>
+                      <a:headEnd type="none" w="med" len="med"/>
+                      <a:tailEnd type="none" w="med" len="med"/>
+                    </a:lnL>
+                    <a:lnR w="3810" cap="flat" cmpd="sng" algn="ctr">
+                      <a:solidFill>
+                        <a:srgbClr val="CBD5E0"/>
+                      </a:solidFill>
+                      <a:prstDash val="solid"/>
+                      <a:round/>
+                      <a:headEnd type="none" w="med" len="med"/>
+                      <a:tailEnd type="none" w="med" len="med"/>
+                    </a:lnR>
+                    <a:lnT w="3810" cap="flat" cmpd="sng" algn="ctr">
+                      <a:solidFill>
+                        <a:srgbClr val="CBD5E0"/>
+                      </a:solidFill>
+                      <a:prstDash val="solid"/>
+                      <a:round/>
+                      <a:headEnd type="none" w="med" len="med"/>
+                      <a:tailEnd type="none" w="med" len="med"/>
+                    </a:lnT>
+                    <a:lnB w="3810" cap="flat" cmpd="sng" algn="ctr">
+                      <a:solidFill>
+                        <a:srgbClr val="CBD5E0"/>
+                      </a:solidFill>
+                      <a:prstDash val="solid"/>
+                      <a:round/>
+                      <a:headEnd type="none" w="med" len="med"/>
+                      <a:tailEnd type="none" w="med" len="med"/>
+                    </a:lnB>
+                    <a:solidFill>
+                      <a:srgbClr val="FFFFFF"/>
+                    </a:solidFill>
+                  </a:tcPr>
+                </a:tc>
+                <a:tc>
+                  <a:txBody>
+                    <a:bodyPr/>
+                    <a:lstStyle/>
+                    <a:p>
+                      <a:pPr indent="0" marL="0">
+                        <a:buNone/>
+                      </a:pPr>
+                      <a:r>
+                        <a:rPr lang="en-US" sz="1050" dirty="0">
+                          <a:solidFill>
+                            <a:srgbClr val="10161F"/>
+                          </a:solidFill>
+                          <a:latin typeface="Pretendard" pitchFamily="34" charset="0"/>
+                          <a:ea typeface="Pretendard" pitchFamily="34" charset="-122"/>
+                          <a:cs typeface="Pretendard" pitchFamily="34" charset="-120"/>
+                        </a:rPr>
+                        <a:t>밸류업 </a:t>
+                      </a:r>
+                      <a:pPr indent="0" marL="0">
+                        <a:buNone/>
+                      </a:pPr>
+                      <a:r>
+                        <a:rPr lang="en-US" sz="1050" dirty="0">
+                          <a:solidFill>
+                            <a:srgbClr val="10161F"/>
+                          </a:solidFill>
+                          <a:latin typeface="Pretendard" pitchFamily="34" charset="0"/>
+                          <a:ea typeface="Pretendard" pitchFamily="34" charset="-122"/>
+                          <a:cs typeface="Pretendard" pitchFamily="34" charset="-120"/>
+                        </a:rPr>
+                        <a:t>후 </a:t>
+                      </a:r>
+                      <a:pPr indent="0" marL="0">
+                        <a:buNone/>
+                      </a:pPr>
+                      <a:r>
+                        <a:rPr lang="en-US" sz="1050" dirty="0">
+                          <a:solidFill>
+                            <a:srgbClr val="10161F"/>
+                          </a:solidFill>
+                          <a:latin typeface="Pretendard" pitchFamily="34" charset="0"/>
+                          <a:ea typeface="Pretendard" pitchFamily="34" charset="-122"/>
+                          <a:cs typeface="Pretendard" pitchFamily="34" charset="-120"/>
+                        </a:rPr>
+                        <a:t>매각 </a:t>
+                      </a:r>
+                      <a:pPr indent="0" marL="0">
+                        <a:buNone/>
+                      </a:pPr>
+                      <a:r>
+                        <a:rPr lang="en-US" sz="1050" dirty="0">
+                          <a:solidFill>
+                            <a:srgbClr val="10161F"/>
+                          </a:solidFill>
+                          <a:latin typeface="Pretendard" pitchFamily="34" charset="0"/>
+                          <a:ea typeface="Pretendard" pitchFamily="34" charset="-122"/>
+                          <a:cs typeface="Pretendard" pitchFamily="34" charset="-120"/>
+                        </a:rPr>
+                        <a:t>시나리오</a:t>
+                      </a:r>
+                      <a:endParaRPr lang="en-US" sz="1050" dirty="0">
+                        <a:latin typeface="Pretendard" charset="0"/>
+                        <a:ea typeface="Pretendard" charset="0"/>
+                        <a:cs typeface="Pretendard" charset="0"/>
+                      </a:endParaRPr>
+                    </a:p>
+                  </a:txBody>
+                  <a:tcPr marL="50800" marR="50800" marT="25400" marB="25400" anchor="ctr">
+                    <a:lnL w="3810" cap="flat" cmpd="sng" algn="ctr">
+                      <a:solidFill>
+                        <a:srgbClr val="CBD5E0"/>
+                      </a:solidFill>
+                      <a:prstDash val="solid"/>
+                      <a:round/>
+                      <a:headEnd type="none" w="med" len="med"/>
+                      <a:tailEnd type="none" w="med" len="med"/>
+                    </a:lnL>
+                    <a:lnR w="3810" cap="flat" cmpd="sng" algn="ctr">
+                      <a:solidFill>
+                        <a:srgbClr val="CBD5E0"/>
+                      </a:solidFill>
+                      <a:prstDash val="solid"/>
+                      <a:round/>
+                      <a:headEnd type="none" w="med" len="med"/>
+                      <a:tailEnd type="none" w="med" len="med"/>
+                    </a:lnR>
+                    <a:lnT w="3810" cap="flat" cmpd="sng" algn="ctr">
+                      <a:solidFill>
+                        <a:srgbClr val="CBD5E0"/>
+                      </a:solidFill>
+                      <a:prstDash val="solid"/>
+                      <a:round/>
+                      <a:headEnd type="none" w="med" len="med"/>
+                      <a:tailEnd type="none" w="med" len="med"/>
+                    </a:lnT>
+                    <a:lnB w="3810" cap="flat" cmpd="sng" algn="ctr">
+                      <a:solidFill>
+                        <a:srgbClr val="CBD5E0"/>
+                      </a:solidFill>
+                      <a:prstDash val="solid"/>
+                      <a:round/>
+                      <a:headEnd type="none" w="med" len="med"/>
+                      <a:tailEnd type="none" w="med" len="med"/>
+                    </a:lnB>
+                    <a:solidFill>
+                      <a:srgbClr val="FFFFFF"/>
+                    </a:solidFill>
+                  </a:tcPr>
+                </a:tc>
+              </a:tr>
+            </a:tbl>
+          </a:graphicData>
+        </a:graphic>
+      </p:graphicFrame>
+      <p:sp>
+        <p:nvSpPr>
+          <p:cNvPr id="21" name="Shape 18"/>
+          <p:cNvSpPr/>
+          <p:nvPr/>
+        </p:nvSpPr>
+        <p:spPr>
+          <a:xfrm>
+            <a:off x="566928" y="5522976"/>
+            <a:ext cx="11057839" cy="804672"/>
+          </a:xfrm>
+          <a:prstGeom prst="roundRect">
+            <a:avLst>
+              <a:gd name="adj" fmla="val 6818"/>
+            </a:avLst>
+          </a:prstGeom>
+          <a:solidFill>
+            <a:srgbClr val="F3EBDA"/>
+          </a:solidFill>
+          <a:ln w="10160">
+            <a:solidFill>
+              <a:srgbClr val="D9B668"/>
+            </a:solidFill>
+            <a:prstDash val="solid"/>
+          </a:ln>
+        </p:spPr>
+      </p:sp>
+      <p:sp>
+        <p:nvSpPr>
+          <p:cNvPr id="22" name="Text 19"/>
+          <p:cNvSpPr/>
+          <p:nvPr/>
+        </p:nvSpPr>
+        <p:spPr>
+          <a:xfrm>
+            <a:off x="749808" y="5632704"/>
+            <a:ext cx="1691640" cy="256032"/>
+          </a:xfrm>
+          <a:prstGeom prst="rect">
+            <a:avLst/>
+          </a:prstGeom>
+          <a:noFill/>
+          <a:ln/>
+        </p:spPr>
+        <p:txBody>
+          <a:bodyPr wrap="square" lIns="0" tIns="0" rIns="0" bIns="0" rtlCol="0" anchor="ctr"/>
+          <a:lstStyle/>
+          <a:p>
+            <a:pPr indent="0" marL="0">
+              <a:buNone/>
+            </a:pPr>
+            <a:r>
+              <a:rPr lang="en-US" sz="1050" b="1" dirty="0">
+                <a:solidFill>
+                  <a:srgbClr val="977024"/>
+                </a:solidFill>
+                <a:latin typeface="Pretendard" pitchFamily="34" charset="0"/>
+                <a:ea typeface="Pretendard" pitchFamily="34" charset="-122"/>
+                <a:cs typeface="Pretendard" pitchFamily="34" charset="-120"/>
+              </a:rPr>
+              <a:t>종합 가치 제안</a:t>
+            </a:r>
+            <a:endParaRPr lang="en-US" sz="1050" dirty="0"/>
+          </a:p>
+        </p:txBody>
+      </p:sp>
+      <p:sp>
+        <p:nvSpPr>
+          <p:cNvPr id="23" name="Text 20"/>
+          <p:cNvSpPr/>
+          <p:nvPr/>
+        </p:nvSpPr>
+        <p:spPr>
+          <a:xfrm>
+            <a:off x="2487168" y="5596128"/>
+            <a:ext cx="8954719" cy="658368"/>
+          </a:xfrm>
+          <a:prstGeom prst="rect">
+            <a:avLst/>
+          </a:prstGeom>
+          <a:noFill/>
+          <a:ln/>
+        </p:spPr>
+        <p:txBody>
+          <a:bodyPr wrap="square" lIns="0" tIns="0" rIns="0" bIns="0" rtlCol="0" anchor="ctr"/>
+          <a:lstStyle/>
+          <a:p>
+            <a:pPr indent="0" marL="0">
+              <a:lnSpc>
+                <a:spcPct val="125000"/>
+              </a:lnSpc>
               <a:buNone/>
             </a:pPr>
             <a:r>
@@ -8769,32 +11231,15 @@
                 <a:ea typeface="Pretendard" pitchFamily="34" charset="-122"/>
                 <a:cs typeface="Pretendard" pitchFamily="34" charset="-120"/>
               </a:rPr>
-              <a:t>{"ok"</a:t>
+              <a:t>[참고] 종합 가치 제안: 영등포권역 소재 개발부지으로, 입지 및 자산 특성에 대한 상세 분석은 본문을 참조하시기 바랍니다. ### 3대 핵심 투자 포인트 (Investment Highlights) • 원금 안전판 확보: 영등포권역 소재 자산으로, 대지 지분 가치 및 입지 경쟁력에 대한 분석은 자산 개요 섹션을 참조하시기 바랍니다.</a:t>
             </a:r>
             <a:endParaRPr lang="en-US" sz="1100" dirty="0"/>
           </a:p>
-          <a:p>
-            <a:pPr indent="0" marL="0">
-              <a:buNone/>
-            </a:pPr>
-            <a:r>
-              <a:rPr lang="en-US" sz="1100" dirty="0">
-                <a:solidFill>
-                  <a:srgbClr val="10161F"/>
-                </a:solidFill>
-                <a:latin typeface="Pretendard" pitchFamily="34" charset="0"/>
-                <a:ea typeface="Pretendard" pitchFamily="34" charset="-122"/>
-                <a:cs typeface="Pretendard" pitchFamily="34" charset="-120"/>
-              </a:rPr>
-              <a:t>true,"mocked":true,"extractedFields":{"area_signal":"역삼","asset_type":"오피스빌딩","price_band":"300억","size_signal":"3000평(약 9917.4㎡)"},"extractedFacts":{"region":"역삼","exactAddressCandidate":"역삼동 742-1","assetType":"오피스빌딩","priceText":"300억","sizeText":"3000평(약 9917.4㎡)","currentUse":"오피스","currentUseSignal":"근린생활시설","leaseSignal":"임대중","vacancySignal":"공실없음","tenantNames":["쿠팡","네이버"],"unitRentTexts":["301호: 1500만"],"sellerMotivationText":"자산 효율화","brokerNotes":["초역세권 매물"]},"detectedSensitiveFields":["exact_address","tenant_name"],"ambiguousFields":[],"warnings":[],"areaSignal":"역삼","assetType":"오피스빌딩","priceBand":"300억","sizeSignal":"3000평(약 9917.4㎡)","dealType":"매각","buildingName":"역삼 센트럴타워","exactAddress":"역삼동 742-1","totalFloorArea":9917.3,"buildYear":2015,"currentUseSignal":"근린생활시설","vacancySignal":"공실 없음","fitSummary":"초역세권 근생 빌딩으로 시행/사옥 매입에 최적화","cautionSummary":"주요 임차인 만기 조율 필요","hiddenFields":["exact_address","seller_motivation"],"confidence":{"areaSignal":"confirmed","assetType":"confirmed","priceBand":"ai_hypothesis","fitSummary":"ai_hypothesis"},"missingData":["sizeSignal"],"boundaryNote":"본 자료는 실거래 통계 기반 참고치입니다.","buyerType":"법인 사옥형","budgetRange":{"min":50,"max":80,"display":"50억~80억"},"preferredRegions":["강남","성수"],"assetTypes":["꼬마빌딩","사옥용"],"purchasePurpose":"사옥용 매입","mustHave":["초역세권","주차"],"niceToHave":["테라스","루프탑"],"riskTolerance":"medium","financingNote":"자본금 50% 준비","missingQuestions":["구체적인 입주 시기가 언제인가요?","선호하는 수익률이 있나요?"],"privacyNotes":["연락처 비공개"],"fitReasons":["매수자 예산(50-80억)에 부합하는 매물입니다.","요청하신 성수/강남 권역에 해당합니다."],"cautionReasons":["요청한 용도와 달리 명도 협의가 다소 필요합니다."],"recommendedNextAction":"현장 답사 제안","kakaoMessage":"안녕하세요! 요청하신 조건에 부합하는 추천 매물이 있어 안내해 드립니다. 확인해보시고 피드백 부탁드립니다.","title":"강남 역삼역 초역세권 오피스 사옥용 빌딩 매각","shortSummary":"역삼역 도보 5분 거리의 준신축급 대형 오피스빌딩입니다.","dealPoints":["초역세권","사옥 최적"],"cautionPoints":["명도 조율 필요"],"hiddenInfoNotice":["보증금 및 지번은 인가 후 확인 가능"],"gateMessage":"G1 등급 등록이 필요합니다.","kakaoText":"강남 역삼역 오피스 빌딩 매각 안내입니다.","exactUnitCandidate":"101호","floor":"1층","areaSqmText":"150㎡","spaceType":"office","depositText":"5000만","monthlyRentText":"400만","maintenanceFeeText":"50만","availableFromText":"즉시입주","leaseTermMonthsText":"24","incentivesText":"렌트프리 2개월","restrictions":[],"landlordIdentity":"김성수","currentTenant":"스타트업","vacancyReason":"이전 확장","rentNegotiation":"협의 가능","region":"성수동","areaSqm":150,"deposit":5000,"monthlyRent":400,"maintenanceFee":50,"availableFrom":"즉시입주","leaseTermMonths":24,"incentives":{"rentFreeMonths":2,"interiorSupport":"일부 인테리어 지원","freeRentDetail":"렌트프리 2개월 지원"},"shortSummaryLease":"성수역 도보 5분 거리 1층 리테일 상가 매물입니다."}</a:t>
-            </a:r>
-            <a:endParaRPr lang="en-US" sz="1100" dirty="0"/>
-          </a:p>
-        </p:txBody>
-      </p:sp>
-      <p:sp>
-        <p:nvSpPr>
-          <p:cNvPr id="11" name="Text 9"/>
+        </p:txBody>
+      </p:sp>
+      <p:sp>
+        <p:nvSpPr>
+          <p:cNvPr id="24" name="Text 21"/>
           <p:cNvSpPr/>
           <p:nvPr/>
         </p:nvSpPr>
@@ -8833,7 +11278,7 @@
       </p:sp>
       <p:sp>
         <p:nvSpPr>
-          <p:cNvPr id="12" name="Text 10"/>
+          <p:cNvPr id="25" name="Text 22"/>
           <p:cNvSpPr/>
           <p:nvPr/>
         </p:nvSpPr>

--- a/docs/test/stress/e2e-outputs/development_case13_mullae_dev_basic.pptx
+++ b/docs/test/stress/e2e-outputs/development_case13_mullae_dev_basic.pptx
@@ -21,9 +21,10 @@
     <p:sldId id="269" r:id="rId15"/>
     <p:sldId id="270" r:id="rId16"/>
     <p:sldId id="271" r:id="rId17"/>
+    <p:sldId id="272" r:id="rId18"/>
   </p:sldIdLst>
   <p:notesMasterIdLst>
-    <p:notesMasterId r:id="rId18"/>
+    <p:notesMasterId r:id="rId19"/>
   </p:notesMasterIdLst>
   <p:sldSz cx="12192000" cy="6858000"/>
   <p:notesSz cx="6858000" cy="12192000"/>
@@ -1157,6 +1158,94 @@
             <a:fld id="{F7021451-1387-4CA6-816F-3879F97B5CBC}" type="slidenum">
               <a:rPr lang="en-US"/>
               <a:t>16</a:t>
+            </a:fld>
+            <a:endParaRPr lang="en-US"/>
+          </a:p>
+        </p:txBody>
+      </p:sp>
+    </p:spTree>
+    <p:extLst>
+      <p:ext uri="{BB962C8B-B14F-4D97-AF65-F5344CB8AC3E}">
+        <p14:creationId xmlns:p14="http://schemas.microsoft.com/office/powerpoint/2010/main" val="1024086991"/>
+      </p:ext>
+    </p:extLst>
+  </p:cSld>
+  <p:clrMapOvr>
+    <a:masterClrMapping/>
+  </p:clrMapOvr>
+</p:notes>
+</file>
+
+<file path=ppt/notesSlides/notesSlide17.xml><?xml version="1.0" encoding="utf-8"?>
+<p:notes xmlns:a="http://schemas.openxmlformats.org/drawingml/2006/main" xmlns:r="http://schemas.openxmlformats.org/officeDocument/2006/relationships" xmlns:p="http://schemas.openxmlformats.org/presentationml/2006/main">
+  <p:cSld>
+    <p:spTree>
+      <p:nvGrpSpPr>
+        <p:cNvPr id="1" name=""/>
+        <p:cNvGrpSpPr/>
+        <p:nvPr/>
+      </p:nvGrpSpPr>
+      <p:grpSpPr>
+        <a:xfrm>
+          <a:off x="0" y="0"/>
+          <a:ext cx="0" cy="0"/>
+          <a:chOff x="0" y="0"/>
+          <a:chExt cx="0" cy="0"/>
+        </a:xfrm>
+      </p:grpSpPr>
+      <p:sp>
+        <p:nvSpPr>
+          <p:cNvPr id="2" name="Slide Image Placeholder 1"/>
+          <p:cNvSpPr>
+            <a:spLocks noGrp="1" noRot="1" noChangeAspect="1"/>
+          </p:cNvSpPr>
+          <p:nvPr>
+            <p:ph type="sldImg"/>
+          </p:nvPr>
+        </p:nvSpPr>
+        <p:spPr/>
+      </p:sp>
+      <p:sp>
+        <p:nvSpPr>
+          <p:cNvPr id="3" name="Notes Placeholder 2"/>
+          <p:cNvSpPr>
+            <a:spLocks noGrp="1"/>
+          </p:cNvSpPr>
+          <p:nvPr>
+            <p:ph type="body" idx="1"/>
+          </p:nvPr>
+        </p:nvSpPr>
+        <p:spPr/>
+        <p:txBody>
+          <a:bodyPr/>
+          <a:lstStyle/>
+          <a:p>
+            <a:r>
+              <a:rPr lang="en-US" dirty="0"/>
+              <a:t/>
+            </a:r>
+            <a:endParaRPr lang="en-US" dirty="0"/>
+          </a:p>
+        </p:txBody>
+      </p:sp>
+      <p:sp>
+        <p:nvSpPr>
+          <p:cNvPr id="4" name="Slide Number Placeholder 3"/>
+          <p:cNvSpPr>
+            <a:spLocks noGrp="1"/>
+          </p:cNvSpPr>
+          <p:nvPr>
+            <p:ph type="sldNum" sz="quarter" idx="10"/>
+          </p:nvPr>
+        </p:nvSpPr>
+        <p:spPr/>
+        <p:txBody>
+          <a:bodyPr/>
+          <a:lstStyle/>
+          <a:p>
+            <a:fld id="{F7021451-1387-4CA6-816F-3879F97B5CBC}" type="slidenum">
+              <a:rPr lang="en-US"/>
+              <a:t>17</a:t>
             </a:fld>
             <a:endParaRPr lang="en-US"/>
           </a:p>
@@ -4673,130 +4762,7 @@
       </p:sp>
       <p:sp>
         <p:nvSpPr>
-          <p:cNvPr id="10" name="Shape 8"/>
-          <p:cNvSpPr/>
-          <p:nvPr/>
-        </p:nvSpPr>
-        <p:spPr>
-          <a:xfrm>
-            <a:off x="566928" y="2999232"/>
-            <a:ext cx="11057839" cy="1280160"/>
-          </a:xfrm>
-          <a:prstGeom prst="roundRect">
-            <a:avLst>
-              <a:gd name="adj" fmla="val 4286"/>
-            </a:avLst>
-          </a:prstGeom>
-          <a:solidFill>
-            <a:srgbClr val="BEE3F8"/>
-          </a:solidFill>
-          <a:ln/>
-        </p:spPr>
-      </p:sp>
-      <p:sp>
-        <p:nvSpPr>
-          <p:cNvPr id="11" name="Shape 9"/>
-          <p:cNvSpPr/>
-          <p:nvPr/>
-        </p:nvSpPr>
-        <p:spPr>
-          <a:xfrm>
-            <a:off x="566928" y="3054096"/>
-            <a:ext cx="36576" cy="1170432"/>
-          </a:xfrm>
-          <a:prstGeom prst="rect">
-            <a:avLst/>
-          </a:prstGeom>
-          <a:solidFill>
-            <a:srgbClr val="2B6CB0"/>
-          </a:solidFill>
-          <a:ln/>
-        </p:spPr>
-      </p:sp>
-      <p:sp>
-        <p:nvSpPr>
-          <p:cNvPr id="12" name="Text 10"/>
-          <p:cNvSpPr/>
-          <p:nvPr/>
-        </p:nvSpPr>
-        <p:spPr>
-          <a:xfrm>
-            <a:off x="749808" y="3108960"/>
-            <a:ext cx="10728655" cy="201168"/>
-          </a:xfrm>
-          <a:prstGeom prst="rect">
-            <a:avLst/>
-          </a:prstGeom>
-          <a:noFill/>
-          <a:ln/>
-        </p:spPr>
-        <p:txBody>
-          <a:bodyPr wrap="square" lIns="0" tIns="0" rIns="0" bIns="0" rtlCol="0" anchor="ctr"/>
-          <a:lstStyle/>
-          <a:p>
-            <a:pPr indent="0" marL="0">
-              <a:buNone/>
-            </a:pPr>
-            <a:r>
-              <a:rPr lang="en-US" sz="1050" b="1" dirty="0">
-                <a:solidFill>
-                  <a:srgbClr val="2B6CB0"/>
-                </a:solidFill>
-                <a:latin typeface="Pretendard" pitchFamily="34" charset="0"/>
-                <a:ea typeface="Pretendard" pitchFamily="34" charset="-122"/>
-                <a:cs typeface="Pretendard" pitchFamily="34" charset="-120"/>
-              </a:rPr>
-              <a:t>신축 건축 규모 요약</a:t>
-            </a:r>
-            <a:endParaRPr lang="en-US" sz="1050" dirty="0"/>
-          </a:p>
-        </p:txBody>
-      </p:sp>
-      <p:sp>
-        <p:nvSpPr>
-          <p:cNvPr id="13" name="Text 11"/>
-          <p:cNvSpPr/>
-          <p:nvPr/>
-        </p:nvSpPr>
-        <p:spPr>
-          <a:xfrm>
-            <a:off x="749808" y="3328416"/>
-            <a:ext cx="10728655" cy="877824"/>
-          </a:xfrm>
-          <a:prstGeom prst="rect">
-            <a:avLst/>
-          </a:prstGeom>
-          <a:noFill/>
-          <a:ln/>
-        </p:spPr>
-        <p:txBody>
-          <a:bodyPr wrap="square" lIns="0" tIns="0" rIns="0" bIns="0" rtlCol="0" anchor="t"/>
-          <a:lstStyle/>
-          <a:p>
-            <a:pPr indent="0" marL="0">
-              <a:lnSpc>
-                <a:spcPct val="120000"/>
-              </a:lnSpc>
-              <a:buNone/>
-            </a:pPr>
-            <a:r>
-              <a:rPr lang="en-US" sz="930" dirty="0">
-                <a:solidFill>
-                  <a:srgbClr val="10161F"/>
-                </a:solidFill>
-                <a:latin typeface="Pretendard" pitchFamily="34" charset="0"/>
-                <a:ea typeface="Pretendard" pitchFamily="34" charset="-122"/>
-                <a:cs typeface="Pretendard" pitchFamily="34" charset="-120"/>
-              </a:rPr>
-              <a:t>{"ok":true,"mocked":true,"extractedFields":{"area_signal":"역삼","asset_type":"[건물명 비공개]","price_band":"300억","size_signal":"3000평(약 9917.4㎡)"},"extractedFacts":{"region":"역삼","exactAddressCandidate":"역삼동 742-1","assetType":"[건물명 비공개]","priceText":"300억","sizeText":"3000평(약 9917.4㎡)","currentUse":"오피스","currentUseSignal":"근린생활시설","leaseSignal":"임대중","vacancySignal":"공실없음","tenantNames":["쿠팡","네이버"],"unitRentTexts":["301호: 1500만"],"sellerMotivationText":"자산 효율화","brokerNotes":["역세권 도보 3분 이내 매물"]},"detectedSensitiveFields":["exact_address","tenant_name"],"ambiguousFields":[],"warnings":[],"areaSignal":"역삼","assetType":"[건물명 비공개]","priceBand":"300억","sizeSignal":"3000평(약 9917.4㎡)","dealType":"매각","buildingName":"역삼 [건물명 비공개]","exactAddress":"역삼동 742-1","totalFloorArea":9917.3,"buildYear":2015,"currentUseSignal":"근린생활시설","vacancySignal":"공실 없음","fitSummary":"역세권 도보 3분 이내 근생 빌딩으로 시행/사옥 매입에 최적화","cautionSummary":"주요 임차인 만기 조율 필요","hiddenFields":["exact_address","seller_motivation"],"confidence":{"areaSignal":"confirmed","assetType":"confirmed","priceBand":"ai_hypothesis","fitSummary":"ai_hypothesis"},"missingData":["sizeSignal"],"boundaryNote":"본 자료는 실거래 통계 기반 참고치입니다.","buyerType":"법인 사옥형","budgetRange":{"min":50,"max":80,"display":"50억~80억"},"preferredRegions":["강남","성수"],"assetTypes":["[건물명 비공개]","사옥용"],"purchasePurpose":"사옥용 매입","mustHave":["역세권 도보 3분 이내","주차"],"niceToHave":["테라스","루프탑"],"riskTolerance":"medium","financingNote":"자본금 50% 준비","missingQuestions":["구체적인 입주 시기가 언제인가요?","선호하는 수익률이 있나요?"],"privacyNotes":["연락처 비공개"],"fitReasons":["매수자 예산(50-80억)에 부합하는 매물입니다.","요청하신 성수/강남 권역에 해당합니다."],"cautionReasons":["요청한 용도와 달리 명도 협의가 다소 필요합니다."],"recommendedNextAction":"현장 답사 제안","kakaoMessage":"안녕하세요! 요청하신 조건에 부합하는 추천 매물이 있어 안내해 드립니다. 확인해보시고 피드백 부탁드립니다.","title":"강남 역삼역 역세권 도보 3분 이내 오피스 사옥용 빌딩 매각","shortSummary":"역삼역 도보 5분 거리의 준신축급 대형 [건물명 비공개]입니다.","dealPoints":["역세권 도보 3분 이내","사옥 최적"],"cautionPoints":["명도 조율 필요"],"hiddenInfoNotice":["보증금 및 지번은 인가 후 확인 가능"],"gateMessage":"G1 등급 등록이 필요합니다.","kakaoText":"강남 역삼역 오피스 빌딩 매각 안내입니다.","exactUnitCandidate":"101호","floor":"1층","areaSqmText":"150㎡","spaceType":"office","depositText":"5000만","monthlyRentText":"400만","maintenanceFeeText":"50만","availableFromText":"즉시입주","leaseTermMonthsText":"24","incentivesText":"렌트프리(무상임대) 2개월","restrictions":[],"landlordIdentity":"김성수","currentTenant":"스타트업","vacancyReason":"이전 확장","rentNegotiation":"협의 가능","region":"성수동","areaSqm":150,"deposit":5000,"monthlyRent":400,"maintenanceFee":50,"availableFrom":"즉시입주","leaseTermMonths":24,"incentives":{"렌트프리(무상임대)(무상임대)Months":2,"interiorSupport":"일부 인테리어 지원","freeRentDetail":"렌트프리(무상임대) 2개월 지원"},"shortSummaryLease":"성수역 도보 5분 거리 1층 리테일 상가 매물입니다."}</a:t>
-            </a:r>
-            <a:endParaRPr lang="en-US" sz="930" dirty="0"/>
-          </a:p>
-        </p:txBody>
-      </p:sp>
-      <p:sp>
-        <p:nvSpPr>
-          <p:cNvPr id="14" name="Text 12"/>
+          <p:cNvPr id="10" name="Text 8"/>
           <p:cNvSpPr/>
           <p:nvPr/>
         </p:nvSpPr>
@@ -4835,7 +4801,7 @@
       </p:sp>
       <p:sp>
         <p:nvSpPr>
-          <p:cNvPr id="15" name="Text 13"/>
+          <p:cNvPr id="11" name="Text 9"/>
           <p:cNvSpPr/>
           <p:nvPr/>
         </p:nvSpPr>
@@ -6827,6 +6793,434 @@
     <p:bg>
       <p:bgPr>
         <a:solidFill>
+          <a:srgbClr val="FFFFFF"/>
+        </a:solidFill>
+      </p:bgPr>
+    </p:bg>
+    <p:spTree>
+      <p:nvGrpSpPr>
+        <p:cNvPr id="1" name=""/>
+        <p:cNvGrpSpPr/>
+        <p:nvPr/>
+      </p:nvGrpSpPr>
+      <p:grpSpPr>
+        <a:xfrm>
+          <a:off x="0" y="0"/>
+          <a:ext cx="0" cy="0"/>
+          <a:chOff x="0" y="0"/>
+          <a:chExt cx="0" cy="0"/>
+        </a:xfrm>
+      </p:grpSpPr>
+      <p:sp>
+        <p:nvSpPr>
+          <p:cNvPr id="2" name="Shape 0"/>
+          <p:cNvSpPr/>
+          <p:nvPr/>
+        </p:nvSpPr>
+        <p:spPr>
+          <a:xfrm>
+            <a:off x="566928" y="457200"/>
+            <a:ext cx="384048" cy="384048"/>
+          </a:xfrm>
+          <a:prstGeom prst="ellipse">
+            <a:avLst/>
+          </a:prstGeom>
+          <a:solidFill>
+            <a:srgbClr val="B98A2E"/>
+          </a:solidFill>
+          <a:ln/>
+        </p:spPr>
+      </p:sp>
+      <p:sp>
+        <p:nvSpPr>
+          <p:cNvPr id="3" name="Text 1"/>
+          <p:cNvSpPr/>
+          <p:nvPr/>
+        </p:nvSpPr>
+        <p:spPr>
+          <a:xfrm>
+            <a:off x="566928" y="457200"/>
+            <a:ext cx="384048" cy="384048"/>
+          </a:xfrm>
+          <a:prstGeom prst="rect">
+            <a:avLst/>
+          </a:prstGeom>
+          <a:noFill/>
+          <a:ln/>
+        </p:spPr>
+        <p:txBody>
+          <a:bodyPr wrap="square" lIns="0" tIns="0" rIns="0" bIns="0" rtlCol="0" anchor="ctr"/>
+          <a:lstStyle/>
+          <a:p>
+            <a:pPr algn="ctr" indent="0" marL="0">
+              <a:buNone/>
+            </a:pPr>
+            <a:r>
+              <a:rPr lang="en-US" sz="1300" b="1" dirty="0">
+                <a:solidFill>
+                  <a:srgbClr val="FFFFFF"/>
+                </a:solidFill>
+                <a:latin typeface="Arial" pitchFamily="34" charset="0"/>
+                <a:ea typeface="Arial" pitchFamily="34" charset="-122"/>
+                <a:cs typeface="Arial" pitchFamily="34" charset="-120"/>
+              </a:rPr>
+              <a:t>13</a:t>
+            </a:r>
+            <a:endParaRPr lang="en-US" sz="1300" dirty="0"/>
+          </a:p>
+        </p:txBody>
+      </p:sp>
+      <p:sp>
+        <p:nvSpPr>
+          <p:cNvPr id="4" name="Text 2"/>
+          <p:cNvSpPr/>
+          <p:nvPr/>
+        </p:nvSpPr>
+        <p:spPr>
+          <a:xfrm>
+            <a:off x="1133856" y="457200"/>
+            <a:ext cx="10490911" cy="182880"/>
+          </a:xfrm>
+          <a:prstGeom prst="rect">
+            <a:avLst/>
+          </a:prstGeom>
+          <a:noFill/>
+          <a:ln/>
+        </p:spPr>
+        <p:txBody>
+          <a:bodyPr wrap="square" lIns="0" tIns="0" rIns="0" bIns="0" rtlCol="0" anchor="ctr"/>
+          <a:lstStyle/>
+          <a:p>
+            <a:pPr indent="0" marL="0">
+              <a:buNone/>
+            </a:pPr>
+            <a:r>
+              <a:rPr lang="en-US" sz="950" b="1" spc="200" kern="0" dirty="0">
+                <a:solidFill>
+                  <a:srgbClr val="B98A2E"/>
+                </a:solidFill>
+                <a:latin typeface="Arial" pitchFamily="34" charset="0"/>
+                <a:ea typeface="Arial" pitchFamily="34" charset="-122"/>
+                <a:cs typeface="Arial" pitchFamily="34" charset="-120"/>
+              </a:rPr>
+              <a:t>Process</a:t>
+            </a:r>
+            <a:endParaRPr lang="en-US" sz="950" dirty="0"/>
+          </a:p>
+        </p:txBody>
+      </p:sp>
+      <p:sp>
+        <p:nvSpPr>
+          <p:cNvPr id="5" name="Text 3"/>
+          <p:cNvSpPr/>
+          <p:nvPr/>
+        </p:nvSpPr>
+        <p:spPr>
+          <a:xfrm>
+            <a:off x="1133856" y="640080"/>
+            <a:ext cx="10490911" cy="365760"/>
+          </a:xfrm>
+          <a:prstGeom prst="rect">
+            <a:avLst/>
+          </a:prstGeom>
+          <a:noFill/>
+          <a:ln/>
+        </p:spPr>
+        <p:txBody>
+          <a:bodyPr wrap="square" lIns="0" tIns="0" rIns="0" bIns="0" rtlCol="0" anchor="ctr"/>
+          <a:lstStyle/>
+          <a:p>
+            <a:pPr indent="0" marL="0">
+              <a:buNone/>
+            </a:pPr>
+            <a:r>
+              <a:rPr lang="en-US" sz="2300" b="1" dirty="0">
+                <a:solidFill>
+                  <a:srgbClr val="10161F"/>
+                </a:solidFill>
+                <a:latin typeface="Pretendard" pitchFamily="34" charset="0"/>
+                <a:ea typeface="Pretendard" pitchFamily="34" charset="-122"/>
+                <a:cs typeface="Pretendard" pitchFamily="34" charset="-120"/>
+              </a:rPr>
+              <a:t>검토 후 다음 단계는 무엇인가</a:t>
+            </a:r>
+            <a:endParaRPr lang="en-US" sz="2300" dirty="0"/>
+          </a:p>
+        </p:txBody>
+      </p:sp>
+      <p:sp>
+        <p:nvSpPr>
+          <p:cNvPr id="6" name="Shape 4"/>
+          <p:cNvSpPr/>
+          <p:nvPr/>
+        </p:nvSpPr>
+        <p:spPr>
+          <a:xfrm>
+            <a:off x="566928" y="1572768"/>
+            <a:ext cx="11057839" cy="3200400"/>
+          </a:xfrm>
+          <a:prstGeom prst="roundRect">
+            <a:avLst>
+              <a:gd name="adj" fmla="val 1714"/>
+            </a:avLst>
+          </a:prstGeom>
+          <a:solidFill>
+            <a:srgbClr val="F7FAFC"/>
+          </a:solidFill>
+          <a:ln w="6350">
+            <a:solidFill>
+              <a:srgbClr val="CBD5E0"/>
+            </a:solidFill>
+            <a:prstDash val="solid"/>
+          </a:ln>
+        </p:spPr>
+      </p:sp>
+      <p:sp>
+        <p:nvSpPr>
+          <p:cNvPr id="7" name="Shape 5"/>
+          <p:cNvSpPr/>
+          <p:nvPr/>
+        </p:nvSpPr>
+        <p:spPr>
+          <a:xfrm>
+            <a:off x="786384" y="1792224"/>
+            <a:ext cx="438912" cy="438912"/>
+          </a:xfrm>
+          <a:prstGeom prst="ellipse">
+            <a:avLst/>
+          </a:prstGeom>
+          <a:solidFill>
+            <a:srgbClr val="B98A2E"/>
+          </a:solidFill>
+          <a:ln/>
+        </p:spPr>
+      </p:sp>
+      <p:sp>
+        <p:nvSpPr>
+          <p:cNvPr id="8" name="Text 6"/>
+          <p:cNvSpPr/>
+          <p:nvPr/>
+        </p:nvSpPr>
+        <p:spPr>
+          <a:xfrm>
+            <a:off x="786384" y="1792224"/>
+            <a:ext cx="438912" cy="438912"/>
+          </a:xfrm>
+          <a:prstGeom prst="rect">
+            <a:avLst/>
+          </a:prstGeom>
+          <a:noFill/>
+          <a:ln/>
+        </p:spPr>
+        <p:txBody>
+          <a:bodyPr wrap="square" lIns="0" tIns="0" rIns="0" bIns="0" rtlCol="0" anchor="ctr"/>
+          <a:lstStyle/>
+          <a:p>
+            <a:pPr algn="ctr" indent="0" marL="0">
+              <a:buNone/>
+            </a:pPr>
+            <a:r>
+              <a:rPr lang="en-US" sz="1400" b="1" dirty="0">
+                <a:solidFill>
+                  <a:srgbClr val="FFFFFF"/>
+                </a:solidFill>
+                <a:latin typeface="Arial" pitchFamily="34" charset="0"/>
+                <a:ea typeface="Arial" pitchFamily="34" charset="-122"/>
+                <a:cs typeface="Arial" pitchFamily="34" charset="-120"/>
+              </a:rPr>
+              <a:t>01</a:t>
+            </a:r>
+            <a:endParaRPr lang="en-US" sz="1400" dirty="0"/>
+          </a:p>
+        </p:txBody>
+      </p:sp>
+      <p:sp>
+        <p:nvSpPr>
+          <p:cNvPr id="9" name="Text 7"/>
+          <p:cNvSpPr/>
+          <p:nvPr/>
+        </p:nvSpPr>
+        <p:spPr>
+          <a:xfrm>
+            <a:off x="786384" y="2304288"/>
+            <a:ext cx="10618927" cy="365760"/>
+          </a:xfrm>
+          <a:prstGeom prst="rect">
+            <a:avLst/>
+          </a:prstGeom>
+          <a:noFill/>
+          <a:ln/>
+        </p:spPr>
+        <p:txBody>
+          <a:bodyPr wrap="square" rtlCol="0" anchor="ctr"/>
+          <a:lstStyle/>
+          <a:p>
+            <a:pPr indent="0" marL="0">
+              <a:buNone/>
+            </a:pPr>
+            <a:r>
+              <a:rPr lang="en-US" sz="1600" b="1" dirty="0">
+                <a:solidFill>
+                  <a:srgbClr val="10161F"/>
+                </a:solidFill>
+                <a:latin typeface="Pretendard" pitchFamily="34" charset="0"/>
+                <a:ea typeface="Pretendard" pitchFamily="34" charset="-122"/>
+                <a:cs typeface="Pretendard" pitchFamily="34" charset="-120"/>
+              </a:rPr>
+              <a:t>1단계</a:t>
+            </a:r>
+            <a:endParaRPr lang="en-US" sz="1600" dirty="0"/>
+          </a:p>
+        </p:txBody>
+      </p:sp>
+      <p:sp>
+        <p:nvSpPr>
+          <p:cNvPr id="10" name="Text 8"/>
+          <p:cNvSpPr/>
+          <p:nvPr/>
+        </p:nvSpPr>
+        <p:spPr>
+          <a:xfrm>
+            <a:off x="786384" y="2761488"/>
+            <a:ext cx="10618927" cy="1828800"/>
+          </a:xfrm>
+          <a:prstGeom prst="rect">
+            <a:avLst/>
+          </a:prstGeom>
+          <a:noFill/>
+          <a:ln/>
+        </p:spPr>
+        <p:txBody>
+          <a:bodyPr wrap="square" rtlCol="0" anchor="t"/>
+          <a:lstStyle/>
+          <a:p>
+            <a:pPr indent="0" marL="0">
+              <a:buNone/>
+            </a:pPr>
+            <a:r>
+              <a:rPr lang="en-US" sz="1100" dirty="0">
+                <a:solidFill>
+                  <a:srgbClr val="10161F"/>
+                </a:solidFill>
+                <a:latin typeface="Pretendard" pitchFamily="34" charset="0"/>
+                <a:ea typeface="Pretendard" pitchFamily="34" charset="-122"/>
+                <a:cs typeface="Pretendard" pitchFamily="34" charset="-120"/>
+              </a:rPr>
+              <a:t>{"ok"</a:t>
+            </a:r>
+            <a:endParaRPr lang="en-US" sz="1100" dirty="0"/>
+          </a:p>
+          <a:p>
+            <a:pPr indent="0" marL="0">
+              <a:buNone/>
+            </a:pPr>
+            <a:r>
+              <a:rPr lang="en-US" sz="1100" dirty="0">
+                <a:solidFill>
+                  <a:srgbClr val="10161F"/>
+                </a:solidFill>
+                <a:latin typeface="Pretendard" pitchFamily="34" charset="0"/>
+                <a:ea typeface="Pretendard" pitchFamily="34" charset="-122"/>
+                <a:cs typeface="Pretendard" pitchFamily="34" charset="-120"/>
+              </a:rPr>
+              <a:t>true,"mocked":true,"extractedFields":{"area_signal":"역삼","asset_type":"[건물명 비공개]","price_band":"300억","size_signal":"3000평(약 9917.4㎡)"},"extractedFacts":{"region":"역삼","exactAddressCandidate":"역삼동 742-1","assetType":"[건물명 비공개]","priceText":"300억","sizeText":"3000평(약 9917.4㎡)","currentUse":"오피스","currentUseSignal":"근린생활시설","leaseSignal":"임대중","vacancySignal":"공실없음","tenantNames":["쿠팡","네이버"],"unitRentTexts":["301호: 1500만"],"sellerMotivationText":"자산 효율화","brokerNotes":["역세권 도보 3분 이내 매물"]},"detectedSensitiveFields":["exact_address","tenant_name"],"ambiguousFields":[],"warnings":[],"areaSignal":"역삼","assetType":"[건물명 비공개]","priceBand":"300억","sizeSignal":"3000평(약 9917.4㎡)","dealType":"매각","buildingName":"역삼 [건물명 비공개]","exactAddress":"역삼동 742-1","totalFloorArea":9917.3,"buildYear":2015,"currentUseSignal":"근린생활시설","vacancySignal":"공실 없음","fitSummary":"역세권 도보 3분 이내 근생 빌딩으로 시행/사옥 매입에 최적화","cautionSummary":"주요 임차인 만기 조율 필요","hiddenFields":["exact_address","seller_motivation"],"confidence":{"areaSignal":"confirmed","assetType":"confirmed","priceBand":"ai_hypothesis","fitSummary":"ai_hypothesis"},"missingData":["sizeSignal"],"boundaryNote":"본 자료는 실거래 통계 기반 참고치입니다.","buyerType":"법인 사옥형","budgetRange":{"min":50,"max":80,"display":"50억~80억"},"preferredRegions":["강남","성수"],"assetTypes":["[건물명 비공개]","사옥용"],"purchasePurpose":"사옥용 매입","mustHave":["역세권 도보 3분 이내","주차"],"niceToHave":["테라스","루프탑"],"riskTolerance":"medium","financingNote":"자본금 50% 준비","missingQuestions":["구체적인 입주 시기가 언제인가요?","선호하는 수익률이 있나요?"],"privacyNotes":["연락처 비공개"],"fitReasons":["매수자 예산(50-80억)에 부합하는 매물입니다.","요청하신 성수/강남 권역에 해당합니다."],"cautionReasons":["요청한 용도와 달리 명도 협의가 다소 필요합니다."],"recommendedNextAction":"현장 답사 제안","kakaoMessage":"안녕하세요! 요청하신 조건에 부합하는 추천 매물이 있어 안내해 드립니다. 확인해보시고 피드백 부탁드립니다.","title":"강남 역삼역 역세권 도보 3분 이내 오피스 사옥용 빌딩 매각","shortSummary":"역삼역 도보 5분 거리의 준신축급 대형 [건물명 비공개]입니다.","dealPoints":["역세권 도보 3분 이내","사옥 최적"],"cautionPoints":["명도 조율 필요"],"hiddenInfoNotice":["보증금 및 지번은 인가 후 확인 가능"],"gateMessage":"G1 등급 등록이 필요합니다.","kakaoText":"강남 역삼역 오피스 빌딩 매각 안내입니다.","exactUnitCandidate":"101호","floor":"1층","areaSqmText":"150㎡","spaceType":"office","depositText":"5000만","monthlyRentText":"400만","maintenanceFeeText":"50만","availableFromText":"즉시입주","leaseTermMonthsText":"24","incentivesText":"렌트프리(무상임대) 2개월","restrictions":[],"landlordIdentity":"김성수","currentTenant":"스타트업","vacancyReason":"이전 확장","rentNegotiation":"협의 가능","region":"성수동","areaSqm":150,"deposit":5000,"monthlyRent":400,"maintenanceFee":50,"availableFrom":"즉시입주","leaseTermMonths":24,"incentives":{"렌트프리(무상임대)(무상임대)Months":2,"interiorSupport":"일부 인테리어 지원","freeRentDetail":"렌트프리(무상임대) 2개월 지원"},"shortSummaryLease":"성수역 도보 5분 거리 1층 리테일 상가 매물입니다."}</a:t>
+            </a:r>
+            <a:endParaRPr lang="en-US" sz="1100" dirty="0"/>
+          </a:p>
+        </p:txBody>
+      </p:sp>
+      <p:sp>
+        <p:nvSpPr>
+          <p:cNvPr id="11" name="Text 9"/>
+          <p:cNvSpPr/>
+          <p:nvPr/>
+        </p:nvSpPr>
+        <p:spPr>
+          <a:xfrm>
+            <a:off x="566928" y="6382512"/>
+            <a:ext cx="7315200" cy="219456"/>
+          </a:xfrm>
+          <a:prstGeom prst="rect">
+            <a:avLst/>
+          </a:prstGeom>
+          <a:noFill/>
+          <a:ln/>
+        </p:spPr>
+        <p:txBody>
+          <a:bodyPr wrap="square" lIns="0" tIns="0" rIns="0" bIns="0" rtlCol="0" anchor="ctr"/>
+          <a:lstStyle/>
+          <a:p>
+            <a:pPr indent="0" marL="0">
+              <a:buNone/>
+            </a:pPr>
+            <a:r>
+              <a:rPr lang="en-US" sz="800" dirty="0">
+                <a:solidFill>
+                  <a:srgbClr val="718096"/>
+                </a:solidFill>
+                <a:latin typeface="Pretendard" pitchFamily="34" charset="0"/>
+                <a:ea typeface="Pretendard" pitchFamily="34" charset="-122"/>
+                <a:cs typeface="Pretendard" pitchFamily="34" charset="-120"/>
+              </a:rPr>
+              <a:t>크리딜   |   </a:t>
+            </a:r>
+            <a:endParaRPr lang="en-US" sz="800" dirty="0"/>
+          </a:p>
+        </p:txBody>
+      </p:sp>
+      <p:sp>
+        <p:nvSpPr>
+          <p:cNvPr id="12" name="Text 10"/>
+          <p:cNvSpPr/>
+          <p:nvPr/>
+        </p:nvSpPr>
+        <p:spPr>
+          <a:xfrm>
+            <a:off x="10710367" y="6382512"/>
+            <a:ext cx="914400" cy="219456"/>
+          </a:xfrm>
+          <a:prstGeom prst="rect">
+            <a:avLst/>
+          </a:prstGeom>
+          <a:noFill/>
+          <a:ln/>
+        </p:spPr>
+        <p:txBody>
+          <a:bodyPr wrap="square" lIns="0" tIns="0" rIns="0" bIns="0" rtlCol="0" anchor="ctr"/>
+          <a:lstStyle/>
+          <a:p>
+            <a:pPr algn="r" indent="0" marL="0">
+              <a:buNone/>
+            </a:pPr>
+            <a:r>
+              <a:rPr lang="en-US" sz="900" b="1" dirty="0">
+                <a:solidFill>
+                  <a:srgbClr val="B98A2E"/>
+                </a:solidFill>
+                <a:latin typeface="Arial" pitchFamily="34" charset="0"/>
+                <a:ea typeface="Arial" pitchFamily="34" charset="-122"/>
+                <a:cs typeface="Arial" pitchFamily="34" charset="-120"/>
+              </a:rPr>
+              <a:t>13</a:t>
+            </a:r>
+            <a:endParaRPr lang="en-US" sz="900" dirty="0"/>
+          </a:p>
+        </p:txBody>
+      </p:sp>
+    </p:spTree>
+  </p:cSld>
+  <p:clrMapOvr>
+    <a:masterClrMapping/>
+  </p:clrMapOvr>
+</p:sld>
+</file>
+
+<file path=ppt/slides/slide16.xml><?xml version="1.0" encoding="utf-8"?>
+<p:sld xmlns:a="http://schemas.openxmlformats.org/drawingml/2006/main" xmlns:r="http://schemas.openxmlformats.org/officeDocument/2006/relationships" xmlns:p="http://schemas.openxmlformats.org/presentationml/2006/main">
+  <p:cSld name="Slide 16">
+    <p:bg>
+      <p:bgPr>
+        <a:solidFill>
           <a:srgbClr val="10161F"/>
         </a:solidFill>
       </p:bgPr>
@@ -6898,7 +7292,7 @@
                 <a:ea typeface="Arial" pitchFamily="34" charset="-122"/>
                 <a:cs typeface="Arial" pitchFamily="34" charset="-120"/>
               </a:rPr>
-              <a:t>13</a:t>
+              <a:t>14</a:t>
             </a:r>
             <a:endParaRPr lang="en-US" sz="1300" dirty="0"/>
           </a:p>
@@ -8310,7 +8704,7 @@
                 <a:ea typeface="Arial" pitchFamily="34" charset="-122"/>
                 <a:cs typeface="Arial" pitchFamily="34" charset="-120"/>
               </a:rPr>
-              <a:t>13</a:t>
+              <a:t>14</a:t>
             </a:r>
             <a:endParaRPr lang="en-US" sz="900" dirty="0"/>
           </a:p>
@@ -8324,9 +8718,9 @@
 </p:sld>
 </file>
 
-<file path=ppt/slides/slide16.xml><?xml version="1.0" encoding="utf-8"?>
+<file path=ppt/slides/slide17.xml><?xml version="1.0" encoding="utf-8"?>
 <p:sld xmlns:a="http://schemas.openxmlformats.org/drawingml/2006/main" xmlns:r="http://schemas.openxmlformats.org/officeDocument/2006/relationships" xmlns:p="http://schemas.openxmlformats.org/presentationml/2006/main">
-  <p:cSld name="Slide 16">
+  <p:cSld name="Slide 17">
     <p:bg>
       <p:bgPr>
         <a:solidFill>
@@ -8401,7 +8795,7 @@
                 <a:ea typeface="Arial" pitchFamily="34" charset="-122"/>
                 <a:cs typeface="Arial" pitchFamily="34" charset="-120"/>
               </a:rPr>
-              <a:t>14</a:t>
+              <a:t>15</a:t>
             </a:r>
             <a:endParaRPr lang="en-US" sz="1300" dirty="0"/>
           </a:p>
@@ -9035,7 +9429,7 @@
                 <a:ea typeface="Arial" pitchFamily="34" charset="-122"/>
                 <a:cs typeface="Arial" pitchFamily="34" charset="-120"/>
               </a:rPr>
-              <a:t>14</a:t>
+              <a:t>15</a:t>
             </a:r>
             <a:endParaRPr lang="en-US" sz="900" dirty="0"/>
           </a:p>
@@ -12496,130 +12890,7 @@
       </p:sp>
       <p:sp>
         <p:nvSpPr>
-          <p:cNvPr id="10" name="Shape 8"/>
-          <p:cNvSpPr/>
-          <p:nvPr/>
-        </p:nvSpPr>
-        <p:spPr>
-          <a:xfrm>
-            <a:off x="566928" y="2999232"/>
-            <a:ext cx="11057839" cy="1280160"/>
-          </a:xfrm>
-          <a:prstGeom prst="roundRect">
-            <a:avLst>
-              <a:gd name="adj" fmla="val 4286"/>
-            </a:avLst>
-          </a:prstGeom>
-          <a:solidFill>
-            <a:srgbClr val="BEE3F8"/>
-          </a:solidFill>
-          <a:ln/>
-        </p:spPr>
-      </p:sp>
-      <p:sp>
-        <p:nvSpPr>
-          <p:cNvPr id="11" name="Shape 9"/>
-          <p:cNvSpPr/>
-          <p:nvPr/>
-        </p:nvSpPr>
-        <p:spPr>
-          <a:xfrm>
-            <a:off x="566928" y="3054096"/>
-            <a:ext cx="36576" cy="1170432"/>
-          </a:xfrm>
-          <a:prstGeom prst="rect">
-            <a:avLst/>
-          </a:prstGeom>
-          <a:solidFill>
-            <a:srgbClr val="2B6CB0"/>
-          </a:solidFill>
-          <a:ln/>
-        </p:spPr>
-      </p:sp>
-      <p:sp>
-        <p:nvSpPr>
-          <p:cNvPr id="12" name="Text 10"/>
-          <p:cNvSpPr/>
-          <p:nvPr/>
-        </p:nvSpPr>
-        <p:spPr>
-          <a:xfrm>
-            <a:off x="749808" y="3108960"/>
-            <a:ext cx="10728655" cy="201168"/>
-          </a:xfrm>
-          <a:prstGeom prst="rect">
-            <a:avLst/>
-          </a:prstGeom>
-          <a:noFill/>
-          <a:ln/>
-        </p:spPr>
-        <p:txBody>
-          <a:bodyPr wrap="square" lIns="0" tIns="0" rIns="0" bIns="0" rtlCol="0" anchor="ctr"/>
-          <a:lstStyle/>
-          <a:p>
-            <a:pPr indent="0" marL="0">
-              <a:buNone/>
-            </a:pPr>
-            <a:r>
-              <a:rPr lang="en-US" sz="1050" b="1" dirty="0">
-                <a:solidFill>
-                  <a:srgbClr val="2B6CB0"/>
-                </a:solidFill>
-                <a:latin typeface="Pretendard" pitchFamily="34" charset="0"/>
-                <a:ea typeface="Pretendard" pitchFamily="34" charset="-122"/>
-                <a:cs typeface="Pretendard" pitchFamily="34" charset="-120"/>
-              </a:rPr>
-              <a:t>신축 건축 규모 요약</a:t>
-            </a:r>
-            <a:endParaRPr lang="en-US" sz="1050" dirty="0"/>
-          </a:p>
-        </p:txBody>
-      </p:sp>
-      <p:sp>
-        <p:nvSpPr>
-          <p:cNvPr id="13" name="Text 11"/>
-          <p:cNvSpPr/>
-          <p:nvPr/>
-        </p:nvSpPr>
-        <p:spPr>
-          <a:xfrm>
-            <a:off x="749808" y="3328416"/>
-            <a:ext cx="10728655" cy="877824"/>
-          </a:xfrm>
-          <a:prstGeom prst="rect">
-            <a:avLst/>
-          </a:prstGeom>
-          <a:noFill/>
-          <a:ln/>
-        </p:spPr>
-        <p:txBody>
-          <a:bodyPr wrap="square" lIns="0" tIns="0" rIns="0" bIns="0" rtlCol="0" anchor="t"/>
-          <a:lstStyle/>
-          <a:p>
-            <a:pPr indent="0" marL="0">
-              <a:lnSpc>
-                <a:spcPct val="120000"/>
-              </a:lnSpc>
-              <a:buNone/>
-            </a:pPr>
-            <a:r>
-              <a:rPr lang="en-US" sz="930" dirty="0">
-                <a:solidFill>
-                  <a:srgbClr val="10161F"/>
-                </a:solidFill>
-                <a:latin typeface="Pretendard" pitchFamily="34" charset="0"/>
-                <a:ea typeface="Pretendard" pitchFamily="34" charset="-122"/>
-                <a:cs typeface="Pretendard" pitchFamily="34" charset="-120"/>
-              </a:rPr>
-              <a:t>{"ok":true,"mocked":true,"extractedFields":{"area_signal":"역삼","asset_type":"[건물명 비공개]","price_band":"300억","size_signal":"3000평(약 9917.4㎡)"},"extractedFacts":{"region":"역삼","exactAddressCandidate":"역삼동 742-1","assetType":"[건물명 비공개]","priceText":"300억","sizeText":"3000평(약 9917.4㎡)","currentUse":"오피스","currentUseSignal":"근린생활시설","leaseSignal":"임대중","vacancySignal":"공실없음","tenantNames":["쿠팡","네이버"],"unitRentTexts":["301호: 1500만"],"sellerMotivationText":"자산 효율화","brokerNotes":["역세권 도보 3분 이내 매물"]},"detectedSensitiveFields":["exact_address","tenant_name"],"ambiguousFields":[],"warnings":[],"areaSignal":"역삼","assetType":"[건물명 비공개]","priceBand":"300억","sizeSignal":"3000평(약 9917.4㎡)","dealType":"매각","buildingName":"역삼 [건물명 비공개]","exactAddress":"역삼동 742-1","totalFloorArea":9917.3,"buildYear":2015,"currentUseSignal":"근린생활시설","vacancySignal":"공실 없음","fitSummary":"역세권 도보 3분 이내 근생 빌딩으로 시행/사옥 매입에 최적화","cautionSummary":"주요 임차인 만기 조율 필요","hiddenFields":["exact_address","seller_motivation"],"confidence":{"areaSignal":"confirmed","assetType":"confirmed","priceBand":"ai_hypothesis","fitSummary":"ai_hypothesis"},"missingData":["sizeSignal"],"boundaryNote":"본 자료는 실거래 통계 기반 참고치입니다.","buyerType":"법인 사옥형","budgetRange":{"min":50,"max":80,"display":"50억~80억"},"preferredRegions":["강남","성수"],"assetTypes":["[건물명 비공개]","사옥용"],"purchasePurpose":"사옥용 매입","mustHave":["역세권 도보 3분 이내","주차"],"niceToHave":["테라스","루프탑"],"riskTolerance":"medium","financingNote":"자본금 50% 준비","missingQuestions":["구체적인 입주 시기가 언제인가요?","선호하는 수익률이 있나요?"],"privacyNotes":["연락처 비공개"],"fitReasons":["매수자 예산(50-80억)에 부합하는 매물입니다.","요청하신 성수/강남 권역에 해당합니다."],"cautionReasons":["요청한 용도와 달리 명도 협의가 다소 필요합니다."],"recommendedNextAction":"현장 답사 제안","kakaoMessage":"안녕하세요! 요청하신 조건에 부합하는 추천 매물이 있어 안내해 드립니다. 확인해보시고 피드백 부탁드립니다.","title":"강남 역삼역 역세권 도보 3분 이내 오피스 사옥용 빌딩 매각","shortSummary":"역삼역 도보 5분 거리의 준신축급 대형 [건물명 비공개]입니다.","dealPoints":["역세권 도보 3분 이내","사옥 최적"],"cautionPoints":["명도 조율 필요"],"hiddenInfoNotice":["보증금 및 지번은 인가 후 확인 가능"],"gateMessage":"G1 등급 등록이 필요합니다.","kakaoText":"강남 역삼역 오피스 빌딩 매각 안내입니다.","exactUnitCandidate":"101호","floor":"1층","areaSqmText":"150㎡","spaceType":"office","depositText":"5000만","monthlyRentText":"400만","maintenanceFeeText":"50만","availableFromText":"즉시입주","leaseTermMonthsText":"24","incentivesText":"렌트프리(무상임대) 2개월","restrictions":[],"landlordIdentity":"김성수","currentTenant":"스타트업","vacancyReason":"이전 확장","rentNegotiation":"협의 가능","region":"성수동","areaSqm":150,"deposit":5000,"monthlyRent":400,"maintenanceFee":50,"availableFrom":"즉시입주","leaseTermMonths":24,"incentives":{"렌트프리(무상임대)(무상임대)Months":2,"interiorSupport":"일부 인테리어 지원","freeRentDetail":"렌트프리(무상임대) 2개월 지원"},"shortSummaryLease":"성수역 도보 5분 거리 1층 리테일 상가 매물입니다."}</a:t>
-            </a:r>
-            <a:endParaRPr lang="en-US" sz="930" dirty="0"/>
-          </a:p>
-        </p:txBody>
-      </p:sp>
-      <p:sp>
-        <p:nvSpPr>
-          <p:cNvPr id="14" name="Text 12"/>
+          <p:cNvPr id="10" name="Text 8"/>
           <p:cNvSpPr/>
           <p:nvPr/>
         </p:nvSpPr>
@@ -12658,7 +12929,7 @@
       </p:sp>
       <p:sp>
         <p:nvSpPr>
-          <p:cNvPr id="15" name="Text 13"/>
+          <p:cNvPr id="11" name="Text 9"/>
           <p:cNvSpPr/>
           <p:nvPr/>
         </p:nvSpPr>
